--- a/ulesie_sebastien_2_presentation_082026.pptx
+++ b/ulesie_sebastien_2_presentation_082026.pptx
@@ -5,10 +5,10 @@
     <p:sldMasterId id="2147483712" r:id="rId1"/>
   </p:sldMasterIdLst>
   <p:notesMasterIdLst>
-    <p:notesMasterId r:id="rId11"/>
+    <p:notesMasterId r:id="rId17"/>
   </p:notesMasterIdLst>
   <p:handoutMasterIdLst>
-    <p:handoutMasterId r:id="rId12"/>
+    <p:handoutMasterId r:id="rId18"/>
   </p:handoutMasterIdLst>
   <p:sldIdLst>
     <p:sldId id="257" r:id="rId2"/>
@@ -16,10 +16,16 @@
     <p:sldId id="259" r:id="rId4"/>
     <p:sldId id="260" r:id="rId5"/>
     <p:sldId id="344" r:id="rId6"/>
-    <p:sldId id="332" r:id="rId7"/>
-    <p:sldId id="338" r:id="rId8"/>
-    <p:sldId id="343" r:id="rId9"/>
-    <p:sldId id="299" r:id="rId10"/>
+    <p:sldId id="345" r:id="rId7"/>
+    <p:sldId id="346" r:id="rId8"/>
+    <p:sldId id="347" r:id="rId9"/>
+    <p:sldId id="348" r:id="rId10"/>
+    <p:sldId id="349" r:id="rId11"/>
+    <p:sldId id="350" r:id="rId12"/>
+    <p:sldId id="332" r:id="rId13"/>
+    <p:sldId id="338" r:id="rId14"/>
+    <p:sldId id="343" r:id="rId15"/>
+    <p:sldId id="299" r:id="rId16"/>
   </p:sldIdLst>
   <p:sldSz cx="12192000" cy="6858000"/>
   <p:notesSz cx="6858000" cy="9144000"/>
@@ -6642,7 +6648,7 @@
             <a:pPr rtl="0"/>
             <a:fld id="{2FC74BDE-6627-49B6-90F1-0334E723F64C}" type="datetime1">
               <a:rPr lang="fr-FR" smtClean="0"/>
-              <a:t>12/08/2026</a:t>
+              <a:t>16/08/2026</a:t>
             </a:fld>
             <a:endParaRPr lang="en-US" dirty="0"/>
           </a:p>
@@ -6812,7 +6818,7 @@
             <a:pPr rtl="0"/>
             <a:fld id="{F28DAF60-E56A-4648-8936-22D801672B6C}" type="datetime1">
               <a:rPr lang="fr-FR" smtClean="0"/>
-              <a:t>12/08/2026</a:t>
+              <a:t>16/08/2026</a:t>
             </a:fld>
             <a:endParaRPr lang="en-US"/>
           </a:p>
@@ -7333,7 +7339,7 @@
             <a:pPr rtl="0"/>
             <a:fld id="{E641DF6C-ECED-4BD8-8025-73323DD5D35C}" type="datetime1">
               <a:rPr lang="fr-FR" smtClean="0"/>
-              <a:t>12/08/2026</a:t>
+              <a:t>16/08/2026</a:t>
             </a:fld>
             <a:endParaRPr lang="en-US" dirty="0"/>
           </a:p>
@@ -7540,7 +7546,7 @@
             <a:pPr rtl="0"/>
             <a:fld id="{1E5B03D9-FC89-4784-BD60-336471BA7724}" type="datetime1">
               <a:rPr lang="fr-FR" smtClean="0"/>
-              <a:t>12/08/2026</a:t>
+              <a:t>16/08/2026</a:t>
             </a:fld>
             <a:endParaRPr lang="en-US" dirty="0"/>
           </a:p>
@@ -7934,7 +7940,7 @@
             <a:pPr rtl="0"/>
             <a:fld id="{D0216CB3-B929-446C-876F-83C9B86D9FDE}" type="datetime1">
               <a:rPr lang="fr-FR" smtClean="0"/>
-              <a:t>12/08/2026</a:t>
+              <a:t>16/08/2026</a:t>
             </a:fld>
             <a:endParaRPr lang="en-US" dirty="0"/>
           </a:p>
@@ -8136,7 +8142,7 @@
             <a:pPr rtl="0"/>
             <a:fld id="{22897033-9A55-4DAC-991D-1FF1921C78B7}" type="datetime1">
               <a:rPr lang="fr-FR" smtClean="0"/>
-              <a:t>12/08/2026</a:t>
+              <a:t>16/08/2026</a:t>
             </a:fld>
             <a:endParaRPr lang="en-US" dirty="0"/>
           </a:p>
@@ -8459,7 +8465,7 @@
             <a:pPr rtl="0"/>
             <a:fld id="{A1255F31-5DB3-4925-BA87-822F5B17A2F1}" type="datetime1">
               <a:rPr lang="fr-FR" smtClean="0"/>
-              <a:t>12/08/2026</a:t>
+              <a:t>16/08/2026</a:t>
             </a:fld>
             <a:endParaRPr lang="en-US" dirty="0"/>
           </a:p>
@@ -8716,7 +8722,7 @@
             <a:pPr rtl="0"/>
             <a:fld id="{7E4EF44C-5F50-4A80-A957-57B3338337C0}" type="datetime1">
               <a:rPr lang="fr-FR" smtClean="0"/>
-              <a:t>12/08/2026</a:t>
+              <a:t>16/08/2026</a:t>
             </a:fld>
             <a:endParaRPr lang="en-US" dirty="0"/>
           </a:p>
@@ -9142,7 +9148,7 @@
             <a:pPr rtl="0"/>
             <a:fld id="{B2D0F46D-59FD-4484-924E-E79DD516B5ED}" type="datetime1">
               <a:rPr lang="fr-FR" smtClean="0"/>
-              <a:t>12/08/2026</a:t>
+              <a:t>16/08/2026</a:t>
             </a:fld>
             <a:endParaRPr lang="en-US" dirty="0"/>
           </a:p>
@@ -9269,7 +9275,7 @@
             <a:pPr rtl="0"/>
             <a:fld id="{0FAEC910-4AAA-42A1-A49C-7DDC64BC53C6}" type="datetime1">
               <a:rPr lang="fr-FR" smtClean="0"/>
-              <a:t>12/08/2026</a:t>
+              <a:t>16/08/2026</a:t>
             </a:fld>
             <a:endParaRPr lang="en-US" dirty="0"/>
           </a:p>
@@ -9367,7 +9373,7 @@
             <a:pPr rtl="0"/>
             <a:fld id="{ACEC98BE-FCE2-445F-8146-3A7F8CC3881D}" type="datetime1">
               <a:rPr lang="fr-FR" smtClean="0"/>
-              <a:t>12/08/2026</a:t>
+              <a:t>16/08/2026</a:t>
             </a:fld>
             <a:endParaRPr lang="en-US" dirty="0"/>
           </a:p>
@@ -9755,7 +9761,7 @@
             <a:pPr rtl="0"/>
             <a:fld id="{6D0953DD-A6BD-427D-B7A8-BDE378B2E678}" type="datetime1">
               <a:rPr lang="fr-FR" smtClean="0"/>
-              <a:t>12/08/2026</a:t>
+              <a:t>16/08/2026</a:t>
             </a:fld>
             <a:endParaRPr lang="en-US" dirty="0"/>
           </a:p>
@@ -10053,7 +10059,7 @@
             <a:pPr rtl="0"/>
             <a:fld id="{47E77B56-6788-4F40-A65E-12AFEB3AC095}" type="datetime1">
               <a:rPr lang="fr-FR" smtClean="0"/>
-              <a:t>12/08/2026</a:t>
+              <a:t>16/08/2026</a:t>
             </a:fld>
             <a:endParaRPr lang="en-US" dirty="0"/>
           </a:p>
@@ -10271,7 +10277,7 @@
             <a:pPr rtl="0"/>
             <a:fld id="{E69A0D1A-B1A6-4A33-B3AE-513EF3B4A7E7}" type="datetime1">
               <a:rPr lang="fr-FR" smtClean="0"/>
-              <a:t>12/08/2026</a:t>
+              <a:t>16/08/2026</a:t>
             </a:fld>
             <a:endParaRPr lang="en-US" dirty="0"/>
           </a:p>
@@ -11582,7 +11588,7 @@
 </p:sld>
 </file>
 
-<file path=ppt/slides/slide2.xml><?xml version="1.0" encoding="utf-8"?>
+<file path=ppt/slides/slide10.xml><?xml version="1.0" encoding="utf-8"?>
 <p:sld xmlns:a="http://schemas.openxmlformats.org/drawingml/2006/main" xmlns:r="http://schemas.openxmlformats.org/officeDocument/2006/relationships" xmlns:p="http://schemas.openxmlformats.org/presentationml/2006/main">
   <p:cSld>
     <p:spTree>
@@ -11604,7 +11610,7 @@
           <p:cNvPr id="2" name="Titre 1">
             <a:extLst>
               <a:ext uri="{FF2B5EF4-FFF2-40B4-BE49-F238E27FC236}">
-                <a16:creationId xmlns:a16="http://schemas.microsoft.com/office/drawing/2014/main" id="{D90581BB-D273-2748-59E2-5B1D678D7EE0}"/>
+                <a16:creationId xmlns:a16="http://schemas.microsoft.com/office/drawing/2014/main" id="{C4DFE391-4CF0-758A-E7F4-4B4C889FF70A}"/>
               </a:ext>
             </a:extLst>
           </p:cNvPr>
@@ -11622,162 +11628,7 @@
           <a:p>
             <a:r>
               <a:rPr lang="fr-FR" dirty="0"/>
-              <a:t>Sommaire</a:t>
-            </a:r>
-          </a:p>
-        </p:txBody>
-      </p:sp>
-      <p:graphicFrame>
-        <p:nvGraphicFramePr>
-          <p:cNvPr id="5" name="Espace réservé du contenu 4">
-            <a:extLst>
-              <a:ext uri="{FF2B5EF4-FFF2-40B4-BE49-F238E27FC236}">
-                <a16:creationId xmlns:a16="http://schemas.microsoft.com/office/drawing/2014/main" id="{C0FBDBC2-024B-60B6-BEE4-9D4312913FE4}"/>
-              </a:ext>
-            </a:extLst>
-          </p:cNvPr>
-          <p:cNvGraphicFramePr>
-            <a:graphicFrameLocks noGrp="1"/>
-          </p:cNvGraphicFramePr>
-          <p:nvPr>
-            <p:ph idx="1"/>
-            <p:extLst>
-              <p:ext uri="{D42A27DB-BD31-4B8C-83A1-F6EECF244321}">
-                <p14:modId xmlns:p14="http://schemas.microsoft.com/office/powerpoint/2010/main" val="468638535"/>
-              </p:ext>
-            </p:extLst>
-          </p:nvPr>
-        </p:nvGraphicFramePr>
-        <p:xfrm>
-          <a:off x="581192" y="1985811"/>
-          <a:ext cx="11348216" cy="4803228"/>
-        </p:xfrm>
-        <a:graphic>
-          <a:graphicData uri="http://schemas.openxmlformats.org/drawingml/2006/diagram">
-            <dgm:relIds xmlns:dgm="http://schemas.openxmlformats.org/drawingml/2006/diagram" xmlns:r="http://schemas.openxmlformats.org/officeDocument/2006/relationships" r:dm="rId2" r:lo="rId3" r:qs="rId4" r:cs="rId5"/>
-          </a:graphicData>
-        </a:graphic>
-      </p:graphicFrame>
-      <p:sp>
-        <p:nvSpPr>
-          <p:cNvPr id="4" name="Espace réservé de la date 3">
-            <a:extLst>
-              <a:ext uri="{FF2B5EF4-FFF2-40B4-BE49-F238E27FC236}">
-                <a16:creationId xmlns:a16="http://schemas.microsoft.com/office/drawing/2014/main" id="{AFB99B3D-02B8-72CA-5973-9E0DC630CA85}"/>
-              </a:ext>
-            </a:extLst>
-          </p:cNvPr>
-          <p:cNvSpPr>
-            <a:spLocks noGrp="1"/>
-          </p:cNvSpPr>
-          <p:nvPr>
-            <p:ph type="dt" sz="half" idx="10"/>
-          </p:nvPr>
-        </p:nvSpPr>
-        <p:spPr>
-          <a:xfrm>
-            <a:off x="7605951" y="6423914"/>
-            <a:ext cx="4004857" cy="365125"/>
-          </a:xfrm>
-        </p:spPr>
-        <p:txBody>
-          <a:bodyPr/>
-          <a:lstStyle/>
-          <a:p>
-            <a:pPr rtl="0"/>
-            <a:fld id="{22897033-9A55-4DAC-991D-1FF1921C78B7}" type="datetime1">
-              <a:rPr lang="fr-FR" smtClean="0"/>
-              <a:t>12/08/2026</a:t>
-            </a:fld>
-            <a:endParaRPr lang="en-US" dirty="0"/>
-          </a:p>
-        </p:txBody>
-      </p:sp>
-    </p:spTree>
-    <p:extLst>
-      <p:ext uri="{BB962C8B-B14F-4D97-AF65-F5344CB8AC3E}">
-        <p14:creationId xmlns:p14="http://schemas.microsoft.com/office/powerpoint/2010/main" val="2393101071"/>
-      </p:ext>
-    </p:extLst>
-  </p:cSld>
-  <p:clrMapOvr>
-    <a:masterClrMapping/>
-  </p:clrMapOvr>
-</p:sld>
-</file>
-
-<file path=ppt/slides/slide3.xml><?xml version="1.0" encoding="utf-8"?>
-<p:sld xmlns:a="http://schemas.openxmlformats.org/drawingml/2006/main" xmlns:r="http://schemas.openxmlformats.org/officeDocument/2006/relationships" xmlns:p="http://schemas.openxmlformats.org/presentationml/2006/main">
-  <p:cSld>
-    <p:spTree>
-      <p:nvGrpSpPr>
-        <p:cNvPr id="1" name=""/>
-        <p:cNvGrpSpPr/>
-        <p:nvPr/>
-      </p:nvGrpSpPr>
-      <p:grpSpPr>
-        <a:xfrm>
-          <a:off x="0" y="0"/>
-          <a:ext cx="0" cy="0"/>
-          <a:chOff x="0" y="0"/>
-          <a:chExt cx="0" cy="0"/>
-        </a:xfrm>
-      </p:grpSpPr>
-      <p:graphicFrame>
-        <p:nvGraphicFramePr>
-          <p:cNvPr id="7" name="Espace réservé du contenu 6">
-            <a:extLst>
-              <a:ext uri="{FF2B5EF4-FFF2-40B4-BE49-F238E27FC236}">
-                <a16:creationId xmlns:a16="http://schemas.microsoft.com/office/drawing/2014/main" id="{E28E8F6D-02FF-3D2F-AC7C-9E6FA4F040E4}"/>
-              </a:ext>
-            </a:extLst>
-          </p:cNvPr>
-          <p:cNvGraphicFramePr>
-            <a:graphicFrameLocks noGrp="1"/>
-          </p:cNvGraphicFramePr>
-          <p:nvPr>
-            <p:ph idx="1"/>
-            <p:extLst>
-              <p:ext uri="{D42A27DB-BD31-4B8C-83A1-F6EECF244321}">
-                <p14:modId xmlns:p14="http://schemas.microsoft.com/office/powerpoint/2010/main" val="890522826"/>
-              </p:ext>
-            </p:extLst>
-          </p:nvPr>
-        </p:nvGraphicFramePr>
-        <p:xfrm>
-          <a:off x="1030794" y="833616"/>
-          <a:ext cx="9503279" cy="6991889"/>
-        </p:xfrm>
-        <a:graphic>
-          <a:graphicData uri="http://schemas.openxmlformats.org/drawingml/2006/diagram">
-            <dgm:relIds xmlns:dgm="http://schemas.openxmlformats.org/drawingml/2006/diagram" xmlns:r="http://schemas.openxmlformats.org/officeDocument/2006/relationships" r:dm="rId2" r:lo="rId3" r:qs="rId4" r:cs="rId5"/>
-          </a:graphicData>
-        </a:graphic>
-      </p:graphicFrame>
-      <p:sp>
-        <p:nvSpPr>
-          <p:cNvPr id="2" name="Titre 1">
-            <a:extLst>
-              <a:ext uri="{FF2B5EF4-FFF2-40B4-BE49-F238E27FC236}">
-                <a16:creationId xmlns:a16="http://schemas.microsoft.com/office/drawing/2014/main" id="{4D5943B5-2F35-F9C9-051D-7DF4E3212622}"/>
-              </a:ext>
-            </a:extLst>
-          </p:cNvPr>
-          <p:cNvSpPr>
-            <a:spLocks noGrp="1"/>
-          </p:cNvSpPr>
-          <p:nvPr>
-            <p:ph type="title"/>
-          </p:nvPr>
-        </p:nvSpPr>
-        <p:spPr/>
-        <p:txBody>
-          <a:bodyPr/>
-          <a:lstStyle/>
-          <a:p>
-            <a:r>
-              <a:rPr lang="fr-FR" dirty="0"/>
-              <a:t>1 - Contexte et objectif</a:t>
+              <a:t>8. Qualité des données</a:t>
             </a:r>
           </a:p>
         </p:txBody>
@@ -11787,7 +11638,7 @@
           <p:cNvPr id="4" name="Espace réservé de la date 3">
             <a:extLst>
               <a:ext uri="{FF2B5EF4-FFF2-40B4-BE49-F238E27FC236}">
-                <a16:creationId xmlns:a16="http://schemas.microsoft.com/office/drawing/2014/main" id="{73B45894-BF0A-B7E8-B359-57B63E483EA9}"/>
+                <a16:creationId xmlns:a16="http://schemas.microsoft.com/office/drawing/2014/main" id="{6D71A474-61E5-3615-DC06-7E7E4D47E911}"/>
               </a:ext>
             </a:extLst>
           </p:cNvPr>
@@ -11806,16 +11657,203 @@
             <a:pPr rtl="0"/>
             <a:fld id="{22897033-9A55-4DAC-991D-1FF1921C78B7}" type="datetime1">
               <a:rPr lang="fr-FR" smtClean="0"/>
-              <a:t>12/08/2026</a:t>
+              <a:t>16/08/2026</a:t>
             </a:fld>
             <a:endParaRPr lang="en-US" dirty="0"/>
+          </a:p>
+        </p:txBody>
+      </p:sp>
+      <p:pic>
+        <p:nvPicPr>
+          <p:cNvPr id="5" name="Picture 3" descr="quality_tests.png">
+            <a:extLst>
+              <a:ext uri="{FF2B5EF4-FFF2-40B4-BE49-F238E27FC236}">
+                <a16:creationId xmlns:a16="http://schemas.microsoft.com/office/drawing/2014/main" id="{7B819B51-3050-BE80-18B4-C6C43577731E}"/>
+              </a:ext>
+            </a:extLst>
+          </p:cNvPr>
+          <p:cNvPicPr>
+            <a:picLocks noGrp="1" noChangeAspect="1"/>
+          </p:cNvPicPr>
+          <p:nvPr>
+            <p:ph idx="1"/>
+          </p:nvPr>
+        </p:nvPicPr>
+        <p:blipFill>
+          <a:blip r:embed="rId2"/>
+          <a:stretch>
+            <a:fillRect/>
+          </a:stretch>
+        </p:blipFill>
+        <p:spPr>
+          <a:xfrm>
+            <a:off x="794273" y="2437908"/>
+            <a:ext cx="5511500" cy="3438973"/>
+          </a:xfrm>
+          <a:prstGeom prst="rect">
+            <a:avLst/>
+          </a:prstGeom>
+        </p:spPr>
+      </p:pic>
+      <p:sp>
+        <p:nvSpPr>
+          <p:cNvPr id="6" name="TextBox 4">
+            <a:extLst>
+              <a:ext uri="{FF2B5EF4-FFF2-40B4-BE49-F238E27FC236}">
+                <a16:creationId xmlns:a16="http://schemas.microsoft.com/office/drawing/2014/main" id="{BE9B2966-6CBF-E60C-08A0-38FA33559832}"/>
+              </a:ext>
+            </a:extLst>
+          </p:cNvPr>
+          <p:cNvSpPr txBox="1"/>
+          <p:nvPr/>
+        </p:nvSpPr>
+        <p:spPr>
+          <a:xfrm>
+            <a:off x="7038808" y="1684468"/>
+            <a:ext cx="4572000" cy="3200400"/>
+          </a:xfrm>
+          <a:prstGeom prst="rect">
+            <a:avLst/>
+          </a:prstGeom>
+          <a:noFill/>
+        </p:spPr>
+        <p:txBody>
+          <a:bodyPr wrap="square" lIns="36576" tIns="18288" rIns="36576" bIns="18288">
+            <a:spAutoFit/>
+          </a:bodyPr>
+          <a:lstStyle/>
+          <a:p>
+            <a:pPr algn="l">
+              <a:defRPr sz="1600" b="0">
+                <a:solidFill>
+                  <a:srgbClr val="23313D"/>
+                </a:solidFill>
+                <a:latin typeface="Aptos"/>
+              </a:defRPr>
+            </a:pPr>
+            <a:r>
+              <a:rPr dirty="0"/>
+              <a:t>• </a:t>
+            </a:r>
+            <a:r>
+              <a:rPr dirty="0" err="1"/>
+              <a:t>not_null</a:t>
+            </a:r>
+            <a:r>
+              <a:rPr dirty="0"/>
+              <a:t> : </a:t>
+            </a:r>
+            <a:r>
+              <a:rPr dirty="0" err="1"/>
+              <a:t>identifiants</a:t>
+            </a:r>
+            <a:r>
+              <a:rPr dirty="0"/>
+              <a:t>, </a:t>
+            </a:r>
+            <a:r>
+              <a:rPr dirty="0" err="1"/>
+              <a:t>coordonnées</a:t>
+            </a:r>
+            <a:r>
+              <a:rPr dirty="0"/>
+              <a:t>, </a:t>
+            </a:r>
+            <a:r>
+              <a:rPr dirty="0" err="1"/>
+              <a:t>horodatage</a:t>
+            </a:r>
+            <a:br>
+              <a:rPr dirty="0"/>
+            </a:br>
+            <a:r>
+              <a:rPr dirty="0"/>
+              <a:t>• unique : </a:t>
+            </a:r>
+            <a:r>
+              <a:rPr dirty="0" err="1"/>
+              <a:t>station_id</a:t>
+            </a:r>
+            <a:br>
+              <a:rPr dirty="0"/>
+            </a:br>
+            <a:r>
+              <a:rPr dirty="0"/>
+              <a:t>• relationships : </a:t>
+            </a:r>
+            <a:r>
+              <a:rPr dirty="0" err="1"/>
+              <a:t>station_id</a:t>
+            </a:r>
+            <a:r>
+              <a:rPr dirty="0"/>
+              <a:t> → dimension</a:t>
+            </a:r>
+            <a:br>
+              <a:rPr dirty="0"/>
+            </a:br>
+            <a:r>
+              <a:rPr dirty="0"/>
+              <a:t>• </a:t>
+            </a:r>
+            <a:r>
+              <a:rPr dirty="0" err="1"/>
+              <a:t>accepted_values</a:t>
+            </a:r>
+            <a:r>
+              <a:rPr dirty="0"/>
+              <a:t> : amateur / </a:t>
+            </a:r>
+            <a:r>
+              <a:rPr dirty="0" err="1"/>
+              <a:t>officielle</a:t>
+            </a:r>
+            <a:br>
+              <a:rPr dirty="0"/>
+            </a:br>
+            <a:r>
+              <a:rPr dirty="0"/>
+              <a:t>• Tests </a:t>
+            </a:r>
+            <a:r>
+              <a:rPr dirty="0" err="1"/>
+              <a:t>spécifiques</a:t>
+            </a:r>
+            <a:r>
+              <a:rPr dirty="0"/>
+              <a:t> : </a:t>
+            </a:r>
+            <a:r>
+              <a:rPr dirty="0" err="1"/>
+              <a:t>pluie</a:t>
+            </a:r>
+            <a:r>
+              <a:rPr dirty="0"/>
+              <a:t>, </a:t>
+            </a:r>
+            <a:r>
+              <a:rPr dirty="0" err="1"/>
+              <a:t>température</a:t>
+            </a:r>
+            <a:r>
+              <a:rPr dirty="0"/>
+              <a:t>, </a:t>
+            </a:r>
+            <a:r>
+              <a:rPr dirty="0" err="1"/>
+              <a:t>humidité</a:t>
+            </a:r>
+            <a:r>
+              <a:rPr dirty="0"/>
+              <a:t>, vent</a:t>
+            </a:r>
           </a:p>
         </p:txBody>
       </p:sp>
     </p:spTree>
     <p:extLst>
       <p:ext uri="{BB962C8B-B14F-4D97-AF65-F5344CB8AC3E}">
-        <p14:creationId xmlns:p14="http://schemas.microsoft.com/office/powerpoint/2010/main" val="3103448215"/>
+        <p14:creationId xmlns:p14="http://schemas.microsoft.com/office/powerpoint/2010/main" val="1574833617"/>
       </p:ext>
     </p:extLst>
   </p:cSld>
@@ -11825,7 +11863,7 @@
 </p:sld>
 </file>
 
-<file path=ppt/slides/slide4.xml><?xml version="1.0" encoding="utf-8"?>
+<file path=ppt/slides/slide11.xml><?xml version="1.0" encoding="utf-8"?>
 <p:sld xmlns:a="http://schemas.openxmlformats.org/drawingml/2006/main" xmlns:r="http://schemas.openxmlformats.org/officeDocument/2006/relationships" xmlns:p="http://schemas.openxmlformats.org/presentationml/2006/main">
   <p:cSld>
     <p:spTree>
@@ -11847,7 +11885,7 @@
           <p:cNvPr id="2" name="Titre 1">
             <a:extLst>
               <a:ext uri="{FF2B5EF4-FFF2-40B4-BE49-F238E27FC236}">
-                <a16:creationId xmlns:a16="http://schemas.microsoft.com/office/drawing/2014/main" id="{13EF029E-C20D-FC80-6B16-21EC7B080C6C}"/>
+                <a16:creationId xmlns:a16="http://schemas.microsoft.com/office/drawing/2014/main" id="{2F240D08-8ABD-C30D-8619-3A8A24D19CB9}"/>
               </a:ext>
             </a:extLst>
           </p:cNvPr>
@@ -11858,20 +11896,40 @@
             <p:ph type="title"/>
           </p:nvPr>
         </p:nvSpPr>
-        <p:spPr>
-          <a:xfrm>
-            <a:off x="581192" y="702156"/>
-            <a:ext cx="11029616" cy="1188720"/>
-          </a:xfrm>
-        </p:spPr>
+        <p:spPr/>
         <p:txBody>
           <a:bodyPr/>
           <a:lstStyle/>
           <a:p>
             <a:r>
               <a:rPr lang="fr-FR" dirty="0"/>
-              <a:t>2 – Schéma architecture</a:t>
+              <a:t>9. Installation Mise en place AWS</a:t>
             </a:r>
+          </a:p>
+        </p:txBody>
+      </p:sp>
+      <p:sp>
+        <p:nvSpPr>
+          <p:cNvPr id="3" name="Espace réservé du contenu 2">
+            <a:extLst>
+              <a:ext uri="{FF2B5EF4-FFF2-40B4-BE49-F238E27FC236}">
+                <a16:creationId xmlns:a16="http://schemas.microsoft.com/office/drawing/2014/main" id="{1D591678-97DD-9E5B-55DC-6B9E91134863}"/>
+              </a:ext>
+            </a:extLst>
+          </p:cNvPr>
+          <p:cNvSpPr>
+            <a:spLocks noGrp="1"/>
+          </p:cNvSpPr>
+          <p:nvPr>
+            <p:ph idx="1"/>
+          </p:nvPr>
+        </p:nvSpPr>
+        <p:spPr/>
+        <p:txBody>
+          <a:bodyPr/>
+          <a:lstStyle/>
+          <a:p>
+            <a:endParaRPr lang="fr-FR"/>
           </a:p>
         </p:txBody>
       </p:sp>
@@ -11880,7 +11938,7 @@
           <p:cNvPr id="4" name="Espace réservé de la date 3">
             <a:extLst>
               <a:ext uri="{FF2B5EF4-FFF2-40B4-BE49-F238E27FC236}">
-                <a16:creationId xmlns:a16="http://schemas.microsoft.com/office/drawing/2014/main" id="{B47D3905-5571-80C8-8D93-3691E4B98A9D}"/>
+                <a16:creationId xmlns:a16="http://schemas.microsoft.com/office/drawing/2014/main" id="{76A525BD-E384-4889-C5DF-7D6D0E560132}"/>
               </a:ext>
             </a:extLst>
           </p:cNvPr>
@@ -11891,20 +11949,15 @@
             <p:ph type="dt" sz="half" idx="10"/>
           </p:nvPr>
         </p:nvSpPr>
-        <p:spPr>
-          <a:xfrm>
-            <a:off x="7605951" y="6423914"/>
-            <a:ext cx="2844799" cy="365125"/>
-          </a:xfrm>
-        </p:spPr>
+        <p:spPr/>
         <p:txBody>
           <a:bodyPr/>
           <a:lstStyle/>
           <a:p>
+            <a:pPr rtl="0"/>
             <a:fld id="{22897033-9A55-4DAC-991D-1FF1921C78B7}" type="datetime1">
               <a:rPr lang="fr-FR" smtClean="0"/>
-              <a:pPr/>
-              <a:t>12/08/2026</a:t>
+              <a:t>16/08/2026</a:t>
             </a:fld>
             <a:endParaRPr lang="en-US" dirty="0"/>
           </a:p>
@@ -11915,7 +11968,7 @@
           <p:cNvPr id="6" name="Image 5">
             <a:extLst>
               <a:ext uri="{FF2B5EF4-FFF2-40B4-BE49-F238E27FC236}">
-                <a16:creationId xmlns:a16="http://schemas.microsoft.com/office/drawing/2014/main" id="{FD819FEA-AFE2-7BF4-4D44-FE5C84681B25}"/>
+                <a16:creationId xmlns:a16="http://schemas.microsoft.com/office/drawing/2014/main" id="{8E02770F-21A4-2DBE-C359-6DA9D7356EC2}"/>
               </a:ext>
             </a:extLst>
           </p:cNvPr>
@@ -11932,8 +11985,8 @@
         </p:blipFill>
         <p:spPr>
           <a:xfrm>
-            <a:off x="1556547" y="1890876"/>
-            <a:ext cx="3305636" cy="4810796"/>
+            <a:off x="5787321" y="2335473"/>
+            <a:ext cx="6220720" cy="4088441"/>
           </a:xfrm>
           <a:prstGeom prst="rect">
             <a:avLst/>
@@ -11943,7 +11996,7 @@
     </p:spTree>
     <p:extLst>
       <p:ext uri="{BB962C8B-B14F-4D97-AF65-F5344CB8AC3E}">
-        <p14:creationId xmlns:p14="http://schemas.microsoft.com/office/powerpoint/2010/main" val="2225267394"/>
+        <p14:creationId xmlns:p14="http://schemas.microsoft.com/office/powerpoint/2010/main" val="1158311728"/>
       </p:ext>
     </p:extLst>
   </p:cSld>
@@ -11953,117 +12006,7 @@
 </p:sld>
 </file>
 
-<file path=ppt/slides/slide5.xml><?xml version="1.0" encoding="utf-8"?>
-<p:sld xmlns:a="http://schemas.openxmlformats.org/drawingml/2006/main" xmlns:r="http://schemas.openxmlformats.org/officeDocument/2006/relationships" xmlns:p="http://schemas.openxmlformats.org/presentationml/2006/main">
-  <p:cSld>
-    <p:spTree>
-      <p:nvGrpSpPr>
-        <p:cNvPr id="1" name=""/>
-        <p:cNvGrpSpPr/>
-        <p:nvPr/>
-      </p:nvGrpSpPr>
-      <p:grpSpPr>
-        <a:xfrm>
-          <a:off x="0" y="0"/>
-          <a:ext cx="0" cy="0"/>
-          <a:chOff x="0" y="0"/>
-          <a:chExt cx="0" cy="0"/>
-        </a:xfrm>
-      </p:grpSpPr>
-      <p:sp>
-        <p:nvSpPr>
-          <p:cNvPr id="2" name="Titre 1">
-            <a:extLst>
-              <a:ext uri="{FF2B5EF4-FFF2-40B4-BE49-F238E27FC236}">
-                <a16:creationId xmlns:a16="http://schemas.microsoft.com/office/drawing/2014/main" id="{8E84ED0F-FEE1-6287-7A99-C6369609A023}"/>
-              </a:ext>
-            </a:extLst>
-          </p:cNvPr>
-          <p:cNvSpPr>
-            <a:spLocks noGrp="1"/>
-          </p:cNvSpPr>
-          <p:nvPr>
-            <p:ph type="title"/>
-          </p:nvPr>
-        </p:nvSpPr>
-        <p:spPr/>
-        <p:txBody>
-          <a:bodyPr/>
-          <a:lstStyle/>
-          <a:p>
-            <a:endParaRPr lang="fr-FR"/>
-          </a:p>
-        </p:txBody>
-      </p:sp>
-      <p:sp>
-        <p:nvSpPr>
-          <p:cNvPr id="3" name="Espace réservé du contenu 2">
-            <a:extLst>
-              <a:ext uri="{FF2B5EF4-FFF2-40B4-BE49-F238E27FC236}">
-                <a16:creationId xmlns:a16="http://schemas.microsoft.com/office/drawing/2014/main" id="{FF8198FF-71C4-B3E5-B262-91DC45AE635B}"/>
-              </a:ext>
-            </a:extLst>
-          </p:cNvPr>
-          <p:cNvSpPr>
-            <a:spLocks noGrp="1"/>
-          </p:cNvSpPr>
-          <p:nvPr>
-            <p:ph idx="1"/>
-          </p:nvPr>
-        </p:nvSpPr>
-        <p:spPr/>
-        <p:txBody>
-          <a:bodyPr/>
-          <a:lstStyle/>
-          <a:p>
-            <a:endParaRPr lang="fr-FR"/>
-          </a:p>
-        </p:txBody>
-      </p:sp>
-      <p:sp>
-        <p:nvSpPr>
-          <p:cNvPr id="4" name="Espace réservé de la date 3">
-            <a:extLst>
-              <a:ext uri="{FF2B5EF4-FFF2-40B4-BE49-F238E27FC236}">
-                <a16:creationId xmlns:a16="http://schemas.microsoft.com/office/drawing/2014/main" id="{86B69C16-A160-1EAA-9A69-2F3B43D1F047}"/>
-              </a:ext>
-            </a:extLst>
-          </p:cNvPr>
-          <p:cNvSpPr>
-            <a:spLocks noGrp="1"/>
-          </p:cNvSpPr>
-          <p:nvPr>
-            <p:ph type="dt" sz="half" idx="10"/>
-          </p:nvPr>
-        </p:nvSpPr>
-        <p:spPr/>
-        <p:txBody>
-          <a:bodyPr/>
-          <a:lstStyle/>
-          <a:p>
-            <a:pPr rtl="0"/>
-            <a:fld id="{22897033-9A55-4DAC-991D-1FF1921C78B7}" type="datetime1">
-              <a:rPr lang="fr-FR" smtClean="0"/>
-              <a:t>12/08/2026</a:t>
-            </a:fld>
-            <a:endParaRPr lang="en-US" dirty="0"/>
-          </a:p>
-        </p:txBody>
-      </p:sp>
-    </p:spTree>
-    <p:extLst>
-      <p:ext uri="{BB962C8B-B14F-4D97-AF65-F5344CB8AC3E}">
-        <p14:creationId xmlns:p14="http://schemas.microsoft.com/office/powerpoint/2010/main" val="4115421798"/>
-      </p:ext>
-    </p:extLst>
-  </p:cSld>
-  <p:clrMapOvr>
-    <a:masterClrMapping/>
-  </p:clrMapOvr>
-</p:sld>
-</file>
-
-<file path=ppt/slides/slide6.xml><?xml version="1.0" encoding="utf-8"?>
+<file path=ppt/slides/slide12.xml><?xml version="1.0" encoding="utf-8"?>
 <p:sld xmlns:a="http://schemas.openxmlformats.org/drawingml/2006/main" xmlns:r="http://schemas.openxmlformats.org/officeDocument/2006/relationships" xmlns:p="http://schemas.openxmlformats.org/presentationml/2006/main">
   <p:cSld>
     <p:spTree>
@@ -12146,7 +12089,7 @@
             <a:pPr rtl="0"/>
             <a:fld id="{22897033-9A55-4DAC-991D-1FF1921C78B7}" type="datetime1">
               <a:rPr lang="fr-FR" smtClean="0"/>
-              <a:t>12/08/2026</a:t>
+              <a:t>16/08/2026</a:t>
             </a:fld>
             <a:endParaRPr lang="en-US" dirty="0"/>
           </a:p>
@@ -12912,7 +12855,7 @@
 </p:sld>
 </file>
 
-<file path=ppt/slides/slide7.xml><?xml version="1.0" encoding="utf-8"?>
+<file path=ppt/slides/slide13.xml><?xml version="1.0" encoding="utf-8"?>
 <p:sld xmlns:a="http://schemas.openxmlformats.org/drawingml/2006/main" xmlns:r="http://schemas.openxmlformats.org/officeDocument/2006/relationships" xmlns:p="http://schemas.openxmlformats.org/presentationml/2006/main">
   <p:cSld>
     <p:spTree>
@@ -13511,7 +13454,7 @@
             <a:pPr rtl="0"/>
             <a:fld id="{22897033-9A55-4DAC-991D-1FF1921C78B7}" type="datetime1">
               <a:rPr lang="fr-FR" smtClean="0"/>
-              <a:t>12/08/2026</a:t>
+              <a:t>16/08/2026</a:t>
             </a:fld>
             <a:endParaRPr lang="en-US" dirty="0"/>
           </a:p>
@@ -13530,7 +13473,7 @@
 </p:sld>
 </file>
 
-<file path=ppt/slides/slide8.xml><?xml version="1.0" encoding="utf-8"?>
+<file path=ppt/slides/slide14.xml><?xml version="1.0" encoding="utf-8"?>
 <p:sld xmlns:a="http://schemas.openxmlformats.org/drawingml/2006/main" xmlns:r="http://schemas.openxmlformats.org/officeDocument/2006/relationships" xmlns:p="http://schemas.openxmlformats.org/presentationml/2006/main">
   <p:cSld>
     <p:spTree>
@@ -13607,7 +13550,7 @@
             <a:pPr rtl="0"/>
             <a:fld id="{22897033-9A55-4DAC-991D-1FF1921C78B7}" type="datetime1">
               <a:rPr lang="fr-FR" smtClean="0"/>
-              <a:t>12/08/2026</a:t>
+              <a:t>16/08/2026</a:t>
             </a:fld>
             <a:endParaRPr lang="en-US" dirty="0"/>
           </a:p>
@@ -14202,7 +14145,7 @@
 </p:sld>
 </file>
 
-<file path=ppt/slides/slide9.xml><?xml version="1.0" encoding="utf-8"?>
+<file path=ppt/slides/slide15.xml><?xml version="1.0" encoding="utf-8"?>
 <p:sld xmlns:a="http://schemas.openxmlformats.org/drawingml/2006/main" xmlns:r="http://schemas.openxmlformats.org/officeDocument/2006/relationships" xmlns:p="http://schemas.openxmlformats.org/presentationml/2006/main">
   <p:cSld>
     <p:bg>
@@ -14253,7 +14196,7 @@
             <a:pPr rtl="0"/>
             <a:fld id="{ACEC98BE-FCE2-445F-8146-3A7F8CC3881D}" type="datetime1">
               <a:rPr lang="fr-FR" smtClean="0"/>
-              <a:t>12/08/2026</a:t>
+              <a:t>16/08/2026</a:t>
             </a:fld>
             <a:endParaRPr lang="en-US" dirty="0"/>
           </a:p>
@@ -14302,6 +14245,6785 @@
     <p:extLst>
       <p:ext uri="{BB962C8B-B14F-4D97-AF65-F5344CB8AC3E}">
         <p14:creationId xmlns:p14="http://schemas.microsoft.com/office/powerpoint/2010/main" val="2464726542"/>
+      </p:ext>
+    </p:extLst>
+  </p:cSld>
+  <p:clrMapOvr>
+    <a:masterClrMapping/>
+  </p:clrMapOvr>
+</p:sld>
+</file>
+
+<file path=ppt/slides/slide2.xml><?xml version="1.0" encoding="utf-8"?>
+<p:sld xmlns:a="http://schemas.openxmlformats.org/drawingml/2006/main" xmlns:r="http://schemas.openxmlformats.org/officeDocument/2006/relationships" xmlns:p="http://schemas.openxmlformats.org/presentationml/2006/main">
+  <p:cSld>
+    <p:spTree>
+      <p:nvGrpSpPr>
+        <p:cNvPr id="1" name=""/>
+        <p:cNvGrpSpPr/>
+        <p:nvPr/>
+      </p:nvGrpSpPr>
+      <p:grpSpPr>
+        <a:xfrm>
+          <a:off x="0" y="0"/>
+          <a:ext cx="0" cy="0"/>
+          <a:chOff x="0" y="0"/>
+          <a:chExt cx="0" cy="0"/>
+        </a:xfrm>
+      </p:grpSpPr>
+      <p:sp>
+        <p:nvSpPr>
+          <p:cNvPr id="2" name="Titre 1">
+            <a:extLst>
+              <a:ext uri="{FF2B5EF4-FFF2-40B4-BE49-F238E27FC236}">
+                <a16:creationId xmlns:a16="http://schemas.microsoft.com/office/drawing/2014/main" id="{D90581BB-D273-2748-59E2-5B1D678D7EE0}"/>
+              </a:ext>
+            </a:extLst>
+          </p:cNvPr>
+          <p:cNvSpPr>
+            <a:spLocks noGrp="1"/>
+          </p:cNvSpPr>
+          <p:nvPr>
+            <p:ph type="title"/>
+          </p:nvPr>
+        </p:nvSpPr>
+        <p:spPr/>
+        <p:txBody>
+          <a:bodyPr/>
+          <a:lstStyle/>
+          <a:p>
+            <a:r>
+              <a:rPr lang="fr-FR" dirty="0"/>
+              <a:t>Sommaire</a:t>
+            </a:r>
+          </a:p>
+        </p:txBody>
+      </p:sp>
+      <p:graphicFrame>
+        <p:nvGraphicFramePr>
+          <p:cNvPr id="5" name="Espace réservé du contenu 4">
+            <a:extLst>
+              <a:ext uri="{FF2B5EF4-FFF2-40B4-BE49-F238E27FC236}">
+                <a16:creationId xmlns:a16="http://schemas.microsoft.com/office/drawing/2014/main" id="{C0FBDBC2-024B-60B6-BEE4-9D4312913FE4}"/>
+              </a:ext>
+            </a:extLst>
+          </p:cNvPr>
+          <p:cNvGraphicFramePr>
+            <a:graphicFrameLocks noGrp="1"/>
+          </p:cNvGraphicFramePr>
+          <p:nvPr>
+            <p:ph idx="1"/>
+            <p:extLst>
+              <p:ext uri="{D42A27DB-BD31-4B8C-83A1-F6EECF244321}">
+                <p14:modId xmlns:p14="http://schemas.microsoft.com/office/powerpoint/2010/main" val="468638535"/>
+              </p:ext>
+            </p:extLst>
+          </p:nvPr>
+        </p:nvGraphicFramePr>
+        <p:xfrm>
+          <a:off x="581192" y="1985811"/>
+          <a:ext cx="11348216" cy="4803228"/>
+        </p:xfrm>
+        <a:graphic>
+          <a:graphicData uri="http://schemas.openxmlformats.org/drawingml/2006/diagram">
+            <dgm:relIds xmlns:dgm="http://schemas.openxmlformats.org/drawingml/2006/diagram" xmlns:r="http://schemas.openxmlformats.org/officeDocument/2006/relationships" r:dm="rId2" r:lo="rId3" r:qs="rId4" r:cs="rId5"/>
+          </a:graphicData>
+        </a:graphic>
+      </p:graphicFrame>
+      <p:sp>
+        <p:nvSpPr>
+          <p:cNvPr id="4" name="Espace réservé de la date 3">
+            <a:extLst>
+              <a:ext uri="{FF2B5EF4-FFF2-40B4-BE49-F238E27FC236}">
+                <a16:creationId xmlns:a16="http://schemas.microsoft.com/office/drawing/2014/main" id="{AFB99B3D-02B8-72CA-5973-9E0DC630CA85}"/>
+              </a:ext>
+            </a:extLst>
+          </p:cNvPr>
+          <p:cNvSpPr>
+            <a:spLocks noGrp="1"/>
+          </p:cNvSpPr>
+          <p:nvPr>
+            <p:ph type="dt" sz="half" idx="10"/>
+          </p:nvPr>
+        </p:nvSpPr>
+        <p:spPr>
+          <a:xfrm>
+            <a:off x="7605951" y="6423914"/>
+            <a:ext cx="4004857" cy="365125"/>
+          </a:xfrm>
+        </p:spPr>
+        <p:txBody>
+          <a:bodyPr/>
+          <a:lstStyle/>
+          <a:p>
+            <a:pPr rtl="0"/>
+            <a:fld id="{22897033-9A55-4DAC-991D-1FF1921C78B7}" type="datetime1">
+              <a:rPr lang="fr-FR" smtClean="0"/>
+              <a:t>16/08/2026</a:t>
+            </a:fld>
+            <a:endParaRPr lang="en-US" dirty="0"/>
+          </a:p>
+        </p:txBody>
+      </p:sp>
+    </p:spTree>
+    <p:extLst>
+      <p:ext uri="{BB962C8B-B14F-4D97-AF65-F5344CB8AC3E}">
+        <p14:creationId xmlns:p14="http://schemas.microsoft.com/office/powerpoint/2010/main" val="2393101071"/>
+      </p:ext>
+    </p:extLst>
+  </p:cSld>
+  <p:clrMapOvr>
+    <a:masterClrMapping/>
+  </p:clrMapOvr>
+</p:sld>
+</file>
+
+<file path=ppt/slides/slide3.xml><?xml version="1.0" encoding="utf-8"?>
+<p:sld xmlns:a="http://schemas.openxmlformats.org/drawingml/2006/main" xmlns:r="http://schemas.openxmlformats.org/officeDocument/2006/relationships" xmlns:p="http://schemas.openxmlformats.org/presentationml/2006/main">
+  <p:cSld>
+    <p:spTree>
+      <p:nvGrpSpPr>
+        <p:cNvPr id="1" name=""/>
+        <p:cNvGrpSpPr/>
+        <p:nvPr/>
+      </p:nvGrpSpPr>
+      <p:grpSpPr>
+        <a:xfrm>
+          <a:off x="0" y="0"/>
+          <a:ext cx="0" cy="0"/>
+          <a:chOff x="0" y="0"/>
+          <a:chExt cx="0" cy="0"/>
+        </a:xfrm>
+      </p:grpSpPr>
+      <p:graphicFrame>
+        <p:nvGraphicFramePr>
+          <p:cNvPr id="7" name="Espace réservé du contenu 6">
+            <a:extLst>
+              <a:ext uri="{FF2B5EF4-FFF2-40B4-BE49-F238E27FC236}">
+                <a16:creationId xmlns:a16="http://schemas.microsoft.com/office/drawing/2014/main" id="{E28E8F6D-02FF-3D2F-AC7C-9E6FA4F040E4}"/>
+              </a:ext>
+            </a:extLst>
+          </p:cNvPr>
+          <p:cNvGraphicFramePr>
+            <a:graphicFrameLocks noGrp="1"/>
+          </p:cNvGraphicFramePr>
+          <p:nvPr>
+            <p:ph idx="1"/>
+            <p:extLst>
+              <p:ext uri="{D42A27DB-BD31-4B8C-83A1-F6EECF244321}">
+                <p14:modId xmlns:p14="http://schemas.microsoft.com/office/powerpoint/2010/main" val="890522826"/>
+              </p:ext>
+            </p:extLst>
+          </p:nvPr>
+        </p:nvGraphicFramePr>
+        <p:xfrm>
+          <a:off x="1030794" y="833616"/>
+          <a:ext cx="9503279" cy="6991889"/>
+        </p:xfrm>
+        <a:graphic>
+          <a:graphicData uri="http://schemas.openxmlformats.org/drawingml/2006/diagram">
+            <dgm:relIds xmlns:dgm="http://schemas.openxmlformats.org/drawingml/2006/diagram" xmlns:r="http://schemas.openxmlformats.org/officeDocument/2006/relationships" r:dm="rId2" r:lo="rId3" r:qs="rId4" r:cs="rId5"/>
+          </a:graphicData>
+        </a:graphic>
+      </p:graphicFrame>
+      <p:sp>
+        <p:nvSpPr>
+          <p:cNvPr id="2" name="Titre 1">
+            <a:extLst>
+              <a:ext uri="{FF2B5EF4-FFF2-40B4-BE49-F238E27FC236}">
+                <a16:creationId xmlns:a16="http://schemas.microsoft.com/office/drawing/2014/main" id="{4D5943B5-2F35-F9C9-051D-7DF4E3212622}"/>
+              </a:ext>
+            </a:extLst>
+          </p:cNvPr>
+          <p:cNvSpPr>
+            <a:spLocks noGrp="1"/>
+          </p:cNvSpPr>
+          <p:nvPr>
+            <p:ph type="title"/>
+          </p:nvPr>
+        </p:nvSpPr>
+        <p:spPr/>
+        <p:txBody>
+          <a:bodyPr/>
+          <a:lstStyle/>
+          <a:p>
+            <a:r>
+              <a:rPr lang="fr-FR" dirty="0"/>
+              <a:t>1 - Contexte et objectif</a:t>
+            </a:r>
+          </a:p>
+        </p:txBody>
+      </p:sp>
+      <p:sp>
+        <p:nvSpPr>
+          <p:cNvPr id="4" name="Espace réservé de la date 3">
+            <a:extLst>
+              <a:ext uri="{FF2B5EF4-FFF2-40B4-BE49-F238E27FC236}">
+                <a16:creationId xmlns:a16="http://schemas.microsoft.com/office/drawing/2014/main" id="{73B45894-BF0A-B7E8-B359-57B63E483EA9}"/>
+              </a:ext>
+            </a:extLst>
+          </p:cNvPr>
+          <p:cNvSpPr>
+            <a:spLocks noGrp="1"/>
+          </p:cNvSpPr>
+          <p:nvPr>
+            <p:ph type="dt" sz="half" idx="10"/>
+          </p:nvPr>
+        </p:nvSpPr>
+        <p:spPr/>
+        <p:txBody>
+          <a:bodyPr/>
+          <a:lstStyle/>
+          <a:p>
+            <a:pPr rtl="0"/>
+            <a:fld id="{22897033-9A55-4DAC-991D-1FF1921C78B7}" type="datetime1">
+              <a:rPr lang="fr-FR" smtClean="0"/>
+              <a:t>16/08/2026</a:t>
+            </a:fld>
+            <a:endParaRPr lang="en-US" dirty="0"/>
+          </a:p>
+        </p:txBody>
+      </p:sp>
+    </p:spTree>
+    <p:extLst>
+      <p:ext uri="{BB962C8B-B14F-4D97-AF65-F5344CB8AC3E}">
+        <p14:creationId xmlns:p14="http://schemas.microsoft.com/office/powerpoint/2010/main" val="3103448215"/>
+      </p:ext>
+    </p:extLst>
+  </p:cSld>
+  <p:clrMapOvr>
+    <a:masterClrMapping/>
+  </p:clrMapOvr>
+</p:sld>
+</file>
+
+<file path=ppt/slides/slide4.xml><?xml version="1.0" encoding="utf-8"?>
+<p:sld xmlns:a="http://schemas.openxmlformats.org/drawingml/2006/main" xmlns:r="http://schemas.openxmlformats.org/officeDocument/2006/relationships" xmlns:p="http://schemas.openxmlformats.org/presentationml/2006/main">
+  <p:cSld>
+    <p:spTree>
+      <p:nvGrpSpPr>
+        <p:cNvPr id="1" name=""/>
+        <p:cNvGrpSpPr/>
+        <p:nvPr/>
+      </p:nvGrpSpPr>
+      <p:grpSpPr>
+        <a:xfrm>
+          <a:off x="0" y="0"/>
+          <a:ext cx="0" cy="0"/>
+          <a:chOff x="0" y="0"/>
+          <a:chExt cx="0" cy="0"/>
+        </a:xfrm>
+      </p:grpSpPr>
+      <p:sp>
+        <p:nvSpPr>
+          <p:cNvPr id="2" name="Titre 1">
+            <a:extLst>
+              <a:ext uri="{FF2B5EF4-FFF2-40B4-BE49-F238E27FC236}">
+                <a16:creationId xmlns:a16="http://schemas.microsoft.com/office/drawing/2014/main" id="{13EF029E-C20D-FC80-6B16-21EC7B080C6C}"/>
+              </a:ext>
+            </a:extLst>
+          </p:cNvPr>
+          <p:cNvSpPr>
+            <a:spLocks noGrp="1"/>
+          </p:cNvSpPr>
+          <p:nvPr>
+            <p:ph type="title"/>
+          </p:nvPr>
+        </p:nvSpPr>
+        <p:spPr>
+          <a:xfrm>
+            <a:off x="581192" y="702156"/>
+            <a:ext cx="11029616" cy="1188720"/>
+          </a:xfrm>
+        </p:spPr>
+        <p:txBody>
+          <a:bodyPr/>
+          <a:lstStyle/>
+          <a:p>
+            <a:r>
+              <a:rPr lang="fr-FR" dirty="0"/>
+              <a:t>2 – Schéma DE LA base de données</a:t>
+            </a:r>
+          </a:p>
+        </p:txBody>
+      </p:sp>
+      <p:sp>
+        <p:nvSpPr>
+          <p:cNvPr id="4" name="Espace réservé de la date 3">
+            <a:extLst>
+              <a:ext uri="{FF2B5EF4-FFF2-40B4-BE49-F238E27FC236}">
+                <a16:creationId xmlns:a16="http://schemas.microsoft.com/office/drawing/2014/main" id="{B47D3905-5571-80C8-8D93-3691E4B98A9D}"/>
+              </a:ext>
+            </a:extLst>
+          </p:cNvPr>
+          <p:cNvSpPr>
+            <a:spLocks noGrp="1"/>
+          </p:cNvSpPr>
+          <p:nvPr>
+            <p:ph type="dt" sz="half" idx="10"/>
+          </p:nvPr>
+        </p:nvSpPr>
+        <p:spPr>
+          <a:xfrm>
+            <a:off x="7605951" y="6423914"/>
+            <a:ext cx="2844799" cy="365125"/>
+          </a:xfrm>
+        </p:spPr>
+        <p:txBody>
+          <a:bodyPr/>
+          <a:lstStyle/>
+          <a:p>
+            <a:fld id="{22897033-9A55-4DAC-991D-1FF1921C78B7}" type="datetime1">
+              <a:rPr lang="fr-FR" smtClean="0"/>
+              <a:pPr/>
+              <a:t>16/08/2026</a:t>
+            </a:fld>
+            <a:endParaRPr lang="en-US" dirty="0"/>
+          </a:p>
+        </p:txBody>
+      </p:sp>
+      <p:pic>
+        <p:nvPicPr>
+          <p:cNvPr id="5" name="Image 4">
+            <a:extLst>
+              <a:ext uri="{FF2B5EF4-FFF2-40B4-BE49-F238E27FC236}">
+                <a16:creationId xmlns:a16="http://schemas.microsoft.com/office/drawing/2014/main" id="{9CEF4C45-6790-7893-FAD2-D1507F36299E}"/>
+              </a:ext>
+            </a:extLst>
+          </p:cNvPr>
+          <p:cNvPicPr>
+            <a:picLocks noChangeAspect="1"/>
+          </p:cNvPicPr>
+          <p:nvPr/>
+        </p:nvPicPr>
+        <p:blipFill>
+          <a:blip r:embed="rId2"/>
+          <a:stretch>
+            <a:fillRect/>
+          </a:stretch>
+        </p:blipFill>
+        <p:spPr>
+          <a:xfrm>
+            <a:off x="2944949" y="1813712"/>
+            <a:ext cx="6302101" cy="5044288"/>
+          </a:xfrm>
+          <a:prstGeom prst="rect">
+            <a:avLst/>
+          </a:prstGeom>
+        </p:spPr>
+      </p:pic>
+    </p:spTree>
+    <p:extLst>
+      <p:ext uri="{BB962C8B-B14F-4D97-AF65-F5344CB8AC3E}">
+        <p14:creationId xmlns:p14="http://schemas.microsoft.com/office/powerpoint/2010/main" val="2225267394"/>
+      </p:ext>
+    </p:extLst>
+  </p:cSld>
+  <p:clrMapOvr>
+    <a:masterClrMapping/>
+  </p:clrMapOvr>
+</p:sld>
+</file>
+
+<file path=ppt/slides/slide5.xml><?xml version="1.0" encoding="utf-8"?>
+<p:sld xmlns:a="http://schemas.openxmlformats.org/drawingml/2006/main" xmlns:r="http://schemas.openxmlformats.org/officeDocument/2006/relationships" xmlns:p="http://schemas.openxmlformats.org/presentationml/2006/main">
+  <p:cSld>
+    <p:spTree>
+      <p:nvGrpSpPr>
+        <p:cNvPr id="1" name=""/>
+        <p:cNvGrpSpPr/>
+        <p:nvPr/>
+      </p:nvGrpSpPr>
+      <p:grpSpPr>
+        <a:xfrm>
+          <a:off x="0" y="0"/>
+          <a:ext cx="0" cy="0"/>
+          <a:chOff x="0" y="0"/>
+          <a:chExt cx="0" cy="0"/>
+        </a:xfrm>
+      </p:grpSpPr>
+      <p:sp>
+        <p:nvSpPr>
+          <p:cNvPr id="2" name="Titre 1">
+            <a:extLst>
+              <a:ext uri="{FF2B5EF4-FFF2-40B4-BE49-F238E27FC236}">
+                <a16:creationId xmlns:a16="http://schemas.microsoft.com/office/drawing/2014/main" id="{8E84ED0F-FEE1-6287-7A99-C6369609A023}"/>
+              </a:ext>
+            </a:extLst>
+          </p:cNvPr>
+          <p:cNvSpPr>
+            <a:spLocks noGrp="1"/>
+          </p:cNvSpPr>
+          <p:nvPr>
+            <p:ph type="title"/>
+          </p:nvPr>
+        </p:nvSpPr>
+        <p:spPr/>
+        <p:txBody>
+          <a:bodyPr/>
+          <a:lstStyle/>
+          <a:p>
+            <a:r>
+              <a:rPr lang="fr-FR" dirty="0"/>
+              <a:t>3. PROCESSUS ELT</a:t>
+            </a:r>
+          </a:p>
+        </p:txBody>
+      </p:sp>
+      <p:sp>
+        <p:nvSpPr>
+          <p:cNvPr id="4" name="Espace réservé de la date 3">
+            <a:extLst>
+              <a:ext uri="{FF2B5EF4-FFF2-40B4-BE49-F238E27FC236}">
+                <a16:creationId xmlns:a16="http://schemas.microsoft.com/office/drawing/2014/main" id="{86B69C16-A160-1EAA-9A69-2F3B43D1F047}"/>
+              </a:ext>
+            </a:extLst>
+          </p:cNvPr>
+          <p:cNvSpPr>
+            <a:spLocks noGrp="1"/>
+          </p:cNvSpPr>
+          <p:nvPr>
+            <p:ph type="dt" sz="half" idx="10"/>
+          </p:nvPr>
+        </p:nvSpPr>
+        <p:spPr/>
+        <p:txBody>
+          <a:bodyPr/>
+          <a:lstStyle/>
+          <a:p>
+            <a:pPr rtl="0"/>
+            <a:fld id="{22897033-9A55-4DAC-991D-1FF1921C78B7}" type="datetime1">
+              <a:rPr lang="fr-FR" smtClean="0"/>
+              <a:t>16/08/2026</a:t>
+            </a:fld>
+            <a:endParaRPr lang="en-US" dirty="0"/>
+          </a:p>
+        </p:txBody>
+      </p:sp>
+      <p:grpSp>
+        <p:nvGrpSpPr>
+          <p:cNvPr id="54" name="Groupe 53">
+            <a:extLst>
+              <a:ext uri="{FF2B5EF4-FFF2-40B4-BE49-F238E27FC236}">
+                <a16:creationId xmlns:a16="http://schemas.microsoft.com/office/drawing/2014/main" id="{DB34A6D1-A609-0C22-EB3F-D61F9EF883E2}"/>
+              </a:ext>
+            </a:extLst>
+          </p:cNvPr>
+          <p:cNvGrpSpPr/>
+          <p:nvPr/>
+        </p:nvGrpSpPr>
+        <p:grpSpPr>
+          <a:xfrm>
+            <a:off x="716989" y="2154754"/>
+            <a:ext cx="10330116" cy="4184937"/>
+            <a:chOff x="716989" y="2154754"/>
+            <a:chExt cx="10330116" cy="4184937"/>
+          </a:xfrm>
+        </p:grpSpPr>
+        <p:grpSp>
+          <p:nvGrpSpPr>
+            <p:cNvPr id="53" name="Groupe 52">
+              <a:extLst>
+                <a:ext uri="{FF2B5EF4-FFF2-40B4-BE49-F238E27FC236}">
+                  <a16:creationId xmlns:a16="http://schemas.microsoft.com/office/drawing/2014/main" id="{A6E636DF-6A4B-6970-47DD-DF403631F929}"/>
+                </a:ext>
+              </a:extLst>
+            </p:cNvPr>
+            <p:cNvGrpSpPr/>
+            <p:nvPr/>
+          </p:nvGrpSpPr>
+          <p:grpSpPr>
+            <a:xfrm>
+              <a:off x="716989" y="2154754"/>
+              <a:ext cx="10330116" cy="4184937"/>
+              <a:chOff x="218230" y="2154754"/>
+              <a:chExt cx="10330116" cy="4184937"/>
+            </a:xfrm>
+          </p:grpSpPr>
+          <p:sp>
+            <p:nvSpPr>
+              <p:cNvPr id="43" name="Rectangle 42">
+                <a:extLst>
+                  <a:ext uri="{FF2B5EF4-FFF2-40B4-BE49-F238E27FC236}">
+                    <a16:creationId xmlns:a16="http://schemas.microsoft.com/office/drawing/2014/main" id="{A11B60FC-FD80-D85B-D625-6670147D1715}"/>
+                  </a:ext>
+                </a:extLst>
+              </p:cNvPr>
+              <p:cNvSpPr/>
+              <p:nvPr/>
+            </p:nvSpPr>
+            <p:spPr>
+              <a:xfrm>
+                <a:off x="218230" y="2339787"/>
+                <a:ext cx="1719730" cy="3370901"/>
+              </a:xfrm>
+              <a:prstGeom prst="rect">
+                <a:avLst/>
+              </a:prstGeom>
+              <a:solidFill>
+                <a:schemeClr val="accent5">
+                  <a:lumMod val="20000"/>
+                  <a:lumOff val="80000"/>
+                </a:schemeClr>
+              </a:solidFill>
+              <a:ln>
+                <a:solidFill>
+                  <a:schemeClr val="accent5">
+                    <a:lumMod val="50000"/>
+                  </a:schemeClr>
+                </a:solidFill>
+              </a:ln>
+            </p:spPr>
+            <p:style>
+              <a:lnRef idx="2">
+                <a:schemeClr val="accent1">
+                  <a:shade val="15000"/>
+                </a:schemeClr>
+              </a:lnRef>
+              <a:fillRef idx="1">
+                <a:schemeClr val="accent1"/>
+              </a:fillRef>
+              <a:effectRef idx="0">
+                <a:schemeClr val="accent1"/>
+              </a:effectRef>
+              <a:fontRef idx="minor">
+                <a:schemeClr val="lt1"/>
+              </a:fontRef>
+            </p:style>
+            <p:txBody>
+              <a:bodyPr rtlCol="0" anchor="ctr"/>
+              <a:lstStyle/>
+              <a:p>
+                <a:pPr algn="ctr"/>
+                <a:endParaRPr lang="fr-FR"/>
+              </a:p>
+            </p:txBody>
+          </p:sp>
+          <p:sp>
+            <p:nvSpPr>
+              <p:cNvPr id="5" name="Rectangle 4">
+                <a:extLst>
+                  <a:ext uri="{FF2B5EF4-FFF2-40B4-BE49-F238E27FC236}">
+                    <a16:creationId xmlns:a16="http://schemas.microsoft.com/office/drawing/2014/main" id="{EBCF1574-EB91-B853-4DC0-DB197D620272}"/>
+                  </a:ext>
+                </a:extLst>
+              </p:cNvPr>
+              <p:cNvSpPr/>
+              <p:nvPr/>
+            </p:nvSpPr>
+            <p:spPr>
+              <a:xfrm>
+                <a:off x="5386713" y="2154754"/>
+                <a:ext cx="3542135" cy="3819811"/>
+              </a:xfrm>
+              <a:prstGeom prst="rect">
+                <a:avLst/>
+              </a:prstGeom>
+              <a:solidFill>
+                <a:schemeClr val="accent6">
+                  <a:lumMod val="20000"/>
+                  <a:lumOff val="80000"/>
+                </a:schemeClr>
+              </a:solidFill>
+            </p:spPr>
+            <p:style>
+              <a:lnRef idx="2">
+                <a:schemeClr val="accent1">
+                  <a:shade val="15000"/>
+                </a:schemeClr>
+              </a:lnRef>
+              <a:fillRef idx="1">
+                <a:schemeClr val="accent1"/>
+              </a:fillRef>
+              <a:effectRef idx="0">
+                <a:schemeClr val="accent1"/>
+              </a:effectRef>
+              <a:fontRef idx="minor">
+                <a:schemeClr val="lt1"/>
+              </a:fontRef>
+            </p:style>
+            <p:txBody>
+              <a:bodyPr rtlCol="0" anchor="ctr"/>
+              <a:lstStyle/>
+              <a:p>
+                <a:pPr algn="ctr"/>
+                <a:endParaRPr lang="fr-FR"/>
+              </a:p>
+            </p:txBody>
+          </p:sp>
+          <p:sp>
+            <p:nvSpPr>
+              <p:cNvPr id="44" name="Text 38">
+                <a:extLst>
+                  <a:ext uri="{FF2B5EF4-FFF2-40B4-BE49-F238E27FC236}">
+                    <a16:creationId xmlns:a16="http://schemas.microsoft.com/office/drawing/2014/main" id="{F56F12FC-33C9-5EC9-86D9-8EBD16A1C8F4}"/>
+                  </a:ext>
+                </a:extLst>
+              </p:cNvPr>
+              <p:cNvSpPr/>
+              <p:nvPr/>
+            </p:nvSpPr>
+            <p:spPr>
+              <a:xfrm>
+                <a:off x="345439" y="5709571"/>
+                <a:ext cx="1372687" cy="365125"/>
+              </a:xfrm>
+              <a:prstGeom prst="rect">
+                <a:avLst/>
+              </a:prstGeom>
+              <a:noFill/>
+              <a:ln/>
+            </p:spPr>
+            <p:txBody>
+              <a:bodyPr wrap="square" lIns="0" tIns="0" rIns="0" bIns="0" rtlCol="0" anchor="ctr"/>
+              <a:lstStyle/>
+              <a:p>
+                <a:pPr marL="0" indent="0" algn="ctr">
+                  <a:buNone/>
+                </a:pPr>
+                <a:r>
+                  <a:rPr lang="en-US" sz="1200" i="1" dirty="0">
+                    <a:solidFill>
+                      <a:schemeClr val="accent5">
+                        <a:lumMod val="50000"/>
+                      </a:schemeClr>
+                    </a:solidFill>
+                    <a:latin typeface="Consolas" pitchFamily="34" charset="0"/>
+                    <a:ea typeface="Consolas" pitchFamily="34" charset="-122"/>
+                    <a:cs typeface="Consolas" pitchFamily="34" charset="-120"/>
+                  </a:rPr>
+                  <a:t>GitHub</a:t>
+                </a:r>
+                <a:endParaRPr lang="en-US" sz="1200" dirty="0">
+                  <a:solidFill>
+                    <a:schemeClr val="accent5">
+                      <a:lumMod val="50000"/>
+                    </a:schemeClr>
+                  </a:solidFill>
+                </a:endParaRPr>
+              </a:p>
+            </p:txBody>
+          </p:sp>
+          <p:grpSp>
+            <p:nvGrpSpPr>
+              <p:cNvPr id="6" name="Groupe 5">
+                <a:extLst>
+                  <a:ext uri="{FF2B5EF4-FFF2-40B4-BE49-F238E27FC236}">
+                    <a16:creationId xmlns:a16="http://schemas.microsoft.com/office/drawing/2014/main" id="{3533824B-B001-59A5-6458-595BD4F937E1}"/>
+                  </a:ext>
+                </a:extLst>
+              </p:cNvPr>
+              <p:cNvGrpSpPr/>
+              <p:nvPr/>
+            </p:nvGrpSpPr>
+            <p:grpSpPr>
+              <a:xfrm>
+                <a:off x="345439" y="2468880"/>
+                <a:ext cx="10202907" cy="3870811"/>
+                <a:chOff x="1512345" y="2666104"/>
+                <a:chExt cx="8595361" cy="3657596"/>
+              </a:xfrm>
+            </p:grpSpPr>
+            <p:sp>
+              <p:nvSpPr>
+                <p:cNvPr id="7" name="Shape 3">
+                  <a:extLst>
+                    <a:ext uri="{FF2B5EF4-FFF2-40B4-BE49-F238E27FC236}">
+                      <a16:creationId xmlns:a16="http://schemas.microsoft.com/office/drawing/2014/main" id="{D496A681-B39F-7591-F54F-F4D481474C56}"/>
+                    </a:ext>
+                  </a:extLst>
+                </p:cNvPr>
+                <p:cNvSpPr/>
+                <p:nvPr/>
+              </p:nvSpPr>
+              <p:spPr>
+                <a:xfrm>
+                  <a:off x="1512346" y="2666104"/>
+                  <a:ext cx="1280160" cy="2926080"/>
+                </a:xfrm>
+                <a:prstGeom prst="rect">
+                  <a:avLst/>
+                </a:prstGeom>
+                <a:solidFill>
+                  <a:srgbClr val="FFFFFF"/>
+                </a:solidFill>
+                <a:ln w="12700">
+                  <a:solidFill>
+                    <a:srgbClr val="E2E8F0"/>
+                  </a:solidFill>
+                  <a:prstDash val="solid"/>
+                </a:ln>
+                <a:effectLst>
+                  <a:outerShdw blurRad="101600" dist="38100" dir="8100000" algn="bl" rotWithShape="0">
+                    <a:srgbClr val="000000">
+                      <a:alpha val="12000"/>
+                    </a:srgbClr>
+                  </a:outerShdw>
+                </a:effectLst>
+              </p:spPr>
+              <p:txBody>
+                <a:bodyPr/>
+                <a:lstStyle/>
+                <a:p>
+                  <a:endParaRPr lang="fr-FR"/>
+                </a:p>
+              </p:txBody>
+            </p:sp>
+            <p:sp>
+              <p:nvSpPr>
+                <p:cNvPr id="8" name="Shape 4">
+                  <a:extLst>
+                    <a:ext uri="{FF2B5EF4-FFF2-40B4-BE49-F238E27FC236}">
+                      <a16:creationId xmlns:a16="http://schemas.microsoft.com/office/drawing/2014/main" id="{C5C7E39A-7E5C-6DFD-1053-740C5498CC3B}"/>
+                    </a:ext>
+                  </a:extLst>
+                </p:cNvPr>
+                <p:cNvSpPr/>
+                <p:nvPr/>
+              </p:nvSpPr>
+              <p:spPr>
+                <a:xfrm>
+                  <a:off x="1512345" y="2666104"/>
+                  <a:ext cx="1280160" cy="640080"/>
+                </a:xfrm>
+                <a:prstGeom prst="rect">
+                  <a:avLst/>
+                </a:prstGeom>
+                <a:solidFill>
+                  <a:srgbClr val="2563EB"/>
+                </a:solidFill>
+                <a:ln/>
+              </p:spPr>
+              <p:txBody>
+                <a:bodyPr/>
+                <a:lstStyle/>
+                <a:p>
+                  <a:endParaRPr lang="fr-FR"/>
+                </a:p>
+              </p:txBody>
+            </p:sp>
+            <p:sp>
+              <p:nvSpPr>
+                <p:cNvPr id="9" name="Text 5">
+                  <a:extLst>
+                    <a:ext uri="{FF2B5EF4-FFF2-40B4-BE49-F238E27FC236}">
+                      <a16:creationId xmlns:a16="http://schemas.microsoft.com/office/drawing/2014/main" id="{D3FC5034-5A09-BD5F-B0B9-7237B2729A63}"/>
+                    </a:ext>
+                  </a:extLst>
+                </p:cNvPr>
+                <p:cNvSpPr/>
+                <p:nvPr/>
+              </p:nvSpPr>
+              <p:spPr>
+                <a:xfrm>
+                  <a:off x="1512345" y="2684392"/>
+                  <a:ext cx="1280160" cy="320040"/>
+                </a:xfrm>
+                <a:prstGeom prst="rect">
+                  <a:avLst/>
+                </a:prstGeom>
+                <a:noFill/>
+                <a:ln/>
+              </p:spPr>
+              <p:txBody>
+                <a:bodyPr wrap="square" lIns="0" tIns="0" rIns="0" bIns="0" rtlCol="0" anchor="ctr"/>
+                <a:lstStyle/>
+                <a:p>
+                  <a:pPr marL="0" indent="0" algn="ctr">
+                    <a:buNone/>
+                  </a:pPr>
+                  <a:r>
+                    <a:rPr lang="en-US" sz="2000" b="1" dirty="0">
+                      <a:solidFill>
+                        <a:srgbClr val="FFFFFF"/>
+                      </a:solidFill>
+                      <a:latin typeface="Calibri" pitchFamily="34" charset="0"/>
+                      <a:ea typeface="Calibri" pitchFamily="34" charset="-122"/>
+                      <a:cs typeface="Calibri" pitchFamily="34" charset="-120"/>
+                    </a:rPr>
+                    <a:t>1</a:t>
+                  </a:r>
+                  <a:endParaRPr lang="en-US" sz="2000" dirty="0"/>
+                </a:p>
+              </p:txBody>
+            </p:sp>
+            <p:sp>
+              <p:nvSpPr>
+                <p:cNvPr id="10" name="Text 6">
+                  <a:extLst>
+                    <a:ext uri="{FF2B5EF4-FFF2-40B4-BE49-F238E27FC236}">
+                      <a16:creationId xmlns:a16="http://schemas.microsoft.com/office/drawing/2014/main" id="{DA92446F-E3BC-D51B-4B94-69DB1F200C7D}"/>
+                    </a:ext>
+                  </a:extLst>
+                </p:cNvPr>
+                <p:cNvSpPr/>
+                <p:nvPr/>
+              </p:nvSpPr>
+              <p:spPr>
+                <a:xfrm>
+                  <a:off x="1512346" y="3013576"/>
+                  <a:ext cx="1280160" cy="274320"/>
+                </a:xfrm>
+                <a:prstGeom prst="rect">
+                  <a:avLst/>
+                </a:prstGeom>
+                <a:noFill/>
+                <a:ln/>
+              </p:spPr>
+              <p:txBody>
+                <a:bodyPr wrap="square" lIns="0" tIns="0" rIns="0" bIns="0" rtlCol="0" anchor="ctr"/>
+                <a:lstStyle/>
+                <a:p>
+                  <a:pPr marL="0" indent="0" algn="ctr">
+                    <a:buNone/>
+                  </a:pPr>
+                  <a:r>
+                    <a:rPr lang="en-US" sz="1200" b="1" dirty="0">
+                      <a:solidFill>
+                        <a:srgbClr val="FFFFFF"/>
+                      </a:solidFill>
+                      <a:latin typeface="Calibri" pitchFamily="34" charset="0"/>
+                      <a:ea typeface="Calibri" pitchFamily="34" charset="-122"/>
+                      <a:cs typeface="Calibri" pitchFamily="34" charset="-120"/>
+                    </a:rPr>
+                    <a:t>Source Données</a:t>
+                  </a:r>
+                  <a:endParaRPr lang="en-US" sz="1200" dirty="0"/>
+                </a:p>
+              </p:txBody>
+            </p:sp>
+            <p:sp>
+              <p:nvSpPr>
+                <p:cNvPr id="11" name="Text 7">
+                  <a:extLst>
+                    <a:ext uri="{FF2B5EF4-FFF2-40B4-BE49-F238E27FC236}">
+                      <a16:creationId xmlns:a16="http://schemas.microsoft.com/office/drawing/2014/main" id="{AA8B544B-1801-D67F-C04A-BB28FB2B4FEF}"/>
+                    </a:ext>
+                  </a:extLst>
+                </p:cNvPr>
+                <p:cNvSpPr/>
+                <p:nvPr/>
+              </p:nvSpPr>
+              <p:spPr>
+                <a:xfrm>
+                  <a:off x="1558066" y="3397624"/>
+                  <a:ext cx="1188720" cy="2103120"/>
+                </a:xfrm>
+                <a:prstGeom prst="rect">
+                  <a:avLst/>
+                </a:prstGeom>
+                <a:noFill/>
+                <a:ln/>
+              </p:spPr>
+              <p:txBody>
+                <a:bodyPr wrap="square" lIns="0" tIns="0" rIns="0" bIns="0" rtlCol="0" anchor="ctr"/>
+                <a:lstStyle/>
+                <a:p>
+                  <a:pPr marL="0" indent="0" algn="ctr">
+                    <a:buNone/>
+                  </a:pPr>
+                  <a:r>
+                    <a:rPr lang="en-US" sz="1400" dirty="0" err="1">
+                      <a:solidFill>
+                        <a:srgbClr val="1E293B"/>
+                      </a:solidFill>
+                      <a:ea typeface="Calibri" panose="020F0502020204030204" pitchFamily="34" charset="0"/>
+                      <a:cs typeface="Calibri" panose="020F0502020204030204" pitchFamily="34" charset="0"/>
+                    </a:rPr>
+                    <a:t>InfoClimat.json</a:t>
+                  </a:r>
+                  <a:r>
+                    <a:rPr lang="en-US" sz="1400" dirty="0">
+                      <a:solidFill>
+                        <a:srgbClr val="1E293B"/>
+                      </a:solidFill>
+                      <a:ea typeface="Calibri" panose="020F0502020204030204" pitchFamily="34" charset="0"/>
+                      <a:cs typeface="Calibri" panose="020F0502020204030204" pitchFamily="34" charset="0"/>
+                    </a:rPr>
+                    <a:t>, Weather Underground.xlsx</a:t>
+                  </a:r>
+                </a:p>
+                <a:p>
+                  <a:pPr marL="0" indent="0" algn="ctr">
+                    <a:buNone/>
+                  </a:pPr>
+                  <a:r>
+                    <a:rPr lang="en-US" sz="1400" dirty="0">
+                      <a:solidFill>
+                        <a:srgbClr val="1E293B"/>
+                      </a:solidFill>
+                      <a:ea typeface="Calibri" panose="020F0502020204030204" pitchFamily="34" charset="0"/>
+                      <a:cs typeface="Calibri" panose="020F0502020204030204" pitchFamily="34" charset="0"/>
+                    </a:rPr>
+                    <a:t>Calendar.csv</a:t>
+                  </a:r>
+                  <a:endParaRPr lang="en-US" sz="1400" dirty="0">
+                    <a:ea typeface="Calibri" panose="020F0502020204030204" pitchFamily="34" charset="0"/>
+                    <a:cs typeface="Calibri" panose="020F0502020204030204" pitchFamily="34" charset="0"/>
+                  </a:endParaRPr>
+                </a:p>
+              </p:txBody>
+            </p:sp>
+            <p:sp>
+              <p:nvSpPr>
+                <p:cNvPr id="12" name="Shape 8">
+                  <a:extLst>
+                    <a:ext uri="{FF2B5EF4-FFF2-40B4-BE49-F238E27FC236}">
+                      <a16:creationId xmlns:a16="http://schemas.microsoft.com/office/drawing/2014/main" id="{881C72EE-9DDB-7F55-EC16-2C2BA838B14B}"/>
+                    </a:ext>
+                  </a:extLst>
+                </p:cNvPr>
+                <p:cNvSpPr/>
+                <p:nvPr/>
+              </p:nvSpPr>
+              <p:spPr>
+                <a:xfrm>
+                  <a:off x="2792506" y="4129144"/>
+                  <a:ext cx="182880" cy="0"/>
+                </a:xfrm>
+                <a:prstGeom prst="line">
+                  <a:avLst/>
+                </a:prstGeom>
+                <a:noFill/>
+                <a:ln w="19050">
+                  <a:solidFill>
+                    <a:srgbClr val="64748B"/>
+                  </a:solidFill>
+                  <a:prstDash val="solid"/>
+                </a:ln>
+              </p:spPr>
+              <p:txBody>
+                <a:bodyPr/>
+                <a:lstStyle/>
+                <a:p>
+                  <a:endParaRPr lang="fr-FR"/>
+                </a:p>
+              </p:txBody>
+            </p:sp>
+            <p:sp>
+              <p:nvSpPr>
+                <p:cNvPr id="13" name="Shape 9">
+                  <a:extLst>
+                    <a:ext uri="{FF2B5EF4-FFF2-40B4-BE49-F238E27FC236}">
+                      <a16:creationId xmlns:a16="http://schemas.microsoft.com/office/drawing/2014/main" id="{A612F5D8-4A0E-23DE-9152-F36FAA5B8C16}"/>
+                    </a:ext>
+                  </a:extLst>
+                </p:cNvPr>
+                <p:cNvSpPr/>
+                <p:nvPr/>
+              </p:nvSpPr>
+              <p:spPr>
+                <a:xfrm>
+                  <a:off x="2975386" y="2666104"/>
+                  <a:ext cx="1280160" cy="2926080"/>
+                </a:xfrm>
+                <a:prstGeom prst="rect">
+                  <a:avLst/>
+                </a:prstGeom>
+                <a:solidFill>
+                  <a:srgbClr val="FFFFFF"/>
+                </a:solidFill>
+                <a:ln w="12700">
+                  <a:solidFill>
+                    <a:srgbClr val="E2E8F0"/>
+                  </a:solidFill>
+                  <a:prstDash val="solid"/>
+                </a:ln>
+                <a:effectLst>
+                  <a:outerShdw blurRad="101600" dist="38100" dir="8100000" algn="bl" rotWithShape="0">
+                    <a:srgbClr val="000000">
+                      <a:alpha val="12000"/>
+                    </a:srgbClr>
+                  </a:outerShdw>
+                </a:effectLst>
+              </p:spPr>
+              <p:txBody>
+                <a:bodyPr/>
+                <a:lstStyle/>
+                <a:p>
+                  <a:endParaRPr lang="fr-FR"/>
+                </a:p>
+              </p:txBody>
+            </p:sp>
+            <p:sp>
+              <p:nvSpPr>
+                <p:cNvPr id="14" name="Shape 10">
+                  <a:extLst>
+                    <a:ext uri="{FF2B5EF4-FFF2-40B4-BE49-F238E27FC236}">
+                      <a16:creationId xmlns:a16="http://schemas.microsoft.com/office/drawing/2014/main" id="{6D0796B2-F490-25EF-3E5F-25EB223C3BC8}"/>
+                    </a:ext>
+                  </a:extLst>
+                </p:cNvPr>
+                <p:cNvSpPr/>
+                <p:nvPr/>
+              </p:nvSpPr>
+              <p:spPr>
+                <a:xfrm>
+                  <a:off x="2975386" y="2666104"/>
+                  <a:ext cx="1280160" cy="640080"/>
+                </a:xfrm>
+                <a:prstGeom prst="rect">
+                  <a:avLst/>
+                </a:prstGeom>
+                <a:solidFill>
+                  <a:srgbClr val="FFC000"/>
+                </a:solidFill>
+                <a:ln/>
+              </p:spPr>
+              <p:txBody>
+                <a:bodyPr/>
+                <a:lstStyle/>
+                <a:p>
+                  <a:endParaRPr lang="fr-FR" dirty="0"/>
+                </a:p>
+              </p:txBody>
+            </p:sp>
+            <p:sp>
+              <p:nvSpPr>
+                <p:cNvPr id="15" name="Text 11">
+                  <a:extLst>
+                    <a:ext uri="{FF2B5EF4-FFF2-40B4-BE49-F238E27FC236}">
+                      <a16:creationId xmlns:a16="http://schemas.microsoft.com/office/drawing/2014/main" id="{A87B13CC-335B-078F-4257-D374DF19F4EF}"/>
+                    </a:ext>
+                  </a:extLst>
+                </p:cNvPr>
+                <p:cNvSpPr/>
+                <p:nvPr/>
+              </p:nvSpPr>
+              <p:spPr>
+                <a:xfrm>
+                  <a:off x="2975386" y="2684392"/>
+                  <a:ext cx="1280160" cy="320040"/>
+                </a:xfrm>
+                <a:prstGeom prst="rect">
+                  <a:avLst/>
+                </a:prstGeom>
+                <a:noFill/>
+                <a:ln/>
+              </p:spPr>
+              <p:txBody>
+                <a:bodyPr wrap="square" lIns="0" tIns="0" rIns="0" bIns="0" rtlCol="0" anchor="ctr"/>
+                <a:lstStyle/>
+                <a:p>
+                  <a:pPr marL="0" indent="0" algn="ctr">
+                    <a:buNone/>
+                  </a:pPr>
+                  <a:r>
+                    <a:rPr lang="en-US" sz="2000" b="1" dirty="0">
+                      <a:solidFill>
+                        <a:srgbClr val="FFFFFF"/>
+                      </a:solidFill>
+                      <a:latin typeface="Calibri" pitchFamily="34" charset="0"/>
+                      <a:ea typeface="Calibri" pitchFamily="34" charset="-122"/>
+                      <a:cs typeface="Calibri" pitchFamily="34" charset="-120"/>
+                    </a:rPr>
+                    <a:t>2</a:t>
+                  </a:r>
+                  <a:endParaRPr lang="en-US" sz="2000" dirty="0"/>
+                </a:p>
+              </p:txBody>
+            </p:sp>
+            <p:sp>
+              <p:nvSpPr>
+                <p:cNvPr id="16" name="Text 12">
+                  <a:extLst>
+                    <a:ext uri="{FF2B5EF4-FFF2-40B4-BE49-F238E27FC236}">
+                      <a16:creationId xmlns:a16="http://schemas.microsoft.com/office/drawing/2014/main" id="{7D736573-C80A-FB4C-0954-E1C57A56EC0D}"/>
+                    </a:ext>
+                  </a:extLst>
+                </p:cNvPr>
+                <p:cNvSpPr/>
+                <p:nvPr/>
+              </p:nvSpPr>
+              <p:spPr>
+                <a:xfrm>
+                  <a:off x="2975386" y="3013576"/>
+                  <a:ext cx="1280160" cy="274320"/>
+                </a:xfrm>
+                <a:prstGeom prst="rect">
+                  <a:avLst/>
+                </a:prstGeom>
+                <a:noFill/>
+                <a:ln/>
+              </p:spPr>
+              <p:txBody>
+                <a:bodyPr wrap="square" lIns="0" tIns="0" rIns="0" bIns="0" rtlCol="0" anchor="ctr"/>
+                <a:lstStyle/>
+                <a:p>
+                  <a:pPr marL="0" indent="0" algn="ctr">
+                    <a:buNone/>
+                  </a:pPr>
+                  <a:r>
+                    <a:rPr lang="en-US" sz="1200" b="1" dirty="0" err="1">
+                      <a:solidFill>
+                        <a:srgbClr val="FFFFFF"/>
+                      </a:solidFill>
+                      <a:latin typeface="Calibri" pitchFamily="34" charset="0"/>
+                      <a:ea typeface="Calibri" pitchFamily="34" charset="-122"/>
+                      <a:cs typeface="Calibri" pitchFamily="34" charset="-120"/>
+                    </a:rPr>
+                    <a:t>Collecte</a:t>
+                  </a:r>
+                  <a:endParaRPr lang="en-US" sz="1200" dirty="0"/>
+                </a:p>
+              </p:txBody>
+            </p:sp>
+            <p:sp>
+              <p:nvSpPr>
+                <p:cNvPr id="17" name="Text 13">
+                  <a:extLst>
+                    <a:ext uri="{FF2B5EF4-FFF2-40B4-BE49-F238E27FC236}">
+                      <a16:creationId xmlns:a16="http://schemas.microsoft.com/office/drawing/2014/main" id="{15800591-7DDC-9B1A-792E-127642FBA676}"/>
+                    </a:ext>
+                  </a:extLst>
+                </p:cNvPr>
+                <p:cNvSpPr/>
+                <p:nvPr/>
+              </p:nvSpPr>
+              <p:spPr>
+                <a:xfrm>
+                  <a:off x="3021106" y="3397624"/>
+                  <a:ext cx="1188720" cy="2103120"/>
+                </a:xfrm>
+                <a:prstGeom prst="rect">
+                  <a:avLst/>
+                </a:prstGeom>
+                <a:noFill/>
+                <a:ln/>
+              </p:spPr>
+              <p:txBody>
+                <a:bodyPr wrap="square" lIns="0" tIns="0" rIns="0" bIns="0" rtlCol="0" anchor="ctr"/>
+                <a:lstStyle/>
+                <a:p>
+                  <a:pPr algn="ctr"/>
+                  <a:r>
+                    <a:rPr lang="en-US" sz="1400" dirty="0" err="1">
+                      <a:solidFill>
+                        <a:srgbClr val="1E293B"/>
+                      </a:solidFill>
+                      <a:ea typeface="Consolas" pitchFamily="34" charset="-122"/>
+                      <a:cs typeface="Consolas" pitchFamily="34" charset="-120"/>
+                    </a:rPr>
+                    <a:t>Airbyte</a:t>
+                  </a:r>
+                  <a:endParaRPr lang="en-US" sz="1400" dirty="0">
+                    <a:solidFill>
+                      <a:srgbClr val="1E293B"/>
+                    </a:solidFill>
+                    <a:ea typeface="Consolas" pitchFamily="34" charset="-122"/>
+                    <a:cs typeface="Consolas" pitchFamily="34" charset="-120"/>
+                  </a:endParaRPr>
+                </a:p>
+                <a:p>
+                  <a:pPr marL="0" indent="0" algn="ctr">
+                    <a:buNone/>
+                  </a:pPr>
+                  <a:r>
+                    <a:rPr lang="en-US" sz="1400" dirty="0">
+                      <a:solidFill>
+                        <a:srgbClr val="1E293B"/>
+                      </a:solidFill>
+                      <a:ea typeface="Consolas" pitchFamily="34" charset="-122"/>
+                      <a:cs typeface="Consolas" pitchFamily="34" charset="-120"/>
+                    </a:rPr>
+                    <a:t>Sources </a:t>
+                  </a:r>
+                  <a:r>
+                    <a:rPr lang="en-US" sz="1400" dirty="0" err="1">
+                      <a:solidFill>
+                        <a:srgbClr val="1E293B"/>
+                      </a:solidFill>
+                    </a:rPr>
+                    <a:t>Connecteurs</a:t>
+                  </a:r>
+                  <a:r>
+                    <a:rPr lang="en-US" sz="1400" dirty="0">
+                      <a:solidFill>
+                        <a:srgbClr val="1E293B"/>
+                      </a:solidFill>
+                    </a:rPr>
+                    <a:t> </a:t>
+                  </a:r>
+                </a:p>
+                <a:p>
+                  <a:pPr marL="0" indent="0" algn="ctr">
+                    <a:buNone/>
+                  </a:pPr>
+                  <a:r>
+                    <a:rPr lang="en-US" sz="1400" dirty="0">
+                      <a:solidFill>
+                        <a:srgbClr val="1E293B"/>
+                      </a:solidFill>
+                    </a:rPr>
+                    <a:t>Flux </a:t>
+                  </a:r>
+                  <a:r>
+                    <a:rPr lang="en-US" sz="1400" dirty="0" err="1">
+                      <a:solidFill>
+                        <a:srgbClr val="1E293B"/>
+                      </a:solidFill>
+                    </a:rPr>
+                    <a:t>vers</a:t>
+                  </a:r>
+                  <a:r>
+                    <a:rPr lang="en-US" sz="1400" dirty="0">
+                      <a:solidFill>
+                        <a:srgbClr val="1E293B"/>
+                      </a:solidFill>
+                    </a:rPr>
+                    <a:t> PostgreSQL</a:t>
+                  </a:r>
+                </a:p>
+                <a:p>
+                  <a:pPr marL="0" indent="0" algn="ctr">
+                    <a:buNone/>
+                  </a:pPr>
+                  <a:r>
+                    <a:rPr lang="en-US" sz="1400" dirty="0">
+                      <a:solidFill>
+                        <a:srgbClr val="1E293B"/>
+                      </a:solidFill>
+                    </a:rPr>
+                    <a:t>Full refresh - Overwrite</a:t>
+                  </a:r>
+                  <a:endParaRPr lang="en-US" sz="1400" dirty="0"/>
+                </a:p>
+              </p:txBody>
+            </p:sp>
+            <p:sp>
+              <p:nvSpPr>
+                <p:cNvPr id="18" name="Shape 14">
+                  <a:extLst>
+                    <a:ext uri="{FF2B5EF4-FFF2-40B4-BE49-F238E27FC236}">
+                      <a16:creationId xmlns:a16="http://schemas.microsoft.com/office/drawing/2014/main" id="{65AC3DD2-C05C-08B8-C2BD-4B4E52EC0802}"/>
+                    </a:ext>
+                  </a:extLst>
+                </p:cNvPr>
+                <p:cNvSpPr/>
+                <p:nvPr/>
+              </p:nvSpPr>
+              <p:spPr>
+                <a:xfrm>
+                  <a:off x="4255546" y="4129144"/>
+                  <a:ext cx="182880" cy="0"/>
+                </a:xfrm>
+                <a:prstGeom prst="line">
+                  <a:avLst/>
+                </a:prstGeom>
+                <a:noFill/>
+                <a:ln w="19050">
+                  <a:solidFill>
+                    <a:srgbClr val="64748B"/>
+                  </a:solidFill>
+                  <a:prstDash val="solid"/>
+                </a:ln>
+              </p:spPr>
+              <p:txBody>
+                <a:bodyPr/>
+                <a:lstStyle/>
+                <a:p>
+                  <a:endParaRPr lang="fr-FR"/>
+                </a:p>
+              </p:txBody>
+            </p:sp>
+            <p:sp>
+              <p:nvSpPr>
+                <p:cNvPr id="19" name="Shape 15">
+                  <a:extLst>
+                    <a:ext uri="{FF2B5EF4-FFF2-40B4-BE49-F238E27FC236}">
+                      <a16:creationId xmlns:a16="http://schemas.microsoft.com/office/drawing/2014/main" id="{D3A9531D-E4CE-6543-B261-9C79F5D57871}"/>
+                    </a:ext>
+                  </a:extLst>
+                </p:cNvPr>
+                <p:cNvSpPr/>
+                <p:nvPr/>
+              </p:nvSpPr>
+              <p:spPr>
+                <a:xfrm>
+                  <a:off x="4438426" y="2666104"/>
+                  <a:ext cx="1280160" cy="2926080"/>
+                </a:xfrm>
+                <a:prstGeom prst="rect">
+                  <a:avLst/>
+                </a:prstGeom>
+                <a:solidFill>
+                  <a:srgbClr val="FFFFFF"/>
+                </a:solidFill>
+                <a:ln w="12700">
+                  <a:solidFill>
+                    <a:srgbClr val="E2E8F0"/>
+                  </a:solidFill>
+                  <a:prstDash val="solid"/>
+                </a:ln>
+                <a:effectLst>
+                  <a:outerShdw blurRad="101600" dist="38100" dir="8100000" algn="bl" rotWithShape="0">
+                    <a:srgbClr val="000000">
+                      <a:alpha val="12000"/>
+                    </a:srgbClr>
+                  </a:outerShdw>
+                </a:effectLst>
+              </p:spPr>
+              <p:txBody>
+                <a:bodyPr/>
+                <a:lstStyle/>
+                <a:p>
+                  <a:endParaRPr lang="fr-FR" dirty="0"/>
+                </a:p>
+              </p:txBody>
+            </p:sp>
+            <p:sp>
+              <p:nvSpPr>
+                <p:cNvPr id="20" name="Shape 16">
+                  <a:extLst>
+                    <a:ext uri="{FF2B5EF4-FFF2-40B4-BE49-F238E27FC236}">
+                      <a16:creationId xmlns:a16="http://schemas.microsoft.com/office/drawing/2014/main" id="{9598B81C-A802-7114-4090-0E1AA07B575C}"/>
+                    </a:ext>
+                  </a:extLst>
+                </p:cNvPr>
+                <p:cNvSpPr/>
+                <p:nvPr/>
+              </p:nvSpPr>
+              <p:spPr>
+                <a:xfrm>
+                  <a:off x="4438426" y="2666104"/>
+                  <a:ext cx="1280160" cy="640080"/>
+                </a:xfrm>
+                <a:prstGeom prst="rect">
+                  <a:avLst/>
+                </a:prstGeom>
+                <a:solidFill>
+                  <a:srgbClr val="00B4D8"/>
+                </a:solidFill>
+                <a:ln/>
+              </p:spPr>
+              <p:txBody>
+                <a:bodyPr/>
+                <a:lstStyle/>
+                <a:p>
+                  <a:endParaRPr lang="fr-FR"/>
+                </a:p>
+              </p:txBody>
+            </p:sp>
+            <p:sp>
+              <p:nvSpPr>
+                <p:cNvPr id="21" name="Text 17">
+                  <a:extLst>
+                    <a:ext uri="{FF2B5EF4-FFF2-40B4-BE49-F238E27FC236}">
+                      <a16:creationId xmlns:a16="http://schemas.microsoft.com/office/drawing/2014/main" id="{91FC1ED8-0510-6F85-AB75-1D06C6D40AC9}"/>
+                    </a:ext>
+                  </a:extLst>
+                </p:cNvPr>
+                <p:cNvSpPr/>
+                <p:nvPr/>
+              </p:nvSpPr>
+              <p:spPr>
+                <a:xfrm>
+                  <a:off x="4438426" y="2684392"/>
+                  <a:ext cx="1280160" cy="320040"/>
+                </a:xfrm>
+                <a:prstGeom prst="rect">
+                  <a:avLst/>
+                </a:prstGeom>
+                <a:noFill/>
+                <a:ln/>
+              </p:spPr>
+              <p:txBody>
+                <a:bodyPr wrap="square" lIns="0" tIns="0" rIns="0" bIns="0" rtlCol="0" anchor="ctr"/>
+                <a:lstStyle/>
+                <a:p>
+                  <a:pPr marL="0" indent="0" algn="ctr">
+                    <a:buNone/>
+                  </a:pPr>
+                  <a:r>
+                    <a:rPr lang="en-US" sz="2000" b="1" dirty="0">
+                      <a:solidFill>
+                        <a:srgbClr val="FFFFFF"/>
+                      </a:solidFill>
+                      <a:latin typeface="Calibri" pitchFamily="34" charset="0"/>
+                      <a:ea typeface="Calibri" pitchFamily="34" charset="-122"/>
+                      <a:cs typeface="Calibri" pitchFamily="34" charset="-120"/>
+                    </a:rPr>
+                    <a:t>3</a:t>
+                  </a:r>
+                  <a:endParaRPr lang="en-US" sz="2000" dirty="0"/>
+                </a:p>
+              </p:txBody>
+            </p:sp>
+            <p:sp>
+              <p:nvSpPr>
+                <p:cNvPr id="22" name="Text 18">
+                  <a:extLst>
+                    <a:ext uri="{FF2B5EF4-FFF2-40B4-BE49-F238E27FC236}">
+                      <a16:creationId xmlns:a16="http://schemas.microsoft.com/office/drawing/2014/main" id="{D0A30543-CD57-DB32-3FEF-BECB806A2BBA}"/>
+                    </a:ext>
+                  </a:extLst>
+                </p:cNvPr>
+                <p:cNvSpPr/>
+                <p:nvPr/>
+              </p:nvSpPr>
+              <p:spPr>
+                <a:xfrm>
+                  <a:off x="4438426" y="3013576"/>
+                  <a:ext cx="1280160" cy="274320"/>
+                </a:xfrm>
+                <a:prstGeom prst="rect">
+                  <a:avLst/>
+                </a:prstGeom>
+                <a:noFill/>
+                <a:ln/>
+              </p:spPr>
+              <p:txBody>
+                <a:bodyPr wrap="square" lIns="0" tIns="0" rIns="0" bIns="0" rtlCol="0" anchor="ctr"/>
+                <a:lstStyle/>
+                <a:p>
+                  <a:pPr marL="0" indent="0" algn="ctr">
+                    <a:buNone/>
+                  </a:pPr>
+                  <a:r>
+                    <a:rPr lang="en-US" sz="1200" b="1" dirty="0">
+                      <a:solidFill>
+                        <a:srgbClr val="FFFFFF"/>
+                      </a:solidFill>
+                      <a:latin typeface="Calibri" pitchFamily="34" charset="0"/>
+                      <a:ea typeface="Calibri" pitchFamily="34" charset="-122"/>
+                      <a:cs typeface="Calibri" pitchFamily="34" charset="-120"/>
+                    </a:rPr>
+                    <a:t>Stockage</a:t>
+                  </a:r>
+                  <a:endParaRPr lang="en-US" sz="1200" dirty="0"/>
+                </a:p>
+              </p:txBody>
+            </p:sp>
+            <p:sp>
+              <p:nvSpPr>
+                <p:cNvPr id="23" name="Text 19">
+                  <a:extLst>
+                    <a:ext uri="{FF2B5EF4-FFF2-40B4-BE49-F238E27FC236}">
+                      <a16:creationId xmlns:a16="http://schemas.microsoft.com/office/drawing/2014/main" id="{09DB78B2-87DA-35C2-DA6C-59742666853C}"/>
+                    </a:ext>
+                  </a:extLst>
+                </p:cNvPr>
+                <p:cNvSpPr/>
+                <p:nvPr/>
+              </p:nvSpPr>
+              <p:spPr>
+                <a:xfrm>
+                  <a:off x="4484146" y="3397624"/>
+                  <a:ext cx="1188720" cy="2103120"/>
+                </a:xfrm>
+                <a:prstGeom prst="rect">
+                  <a:avLst/>
+                </a:prstGeom>
+                <a:noFill/>
+                <a:ln/>
+              </p:spPr>
+              <p:txBody>
+                <a:bodyPr wrap="square" lIns="0" tIns="0" rIns="0" bIns="0" rtlCol="0" anchor="ctr"/>
+                <a:lstStyle/>
+                <a:p>
+                  <a:pPr marL="0" indent="0" algn="ctr">
+                    <a:buNone/>
+                  </a:pPr>
+                  <a:r>
+                    <a:rPr lang="en-US" sz="1400" dirty="0" err="1">
+                      <a:solidFill>
+                        <a:srgbClr val="1E293B"/>
+                      </a:solidFill>
+                    </a:rPr>
+                    <a:t>Schéma</a:t>
+                  </a:r>
+                  <a:r>
+                    <a:rPr lang="en-US" sz="1400" dirty="0">
+                      <a:solidFill>
+                        <a:srgbClr val="1E293B"/>
+                      </a:solidFill>
+                    </a:rPr>
+                    <a:t> raw</a:t>
+                  </a:r>
+                </a:p>
+                <a:p>
+                  <a:pPr marL="0" indent="0" algn="ctr">
+                    <a:buNone/>
+                  </a:pPr>
+                  <a:r>
+                    <a:rPr lang="en-US" sz="1400" dirty="0">
+                      <a:solidFill>
+                        <a:srgbClr val="1E293B"/>
+                      </a:solidFill>
+                    </a:rPr>
+                    <a:t>PostgreSQL </a:t>
+                  </a:r>
+                  <a:endParaRPr lang="en-US" sz="1400" dirty="0"/>
+                </a:p>
+              </p:txBody>
+            </p:sp>
+            <p:sp>
+              <p:nvSpPr>
+                <p:cNvPr id="24" name="Shape 20">
+                  <a:extLst>
+                    <a:ext uri="{FF2B5EF4-FFF2-40B4-BE49-F238E27FC236}">
+                      <a16:creationId xmlns:a16="http://schemas.microsoft.com/office/drawing/2014/main" id="{3AFC5285-7202-1B52-179C-D7D0C3340EF8}"/>
+                    </a:ext>
+                  </a:extLst>
+                </p:cNvPr>
+                <p:cNvSpPr/>
+                <p:nvPr/>
+              </p:nvSpPr>
+              <p:spPr>
+                <a:xfrm>
+                  <a:off x="5718586" y="4129144"/>
+                  <a:ext cx="182880" cy="0"/>
+                </a:xfrm>
+                <a:prstGeom prst="line">
+                  <a:avLst/>
+                </a:prstGeom>
+                <a:noFill/>
+                <a:ln w="19050">
+                  <a:solidFill>
+                    <a:srgbClr val="64748B"/>
+                  </a:solidFill>
+                  <a:prstDash val="solid"/>
+                </a:ln>
+              </p:spPr>
+              <p:txBody>
+                <a:bodyPr/>
+                <a:lstStyle/>
+                <a:p>
+                  <a:endParaRPr lang="fr-FR"/>
+                </a:p>
+              </p:txBody>
+            </p:sp>
+            <p:sp>
+              <p:nvSpPr>
+                <p:cNvPr id="25" name="Shape 21">
+                  <a:extLst>
+                    <a:ext uri="{FF2B5EF4-FFF2-40B4-BE49-F238E27FC236}">
+                      <a16:creationId xmlns:a16="http://schemas.microsoft.com/office/drawing/2014/main" id="{9CC3BFC5-A4D2-E311-01DA-A1253B2D7608}"/>
+                    </a:ext>
+                  </a:extLst>
+                </p:cNvPr>
+                <p:cNvSpPr/>
+                <p:nvPr/>
+              </p:nvSpPr>
+              <p:spPr>
+                <a:xfrm>
+                  <a:off x="5901466" y="2666104"/>
+                  <a:ext cx="1280160" cy="2926080"/>
+                </a:xfrm>
+                <a:prstGeom prst="rect">
+                  <a:avLst/>
+                </a:prstGeom>
+                <a:solidFill>
+                  <a:srgbClr val="FFFFFF"/>
+                </a:solidFill>
+                <a:ln w="12700">
+                  <a:solidFill>
+                    <a:srgbClr val="E2E8F0"/>
+                  </a:solidFill>
+                  <a:prstDash val="solid"/>
+                </a:ln>
+                <a:effectLst>
+                  <a:outerShdw blurRad="101600" dist="38100" dir="8100000" algn="bl" rotWithShape="0">
+                    <a:srgbClr val="000000">
+                      <a:alpha val="12000"/>
+                    </a:srgbClr>
+                  </a:outerShdw>
+                </a:effectLst>
+              </p:spPr>
+              <p:txBody>
+                <a:bodyPr/>
+                <a:lstStyle/>
+                <a:p>
+                  <a:endParaRPr lang="fr-FR"/>
+                </a:p>
+              </p:txBody>
+            </p:sp>
+            <p:sp>
+              <p:nvSpPr>
+                <p:cNvPr id="26" name="Shape 22">
+                  <a:extLst>
+                    <a:ext uri="{FF2B5EF4-FFF2-40B4-BE49-F238E27FC236}">
+                      <a16:creationId xmlns:a16="http://schemas.microsoft.com/office/drawing/2014/main" id="{1BFB54FF-7330-18A2-0A5F-1B8753C1C935}"/>
+                    </a:ext>
+                  </a:extLst>
+                </p:cNvPr>
+                <p:cNvSpPr/>
+                <p:nvPr/>
+              </p:nvSpPr>
+              <p:spPr>
+                <a:xfrm>
+                  <a:off x="5901466" y="2666104"/>
+                  <a:ext cx="1280160" cy="640080"/>
+                </a:xfrm>
+                <a:prstGeom prst="rect">
+                  <a:avLst/>
+                </a:prstGeom>
+                <a:solidFill>
+                  <a:srgbClr val="16A34A"/>
+                </a:solidFill>
+                <a:ln/>
+              </p:spPr>
+              <p:txBody>
+                <a:bodyPr/>
+                <a:lstStyle/>
+                <a:p>
+                  <a:endParaRPr lang="fr-FR"/>
+                </a:p>
+              </p:txBody>
+            </p:sp>
+            <p:sp>
+              <p:nvSpPr>
+                <p:cNvPr id="27" name="Text 23">
+                  <a:extLst>
+                    <a:ext uri="{FF2B5EF4-FFF2-40B4-BE49-F238E27FC236}">
+                      <a16:creationId xmlns:a16="http://schemas.microsoft.com/office/drawing/2014/main" id="{A8D87525-D2A3-7F6E-11D5-A104A835F26F}"/>
+                    </a:ext>
+                  </a:extLst>
+                </p:cNvPr>
+                <p:cNvSpPr/>
+                <p:nvPr/>
+              </p:nvSpPr>
+              <p:spPr>
+                <a:xfrm>
+                  <a:off x="5901466" y="2684392"/>
+                  <a:ext cx="1280160" cy="320040"/>
+                </a:xfrm>
+                <a:prstGeom prst="rect">
+                  <a:avLst/>
+                </a:prstGeom>
+                <a:noFill/>
+                <a:ln/>
+              </p:spPr>
+              <p:txBody>
+                <a:bodyPr wrap="square" lIns="0" tIns="0" rIns="0" bIns="0" rtlCol="0" anchor="ctr"/>
+                <a:lstStyle/>
+                <a:p>
+                  <a:pPr marL="0" indent="0" algn="ctr">
+                    <a:buNone/>
+                  </a:pPr>
+                  <a:r>
+                    <a:rPr lang="en-US" sz="2000" b="1" dirty="0">
+                      <a:solidFill>
+                        <a:srgbClr val="FFFFFF"/>
+                      </a:solidFill>
+                      <a:latin typeface="Calibri" pitchFamily="34" charset="0"/>
+                      <a:ea typeface="Calibri" pitchFamily="34" charset="-122"/>
+                      <a:cs typeface="Calibri" pitchFamily="34" charset="-120"/>
+                    </a:rPr>
+                    <a:t>4</a:t>
+                  </a:r>
+                  <a:endParaRPr lang="en-US" sz="2000" dirty="0"/>
+                </a:p>
+              </p:txBody>
+            </p:sp>
+            <p:sp>
+              <p:nvSpPr>
+                <p:cNvPr id="28" name="Text 24">
+                  <a:extLst>
+                    <a:ext uri="{FF2B5EF4-FFF2-40B4-BE49-F238E27FC236}">
+                      <a16:creationId xmlns:a16="http://schemas.microsoft.com/office/drawing/2014/main" id="{169A9ED4-E76F-A1E2-6F6C-B96B14259C8B}"/>
+                    </a:ext>
+                  </a:extLst>
+                </p:cNvPr>
+                <p:cNvSpPr/>
+                <p:nvPr/>
+              </p:nvSpPr>
+              <p:spPr>
+                <a:xfrm>
+                  <a:off x="5901466" y="3013576"/>
+                  <a:ext cx="1280160" cy="274320"/>
+                </a:xfrm>
+                <a:prstGeom prst="rect">
+                  <a:avLst/>
+                </a:prstGeom>
+                <a:noFill/>
+                <a:ln/>
+              </p:spPr>
+              <p:txBody>
+                <a:bodyPr wrap="square" lIns="0" tIns="0" rIns="0" bIns="0" rtlCol="0" anchor="ctr"/>
+                <a:lstStyle/>
+                <a:p>
+                  <a:pPr marL="0" indent="0" algn="ctr">
+                    <a:buNone/>
+                  </a:pPr>
+                  <a:r>
+                    <a:rPr lang="en-US" sz="1200" b="1" dirty="0">
+                      <a:solidFill>
+                        <a:srgbClr val="FFFFFF"/>
+                      </a:solidFill>
+                      <a:latin typeface="Calibri" pitchFamily="34" charset="0"/>
+                      <a:ea typeface="Calibri" pitchFamily="34" charset="-122"/>
+                      <a:cs typeface="Calibri" pitchFamily="34" charset="-120"/>
+                    </a:rPr>
+                    <a:t>Transformation</a:t>
+                  </a:r>
+                  <a:endParaRPr lang="en-US" sz="1200" dirty="0"/>
+                </a:p>
+              </p:txBody>
+            </p:sp>
+            <p:sp>
+              <p:nvSpPr>
+                <p:cNvPr id="29" name="Text 25">
+                  <a:extLst>
+                    <a:ext uri="{FF2B5EF4-FFF2-40B4-BE49-F238E27FC236}">
+                      <a16:creationId xmlns:a16="http://schemas.microsoft.com/office/drawing/2014/main" id="{48243563-7F5F-CC00-D295-BD72D646D5EF}"/>
+                    </a:ext>
+                  </a:extLst>
+                </p:cNvPr>
+                <p:cNvSpPr/>
+                <p:nvPr/>
+              </p:nvSpPr>
+              <p:spPr>
+                <a:xfrm>
+                  <a:off x="5947186" y="3397624"/>
+                  <a:ext cx="1188720" cy="2103120"/>
+                </a:xfrm>
+                <a:prstGeom prst="rect">
+                  <a:avLst/>
+                </a:prstGeom>
+                <a:noFill/>
+                <a:ln/>
+              </p:spPr>
+              <p:txBody>
+                <a:bodyPr wrap="square" lIns="0" tIns="0" rIns="0" bIns="0" rtlCol="0" anchor="ctr"/>
+                <a:lstStyle/>
+                <a:p>
+                  <a:pPr marL="0" indent="0" algn="ctr">
+                    <a:buNone/>
+                  </a:pPr>
+                  <a:r>
+                    <a:rPr lang="en-US" sz="1200" dirty="0" err="1">
+                      <a:solidFill>
+                        <a:srgbClr val="1E293B"/>
+                      </a:solidFill>
+                      <a:ea typeface="Consolas" pitchFamily="34" charset="-122"/>
+                      <a:cs typeface="Consolas" pitchFamily="34" charset="-120"/>
+                    </a:rPr>
+                    <a:t>dbt</a:t>
+                  </a:r>
+                  <a:r>
+                    <a:rPr lang="en-US" sz="1200" dirty="0">
+                      <a:solidFill>
+                        <a:srgbClr val="1E293B"/>
+                      </a:solidFill>
+                      <a:ea typeface="Consolas" pitchFamily="34" charset="-122"/>
+                      <a:cs typeface="Consolas" pitchFamily="34" charset="-120"/>
+                    </a:rPr>
+                    <a:t> seed </a:t>
+                  </a:r>
+                </a:p>
+                <a:p>
+                  <a:pPr marL="0" indent="0" algn="ctr">
+                    <a:buNone/>
+                  </a:pPr>
+                  <a:r>
+                    <a:rPr lang="en-US" sz="1200" dirty="0" err="1">
+                      <a:solidFill>
+                        <a:srgbClr val="1E293B"/>
+                      </a:solidFill>
+                      <a:ea typeface="Consolas" pitchFamily="34" charset="-122"/>
+                      <a:cs typeface="Consolas" pitchFamily="34" charset="-120"/>
+                    </a:rPr>
+                    <a:t>dbt</a:t>
+                  </a:r>
+                  <a:r>
+                    <a:rPr lang="en-US" sz="1200" dirty="0">
+                      <a:solidFill>
+                        <a:srgbClr val="1E293B"/>
+                      </a:solidFill>
+                      <a:ea typeface="Consolas" pitchFamily="34" charset="-122"/>
+                      <a:cs typeface="Consolas" pitchFamily="34" charset="-120"/>
+                    </a:rPr>
+                    <a:t> run</a:t>
+                  </a:r>
+                </a:p>
+                <a:p>
+                  <a:pPr marL="0" indent="0" algn="ctr">
+                    <a:buNone/>
+                  </a:pPr>
+                  <a:r>
+                    <a:rPr lang="en-US" sz="1200" dirty="0" err="1">
+                      <a:solidFill>
+                        <a:srgbClr val="1E293B"/>
+                      </a:solidFill>
+                    </a:rPr>
+                    <a:t>Schema.yml</a:t>
+                  </a:r>
+                  <a:endParaRPr lang="en-US" sz="1200" dirty="0">
+                    <a:solidFill>
+                      <a:srgbClr val="1E293B"/>
+                    </a:solidFill>
+                  </a:endParaRPr>
+                </a:p>
+                <a:p>
+                  <a:pPr marL="0" indent="0" algn="ctr">
+                    <a:buNone/>
+                  </a:pPr>
+                  <a:r>
+                    <a:rPr lang="en-US" sz="1200" dirty="0">
+                      <a:solidFill>
+                        <a:srgbClr val="1E293B"/>
+                      </a:solidFill>
+                    </a:rPr>
+                    <a:t>Models (staging, intermediate, marts)</a:t>
+                  </a:r>
+                </a:p>
+                <a:p>
+                  <a:pPr algn="ctr"/>
+                  <a:r>
+                    <a:rPr lang="en-US" sz="1200" dirty="0">
+                      <a:solidFill>
+                        <a:srgbClr val="1E293B"/>
+                      </a:solidFill>
+                    </a:rPr>
+                    <a:t>Seed (</a:t>
+                  </a:r>
+                  <a:r>
+                    <a:rPr lang="en-US" sz="1200" dirty="0">
+                      <a:solidFill>
+                        <a:srgbClr val="1E293B"/>
+                      </a:solidFill>
+                      <a:ea typeface="Calibri" panose="020F0502020204030204" pitchFamily="34" charset="0"/>
+                      <a:cs typeface="Calibri" panose="020F0502020204030204" pitchFamily="34" charset="0"/>
+                    </a:rPr>
+                    <a:t>Metadonnee_stations.csv, </a:t>
+                  </a:r>
+                </a:p>
+                <a:p>
+                  <a:pPr marL="0" indent="0" algn="ctr">
+                    <a:buNone/>
+                  </a:pPr>
+                  <a:r>
+                    <a:rPr lang="en-US" sz="1200" dirty="0"/>
+                    <a:t>time.csv)</a:t>
+                  </a:r>
+                </a:p>
+              </p:txBody>
+            </p:sp>
+            <p:sp>
+              <p:nvSpPr>
+                <p:cNvPr id="30" name="Shape 26">
+                  <a:extLst>
+                    <a:ext uri="{FF2B5EF4-FFF2-40B4-BE49-F238E27FC236}">
+                      <a16:creationId xmlns:a16="http://schemas.microsoft.com/office/drawing/2014/main" id="{63179906-4D4F-C04F-8521-173161C90476}"/>
+                    </a:ext>
+                  </a:extLst>
+                </p:cNvPr>
+                <p:cNvSpPr/>
+                <p:nvPr/>
+              </p:nvSpPr>
+              <p:spPr>
+                <a:xfrm>
+                  <a:off x="7181626" y="4129144"/>
+                  <a:ext cx="182880" cy="0"/>
+                </a:xfrm>
+                <a:prstGeom prst="line">
+                  <a:avLst/>
+                </a:prstGeom>
+                <a:noFill/>
+                <a:ln w="19050">
+                  <a:solidFill>
+                    <a:srgbClr val="64748B"/>
+                  </a:solidFill>
+                  <a:prstDash val="solid"/>
+                </a:ln>
+              </p:spPr>
+              <p:txBody>
+                <a:bodyPr/>
+                <a:lstStyle/>
+                <a:p>
+                  <a:endParaRPr lang="fr-FR"/>
+                </a:p>
+              </p:txBody>
+            </p:sp>
+            <p:sp>
+              <p:nvSpPr>
+                <p:cNvPr id="31" name="Shape 27">
+                  <a:extLst>
+                    <a:ext uri="{FF2B5EF4-FFF2-40B4-BE49-F238E27FC236}">
+                      <a16:creationId xmlns:a16="http://schemas.microsoft.com/office/drawing/2014/main" id="{5A852564-766B-1B91-E7CC-97914C594F3E}"/>
+                    </a:ext>
+                  </a:extLst>
+                </p:cNvPr>
+                <p:cNvSpPr/>
+                <p:nvPr/>
+              </p:nvSpPr>
+              <p:spPr>
+                <a:xfrm>
+                  <a:off x="7364506" y="2666104"/>
+                  <a:ext cx="1280160" cy="2926080"/>
+                </a:xfrm>
+                <a:prstGeom prst="rect">
+                  <a:avLst/>
+                </a:prstGeom>
+                <a:solidFill>
+                  <a:srgbClr val="FFFFFF"/>
+                </a:solidFill>
+                <a:ln w="12700">
+                  <a:solidFill>
+                    <a:srgbClr val="E2E8F0"/>
+                  </a:solidFill>
+                  <a:prstDash val="solid"/>
+                </a:ln>
+                <a:effectLst>
+                  <a:outerShdw blurRad="101600" dist="38100" dir="8100000" algn="bl" rotWithShape="0">
+                    <a:srgbClr val="000000">
+                      <a:alpha val="12000"/>
+                    </a:srgbClr>
+                  </a:outerShdw>
+                </a:effectLst>
+              </p:spPr>
+              <p:txBody>
+                <a:bodyPr/>
+                <a:lstStyle/>
+                <a:p>
+                  <a:endParaRPr lang="fr-FR"/>
+                </a:p>
+              </p:txBody>
+            </p:sp>
+            <p:sp>
+              <p:nvSpPr>
+                <p:cNvPr id="32" name="Shape 28">
+                  <a:extLst>
+                    <a:ext uri="{FF2B5EF4-FFF2-40B4-BE49-F238E27FC236}">
+                      <a16:creationId xmlns:a16="http://schemas.microsoft.com/office/drawing/2014/main" id="{B69EE9B9-4ADF-3842-0C83-ECA7BB04D6C3}"/>
+                    </a:ext>
+                  </a:extLst>
+                </p:cNvPr>
+                <p:cNvSpPr/>
+                <p:nvPr/>
+              </p:nvSpPr>
+              <p:spPr>
+                <a:xfrm>
+                  <a:off x="7364506" y="2666104"/>
+                  <a:ext cx="1280160" cy="640080"/>
+                </a:xfrm>
+                <a:prstGeom prst="rect">
+                  <a:avLst/>
+                </a:prstGeom>
+                <a:solidFill>
+                  <a:srgbClr val="7C3AED"/>
+                </a:solidFill>
+                <a:ln/>
+              </p:spPr>
+              <p:txBody>
+                <a:bodyPr/>
+                <a:lstStyle/>
+                <a:p>
+                  <a:endParaRPr lang="fr-FR"/>
+                </a:p>
+              </p:txBody>
+            </p:sp>
+            <p:sp>
+              <p:nvSpPr>
+                <p:cNvPr id="33" name="Text 29">
+                  <a:extLst>
+                    <a:ext uri="{FF2B5EF4-FFF2-40B4-BE49-F238E27FC236}">
+                      <a16:creationId xmlns:a16="http://schemas.microsoft.com/office/drawing/2014/main" id="{43F1433F-DB01-264D-F203-9931C1CD6C9D}"/>
+                    </a:ext>
+                  </a:extLst>
+                </p:cNvPr>
+                <p:cNvSpPr/>
+                <p:nvPr/>
+              </p:nvSpPr>
+              <p:spPr>
+                <a:xfrm>
+                  <a:off x="7364506" y="2684392"/>
+                  <a:ext cx="1280160" cy="320040"/>
+                </a:xfrm>
+                <a:prstGeom prst="rect">
+                  <a:avLst/>
+                </a:prstGeom>
+                <a:noFill/>
+                <a:ln/>
+              </p:spPr>
+              <p:txBody>
+                <a:bodyPr wrap="square" lIns="0" tIns="0" rIns="0" bIns="0" rtlCol="0" anchor="ctr"/>
+                <a:lstStyle/>
+                <a:p>
+                  <a:pPr marL="0" indent="0" algn="ctr">
+                    <a:buNone/>
+                  </a:pPr>
+                  <a:r>
+                    <a:rPr lang="en-US" sz="2000" b="1" dirty="0">
+                      <a:solidFill>
+                        <a:srgbClr val="FFFFFF"/>
+                      </a:solidFill>
+                      <a:latin typeface="Calibri" pitchFamily="34" charset="0"/>
+                      <a:ea typeface="Calibri" pitchFamily="34" charset="-122"/>
+                      <a:cs typeface="Calibri" pitchFamily="34" charset="-120"/>
+                    </a:rPr>
+                    <a:t>5</a:t>
+                  </a:r>
+                  <a:endParaRPr lang="en-US" sz="2000" dirty="0"/>
+                </a:p>
+              </p:txBody>
+            </p:sp>
+            <p:sp>
+              <p:nvSpPr>
+                <p:cNvPr id="34" name="Text 30">
+                  <a:extLst>
+                    <a:ext uri="{FF2B5EF4-FFF2-40B4-BE49-F238E27FC236}">
+                      <a16:creationId xmlns:a16="http://schemas.microsoft.com/office/drawing/2014/main" id="{A8281D4E-BC15-4BEF-4A39-7F2E43B920C8}"/>
+                    </a:ext>
+                  </a:extLst>
+                </p:cNvPr>
+                <p:cNvSpPr/>
+                <p:nvPr/>
+              </p:nvSpPr>
+              <p:spPr>
+                <a:xfrm>
+                  <a:off x="7364506" y="3013576"/>
+                  <a:ext cx="1280160" cy="274320"/>
+                </a:xfrm>
+                <a:prstGeom prst="rect">
+                  <a:avLst/>
+                </a:prstGeom>
+                <a:noFill/>
+                <a:ln/>
+              </p:spPr>
+              <p:txBody>
+                <a:bodyPr wrap="square" lIns="0" tIns="0" rIns="0" bIns="0" rtlCol="0" anchor="ctr"/>
+                <a:lstStyle/>
+                <a:p>
+                  <a:pPr marL="0" indent="0" algn="ctr">
+                    <a:buNone/>
+                  </a:pPr>
+                  <a:r>
+                    <a:rPr lang="en-US" sz="1200" b="1" dirty="0">
+                      <a:solidFill>
+                        <a:srgbClr val="FFFFFF"/>
+                      </a:solidFill>
+                      <a:latin typeface="Calibri" pitchFamily="34" charset="0"/>
+                      <a:ea typeface="Calibri" pitchFamily="34" charset="-122"/>
+                      <a:cs typeface="Calibri" pitchFamily="34" charset="-120"/>
+                    </a:rPr>
+                    <a:t>Tests</a:t>
+                  </a:r>
+                  <a:endParaRPr lang="en-US" sz="1200" dirty="0"/>
+                </a:p>
+              </p:txBody>
+            </p:sp>
+            <p:sp>
+              <p:nvSpPr>
+                <p:cNvPr id="35" name="Text 31">
+                  <a:extLst>
+                    <a:ext uri="{FF2B5EF4-FFF2-40B4-BE49-F238E27FC236}">
+                      <a16:creationId xmlns:a16="http://schemas.microsoft.com/office/drawing/2014/main" id="{D7AB8FDA-E494-3ABE-86F7-D4F2C7FDC2D8}"/>
+                    </a:ext>
+                  </a:extLst>
+                </p:cNvPr>
+                <p:cNvSpPr/>
+                <p:nvPr/>
+              </p:nvSpPr>
+              <p:spPr>
+                <a:xfrm>
+                  <a:off x="7410226" y="3397624"/>
+                  <a:ext cx="1188720" cy="2103120"/>
+                </a:xfrm>
+                <a:prstGeom prst="rect">
+                  <a:avLst/>
+                </a:prstGeom>
+                <a:noFill/>
+                <a:ln/>
+              </p:spPr>
+              <p:txBody>
+                <a:bodyPr wrap="square" lIns="0" tIns="0" rIns="0" bIns="0" rtlCol="0" anchor="ctr"/>
+                <a:lstStyle/>
+                <a:p>
+                  <a:pPr marL="0" indent="0" algn="ctr">
+                    <a:buNone/>
+                  </a:pPr>
+                  <a:r>
+                    <a:rPr lang="en-US" sz="1400" dirty="0" err="1">
+                      <a:solidFill>
+                        <a:srgbClr val="1E293B"/>
+                      </a:solidFill>
+                    </a:rPr>
+                    <a:t>dbt</a:t>
+                  </a:r>
+                  <a:r>
+                    <a:rPr lang="en-US" sz="1400" dirty="0">
+                      <a:solidFill>
+                        <a:srgbClr val="1E293B"/>
+                      </a:solidFill>
+                    </a:rPr>
+                    <a:t> test</a:t>
+                  </a:r>
+                </a:p>
+                <a:p>
+                  <a:pPr marL="0" indent="0" algn="ctr">
+                    <a:buNone/>
+                  </a:pPr>
+                  <a:r>
+                    <a:rPr lang="en-US" sz="1200" dirty="0" err="1"/>
+                    <a:t>Schema.yml</a:t>
+                  </a:r>
+                  <a:r>
+                    <a:rPr lang="en-US" sz="1200" dirty="0"/>
+                    <a:t> (</a:t>
+                  </a:r>
+                  <a:r>
+                    <a:rPr lang="en-US" sz="1200" dirty="0" err="1"/>
+                    <a:t>data_test</a:t>
+                  </a:r>
+                  <a:r>
+                    <a:rPr lang="en-US" sz="1200" dirty="0"/>
+                    <a:t> unique, </a:t>
+                  </a:r>
+                  <a:r>
+                    <a:rPr lang="en-US" sz="1200" dirty="0" err="1"/>
+                    <a:t>not_null</a:t>
+                  </a:r>
+                  <a:r>
+                    <a:rPr lang="en-US" sz="1200" dirty="0"/>
+                    <a:t>)</a:t>
+                  </a:r>
+                </a:p>
+                <a:p>
+                  <a:pPr marL="0" indent="0" algn="ctr">
+                    <a:buNone/>
+                  </a:pPr>
+                  <a:r>
+                    <a:rPr lang="en-US" sz="1200" dirty="0"/>
+                    <a:t>Scripts test SQL</a:t>
+                  </a:r>
+                </a:p>
+              </p:txBody>
+            </p:sp>
+            <p:sp>
+              <p:nvSpPr>
+                <p:cNvPr id="36" name="Shape 33">
+                  <a:extLst>
+                    <a:ext uri="{FF2B5EF4-FFF2-40B4-BE49-F238E27FC236}">
+                      <a16:creationId xmlns:a16="http://schemas.microsoft.com/office/drawing/2014/main" id="{0F50A386-B6F8-F937-5A8B-912C02340B1B}"/>
+                    </a:ext>
+                  </a:extLst>
+                </p:cNvPr>
+                <p:cNvSpPr/>
+                <p:nvPr/>
+              </p:nvSpPr>
+              <p:spPr>
+                <a:xfrm>
+                  <a:off x="8827546" y="2666104"/>
+                  <a:ext cx="1280160" cy="2926080"/>
+                </a:xfrm>
+                <a:prstGeom prst="rect">
+                  <a:avLst/>
+                </a:prstGeom>
+                <a:solidFill>
+                  <a:srgbClr val="FFFFFF"/>
+                </a:solidFill>
+                <a:ln w="12700">
+                  <a:solidFill>
+                    <a:srgbClr val="E2E8F0"/>
+                  </a:solidFill>
+                  <a:prstDash val="solid"/>
+                </a:ln>
+                <a:effectLst>
+                  <a:outerShdw blurRad="101600" dist="38100" dir="8100000" algn="bl" rotWithShape="0">
+                    <a:srgbClr val="000000">
+                      <a:alpha val="12000"/>
+                    </a:srgbClr>
+                  </a:outerShdw>
+                </a:effectLst>
+              </p:spPr>
+              <p:txBody>
+                <a:bodyPr/>
+                <a:lstStyle/>
+                <a:p>
+                  <a:endParaRPr lang="fr-FR"/>
+                </a:p>
+              </p:txBody>
+            </p:sp>
+            <p:sp>
+              <p:nvSpPr>
+                <p:cNvPr id="37" name="Shape 34">
+                  <a:extLst>
+                    <a:ext uri="{FF2B5EF4-FFF2-40B4-BE49-F238E27FC236}">
+                      <a16:creationId xmlns:a16="http://schemas.microsoft.com/office/drawing/2014/main" id="{65FC14F8-09E2-A577-CA3F-8A92551CB821}"/>
+                    </a:ext>
+                  </a:extLst>
+                </p:cNvPr>
+                <p:cNvSpPr/>
+                <p:nvPr/>
+              </p:nvSpPr>
+              <p:spPr>
+                <a:xfrm>
+                  <a:off x="8827546" y="2666104"/>
+                  <a:ext cx="1280160" cy="640080"/>
+                </a:xfrm>
+                <a:prstGeom prst="rect">
+                  <a:avLst/>
+                </a:prstGeom>
+                <a:solidFill>
+                  <a:srgbClr val="EA580C"/>
+                </a:solidFill>
+                <a:ln/>
+              </p:spPr>
+              <p:txBody>
+                <a:bodyPr/>
+                <a:lstStyle/>
+                <a:p>
+                  <a:endParaRPr lang="fr-FR" sz="2400"/>
+                </a:p>
+              </p:txBody>
+            </p:sp>
+            <p:sp>
+              <p:nvSpPr>
+                <p:cNvPr id="38" name="Text 35">
+                  <a:extLst>
+                    <a:ext uri="{FF2B5EF4-FFF2-40B4-BE49-F238E27FC236}">
+                      <a16:creationId xmlns:a16="http://schemas.microsoft.com/office/drawing/2014/main" id="{FDB3A2AB-CA3D-BB10-831F-C983F921219D}"/>
+                    </a:ext>
+                  </a:extLst>
+                </p:cNvPr>
+                <p:cNvSpPr/>
+                <p:nvPr/>
+              </p:nvSpPr>
+              <p:spPr>
+                <a:xfrm>
+                  <a:off x="8827546" y="2684392"/>
+                  <a:ext cx="1280160" cy="320040"/>
+                </a:xfrm>
+                <a:prstGeom prst="rect">
+                  <a:avLst/>
+                </a:prstGeom>
+                <a:noFill/>
+                <a:ln/>
+              </p:spPr>
+              <p:txBody>
+                <a:bodyPr wrap="square" lIns="0" tIns="0" rIns="0" bIns="0" rtlCol="0" anchor="ctr"/>
+                <a:lstStyle/>
+                <a:p>
+                  <a:pPr marL="0" indent="0" algn="ctr">
+                    <a:buNone/>
+                  </a:pPr>
+                  <a:r>
+                    <a:rPr lang="en-US" sz="2000" b="1" dirty="0">
+                      <a:solidFill>
+                        <a:srgbClr val="FFFFFF"/>
+                      </a:solidFill>
+                      <a:latin typeface="Calibri" pitchFamily="34" charset="0"/>
+                      <a:ea typeface="Calibri" pitchFamily="34" charset="-122"/>
+                      <a:cs typeface="Calibri" pitchFamily="34" charset="-120"/>
+                    </a:rPr>
+                    <a:t>6</a:t>
+                  </a:r>
+                  <a:endParaRPr lang="en-US" sz="2000" dirty="0"/>
+                </a:p>
+              </p:txBody>
+            </p:sp>
+            <p:sp>
+              <p:nvSpPr>
+                <p:cNvPr id="39" name="Text 36">
+                  <a:extLst>
+                    <a:ext uri="{FF2B5EF4-FFF2-40B4-BE49-F238E27FC236}">
+                      <a16:creationId xmlns:a16="http://schemas.microsoft.com/office/drawing/2014/main" id="{CDA76EFA-4598-7703-CAC0-13D5D0999367}"/>
+                    </a:ext>
+                  </a:extLst>
+                </p:cNvPr>
+                <p:cNvSpPr/>
+                <p:nvPr/>
+              </p:nvSpPr>
+              <p:spPr>
+                <a:xfrm>
+                  <a:off x="8827546" y="3013576"/>
+                  <a:ext cx="1280160" cy="274320"/>
+                </a:xfrm>
+                <a:prstGeom prst="rect">
+                  <a:avLst/>
+                </a:prstGeom>
+                <a:noFill/>
+                <a:ln/>
+              </p:spPr>
+              <p:txBody>
+                <a:bodyPr wrap="square" lIns="0" tIns="0" rIns="0" bIns="0" rtlCol="0" anchor="ctr"/>
+                <a:lstStyle/>
+                <a:p>
+                  <a:pPr marL="0" indent="0" algn="ctr">
+                    <a:buNone/>
+                  </a:pPr>
+                  <a:r>
+                    <a:rPr lang="en-US" sz="1200" b="1" dirty="0">
+                      <a:solidFill>
+                        <a:srgbClr val="FFFFFF"/>
+                      </a:solidFill>
+                      <a:latin typeface="Calibri" pitchFamily="34" charset="0"/>
+                      <a:ea typeface="Calibri" pitchFamily="34" charset="-122"/>
+                      <a:cs typeface="Calibri" pitchFamily="34" charset="-120"/>
+                    </a:rPr>
+                    <a:t>Documentation</a:t>
+                  </a:r>
+                  <a:endParaRPr lang="en-US" sz="1200" dirty="0"/>
+                </a:p>
+              </p:txBody>
+            </p:sp>
+            <p:sp>
+              <p:nvSpPr>
+                <p:cNvPr id="40" name="Text 37">
+                  <a:extLst>
+                    <a:ext uri="{FF2B5EF4-FFF2-40B4-BE49-F238E27FC236}">
+                      <a16:creationId xmlns:a16="http://schemas.microsoft.com/office/drawing/2014/main" id="{6360764F-7F11-F7D3-C593-06A5AD0D007D}"/>
+                    </a:ext>
+                  </a:extLst>
+                </p:cNvPr>
+                <p:cNvSpPr/>
+                <p:nvPr/>
+              </p:nvSpPr>
+              <p:spPr>
+                <a:xfrm>
+                  <a:off x="8873266" y="3397624"/>
+                  <a:ext cx="1188720" cy="2103120"/>
+                </a:xfrm>
+                <a:prstGeom prst="rect">
+                  <a:avLst/>
+                </a:prstGeom>
+                <a:noFill/>
+                <a:ln/>
+              </p:spPr>
+              <p:txBody>
+                <a:bodyPr wrap="square" lIns="0" tIns="0" rIns="0" bIns="0" rtlCol="0" anchor="ctr"/>
+                <a:lstStyle/>
+                <a:p>
+                  <a:pPr marL="0" indent="0" algn="ctr">
+                    <a:buNone/>
+                  </a:pPr>
+                  <a:r>
+                    <a:rPr lang="en-US" sz="1400" dirty="0" err="1">
+                      <a:solidFill>
+                        <a:srgbClr val="1E293B"/>
+                      </a:solidFill>
+                      <a:ea typeface="Consolas" pitchFamily="34" charset="-122"/>
+                      <a:cs typeface="Consolas" pitchFamily="34" charset="-120"/>
+                    </a:rPr>
+                    <a:t>dbt</a:t>
+                  </a:r>
+                  <a:r>
+                    <a:rPr lang="en-US" sz="1400" dirty="0">
+                      <a:solidFill>
+                        <a:srgbClr val="1E293B"/>
+                      </a:solidFill>
+                      <a:ea typeface="Consolas" pitchFamily="34" charset="-122"/>
+                      <a:cs typeface="Consolas" pitchFamily="34" charset="-120"/>
+                    </a:rPr>
+                    <a:t> docs serve</a:t>
+                  </a:r>
+                </a:p>
+                <a:p>
+                  <a:pPr marL="0" indent="0" algn="ctr">
+                    <a:buNone/>
+                  </a:pPr>
+                  <a:r>
+                    <a:rPr lang="en-US" sz="1400" dirty="0">
+                      <a:solidFill>
+                        <a:srgbClr val="1E293B"/>
+                      </a:solidFill>
+                    </a:rPr>
+                    <a:t>Lineage Graph</a:t>
+                  </a:r>
+                  <a:endParaRPr lang="en-US" sz="1400" dirty="0"/>
+                </a:p>
+              </p:txBody>
+            </p:sp>
+            <p:sp>
+              <p:nvSpPr>
+                <p:cNvPr id="41" name="Text 38">
+                  <a:extLst>
+                    <a:ext uri="{FF2B5EF4-FFF2-40B4-BE49-F238E27FC236}">
+                      <a16:creationId xmlns:a16="http://schemas.microsoft.com/office/drawing/2014/main" id="{797E561A-2620-B675-90DE-F83DB62411F3}"/>
+                    </a:ext>
+                  </a:extLst>
+                </p:cNvPr>
+                <p:cNvSpPr/>
+                <p:nvPr/>
+              </p:nvSpPr>
+              <p:spPr>
+                <a:xfrm>
+                  <a:off x="5672865" y="5978687"/>
+                  <a:ext cx="3070506" cy="345013"/>
+                </a:xfrm>
+                <a:prstGeom prst="rect">
+                  <a:avLst/>
+                </a:prstGeom>
+                <a:noFill/>
+                <a:ln/>
+              </p:spPr>
+              <p:txBody>
+                <a:bodyPr wrap="square" lIns="0" tIns="0" rIns="0" bIns="0" rtlCol="0" anchor="ctr"/>
+                <a:lstStyle/>
+                <a:p>
+                  <a:pPr marL="0" indent="0" algn="ctr">
+                    <a:buNone/>
+                  </a:pPr>
+                  <a:r>
+                    <a:rPr lang="en-US" sz="1200" i="1" dirty="0">
+                      <a:solidFill>
+                        <a:srgbClr val="64748B"/>
+                      </a:solidFill>
+                      <a:latin typeface="Consolas" pitchFamily="34" charset="0"/>
+                      <a:ea typeface="Consolas" pitchFamily="34" charset="-122"/>
+                      <a:cs typeface="Consolas" pitchFamily="34" charset="-120"/>
+                    </a:rPr>
+                    <a:t>Image Docker</a:t>
+                  </a:r>
+                  <a:endParaRPr lang="en-US" sz="1200" dirty="0"/>
+                </a:p>
+              </p:txBody>
+            </p:sp>
+          </p:grpSp>
+        </p:grpSp>
+        <p:sp>
+          <p:nvSpPr>
+            <p:cNvPr id="50" name="Shape 26">
+              <a:extLst>
+                <a:ext uri="{FF2B5EF4-FFF2-40B4-BE49-F238E27FC236}">
+                  <a16:creationId xmlns:a16="http://schemas.microsoft.com/office/drawing/2014/main" id="{59E4B186-6106-469A-D2B8-31C656FD0D84}"/>
+                </a:ext>
+              </a:extLst>
+            </p:cNvPr>
+            <p:cNvSpPr/>
+            <p:nvPr/>
+          </p:nvSpPr>
+          <p:spPr>
+            <a:xfrm>
+              <a:off x="9316350" y="4048375"/>
+              <a:ext cx="217083" cy="0"/>
+            </a:xfrm>
+            <a:prstGeom prst="line">
+              <a:avLst/>
+            </a:prstGeom>
+            <a:noFill/>
+            <a:ln w="19050">
+              <a:solidFill>
+                <a:srgbClr val="64748B"/>
+              </a:solidFill>
+              <a:prstDash val="solid"/>
+            </a:ln>
+          </p:spPr>
+          <p:txBody>
+            <a:bodyPr/>
+            <a:lstStyle/>
+            <a:p>
+              <a:endParaRPr lang="fr-FR"/>
+            </a:p>
+          </p:txBody>
+        </p:sp>
+      </p:grpSp>
+    </p:spTree>
+    <p:extLst>
+      <p:ext uri="{BB962C8B-B14F-4D97-AF65-F5344CB8AC3E}">
+        <p14:creationId xmlns:p14="http://schemas.microsoft.com/office/powerpoint/2010/main" val="4115421798"/>
+      </p:ext>
+    </p:extLst>
+  </p:cSld>
+  <p:clrMapOvr>
+    <a:masterClrMapping/>
+  </p:clrMapOvr>
+</p:sld>
+</file>
+
+<file path=ppt/slides/slide6.xml><?xml version="1.0" encoding="utf-8"?>
+<p:sld xmlns:a="http://schemas.openxmlformats.org/drawingml/2006/main" xmlns:r="http://schemas.openxmlformats.org/officeDocument/2006/relationships" xmlns:p="http://schemas.openxmlformats.org/presentationml/2006/main">
+  <p:cSld>
+    <p:spTree>
+      <p:nvGrpSpPr>
+        <p:cNvPr id="1" name=""/>
+        <p:cNvGrpSpPr/>
+        <p:nvPr/>
+      </p:nvGrpSpPr>
+      <p:grpSpPr>
+        <a:xfrm>
+          <a:off x="0" y="0"/>
+          <a:ext cx="0" cy="0"/>
+          <a:chOff x="0" y="0"/>
+          <a:chExt cx="0" cy="0"/>
+        </a:xfrm>
+      </p:grpSpPr>
+      <p:sp>
+        <p:nvSpPr>
+          <p:cNvPr id="2" name="Titre 1">
+            <a:extLst>
+              <a:ext uri="{FF2B5EF4-FFF2-40B4-BE49-F238E27FC236}">
+                <a16:creationId xmlns:a16="http://schemas.microsoft.com/office/drawing/2014/main" id="{7931F5BA-E577-F62C-A8BA-390559199636}"/>
+              </a:ext>
+            </a:extLst>
+          </p:cNvPr>
+          <p:cNvSpPr>
+            <a:spLocks noGrp="1"/>
+          </p:cNvSpPr>
+          <p:nvPr>
+            <p:ph type="title"/>
+          </p:nvPr>
+        </p:nvSpPr>
+        <p:spPr/>
+        <p:txBody>
+          <a:bodyPr/>
+          <a:lstStyle/>
+          <a:p>
+            <a:r>
+              <a:rPr lang="fr-FR" dirty="0"/>
+              <a:t>4. Schéma d’architecture</a:t>
+            </a:r>
+          </a:p>
+        </p:txBody>
+      </p:sp>
+      <p:sp>
+        <p:nvSpPr>
+          <p:cNvPr id="4" name="Espace réservé de la date 3">
+            <a:extLst>
+              <a:ext uri="{FF2B5EF4-FFF2-40B4-BE49-F238E27FC236}">
+                <a16:creationId xmlns:a16="http://schemas.microsoft.com/office/drawing/2014/main" id="{D1115EB6-7708-939B-C1B6-96C90CDC191B}"/>
+              </a:ext>
+            </a:extLst>
+          </p:cNvPr>
+          <p:cNvSpPr>
+            <a:spLocks noGrp="1"/>
+          </p:cNvSpPr>
+          <p:nvPr>
+            <p:ph type="dt" sz="half" idx="10"/>
+          </p:nvPr>
+        </p:nvSpPr>
+        <p:spPr>
+          <a:xfrm>
+            <a:off x="7605951" y="6423915"/>
+            <a:ext cx="4299619" cy="362368"/>
+          </a:xfrm>
+        </p:spPr>
+        <p:txBody>
+          <a:bodyPr/>
+          <a:lstStyle/>
+          <a:p>
+            <a:pPr rtl="0"/>
+            <a:fld id="{22897033-9A55-4DAC-991D-1FF1921C78B7}" type="datetime1">
+              <a:rPr lang="fr-FR" smtClean="0"/>
+              <a:t>16/08/2026</a:t>
+            </a:fld>
+            <a:endParaRPr lang="en-US" dirty="0"/>
+          </a:p>
+        </p:txBody>
+      </p:sp>
+      <p:sp>
+        <p:nvSpPr>
+          <p:cNvPr id="6" name="Rectangle : avec coins arrondis en diagonale 5">
+            <a:extLst>
+              <a:ext uri="{FF2B5EF4-FFF2-40B4-BE49-F238E27FC236}">
+                <a16:creationId xmlns:a16="http://schemas.microsoft.com/office/drawing/2014/main" id="{2DAA7FAA-ADE0-3C40-D309-2B7629D32982}"/>
+              </a:ext>
+            </a:extLst>
+          </p:cNvPr>
+          <p:cNvSpPr/>
+          <p:nvPr/>
+        </p:nvSpPr>
+        <p:spPr>
+          <a:xfrm>
+            <a:off x="2528180" y="1971700"/>
+            <a:ext cx="6821777" cy="4751829"/>
+          </a:xfrm>
+          <a:prstGeom prst="round2DiagRect">
+            <a:avLst/>
+          </a:prstGeom>
+          <a:solidFill>
+            <a:srgbClr val="EDE9B1"/>
+          </a:solidFill>
+          <a:ln>
+            <a:solidFill>
+              <a:srgbClr val="FFC000"/>
+            </a:solidFill>
+          </a:ln>
+        </p:spPr>
+        <p:style>
+          <a:lnRef idx="2">
+            <a:schemeClr val="accent1">
+              <a:shade val="15000"/>
+            </a:schemeClr>
+          </a:lnRef>
+          <a:fillRef idx="1">
+            <a:schemeClr val="accent1"/>
+          </a:fillRef>
+          <a:effectRef idx="0">
+            <a:schemeClr val="accent1"/>
+          </a:effectRef>
+          <a:fontRef idx="minor">
+            <a:schemeClr val="lt1"/>
+          </a:fontRef>
+        </p:style>
+        <p:txBody>
+          <a:bodyPr rtlCol="0" anchor="t"/>
+          <a:lstStyle/>
+          <a:p>
+            <a:r>
+              <a:rPr lang="fr-FR" b="1" dirty="0"/>
+              <a:t>								</a:t>
+            </a:r>
+          </a:p>
+        </p:txBody>
+      </p:sp>
+      <p:sp>
+        <p:nvSpPr>
+          <p:cNvPr id="7" name="Rectangle : coins arrondis 6">
+            <a:extLst>
+              <a:ext uri="{FF2B5EF4-FFF2-40B4-BE49-F238E27FC236}">
+                <a16:creationId xmlns:a16="http://schemas.microsoft.com/office/drawing/2014/main" id="{882BC14F-9EB6-3025-5512-C65F6E53733E}"/>
+              </a:ext>
+            </a:extLst>
+          </p:cNvPr>
+          <p:cNvSpPr/>
+          <p:nvPr/>
+        </p:nvSpPr>
+        <p:spPr>
+          <a:xfrm>
+            <a:off x="4716002" y="2381513"/>
+            <a:ext cx="4222978" cy="1494240"/>
+          </a:xfrm>
+          <a:prstGeom prst="roundRect">
+            <a:avLst/>
+          </a:prstGeom>
+          <a:solidFill>
+            <a:srgbClr val="FCBFBC"/>
+          </a:solidFill>
+          <a:ln>
+            <a:solidFill>
+              <a:srgbClr val="C00000"/>
+            </a:solidFill>
+          </a:ln>
+        </p:spPr>
+        <p:style>
+          <a:lnRef idx="2">
+            <a:schemeClr val="accent1">
+              <a:shade val="15000"/>
+            </a:schemeClr>
+          </a:lnRef>
+          <a:fillRef idx="1">
+            <a:schemeClr val="accent1"/>
+          </a:fillRef>
+          <a:effectRef idx="0">
+            <a:schemeClr val="accent1"/>
+          </a:effectRef>
+          <a:fontRef idx="minor">
+            <a:schemeClr val="lt1"/>
+          </a:fontRef>
+        </p:style>
+        <p:txBody>
+          <a:bodyPr rtlCol="0" anchor="t"/>
+          <a:lstStyle/>
+          <a:p>
+            <a:r>
+              <a:rPr lang="fr-FR" dirty="0"/>
+              <a:t>Sécurité et surveillance</a:t>
+            </a:r>
+          </a:p>
+        </p:txBody>
+      </p:sp>
+      <p:sp>
+        <p:nvSpPr>
+          <p:cNvPr id="9" name="Rectangle : coins arrondis 8">
+            <a:extLst>
+              <a:ext uri="{FF2B5EF4-FFF2-40B4-BE49-F238E27FC236}">
+                <a16:creationId xmlns:a16="http://schemas.microsoft.com/office/drawing/2014/main" id="{202D6208-B2BF-48A8-80F6-465D44378916}"/>
+              </a:ext>
+            </a:extLst>
+          </p:cNvPr>
+          <p:cNvSpPr/>
+          <p:nvPr/>
+        </p:nvSpPr>
+        <p:spPr>
+          <a:xfrm>
+            <a:off x="2804270" y="4216423"/>
+            <a:ext cx="6205262" cy="2183117"/>
+          </a:xfrm>
+          <a:custGeom>
+            <a:avLst/>
+            <a:gdLst>
+              <a:gd name="connsiteX0" fmla="*/ 0 w 6187334"/>
+              <a:gd name="connsiteY0" fmla="*/ 363860 h 2183117"/>
+              <a:gd name="connsiteX1" fmla="*/ 363860 w 6187334"/>
+              <a:gd name="connsiteY1" fmla="*/ 0 h 2183117"/>
+              <a:gd name="connsiteX2" fmla="*/ 5823474 w 6187334"/>
+              <a:gd name="connsiteY2" fmla="*/ 0 h 2183117"/>
+              <a:gd name="connsiteX3" fmla="*/ 6187334 w 6187334"/>
+              <a:gd name="connsiteY3" fmla="*/ 363860 h 2183117"/>
+              <a:gd name="connsiteX4" fmla="*/ 6187334 w 6187334"/>
+              <a:gd name="connsiteY4" fmla="*/ 1819257 h 2183117"/>
+              <a:gd name="connsiteX5" fmla="*/ 5823474 w 6187334"/>
+              <a:gd name="connsiteY5" fmla="*/ 2183117 h 2183117"/>
+              <a:gd name="connsiteX6" fmla="*/ 363860 w 6187334"/>
+              <a:gd name="connsiteY6" fmla="*/ 2183117 h 2183117"/>
+              <a:gd name="connsiteX7" fmla="*/ 0 w 6187334"/>
+              <a:gd name="connsiteY7" fmla="*/ 1819257 h 2183117"/>
+              <a:gd name="connsiteX8" fmla="*/ 0 w 6187334"/>
+              <a:gd name="connsiteY8" fmla="*/ 363860 h 2183117"/>
+              <a:gd name="connsiteX0" fmla="*/ 0 w 6187334"/>
+              <a:gd name="connsiteY0" fmla="*/ 363860 h 2184378"/>
+              <a:gd name="connsiteX1" fmla="*/ 363860 w 6187334"/>
+              <a:gd name="connsiteY1" fmla="*/ 0 h 2184378"/>
+              <a:gd name="connsiteX2" fmla="*/ 5823474 w 6187334"/>
+              <a:gd name="connsiteY2" fmla="*/ 0 h 2184378"/>
+              <a:gd name="connsiteX3" fmla="*/ 6187334 w 6187334"/>
+              <a:gd name="connsiteY3" fmla="*/ 363860 h 2184378"/>
+              <a:gd name="connsiteX4" fmla="*/ 6187334 w 6187334"/>
+              <a:gd name="connsiteY4" fmla="*/ 1819257 h 2184378"/>
+              <a:gd name="connsiteX5" fmla="*/ 5823474 w 6187334"/>
+              <a:gd name="connsiteY5" fmla="*/ 2183117 h 2184378"/>
+              <a:gd name="connsiteX6" fmla="*/ 4098555 w 6187334"/>
+              <a:gd name="connsiteY6" fmla="*/ 2184378 h 2184378"/>
+              <a:gd name="connsiteX7" fmla="*/ 363860 w 6187334"/>
+              <a:gd name="connsiteY7" fmla="*/ 2183117 h 2184378"/>
+              <a:gd name="connsiteX8" fmla="*/ 0 w 6187334"/>
+              <a:gd name="connsiteY8" fmla="*/ 1819257 h 2184378"/>
+              <a:gd name="connsiteX9" fmla="*/ 0 w 6187334"/>
+              <a:gd name="connsiteY9" fmla="*/ 363860 h 2184378"/>
+              <a:gd name="connsiteX0" fmla="*/ 0 w 6205263"/>
+              <a:gd name="connsiteY0" fmla="*/ 363860 h 2184378"/>
+              <a:gd name="connsiteX1" fmla="*/ 363860 w 6205263"/>
+              <a:gd name="connsiteY1" fmla="*/ 0 h 2184378"/>
+              <a:gd name="connsiteX2" fmla="*/ 5823474 w 6205263"/>
+              <a:gd name="connsiteY2" fmla="*/ 0 h 2184378"/>
+              <a:gd name="connsiteX3" fmla="*/ 6187334 w 6205263"/>
+              <a:gd name="connsiteY3" fmla="*/ 363860 h 2184378"/>
+              <a:gd name="connsiteX4" fmla="*/ 6205263 w 6205263"/>
+              <a:gd name="connsiteY4" fmla="*/ 1012434 h 2184378"/>
+              <a:gd name="connsiteX5" fmla="*/ 5823474 w 6205263"/>
+              <a:gd name="connsiteY5" fmla="*/ 2183117 h 2184378"/>
+              <a:gd name="connsiteX6" fmla="*/ 4098555 w 6205263"/>
+              <a:gd name="connsiteY6" fmla="*/ 2184378 h 2184378"/>
+              <a:gd name="connsiteX7" fmla="*/ 363860 w 6205263"/>
+              <a:gd name="connsiteY7" fmla="*/ 2183117 h 2184378"/>
+              <a:gd name="connsiteX8" fmla="*/ 0 w 6205263"/>
+              <a:gd name="connsiteY8" fmla="*/ 1819257 h 2184378"/>
+              <a:gd name="connsiteX9" fmla="*/ 0 w 6205263"/>
+              <a:gd name="connsiteY9" fmla="*/ 363860 h 2184378"/>
+              <a:gd name="connsiteX0" fmla="*/ 0 w 6205263"/>
+              <a:gd name="connsiteY0" fmla="*/ 363860 h 2184378"/>
+              <a:gd name="connsiteX1" fmla="*/ 363860 w 6205263"/>
+              <a:gd name="connsiteY1" fmla="*/ 0 h 2184378"/>
+              <a:gd name="connsiteX2" fmla="*/ 5823474 w 6205263"/>
+              <a:gd name="connsiteY2" fmla="*/ 0 h 2184378"/>
+              <a:gd name="connsiteX3" fmla="*/ 6187334 w 6205263"/>
+              <a:gd name="connsiteY3" fmla="*/ 363860 h 2184378"/>
+              <a:gd name="connsiteX4" fmla="*/ 6205263 w 6205263"/>
+              <a:gd name="connsiteY4" fmla="*/ 1012434 h 2184378"/>
+              <a:gd name="connsiteX5" fmla="*/ 3905027 w 6205263"/>
+              <a:gd name="connsiteY5" fmla="*/ 1053564 h 2184378"/>
+              <a:gd name="connsiteX6" fmla="*/ 4098555 w 6205263"/>
+              <a:gd name="connsiteY6" fmla="*/ 2184378 h 2184378"/>
+              <a:gd name="connsiteX7" fmla="*/ 363860 w 6205263"/>
+              <a:gd name="connsiteY7" fmla="*/ 2183117 h 2184378"/>
+              <a:gd name="connsiteX8" fmla="*/ 0 w 6205263"/>
+              <a:gd name="connsiteY8" fmla="*/ 1819257 h 2184378"/>
+              <a:gd name="connsiteX9" fmla="*/ 0 w 6205263"/>
+              <a:gd name="connsiteY9" fmla="*/ 363860 h 2184378"/>
+              <a:gd name="connsiteX0" fmla="*/ 0 w 6214227"/>
+              <a:gd name="connsiteY0" fmla="*/ 363860 h 2184378"/>
+              <a:gd name="connsiteX1" fmla="*/ 363860 w 6214227"/>
+              <a:gd name="connsiteY1" fmla="*/ 0 h 2184378"/>
+              <a:gd name="connsiteX2" fmla="*/ 5823474 w 6214227"/>
+              <a:gd name="connsiteY2" fmla="*/ 0 h 2184378"/>
+              <a:gd name="connsiteX3" fmla="*/ 6187334 w 6214227"/>
+              <a:gd name="connsiteY3" fmla="*/ 363860 h 2184378"/>
+              <a:gd name="connsiteX4" fmla="*/ 6214227 w 6214227"/>
+              <a:gd name="connsiteY4" fmla="*/ 770386 h 2184378"/>
+              <a:gd name="connsiteX5" fmla="*/ 3905027 w 6214227"/>
+              <a:gd name="connsiteY5" fmla="*/ 1053564 h 2184378"/>
+              <a:gd name="connsiteX6" fmla="*/ 4098555 w 6214227"/>
+              <a:gd name="connsiteY6" fmla="*/ 2184378 h 2184378"/>
+              <a:gd name="connsiteX7" fmla="*/ 363860 w 6214227"/>
+              <a:gd name="connsiteY7" fmla="*/ 2183117 h 2184378"/>
+              <a:gd name="connsiteX8" fmla="*/ 0 w 6214227"/>
+              <a:gd name="connsiteY8" fmla="*/ 1819257 h 2184378"/>
+              <a:gd name="connsiteX9" fmla="*/ 0 w 6214227"/>
+              <a:gd name="connsiteY9" fmla="*/ 363860 h 2184378"/>
+              <a:gd name="connsiteX0" fmla="*/ 0 w 6220938"/>
+              <a:gd name="connsiteY0" fmla="*/ 363860 h 2184378"/>
+              <a:gd name="connsiteX1" fmla="*/ 363860 w 6220938"/>
+              <a:gd name="connsiteY1" fmla="*/ 0 h 2184378"/>
+              <a:gd name="connsiteX2" fmla="*/ 5823474 w 6220938"/>
+              <a:gd name="connsiteY2" fmla="*/ 0 h 2184378"/>
+              <a:gd name="connsiteX3" fmla="*/ 6187334 w 6220938"/>
+              <a:gd name="connsiteY3" fmla="*/ 363860 h 2184378"/>
+              <a:gd name="connsiteX4" fmla="*/ 6214227 w 6220938"/>
+              <a:gd name="connsiteY4" fmla="*/ 770386 h 2184378"/>
+              <a:gd name="connsiteX5" fmla="*/ 5963213 w 6220938"/>
+              <a:gd name="connsiteY5" fmla="*/ 893459 h 2184378"/>
+              <a:gd name="connsiteX6" fmla="*/ 3905027 w 6220938"/>
+              <a:gd name="connsiteY6" fmla="*/ 1053564 h 2184378"/>
+              <a:gd name="connsiteX7" fmla="*/ 4098555 w 6220938"/>
+              <a:gd name="connsiteY7" fmla="*/ 2184378 h 2184378"/>
+              <a:gd name="connsiteX8" fmla="*/ 363860 w 6220938"/>
+              <a:gd name="connsiteY8" fmla="*/ 2183117 h 2184378"/>
+              <a:gd name="connsiteX9" fmla="*/ 0 w 6220938"/>
+              <a:gd name="connsiteY9" fmla="*/ 1819257 h 2184378"/>
+              <a:gd name="connsiteX10" fmla="*/ 0 w 6220938"/>
+              <a:gd name="connsiteY10" fmla="*/ 363860 h 2184378"/>
+              <a:gd name="connsiteX0" fmla="*/ 0 w 6236984"/>
+              <a:gd name="connsiteY0" fmla="*/ 363860 h 2184378"/>
+              <a:gd name="connsiteX1" fmla="*/ 363860 w 6236984"/>
+              <a:gd name="connsiteY1" fmla="*/ 0 h 2184378"/>
+              <a:gd name="connsiteX2" fmla="*/ 5823474 w 6236984"/>
+              <a:gd name="connsiteY2" fmla="*/ 0 h 2184378"/>
+              <a:gd name="connsiteX3" fmla="*/ 6187334 w 6236984"/>
+              <a:gd name="connsiteY3" fmla="*/ 363860 h 2184378"/>
+              <a:gd name="connsiteX4" fmla="*/ 6214227 w 6236984"/>
+              <a:gd name="connsiteY4" fmla="*/ 770386 h 2184378"/>
+              <a:gd name="connsiteX5" fmla="*/ 5999071 w 6236984"/>
+              <a:gd name="connsiteY5" fmla="*/ 1054823 h 2184378"/>
+              <a:gd name="connsiteX6" fmla="*/ 3905027 w 6236984"/>
+              <a:gd name="connsiteY6" fmla="*/ 1053564 h 2184378"/>
+              <a:gd name="connsiteX7" fmla="*/ 4098555 w 6236984"/>
+              <a:gd name="connsiteY7" fmla="*/ 2184378 h 2184378"/>
+              <a:gd name="connsiteX8" fmla="*/ 363860 w 6236984"/>
+              <a:gd name="connsiteY8" fmla="*/ 2183117 h 2184378"/>
+              <a:gd name="connsiteX9" fmla="*/ 0 w 6236984"/>
+              <a:gd name="connsiteY9" fmla="*/ 1819257 h 2184378"/>
+              <a:gd name="connsiteX10" fmla="*/ 0 w 6236984"/>
+              <a:gd name="connsiteY10" fmla="*/ 363860 h 2184378"/>
+              <a:gd name="connsiteX0" fmla="*/ 0 w 6224054"/>
+              <a:gd name="connsiteY0" fmla="*/ 363860 h 2184378"/>
+              <a:gd name="connsiteX1" fmla="*/ 363860 w 6224054"/>
+              <a:gd name="connsiteY1" fmla="*/ 0 h 2184378"/>
+              <a:gd name="connsiteX2" fmla="*/ 5823474 w 6224054"/>
+              <a:gd name="connsiteY2" fmla="*/ 0 h 2184378"/>
+              <a:gd name="connsiteX3" fmla="*/ 6187334 w 6224054"/>
+              <a:gd name="connsiteY3" fmla="*/ 363860 h 2184378"/>
+              <a:gd name="connsiteX4" fmla="*/ 6187333 w 6224054"/>
+              <a:gd name="connsiteY4" fmla="*/ 940715 h 2184378"/>
+              <a:gd name="connsiteX5" fmla="*/ 5999071 w 6224054"/>
+              <a:gd name="connsiteY5" fmla="*/ 1054823 h 2184378"/>
+              <a:gd name="connsiteX6" fmla="*/ 3905027 w 6224054"/>
+              <a:gd name="connsiteY6" fmla="*/ 1053564 h 2184378"/>
+              <a:gd name="connsiteX7" fmla="*/ 4098555 w 6224054"/>
+              <a:gd name="connsiteY7" fmla="*/ 2184378 h 2184378"/>
+              <a:gd name="connsiteX8" fmla="*/ 363860 w 6224054"/>
+              <a:gd name="connsiteY8" fmla="*/ 2183117 h 2184378"/>
+              <a:gd name="connsiteX9" fmla="*/ 0 w 6224054"/>
+              <a:gd name="connsiteY9" fmla="*/ 1819257 h 2184378"/>
+              <a:gd name="connsiteX10" fmla="*/ 0 w 6224054"/>
+              <a:gd name="connsiteY10" fmla="*/ 363860 h 2184378"/>
+              <a:gd name="connsiteX0" fmla="*/ 0 w 6187334"/>
+              <a:gd name="connsiteY0" fmla="*/ 363860 h 2184378"/>
+              <a:gd name="connsiteX1" fmla="*/ 363860 w 6187334"/>
+              <a:gd name="connsiteY1" fmla="*/ 0 h 2184378"/>
+              <a:gd name="connsiteX2" fmla="*/ 5823474 w 6187334"/>
+              <a:gd name="connsiteY2" fmla="*/ 0 h 2184378"/>
+              <a:gd name="connsiteX3" fmla="*/ 6187334 w 6187334"/>
+              <a:gd name="connsiteY3" fmla="*/ 363860 h 2184378"/>
+              <a:gd name="connsiteX4" fmla="*/ 6187333 w 6187334"/>
+              <a:gd name="connsiteY4" fmla="*/ 940715 h 2184378"/>
+              <a:gd name="connsiteX5" fmla="*/ 5685307 w 6187334"/>
+              <a:gd name="connsiteY5" fmla="*/ 1072752 h 2184378"/>
+              <a:gd name="connsiteX6" fmla="*/ 3905027 w 6187334"/>
+              <a:gd name="connsiteY6" fmla="*/ 1053564 h 2184378"/>
+              <a:gd name="connsiteX7" fmla="*/ 4098555 w 6187334"/>
+              <a:gd name="connsiteY7" fmla="*/ 2184378 h 2184378"/>
+              <a:gd name="connsiteX8" fmla="*/ 363860 w 6187334"/>
+              <a:gd name="connsiteY8" fmla="*/ 2183117 h 2184378"/>
+              <a:gd name="connsiteX9" fmla="*/ 0 w 6187334"/>
+              <a:gd name="connsiteY9" fmla="*/ 1819257 h 2184378"/>
+              <a:gd name="connsiteX10" fmla="*/ 0 w 6187334"/>
+              <a:gd name="connsiteY10" fmla="*/ 363860 h 2184378"/>
+              <a:gd name="connsiteX0" fmla="*/ 0 w 6187334"/>
+              <a:gd name="connsiteY0" fmla="*/ 363860 h 2184378"/>
+              <a:gd name="connsiteX1" fmla="*/ 363860 w 6187334"/>
+              <a:gd name="connsiteY1" fmla="*/ 0 h 2184378"/>
+              <a:gd name="connsiteX2" fmla="*/ 5823474 w 6187334"/>
+              <a:gd name="connsiteY2" fmla="*/ 0 h 2184378"/>
+              <a:gd name="connsiteX3" fmla="*/ 6187334 w 6187334"/>
+              <a:gd name="connsiteY3" fmla="*/ 363860 h 2184378"/>
+              <a:gd name="connsiteX4" fmla="*/ 6187333 w 6187334"/>
+              <a:gd name="connsiteY4" fmla="*/ 940715 h 2184378"/>
+              <a:gd name="connsiteX5" fmla="*/ 5685307 w 6187334"/>
+              <a:gd name="connsiteY5" fmla="*/ 1072752 h 2184378"/>
+              <a:gd name="connsiteX6" fmla="*/ 3931922 w 6187334"/>
+              <a:gd name="connsiteY6" fmla="*/ 1125282 h 2184378"/>
+              <a:gd name="connsiteX7" fmla="*/ 4098555 w 6187334"/>
+              <a:gd name="connsiteY7" fmla="*/ 2184378 h 2184378"/>
+              <a:gd name="connsiteX8" fmla="*/ 363860 w 6187334"/>
+              <a:gd name="connsiteY8" fmla="*/ 2183117 h 2184378"/>
+              <a:gd name="connsiteX9" fmla="*/ 0 w 6187334"/>
+              <a:gd name="connsiteY9" fmla="*/ 1819257 h 2184378"/>
+              <a:gd name="connsiteX10" fmla="*/ 0 w 6187334"/>
+              <a:gd name="connsiteY10" fmla="*/ 363860 h 2184378"/>
+              <a:gd name="connsiteX0" fmla="*/ 0 w 6187334"/>
+              <a:gd name="connsiteY0" fmla="*/ 363860 h 2183117"/>
+              <a:gd name="connsiteX1" fmla="*/ 363860 w 6187334"/>
+              <a:gd name="connsiteY1" fmla="*/ 0 h 2183117"/>
+              <a:gd name="connsiteX2" fmla="*/ 5823474 w 6187334"/>
+              <a:gd name="connsiteY2" fmla="*/ 0 h 2183117"/>
+              <a:gd name="connsiteX3" fmla="*/ 6187334 w 6187334"/>
+              <a:gd name="connsiteY3" fmla="*/ 363860 h 2183117"/>
+              <a:gd name="connsiteX4" fmla="*/ 6187333 w 6187334"/>
+              <a:gd name="connsiteY4" fmla="*/ 940715 h 2183117"/>
+              <a:gd name="connsiteX5" fmla="*/ 5685307 w 6187334"/>
+              <a:gd name="connsiteY5" fmla="*/ 1072752 h 2183117"/>
+              <a:gd name="connsiteX6" fmla="*/ 3931922 w 6187334"/>
+              <a:gd name="connsiteY6" fmla="*/ 1125282 h 2183117"/>
+              <a:gd name="connsiteX7" fmla="*/ 3937190 w 6187334"/>
+              <a:gd name="connsiteY7" fmla="*/ 2166448 h 2183117"/>
+              <a:gd name="connsiteX8" fmla="*/ 363860 w 6187334"/>
+              <a:gd name="connsiteY8" fmla="*/ 2183117 h 2183117"/>
+              <a:gd name="connsiteX9" fmla="*/ 0 w 6187334"/>
+              <a:gd name="connsiteY9" fmla="*/ 1819257 h 2183117"/>
+              <a:gd name="connsiteX10" fmla="*/ 0 w 6187334"/>
+              <a:gd name="connsiteY10" fmla="*/ 363860 h 2183117"/>
+              <a:gd name="connsiteX0" fmla="*/ 0 w 6187334"/>
+              <a:gd name="connsiteY0" fmla="*/ 363860 h 2183117"/>
+              <a:gd name="connsiteX1" fmla="*/ 363860 w 6187334"/>
+              <a:gd name="connsiteY1" fmla="*/ 0 h 2183117"/>
+              <a:gd name="connsiteX2" fmla="*/ 5823474 w 6187334"/>
+              <a:gd name="connsiteY2" fmla="*/ 0 h 2183117"/>
+              <a:gd name="connsiteX3" fmla="*/ 6187334 w 6187334"/>
+              <a:gd name="connsiteY3" fmla="*/ 363860 h 2183117"/>
+              <a:gd name="connsiteX4" fmla="*/ 6187333 w 6187334"/>
+              <a:gd name="connsiteY4" fmla="*/ 940715 h 2183117"/>
+              <a:gd name="connsiteX5" fmla="*/ 5685307 w 6187334"/>
+              <a:gd name="connsiteY5" fmla="*/ 1072752 h 2183117"/>
+              <a:gd name="connsiteX6" fmla="*/ 3922957 w 6187334"/>
+              <a:gd name="connsiteY6" fmla="*/ 1116318 h 2183117"/>
+              <a:gd name="connsiteX7" fmla="*/ 3937190 w 6187334"/>
+              <a:gd name="connsiteY7" fmla="*/ 2166448 h 2183117"/>
+              <a:gd name="connsiteX8" fmla="*/ 363860 w 6187334"/>
+              <a:gd name="connsiteY8" fmla="*/ 2183117 h 2183117"/>
+              <a:gd name="connsiteX9" fmla="*/ 0 w 6187334"/>
+              <a:gd name="connsiteY9" fmla="*/ 1819257 h 2183117"/>
+              <a:gd name="connsiteX10" fmla="*/ 0 w 6187334"/>
+              <a:gd name="connsiteY10" fmla="*/ 363860 h 2183117"/>
+              <a:gd name="connsiteX0" fmla="*/ 0 w 6187334"/>
+              <a:gd name="connsiteY0" fmla="*/ 363860 h 2183117"/>
+              <a:gd name="connsiteX1" fmla="*/ 363860 w 6187334"/>
+              <a:gd name="connsiteY1" fmla="*/ 0 h 2183117"/>
+              <a:gd name="connsiteX2" fmla="*/ 5823474 w 6187334"/>
+              <a:gd name="connsiteY2" fmla="*/ 0 h 2183117"/>
+              <a:gd name="connsiteX3" fmla="*/ 6187334 w 6187334"/>
+              <a:gd name="connsiteY3" fmla="*/ 363860 h 2183117"/>
+              <a:gd name="connsiteX4" fmla="*/ 6187333 w 6187334"/>
+              <a:gd name="connsiteY4" fmla="*/ 940715 h 2183117"/>
+              <a:gd name="connsiteX5" fmla="*/ 5685307 w 6187334"/>
+              <a:gd name="connsiteY5" fmla="*/ 1072752 h 2183117"/>
+              <a:gd name="connsiteX6" fmla="*/ 3922957 w 6187334"/>
+              <a:gd name="connsiteY6" fmla="*/ 1116318 h 2183117"/>
+              <a:gd name="connsiteX7" fmla="*/ 3919259 w 6187334"/>
+              <a:gd name="connsiteY7" fmla="*/ 1350660 h 2183117"/>
+              <a:gd name="connsiteX8" fmla="*/ 3937190 w 6187334"/>
+              <a:gd name="connsiteY8" fmla="*/ 2166448 h 2183117"/>
+              <a:gd name="connsiteX9" fmla="*/ 363860 w 6187334"/>
+              <a:gd name="connsiteY9" fmla="*/ 2183117 h 2183117"/>
+              <a:gd name="connsiteX10" fmla="*/ 0 w 6187334"/>
+              <a:gd name="connsiteY10" fmla="*/ 1819257 h 2183117"/>
+              <a:gd name="connsiteX11" fmla="*/ 0 w 6187334"/>
+              <a:gd name="connsiteY11" fmla="*/ 363860 h 2183117"/>
+              <a:gd name="connsiteX0" fmla="*/ 0 w 6187334"/>
+              <a:gd name="connsiteY0" fmla="*/ 363860 h 2183117"/>
+              <a:gd name="connsiteX1" fmla="*/ 363860 w 6187334"/>
+              <a:gd name="connsiteY1" fmla="*/ 0 h 2183117"/>
+              <a:gd name="connsiteX2" fmla="*/ 5823474 w 6187334"/>
+              <a:gd name="connsiteY2" fmla="*/ 0 h 2183117"/>
+              <a:gd name="connsiteX3" fmla="*/ 6187334 w 6187334"/>
+              <a:gd name="connsiteY3" fmla="*/ 363860 h 2183117"/>
+              <a:gd name="connsiteX4" fmla="*/ 6187333 w 6187334"/>
+              <a:gd name="connsiteY4" fmla="*/ 940715 h 2183117"/>
+              <a:gd name="connsiteX5" fmla="*/ 5685307 w 6187334"/>
+              <a:gd name="connsiteY5" fmla="*/ 1072752 h 2183117"/>
+              <a:gd name="connsiteX6" fmla="*/ 3985710 w 6187334"/>
+              <a:gd name="connsiteY6" fmla="*/ 1089423 h 2183117"/>
+              <a:gd name="connsiteX7" fmla="*/ 3919259 w 6187334"/>
+              <a:gd name="connsiteY7" fmla="*/ 1350660 h 2183117"/>
+              <a:gd name="connsiteX8" fmla="*/ 3937190 w 6187334"/>
+              <a:gd name="connsiteY8" fmla="*/ 2166448 h 2183117"/>
+              <a:gd name="connsiteX9" fmla="*/ 363860 w 6187334"/>
+              <a:gd name="connsiteY9" fmla="*/ 2183117 h 2183117"/>
+              <a:gd name="connsiteX10" fmla="*/ 0 w 6187334"/>
+              <a:gd name="connsiteY10" fmla="*/ 1819257 h 2183117"/>
+              <a:gd name="connsiteX11" fmla="*/ 0 w 6187334"/>
+              <a:gd name="connsiteY11" fmla="*/ 363860 h 2183117"/>
+              <a:gd name="connsiteX0" fmla="*/ 0 w 6187334"/>
+              <a:gd name="connsiteY0" fmla="*/ 363860 h 2183117"/>
+              <a:gd name="connsiteX1" fmla="*/ 363860 w 6187334"/>
+              <a:gd name="connsiteY1" fmla="*/ 0 h 2183117"/>
+              <a:gd name="connsiteX2" fmla="*/ 5823474 w 6187334"/>
+              <a:gd name="connsiteY2" fmla="*/ 0 h 2183117"/>
+              <a:gd name="connsiteX3" fmla="*/ 6187334 w 6187334"/>
+              <a:gd name="connsiteY3" fmla="*/ 363860 h 2183117"/>
+              <a:gd name="connsiteX4" fmla="*/ 6187333 w 6187334"/>
+              <a:gd name="connsiteY4" fmla="*/ 940715 h 2183117"/>
+              <a:gd name="connsiteX5" fmla="*/ 5685307 w 6187334"/>
+              <a:gd name="connsiteY5" fmla="*/ 1072752 h 2183117"/>
+              <a:gd name="connsiteX6" fmla="*/ 3985710 w 6187334"/>
+              <a:gd name="connsiteY6" fmla="*/ 1089423 h 2183117"/>
+              <a:gd name="connsiteX7" fmla="*/ 3919259 w 6187334"/>
+              <a:gd name="connsiteY7" fmla="*/ 1350660 h 2183117"/>
+              <a:gd name="connsiteX8" fmla="*/ 3937190 w 6187334"/>
+              <a:gd name="connsiteY8" fmla="*/ 2166448 h 2183117"/>
+              <a:gd name="connsiteX9" fmla="*/ 3650318 w 6187334"/>
+              <a:gd name="connsiteY9" fmla="*/ 2175413 h 2183117"/>
+              <a:gd name="connsiteX10" fmla="*/ 363860 w 6187334"/>
+              <a:gd name="connsiteY10" fmla="*/ 2183117 h 2183117"/>
+              <a:gd name="connsiteX11" fmla="*/ 0 w 6187334"/>
+              <a:gd name="connsiteY11" fmla="*/ 1819257 h 2183117"/>
+              <a:gd name="connsiteX12" fmla="*/ 0 w 6187334"/>
+              <a:gd name="connsiteY12" fmla="*/ 363860 h 2183117"/>
+              <a:gd name="connsiteX0" fmla="*/ 0 w 6187334"/>
+              <a:gd name="connsiteY0" fmla="*/ 363860 h 2183117"/>
+              <a:gd name="connsiteX1" fmla="*/ 363860 w 6187334"/>
+              <a:gd name="connsiteY1" fmla="*/ 0 h 2183117"/>
+              <a:gd name="connsiteX2" fmla="*/ 5823474 w 6187334"/>
+              <a:gd name="connsiteY2" fmla="*/ 0 h 2183117"/>
+              <a:gd name="connsiteX3" fmla="*/ 6187334 w 6187334"/>
+              <a:gd name="connsiteY3" fmla="*/ 363860 h 2183117"/>
+              <a:gd name="connsiteX4" fmla="*/ 6187333 w 6187334"/>
+              <a:gd name="connsiteY4" fmla="*/ 940715 h 2183117"/>
+              <a:gd name="connsiteX5" fmla="*/ 5685307 w 6187334"/>
+              <a:gd name="connsiteY5" fmla="*/ 1072752 h 2183117"/>
+              <a:gd name="connsiteX6" fmla="*/ 3985710 w 6187334"/>
+              <a:gd name="connsiteY6" fmla="*/ 1089423 h 2183117"/>
+              <a:gd name="connsiteX7" fmla="*/ 3919259 w 6187334"/>
+              <a:gd name="connsiteY7" fmla="*/ 1350660 h 2183117"/>
+              <a:gd name="connsiteX8" fmla="*/ 3937190 w 6187334"/>
+              <a:gd name="connsiteY8" fmla="*/ 1798895 h 2183117"/>
+              <a:gd name="connsiteX9" fmla="*/ 3650318 w 6187334"/>
+              <a:gd name="connsiteY9" fmla="*/ 2175413 h 2183117"/>
+              <a:gd name="connsiteX10" fmla="*/ 363860 w 6187334"/>
+              <a:gd name="connsiteY10" fmla="*/ 2183117 h 2183117"/>
+              <a:gd name="connsiteX11" fmla="*/ 0 w 6187334"/>
+              <a:gd name="connsiteY11" fmla="*/ 1819257 h 2183117"/>
+              <a:gd name="connsiteX12" fmla="*/ 0 w 6187334"/>
+              <a:gd name="connsiteY12" fmla="*/ 363860 h 2183117"/>
+              <a:gd name="connsiteX0" fmla="*/ 0 w 6187334"/>
+              <a:gd name="connsiteY0" fmla="*/ 363860 h 2183117"/>
+              <a:gd name="connsiteX1" fmla="*/ 363860 w 6187334"/>
+              <a:gd name="connsiteY1" fmla="*/ 0 h 2183117"/>
+              <a:gd name="connsiteX2" fmla="*/ 5823474 w 6187334"/>
+              <a:gd name="connsiteY2" fmla="*/ 0 h 2183117"/>
+              <a:gd name="connsiteX3" fmla="*/ 6187334 w 6187334"/>
+              <a:gd name="connsiteY3" fmla="*/ 363860 h 2183117"/>
+              <a:gd name="connsiteX4" fmla="*/ 6187333 w 6187334"/>
+              <a:gd name="connsiteY4" fmla="*/ 940715 h 2183117"/>
+              <a:gd name="connsiteX5" fmla="*/ 5685307 w 6187334"/>
+              <a:gd name="connsiteY5" fmla="*/ 1072752 h 2183117"/>
+              <a:gd name="connsiteX6" fmla="*/ 3985710 w 6187334"/>
+              <a:gd name="connsiteY6" fmla="*/ 1089423 h 2183117"/>
+              <a:gd name="connsiteX7" fmla="*/ 3919259 w 6187334"/>
+              <a:gd name="connsiteY7" fmla="*/ 1350660 h 2183117"/>
+              <a:gd name="connsiteX8" fmla="*/ 3937190 w 6187334"/>
+              <a:gd name="connsiteY8" fmla="*/ 1798895 h 2183117"/>
+              <a:gd name="connsiteX9" fmla="*/ 3775824 w 6187334"/>
+              <a:gd name="connsiteY9" fmla="*/ 2005084 h 2183117"/>
+              <a:gd name="connsiteX10" fmla="*/ 3650318 w 6187334"/>
+              <a:gd name="connsiteY10" fmla="*/ 2175413 h 2183117"/>
+              <a:gd name="connsiteX11" fmla="*/ 363860 w 6187334"/>
+              <a:gd name="connsiteY11" fmla="*/ 2183117 h 2183117"/>
+              <a:gd name="connsiteX12" fmla="*/ 0 w 6187334"/>
+              <a:gd name="connsiteY12" fmla="*/ 1819257 h 2183117"/>
+              <a:gd name="connsiteX13" fmla="*/ 0 w 6187334"/>
+              <a:gd name="connsiteY13" fmla="*/ 363860 h 2183117"/>
+              <a:gd name="connsiteX0" fmla="*/ 0 w 6187334"/>
+              <a:gd name="connsiteY0" fmla="*/ 363860 h 2183117"/>
+              <a:gd name="connsiteX1" fmla="*/ 363860 w 6187334"/>
+              <a:gd name="connsiteY1" fmla="*/ 0 h 2183117"/>
+              <a:gd name="connsiteX2" fmla="*/ 5823474 w 6187334"/>
+              <a:gd name="connsiteY2" fmla="*/ 0 h 2183117"/>
+              <a:gd name="connsiteX3" fmla="*/ 6187334 w 6187334"/>
+              <a:gd name="connsiteY3" fmla="*/ 363860 h 2183117"/>
+              <a:gd name="connsiteX4" fmla="*/ 6187333 w 6187334"/>
+              <a:gd name="connsiteY4" fmla="*/ 940715 h 2183117"/>
+              <a:gd name="connsiteX5" fmla="*/ 5685307 w 6187334"/>
+              <a:gd name="connsiteY5" fmla="*/ 1072752 h 2183117"/>
+              <a:gd name="connsiteX6" fmla="*/ 3985710 w 6187334"/>
+              <a:gd name="connsiteY6" fmla="*/ 1089423 h 2183117"/>
+              <a:gd name="connsiteX7" fmla="*/ 3919259 w 6187334"/>
+              <a:gd name="connsiteY7" fmla="*/ 1350660 h 2183117"/>
+              <a:gd name="connsiteX8" fmla="*/ 3937190 w 6187334"/>
+              <a:gd name="connsiteY8" fmla="*/ 1798895 h 2183117"/>
+              <a:gd name="connsiteX9" fmla="*/ 3919259 w 6187334"/>
+              <a:gd name="connsiteY9" fmla="*/ 2175413 h 2183117"/>
+              <a:gd name="connsiteX10" fmla="*/ 3650318 w 6187334"/>
+              <a:gd name="connsiteY10" fmla="*/ 2175413 h 2183117"/>
+              <a:gd name="connsiteX11" fmla="*/ 363860 w 6187334"/>
+              <a:gd name="connsiteY11" fmla="*/ 2183117 h 2183117"/>
+              <a:gd name="connsiteX12" fmla="*/ 0 w 6187334"/>
+              <a:gd name="connsiteY12" fmla="*/ 1819257 h 2183117"/>
+              <a:gd name="connsiteX13" fmla="*/ 0 w 6187334"/>
+              <a:gd name="connsiteY13" fmla="*/ 363860 h 2183117"/>
+              <a:gd name="connsiteX0" fmla="*/ 0 w 6187334"/>
+              <a:gd name="connsiteY0" fmla="*/ 363860 h 2183117"/>
+              <a:gd name="connsiteX1" fmla="*/ 363860 w 6187334"/>
+              <a:gd name="connsiteY1" fmla="*/ 0 h 2183117"/>
+              <a:gd name="connsiteX2" fmla="*/ 5823474 w 6187334"/>
+              <a:gd name="connsiteY2" fmla="*/ 0 h 2183117"/>
+              <a:gd name="connsiteX3" fmla="*/ 6187334 w 6187334"/>
+              <a:gd name="connsiteY3" fmla="*/ 363860 h 2183117"/>
+              <a:gd name="connsiteX4" fmla="*/ 6187333 w 6187334"/>
+              <a:gd name="connsiteY4" fmla="*/ 940715 h 2183117"/>
+              <a:gd name="connsiteX5" fmla="*/ 5712201 w 6187334"/>
+              <a:gd name="connsiteY5" fmla="*/ 1036893 h 2183117"/>
+              <a:gd name="connsiteX6" fmla="*/ 3985710 w 6187334"/>
+              <a:gd name="connsiteY6" fmla="*/ 1089423 h 2183117"/>
+              <a:gd name="connsiteX7" fmla="*/ 3919259 w 6187334"/>
+              <a:gd name="connsiteY7" fmla="*/ 1350660 h 2183117"/>
+              <a:gd name="connsiteX8" fmla="*/ 3937190 w 6187334"/>
+              <a:gd name="connsiteY8" fmla="*/ 1798895 h 2183117"/>
+              <a:gd name="connsiteX9" fmla="*/ 3919259 w 6187334"/>
+              <a:gd name="connsiteY9" fmla="*/ 2175413 h 2183117"/>
+              <a:gd name="connsiteX10" fmla="*/ 3650318 w 6187334"/>
+              <a:gd name="connsiteY10" fmla="*/ 2175413 h 2183117"/>
+              <a:gd name="connsiteX11" fmla="*/ 363860 w 6187334"/>
+              <a:gd name="connsiteY11" fmla="*/ 2183117 h 2183117"/>
+              <a:gd name="connsiteX12" fmla="*/ 0 w 6187334"/>
+              <a:gd name="connsiteY12" fmla="*/ 1819257 h 2183117"/>
+              <a:gd name="connsiteX13" fmla="*/ 0 w 6187334"/>
+              <a:gd name="connsiteY13" fmla="*/ 363860 h 2183117"/>
+              <a:gd name="connsiteX0" fmla="*/ 0 w 6187334"/>
+              <a:gd name="connsiteY0" fmla="*/ 363860 h 2183117"/>
+              <a:gd name="connsiteX1" fmla="*/ 363860 w 6187334"/>
+              <a:gd name="connsiteY1" fmla="*/ 0 h 2183117"/>
+              <a:gd name="connsiteX2" fmla="*/ 5823474 w 6187334"/>
+              <a:gd name="connsiteY2" fmla="*/ 0 h 2183117"/>
+              <a:gd name="connsiteX3" fmla="*/ 6187334 w 6187334"/>
+              <a:gd name="connsiteY3" fmla="*/ 363860 h 2183117"/>
+              <a:gd name="connsiteX4" fmla="*/ 6187333 w 6187334"/>
+              <a:gd name="connsiteY4" fmla="*/ 940715 h 2183117"/>
+              <a:gd name="connsiteX5" fmla="*/ 5712201 w 6187334"/>
+              <a:gd name="connsiteY5" fmla="*/ 1036893 h 2183117"/>
+              <a:gd name="connsiteX6" fmla="*/ 3976745 w 6187334"/>
+              <a:gd name="connsiteY6" fmla="*/ 1062529 h 2183117"/>
+              <a:gd name="connsiteX7" fmla="*/ 3919259 w 6187334"/>
+              <a:gd name="connsiteY7" fmla="*/ 1350660 h 2183117"/>
+              <a:gd name="connsiteX8" fmla="*/ 3937190 w 6187334"/>
+              <a:gd name="connsiteY8" fmla="*/ 1798895 h 2183117"/>
+              <a:gd name="connsiteX9" fmla="*/ 3919259 w 6187334"/>
+              <a:gd name="connsiteY9" fmla="*/ 2175413 h 2183117"/>
+              <a:gd name="connsiteX10" fmla="*/ 3650318 w 6187334"/>
+              <a:gd name="connsiteY10" fmla="*/ 2175413 h 2183117"/>
+              <a:gd name="connsiteX11" fmla="*/ 363860 w 6187334"/>
+              <a:gd name="connsiteY11" fmla="*/ 2183117 h 2183117"/>
+              <a:gd name="connsiteX12" fmla="*/ 0 w 6187334"/>
+              <a:gd name="connsiteY12" fmla="*/ 1819257 h 2183117"/>
+              <a:gd name="connsiteX13" fmla="*/ 0 w 6187334"/>
+              <a:gd name="connsiteY13" fmla="*/ 363860 h 2183117"/>
+              <a:gd name="connsiteX0" fmla="*/ 0 w 6205779"/>
+              <a:gd name="connsiteY0" fmla="*/ 363860 h 2183117"/>
+              <a:gd name="connsiteX1" fmla="*/ 363860 w 6205779"/>
+              <a:gd name="connsiteY1" fmla="*/ 0 h 2183117"/>
+              <a:gd name="connsiteX2" fmla="*/ 5823474 w 6205779"/>
+              <a:gd name="connsiteY2" fmla="*/ 0 h 2183117"/>
+              <a:gd name="connsiteX3" fmla="*/ 6187334 w 6205779"/>
+              <a:gd name="connsiteY3" fmla="*/ 363860 h 2183117"/>
+              <a:gd name="connsiteX4" fmla="*/ 6187333 w 6205779"/>
+              <a:gd name="connsiteY4" fmla="*/ 940715 h 2183117"/>
+              <a:gd name="connsiteX5" fmla="*/ 5963213 w 6205779"/>
+              <a:gd name="connsiteY5" fmla="*/ 1036893 h 2183117"/>
+              <a:gd name="connsiteX6" fmla="*/ 3976745 w 6205779"/>
+              <a:gd name="connsiteY6" fmla="*/ 1062529 h 2183117"/>
+              <a:gd name="connsiteX7" fmla="*/ 3919259 w 6205779"/>
+              <a:gd name="connsiteY7" fmla="*/ 1350660 h 2183117"/>
+              <a:gd name="connsiteX8" fmla="*/ 3937190 w 6205779"/>
+              <a:gd name="connsiteY8" fmla="*/ 1798895 h 2183117"/>
+              <a:gd name="connsiteX9" fmla="*/ 3919259 w 6205779"/>
+              <a:gd name="connsiteY9" fmla="*/ 2175413 h 2183117"/>
+              <a:gd name="connsiteX10" fmla="*/ 3650318 w 6205779"/>
+              <a:gd name="connsiteY10" fmla="*/ 2175413 h 2183117"/>
+              <a:gd name="connsiteX11" fmla="*/ 363860 w 6205779"/>
+              <a:gd name="connsiteY11" fmla="*/ 2183117 h 2183117"/>
+              <a:gd name="connsiteX12" fmla="*/ 0 w 6205779"/>
+              <a:gd name="connsiteY12" fmla="*/ 1819257 h 2183117"/>
+              <a:gd name="connsiteX13" fmla="*/ 0 w 6205779"/>
+              <a:gd name="connsiteY13" fmla="*/ 363860 h 2183117"/>
+              <a:gd name="connsiteX0" fmla="*/ 0 w 6205779"/>
+              <a:gd name="connsiteY0" fmla="*/ 363860 h 2183117"/>
+              <a:gd name="connsiteX1" fmla="*/ 363860 w 6205779"/>
+              <a:gd name="connsiteY1" fmla="*/ 0 h 2183117"/>
+              <a:gd name="connsiteX2" fmla="*/ 5823474 w 6205779"/>
+              <a:gd name="connsiteY2" fmla="*/ 0 h 2183117"/>
+              <a:gd name="connsiteX3" fmla="*/ 6187334 w 6205779"/>
+              <a:gd name="connsiteY3" fmla="*/ 363860 h 2183117"/>
+              <a:gd name="connsiteX4" fmla="*/ 6187333 w 6205779"/>
+              <a:gd name="connsiteY4" fmla="*/ 752456 h 2183117"/>
+              <a:gd name="connsiteX5" fmla="*/ 5963213 w 6205779"/>
+              <a:gd name="connsiteY5" fmla="*/ 1036893 h 2183117"/>
+              <a:gd name="connsiteX6" fmla="*/ 3976745 w 6205779"/>
+              <a:gd name="connsiteY6" fmla="*/ 1062529 h 2183117"/>
+              <a:gd name="connsiteX7" fmla="*/ 3919259 w 6205779"/>
+              <a:gd name="connsiteY7" fmla="*/ 1350660 h 2183117"/>
+              <a:gd name="connsiteX8" fmla="*/ 3937190 w 6205779"/>
+              <a:gd name="connsiteY8" fmla="*/ 1798895 h 2183117"/>
+              <a:gd name="connsiteX9" fmla="*/ 3919259 w 6205779"/>
+              <a:gd name="connsiteY9" fmla="*/ 2175413 h 2183117"/>
+              <a:gd name="connsiteX10" fmla="*/ 3650318 w 6205779"/>
+              <a:gd name="connsiteY10" fmla="*/ 2175413 h 2183117"/>
+              <a:gd name="connsiteX11" fmla="*/ 363860 w 6205779"/>
+              <a:gd name="connsiteY11" fmla="*/ 2183117 h 2183117"/>
+              <a:gd name="connsiteX12" fmla="*/ 0 w 6205779"/>
+              <a:gd name="connsiteY12" fmla="*/ 1819257 h 2183117"/>
+              <a:gd name="connsiteX13" fmla="*/ 0 w 6205779"/>
+              <a:gd name="connsiteY13" fmla="*/ 363860 h 2183117"/>
+              <a:gd name="connsiteX0" fmla="*/ 0 w 6205779"/>
+              <a:gd name="connsiteY0" fmla="*/ 363860 h 2183117"/>
+              <a:gd name="connsiteX1" fmla="*/ 363860 w 6205779"/>
+              <a:gd name="connsiteY1" fmla="*/ 0 h 2183117"/>
+              <a:gd name="connsiteX2" fmla="*/ 5823474 w 6205779"/>
+              <a:gd name="connsiteY2" fmla="*/ 0 h 2183117"/>
+              <a:gd name="connsiteX3" fmla="*/ 6187334 w 6205779"/>
+              <a:gd name="connsiteY3" fmla="*/ 363860 h 2183117"/>
+              <a:gd name="connsiteX4" fmla="*/ 6187333 w 6205779"/>
+              <a:gd name="connsiteY4" fmla="*/ 680738 h 2183117"/>
+              <a:gd name="connsiteX5" fmla="*/ 5963213 w 6205779"/>
+              <a:gd name="connsiteY5" fmla="*/ 1036893 h 2183117"/>
+              <a:gd name="connsiteX6" fmla="*/ 3976745 w 6205779"/>
+              <a:gd name="connsiteY6" fmla="*/ 1062529 h 2183117"/>
+              <a:gd name="connsiteX7" fmla="*/ 3919259 w 6205779"/>
+              <a:gd name="connsiteY7" fmla="*/ 1350660 h 2183117"/>
+              <a:gd name="connsiteX8" fmla="*/ 3937190 w 6205779"/>
+              <a:gd name="connsiteY8" fmla="*/ 1798895 h 2183117"/>
+              <a:gd name="connsiteX9" fmla="*/ 3919259 w 6205779"/>
+              <a:gd name="connsiteY9" fmla="*/ 2175413 h 2183117"/>
+              <a:gd name="connsiteX10" fmla="*/ 3650318 w 6205779"/>
+              <a:gd name="connsiteY10" fmla="*/ 2175413 h 2183117"/>
+              <a:gd name="connsiteX11" fmla="*/ 363860 w 6205779"/>
+              <a:gd name="connsiteY11" fmla="*/ 2183117 h 2183117"/>
+              <a:gd name="connsiteX12" fmla="*/ 0 w 6205779"/>
+              <a:gd name="connsiteY12" fmla="*/ 1819257 h 2183117"/>
+              <a:gd name="connsiteX13" fmla="*/ 0 w 6205779"/>
+              <a:gd name="connsiteY13" fmla="*/ 363860 h 2183117"/>
+              <a:gd name="connsiteX0" fmla="*/ 0 w 6201126"/>
+              <a:gd name="connsiteY0" fmla="*/ 363860 h 2183117"/>
+              <a:gd name="connsiteX1" fmla="*/ 363860 w 6201126"/>
+              <a:gd name="connsiteY1" fmla="*/ 0 h 2183117"/>
+              <a:gd name="connsiteX2" fmla="*/ 5823474 w 6201126"/>
+              <a:gd name="connsiteY2" fmla="*/ 0 h 2183117"/>
+              <a:gd name="connsiteX3" fmla="*/ 6187334 w 6201126"/>
+              <a:gd name="connsiteY3" fmla="*/ 363860 h 2183117"/>
+              <a:gd name="connsiteX4" fmla="*/ 6178368 w 6201126"/>
+              <a:gd name="connsiteY4" fmla="*/ 528338 h 2183117"/>
+              <a:gd name="connsiteX5" fmla="*/ 5963213 w 6201126"/>
+              <a:gd name="connsiteY5" fmla="*/ 1036893 h 2183117"/>
+              <a:gd name="connsiteX6" fmla="*/ 3976745 w 6201126"/>
+              <a:gd name="connsiteY6" fmla="*/ 1062529 h 2183117"/>
+              <a:gd name="connsiteX7" fmla="*/ 3919259 w 6201126"/>
+              <a:gd name="connsiteY7" fmla="*/ 1350660 h 2183117"/>
+              <a:gd name="connsiteX8" fmla="*/ 3937190 w 6201126"/>
+              <a:gd name="connsiteY8" fmla="*/ 1798895 h 2183117"/>
+              <a:gd name="connsiteX9" fmla="*/ 3919259 w 6201126"/>
+              <a:gd name="connsiteY9" fmla="*/ 2175413 h 2183117"/>
+              <a:gd name="connsiteX10" fmla="*/ 3650318 w 6201126"/>
+              <a:gd name="connsiteY10" fmla="*/ 2175413 h 2183117"/>
+              <a:gd name="connsiteX11" fmla="*/ 363860 w 6201126"/>
+              <a:gd name="connsiteY11" fmla="*/ 2183117 h 2183117"/>
+              <a:gd name="connsiteX12" fmla="*/ 0 w 6201126"/>
+              <a:gd name="connsiteY12" fmla="*/ 1819257 h 2183117"/>
+              <a:gd name="connsiteX13" fmla="*/ 0 w 6201126"/>
+              <a:gd name="connsiteY13" fmla="*/ 363860 h 2183117"/>
+              <a:gd name="connsiteX0" fmla="*/ 0 w 6187334"/>
+              <a:gd name="connsiteY0" fmla="*/ 363860 h 2183117"/>
+              <a:gd name="connsiteX1" fmla="*/ 363860 w 6187334"/>
+              <a:gd name="connsiteY1" fmla="*/ 0 h 2183117"/>
+              <a:gd name="connsiteX2" fmla="*/ 5823474 w 6187334"/>
+              <a:gd name="connsiteY2" fmla="*/ 0 h 2183117"/>
+              <a:gd name="connsiteX3" fmla="*/ 6187334 w 6187334"/>
+              <a:gd name="connsiteY3" fmla="*/ 363860 h 2183117"/>
+              <a:gd name="connsiteX4" fmla="*/ 6178368 w 6187334"/>
+              <a:gd name="connsiteY4" fmla="*/ 528338 h 2183117"/>
+              <a:gd name="connsiteX5" fmla="*/ 5882531 w 6187334"/>
+              <a:gd name="connsiteY5" fmla="*/ 1063787 h 2183117"/>
+              <a:gd name="connsiteX6" fmla="*/ 3976745 w 6187334"/>
+              <a:gd name="connsiteY6" fmla="*/ 1062529 h 2183117"/>
+              <a:gd name="connsiteX7" fmla="*/ 3919259 w 6187334"/>
+              <a:gd name="connsiteY7" fmla="*/ 1350660 h 2183117"/>
+              <a:gd name="connsiteX8" fmla="*/ 3937190 w 6187334"/>
+              <a:gd name="connsiteY8" fmla="*/ 1798895 h 2183117"/>
+              <a:gd name="connsiteX9" fmla="*/ 3919259 w 6187334"/>
+              <a:gd name="connsiteY9" fmla="*/ 2175413 h 2183117"/>
+              <a:gd name="connsiteX10" fmla="*/ 3650318 w 6187334"/>
+              <a:gd name="connsiteY10" fmla="*/ 2175413 h 2183117"/>
+              <a:gd name="connsiteX11" fmla="*/ 363860 w 6187334"/>
+              <a:gd name="connsiteY11" fmla="*/ 2183117 h 2183117"/>
+              <a:gd name="connsiteX12" fmla="*/ 0 w 6187334"/>
+              <a:gd name="connsiteY12" fmla="*/ 1819257 h 2183117"/>
+              <a:gd name="connsiteX13" fmla="*/ 0 w 6187334"/>
+              <a:gd name="connsiteY13" fmla="*/ 363860 h 2183117"/>
+              <a:gd name="connsiteX0" fmla="*/ 0 w 6205262"/>
+              <a:gd name="connsiteY0" fmla="*/ 363860 h 2183117"/>
+              <a:gd name="connsiteX1" fmla="*/ 363860 w 6205262"/>
+              <a:gd name="connsiteY1" fmla="*/ 0 h 2183117"/>
+              <a:gd name="connsiteX2" fmla="*/ 5823474 w 6205262"/>
+              <a:gd name="connsiteY2" fmla="*/ 0 h 2183117"/>
+              <a:gd name="connsiteX3" fmla="*/ 6187334 w 6205262"/>
+              <a:gd name="connsiteY3" fmla="*/ 363860 h 2183117"/>
+              <a:gd name="connsiteX4" fmla="*/ 6205262 w 6205262"/>
+              <a:gd name="connsiteY4" fmla="*/ 698668 h 2183117"/>
+              <a:gd name="connsiteX5" fmla="*/ 5882531 w 6205262"/>
+              <a:gd name="connsiteY5" fmla="*/ 1063787 h 2183117"/>
+              <a:gd name="connsiteX6" fmla="*/ 3976745 w 6205262"/>
+              <a:gd name="connsiteY6" fmla="*/ 1062529 h 2183117"/>
+              <a:gd name="connsiteX7" fmla="*/ 3919259 w 6205262"/>
+              <a:gd name="connsiteY7" fmla="*/ 1350660 h 2183117"/>
+              <a:gd name="connsiteX8" fmla="*/ 3937190 w 6205262"/>
+              <a:gd name="connsiteY8" fmla="*/ 1798895 h 2183117"/>
+              <a:gd name="connsiteX9" fmla="*/ 3919259 w 6205262"/>
+              <a:gd name="connsiteY9" fmla="*/ 2175413 h 2183117"/>
+              <a:gd name="connsiteX10" fmla="*/ 3650318 w 6205262"/>
+              <a:gd name="connsiteY10" fmla="*/ 2175413 h 2183117"/>
+              <a:gd name="connsiteX11" fmla="*/ 363860 w 6205262"/>
+              <a:gd name="connsiteY11" fmla="*/ 2183117 h 2183117"/>
+              <a:gd name="connsiteX12" fmla="*/ 0 w 6205262"/>
+              <a:gd name="connsiteY12" fmla="*/ 1819257 h 2183117"/>
+              <a:gd name="connsiteX13" fmla="*/ 0 w 6205262"/>
+              <a:gd name="connsiteY13" fmla="*/ 363860 h 2183117"/>
+              <a:gd name="connsiteX0" fmla="*/ 0 w 6205262"/>
+              <a:gd name="connsiteY0" fmla="*/ 363860 h 2183117"/>
+              <a:gd name="connsiteX1" fmla="*/ 363860 w 6205262"/>
+              <a:gd name="connsiteY1" fmla="*/ 0 h 2183117"/>
+              <a:gd name="connsiteX2" fmla="*/ 5823474 w 6205262"/>
+              <a:gd name="connsiteY2" fmla="*/ 0 h 2183117"/>
+              <a:gd name="connsiteX3" fmla="*/ 6187334 w 6205262"/>
+              <a:gd name="connsiteY3" fmla="*/ 363860 h 2183117"/>
+              <a:gd name="connsiteX4" fmla="*/ 6205262 w 6205262"/>
+              <a:gd name="connsiteY4" fmla="*/ 698668 h 2183117"/>
+              <a:gd name="connsiteX5" fmla="*/ 5882531 w 6205262"/>
+              <a:gd name="connsiteY5" fmla="*/ 1063787 h 2183117"/>
+              <a:gd name="connsiteX6" fmla="*/ 3976745 w 6205262"/>
+              <a:gd name="connsiteY6" fmla="*/ 1062529 h 2183117"/>
+              <a:gd name="connsiteX7" fmla="*/ 3686177 w 6205262"/>
+              <a:gd name="connsiteY7" fmla="*/ 1314801 h 2183117"/>
+              <a:gd name="connsiteX8" fmla="*/ 3937190 w 6205262"/>
+              <a:gd name="connsiteY8" fmla="*/ 1798895 h 2183117"/>
+              <a:gd name="connsiteX9" fmla="*/ 3919259 w 6205262"/>
+              <a:gd name="connsiteY9" fmla="*/ 2175413 h 2183117"/>
+              <a:gd name="connsiteX10" fmla="*/ 3650318 w 6205262"/>
+              <a:gd name="connsiteY10" fmla="*/ 2175413 h 2183117"/>
+              <a:gd name="connsiteX11" fmla="*/ 363860 w 6205262"/>
+              <a:gd name="connsiteY11" fmla="*/ 2183117 h 2183117"/>
+              <a:gd name="connsiteX12" fmla="*/ 0 w 6205262"/>
+              <a:gd name="connsiteY12" fmla="*/ 1819257 h 2183117"/>
+              <a:gd name="connsiteX13" fmla="*/ 0 w 6205262"/>
+              <a:gd name="connsiteY13" fmla="*/ 363860 h 2183117"/>
+              <a:gd name="connsiteX0" fmla="*/ 0 w 6205262"/>
+              <a:gd name="connsiteY0" fmla="*/ 363860 h 2183117"/>
+              <a:gd name="connsiteX1" fmla="*/ 363860 w 6205262"/>
+              <a:gd name="connsiteY1" fmla="*/ 0 h 2183117"/>
+              <a:gd name="connsiteX2" fmla="*/ 5823474 w 6205262"/>
+              <a:gd name="connsiteY2" fmla="*/ 0 h 2183117"/>
+              <a:gd name="connsiteX3" fmla="*/ 6187334 w 6205262"/>
+              <a:gd name="connsiteY3" fmla="*/ 363860 h 2183117"/>
+              <a:gd name="connsiteX4" fmla="*/ 6205262 w 6205262"/>
+              <a:gd name="connsiteY4" fmla="*/ 698668 h 2183117"/>
+              <a:gd name="connsiteX5" fmla="*/ 5882531 w 6205262"/>
+              <a:gd name="connsiteY5" fmla="*/ 1063787 h 2183117"/>
+              <a:gd name="connsiteX6" fmla="*/ 3976745 w 6205262"/>
+              <a:gd name="connsiteY6" fmla="*/ 1062529 h 2183117"/>
+              <a:gd name="connsiteX7" fmla="*/ 3686177 w 6205262"/>
+              <a:gd name="connsiteY7" fmla="*/ 1314801 h 2183117"/>
+              <a:gd name="connsiteX8" fmla="*/ 3668249 w 6205262"/>
+              <a:gd name="connsiteY8" fmla="*/ 1888542 h 2183117"/>
+              <a:gd name="connsiteX9" fmla="*/ 3919259 w 6205262"/>
+              <a:gd name="connsiteY9" fmla="*/ 2175413 h 2183117"/>
+              <a:gd name="connsiteX10" fmla="*/ 3650318 w 6205262"/>
+              <a:gd name="connsiteY10" fmla="*/ 2175413 h 2183117"/>
+              <a:gd name="connsiteX11" fmla="*/ 363860 w 6205262"/>
+              <a:gd name="connsiteY11" fmla="*/ 2183117 h 2183117"/>
+              <a:gd name="connsiteX12" fmla="*/ 0 w 6205262"/>
+              <a:gd name="connsiteY12" fmla="*/ 1819257 h 2183117"/>
+              <a:gd name="connsiteX13" fmla="*/ 0 w 6205262"/>
+              <a:gd name="connsiteY13" fmla="*/ 363860 h 2183117"/>
+              <a:gd name="connsiteX0" fmla="*/ 0 w 6205262"/>
+              <a:gd name="connsiteY0" fmla="*/ 363860 h 2183117"/>
+              <a:gd name="connsiteX1" fmla="*/ 363860 w 6205262"/>
+              <a:gd name="connsiteY1" fmla="*/ 0 h 2183117"/>
+              <a:gd name="connsiteX2" fmla="*/ 5823474 w 6205262"/>
+              <a:gd name="connsiteY2" fmla="*/ 0 h 2183117"/>
+              <a:gd name="connsiteX3" fmla="*/ 6187334 w 6205262"/>
+              <a:gd name="connsiteY3" fmla="*/ 363860 h 2183117"/>
+              <a:gd name="connsiteX4" fmla="*/ 6205262 w 6205262"/>
+              <a:gd name="connsiteY4" fmla="*/ 698668 h 2183117"/>
+              <a:gd name="connsiteX5" fmla="*/ 5882531 w 6205262"/>
+              <a:gd name="connsiteY5" fmla="*/ 1063787 h 2183117"/>
+              <a:gd name="connsiteX6" fmla="*/ 3976745 w 6205262"/>
+              <a:gd name="connsiteY6" fmla="*/ 1062529 h 2183117"/>
+              <a:gd name="connsiteX7" fmla="*/ 3713071 w 6205262"/>
+              <a:gd name="connsiteY7" fmla="*/ 1162401 h 2183117"/>
+              <a:gd name="connsiteX8" fmla="*/ 3668249 w 6205262"/>
+              <a:gd name="connsiteY8" fmla="*/ 1888542 h 2183117"/>
+              <a:gd name="connsiteX9" fmla="*/ 3919259 w 6205262"/>
+              <a:gd name="connsiteY9" fmla="*/ 2175413 h 2183117"/>
+              <a:gd name="connsiteX10" fmla="*/ 3650318 w 6205262"/>
+              <a:gd name="connsiteY10" fmla="*/ 2175413 h 2183117"/>
+              <a:gd name="connsiteX11" fmla="*/ 363860 w 6205262"/>
+              <a:gd name="connsiteY11" fmla="*/ 2183117 h 2183117"/>
+              <a:gd name="connsiteX12" fmla="*/ 0 w 6205262"/>
+              <a:gd name="connsiteY12" fmla="*/ 1819257 h 2183117"/>
+              <a:gd name="connsiteX13" fmla="*/ 0 w 6205262"/>
+              <a:gd name="connsiteY13" fmla="*/ 363860 h 2183117"/>
+              <a:gd name="connsiteX0" fmla="*/ 0 w 6205262"/>
+              <a:gd name="connsiteY0" fmla="*/ 363860 h 2183117"/>
+              <a:gd name="connsiteX1" fmla="*/ 363860 w 6205262"/>
+              <a:gd name="connsiteY1" fmla="*/ 0 h 2183117"/>
+              <a:gd name="connsiteX2" fmla="*/ 5823474 w 6205262"/>
+              <a:gd name="connsiteY2" fmla="*/ 0 h 2183117"/>
+              <a:gd name="connsiteX3" fmla="*/ 6187334 w 6205262"/>
+              <a:gd name="connsiteY3" fmla="*/ 363860 h 2183117"/>
+              <a:gd name="connsiteX4" fmla="*/ 6205262 w 6205262"/>
+              <a:gd name="connsiteY4" fmla="*/ 698668 h 2183117"/>
+              <a:gd name="connsiteX5" fmla="*/ 5882531 w 6205262"/>
+              <a:gd name="connsiteY5" fmla="*/ 1063787 h 2183117"/>
+              <a:gd name="connsiteX6" fmla="*/ 4129145 w 6205262"/>
+              <a:gd name="connsiteY6" fmla="*/ 1107352 h 2183117"/>
+              <a:gd name="connsiteX7" fmla="*/ 3713071 w 6205262"/>
+              <a:gd name="connsiteY7" fmla="*/ 1162401 h 2183117"/>
+              <a:gd name="connsiteX8" fmla="*/ 3668249 w 6205262"/>
+              <a:gd name="connsiteY8" fmla="*/ 1888542 h 2183117"/>
+              <a:gd name="connsiteX9" fmla="*/ 3919259 w 6205262"/>
+              <a:gd name="connsiteY9" fmla="*/ 2175413 h 2183117"/>
+              <a:gd name="connsiteX10" fmla="*/ 3650318 w 6205262"/>
+              <a:gd name="connsiteY10" fmla="*/ 2175413 h 2183117"/>
+              <a:gd name="connsiteX11" fmla="*/ 363860 w 6205262"/>
+              <a:gd name="connsiteY11" fmla="*/ 2183117 h 2183117"/>
+              <a:gd name="connsiteX12" fmla="*/ 0 w 6205262"/>
+              <a:gd name="connsiteY12" fmla="*/ 1819257 h 2183117"/>
+              <a:gd name="connsiteX13" fmla="*/ 0 w 6205262"/>
+              <a:gd name="connsiteY13" fmla="*/ 363860 h 2183117"/>
+              <a:gd name="connsiteX0" fmla="*/ 0 w 6205262"/>
+              <a:gd name="connsiteY0" fmla="*/ 363860 h 2183117"/>
+              <a:gd name="connsiteX1" fmla="*/ 363860 w 6205262"/>
+              <a:gd name="connsiteY1" fmla="*/ 0 h 2183117"/>
+              <a:gd name="connsiteX2" fmla="*/ 5823474 w 6205262"/>
+              <a:gd name="connsiteY2" fmla="*/ 0 h 2183117"/>
+              <a:gd name="connsiteX3" fmla="*/ 6187334 w 6205262"/>
+              <a:gd name="connsiteY3" fmla="*/ 363860 h 2183117"/>
+              <a:gd name="connsiteX4" fmla="*/ 6205262 w 6205262"/>
+              <a:gd name="connsiteY4" fmla="*/ 698668 h 2183117"/>
+              <a:gd name="connsiteX5" fmla="*/ 5882531 w 6205262"/>
+              <a:gd name="connsiteY5" fmla="*/ 1063787 h 2183117"/>
+              <a:gd name="connsiteX6" fmla="*/ 4649098 w 6205262"/>
+              <a:gd name="connsiteY6" fmla="*/ 1089423 h 2183117"/>
+              <a:gd name="connsiteX7" fmla="*/ 3713071 w 6205262"/>
+              <a:gd name="connsiteY7" fmla="*/ 1162401 h 2183117"/>
+              <a:gd name="connsiteX8" fmla="*/ 3668249 w 6205262"/>
+              <a:gd name="connsiteY8" fmla="*/ 1888542 h 2183117"/>
+              <a:gd name="connsiteX9" fmla="*/ 3919259 w 6205262"/>
+              <a:gd name="connsiteY9" fmla="*/ 2175413 h 2183117"/>
+              <a:gd name="connsiteX10" fmla="*/ 3650318 w 6205262"/>
+              <a:gd name="connsiteY10" fmla="*/ 2175413 h 2183117"/>
+              <a:gd name="connsiteX11" fmla="*/ 363860 w 6205262"/>
+              <a:gd name="connsiteY11" fmla="*/ 2183117 h 2183117"/>
+              <a:gd name="connsiteX12" fmla="*/ 0 w 6205262"/>
+              <a:gd name="connsiteY12" fmla="*/ 1819257 h 2183117"/>
+              <a:gd name="connsiteX13" fmla="*/ 0 w 6205262"/>
+              <a:gd name="connsiteY13" fmla="*/ 363860 h 2183117"/>
+              <a:gd name="connsiteX0" fmla="*/ 0 w 6205262"/>
+              <a:gd name="connsiteY0" fmla="*/ 363860 h 2183117"/>
+              <a:gd name="connsiteX1" fmla="*/ 363860 w 6205262"/>
+              <a:gd name="connsiteY1" fmla="*/ 0 h 2183117"/>
+              <a:gd name="connsiteX2" fmla="*/ 5823474 w 6205262"/>
+              <a:gd name="connsiteY2" fmla="*/ 0 h 2183117"/>
+              <a:gd name="connsiteX3" fmla="*/ 6187334 w 6205262"/>
+              <a:gd name="connsiteY3" fmla="*/ 363860 h 2183117"/>
+              <a:gd name="connsiteX4" fmla="*/ 6205262 w 6205262"/>
+              <a:gd name="connsiteY4" fmla="*/ 698668 h 2183117"/>
+              <a:gd name="connsiteX5" fmla="*/ 5882531 w 6205262"/>
+              <a:gd name="connsiteY5" fmla="*/ 1063787 h 2183117"/>
+              <a:gd name="connsiteX6" fmla="*/ 4649098 w 6205262"/>
+              <a:gd name="connsiteY6" fmla="*/ 1089423 h 2183117"/>
+              <a:gd name="connsiteX7" fmla="*/ 3713071 w 6205262"/>
+              <a:gd name="connsiteY7" fmla="*/ 1162401 h 2183117"/>
+              <a:gd name="connsiteX8" fmla="*/ 3668249 w 6205262"/>
+              <a:gd name="connsiteY8" fmla="*/ 1888542 h 2183117"/>
+              <a:gd name="connsiteX9" fmla="*/ 3919259 w 6205262"/>
+              <a:gd name="connsiteY9" fmla="*/ 2175413 h 2183117"/>
+              <a:gd name="connsiteX10" fmla="*/ 3650318 w 6205262"/>
+              <a:gd name="connsiteY10" fmla="*/ 2175413 h 2183117"/>
+              <a:gd name="connsiteX11" fmla="*/ 363860 w 6205262"/>
+              <a:gd name="connsiteY11" fmla="*/ 2183117 h 2183117"/>
+              <a:gd name="connsiteX12" fmla="*/ 0 w 6205262"/>
+              <a:gd name="connsiteY12" fmla="*/ 1819257 h 2183117"/>
+              <a:gd name="connsiteX13" fmla="*/ 0 w 6205262"/>
+              <a:gd name="connsiteY13" fmla="*/ 363860 h 2183117"/>
+              <a:gd name="connsiteX0" fmla="*/ 0 w 6205262"/>
+              <a:gd name="connsiteY0" fmla="*/ 363860 h 2183117"/>
+              <a:gd name="connsiteX1" fmla="*/ 363860 w 6205262"/>
+              <a:gd name="connsiteY1" fmla="*/ 0 h 2183117"/>
+              <a:gd name="connsiteX2" fmla="*/ 5823474 w 6205262"/>
+              <a:gd name="connsiteY2" fmla="*/ 0 h 2183117"/>
+              <a:gd name="connsiteX3" fmla="*/ 6187334 w 6205262"/>
+              <a:gd name="connsiteY3" fmla="*/ 363860 h 2183117"/>
+              <a:gd name="connsiteX4" fmla="*/ 6205262 w 6205262"/>
+              <a:gd name="connsiteY4" fmla="*/ 698668 h 2183117"/>
+              <a:gd name="connsiteX5" fmla="*/ 5882531 w 6205262"/>
+              <a:gd name="connsiteY5" fmla="*/ 1063787 h 2183117"/>
+              <a:gd name="connsiteX6" fmla="*/ 4649098 w 6205262"/>
+              <a:gd name="connsiteY6" fmla="*/ 1089423 h 2183117"/>
+              <a:gd name="connsiteX7" fmla="*/ 3713071 w 6205262"/>
+              <a:gd name="connsiteY7" fmla="*/ 1162401 h 2183117"/>
+              <a:gd name="connsiteX8" fmla="*/ 3668249 w 6205262"/>
+              <a:gd name="connsiteY8" fmla="*/ 1888542 h 2183117"/>
+              <a:gd name="connsiteX9" fmla="*/ 3919259 w 6205262"/>
+              <a:gd name="connsiteY9" fmla="*/ 2175413 h 2183117"/>
+              <a:gd name="connsiteX10" fmla="*/ 3650318 w 6205262"/>
+              <a:gd name="connsiteY10" fmla="*/ 2175413 h 2183117"/>
+              <a:gd name="connsiteX11" fmla="*/ 363860 w 6205262"/>
+              <a:gd name="connsiteY11" fmla="*/ 2183117 h 2183117"/>
+              <a:gd name="connsiteX12" fmla="*/ 0 w 6205262"/>
+              <a:gd name="connsiteY12" fmla="*/ 1819257 h 2183117"/>
+              <a:gd name="connsiteX13" fmla="*/ 0 w 6205262"/>
+              <a:gd name="connsiteY13" fmla="*/ 363860 h 2183117"/>
+              <a:gd name="connsiteX0" fmla="*/ 0 w 6205262"/>
+              <a:gd name="connsiteY0" fmla="*/ 363860 h 2183117"/>
+              <a:gd name="connsiteX1" fmla="*/ 363860 w 6205262"/>
+              <a:gd name="connsiteY1" fmla="*/ 0 h 2183117"/>
+              <a:gd name="connsiteX2" fmla="*/ 5823474 w 6205262"/>
+              <a:gd name="connsiteY2" fmla="*/ 0 h 2183117"/>
+              <a:gd name="connsiteX3" fmla="*/ 6187334 w 6205262"/>
+              <a:gd name="connsiteY3" fmla="*/ 363860 h 2183117"/>
+              <a:gd name="connsiteX4" fmla="*/ 6205262 w 6205262"/>
+              <a:gd name="connsiteY4" fmla="*/ 698668 h 2183117"/>
+              <a:gd name="connsiteX5" fmla="*/ 5882531 w 6205262"/>
+              <a:gd name="connsiteY5" fmla="*/ 1063787 h 2183117"/>
+              <a:gd name="connsiteX6" fmla="*/ 4649098 w 6205262"/>
+              <a:gd name="connsiteY6" fmla="*/ 1089423 h 2183117"/>
+              <a:gd name="connsiteX7" fmla="*/ 3713071 w 6205262"/>
+              <a:gd name="connsiteY7" fmla="*/ 1162401 h 2183117"/>
+              <a:gd name="connsiteX8" fmla="*/ 3668249 w 6205262"/>
+              <a:gd name="connsiteY8" fmla="*/ 1888542 h 2183117"/>
+              <a:gd name="connsiteX9" fmla="*/ 3919259 w 6205262"/>
+              <a:gd name="connsiteY9" fmla="*/ 2175413 h 2183117"/>
+              <a:gd name="connsiteX10" fmla="*/ 3650318 w 6205262"/>
+              <a:gd name="connsiteY10" fmla="*/ 2175413 h 2183117"/>
+              <a:gd name="connsiteX11" fmla="*/ 363860 w 6205262"/>
+              <a:gd name="connsiteY11" fmla="*/ 2183117 h 2183117"/>
+              <a:gd name="connsiteX12" fmla="*/ 0 w 6205262"/>
+              <a:gd name="connsiteY12" fmla="*/ 1819257 h 2183117"/>
+              <a:gd name="connsiteX13" fmla="*/ 0 w 6205262"/>
+              <a:gd name="connsiteY13" fmla="*/ 363860 h 2183117"/>
+              <a:gd name="connsiteX0" fmla="*/ 0 w 6205262"/>
+              <a:gd name="connsiteY0" fmla="*/ 363860 h 2183117"/>
+              <a:gd name="connsiteX1" fmla="*/ 363860 w 6205262"/>
+              <a:gd name="connsiteY1" fmla="*/ 0 h 2183117"/>
+              <a:gd name="connsiteX2" fmla="*/ 5823474 w 6205262"/>
+              <a:gd name="connsiteY2" fmla="*/ 0 h 2183117"/>
+              <a:gd name="connsiteX3" fmla="*/ 6187334 w 6205262"/>
+              <a:gd name="connsiteY3" fmla="*/ 363860 h 2183117"/>
+              <a:gd name="connsiteX4" fmla="*/ 6205262 w 6205262"/>
+              <a:gd name="connsiteY4" fmla="*/ 698668 h 2183117"/>
+              <a:gd name="connsiteX5" fmla="*/ 5882531 w 6205262"/>
+              <a:gd name="connsiteY5" fmla="*/ 1063787 h 2183117"/>
+              <a:gd name="connsiteX6" fmla="*/ 4649098 w 6205262"/>
+              <a:gd name="connsiteY6" fmla="*/ 1089423 h 2183117"/>
+              <a:gd name="connsiteX7" fmla="*/ 3713071 w 6205262"/>
+              <a:gd name="connsiteY7" fmla="*/ 1162401 h 2183117"/>
+              <a:gd name="connsiteX8" fmla="*/ 3668249 w 6205262"/>
+              <a:gd name="connsiteY8" fmla="*/ 1888542 h 2183117"/>
+              <a:gd name="connsiteX9" fmla="*/ 3919259 w 6205262"/>
+              <a:gd name="connsiteY9" fmla="*/ 2175413 h 2183117"/>
+              <a:gd name="connsiteX10" fmla="*/ 3650318 w 6205262"/>
+              <a:gd name="connsiteY10" fmla="*/ 2175413 h 2183117"/>
+              <a:gd name="connsiteX11" fmla="*/ 363860 w 6205262"/>
+              <a:gd name="connsiteY11" fmla="*/ 2183117 h 2183117"/>
+              <a:gd name="connsiteX12" fmla="*/ 0 w 6205262"/>
+              <a:gd name="connsiteY12" fmla="*/ 1819257 h 2183117"/>
+              <a:gd name="connsiteX13" fmla="*/ 0 w 6205262"/>
+              <a:gd name="connsiteY13" fmla="*/ 363860 h 2183117"/>
+              <a:gd name="connsiteX0" fmla="*/ 0 w 6205262"/>
+              <a:gd name="connsiteY0" fmla="*/ 363860 h 2183117"/>
+              <a:gd name="connsiteX1" fmla="*/ 363860 w 6205262"/>
+              <a:gd name="connsiteY1" fmla="*/ 0 h 2183117"/>
+              <a:gd name="connsiteX2" fmla="*/ 5823474 w 6205262"/>
+              <a:gd name="connsiteY2" fmla="*/ 0 h 2183117"/>
+              <a:gd name="connsiteX3" fmla="*/ 6187334 w 6205262"/>
+              <a:gd name="connsiteY3" fmla="*/ 363860 h 2183117"/>
+              <a:gd name="connsiteX4" fmla="*/ 6205262 w 6205262"/>
+              <a:gd name="connsiteY4" fmla="*/ 698668 h 2183117"/>
+              <a:gd name="connsiteX5" fmla="*/ 5882531 w 6205262"/>
+              <a:gd name="connsiteY5" fmla="*/ 1063787 h 2183117"/>
+              <a:gd name="connsiteX6" fmla="*/ 4649098 w 6205262"/>
+              <a:gd name="connsiteY6" fmla="*/ 1089423 h 2183117"/>
+              <a:gd name="connsiteX7" fmla="*/ 3713071 w 6205262"/>
+              <a:gd name="connsiteY7" fmla="*/ 1162401 h 2183117"/>
+              <a:gd name="connsiteX8" fmla="*/ 3668249 w 6205262"/>
+              <a:gd name="connsiteY8" fmla="*/ 1888542 h 2183117"/>
+              <a:gd name="connsiteX9" fmla="*/ 3919259 w 6205262"/>
+              <a:gd name="connsiteY9" fmla="*/ 2175413 h 2183117"/>
+              <a:gd name="connsiteX10" fmla="*/ 3650318 w 6205262"/>
+              <a:gd name="connsiteY10" fmla="*/ 2175413 h 2183117"/>
+              <a:gd name="connsiteX11" fmla="*/ 363860 w 6205262"/>
+              <a:gd name="connsiteY11" fmla="*/ 2183117 h 2183117"/>
+              <a:gd name="connsiteX12" fmla="*/ 0 w 6205262"/>
+              <a:gd name="connsiteY12" fmla="*/ 1819257 h 2183117"/>
+              <a:gd name="connsiteX13" fmla="*/ 0 w 6205262"/>
+              <a:gd name="connsiteY13" fmla="*/ 363860 h 2183117"/>
+              <a:gd name="connsiteX0" fmla="*/ 0 w 6205262"/>
+              <a:gd name="connsiteY0" fmla="*/ 363860 h 2183117"/>
+              <a:gd name="connsiteX1" fmla="*/ 363860 w 6205262"/>
+              <a:gd name="connsiteY1" fmla="*/ 0 h 2183117"/>
+              <a:gd name="connsiteX2" fmla="*/ 5823474 w 6205262"/>
+              <a:gd name="connsiteY2" fmla="*/ 0 h 2183117"/>
+              <a:gd name="connsiteX3" fmla="*/ 6187334 w 6205262"/>
+              <a:gd name="connsiteY3" fmla="*/ 363860 h 2183117"/>
+              <a:gd name="connsiteX4" fmla="*/ 6205262 w 6205262"/>
+              <a:gd name="connsiteY4" fmla="*/ 698668 h 2183117"/>
+              <a:gd name="connsiteX5" fmla="*/ 5882531 w 6205262"/>
+              <a:gd name="connsiteY5" fmla="*/ 1063787 h 2183117"/>
+              <a:gd name="connsiteX6" fmla="*/ 4649098 w 6205262"/>
+              <a:gd name="connsiteY6" fmla="*/ 1089423 h 2183117"/>
+              <a:gd name="connsiteX7" fmla="*/ 3713071 w 6205262"/>
+              <a:gd name="connsiteY7" fmla="*/ 1162401 h 2183117"/>
+              <a:gd name="connsiteX8" fmla="*/ 3668249 w 6205262"/>
+              <a:gd name="connsiteY8" fmla="*/ 1888542 h 2183117"/>
+              <a:gd name="connsiteX9" fmla="*/ 3919259 w 6205262"/>
+              <a:gd name="connsiteY9" fmla="*/ 2175413 h 2183117"/>
+              <a:gd name="connsiteX10" fmla="*/ 3650318 w 6205262"/>
+              <a:gd name="connsiteY10" fmla="*/ 2175413 h 2183117"/>
+              <a:gd name="connsiteX11" fmla="*/ 363860 w 6205262"/>
+              <a:gd name="connsiteY11" fmla="*/ 2183117 h 2183117"/>
+              <a:gd name="connsiteX12" fmla="*/ 0 w 6205262"/>
+              <a:gd name="connsiteY12" fmla="*/ 1819257 h 2183117"/>
+              <a:gd name="connsiteX13" fmla="*/ 0 w 6205262"/>
+              <a:gd name="connsiteY13" fmla="*/ 363860 h 2183117"/>
+              <a:gd name="connsiteX0" fmla="*/ 0 w 6205262"/>
+              <a:gd name="connsiteY0" fmla="*/ 363860 h 2183117"/>
+              <a:gd name="connsiteX1" fmla="*/ 363860 w 6205262"/>
+              <a:gd name="connsiteY1" fmla="*/ 0 h 2183117"/>
+              <a:gd name="connsiteX2" fmla="*/ 5823474 w 6205262"/>
+              <a:gd name="connsiteY2" fmla="*/ 0 h 2183117"/>
+              <a:gd name="connsiteX3" fmla="*/ 6187334 w 6205262"/>
+              <a:gd name="connsiteY3" fmla="*/ 363860 h 2183117"/>
+              <a:gd name="connsiteX4" fmla="*/ 6205262 w 6205262"/>
+              <a:gd name="connsiteY4" fmla="*/ 698668 h 2183117"/>
+              <a:gd name="connsiteX5" fmla="*/ 5882531 w 6205262"/>
+              <a:gd name="connsiteY5" fmla="*/ 1063787 h 2183117"/>
+              <a:gd name="connsiteX6" fmla="*/ 4649098 w 6205262"/>
+              <a:gd name="connsiteY6" fmla="*/ 1089423 h 2183117"/>
+              <a:gd name="connsiteX7" fmla="*/ 3713071 w 6205262"/>
+              <a:gd name="connsiteY7" fmla="*/ 1162401 h 2183117"/>
+              <a:gd name="connsiteX8" fmla="*/ 3668249 w 6205262"/>
+              <a:gd name="connsiteY8" fmla="*/ 1888542 h 2183117"/>
+              <a:gd name="connsiteX9" fmla="*/ 3650318 w 6205262"/>
+              <a:gd name="connsiteY9" fmla="*/ 2175413 h 2183117"/>
+              <a:gd name="connsiteX10" fmla="*/ 363860 w 6205262"/>
+              <a:gd name="connsiteY10" fmla="*/ 2183117 h 2183117"/>
+              <a:gd name="connsiteX11" fmla="*/ 0 w 6205262"/>
+              <a:gd name="connsiteY11" fmla="*/ 1819257 h 2183117"/>
+              <a:gd name="connsiteX12" fmla="*/ 0 w 6205262"/>
+              <a:gd name="connsiteY12" fmla="*/ 363860 h 2183117"/>
+              <a:gd name="connsiteX0" fmla="*/ 0 w 6205262"/>
+              <a:gd name="connsiteY0" fmla="*/ 363860 h 2183117"/>
+              <a:gd name="connsiteX1" fmla="*/ 363860 w 6205262"/>
+              <a:gd name="connsiteY1" fmla="*/ 0 h 2183117"/>
+              <a:gd name="connsiteX2" fmla="*/ 5823474 w 6205262"/>
+              <a:gd name="connsiteY2" fmla="*/ 0 h 2183117"/>
+              <a:gd name="connsiteX3" fmla="*/ 6187334 w 6205262"/>
+              <a:gd name="connsiteY3" fmla="*/ 363860 h 2183117"/>
+              <a:gd name="connsiteX4" fmla="*/ 6205262 w 6205262"/>
+              <a:gd name="connsiteY4" fmla="*/ 698668 h 2183117"/>
+              <a:gd name="connsiteX5" fmla="*/ 5882531 w 6205262"/>
+              <a:gd name="connsiteY5" fmla="*/ 1063787 h 2183117"/>
+              <a:gd name="connsiteX6" fmla="*/ 4649098 w 6205262"/>
+              <a:gd name="connsiteY6" fmla="*/ 1089423 h 2183117"/>
+              <a:gd name="connsiteX7" fmla="*/ 3713071 w 6205262"/>
+              <a:gd name="connsiteY7" fmla="*/ 1162401 h 2183117"/>
+              <a:gd name="connsiteX8" fmla="*/ 3668249 w 6205262"/>
+              <a:gd name="connsiteY8" fmla="*/ 1888542 h 2183117"/>
+              <a:gd name="connsiteX9" fmla="*/ 3650318 w 6205262"/>
+              <a:gd name="connsiteY9" fmla="*/ 2175413 h 2183117"/>
+              <a:gd name="connsiteX10" fmla="*/ 363860 w 6205262"/>
+              <a:gd name="connsiteY10" fmla="*/ 2183117 h 2183117"/>
+              <a:gd name="connsiteX11" fmla="*/ 0 w 6205262"/>
+              <a:gd name="connsiteY11" fmla="*/ 1819257 h 2183117"/>
+              <a:gd name="connsiteX12" fmla="*/ 0 w 6205262"/>
+              <a:gd name="connsiteY12" fmla="*/ 363860 h 2183117"/>
+              <a:gd name="connsiteX0" fmla="*/ 0 w 6205262"/>
+              <a:gd name="connsiteY0" fmla="*/ 363860 h 2183117"/>
+              <a:gd name="connsiteX1" fmla="*/ 363860 w 6205262"/>
+              <a:gd name="connsiteY1" fmla="*/ 0 h 2183117"/>
+              <a:gd name="connsiteX2" fmla="*/ 5823474 w 6205262"/>
+              <a:gd name="connsiteY2" fmla="*/ 0 h 2183117"/>
+              <a:gd name="connsiteX3" fmla="*/ 6187334 w 6205262"/>
+              <a:gd name="connsiteY3" fmla="*/ 363860 h 2183117"/>
+              <a:gd name="connsiteX4" fmla="*/ 6205262 w 6205262"/>
+              <a:gd name="connsiteY4" fmla="*/ 698668 h 2183117"/>
+              <a:gd name="connsiteX5" fmla="*/ 5882531 w 6205262"/>
+              <a:gd name="connsiteY5" fmla="*/ 1063787 h 2183117"/>
+              <a:gd name="connsiteX6" fmla="*/ 4649098 w 6205262"/>
+              <a:gd name="connsiteY6" fmla="*/ 1089423 h 2183117"/>
+              <a:gd name="connsiteX7" fmla="*/ 3713071 w 6205262"/>
+              <a:gd name="connsiteY7" fmla="*/ 1162401 h 2183117"/>
+              <a:gd name="connsiteX8" fmla="*/ 3695143 w 6205262"/>
+              <a:gd name="connsiteY8" fmla="*/ 1565813 h 2183117"/>
+              <a:gd name="connsiteX9" fmla="*/ 3650318 w 6205262"/>
+              <a:gd name="connsiteY9" fmla="*/ 2175413 h 2183117"/>
+              <a:gd name="connsiteX10" fmla="*/ 363860 w 6205262"/>
+              <a:gd name="connsiteY10" fmla="*/ 2183117 h 2183117"/>
+              <a:gd name="connsiteX11" fmla="*/ 0 w 6205262"/>
+              <a:gd name="connsiteY11" fmla="*/ 1819257 h 2183117"/>
+              <a:gd name="connsiteX12" fmla="*/ 0 w 6205262"/>
+              <a:gd name="connsiteY12" fmla="*/ 363860 h 2183117"/>
+              <a:gd name="connsiteX0" fmla="*/ 0 w 6205262"/>
+              <a:gd name="connsiteY0" fmla="*/ 363860 h 2198016"/>
+              <a:gd name="connsiteX1" fmla="*/ 363860 w 6205262"/>
+              <a:gd name="connsiteY1" fmla="*/ 0 h 2198016"/>
+              <a:gd name="connsiteX2" fmla="*/ 5823474 w 6205262"/>
+              <a:gd name="connsiteY2" fmla="*/ 0 h 2198016"/>
+              <a:gd name="connsiteX3" fmla="*/ 6187334 w 6205262"/>
+              <a:gd name="connsiteY3" fmla="*/ 363860 h 2198016"/>
+              <a:gd name="connsiteX4" fmla="*/ 6205262 w 6205262"/>
+              <a:gd name="connsiteY4" fmla="*/ 698668 h 2198016"/>
+              <a:gd name="connsiteX5" fmla="*/ 5882531 w 6205262"/>
+              <a:gd name="connsiteY5" fmla="*/ 1063787 h 2198016"/>
+              <a:gd name="connsiteX6" fmla="*/ 4649098 w 6205262"/>
+              <a:gd name="connsiteY6" fmla="*/ 1089423 h 2198016"/>
+              <a:gd name="connsiteX7" fmla="*/ 3713071 w 6205262"/>
+              <a:gd name="connsiteY7" fmla="*/ 1162401 h 2198016"/>
+              <a:gd name="connsiteX8" fmla="*/ 3695143 w 6205262"/>
+              <a:gd name="connsiteY8" fmla="*/ 1565813 h 2198016"/>
+              <a:gd name="connsiteX9" fmla="*/ 3650318 w 6205262"/>
+              <a:gd name="connsiteY9" fmla="*/ 2175413 h 2198016"/>
+              <a:gd name="connsiteX10" fmla="*/ 363860 w 6205262"/>
+              <a:gd name="connsiteY10" fmla="*/ 2183117 h 2198016"/>
+              <a:gd name="connsiteX11" fmla="*/ 0 w 6205262"/>
+              <a:gd name="connsiteY11" fmla="*/ 1819257 h 2198016"/>
+              <a:gd name="connsiteX12" fmla="*/ 0 w 6205262"/>
+              <a:gd name="connsiteY12" fmla="*/ 363860 h 2198016"/>
+              <a:gd name="connsiteX0" fmla="*/ 0 w 6205262"/>
+              <a:gd name="connsiteY0" fmla="*/ 363860 h 2187112"/>
+              <a:gd name="connsiteX1" fmla="*/ 363860 w 6205262"/>
+              <a:gd name="connsiteY1" fmla="*/ 0 h 2187112"/>
+              <a:gd name="connsiteX2" fmla="*/ 5823474 w 6205262"/>
+              <a:gd name="connsiteY2" fmla="*/ 0 h 2187112"/>
+              <a:gd name="connsiteX3" fmla="*/ 6187334 w 6205262"/>
+              <a:gd name="connsiteY3" fmla="*/ 363860 h 2187112"/>
+              <a:gd name="connsiteX4" fmla="*/ 6205262 w 6205262"/>
+              <a:gd name="connsiteY4" fmla="*/ 698668 h 2187112"/>
+              <a:gd name="connsiteX5" fmla="*/ 5882531 w 6205262"/>
+              <a:gd name="connsiteY5" fmla="*/ 1063787 h 2187112"/>
+              <a:gd name="connsiteX6" fmla="*/ 4649098 w 6205262"/>
+              <a:gd name="connsiteY6" fmla="*/ 1089423 h 2187112"/>
+              <a:gd name="connsiteX7" fmla="*/ 3713071 w 6205262"/>
+              <a:gd name="connsiteY7" fmla="*/ 1162401 h 2187112"/>
+              <a:gd name="connsiteX8" fmla="*/ 3695143 w 6205262"/>
+              <a:gd name="connsiteY8" fmla="*/ 1565813 h 2187112"/>
+              <a:gd name="connsiteX9" fmla="*/ 3677212 w 6205262"/>
+              <a:gd name="connsiteY9" fmla="*/ 2157483 h 2187112"/>
+              <a:gd name="connsiteX10" fmla="*/ 363860 w 6205262"/>
+              <a:gd name="connsiteY10" fmla="*/ 2183117 h 2187112"/>
+              <a:gd name="connsiteX11" fmla="*/ 0 w 6205262"/>
+              <a:gd name="connsiteY11" fmla="*/ 1819257 h 2187112"/>
+              <a:gd name="connsiteX12" fmla="*/ 0 w 6205262"/>
+              <a:gd name="connsiteY12" fmla="*/ 363860 h 2187112"/>
+              <a:gd name="connsiteX0" fmla="*/ 0 w 6205262"/>
+              <a:gd name="connsiteY0" fmla="*/ 363860 h 2187112"/>
+              <a:gd name="connsiteX1" fmla="*/ 363860 w 6205262"/>
+              <a:gd name="connsiteY1" fmla="*/ 0 h 2187112"/>
+              <a:gd name="connsiteX2" fmla="*/ 5823474 w 6205262"/>
+              <a:gd name="connsiteY2" fmla="*/ 0 h 2187112"/>
+              <a:gd name="connsiteX3" fmla="*/ 6187334 w 6205262"/>
+              <a:gd name="connsiteY3" fmla="*/ 363860 h 2187112"/>
+              <a:gd name="connsiteX4" fmla="*/ 6205262 w 6205262"/>
+              <a:gd name="connsiteY4" fmla="*/ 698668 h 2187112"/>
+              <a:gd name="connsiteX5" fmla="*/ 5882531 w 6205262"/>
+              <a:gd name="connsiteY5" fmla="*/ 1063787 h 2187112"/>
+              <a:gd name="connsiteX6" fmla="*/ 4649098 w 6205262"/>
+              <a:gd name="connsiteY6" fmla="*/ 1089423 h 2187112"/>
+              <a:gd name="connsiteX7" fmla="*/ 3713071 w 6205262"/>
+              <a:gd name="connsiteY7" fmla="*/ 1162401 h 2187112"/>
+              <a:gd name="connsiteX8" fmla="*/ 3695143 w 6205262"/>
+              <a:gd name="connsiteY8" fmla="*/ 1565813 h 2187112"/>
+              <a:gd name="connsiteX9" fmla="*/ 3677212 w 6205262"/>
+              <a:gd name="connsiteY9" fmla="*/ 2157483 h 2187112"/>
+              <a:gd name="connsiteX10" fmla="*/ 363860 w 6205262"/>
+              <a:gd name="connsiteY10" fmla="*/ 2183117 h 2187112"/>
+              <a:gd name="connsiteX11" fmla="*/ 0 w 6205262"/>
+              <a:gd name="connsiteY11" fmla="*/ 1819257 h 2187112"/>
+              <a:gd name="connsiteX12" fmla="*/ 0 w 6205262"/>
+              <a:gd name="connsiteY12" fmla="*/ 363860 h 2187112"/>
+              <a:gd name="connsiteX0" fmla="*/ 0 w 6205262"/>
+              <a:gd name="connsiteY0" fmla="*/ 363860 h 2183550"/>
+              <a:gd name="connsiteX1" fmla="*/ 363860 w 6205262"/>
+              <a:gd name="connsiteY1" fmla="*/ 0 h 2183550"/>
+              <a:gd name="connsiteX2" fmla="*/ 5823474 w 6205262"/>
+              <a:gd name="connsiteY2" fmla="*/ 0 h 2183550"/>
+              <a:gd name="connsiteX3" fmla="*/ 6187334 w 6205262"/>
+              <a:gd name="connsiteY3" fmla="*/ 363860 h 2183550"/>
+              <a:gd name="connsiteX4" fmla="*/ 6205262 w 6205262"/>
+              <a:gd name="connsiteY4" fmla="*/ 698668 h 2183550"/>
+              <a:gd name="connsiteX5" fmla="*/ 5882531 w 6205262"/>
+              <a:gd name="connsiteY5" fmla="*/ 1063787 h 2183550"/>
+              <a:gd name="connsiteX6" fmla="*/ 4649098 w 6205262"/>
+              <a:gd name="connsiteY6" fmla="*/ 1089423 h 2183550"/>
+              <a:gd name="connsiteX7" fmla="*/ 3713071 w 6205262"/>
+              <a:gd name="connsiteY7" fmla="*/ 1162401 h 2183550"/>
+              <a:gd name="connsiteX8" fmla="*/ 3695143 w 6205262"/>
+              <a:gd name="connsiteY8" fmla="*/ 1565813 h 2183550"/>
+              <a:gd name="connsiteX9" fmla="*/ 3677212 w 6205262"/>
+              <a:gd name="connsiteY9" fmla="*/ 2148518 h 2183550"/>
+              <a:gd name="connsiteX10" fmla="*/ 363860 w 6205262"/>
+              <a:gd name="connsiteY10" fmla="*/ 2183117 h 2183550"/>
+              <a:gd name="connsiteX11" fmla="*/ 0 w 6205262"/>
+              <a:gd name="connsiteY11" fmla="*/ 1819257 h 2183550"/>
+              <a:gd name="connsiteX12" fmla="*/ 0 w 6205262"/>
+              <a:gd name="connsiteY12" fmla="*/ 363860 h 2183550"/>
+              <a:gd name="connsiteX0" fmla="*/ 0 w 6205262"/>
+              <a:gd name="connsiteY0" fmla="*/ 363860 h 2186185"/>
+              <a:gd name="connsiteX1" fmla="*/ 363860 w 6205262"/>
+              <a:gd name="connsiteY1" fmla="*/ 0 h 2186185"/>
+              <a:gd name="connsiteX2" fmla="*/ 5823474 w 6205262"/>
+              <a:gd name="connsiteY2" fmla="*/ 0 h 2186185"/>
+              <a:gd name="connsiteX3" fmla="*/ 6187334 w 6205262"/>
+              <a:gd name="connsiteY3" fmla="*/ 363860 h 2186185"/>
+              <a:gd name="connsiteX4" fmla="*/ 6205262 w 6205262"/>
+              <a:gd name="connsiteY4" fmla="*/ 698668 h 2186185"/>
+              <a:gd name="connsiteX5" fmla="*/ 5882531 w 6205262"/>
+              <a:gd name="connsiteY5" fmla="*/ 1063787 h 2186185"/>
+              <a:gd name="connsiteX6" fmla="*/ 4649098 w 6205262"/>
+              <a:gd name="connsiteY6" fmla="*/ 1089423 h 2186185"/>
+              <a:gd name="connsiteX7" fmla="*/ 3713071 w 6205262"/>
+              <a:gd name="connsiteY7" fmla="*/ 1162401 h 2186185"/>
+              <a:gd name="connsiteX8" fmla="*/ 3695143 w 6205262"/>
+              <a:gd name="connsiteY8" fmla="*/ 1565813 h 2186185"/>
+              <a:gd name="connsiteX9" fmla="*/ 3677212 w 6205262"/>
+              <a:gd name="connsiteY9" fmla="*/ 2148518 h 2186185"/>
+              <a:gd name="connsiteX10" fmla="*/ 363860 w 6205262"/>
+              <a:gd name="connsiteY10" fmla="*/ 2183117 h 2186185"/>
+              <a:gd name="connsiteX11" fmla="*/ 0 w 6205262"/>
+              <a:gd name="connsiteY11" fmla="*/ 1819257 h 2186185"/>
+              <a:gd name="connsiteX12" fmla="*/ 0 w 6205262"/>
+              <a:gd name="connsiteY12" fmla="*/ 363860 h 2186185"/>
+              <a:gd name="connsiteX0" fmla="*/ 0 w 6205262"/>
+              <a:gd name="connsiteY0" fmla="*/ 363860 h 2186185"/>
+              <a:gd name="connsiteX1" fmla="*/ 363860 w 6205262"/>
+              <a:gd name="connsiteY1" fmla="*/ 0 h 2186185"/>
+              <a:gd name="connsiteX2" fmla="*/ 5823474 w 6205262"/>
+              <a:gd name="connsiteY2" fmla="*/ 0 h 2186185"/>
+              <a:gd name="connsiteX3" fmla="*/ 6187334 w 6205262"/>
+              <a:gd name="connsiteY3" fmla="*/ 363860 h 2186185"/>
+              <a:gd name="connsiteX4" fmla="*/ 6205262 w 6205262"/>
+              <a:gd name="connsiteY4" fmla="*/ 698668 h 2186185"/>
+              <a:gd name="connsiteX5" fmla="*/ 5882531 w 6205262"/>
+              <a:gd name="connsiteY5" fmla="*/ 1063787 h 2186185"/>
+              <a:gd name="connsiteX6" fmla="*/ 4649098 w 6205262"/>
+              <a:gd name="connsiteY6" fmla="*/ 1089423 h 2186185"/>
+              <a:gd name="connsiteX7" fmla="*/ 3713071 w 6205262"/>
+              <a:gd name="connsiteY7" fmla="*/ 1162401 h 2186185"/>
+              <a:gd name="connsiteX8" fmla="*/ 3695143 w 6205262"/>
+              <a:gd name="connsiteY8" fmla="*/ 1565813 h 2186185"/>
+              <a:gd name="connsiteX9" fmla="*/ 3677212 w 6205262"/>
+              <a:gd name="connsiteY9" fmla="*/ 2148518 h 2186185"/>
+              <a:gd name="connsiteX10" fmla="*/ 363860 w 6205262"/>
+              <a:gd name="connsiteY10" fmla="*/ 2183117 h 2186185"/>
+              <a:gd name="connsiteX11" fmla="*/ 0 w 6205262"/>
+              <a:gd name="connsiteY11" fmla="*/ 1819257 h 2186185"/>
+              <a:gd name="connsiteX12" fmla="*/ 0 w 6205262"/>
+              <a:gd name="connsiteY12" fmla="*/ 363860 h 2186185"/>
+              <a:gd name="connsiteX0" fmla="*/ 0 w 6205262"/>
+              <a:gd name="connsiteY0" fmla="*/ 363860 h 2186185"/>
+              <a:gd name="connsiteX1" fmla="*/ 363860 w 6205262"/>
+              <a:gd name="connsiteY1" fmla="*/ 0 h 2186185"/>
+              <a:gd name="connsiteX2" fmla="*/ 5823474 w 6205262"/>
+              <a:gd name="connsiteY2" fmla="*/ 0 h 2186185"/>
+              <a:gd name="connsiteX3" fmla="*/ 6187334 w 6205262"/>
+              <a:gd name="connsiteY3" fmla="*/ 363860 h 2186185"/>
+              <a:gd name="connsiteX4" fmla="*/ 6205262 w 6205262"/>
+              <a:gd name="connsiteY4" fmla="*/ 698668 h 2186185"/>
+              <a:gd name="connsiteX5" fmla="*/ 5882531 w 6205262"/>
+              <a:gd name="connsiteY5" fmla="*/ 1063787 h 2186185"/>
+              <a:gd name="connsiteX6" fmla="*/ 4649098 w 6205262"/>
+              <a:gd name="connsiteY6" fmla="*/ 1089423 h 2186185"/>
+              <a:gd name="connsiteX7" fmla="*/ 3713071 w 6205262"/>
+              <a:gd name="connsiteY7" fmla="*/ 1162401 h 2186185"/>
+              <a:gd name="connsiteX8" fmla="*/ 3695143 w 6205262"/>
+              <a:gd name="connsiteY8" fmla="*/ 1565813 h 2186185"/>
+              <a:gd name="connsiteX9" fmla="*/ 3677212 w 6205262"/>
+              <a:gd name="connsiteY9" fmla="*/ 2148518 h 2186185"/>
+              <a:gd name="connsiteX10" fmla="*/ 363860 w 6205262"/>
+              <a:gd name="connsiteY10" fmla="*/ 2183117 h 2186185"/>
+              <a:gd name="connsiteX11" fmla="*/ 0 w 6205262"/>
+              <a:gd name="connsiteY11" fmla="*/ 1819257 h 2186185"/>
+              <a:gd name="connsiteX12" fmla="*/ 0 w 6205262"/>
+              <a:gd name="connsiteY12" fmla="*/ 363860 h 2186185"/>
+              <a:gd name="connsiteX0" fmla="*/ 0 w 6205262"/>
+              <a:gd name="connsiteY0" fmla="*/ 363860 h 2183117"/>
+              <a:gd name="connsiteX1" fmla="*/ 363860 w 6205262"/>
+              <a:gd name="connsiteY1" fmla="*/ 0 h 2183117"/>
+              <a:gd name="connsiteX2" fmla="*/ 5823474 w 6205262"/>
+              <a:gd name="connsiteY2" fmla="*/ 0 h 2183117"/>
+              <a:gd name="connsiteX3" fmla="*/ 6187334 w 6205262"/>
+              <a:gd name="connsiteY3" fmla="*/ 363860 h 2183117"/>
+              <a:gd name="connsiteX4" fmla="*/ 6205262 w 6205262"/>
+              <a:gd name="connsiteY4" fmla="*/ 698668 h 2183117"/>
+              <a:gd name="connsiteX5" fmla="*/ 5882531 w 6205262"/>
+              <a:gd name="connsiteY5" fmla="*/ 1063787 h 2183117"/>
+              <a:gd name="connsiteX6" fmla="*/ 4649098 w 6205262"/>
+              <a:gd name="connsiteY6" fmla="*/ 1089423 h 2183117"/>
+              <a:gd name="connsiteX7" fmla="*/ 3713071 w 6205262"/>
+              <a:gd name="connsiteY7" fmla="*/ 1162401 h 2183117"/>
+              <a:gd name="connsiteX8" fmla="*/ 3695143 w 6205262"/>
+              <a:gd name="connsiteY8" fmla="*/ 1565813 h 2183117"/>
+              <a:gd name="connsiteX9" fmla="*/ 3596529 w 6205262"/>
+              <a:gd name="connsiteY9" fmla="*/ 2112660 h 2183117"/>
+              <a:gd name="connsiteX10" fmla="*/ 363860 w 6205262"/>
+              <a:gd name="connsiteY10" fmla="*/ 2183117 h 2183117"/>
+              <a:gd name="connsiteX11" fmla="*/ 0 w 6205262"/>
+              <a:gd name="connsiteY11" fmla="*/ 1819257 h 2183117"/>
+              <a:gd name="connsiteX12" fmla="*/ 0 w 6205262"/>
+              <a:gd name="connsiteY12" fmla="*/ 363860 h 2183117"/>
+              <a:gd name="connsiteX0" fmla="*/ 0 w 6205262"/>
+              <a:gd name="connsiteY0" fmla="*/ 363860 h 2183117"/>
+              <a:gd name="connsiteX1" fmla="*/ 363860 w 6205262"/>
+              <a:gd name="connsiteY1" fmla="*/ 0 h 2183117"/>
+              <a:gd name="connsiteX2" fmla="*/ 5823474 w 6205262"/>
+              <a:gd name="connsiteY2" fmla="*/ 0 h 2183117"/>
+              <a:gd name="connsiteX3" fmla="*/ 6187334 w 6205262"/>
+              <a:gd name="connsiteY3" fmla="*/ 363860 h 2183117"/>
+              <a:gd name="connsiteX4" fmla="*/ 6205262 w 6205262"/>
+              <a:gd name="connsiteY4" fmla="*/ 698668 h 2183117"/>
+              <a:gd name="connsiteX5" fmla="*/ 5882531 w 6205262"/>
+              <a:gd name="connsiteY5" fmla="*/ 1063787 h 2183117"/>
+              <a:gd name="connsiteX6" fmla="*/ 4649098 w 6205262"/>
+              <a:gd name="connsiteY6" fmla="*/ 1089423 h 2183117"/>
+              <a:gd name="connsiteX7" fmla="*/ 3713071 w 6205262"/>
+              <a:gd name="connsiteY7" fmla="*/ 1162401 h 2183117"/>
+              <a:gd name="connsiteX8" fmla="*/ 3695143 w 6205262"/>
+              <a:gd name="connsiteY8" fmla="*/ 1565813 h 2183117"/>
+              <a:gd name="connsiteX9" fmla="*/ 363860 w 6205262"/>
+              <a:gd name="connsiteY9" fmla="*/ 2183117 h 2183117"/>
+              <a:gd name="connsiteX10" fmla="*/ 0 w 6205262"/>
+              <a:gd name="connsiteY10" fmla="*/ 1819257 h 2183117"/>
+              <a:gd name="connsiteX11" fmla="*/ 0 w 6205262"/>
+              <a:gd name="connsiteY11" fmla="*/ 363860 h 2183117"/>
+              <a:gd name="connsiteX0" fmla="*/ 0 w 6205262"/>
+              <a:gd name="connsiteY0" fmla="*/ 363860 h 2204718"/>
+              <a:gd name="connsiteX1" fmla="*/ 363860 w 6205262"/>
+              <a:gd name="connsiteY1" fmla="*/ 0 h 2204718"/>
+              <a:gd name="connsiteX2" fmla="*/ 5823474 w 6205262"/>
+              <a:gd name="connsiteY2" fmla="*/ 0 h 2204718"/>
+              <a:gd name="connsiteX3" fmla="*/ 6187334 w 6205262"/>
+              <a:gd name="connsiteY3" fmla="*/ 363860 h 2204718"/>
+              <a:gd name="connsiteX4" fmla="*/ 6205262 w 6205262"/>
+              <a:gd name="connsiteY4" fmla="*/ 698668 h 2204718"/>
+              <a:gd name="connsiteX5" fmla="*/ 5882531 w 6205262"/>
+              <a:gd name="connsiteY5" fmla="*/ 1063787 h 2204718"/>
+              <a:gd name="connsiteX6" fmla="*/ 4649098 w 6205262"/>
+              <a:gd name="connsiteY6" fmla="*/ 1089423 h 2204718"/>
+              <a:gd name="connsiteX7" fmla="*/ 3713071 w 6205262"/>
+              <a:gd name="connsiteY7" fmla="*/ 1162401 h 2204718"/>
+              <a:gd name="connsiteX8" fmla="*/ 3731002 w 6205262"/>
+              <a:gd name="connsiteY8" fmla="*/ 2121624 h 2204718"/>
+              <a:gd name="connsiteX9" fmla="*/ 363860 w 6205262"/>
+              <a:gd name="connsiteY9" fmla="*/ 2183117 h 2204718"/>
+              <a:gd name="connsiteX10" fmla="*/ 0 w 6205262"/>
+              <a:gd name="connsiteY10" fmla="*/ 1819257 h 2204718"/>
+              <a:gd name="connsiteX11" fmla="*/ 0 w 6205262"/>
+              <a:gd name="connsiteY11" fmla="*/ 363860 h 2204718"/>
+              <a:gd name="connsiteX0" fmla="*/ 0 w 6205262"/>
+              <a:gd name="connsiteY0" fmla="*/ 363860 h 2264028"/>
+              <a:gd name="connsiteX1" fmla="*/ 363860 w 6205262"/>
+              <a:gd name="connsiteY1" fmla="*/ 0 h 2264028"/>
+              <a:gd name="connsiteX2" fmla="*/ 5823474 w 6205262"/>
+              <a:gd name="connsiteY2" fmla="*/ 0 h 2264028"/>
+              <a:gd name="connsiteX3" fmla="*/ 6187334 w 6205262"/>
+              <a:gd name="connsiteY3" fmla="*/ 363860 h 2264028"/>
+              <a:gd name="connsiteX4" fmla="*/ 6205262 w 6205262"/>
+              <a:gd name="connsiteY4" fmla="*/ 698668 h 2264028"/>
+              <a:gd name="connsiteX5" fmla="*/ 5882531 w 6205262"/>
+              <a:gd name="connsiteY5" fmla="*/ 1063787 h 2264028"/>
+              <a:gd name="connsiteX6" fmla="*/ 4649098 w 6205262"/>
+              <a:gd name="connsiteY6" fmla="*/ 1089423 h 2264028"/>
+              <a:gd name="connsiteX7" fmla="*/ 3713071 w 6205262"/>
+              <a:gd name="connsiteY7" fmla="*/ 1162401 h 2264028"/>
+              <a:gd name="connsiteX8" fmla="*/ 3731002 w 6205262"/>
+              <a:gd name="connsiteY8" fmla="*/ 2121624 h 2264028"/>
+              <a:gd name="connsiteX9" fmla="*/ 363860 w 6205262"/>
+              <a:gd name="connsiteY9" fmla="*/ 2183117 h 2264028"/>
+              <a:gd name="connsiteX10" fmla="*/ 0 w 6205262"/>
+              <a:gd name="connsiteY10" fmla="*/ 1819257 h 2264028"/>
+              <a:gd name="connsiteX11" fmla="*/ 0 w 6205262"/>
+              <a:gd name="connsiteY11" fmla="*/ 363860 h 2264028"/>
+              <a:gd name="connsiteX0" fmla="*/ 0 w 6205262"/>
+              <a:gd name="connsiteY0" fmla="*/ 363860 h 2185240"/>
+              <a:gd name="connsiteX1" fmla="*/ 363860 w 6205262"/>
+              <a:gd name="connsiteY1" fmla="*/ 0 h 2185240"/>
+              <a:gd name="connsiteX2" fmla="*/ 5823474 w 6205262"/>
+              <a:gd name="connsiteY2" fmla="*/ 0 h 2185240"/>
+              <a:gd name="connsiteX3" fmla="*/ 6187334 w 6205262"/>
+              <a:gd name="connsiteY3" fmla="*/ 363860 h 2185240"/>
+              <a:gd name="connsiteX4" fmla="*/ 6205262 w 6205262"/>
+              <a:gd name="connsiteY4" fmla="*/ 698668 h 2185240"/>
+              <a:gd name="connsiteX5" fmla="*/ 5882531 w 6205262"/>
+              <a:gd name="connsiteY5" fmla="*/ 1063787 h 2185240"/>
+              <a:gd name="connsiteX6" fmla="*/ 4649098 w 6205262"/>
+              <a:gd name="connsiteY6" fmla="*/ 1089423 h 2185240"/>
+              <a:gd name="connsiteX7" fmla="*/ 3713071 w 6205262"/>
+              <a:gd name="connsiteY7" fmla="*/ 1162401 h 2185240"/>
+              <a:gd name="connsiteX8" fmla="*/ 3731002 w 6205262"/>
+              <a:gd name="connsiteY8" fmla="*/ 2121624 h 2185240"/>
+              <a:gd name="connsiteX9" fmla="*/ 363860 w 6205262"/>
+              <a:gd name="connsiteY9" fmla="*/ 2183117 h 2185240"/>
+              <a:gd name="connsiteX10" fmla="*/ 0 w 6205262"/>
+              <a:gd name="connsiteY10" fmla="*/ 1819257 h 2185240"/>
+              <a:gd name="connsiteX11" fmla="*/ 0 w 6205262"/>
+              <a:gd name="connsiteY11" fmla="*/ 363860 h 2185240"/>
+              <a:gd name="connsiteX0" fmla="*/ 0 w 6205262"/>
+              <a:gd name="connsiteY0" fmla="*/ 363860 h 2183117"/>
+              <a:gd name="connsiteX1" fmla="*/ 363860 w 6205262"/>
+              <a:gd name="connsiteY1" fmla="*/ 0 h 2183117"/>
+              <a:gd name="connsiteX2" fmla="*/ 5823474 w 6205262"/>
+              <a:gd name="connsiteY2" fmla="*/ 0 h 2183117"/>
+              <a:gd name="connsiteX3" fmla="*/ 6187334 w 6205262"/>
+              <a:gd name="connsiteY3" fmla="*/ 363860 h 2183117"/>
+              <a:gd name="connsiteX4" fmla="*/ 6205262 w 6205262"/>
+              <a:gd name="connsiteY4" fmla="*/ 698668 h 2183117"/>
+              <a:gd name="connsiteX5" fmla="*/ 5882531 w 6205262"/>
+              <a:gd name="connsiteY5" fmla="*/ 1063787 h 2183117"/>
+              <a:gd name="connsiteX6" fmla="*/ 4649098 w 6205262"/>
+              <a:gd name="connsiteY6" fmla="*/ 1089423 h 2183117"/>
+              <a:gd name="connsiteX7" fmla="*/ 3713071 w 6205262"/>
+              <a:gd name="connsiteY7" fmla="*/ 1162401 h 2183117"/>
+              <a:gd name="connsiteX8" fmla="*/ 3731002 w 6205262"/>
+              <a:gd name="connsiteY8" fmla="*/ 2121624 h 2183117"/>
+              <a:gd name="connsiteX9" fmla="*/ 363860 w 6205262"/>
+              <a:gd name="connsiteY9" fmla="*/ 2183117 h 2183117"/>
+              <a:gd name="connsiteX10" fmla="*/ 0 w 6205262"/>
+              <a:gd name="connsiteY10" fmla="*/ 1819257 h 2183117"/>
+              <a:gd name="connsiteX11" fmla="*/ 0 w 6205262"/>
+              <a:gd name="connsiteY11" fmla="*/ 363860 h 2183117"/>
+              <a:gd name="connsiteX0" fmla="*/ 0 w 6205262"/>
+              <a:gd name="connsiteY0" fmla="*/ 363860 h 2183117"/>
+              <a:gd name="connsiteX1" fmla="*/ 363860 w 6205262"/>
+              <a:gd name="connsiteY1" fmla="*/ 0 h 2183117"/>
+              <a:gd name="connsiteX2" fmla="*/ 5823474 w 6205262"/>
+              <a:gd name="connsiteY2" fmla="*/ 0 h 2183117"/>
+              <a:gd name="connsiteX3" fmla="*/ 6187334 w 6205262"/>
+              <a:gd name="connsiteY3" fmla="*/ 363860 h 2183117"/>
+              <a:gd name="connsiteX4" fmla="*/ 6205262 w 6205262"/>
+              <a:gd name="connsiteY4" fmla="*/ 698668 h 2183117"/>
+              <a:gd name="connsiteX5" fmla="*/ 5882531 w 6205262"/>
+              <a:gd name="connsiteY5" fmla="*/ 1063787 h 2183117"/>
+              <a:gd name="connsiteX6" fmla="*/ 4649098 w 6205262"/>
+              <a:gd name="connsiteY6" fmla="*/ 1089423 h 2183117"/>
+              <a:gd name="connsiteX7" fmla="*/ 3713071 w 6205262"/>
+              <a:gd name="connsiteY7" fmla="*/ 1162401 h 2183117"/>
+              <a:gd name="connsiteX8" fmla="*/ 3731002 w 6205262"/>
+              <a:gd name="connsiteY8" fmla="*/ 2121624 h 2183117"/>
+              <a:gd name="connsiteX9" fmla="*/ 363860 w 6205262"/>
+              <a:gd name="connsiteY9" fmla="*/ 2183117 h 2183117"/>
+              <a:gd name="connsiteX10" fmla="*/ 0 w 6205262"/>
+              <a:gd name="connsiteY10" fmla="*/ 1819257 h 2183117"/>
+              <a:gd name="connsiteX11" fmla="*/ 0 w 6205262"/>
+              <a:gd name="connsiteY11" fmla="*/ 363860 h 2183117"/>
+              <a:gd name="connsiteX0" fmla="*/ 0 w 6205262"/>
+              <a:gd name="connsiteY0" fmla="*/ 363860 h 2183117"/>
+              <a:gd name="connsiteX1" fmla="*/ 363860 w 6205262"/>
+              <a:gd name="connsiteY1" fmla="*/ 0 h 2183117"/>
+              <a:gd name="connsiteX2" fmla="*/ 5823474 w 6205262"/>
+              <a:gd name="connsiteY2" fmla="*/ 0 h 2183117"/>
+              <a:gd name="connsiteX3" fmla="*/ 6187334 w 6205262"/>
+              <a:gd name="connsiteY3" fmla="*/ 363860 h 2183117"/>
+              <a:gd name="connsiteX4" fmla="*/ 6205262 w 6205262"/>
+              <a:gd name="connsiteY4" fmla="*/ 698668 h 2183117"/>
+              <a:gd name="connsiteX5" fmla="*/ 5882531 w 6205262"/>
+              <a:gd name="connsiteY5" fmla="*/ 1063787 h 2183117"/>
+              <a:gd name="connsiteX6" fmla="*/ 4649098 w 6205262"/>
+              <a:gd name="connsiteY6" fmla="*/ 1089423 h 2183117"/>
+              <a:gd name="connsiteX7" fmla="*/ 3713071 w 6205262"/>
+              <a:gd name="connsiteY7" fmla="*/ 1162401 h 2183117"/>
+              <a:gd name="connsiteX8" fmla="*/ 3731002 w 6205262"/>
+              <a:gd name="connsiteY8" fmla="*/ 2121624 h 2183117"/>
+              <a:gd name="connsiteX9" fmla="*/ 363860 w 6205262"/>
+              <a:gd name="connsiteY9" fmla="*/ 2183117 h 2183117"/>
+              <a:gd name="connsiteX10" fmla="*/ 0 w 6205262"/>
+              <a:gd name="connsiteY10" fmla="*/ 1819257 h 2183117"/>
+              <a:gd name="connsiteX11" fmla="*/ 0 w 6205262"/>
+              <a:gd name="connsiteY11" fmla="*/ 363860 h 2183117"/>
+              <a:gd name="connsiteX0" fmla="*/ 0 w 6205262"/>
+              <a:gd name="connsiteY0" fmla="*/ 363860 h 2183117"/>
+              <a:gd name="connsiteX1" fmla="*/ 363860 w 6205262"/>
+              <a:gd name="connsiteY1" fmla="*/ 0 h 2183117"/>
+              <a:gd name="connsiteX2" fmla="*/ 5823474 w 6205262"/>
+              <a:gd name="connsiteY2" fmla="*/ 0 h 2183117"/>
+              <a:gd name="connsiteX3" fmla="*/ 6187334 w 6205262"/>
+              <a:gd name="connsiteY3" fmla="*/ 363860 h 2183117"/>
+              <a:gd name="connsiteX4" fmla="*/ 6205262 w 6205262"/>
+              <a:gd name="connsiteY4" fmla="*/ 698668 h 2183117"/>
+              <a:gd name="connsiteX5" fmla="*/ 5882531 w 6205262"/>
+              <a:gd name="connsiteY5" fmla="*/ 1063787 h 2183117"/>
+              <a:gd name="connsiteX6" fmla="*/ 4649098 w 6205262"/>
+              <a:gd name="connsiteY6" fmla="*/ 1089423 h 2183117"/>
+              <a:gd name="connsiteX7" fmla="*/ 3713071 w 6205262"/>
+              <a:gd name="connsiteY7" fmla="*/ 1162401 h 2183117"/>
+              <a:gd name="connsiteX8" fmla="*/ 3722038 w 6205262"/>
+              <a:gd name="connsiteY8" fmla="*/ 2014048 h 2183117"/>
+              <a:gd name="connsiteX9" fmla="*/ 363860 w 6205262"/>
+              <a:gd name="connsiteY9" fmla="*/ 2183117 h 2183117"/>
+              <a:gd name="connsiteX10" fmla="*/ 0 w 6205262"/>
+              <a:gd name="connsiteY10" fmla="*/ 1819257 h 2183117"/>
+              <a:gd name="connsiteX11" fmla="*/ 0 w 6205262"/>
+              <a:gd name="connsiteY11" fmla="*/ 363860 h 2183117"/>
+              <a:gd name="connsiteX0" fmla="*/ 0 w 6205262"/>
+              <a:gd name="connsiteY0" fmla="*/ 363860 h 2187014"/>
+              <a:gd name="connsiteX1" fmla="*/ 363860 w 6205262"/>
+              <a:gd name="connsiteY1" fmla="*/ 0 h 2187014"/>
+              <a:gd name="connsiteX2" fmla="*/ 5823474 w 6205262"/>
+              <a:gd name="connsiteY2" fmla="*/ 0 h 2187014"/>
+              <a:gd name="connsiteX3" fmla="*/ 6187334 w 6205262"/>
+              <a:gd name="connsiteY3" fmla="*/ 363860 h 2187014"/>
+              <a:gd name="connsiteX4" fmla="*/ 6205262 w 6205262"/>
+              <a:gd name="connsiteY4" fmla="*/ 698668 h 2187014"/>
+              <a:gd name="connsiteX5" fmla="*/ 5882531 w 6205262"/>
+              <a:gd name="connsiteY5" fmla="*/ 1063787 h 2187014"/>
+              <a:gd name="connsiteX6" fmla="*/ 4649098 w 6205262"/>
+              <a:gd name="connsiteY6" fmla="*/ 1089423 h 2187014"/>
+              <a:gd name="connsiteX7" fmla="*/ 3713071 w 6205262"/>
+              <a:gd name="connsiteY7" fmla="*/ 1162401 h 2187014"/>
+              <a:gd name="connsiteX8" fmla="*/ 3722038 w 6205262"/>
+              <a:gd name="connsiteY8" fmla="*/ 2014048 h 2187014"/>
+              <a:gd name="connsiteX9" fmla="*/ 363860 w 6205262"/>
+              <a:gd name="connsiteY9" fmla="*/ 2183117 h 2187014"/>
+              <a:gd name="connsiteX10" fmla="*/ 0 w 6205262"/>
+              <a:gd name="connsiteY10" fmla="*/ 1819257 h 2187014"/>
+              <a:gd name="connsiteX11" fmla="*/ 0 w 6205262"/>
+              <a:gd name="connsiteY11" fmla="*/ 363860 h 2187014"/>
+              <a:gd name="connsiteX0" fmla="*/ 0 w 6205262"/>
+              <a:gd name="connsiteY0" fmla="*/ 363860 h 2227832"/>
+              <a:gd name="connsiteX1" fmla="*/ 363860 w 6205262"/>
+              <a:gd name="connsiteY1" fmla="*/ 0 h 2227832"/>
+              <a:gd name="connsiteX2" fmla="*/ 5823474 w 6205262"/>
+              <a:gd name="connsiteY2" fmla="*/ 0 h 2227832"/>
+              <a:gd name="connsiteX3" fmla="*/ 6187334 w 6205262"/>
+              <a:gd name="connsiteY3" fmla="*/ 363860 h 2227832"/>
+              <a:gd name="connsiteX4" fmla="*/ 6205262 w 6205262"/>
+              <a:gd name="connsiteY4" fmla="*/ 698668 h 2227832"/>
+              <a:gd name="connsiteX5" fmla="*/ 5882531 w 6205262"/>
+              <a:gd name="connsiteY5" fmla="*/ 1063787 h 2227832"/>
+              <a:gd name="connsiteX6" fmla="*/ 4649098 w 6205262"/>
+              <a:gd name="connsiteY6" fmla="*/ 1089423 h 2227832"/>
+              <a:gd name="connsiteX7" fmla="*/ 3713071 w 6205262"/>
+              <a:gd name="connsiteY7" fmla="*/ 1162401 h 2227832"/>
+              <a:gd name="connsiteX8" fmla="*/ 3560674 w 6205262"/>
+              <a:gd name="connsiteY8" fmla="*/ 2085766 h 2227832"/>
+              <a:gd name="connsiteX9" fmla="*/ 363860 w 6205262"/>
+              <a:gd name="connsiteY9" fmla="*/ 2183117 h 2227832"/>
+              <a:gd name="connsiteX10" fmla="*/ 0 w 6205262"/>
+              <a:gd name="connsiteY10" fmla="*/ 1819257 h 2227832"/>
+              <a:gd name="connsiteX11" fmla="*/ 0 w 6205262"/>
+              <a:gd name="connsiteY11" fmla="*/ 363860 h 2227832"/>
+              <a:gd name="connsiteX0" fmla="*/ 0 w 6205262"/>
+              <a:gd name="connsiteY0" fmla="*/ 363860 h 2183117"/>
+              <a:gd name="connsiteX1" fmla="*/ 363860 w 6205262"/>
+              <a:gd name="connsiteY1" fmla="*/ 0 h 2183117"/>
+              <a:gd name="connsiteX2" fmla="*/ 5823474 w 6205262"/>
+              <a:gd name="connsiteY2" fmla="*/ 0 h 2183117"/>
+              <a:gd name="connsiteX3" fmla="*/ 6187334 w 6205262"/>
+              <a:gd name="connsiteY3" fmla="*/ 363860 h 2183117"/>
+              <a:gd name="connsiteX4" fmla="*/ 6205262 w 6205262"/>
+              <a:gd name="connsiteY4" fmla="*/ 698668 h 2183117"/>
+              <a:gd name="connsiteX5" fmla="*/ 5882531 w 6205262"/>
+              <a:gd name="connsiteY5" fmla="*/ 1063787 h 2183117"/>
+              <a:gd name="connsiteX6" fmla="*/ 4649098 w 6205262"/>
+              <a:gd name="connsiteY6" fmla="*/ 1089423 h 2183117"/>
+              <a:gd name="connsiteX7" fmla="*/ 3713071 w 6205262"/>
+              <a:gd name="connsiteY7" fmla="*/ 1162401 h 2183117"/>
+              <a:gd name="connsiteX8" fmla="*/ 3560674 w 6205262"/>
+              <a:gd name="connsiteY8" fmla="*/ 2085766 h 2183117"/>
+              <a:gd name="connsiteX9" fmla="*/ 363860 w 6205262"/>
+              <a:gd name="connsiteY9" fmla="*/ 2183117 h 2183117"/>
+              <a:gd name="connsiteX10" fmla="*/ 0 w 6205262"/>
+              <a:gd name="connsiteY10" fmla="*/ 1819257 h 2183117"/>
+              <a:gd name="connsiteX11" fmla="*/ 0 w 6205262"/>
+              <a:gd name="connsiteY11" fmla="*/ 363860 h 2183117"/>
+              <a:gd name="connsiteX0" fmla="*/ 0 w 6205262"/>
+              <a:gd name="connsiteY0" fmla="*/ 363860 h 2183117"/>
+              <a:gd name="connsiteX1" fmla="*/ 363860 w 6205262"/>
+              <a:gd name="connsiteY1" fmla="*/ 0 h 2183117"/>
+              <a:gd name="connsiteX2" fmla="*/ 5823474 w 6205262"/>
+              <a:gd name="connsiteY2" fmla="*/ 0 h 2183117"/>
+              <a:gd name="connsiteX3" fmla="*/ 6187334 w 6205262"/>
+              <a:gd name="connsiteY3" fmla="*/ 363860 h 2183117"/>
+              <a:gd name="connsiteX4" fmla="*/ 6205262 w 6205262"/>
+              <a:gd name="connsiteY4" fmla="*/ 698668 h 2183117"/>
+              <a:gd name="connsiteX5" fmla="*/ 5882531 w 6205262"/>
+              <a:gd name="connsiteY5" fmla="*/ 1063787 h 2183117"/>
+              <a:gd name="connsiteX6" fmla="*/ 4649098 w 6205262"/>
+              <a:gd name="connsiteY6" fmla="*/ 1089423 h 2183117"/>
+              <a:gd name="connsiteX7" fmla="*/ 3713071 w 6205262"/>
+              <a:gd name="connsiteY7" fmla="*/ 1162401 h 2183117"/>
+              <a:gd name="connsiteX8" fmla="*/ 3560674 w 6205262"/>
+              <a:gd name="connsiteY8" fmla="*/ 2085766 h 2183117"/>
+              <a:gd name="connsiteX9" fmla="*/ 363860 w 6205262"/>
+              <a:gd name="connsiteY9" fmla="*/ 2183117 h 2183117"/>
+              <a:gd name="connsiteX10" fmla="*/ 0 w 6205262"/>
+              <a:gd name="connsiteY10" fmla="*/ 1819257 h 2183117"/>
+              <a:gd name="connsiteX11" fmla="*/ 0 w 6205262"/>
+              <a:gd name="connsiteY11" fmla="*/ 363860 h 2183117"/>
+              <a:gd name="connsiteX0" fmla="*/ 0 w 6205262"/>
+              <a:gd name="connsiteY0" fmla="*/ 363860 h 2183117"/>
+              <a:gd name="connsiteX1" fmla="*/ 363860 w 6205262"/>
+              <a:gd name="connsiteY1" fmla="*/ 0 h 2183117"/>
+              <a:gd name="connsiteX2" fmla="*/ 5823474 w 6205262"/>
+              <a:gd name="connsiteY2" fmla="*/ 0 h 2183117"/>
+              <a:gd name="connsiteX3" fmla="*/ 6187334 w 6205262"/>
+              <a:gd name="connsiteY3" fmla="*/ 363860 h 2183117"/>
+              <a:gd name="connsiteX4" fmla="*/ 6205262 w 6205262"/>
+              <a:gd name="connsiteY4" fmla="*/ 698668 h 2183117"/>
+              <a:gd name="connsiteX5" fmla="*/ 5882531 w 6205262"/>
+              <a:gd name="connsiteY5" fmla="*/ 1063787 h 2183117"/>
+              <a:gd name="connsiteX6" fmla="*/ 4649098 w 6205262"/>
+              <a:gd name="connsiteY6" fmla="*/ 1089423 h 2183117"/>
+              <a:gd name="connsiteX7" fmla="*/ 3775824 w 6205262"/>
+              <a:gd name="connsiteY7" fmla="*/ 1117577 h 2183117"/>
+              <a:gd name="connsiteX8" fmla="*/ 3560674 w 6205262"/>
+              <a:gd name="connsiteY8" fmla="*/ 2085766 h 2183117"/>
+              <a:gd name="connsiteX9" fmla="*/ 363860 w 6205262"/>
+              <a:gd name="connsiteY9" fmla="*/ 2183117 h 2183117"/>
+              <a:gd name="connsiteX10" fmla="*/ 0 w 6205262"/>
+              <a:gd name="connsiteY10" fmla="*/ 1819257 h 2183117"/>
+              <a:gd name="connsiteX11" fmla="*/ 0 w 6205262"/>
+              <a:gd name="connsiteY11" fmla="*/ 363860 h 2183117"/>
+            </a:gdLst>
+            <a:ahLst/>
+            <a:cxnLst>
+              <a:cxn ang="0">
+                <a:pos x="connsiteX0" y="connsiteY0"/>
+              </a:cxn>
+              <a:cxn ang="0">
+                <a:pos x="connsiteX1" y="connsiteY1"/>
+              </a:cxn>
+              <a:cxn ang="0">
+                <a:pos x="connsiteX2" y="connsiteY2"/>
+              </a:cxn>
+              <a:cxn ang="0">
+                <a:pos x="connsiteX3" y="connsiteY3"/>
+              </a:cxn>
+              <a:cxn ang="0">
+                <a:pos x="connsiteX4" y="connsiteY4"/>
+              </a:cxn>
+              <a:cxn ang="0">
+                <a:pos x="connsiteX5" y="connsiteY5"/>
+              </a:cxn>
+              <a:cxn ang="0">
+                <a:pos x="connsiteX6" y="connsiteY6"/>
+              </a:cxn>
+              <a:cxn ang="0">
+                <a:pos x="connsiteX7" y="connsiteY7"/>
+              </a:cxn>
+              <a:cxn ang="0">
+                <a:pos x="connsiteX8" y="connsiteY8"/>
+              </a:cxn>
+              <a:cxn ang="0">
+                <a:pos x="connsiteX9" y="connsiteY9"/>
+              </a:cxn>
+              <a:cxn ang="0">
+                <a:pos x="connsiteX10" y="connsiteY10"/>
+              </a:cxn>
+              <a:cxn ang="0">
+                <a:pos x="connsiteX11" y="connsiteY11"/>
+              </a:cxn>
+            </a:cxnLst>
+            <a:rect l="l" t="t" r="r" b="b"/>
+            <a:pathLst>
+              <a:path w="6205262" h="2183117">
+                <a:moveTo>
+                  <a:pt x="0" y="363860"/>
+                </a:moveTo>
+                <a:cubicBezTo>
+                  <a:pt x="0" y="162906"/>
+                  <a:pt x="162906" y="0"/>
+                  <a:pt x="363860" y="0"/>
+                </a:cubicBezTo>
+                <a:lnTo>
+                  <a:pt x="5823474" y="0"/>
+                </a:lnTo>
+                <a:cubicBezTo>
+                  <a:pt x="6024428" y="0"/>
+                  <a:pt x="6187334" y="162906"/>
+                  <a:pt x="6187334" y="363860"/>
+                </a:cubicBezTo>
+                <a:cubicBezTo>
+                  <a:pt x="6187334" y="556145"/>
+                  <a:pt x="6205262" y="506383"/>
+                  <a:pt x="6205262" y="698668"/>
+                </a:cubicBezTo>
+                <a:cubicBezTo>
+                  <a:pt x="6167909" y="786934"/>
+                  <a:pt x="6267398" y="1016591"/>
+                  <a:pt x="5882531" y="1063787"/>
+                </a:cubicBezTo>
+                <a:cubicBezTo>
+                  <a:pt x="5497664" y="1110983"/>
+                  <a:pt x="5059980" y="1087929"/>
+                  <a:pt x="4649098" y="1089423"/>
+                </a:cubicBezTo>
+                <a:cubicBezTo>
+                  <a:pt x="4056194" y="1077890"/>
+                  <a:pt x="3893598" y="1021533"/>
+                  <a:pt x="3775824" y="1117577"/>
+                </a:cubicBezTo>
+                <a:cubicBezTo>
+                  <a:pt x="3781801" y="1437318"/>
+                  <a:pt x="3698132" y="1326753"/>
+                  <a:pt x="3560674" y="2085766"/>
+                </a:cubicBezTo>
+                <a:cubicBezTo>
+                  <a:pt x="3011436" y="2228990"/>
+                  <a:pt x="979717" y="2140876"/>
+                  <a:pt x="363860" y="2183117"/>
+                </a:cubicBezTo>
+                <a:cubicBezTo>
+                  <a:pt x="162906" y="2183117"/>
+                  <a:pt x="0" y="2020211"/>
+                  <a:pt x="0" y="1819257"/>
+                </a:cubicBezTo>
+                <a:lnTo>
+                  <a:pt x="0" y="363860"/>
+                </a:lnTo>
+                <a:close/>
+              </a:path>
+            </a:pathLst>
+          </a:custGeom>
+          <a:solidFill>
+            <a:schemeClr val="accent5">
+              <a:lumMod val="40000"/>
+              <a:lumOff val="60000"/>
+            </a:schemeClr>
+          </a:solidFill>
+          <a:ln>
+            <a:solidFill>
+              <a:srgbClr val="468B58"/>
+            </a:solidFill>
+          </a:ln>
+        </p:spPr>
+        <p:style>
+          <a:lnRef idx="2">
+            <a:schemeClr val="accent1">
+              <a:shade val="15000"/>
+            </a:schemeClr>
+          </a:lnRef>
+          <a:fillRef idx="1">
+            <a:schemeClr val="accent1"/>
+          </a:fillRef>
+          <a:effectRef idx="0">
+            <a:schemeClr val="accent1"/>
+          </a:effectRef>
+          <a:fontRef idx="minor">
+            <a:schemeClr val="lt1"/>
+          </a:fontRef>
+        </p:style>
+        <p:txBody>
+          <a:bodyPr rtlCol="0" anchor="t"/>
+          <a:lstStyle/>
+          <a:p>
+            <a:r>
+              <a:rPr lang="fr-FR" sz="1200" dirty="0"/>
+              <a:t>    Virtual </a:t>
+            </a:r>
+            <a:r>
+              <a:rPr lang="fr-FR" sz="1200" dirty="0" err="1"/>
+              <a:t>Private</a:t>
+            </a:r>
+            <a:r>
+              <a:rPr lang="fr-FR" sz="1200" dirty="0"/>
+              <a:t> Cloud</a:t>
+            </a:r>
+          </a:p>
+        </p:txBody>
+      </p:sp>
+      <p:sp>
+        <p:nvSpPr>
+          <p:cNvPr id="11" name="Rectangle : coins arrondis 10">
+            <a:extLst>
+              <a:ext uri="{FF2B5EF4-FFF2-40B4-BE49-F238E27FC236}">
+                <a16:creationId xmlns:a16="http://schemas.microsoft.com/office/drawing/2014/main" id="{358705F2-3B22-539E-853D-ACCE082A5D7C}"/>
+              </a:ext>
+            </a:extLst>
+          </p:cNvPr>
+          <p:cNvSpPr/>
+          <p:nvPr/>
+        </p:nvSpPr>
+        <p:spPr>
+          <a:xfrm>
+            <a:off x="6842948" y="4351296"/>
+            <a:ext cx="1826728" cy="877188"/>
+          </a:xfrm>
+          <a:prstGeom prst="roundRect">
+            <a:avLst/>
+          </a:prstGeom>
+          <a:solidFill>
+            <a:schemeClr val="accent5"/>
+          </a:solidFill>
+          <a:ln w="28575">
+            <a:solidFill>
+              <a:schemeClr val="tx1"/>
+            </a:solidFill>
+          </a:ln>
+        </p:spPr>
+        <p:style>
+          <a:lnRef idx="2">
+            <a:schemeClr val="accent1">
+              <a:shade val="15000"/>
+            </a:schemeClr>
+          </a:lnRef>
+          <a:fillRef idx="1">
+            <a:schemeClr val="accent1"/>
+          </a:fillRef>
+          <a:effectRef idx="0">
+            <a:schemeClr val="accent1"/>
+          </a:effectRef>
+          <a:fontRef idx="minor">
+            <a:schemeClr val="lt1"/>
+          </a:fontRef>
+        </p:style>
+        <p:txBody>
+          <a:bodyPr rtlCol="0" anchor="ctr"/>
+          <a:lstStyle/>
+          <a:p>
+            <a:pPr algn="ctr"/>
+            <a:r>
+              <a:rPr lang="fr-FR" dirty="0"/>
+              <a:t>Amazon EC2</a:t>
+            </a:r>
+          </a:p>
+          <a:p>
+            <a:pPr algn="ctr"/>
+            <a:r>
+              <a:rPr lang="fr-FR" dirty="0"/>
+              <a:t>(</a:t>
+            </a:r>
+            <a:r>
+              <a:rPr lang="fr-FR" dirty="0" err="1"/>
+              <a:t>Airbyte</a:t>
+            </a:r>
+            <a:r>
+              <a:rPr lang="fr-FR" dirty="0"/>
+              <a:t>)</a:t>
+            </a:r>
+          </a:p>
+        </p:txBody>
+      </p:sp>
+      <p:sp>
+        <p:nvSpPr>
+          <p:cNvPr id="14" name="Rectangle : coins arrondis 13">
+            <a:extLst>
+              <a:ext uri="{FF2B5EF4-FFF2-40B4-BE49-F238E27FC236}">
+                <a16:creationId xmlns:a16="http://schemas.microsoft.com/office/drawing/2014/main" id="{4F896DDF-FB62-432D-0C98-67CFA9D0AFEA}"/>
+              </a:ext>
+            </a:extLst>
+          </p:cNvPr>
+          <p:cNvSpPr/>
+          <p:nvPr/>
+        </p:nvSpPr>
+        <p:spPr>
+          <a:xfrm>
+            <a:off x="4764015" y="2810668"/>
+            <a:ext cx="1535292" cy="687891"/>
+          </a:xfrm>
+          <a:prstGeom prst="roundRect">
+            <a:avLst/>
+          </a:prstGeom>
+          <a:solidFill>
+            <a:srgbClr val="FF0000"/>
+          </a:solidFill>
+          <a:ln>
+            <a:solidFill>
+              <a:srgbClr val="C00000"/>
+            </a:solidFill>
+          </a:ln>
+        </p:spPr>
+        <p:style>
+          <a:lnRef idx="2">
+            <a:schemeClr val="accent1">
+              <a:shade val="15000"/>
+            </a:schemeClr>
+          </a:lnRef>
+          <a:fillRef idx="1">
+            <a:schemeClr val="accent1"/>
+          </a:fillRef>
+          <a:effectRef idx="0">
+            <a:schemeClr val="accent1"/>
+          </a:effectRef>
+          <a:fontRef idx="minor">
+            <a:schemeClr val="lt1"/>
+          </a:fontRef>
+        </p:style>
+        <p:txBody>
+          <a:bodyPr rtlCol="0" anchor="ctr"/>
+          <a:lstStyle/>
+          <a:p>
+            <a:pPr algn="ctr"/>
+            <a:r>
+              <a:rPr lang="fr-FR" dirty="0"/>
+              <a:t>Cloud Watch</a:t>
+            </a:r>
+          </a:p>
+        </p:txBody>
+      </p:sp>
+      <p:sp>
+        <p:nvSpPr>
+          <p:cNvPr id="15" name="Rectangle : coins arrondis 14">
+            <a:extLst>
+              <a:ext uri="{FF2B5EF4-FFF2-40B4-BE49-F238E27FC236}">
+                <a16:creationId xmlns:a16="http://schemas.microsoft.com/office/drawing/2014/main" id="{5FC557AA-73E9-FC44-FD7A-A7E4ADA5B6AD}"/>
+              </a:ext>
+            </a:extLst>
+          </p:cNvPr>
+          <p:cNvSpPr/>
+          <p:nvPr/>
+        </p:nvSpPr>
+        <p:spPr>
+          <a:xfrm>
+            <a:off x="6453351" y="2789475"/>
+            <a:ext cx="1158911" cy="790238"/>
+          </a:xfrm>
+          <a:prstGeom prst="roundRect">
+            <a:avLst/>
+          </a:prstGeom>
+          <a:solidFill>
+            <a:srgbClr val="FF0000"/>
+          </a:solidFill>
+          <a:ln>
+            <a:solidFill>
+              <a:srgbClr val="C00000"/>
+            </a:solidFill>
+          </a:ln>
+        </p:spPr>
+        <p:style>
+          <a:lnRef idx="2">
+            <a:schemeClr val="accent1">
+              <a:shade val="15000"/>
+            </a:schemeClr>
+          </a:lnRef>
+          <a:fillRef idx="1">
+            <a:schemeClr val="accent1"/>
+          </a:fillRef>
+          <a:effectRef idx="0">
+            <a:schemeClr val="accent1"/>
+          </a:effectRef>
+          <a:fontRef idx="minor">
+            <a:schemeClr val="lt1"/>
+          </a:fontRef>
+        </p:style>
+        <p:txBody>
+          <a:bodyPr rtlCol="0" anchor="ctr"/>
+          <a:lstStyle/>
+          <a:p>
+            <a:pPr algn="ctr"/>
+            <a:r>
+              <a:rPr lang="fr-FR" dirty="0"/>
+              <a:t>AWS Backups</a:t>
+            </a:r>
+          </a:p>
+        </p:txBody>
+      </p:sp>
+      <p:sp>
+        <p:nvSpPr>
+          <p:cNvPr id="17" name="Rectangle : coins arrondis 16">
+            <a:extLst>
+              <a:ext uri="{FF2B5EF4-FFF2-40B4-BE49-F238E27FC236}">
+                <a16:creationId xmlns:a16="http://schemas.microsoft.com/office/drawing/2014/main" id="{1BF793FC-BD0A-85D7-0576-B1EDF27E5B16}"/>
+              </a:ext>
+            </a:extLst>
+          </p:cNvPr>
+          <p:cNvSpPr/>
+          <p:nvPr/>
+        </p:nvSpPr>
+        <p:spPr>
+          <a:xfrm>
+            <a:off x="7679049" y="2831159"/>
+            <a:ext cx="1191442" cy="690880"/>
+          </a:xfrm>
+          <a:prstGeom prst="roundRect">
+            <a:avLst/>
+          </a:prstGeom>
+          <a:solidFill>
+            <a:srgbClr val="FF0000"/>
+          </a:solidFill>
+          <a:ln>
+            <a:solidFill>
+              <a:srgbClr val="C00000"/>
+            </a:solidFill>
+          </a:ln>
+        </p:spPr>
+        <p:style>
+          <a:lnRef idx="2">
+            <a:schemeClr val="accent1">
+              <a:shade val="15000"/>
+            </a:schemeClr>
+          </a:lnRef>
+          <a:fillRef idx="1">
+            <a:schemeClr val="accent1"/>
+          </a:fillRef>
+          <a:effectRef idx="0">
+            <a:schemeClr val="accent1"/>
+          </a:effectRef>
+          <a:fontRef idx="minor">
+            <a:schemeClr val="lt1"/>
+          </a:fontRef>
+        </p:style>
+        <p:txBody>
+          <a:bodyPr rtlCol="0" anchor="ctr"/>
+          <a:lstStyle/>
+          <a:p>
+            <a:pPr algn="ctr"/>
+            <a:r>
+              <a:rPr lang="fr-FR" dirty="0"/>
+              <a:t>IAM</a:t>
+            </a:r>
+          </a:p>
+        </p:txBody>
+      </p:sp>
+      <p:cxnSp>
+        <p:nvCxnSpPr>
+          <p:cNvPr id="20" name="Connecteur droit avec flèche 19">
+            <a:extLst>
+              <a:ext uri="{FF2B5EF4-FFF2-40B4-BE49-F238E27FC236}">
+                <a16:creationId xmlns:a16="http://schemas.microsoft.com/office/drawing/2014/main" id="{9EBB1859-3DA8-C04C-F09A-17B225ADB9CF}"/>
+              </a:ext>
+            </a:extLst>
+          </p:cNvPr>
+          <p:cNvCxnSpPr>
+            <a:cxnSpLocks/>
+            <a:stCxn id="17" idx="2"/>
+          </p:cNvCxnSpPr>
+          <p:nvPr/>
+        </p:nvCxnSpPr>
+        <p:spPr>
+          <a:xfrm>
+            <a:off x="8274770" y="3522039"/>
+            <a:ext cx="0" cy="548311"/>
+          </a:xfrm>
+          <a:prstGeom prst="straightConnector1">
+            <a:avLst/>
+          </a:prstGeom>
+          <a:ln w="19050">
+            <a:solidFill>
+              <a:srgbClr val="C00000"/>
+            </a:solidFill>
+            <a:prstDash val="sysDash"/>
+            <a:tailEnd type="triangle"/>
+          </a:ln>
+        </p:spPr>
+        <p:style>
+          <a:lnRef idx="1">
+            <a:schemeClr val="accent1"/>
+          </a:lnRef>
+          <a:fillRef idx="0">
+            <a:schemeClr val="accent1"/>
+          </a:fillRef>
+          <a:effectRef idx="0">
+            <a:schemeClr val="accent1"/>
+          </a:effectRef>
+          <a:fontRef idx="minor">
+            <a:schemeClr val="tx1"/>
+          </a:fontRef>
+        </p:style>
+      </p:cxnSp>
+      <p:cxnSp>
+        <p:nvCxnSpPr>
+          <p:cNvPr id="22" name="Connecteur droit avec flèche 21">
+            <a:extLst>
+              <a:ext uri="{FF2B5EF4-FFF2-40B4-BE49-F238E27FC236}">
+                <a16:creationId xmlns:a16="http://schemas.microsoft.com/office/drawing/2014/main" id="{0922AFF4-E75B-5FC6-A069-AAFFF8CC844A}"/>
+              </a:ext>
+            </a:extLst>
+          </p:cNvPr>
+          <p:cNvCxnSpPr>
+            <a:cxnSpLocks/>
+            <a:stCxn id="15" idx="2"/>
+            <a:endCxn id="11" idx="0"/>
+          </p:cNvCxnSpPr>
+          <p:nvPr/>
+        </p:nvCxnSpPr>
+        <p:spPr>
+          <a:xfrm>
+            <a:off x="7032807" y="3579713"/>
+            <a:ext cx="723505" cy="771583"/>
+          </a:xfrm>
+          <a:prstGeom prst="straightConnector1">
+            <a:avLst/>
+          </a:prstGeom>
+          <a:ln w="19050">
+            <a:solidFill>
+              <a:srgbClr val="C00000"/>
+            </a:solidFill>
+            <a:prstDash val="sysDash"/>
+            <a:tailEnd type="triangle"/>
+          </a:ln>
+        </p:spPr>
+        <p:style>
+          <a:lnRef idx="1">
+            <a:schemeClr val="accent1"/>
+          </a:lnRef>
+          <a:fillRef idx="0">
+            <a:schemeClr val="accent1"/>
+          </a:fillRef>
+          <a:effectRef idx="0">
+            <a:schemeClr val="accent1"/>
+          </a:effectRef>
+          <a:fontRef idx="minor">
+            <a:schemeClr val="tx1"/>
+          </a:fontRef>
+        </p:style>
+      </p:cxnSp>
+      <p:cxnSp>
+        <p:nvCxnSpPr>
+          <p:cNvPr id="23" name="Connecteur droit avec flèche 22">
+            <a:extLst>
+              <a:ext uri="{FF2B5EF4-FFF2-40B4-BE49-F238E27FC236}">
+                <a16:creationId xmlns:a16="http://schemas.microsoft.com/office/drawing/2014/main" id="{C3CFF158-DDCA-5326-DEF1-C001DEB53A3D}"/>
+              </a:ext>
+            </a:extLst>
+          </p:cNvPr>
+          <p:cNvCxnSpPr>
+            <a:cxnSpLocks/>
+            <a:stCxn id="15" idx="2"/>
+            <a:endCxn id="76" idx="0"/>
+          </p:cNvCxnSpPr>
+          <p:nvPr/>
+        </p:nvCxnSpPr>
+        <p:spPr>
+          <a:xfrm flipH="1">
+            <a:off x="5333850" y="3579713"/>
+            <a:ext cx="1698957" cy="771583"/>
+          </a:xfrm>
+          <a:prstGeom prst="straightConnector1">
+            <a:avLst/>
+          </a:prstGeom>
+          <a:ln w="19050">
+            <a:solidFill>
+              <a:srgbClr val="C00000"/>
+            </a:solidFill>
+            <a:prstDash val="sysDash"/>
+            <a:tailEnd type="triangle"/>
+          </a:ln>
+        </p:spPr>
+        <p:style>
+          <a:lnRef idx="1">
+            <a:schemeClr val="accent1"/>
+          </a:lnRef>
+          <a:fillRef idx="0">
+            <a:schemeClr val="accent1"/>
+          </a:fillRef>
+          <a:effectRef idx="0">
+            <a:schemeClr val="accent1"/>
+          </a:effectRef>
+          <a:fontRef idx="minor">
+            <a:schemeClr val="tx1"/>
+          </a:fontRef>
+        </p:style>
+      </p:cxnSp>
+      <p:cxnSp>
+        <p:nvCxnSpPr>
+          <p:cNvPr id="24" name="Connecteur droit avec flèche 23">
+            <a:extLst>
+              <a:ext uri="{FF2B5EF4-FFF2-40B4-BE49-F238E27FC236}">
+                <a16:creationId xmlns:a16="http://schemas.microsoft.com/office/drawing/2014/main" id="{B3979061-72F0-8FFE-EFB2-243AAF9F9E9C}"/>
+              </a:ext>
+            </a:extLst>
+          </p:cNvPr>
+          <p:cNvCxnSpPr>
+            <a:cxnSpLocks/>
+            <a:stCxn id="14" idx="2"/>
+            <a:endCxn id="76" idx="0"/>
+          </p:cNvCxnSpPr>
+          <p:nvPr/>
+        </p:nvCxnSpPr>
+        <p:spPr>
+          <a:xfrm flipH="1">
+            <a:off x="5333850" y="3498559"/>
+            <a:ext cx="197811" cy="852737"/>
+          </a:xfrm>
+          <a:prstGeom prst="straightConnector1">
+            <a:avLst/>
+          </a:prstGeom>
+          <a:ln w="19050">
+            <a:solidFill>
+              <a:srgbClr val="C00000"/>
+            </a:solidFill>
+            <a:prstDash val="sysDash"/>
+            <a:tailEnd type="triangle"/>
+          </a:ln>
+        </p:spPr>
+        <p:style>
+          <a:lnRef idx="1">
+            <a:schemeClr val="accent1"/>
+          </a:lnRef>
+          <a:fillRef idx="0">
+            <a:schemeClr val="accent1"/>
+          </a:fillRef>
+          <a:effectRef idx="0">
+            <a:schemeClr val="accent1"/>
+          </a:effectRef>
+          <a:fontRef idx="minor">
+            <a:schemeClr val="tx1"/>
+          </a:fontRef>
+        </p:style>
+      </p:cxnSp>
+      <p:sp>
+        <p:nvSpPr>
+          <p:cNvPr id="28" name="Rectangle : coins arrondis 27">
+            <a:extLst>
+              <a:ext uri="{FF2B5EF4-FFF2-40B4-BE49-F238E27FC236}">
+                <a16:creationId xmlns:a16="http://schemas.microsoft.com/office/drawing/2014/main" id="{DA4C002F-DB07-DE7D-8250-A440E82F1627}"/>
+              </a:ext>
+            </a:extLst>
+          </p:cNvPr>
+          <p:cNvSpPr/>
+          <p:nvPr/>
+        </p:nvSpPr>
+        <p:spPr>
+          <a:xfrm>
+            <a:off x="9446777" y="2818796"/>
+            <a:ext cx="1416523" cy="1081341"/>
+          </a:xfrm>
+          <a:prstGeom prst="roundRect">
+            <a:avLst/>
+          </a:prstGeom>
+          <a:solidFill>
+            <a:srgbClr val="C043CD"/>
+          </a:solidFill>
+          <a:ln>
+            <a:solidFill>
+              <a:srgbClr val="7030A0"/>
+            </a:solidFill>
+          </a:ln>
+        </p:spPr>
+        <p:style>
+          <a:lnRef idx="2">
+            <a:schemeClr val="accent1">
+              <a:shade val="15000"/>
+            </a:schemeClr>
+          </a:lnRef>
+          <a:fillRef idx="1">
+            <a:schemeClr val="accent1"/>
+          </a:fillRef>
+          <a:effectRef idx="0">
+            <a:schemeClr val="accent1"/>
+          </a:effectRef>
+          <a:fontRef idx="minor">
+            <a:schemeClr val="lt1"/>
+          </a:fontRef>
+        </p:style>
+        <p:txBody>
+          <a:bodyPr rtlCol="0" anchor="ctr"/>
+          <a:lstStyle/>
+          <a:p>
+            <a:pPr algn="ctr"/>
+            <a:r>
+              <a:rPr lang="fr-FR" dirty="0"/>
+              <a:t>GitHub</a:t>
+            </a:r>
+          </a:p>
+          <a:p>
+            <a:pPr algn="ctr"/>
+            <a:r>
+              <a:rPr lang="fr-FR" dirty="0"/>
+              <a:t>(Données Brutes)</a:t>
+            </a:r>
+          </a:p>
+        </p:txBody>
+      </p:sp>
+      <p:sp>
+        <p:nvSpPr>
+          <p:cNvPr id="29" name="ZoneTexte 28">
+            <a:extLst>
+              <a:ext uri="{FF2B5EF4-FFF2-40B4-BE49-F238E27FC236}">
+                <a16:creationId xmlns:a16="http://schemas.microsoft.com/office/drawing/2014/main" id="{5689A193-A653-C0E3-2DE8-4D7CE4C81A01}"/>
+              </a:ext>
+            </a:extLst>
+          </p:cNvPr>
+          <p:cNvSpPr txBox="1"/>
+          <p:nvPr/>
+        </p:nvSpPr>
+        <p:spPr>
+          <a:xfrm>
+            <a:off x="9559442" y="1746088"/>
+            <a:ext cx="1207039" cy="430887"/>
+          </a:xfrm>
+          <a:prstGeom prst="rect">
+            <a:avLst/>
+          </a:prstGeom>
+          <a:noFill/>
+        </p:spPr>
+        <p:txBody>
+          <a:bodyPr wrap="square" rtlCol="0">
+            <a:spAutoFit/>
+          </a:bodyPr>
+          <a:lstStyle/>
+          <a:p>
+            <a:r>
+              <a:rPr lang="fr-FR" sz="1100" i="1" dirty="0"/>
+              <a:t>Chargement .</a:t>
+            </a:r>
+            <a:r>
+              <a:rPr lang="fr-FR" sz="1100" i="1" dirty="0" err="1"/>
+              <a:t>json</a:t>
+            </a:r>
+            <a:r>
+              <a:rPr lang="fr-FR" sz="1100" i="1" dirty="0"/>
+              <a:t>, .xlsx .csv</a:t>
+            </a:r>
+          </a:p>
+        </p:txBody>
+      </p:sp>
+      <p:cxnSp>
+        <p:nvCxnSpPr>
+          <p:cNvPr id="31" name="Connecteur : en arc 30">
+            <a:extLst>
+              <a:ext uri="{FF2B5EF4-FFF2-40B4-BE49-F238E27FC236}">
+                <a16:creationId xmlns:a16="http://schemas.microsoft.com/office/drawing/2014/main" id="{66CDE15D-5224-4F7A-0AF8-EC626AAC8C24}"/>
+              </a:ext>
+            </a:extLst>
+          </p:cNvPr>
+          <p:cNvCxnSpPr>
+            <a:cxnSpLocks/>
+            <a:stCxn id="28" idx="2"/>
+            <a:endCxn id="11" idx="3"/>
+          </p:cNvCxnSpPr>
+          <p:nvPr/>
+        </p:nvCxnSpPr>
+        <p:spPr>
+          <a:xfrm rot="5400000">
+            <a:off x="8967482" y="3602332"/>
+            <a:ext cx="889753" cy="1485363"/>
+          </a:xfrm>
+          <a:prstGeom prst="bentConnector2">
+            <a:avLst/>
+          </a:prstGeom>
+          <a:ln w="19050">
+            <a:solidFill>
+              <a:srgbClr val="7030A0"/>
+            </a:solidFill>
+            <a:tailEnd type="triangle"/>
+          </a:ln>
+        </p:spPr>
+        <p:style>
+          <a:lnRef idx="1">
+            <a:schemeClr val="accent1"/>
+          </a:lnRef>
+          <a:fillRef idx="0">
+            <a:schemeClr val="accent1"/>
+          </a:fillRef>
+          <a:effectRef idx="0">
+            <a:schemeClr val="accent1"/>
+          </a:effectRef>
+          <a:fontRef idx="minor">
+            <a:schemeClr val="tx1"/>
+          </a:fontRef>
+        </p:style>
+      </p:cxnSp>
+      <p:sp>
+        <p:nvSpPr>
+          <p:cNvPr id="33" name="ZoneTexte 32">
+            <a:extLst>
+              <a:ext uri="{FF2B5EF4-FFF2-40B4-BE49-F238E27FC236}">
+                <a16:creationId xmlns:a16="http://schemas.microsoft.com/office/drawing/2014/main" id="{331C3B38-C085-03DF-E41C-AD36966DFED4}"/>
+              </a:ext>
+            </a:extLst>
+          </p:cNvPr>
+          <p:cNvSpPr txBox="1"/>
+          <p:nvPr/>
+        </p:nvSpPr>
+        <p:spPr>
+          <a:xfrm>
+            <a:off x="10143470" y="6122540"/>
+            <a:ext cx="1602680" cy="276999"/>
+          </a:xfrm>
+          <a:prstGeom prst="rect">
+            <a:avLst/>
+          </a:prstGeom>
+          <a:noFill/>
+        </p:spPr>
+        <p:txBody>
+          <a:bodyPr wrap="square" rtlCol="0">
+            <a:spAutoFit/>
+          </a:bodyPr>
+          <a:lstStyle/>
+          <a:p>
+            <a:r>
+              <a:rPr lang="fr-FR" sz="1200" i="1" dirty="0"/>
+              <a:t>Déploiement image</a:t>
+            </a:r>
+          </a:p>
+        </p:txBody>
+      </p:sp>
+      <p:sp>
+        <p:nvSpPr>
+          <p:cNvPr id="35" name="ZoneTexte 34">
+            <a:extLst>
+              <a:ext uri="{FF2B5EF4-FFF2-40B4-BE49-F238E27FC236}">
+                <a16:creationId xmlns:a16="http://schemas.microsoft.com/office/drawing/2014/main" id="{D3177527-189C-50AF-7580-C7D0DE64FF18}"/>
+              </a:ext>
+            </a:extLst>
+          </p:cNvPr>
+          <p:cNvSpPr txBox="1"/>
+          <p:nvPr/>
+        </p:nvSpPr>
+        <p:spPr>
+          <a:xfrm>
+            <a:off x="7135516" y="3567516"/>
+            <a:ext cx="738984" cy="276999"/>
+          </a:xfrm>
+          <a:prstGeom prst="rect">
+            <a:avLst/>
+          </a:prstGeom>
+          <a:noFill/>
+        </p:spPr>
+        <p:txBody>
+          <a:bodyPr wrap="square" rtlCol="0">
+            <a:spAutoFit/>
+          </a:bodyPr>
+          <a:lstStyle/>
+          <a:p>
+            <a:r>
+              <a:rPr lang="fr-FR" sz="1200" i="1" dirty="0"/>
+              <a:t>Backup</a:t>
+            </a:r>
+          </a:p>
+        </p:txBody>
+      </p:sp>
+      <p:sp>
+        <p:nvSpPr>
+          <p:cNvPr id="36" name="ZoneTexte 35">
+            <a:extLst>
+              <a:ext uri="{FF2B5EF4-FFF2-40B4-BE49-F238E27FC236}">
+                <a16:creationId xmlns:a16="http://schemas.microsoft.com/office/drawing/2014/main" id="{9059B31E-B037-E5BD-F115-73E9E480C7F2}"/>
+              </a:ext>
+            </a:extLst>
+          </p:cNvPr>
+          <p:cNvSpPr txBox="1"/>
+          <p:nvPr/>
+        </p:nvSpPr>
+        <p:spPr>
+          <a:xfrm>
+            <a:off x="4739739" y="3456978"/>
+            <a:ext cx="1349308" cy="276999"/>
+          </a:xfrm>
+          <a:prstGeom prst="rect">
+            <a:avLst/>
+          </a:prstGeom>
+          <a:noFill/>
+        </p:spPr>
+        <p:txBody>
+          <a:bodyPr wrap="square" rtlCol="0">
+            <a:spAutoFit/>
+          </a:bodyPr>
+          <a:lstStyle/>
+          <a:p>
+            <a:r>
+              <a:rPr lang="fr-FR" sz="1200" i="1" dirty="0"/>
+              <a:t>Monitor</a:t>
+            </a:r>
+          </a:p>
+        </p:txBody>
+      </p:sp>
+      <p:sp>
+        <p:nvSpPr>
+          <p:cNvPr id="41" name="ZoneTexte 40">
+            <a:extLst>
+              <a:ext uri="{FF2B5EF4-FFF2-40B4-BE49-F238E27FC236}">
+                <a16:creationId xmlns:a16="http://schemas.microsoft.com/office/drawing/2014/main" id="{6D00F317-7A94-58D9-1FB1-EDC4165ED61D}"/>
+              </a:ext>
+            </a:extLst>
+          </p:cNvPr>
+          <p:cNvSpPr txBox="1"/>
+          <p:nvPr/>
+        </p:nvSpPr>
+        <p:spPr>
+          <a:xfrm>
+            <a:off x="7720791" y="2565114"/>
+            <a:ext cx="1349308" cy="276999"/>
+          </a:xfrm>
+          <a:prstGeom prst="rect">
+            <a:avLst/>
+          </a:prstGeom>
+          <a:noFill/>
+        </p:spPr>
+        <p:txBody>
+          <a:bodyPr wrap="square" rtlCol="0">
+            <a:spAutoFit/>
+          </a:bodyPr>
+          <a:lstStyle/>
+          <a:p>
+            <a:r>
+              <a:rPr lang="fr-FR" sz="1200" i="1" dirty="0"/>
+              <a:t>Contrôle accès</a:t>
+            </a:r>
+          </a:p>
+        </p:txBody>
+      </p:sp>
+      <p:sp>
+        <p:nvSpPr>
+          <p:cNvPr id="53" name="Rectangle : coins arrondis 52">
+            <a:extLst>
+              <a:ext uri="{FF2B5EF4-FFF2-40B4-BE49-F238E27FC236}">
+                <a16:creationId xmlns:a16="http://schemas.microsoft.com/office/drawing/2014/main" id="{EF4A1DB5-6A2A-FFB4-D3E2-02090B7C0367}"/>
+              </a:ext>
+            </a:extLst>
+          </p:cNvPr>
+          <p:cNvSpPr/>
+          <p:nvPr/>
+        </p:nvSpPr>
+        <p:spPr>
+          <a:xfrm>
+            <a:off x="6827491" y="5397811"/>
+            <a:ext cx="1790063" cy="998991"/>
+          </a:xfrm>
+          <a:prstGeom prst="roundRect">
+            <a:avLst/>
+          </a:prstGeom>
+          <a:solidFill>
+            <a:schemeClr val="accent5"/>
+          </a:solidFill>
+          <a:ln>
+            <a:solidFill>
+              <a:schemeClr val="accent5">
+                <a:lumMod val="75000"/>
+              </a:schemeClr>
+            </a:solidFill>
+          </a:ln>
+        </p:spPr>
+        <p:style>
+          <a:lnRef idx="2">
+            <a:schemeClr val="accent1">
+              <a:shade val="15000"/>
+            </a:schemeClr>
+          </a:lnRef>
+          <a:fillRef idx="1">
+            <a:schemeClr val="accent1"/>
+          </a:fillRef>
+          <a:effectRef idx="0">
+            <a:schemeClr val="accent1"/>
+          </a:effectRef>
+          <a:fontRef idx="minor">
+            <a:schemeClr val="lt1"/>
+          </a:fontRef>
+        </p:style>
+        <p:txBody>
+          <a:bodyPr rtlCol="0" anchor="ctr"/>
+          <a:lstStyle/>
+          <a:p>
+            <a:pPr algn="ctr"/>
+            <a:r>
+              <a:rPr lang="fr-FR" dirty="0"/>
+              <a:t>Amazon ECR</a:t>
+            </a:r>
+          </a:p>
+          <a:p>
+            <a:pPr algn="ctr"/>
+            <a:r>
+              <a:rPr lang="fr-FR" sz="1600" dirty="0"/>
+              <a:t>(Image DBT)</a:t>
+            </a:r>
+          </a:p>
+        </p:txBody>
+      </p:sp>
+      <p:sp>
+        <p:nvSpPr>
+          <p:cNvPr id="76" name="Rectangle : coins arrondis 75">
+            <a:extLst>
+              <a:ext uri="{FF2B5EF4-FFF2-40B4-BE49-F238E27FC236}">
+                <a16:creationId xmlns:a16="http://schemas.microsoft.com/office/drawing/2014/main" id="{701AEC9E-27E0-FAD9-55AB-783DF77255B1}"/>
+              </a:ext>
+            </a:extLst>
+          </p:cNvPr>
+          <p:cNvSpPr/>
+          <p:nvPr/>
+        </p:nvSpPr>
+        <p:spPr>
+          <a:xfrm>
+            <a:off x="4420486" y="4351296"/>
+            <a:ext cx="1826728" cy="877188"/>
+          </a:xfrm>
+          <a:prstGeom prst="roundRect">
+            <a:avLst/>
+          </a:prstGeom>
+          <a:solidFill>
+            <a:schemeClr val="accent5"/>
+          </a:solidFill>
+          <a:ln>
+            <a:solidFill>
+              <a:schemeClr val="accent5">
+                <a:lumMod val="75000"/>
+              </a:schemeClr>
+            </a:solidFill>
+          </a:ln>
+        </p:spPr>
+        <p:style>
+          <a:lnRef idx="2">
+            <a:schemeClr val="accent1">
+              <a:shade val="15000"/>
+            </a:schemeClr>
+          </a:lnRef>
+          <a:fillRef idx="1">
+            <a:schemeClr val="accent1"/>
+          </a:fillRef>
+          <a:effectRef idx="0">
+            <a:schemeClr val="accent1"/>
+          </a:effectRef>
+          <a:fontRef idx="minor">
+            <a:schemeClr val="lt1"/>
+          </a:fontRef>
+        </p:style>
+        <p:txBody>
+          <a:bodyPr rtlCol="0" anchor="ctr"/>
+          <a:lstStyle/>
+          <a:p>
+            <a:pPr algn="ctr"/>
+            <a:r>
+              <a:rPr lang="fr-FR" dirty="0"/>
+              <a:t>Amazon RDS</a:t>
+            </a:r>
+          </a:p>
+          <a:p>
+            <a:pPr algn="ctr"/>
+            <a:r>
+              <a:rPr lang="fr-FR" dirty="0"/>
+              <a:t>(</a:t>
+            </a:r>
+            <a:r>
+              <a:rPr lang="fr-FR" dirty="0" err="1"/>
+              <a:t>DataBase</a:t>
+            </a:r>
+            <a:r>
+              <a:rPr lang="fr-FR" dirty="0"/>
+              <a:t> PostgreSQL)</a:t>
+            </a:r>
+          </a:p>
+        </p:txBody>
+      </p:sp>
+      <p:sp>
+        <p:nvSpPr>
+          <p:cNvPr id="94" name="Rectangle : coins arrondis 93">
+            <a:extLst>
+              <a:ext uri="{FF2B5EF4-FFF2-40B4-BE49-F238E27FC236}">
+                <a16:creationId xmlns:a16="http://schemas.microsoft.com/office/drawing/2014/main" id="{ECABB7B8-27D4-209B-4D49-63181B357F0B}"/>
+              </a:ext>
+            </a:extLst>
+          </p:cNvPr>
+          <p:cNvSpPr/>
+          <p:nvPr/>
+        </p:nvSpPr>
+        <p:spPr>
+          <a:xfrm>
+            <a:off x="10244470" y="885120"/>
+            <a:ext cx="1400680" cy="651942"/>
+          </a:xfrm>
+          <a:prstGeom prst="roundRect">
+            <a:avLst/>
+          </a:prstGeom>
+          <a:solidFill>
+            <a:srgbClr val="0070C0"/>
+          </a:solidFill>
+          <a:ln>
+            <a:solidFill>
+              <a:schemeClr val="accent2">
+                <a:lumMod val="50000"/>
+              </a:schemeClr>
+            </a:solidFill>
+          </a:ln>
+        </p:spPr>
+        <p:style>
+          <a:lnRef idx="2">
+            <a:schemeClr val="accent1">
+              <a:shade val="15000"/>
+            </a:schemeClr>
+          </a:lnRef>
+          <a:fillRef idx="1">
+            <a:schemeClr val="accent1"/>
+          </a:fillRef>
+          <a:effectRef idx="0">
+            <a:schemeClr val="accent1"/>
+          </a:effectRef>
+          <a:fontRef idx="minor">
+            <a:schemeClr val="lt1"/>
+          </a:fontRef>
+        </p:style>
+        <p:txBody>
+          <a:bodyPr rtlCol="0" anchor="ctr"/>
+          <a:lstStyle/>
+          <a:p>
+            <a:pPr algn="ctr"/>
+            <a:r>
+              <a:rPr lang="fr-FR" dirty="0"/>
+              <a:t>Utilisateur</a:t>
+            </a:r>
+          </a:p>
+        </p:txBody>
+      </p:sp>
+      <p:cxnSp>
+        <p:nvCxnSpPr>
+          <p:cNvPr id="95" name="Connecteur : en arc 94">
+            <a:extLst>
+              <a:ext uri="{FF2B5EF4-FFF2-40B4-BE49-F238E27FC236}">
+                <a16:creationId xmlns:a16="http://schemas.microsoft.com/office/drawing/2014/main" id="{E9CBAAA8-1094-91A0-5E73-391C526D6216}"/>
+              </a:ext>
+            </a:extLst>
+          </p:cNvPr>
+          <p:cNvCxnSpPr>
+            <a:cxnSpLocks/>
+            <a:stCxn id="94" idx="2"/>
+            <a:endCxn id="28" idx="0"/>
+          </p:cNvCxnSpPr>
+          <p:nvPr/>
+        </p:nvCxnSpPr>
+        <p:spPr>
+          <a:xfrm rot="5400000">
+            <a:off x="9909058" y="1783044"/>
+            <a:ext cx="1281734" cy="789771"/>
+          </a:xfrm>
+          <a:prstGeom prst="curvedConnector3">
+            <a:avLst>
+              <a:gd name="adj1" fmla="val 50000"/>
+            </a:avLst>
+          </a:prstGeom>
+          <a:ln w="19050">
+            <a:solidFill>
+              <a:srgbClr val="002060"/>
+            </a:solidFill>
+            <a:tailEnd type="triangle"/>
+          </a:ln>
+        </p:spPr>
+        <p:style>
+          <a:lnRef idx="1">
+            <a:schemeClr val="accent1"/>
+          </a:lnRef>
+          <a:fillRef idx="0">
+            <a:schemeClr val="accent1"/>
+          </a:fillRef>
+          <a:effectRef idx="0">
+            <a:schemeClr val="accent1"/>
+          </a:effectRef>
+          <a:fontRef idx="minor">
+            <a:schemeClr val="tx1"/>
+          </a:fontRef>
+        </p:style>
+      </p:cxnSp>
+      <p:sp>
+        <p:nvSpPr>
+          <p:cNvPr id="101" name="Rectangle : coins arrondis 100">
+            <a:extLst>
+              <a:ext uri="{FF2B5EF4-FFF2-40B4-BE49-F238E27FC236}">
+                <a16:creationId xmlns:a16="http://schemas.microsoft.com/office/drawing/2014/main" id="{E4F4D53E-6129-C1E6-E279-7FBE0CF1550A}"/>
+              </a:ext>
+            </a:extLst>
+          </p:cNvPr>
+          <p:cNvSpPr/>
+          <p:nvPr/>
+        </p:nvSpPr>
+        <p:spPr>
+          <a:xfrm>
+            <a:off x="9446778" y="4919506"/>
+            <a:ext cx="1416523" cy="1081341"/>
+          </a:xfrm>
+          <a:prstGeom prst="roundRect">
+            <a:avLst/>
+          </a:prstGeom>
+          <a:solidFill>
+            <a:srgbClr val="FFC000"/>
+          </a:solidFill>
+          <a:ln>
+            <a:solidFill>
+              <a:srgbClr val="EA580C"/>
+            </a:solidFill>
+          </a:ln>
+        </p:spPr>
+        <p:style>
+          <a:lnRef idx="2">
+            <a:schemeClr val="accent1">
+              <a:shade val="15000"/>
+            </a:schemeClr>
+          </a:lnRef>
+          <a:fillRef idx="1">
+            <a:schemeClr val="accent1"/>
+          </a:fillRef>
+          <a:effectRef idx="0">
+            <a:schemeClr val="accent1"/>
+          </a:effectRef>
+          <a:fontRef idx="minor">
+            <a:schemeClr val="lt1"/>
+          </a:fontRef>
+        </p:style>
+        <p:txBody>
+          <a:bodyPr rtlCol="0" anchor="ctr"/>
+          <a:lstStyle/>
+          <a:p>
+            <a:pPr algn="ctr"/>
+            <a:r>
+              <a:rPr lang="fr-FR" dirty="0"/>
+              <a:t>Docker</a:t>
+            </a:r>
+          </a:p>
+          <a:p>
+            <a:pPr algn="ctr"/>
+            <a:r>
+              <a:rPr lang="fr-FR" dirty="0"/>
+              <a:t>(image DBT)</a:t>
+            </a:r>
+          </a:p>
+        </p:txBody>
+      </p:sp>
+      <p:sp>
+        <p:nvSpPr>
+          <p:cNvPr id="111" name="ZoneTexte 110">
+            <a:extLst>
+              <a:ext uri="{FF2B5EF4-FFF2-40B4-BE49-F238E27FC236}">
+                <a16:creationId xmlns:a16="http://schemas.microsoft.com/office/drawing/2014/main" id="{3246AB14-889B-076C-7C38-DF5745F68B16}"/>
+              </a:ext>
+            </a:extLst>
+          </p:cNvPr>
+          <p:cNvSpPr txBox="1"/>
+          <p:nvPr/>
+        </p:nvSpPr>
+        <p:spPr>
+          <a:xfrm>
+            <a:off x="10124502" y="4102438"/>
+            <a:ext cx="1207039" cy="430887"/>
+          </a:xfrm>
+          <a:prstGeom prst="rect">
+            <a:avLst/>
+          </a:prstGeom>
+          <a:noFill/>
+        </p:spPr>
+        <p:txBody>
+          <a:bodyPr wrap="square" rtlCol="0">
+            <a:spAutoFit/>
+          </a:bodyPr>
+          <a:lstStyle/>
+          <a:p>
+            <a:r>
+              <a:rPr lang="fr-FR" sz="1100" i="1" dirty="0"/>
+              <a:t>Collecte de données</a:t>
+            </a:r>
+          </a:p>
+        </p:txBody>
+      </p:sp>
+      <p:cxnSp>
+        <p:nvCxnSpPr>
+          <p:cNvPr id="114" name="Connecteur : en arc 113">
+            <a:extLst>
+              <a:ext uri="{FF2B5EF4-FFF2-40B4-BE49-F238E27FC236}">
+                <a16:creationId xmlns:a16="http://schemas.microsoft.com/office/drawing/2014/main" id="{6FD5A221-8D44-2653-181F-B8F073D279D1}"/>
+              </a:ext>
+            </a:extLst>
+          </p:cNvPr>
+          <p:cNvCxnSpPr>
+            <a:cxnSpLocks/>
+            <a:stCxn id="101" idx="2"/>
+            <a:endCxn id="53" idx="2"/>
+          </p:cNvCxnSpPr>
+          <p:nvPr/>
+        </p:nvCxnSpPr>
+        <p:spPr>
+          <a:xfrm rot="5400000">
+            <a:off x="8740805" y="4982566"/>
+            <a:ext cx="395955" cy="2432517"/>
+          </a:xfrm>
+          <a:prstGeom prst="bentConnector3">
+            <a:avLst>
+              <a:gd name="adj1" fmla="val 157734"/>
+            </a:avLst>
+          </a:prstGeom>
+          <a:ln w="19050">
+            <a:solidFill>
+              <a:srgbClr val="EA580C"/>
+            </a:solidFill>
+            <a:tailEnd type="triangle"/>
+          </a:ln>
+        </p:spPr>
+        <p:style>
+          <a:lnRef idx="1">
+            <a:schemeClr val="accent1"/>
+          </a:lnRef>
+          <a:fillRef idx="0">
+            <a:schemeClr val="accent1"/>
+          </a:fillRef>
+          <a:effectRef idx="0">
+            <a:schemeClr val="accent1"/>
+          </a:effectRef>
+          <a:fontRef idx="minor">
+            <a:schemeClr val="tx1"/>
+          </a:fontRef>
+        </p:style>
+      </p:cxnSp>
+      <p:cxnSp>
+        <p:nvCxnSpPr>
+          <p:cNvPr id="125" name="Connecteur : en arc 124">
+            <a:extLst>
+              <a:ext uri="{FF2B5EF4-FFF2-40B4-BE49-F238E27FC236}">
+                <a16:creationId xmlns:a16="http://schemas.microsoft.com/office/drawing/2014/main" id="{379120C6-046C-2683-2ED8-3C92B7FB0A8A}"/>
+              </a:ext>
+            </a:extLst>
+          </p:cNvPr>
+          <p:cNvCxnSpPr>
+            <a:cxnSpLocks/>
+            <a:stCxn id="94" idx="3"/>
+            <a:endCxn id="101" idx="3"/>
+          </p:cNvCxnSpPr>
+          <p:nvPr/>
+        </p:nvCxnSpPr>
+        <p:spPr>
+          <a:xfrm flipH="1">
+            <a:off x="10863301" y="1211091"/>
+            <a:ext cx="781849" cy="4249086"/>
+          </a:xfrm>
+          <a:prstGeom prst="curvedConnector3">
+            <a:avLst>
+              <a:gd name="adj1" fmla="val -29238"/>
+            </a:avLst>
+          </a:prstGeom>
+          <a:ln w="19050">
+            <a:solidFill>
+              <a:srgbClr val="002060"/>
+            </a:solidFill>
+            <a:tailEnd type="triangle"/>
+          </a:ln>
+        </p:spPr>
+        <p:style>
+          <a:lnRef idx="1">
+            <a:schemeClr val="accent1"/>
+          </a:lnRef>
+          <a:fillRef idx="0">
+            <a:schemeClr val="accent1"/>
+          </a:fillRef>
+          <a:effectRef idx="0">
+            <a:schemeClr val="accent1"/>
+          </a:effectRef>
+          <a:fontRef idx="minor">
+            <a:schemeClr val="tx1"/>
+          </a:fontRef>
+        </p:style>
+      </p:cxnSp>
+      <p:sp>
+        <p:nvSpPr>
+          <p:cNvPr id="130" name="ZoneTexte 129">
+            <a:extLst>
+              <a:ext uri="{FF2B5EF4-FFF2-40B4-BE49-F238E27FC236}">
+                <a16:creationId xmlns:a16="http://schemas.microsoft.com/office/drawing/2014/main" id="{42B2E01A-3B02-397E-7EBE-1AE98CD44E95}"/>
+              </a:ext>
+            </a:extLst>
+          </p:cNvPr>
+          <p:cNvSpPr txBox="1"/>
+          <p:nvPr/>
+        </p:nvSpPr>
+        <p:spPr>
+          <a:xfrm>
+            <a:off x="10999336" y="3342552"/>
+            <a:ext cx="971075" cy="430887"/>
+          </a:xfrm>
+          <a:prstGeom prst="rect">
+            <a:avLst/>
+          </a:prstGeom>
+          <a:noFill/>
+        </p:spPr>
+        <p:txBody>
+          <a:bodyPr wrap="square" rtlCol="0">
+            <a:spAutoFit/>
+          </a:bodyPr>
+          <a:lstStyle/>
+          <a:p>
+            <a:r>
+              <a:rPr lang="fr-FR" sz="1100" i="1" dirty="0"/>
+              <a:t>Chargement projet DBT</a:t>
+            </a:r>
+          </a:p>
+        </p:txBody>
+      </p:sp>
+      <p:cxnSp>
+        <p:nvCxnSpPr>
+          <p:cNvPr id="135" name="Connecteur droit avec flèche 134">
+            <a:extLst>
+              <a:ext uri="{FF2B5EF4-FFF2-40B4-BE49-F238E27FC236}">
+                <a16:creationId xmlns:a16="http://schemas.microsoft.com/office/drawing/2014/main" id="{BE9154C0-AB5E-D647-6252-5BF65EF812FE}"/>
+              </a:ext>
+            </a:extLst>
+          </p:cNvPr>
+          <p:cNvCxnSpPr>
+            <a:cxnSpLocks/>
+            <a:stCxn id="11" idx="1"/>
+            <a:endCxn id="76" idx="3"/>
+          </p:cNvCxnSpPr>
+          <p:nvPr/>
+        </p:nvCxnSpPr>
+        <p:spPr>
+          <a:xfrm flipH="1">
+            <a:off x="6247214" y="4789890"/>
+            <a:ext cx="595734" cy="0"/>
+          </a:xfrm>
+          <a:prstGeom prst="straightConnector1">
+            <a:avLst/>
+          </a:prstGeom>
+          <a:ln w="19050">
+            <a:solidFill>
+              <a:schemeClr val="accent5">
+                <a:lumMod val="75000"/>
+              </a:schemeClr>
+            </a:solidFill>
+            <a:tailEnd type="triangle"/>
+          </a:ln>
+        </p:spPr>
+        <p:style>
+          <a:lnRef idx="1">
+            <a:schemeClr val="accent1"/>
+          </a:lnRef>
+          <a:fillRef idx="0">
+            <a:schemeClr val="accent1"/>
+          </a:fillRef>
+          <a:effectRef idx="0">
+            <a:schemeClr val="accent1"/>
+          </a:effectRef>
+          <a:fontRef idx="minor">
+            <a:schemeClr val="tx1"/>
+          </a:fontRef>
+        </p:style>
+      </p:cxnSp>
+      <p:sp>
+        <p:nvSpPr>
+          <p:cNvPr id="160" name="Rectangle : coins arrondis 159">
+            <a:extLst>
+              <a:ext uri="{FF2B5EF4-FFF2-40B4-BE49-F238E27FC236}">
+                <a16:creationId xmlns:a16="http://schemas.microsoft.com/office/drawing/2014/main" id="{48B548C5-7251-9AD6-4ED6-75530B7E5DAD}"/>
+              </a:ext>
+            </a:extLst>
+          </p:cNvPr>
+          <p:cNvSpPr/>
+          <p:nvPr/>
+        </p:nvSpPr>
+        <p:spPr>
+          <a:xfrm>
+            <a:off x="3093721" y="5316768"/>
+            <a:ext cx="3150364" cy="983803"/>
+          </a:xfrm>
+          <a:prstGeom prst="roundRect">
+            <a:avLst/>
+          </a:prstGeom>
+          <a:solidFill>
+            <a:schemeClr val="accent5"/>
+          </a:solidFill>
+          <a:ln>
+            <a:solidFill>
+              <a:schemeClr val="accent5">
+                <a:lumMod val="75000"/>
+              </a:schemeClr>
+            </a:solidFill>
+          </a:ln>
+        </p:spPr>
+        <p:style>
+          <a:lnRef idx="2">
+            <a:schemeClr val="accent1">
+              <a:shade val="15000"/>
+            </a:schemeClr>
+          </a:lnRef>
+          <a:fillRef idx="1">
+            <a:schemeClr val="accent1"/>
+          </a:fillRef>
+          <a:effectRef idx="0">
+            <a:schemeClr val="accent1"/>
+          </a:effectRef>
+          <a:fontRef idx="minor">
+            <a:schemeClr val="lt1"/>
+          </a:fontRef>
+        </p:style>
+        <p:txBody>
+          <a:bodyPr rtlCol="0" anchor="t"/>
+          <a:lstStyle/>
+          <a:p>
+            <a:r>
+              <a:rPr lang="fr-FR" dirty="0"/>
+              <a:t>Amazon ECS </a:t>
+            </a:r>
+            <a:r>
+              <a:rPr lang="fr-FR" sz="1600" dirty="0"/>
+              <a:t>(conteneur DBT)</a:t>
+            </a:r>
+            <a:endParaRPr lang="fr-FR" dirty="0"/>
+          </a:p>
+        </p:txBody>
+      </p:sp>
+      <p:cxnSp>
+        <p:nvCxnSpPr>
+          <p:cNvPr id="161" name="Connecteur droit avec flèche 160">
+            <a:extLst>
+              <a:ext uri="{FF2B5EF4-FFF2-40B4-BE49-F238E27FC236}">
+                <a16:creationId xmlns:a16="http://schemas.microsoft.com/office/drawing/2014/main" id="{0ADCC232-050D-FC8E-B50D-9B4A6E0AE766}"/>
+              </a:ext>
+            </a:extLst>
+          </p:cNvPr>
+          <p:cNvCxnSpPr>
+            <a:cxnSpLocks/>
+            <a:stCxn id="53" idx="1"/>
+            <a:endCxn id="160" idx="3"/>
+          </p:cNvCxnSpPr>
+          <p:nvPr/>
+        </p:nvCxnSpPr>
+        <p:spPr>
+          <a:xfrm flipH="1" flipV="1">
+            <a:off x="6244085" y="5808670"/>
+            <a:ext cx="583406" cy="88637"/>
+          </a:xfrm>
+          <a:prstGeom prst="straightConnector1">
+            <a:avLst/>
+          </a:prstGeom>
+          <a:ln w="19050">
+            <a:solidFill>
+              <a:schemeClr val="accent5">
+                <a:lumMod val="75000"/>
+              </a:schemeClr>
+            </a:solidFill>
+            <a:tailEnd type="triangle"/>
+          </a:ln>
+        </p:spPr>
+        <p:style>
+          <a:lnRef idx="1">
+            <a:schemeClr val="accent1"/>
+          </a:lnRef>
+          <a:fillRef idx="0">
+            <a:schemeClr val="accent1"/>
+          </a:fillRef>
+          <a:effectRef idx="0">
+            <a:schemeClr val="accent1"/>
+          </a:effectRef>
+          <a:fontRef idx="minor">
+            <a:schemeClr val="tx1"/>
+          </a:fontRef>
+        </p:style>
+      </p:cxnSp>
+      <p:sp>
+        <p:nvSpPr>
+          <p:cNvPr id="164" name="Rectangle : coins arrondis 163">
+            <a:extLst>
+              <a:ext uri="{FF2B5EF4-FFF2-40B4-BE49-F238E27FC236}">
+                <a16:creationId xmlns:a16="http://schemas.microsoft.com/office/drawing/2014/main" id="{4D2B1590-AA9D-89ED-63BF-EA510B53B904}"/>
+              </a:ext>
+            </a:extLst>
+          </p:cNvPr>
+          <p:cNvSpPr/>
+          <p:nvPr/>
+        </p:nvSpPr>
+        <p:spPr>
+          <a:xfrm>
+            <a:off x="4711605" y="5754299"/>
+            <a:ext cx="1423082" cy="493096"/>
+          </a:xfrm>
+          <a:prstGeom prst="roundRect">
+            <a:avLst/>
+          </a:prstGeom>
+          <a:solidFill>
+            <a:schemeClr val="accent5">
+              <a:lumMod val="75000"/>
+            </a:schemeClr>
+          </a:solidFill>
+          <a:ln>
+            <a:solidFill>
+              <a:schemeClr val="accent5">
+                <a:lumMod val="75000"/>
+              </a:schemeClr>
+            </a:solidFill>
+          </a:ln>
+        </p:spPr>
+        <p:style>
+          <a:lnRef idx="2">
+            <a:schemeClr val="accent1">
+              <a:shade val="15000"/>
+            </a:schemeClr>
+          </a:lnRef>
+          <a:fillRef idx="1">
+            <a:schemeClr val="accent1"/>
+          </a:fillRef>
+          <a:effectRef idx="0">
+            <a:schemeClr val="accent1"/>
+          </a:effectRef>
+          <a:fontRef idx="minor">
+            <a:schemeClr val="lt1"/>
+          </a:fontRef>
+        </p:style>
+        <p:txBody>
+          <a:bodyPr rtlCol="0" anchor="ctr"/>
+          <a:lstStyle/>
+          <a:p>
+            <a:pPr algn="ctr"/>
+            <a:r>
+              <a:rPr lang="fr-FR" sz="1400" dirty="0"/>
+              <a:t>Tâche </a:t>
+            </a:r>
+            <a:r>
+              <a:rPr lang="fr-FR" sz="1400" dirty="0" err="1"/>
+              <a:t>dbt</a:t>
+            </a:r>
+            <a:r>
+              <a:rPr lang="fr-FR" sz="1400" dirty="0"/>
+              <a:t> </a:t>
+            </a:r>
+            <a:r>
+              <a:rPr lang="fr-FR" sz="1400" dirty="0" err="1"/>
+              <a:t>build</a:t>
+            </a:r>
+            <a:endParaRPr lang="fr-FR" sz="1400" dirty="0"/>
+          </a:p>
+        </p:txBody>
+      </p:sp>
+      <p:sp>
+        <p:nvSpPr>
+          <p:cNvPr id="165" name="Rectangle : coins arrondis 164">
+            <a:extLst>
+              <a:ext uri="{FF2B5EF4-FFF2-40B4-BE49-F238E27FC236}">
+                <a16:creationId xmlns:a16="http://schemas.microsoft.com/office/drawing/2014/main" id="{592001B6-71FA-4850-E064-71C9A6AD9735}"/>
+              </a:ext>
+            </a:extLst>
+          </p:cNvPr>
+          <p:cNvSpPr/>
+          <p:nvPr/>
+        </p:nvSpPr>
+        <p:spPr>
+          <a:xfrm>
+            <a:off x="3179125" y="5754299"/>
+            <a:ext cx="1423082" cy="493096"/>
+          </a:xfrm>
+          <a:prstGeom prst="roundRect">
+            <a:avLst/>
+          </a:prstGeom>
+          <a:solidFill>
+            <a:schemeClr val="accent5">
+              <a:lumMod val="75000"/>
+            </a:schemeClr>
+          </a:solidFill>
+          <a:ln w="28575">
+            <a:solidFill>
+              <a:schemeClr val="tx1"/>
+            </a:solidFill>
+          </a:ln>
+        </p:spPr>
+        <p:style>
+          <a:lnRef idx="2">
+            <a:schemeClr val="accent1">
+              <a:shade val="15000"/>
+            </a:schemeClr>
+          </a:lnRef>
+          <a:fillRef idx="1">
+            <a:schemeClr val="accent1"/>
+          </a:fillRef>
+          <a:effectRef idx="0">
+            <a:schemeClr val="accent1"/>
+          </a:effectRef>
+          <a:fontRef idx="minor">
+            <a:schemeClr val="lt1"/>
+          </a:fontRef>
+        </p:style>
+        <p:txBody>
+          <a:bodyPr rtlCol="0" anchor="ctr"/>
+          <a:lstStyle/>
+          <a:p>
+            <a:pPr algn="ctr"/>
+            <a:r>
+              <a:rPr lang="fr-FR" sz="1400" dirty="0"/>
+              <a:t>Service </a:t>
+            </a:r>
+            <a:r>
+              <a:rPr lang="fr-FR" sz="1400" dirty="0" err="1"/>
+              <a:t>dbt</a:t>
+            </a:r>
+            <a:r>
+              <a:rPr lang="fr-FR" sz="1400" dirty="0"/>
+              <a:t> docs serve</a:t>
+            </a:r>
+          </a:p>
+        </p:txBody>
+      </p:sp>
+      <p:cxnSp>
+        <p:nvCxnSpPr>
+          <p:cNvPr id="167" name="Connecteur : en angle 166">
+            <a:extLst>
+              <a:ext uri="{FF2B5EF4-FFF2-40B4-BE49-F238E27FC236}">
+                <a16:creationId xmlns:a16="http://schemas.microsoft.com/office/drawing/2014/main" id="{9EB37687-9E7E-8869-CB33-8F87BBAC04C7}"/>
+              </a:ext>
+            </a:extLst>
+          </p:cNvPr>
+          <p:cNvCxnSpPr>
+            <a:endCxn id="76" idx="1"/>
+          </p:cNvCxnSpPr>
+          <p:nvPr/>
+        </p:nvCxnSpPr>
+        <p:spPr>
+          <a:xfrm flipV="1">
+            <a:off x="3866168" y="4789890"/>
+            <a:ext cx="554318" cy="526878"/>
+          </a:xfrm>
+          <a:prstGeom prst="bentConnector3">
+            <a:avLst/>
+          </a:prstGeom>
+          <a:ln w="19050">
+            <a:solidFill>
+              <a:schemeClr val="accent5">
+                <a:lumMod val="75000"/>
+              </a:schemeClr>
+            </a:solidFill>
+            <a:tailEnd type="triangle"/>
+          </a:ln>
+        </p:spPr>
+        <p:style>
+          <a:lnRef idx="1">
+            <a:schemeClr val="accent1"/>
+          </a:lnRef>
+          <a:fillRef idx="0">
+            <a:schemeClr val="accent1"/>
+          </a:fillRef>
+          <a:effectRef idx="0">
+            <a:schemeClr val="accent1"/>
+          </a:effectRef>
+          <a:fontRef idx="minor">
+            <a:schemeClr val="tx1"/>
+          </a:fontRef>
+        </p:style>
+      </p:cxnSp>
+      <p:cxnSp>
+        <p:nvCxnSpPr>
+          <p:cNvPr id="188" name="Connecteur droit avec flèche 187">
+            <a:extLst>
+              <a:ext uri="{FF2B5EF4-FFF2-40B4-BE49-F238E27FC236}">
+                <a16:creationId xmlns:a16="http://schemas.microsoft.com/office/drawing/2014/main" id="{02C5E340-ABAB-C032-F4A5-4E4FCE111827}"/>
+              </a:ext>
+            </a:extLst>
+          </p:cNvPr>
+          <p:cNvCxnSpPr>
+            <a:cxnSpLocks/>
+          </p:cNvCxnSpPr>
+          <p:nvPr/>
+        </p:nvCxnSpPr>
+        <p:spPr>
+          <a:xfrm flipH="1">
+            <a:off x="3451412" y="3522039"/>
+            <a:ext cx="2080249" cy="1794729"/>
+          </a:xfrm>
+          <a:prstGeom prst="straightConnector1">
+            <a:avLst/>
+          </a:prstGeom>
+          <a:ln w="19050">
+            <a:solidFill>
+              <a:srgbClr val="C00000"/>
+            </a:solidFill>
+            <a:prstDash val="sysDash"/>
+            <a:tailEnd type="triangle"/>
+          </a:ln>
+        </p:spPr>
+        <p:style>
+          <a:lnRef idx="1">
+            <a:schemeClr val="accent1"/>
+          </a:lnRef>
+          <a:fillRef idx="0">
+            <a:schemeClr val="accent1"/>
+          </a:fillRef>
+          <a:effectRef idx="0">
+            <a:schemeClr val="accent1"/>
+          </a:effectRef>
+          <a:fontRef idx="minor">
+            <a:schemeClr val="tx1"/>
+          </a:fontRef>
+        </p:style>
+      </p:cxnSp>
+      <p:sp>
+        <p:nvSpPr>
+          <p:cNvPr id="193" name="Rectangle : coins arrondis 192">
+            <a:extLst>
+              <a:ext uri="{FF2B5EF4-FFF2-40B4-BE49-F238E27FC236}">
+                <a16:creationId xmlns:a16="http://schemas.microsoft.com/office/drawing/2014/main" id="{97FDACCB-D3A1-DAA6-3D91-772C6CE23ADA}"/>
+              </a:ext>
+            </a:extLst>
+          </p:cNvPr>
+          <p:cNvSpPr/>
+          <p:nvPr/>
+        </p:nvSpPr>
+        <p:spPr>
+          <a:xfrm>
+            <a:off x="2804269" y="2538236"/>
+            <a:ext cx="1535292" cy="687891"/>
+          </a:xfrm>
+          <a:prstGeom prst="roundRect">
+            <a:avLst/>
+          </a:prstGeom>
+          <a:solidFill>
+            <a:srgbClr val="00B0F0"/>
+          </a:solidFill>
+          <a:ln>
+            <a:solidFill>
+              <a:schemeClr val="accent2">
+                <a:lumMod val="50000"/>
+              </a:schemeClr>
+            </a:solidFill>
+          </a:ln>
+        </p:spPr>
+        <p:style>
+          <a:lnRef idx="2">
+            <a:schemeClr val="accent1">
+              <a:shade val="15000"/>
+            </a:schemeClr>
+          </a:lnRef>
+          <a:fillRef idx="1">
+            <a:schemeClr val="accent1"/>
+          </a:fillRef>
+          <a:effectRef idx="0">
+            <a:schemeClr val="accent1"/>
+          </a:effectRef>
+          <a:fontRef idx="minor">
+            <a:schemeClr val="lt1"/>
+          </a:fontRef>
+        </p:style>
+        <p:txBody>
+          <a:bodyPr rtlCol="0" anchor="ctr"/>
+          <a:lstStyle/>
+          <a:p>
+            <a:pPr algn="ctr"/>
+            <a:r>
+              <a:rPr lang="fr-FR" dirty="0"/>
+              <a:t>AWS Secrets Manager</a:t>
+            </a:r>
+          </a:p>
+        </p:txBody>
+      </p:sp>
+      <p:cxnSp>
+        <p:nvCxnSpPr>
+          <p:cNvPr id="197" name="Connecteur droit avec flèche 196">
+            <a:extLst>
+              <a:ext uri="{FF2B5EF4-FFF2-40B4-BE49-F238E27FC236}">
+                <a16:creationId xmlns:a16="http://schemas.microsoft.com/office/drawing/2014/main" id="{A028B9AF-FD41-67FB-2404-4F0FBBED3417}"/>
+              </a:ext>
+            </a:extLst>
+          </p:cNvPr>
+          <p:cNvCxnSpPr>
+            <a:cxnSpLocks/>
+            <a:stCxn id="193" idx="2"/>
+          </p:cNvCxnSpPr>
+          <p:nvPr/>
+        </p:nvCxnSpPr>
+        <p:spPr>
+          <a:xfrm>
+            <a:off x="3571915" y="3226127"/>
+            <a:ext cx="1333833" cy="1106838"/>
+          </a:xfrm>
+          <a:prstGeom prst="straightConnector1">
+            <a:avLst/>
+          </a:prstGeom>
+          <a:ln w="19050">
+            <a:solidFill>
+              <a:srgbClr val="002060"/>
+            </a:solidFill>
+            <a:prstDash val="sysDash"/>
+            <a:tailEnd type="triangle"/>
+          </a:ln>
+        </p:spPr>
+        <p:style>
+          <a:lnRef idx="1">
+            <a:schemeClr val="accent1"/>
+          </a:lnRef>
+          <a:fillRef idx="0">
+            <a:schemeClr val="accent1"/>
+          </a:fillRef>
+          <a:effectRef idx="0">
+            <a:schemeClr val="accent1"/>
+          </a:effectRef>
+          <a:fontRef idx="minor">
+            <a:schemeClr val="tx1"/>
+          </a:fontRef>
+        </p:style>
+      </p:cxnSp>
+      <p:cxnSp>
+        <p:nvCxnSpPr>
+          <p:cNvPr id="200" name="Connecteur droit avec flèche 199">
+            <a:extLst>
+              <a:ext uri="{FF2B5EF4-FFF2-40B4-BE49-F238E27FC236}">
+                <a16:creationId xmlns:a16="http://schemas.microsoft.com/office/drawing/2014/main" id="{2459CCA1-9CB6-E71E-DC9A-D1C88DC0BE65}"/>
+              </a:ext>
+            </a:extLst>
+          </p:cNvPr>
+          <p:cNvCxnSpPr>
+            <a:cxnSpLocks/>
+          </p:cNvCxnSpPr>
+          <p:nvPr/>
+        </p:nvCxnSpPr>
+        <p:spPr>
+          <a:xfrm>
+            <a:off x="3571915" y="3238427"/>
+            <a:ext cx="227317" cy="2069552"/>
+          </a:xfrm>
+          <a:prstGeom prst="straightConnector1">
+            <a:avLst/>
+          </a:prstGeom>
+          <a:ln w="19050">
+            <a:solidFill>
+              <a:srgbClr val="002060"/>
+            </a:solidFill>
+            <a:prstDash val="sysDash"/>
+            <a:tailEnd type="triangle"/>
+          </a:ln>
+        </p:spPr>
+        <p:style>
+          <a:lnRef idx="1">
+            <a:schemeClr val="accent1"/>
+          </a:lnRef>
+          <a:fillRef idx="0">
+            <a:schemeClr val="accent1"/>
+          </a:fillRef>
+          <a:effectRef idx="0">
+            <a:schemeClr val="accent1"/>
+          </a:effectRef>
+          <a:fontRef idx="minor">
+            <a:schemeClr val="tx1"/>
+          </a:fontRef>
+        </p:style>
+      </p:cxnSp>
+      <p:sp>
+        <p:nvSpPr>
+          <p:cNvPr id="203" name="Rectangle : coins arrondis 202">
+            <a:extLst>
+              <a:ext uri="{FF2B5EF4-FFF2-40B4-BE49-F238E27FC236}">
+                <a16:creationId xmlns:a16="http://schemas.microsoft.com/office/drawing/2014/main" id="{2E5C18B9-CD90-D2B1-D4A6-661413D93FE5}"/>
+              </a:ext>
+            </a:extLst>
+          </p:cNvPr>
+          <p:cNvSpPr/>
+          <p:nvPr/>
+        </p:nvSpPr>
+        <p:spPr>
+          <a:xfrm>
+            <a:off x="2671481" y="4070350"/>
+            <a:ext cx="6515684" cy="2442979"/>
+          </a:xfrm>
+          <a:prstGeom prst="roundRect">
+            <a:avLst/>
+          </a:prstGeom>
+          <a:noFill/>
+          <a:ln>
+            <a:solidFill>
+              <a:srgbClr val="C00000"/>
+            </a:solidFill>
+            <a:prstDash val="sysDash"/>
+          </a:ln>
+        </p:spPr>
+        <p:style>
+          <a:lnRef idx="2">
+            <a:schemeClr val="accent1">
+              <a:shade val="15000"/>
+            </a:schemeClr>
+          </a:lnRef>
+          <a:fillRef idx="1">
+            <a:schemeClr val="accent1"/>
+          </a:fillRef>
+          <a:effectRef idx="0">
+            <a:schemeClr val="accent1"/>
+          </a:effectRef>
+          <a:fontRef idx="minor">
+            <a:schemeClr val="lt1"/>
+          </a:fontRef>
+        </p:style>
+        <p:txBody>
+          <a:bodyPr rtlCol="0" anchor="t"/>
+          <a:lstStyle/>
+          <a:p>
+            <a:endParaRPr lang="fr-FR" dirty="0"/>
+          </a:p>
+        </p:txBody>
+      </p:sp>
+      <p:pic>
+        <p:nvPicPr>
+          <p:cNvPr id="1026" name="Picture 2" descr="Network Emoji and Internet Emojis for Communication">
+            <a:extLst>
+              <a:ext uri="{FF2B5EF4-FFF2-40B4-BE49-F238E27FC236}">
+                <a16:creationId xmlns:a16="http://schemas.microsoft.com/office/drawing/2014/main" id="{79625A7D-9AE5-E84D-9A65-815169E43BD3}"/>
+              </a:ext>
+            </a:extLst>
+          </p:cNvPr>
+          <p:cNvPicPr>
+            <a:picLocks noChangeAspect="1" noChangeArrowheads="1"/>
+          </p:cNvPicPr>
+          <p:nvPr/>
+        </p:nvPicPr>
+        <p:blipFill>
+          <a:blip r:embed="rId2">
+            <a:extLst>
+              <a:ext uri="{28A0092B-C50C-407E-A947-70E740481C1C}">
+                <a14:useLocalDpi xmlns:a14="http://schemas.microsoft.com/office/drawing/2010/main" val="0"/>
+              </a:ext>
+            </a:extLst>
+          </a:blip>
+          <a:srcRect/>
+          <a:stretch>
+            <a:fillRect/>
+          </a:stretch>
+        </p:blipFill>
+        <p:spPr bwMode="auto">
+          <a:xfrm>
+            <a:off x="605299" y="4575388"/>
+            <a:ext cx="783473" cy="783473"/>
+          </a:xfrm>
+          <a:prstGeom prst="rect">
+            <a:avLst/>
+          </a:prstGeom>
+          <a:noFill/>
+          <a:ln>
+            <a:solidFill>
+              <a:schemeClr val="tx1"/>
+            </a:solidFill>
+          </a:ln>
+          <a:extLst>
+            <a:ext uri="{909E8E84-426E-40DD-AFC4-6F175D3DCCD1}">
+              <a14:hiddenFill xmlns:a14="http://schemas.microsoft.com/office/drawing/2010/main">
+                <a:solidFill>
+                  <a:srgbClr val="FFFFFF"/>
+                </a:solidFill>
+              </a14:hiddenFill>
+            </a:ext>
+          </a:extLst>
+        </p:spPr>
+      </p:pic>
+      <p:cxnSp>
+        <p:nvCxnSpPr>
+          <p:cNvPr id="206" name="Connecteur : en arc 205">
+            <a:extLst>
+              <a:ext uri="{FF2B5EF4-FFF2-40B4-BE49-F238E27FC236}">
+                <a16:creationId xmlns:a16="http://schemas.microsoft.com/office/drawing/2014/main" id="{B4247CB9-5571-0DD0-325D-A7F6A054B5E9}"/>
+              </a:ext>
+            </a:extLst>
+          </p:cNvPr>
+          <p:cNvCxnSpPr>
+            <a:cxnSpLocks/>
+            <a:stCxn id="165" idx="1"/>
+            <a:endCxn id="1026" idx="2"/>
+          </p:cNvCxnSpPr>
+          <p:nvPr/>
+        </p:nvCxnSpPr>
+        <p:spPr>
+          <a:xfrm rot="10800000">
+            <a:off x="997037" y="5358861"/>
+            <a:ext cx="2182089" cy="641986"/>
+          </a:xfrm>
+          <a:prstGeom prst="bentConnector2">
+            <a:avLst/>
+          </a:prstGeom>
+          <a:ln w="19050">
+            <a:solidFill>
+              <a:schemeClr val="tx1"/>
+            </a:solidFill>
+            <a:tailEnd type="triangle"/>
+          </a:ln>
+        </p:spPr>
+        <p:style>
+          <a:lnRef idx="1">
+            <a:schemeClr val="accent1"/>
+          </a:lnRef>
+          <a:fillRef idx="0">
+            <a:schemeClr val="accent1"/>
+          </a:fillRef>
+          <a:effectRef idx="0">
+            <a:schemeClr val="accent1"/>
+          </a:effectRef>
+          <a:fontRef idx="minor">
+            <a:schemeClr val="tx1"/>
+          </a:fontRef>
+        </p:style>
+      </p:cxnSp>
+      <p:cxnSp>
+        <p:nvCxnSpPr>
+          <p:cNvPr id="210" name="Connecteur : en arc 209">
+            <a:extLst>
+              <a:ext uri="{FF2B5EF4-FFF2-40B4-BE49-F238E27FC236}">
+                <a16:creationId xmlns:a16="http://schemas.microsoft.com/office/drawing/2014/main" id="{8FA7A2A5-0C15-D573-8995-AB558677D33D}"/>
+              </a:ext>
+            </a:extLst>
+          </p:cNvPr>
+          <p:cNvCxnSpPr>
+            <a:cxnSpLocks/>
+            <a:stCxn id="11" idx="3"/>
+            <a:endCxn id="1026" idx="0"/>
+          </p:cNvCxnSpPr>
+          <p:nvPr/>
+        </p:nvCxnSpPr>
+        <p:spPr>
+          <a:xfrm flipH="1" flipV="1">
+            <a:off x="997036" y="4575388"/>
+            <a:ext cx="7672640" cy="214502"/>
+          </a:xfrm>
+          <a:prstGeom prst="bentConnector4">
+            <a:avLst>
+              <a:gd name="adj1" fmla="val -5550"/>
+              <a:gd name="adj2" fmla="val 1238850"/>
+            </a:avLst>
+          </a:prstGeom>
+          <a:ln w="19050">
+            <a:solidFill>
+              <a:schemeClr val="tx1"/>
+            </a:solidFill>
+            <a:tailEnd type="triangle"/>
+          </a:ln>
+        </p:spPr>
+        <p:style>
+          <a:lnRef idx="1">
+            <a:schemeClr val="accent1"/>
+          </a:lnRef>
+          <a:fillRef idx="0">
+            <a:schemeClr val="accent1"/>
+          </a:fillRef>
+          <a:effectRef idx="0">
+            <a:schemeClr val="accent1"/>
+          </a:effectRef>
+          <a:fontRef idx="minor">
+            <a:schemeClr val="tx1"/>
+          </a:fontRef>
+        </p:style>
+      </p:cxnSp>
+      <p:sp>
+        <p:nvSpPr>
+          <p:cNvPr id="231" name="ZoneTexte 230">
+            <a:extLst>
+              <a:ext uri="{FF2B5EF4-FFF2-40B4-BE49-F238E27FC236}">
+                <a16:creationId xmlns:a16="http://schemas.microsoft.com/office/drawing/2014/main" id="{3ECED0DD-C4F2-3D60-21BD-E7497E838479}"/>
+              </a:ext>
+            </a:extLst>
+          </p:cNvPr>
+          <p:cNvSpPr txBox="1"/>
+          <p:nvPr/>
+        </p:nvSpPr>
+        <p:spPr>
+          <a:xfrm>
+            <a:off x="1023929" y="2114968"/>
+            <a:ext cx="1554579" cy="261610"/>
+          </a:xfrm>
+          <a:prstGeom prst="rect">
+            <a:avLst/>
+          </a:prstGeom>
+          <a:noFill/>
+        </p:spPr>
+        <p:txBody>
+          <a:bodyPr wrap="square" rtlCol="0">
+            <a:spAutoFit/>
+          </a:bodyPr>
+          <a:lstStyle/>
+          <a:p>
+            <a:r>
+              <a:rPr lang="fr-FR" sz="1100" i="1" dirty="0"/>
+              <a:t>Adresse IP publique</a:t>
+            </a:r>
+          </a:p>
+        </p:txBody>
+      </p:sp>
+      <p:sp>
+        <p:nvSpPr>
+          <p:cNvPr id="232" name="ZoneTexte 231">
+            <a:extLst>
+              <a:ext uri="{FF2B5EF4-FFF2-40B4-BE49-F238E27FC236}">
+                <a16:creationId xmlns:a16="http://schemas.microsoft.com/office/drawing/2014/main" id="{48A608C9-1A9B-814C-E574-7299C65D1EFD}"/>
+              </a:ext>
+            </a:extLst>
+          </p:cNvPr>
+          <p:cNvSpPr txBox="1"/>
+          <p:nvPr/>
+        </p:nvSpPr>
+        <p:spPr>
+          <a:xfrm>
+            <a:off x="876781" y="5991735"/>
+            <a:ext cx="1554579" cy="261610"/>
+          </a:xfrm>
+          <a:prstGeom prst="rect">
+            <a:avLst/>
+          </a:prstGeom>
+          <a:noFill/>
+        </p:spPr>
+        <p:txBody>
+          <a:bodyPr wrap="square" rtlCol="0">
+            <a:spAutoFit/>
+          </a:bodyPr>
+          <a:lstStyle/>
+          <a:p>
+            <a:r>
+              <a:rPr lang="fr-FR" sz="1100" i="1" dirty="0"/>
+              <a:t>Adresse IP publique</a:t>
+            </a:r>
+          </a:p>
+        </p:txBody>
+      </p:sp>
+      <p:sp>
+        <p:nvSpPr>
+          <p:cNvPr id="233" name="ZoneTexte 232">
+            <a:extLst>
+              <a:ext uri="{FF2B5EF4-FFF2-40B4-BE49-F238E27FC236}">
+                <a16:creationId xmlns:a16="http://schemas.microsoft.com/office/drawing/2014/main" id="{AA454100-BD8F-D351-5265-12BBC9EA703F}"/>
+              </a:ext>
+            </a:extLst>
+          </p:cNvPr>
+          <p:cNvSpPr txBox="1"/>
+          <p:nvPr/>
+        </p:nvSpPr>
+        <p:spPr>
+          <a:xfrm>
+            <a:off x="114624" y="4751680"/>
+            <a:ext cx="730129" cy="523220"/>
+          </a:xfrm>
+          <a:prstGeom prst="rect">
+            <a:avLst/>
+          </a:prstGeom>
+          <a:noFill/>
+        </p:spPr>
+        <p:txBody>
+          <a:bodyPr wrap="square" rtlCol="0">
+            <a:spAutoFit/>
+          </a:bodyPr>
+          <a:lstStyle/>
+          <a:p>
+            <a:r>
+              <a:rPr lang="fr-FR" sz="1400" i="1" dirty="0"/>
+              <a:t>Web</a:t>
+            </a:r>
+          </a:p>
+          <a:p>
+            <a:endParaRPr lang="fr-FR" sz="1400" i="1" dirty="0"/>
+          </a:p>
+        </p:txBody>
+      </p:sp>
+    </p:spTree>
+    <p:extLst>
+      <p:ext uri="{BB962C8B-B14F-4D97-AF65-F5344CB8AC3E}">
+        <p14:creationId xmlns:p14="http://schemas.microsoft.com/office/powerpoint/2010/main" val="2543947872"/>
+      </p:ext>
+    </p:extLst>
+  </p:cSld>
+  <p:clrMapOvr>
+    <a:masterClrMapping/>
+  </p:clrMapOvr>
+</p:sld>
+</file>
+
+<file path=ppt/slides/slide7.xml><?xml version="1.0" encoding="utf-8"?>
+<p:sld xmlns:a="http://schemas.openxmlformats.org/drawingml/2006/main" xmlns:r="http://schemas.openxmlformats.org/officeDocument/2006/relationships" xmlns:p="http://schemas.openxmlformats.org/presentationml/2006/main">
+  <p:cSld>
+    <p:spTree>
+      <p:nvGrpSpPr>
+        <p:cNvPr id="1" name=""/>
+        <p:cNvGrpSpPr/>
+        <p:nvPr/>
+      </p:nvGrpSpPr>
+      <p:grpSpPr>
+        <a:xfrm>
+          <a:off x="0" y="0"/>
+          <a:ext cx="0" cy="0"/>
+          <a:chOff x="0" y="0"/>
+          <a:chExt cx="0" cy="0"/>
+        </a:xfrm>
+      </p:grpSpPr>
+      <p:sp>
+        <p:nvSpPr>
+          <p:cNvPr id="2" name="Titre 1">
+            <a:extLst>
+              <a:ext uri="{FF2B5EF4-FFF2-40B4-BE49-F238E27FC236}">
+                <a16:creationId xmlns:a16="http://schemas.microsoft.com/office/drawing/2014/main" id="{A65CF12D-D102-320A-EC7A-0DF30FDEEB61}"/>
+              </a:ext>
+            </a:extLst>
+          </p:cNvPr>
+          <p:cNvSpPr>
+            <a:spLocks noGrp="1"/>
+          </p:cNvSpPr>
+          <p:nvPr>
+            <p:ph type="title"/>
+          </p:nvPr>
+        </p:nvSpPr>
+        <p:spPr/>
+        <p:txBody>
+          <a:bodyPr/>
+          <a:lstStyle/>
+          <a:p>
+            <a:r>
+              <a:rPr lang="fr-FR" dirty="0"/>
+              <a:t>5. Mise en place </a:t>
+            </a:r>
+            <a:r>
+              <a:rPr lang="fr-FR" dirty="0" err="1"/>
+              <a:t>Airbyte</a:t>
+            </a:r>
+            <a:endParaRPr lang="fr-FR" dirty="0"/>
+          </a:p>
+        </p:txBody>
+      </p:sp>
+      <p:sp>
+        <p:nvSpPr>
+          <p:cNvPr id="3" name="Espace réservé du contenu 2">
+            <a:extLst>
+              <a:ext uri="{FF2B5EF4-FFF2-40B4-BE49-F238E27FC236}">
+                <a16:creationId xmlns:a16="http://schemas.microsoft.com/office/drawing/2014/main" id="{4F740C1A-6D00-D21C-6CB7-621BD1285DC1}"/>
+              </a:ext>
+            </a:extLst>
+          </p:cNvPr>
+          <p:cNvSpPr>
+            <a:spLocks noGrp="1"/>
+          </p:cNvSpPr>
+          <p:nvPr>
+            <p:ph idx="1"/>
+          </p:nvPr>
+        </p:nvSpPr>
+        <p:spPr/>
+        <p:txBody>
+          <a:bodyPr/>
+          <a:lstStyle/>
+          <a:p>
+            <a:endParaRPr lang="fr-FR"/>
+          </a:p>
+        </p:txBody>
+      </p:sp>
+      <p:sp>
+        <p:nvSpPr>
+          <p:cNvPr id="4" name="Espace réservé de la date 3">
+            <a:extLst>
+              <a:ext uri="{FF2B5EF4-FFF2-40B4-BE49-F238E27FC236}">
+                <a16:creationId xmlns:a16="http://schemas.microsoft.com/office/drawing/2014/main" id="{3CE466B9-C758-8B6A-7882-571977DF07AE}"/>
+              </a:ext>
+            </a:extLst>
+          </p:cNvPr>
+          <p:cNvSpPr>
+            <a:spLocks noGrp="1"/>
+          </p:cNvSpPr>
+          <p:nvPr>
+            <p:ph type="dt" sz="half" idx="10"/>
+          </p:nvPr>
+        </p:nvSpPr>
+        <p:spPr/>
+        <p:txBody>
+          <a:bodyPr/>
+          <a:lstStyle/>
+          <a:p>
+            <a:pPr rtl="0"/>
+            <a:fld id="{22897033-9A55-4DAC-991D-1FF1921C78B7}" type="datetime1">
+              <a:rPr lang="fr-FR" smtClean="0"/>
+              <a:t>16/08/2026</a:t>
+            </a:fld>
+            <a:endParaRPr lang="en-US" dirty="0"/>
+          </a:p>
+        </p:txBody>
+      </p:sp>
+    </p:spTree>
+    <p:extLst>
+      <p:ext uri="{BB962C8B-B14F-4D97-AF65-F5344CB8AC3E}">
+        <p14:creationId xmlns:p14="http://schemas.microsoft.com/office/powerpoint/2010/main" val="3703781218"/>
+      </p:ext>
+    </p:extLst>
+  </p:cSld>
+  <p:clrMapOvr>
+    <a:masterClrMapping/>
+  </p:clrMapOvr>
+</p:sld>
+</file>
+
+<file path=ppt/slides/slide8.xml><?xml version="1.0" encoding="utf-8"?>
+<p:sld xmlns:a="http://schemas.openxmlformats.org/drawingml/2006/main" xmlns:r="http://schemas.openxmlformats.org/officeDocument/2006/relationships" xmlns:p="http://schemas.openxmlformats.org/presentationml/2006/main">
+  <p:cSld>
+    <p:spTree>
+      <p:nvGrpSpPr>
+        <p:cNvPr id="1" name=""/>
+        <p:cNvGrpSpPr/>
+        <p:nvPr/>
+      </p:nvGrpSpPr>
+      <p:grpSpPr>
+        <a:xfrm>
+          <a:off x="0" y="0"/>
+          <a:ext cx="0" cy="0"/>
+          <a:chOff x="0" y="0"/>
+          <a:chExt cx="0" cy="0"/>
+        </a:xfrm>
+      </p:grpSpPr>
+      <p:sp>
+        <p:nvSpPr>
+          <p:cNvPr id="2" name="Titre 1">
+            <a:extLst>
+              <a:ext uri="{FF2B5EF4-FFF2-40B4-BE49-F238E27FC236}">
+                <a16:creationId xmlns:a16="http://schemas.microsoft.com/office/drawing/2014/main" id="{CD4458A9-6CDC-6BF3-250C-B6E6F2946DB9}"/>
+              </a:ext>
+            </a:extLst>
+          </p:cNvPr>
+          <p:cNvSpPr>
+            <a:spLocks noGrp="1"/>
+          </p:cNvSpPr>
+          <p:nvPr>
+            <p:ph type="title"/>
+          </p:nvPr>
+        </p:nvSpPr>
+        <p:spPr/>
+        <p:txBody>
+          <a:bodyPr/>
+          <a:lstStyle/>
+          <a:p>
+            <a:r>
+              <a:rPr lang="fr-FR" dirty="0"/>
+              <a:t>6. Mise en place DBT</a:t>
+            </a:r>
+          </a:p>
+        </p:txBody>
+      </p:sp>
+      <p:sp>
+        <p:nvSpPr>
+          <p:cNvPr id="3" name="Espace réservé du contenu 2">
+            <a:extLst>
+              <a:ext uri="{FF2B5EF4-FFF2-40B4-BE49-F238E27FC236}">
+                <a16:creationId xmlns:a16="http://schemas.microsoft.com/office/drawing/2014/main" id="{2CE1B120-2F32-09E5-8E07-86A7DCFCA271}"/>
+              </a:ext>
+            </a:extLst>
+          </p:cNvPr>
+          <p:cNvSpPr>
+            <a:spLocks noGrp="1"/>
+          </p:cNvSpPr>
+          <p:nvPr>
+            <p:ph idx="1"/>
+          </p:nvPr>
+        </p:nvSpPr>
+        <p:spPr/>
+        <p:txBody>
+          <a:bodyPr/>
+          <a:lstStyle/>
+          <a:p>
+            <a:endParaRPr lang="fr-FR"/>
+          </a:p>
+        </p:txBody>
+      </p:sp>
+      <p:sp>
+        <p:nvSpPr>
+          <p:cNvPr id="4" name="Espace réservé de la date 3">
+            <a:extLst>
+              <a:ext uri="{FF2B5EF4-FFF2-40B4-BE49-F238E27FC236}">
+                <a16:creationId xmlns:a16="http://schemas.microsoft.com/office/drawing/2014/main" id="{24295062-DAC1-8A8F-28FC-FA10BE7B3705}"/>
+              </a:ext>
+            </a:extLst>
+          </p:cNvPr>
+          <p:cNvSpPr>
+            <a:spLocks noGrp="1"/>
+          </p:cNvSpPr>
+          <p:nvPr>
+            <p:ph type="dt" sz="half" idx="10"/>
+          </p:nvPr>
+        </p:nvSpPr>
+        <p:spPr/>
+        <p:txBody>
+          <a:bodyPr/>
+          <a:lstStyle/>
+          <a:p>
+            <a:pPr rtl="0"/>
+            <a:fld id="{22897033-9A55-4DAC-991D-1FF1921C78B7}" type="datetime1">
+              <a:rPr lang="fr-FR" smtClean="0"/>
+              <a:t>16/08/2026</a:t>
+            </a:fld>
+            <a:endParaRPr lang="en-US" dirty="0"/>
+          </a:p>
+        </p:txBody>
+      </p:sp>
+    </p:spTree>
+    <p:extLst>
+      <p:ext uri="{BB962C8B-B14F-4D97-AF65-F5344CB8AC3E}">
+        <p14:creationId xmlns:p14="http://schemas.microsoft.com/office/powerpoint/2010/main" val="1468749072"/>
+      </p:ext>
+    </p:extLst>
+  </p:cSld>
+  <p:clrMapOvr>
+    <a:masterClrMapping/>
+  </p:clrMapOvr>
+</p:sld>
+</file>
+
+<file path=ppt/slides/slide9.xml><?xml version="1.0" encoding="utf-8"?>
+<p:sld xmlns:a="http://schemas.openxmlformats.org/drawingml/2006/main" xmlns:r="http://schemas.openxmlformats.org/officeDocument/2006/relationships" xmlns:p="http://schemas.openxmlformats.org/presentationml/2006/main">
+  <p:cSld>
+    <p:spTree>
+      <p:nvGrpSpPr>
+        <p:cNvPr id="1" name=""/>
+        <p:cNvGrpSpPr/>
+        <p:nvPr/>
+      </p:nvGrpSpPr>
+      <p:grpSpPr>
+        <a:xfrm>
+          <a:off x="0" y="0"/>
+          <a:ext cx="0" cy="0"/>
+          <a:chOff x="0" y="0"/>
+          <a:chExt cx="0" cy="0"/>
+        </a:xfrm>
+      </p:grpSpPr>
+      <p:sp>
+        <p:nvSpPr>
+          <p:cNvPr id="2" name="Titre 1">
+            <a:extLst>
+              <a:ext uri="{FF2B5EF4-FFF2-40B4-BE49-F238E27FC236}">
+                <a16:creationId xmlns:a16="http://schemas.microsoft.com/office/drawing/2014/main" id="{1C4CC017-D4E6-EF3B-F567-8E1DF81BEE69}"/>
+              </a:ext>
+            </a:extLst>
+          </p:cNvPr>
+          <p:cNvSpPr>
+            <a:spLocks noGrp="1"/>
+          </p:cNvSpPr>
+          <p:nvPr>
+            <p:ph type="title"/>
+          </p:nvPr>
+        </p:nvSpPr>
+        <p:spPr/>
+        <p:txBody>
+          <a:bodyPr/>
+          <a:lstStyle/>
+          <a:p>
+            <a:r>
+              <a:rPr lang="fr-FR" dirty="0"/>
+              <a:t>7. temps accessibilité aux données</a:t>
+            </a:r>
+          </a:p>
+        </p:txBody>
+      </p:sp>
+      <p:sp>
+        <p:nvSpPr>
+          <p:cNvPr id="4" name="Espace réservé de la date 3">
+            <a:extLst>
+              <a:ext uri="{FF2B5EF4-FFF2-40B4-BE49-F238E27FC236}">
+                <a16:creationId xmlns:a16="http://schemas.microsoft.com/office/drawing/2014/main" id="{765A87D0-4BCC-68DF-11C9-3CB0062362F5}"/>
+              </a:ext>
+            </a:extLst>
+          </p:cNvPr>
+          <p:cNvSpPr>
+            <a:spLocks noGrp="1"/>
+          </p:cNvSpPr>
+          <p:nvPr>
+            <p:ph type="dt" sz="half" idx="10"/>
+          </p:nvPr>
+        </p:nvSpPr>
+        <p:spPr/>
+        <p:txBody>
+          <a:bodyPr/>
+          <a:lstStyle/>
+          <a:p>
+            <a:pPr rtl="0"/>
+            <a:fld id="{22897033-9A55-4DAC-991D-1FF1921C78B7}" type="datetime1">
+              <a:rPr lang="fr-FR" smtClean="0"/>
+              <a:t>16/08/2026</a:t>
+            </a:fld>
+            <a:endParaRPr lang="en-US" dirty="0"/>
+          </a:p>
+        </p:txBody>
+      </p:sp>
+      <p:pic>
+        <p:nvPicPr>
+          <p:cNvPr id="5" name="Picture 3" descr="dbt_runtime.png">
+            <a:extLst>
+              <a:ext uri="{FF2B5EF4-FFF2-40B4-BE49-F238E27FC236}">
+                <a16:creationId xmlns:a16="http://schemas.microsoft.com/office/drawing/2014/main" id="{EBDAF90F-5EA1-F0AB-66D7-BD8928719595}"/>
+              </a:ext>
+            </a:extLst>
+          </p:cNvPr>
+          <p:cNvPicPr>
+            <a:picLocks noGrp="1" noChangeAspect="1"/>
+          </p:cNvPicPr>
+          <p:nvPr>
+            <p:ph idx="1"/>
+          </p:nvPr>
+        </p:nvPicPr>
+        <p:blipFill>
+          <a:blip r:embed="rId2"/>
+          <a:stretch>
+            <a:fillRect/>
+          </a:stretch>
+        </p:blipFill>
+        <p:spPr>
+          <a:xfrm>
+            <a:off x="1442873" y="2275065"/>
+            <a:ext cx="5648653" cy="3444053"/>
+          </a:xfrm>
+          <a:prstGeom prst="rect">
+            <a:avLst/>
+          </a:prstGeom>
+        </p:spPr>
+      </p:pic>
+    </p:spTree>
+    <p:extLst>
+      <p:ext uri="{BB962C8B-B14F-4D97-AF65-F5344CB8AC3E}">
+        <p14:creationId xmlns:p14="http://schemas.microsoft.com/office/powerpoint/2010/main" val="2802061433"/>
       </p:ext>
     </p:extLst>
   </p:cSld>

--- a/ulesie_sebastien_2_presentation_082026.pptx
+++ b/ulesie_sebastien_2_presentation_082026.pptx
@@ -5,10 +5,10 @@
     <p:sldMasterId id="2147483712" r:id="rId1"/>
   </p:sldMasterIdLst>
   <p:notesMasterIdLst>
-    <p:notesMasterId r:id="rId17"/>
+    <p:notesMasterId r:id="rId23"/>
   </p:notesMasterIdLst>
   <p:handoutMasterIdLst>
-    <p:handoutMasterId r:id="rId18"/>
+    <p:handoutMasterId r:id="rId24"/>
   </p:handoutMasterIdLst>
   <p:sldIdLst>
     <p:sldId id="257" r:id="rId2"/>
@@ -18,14 +18,20 @@
     <p:sldId id="344" r:id="rId6"/>
     <p:sldId id="345" r:id="rId7"/>
     <p:sldId id="346" r:id="rId8"/>
-    <p:sldId id="347" r:id="rId9"/>
-    <p:sldId id="348" r:id="rId10"/>
-    <p:sldId id="349" r:id="rId11"/>
-    <p:sldId id="350" r:id="rId12"/>
-    <p:sldId id="332" r:id="rId13"/>
-    <p:sldId id="338" r:id="rId14"/>
-    <p:sldId id="343" r:id="rId15"/>
-    <p:sldId id="299" r:id="rId16"/>
+    <p:sldId id="351" r:id="rId9"/>
+    <p:sldId id="352" r:id="rId10"/>
+    <p:sldId id="353" r:id="rId11"/>
+    <p:sldId id="354" r:id="rId12"/>
+    <p:sldId id="356" r:id="rId13"/>
+    <p:sldId id="347" r:id="rId14"/>
+    <p:sldId id="358" r:id="rId15"/>
+    <p:sldId id="357" r:id="rId16"/>
+    <p:sldId id="359" r:id="rId17"/>
+    <p:sldId id="360" r:id="rId18"/>
+    <p:sldId id="348" r:id="rId19"/>
+    <p:sldId id="349" r:id="rId20"/>
+    <p:sldId id="350" r:id="rId21"/>
+    <p:sldId id="299" r:id="rId22"/>
   </p:sldIdLst>
   <p:sldSz cx="12192000" cy="6858000"/>
   <p:notesSz cx="6858000" cy="9144000"/>
@@ -2044,7 +2050,7 @@
         <a:p>
           <a:r>
             <a:rPr lang="fr-FR" dirty="0"/>
-            <a:t>4- Les requêtes et leurs résultats</a:t>
+            <a:t>4- Schéma d’architecture</a:t>
           </a:r>
         </a:p>
       </dgm:t>
@@ -2080,7 +2086,7 @@
         <a:p>
           <a:r>
             <a:rPr lang="fr-FR" dirty="0"/>
-            <a:t>3- Compréhension des données</a:t>
+            <a:t>3- Processus collecter, transformer, stocker et tester les données</a:t>
           </a:r>
         </a:p>
       </dgm:t>
@@ -2116,7 +2122,7 @@
         <a:p>
           <a:r>
             <a:rPr lang="fr-FR" b="0" dirty="0"/>
-            <a:t>2- Importation des données</a:t>
+            <a:t>2- Schéma de la base de données</a:t>
           </a:r>
         </a:p>
       </dgm:t>
@@ -2152,11 +2158,11 @@
         <a:p>
           <a:r>
             <a:rPr lang="fr-FR" dirty="0"/>
-            <a:t>5- Connexion MongoDB à </a:t>
+            <a:t>5- Mise en place </a:t>
           </a:r>
           <a:r>
             <a:rPr lang="fr-FR" dirty="0" err="1"/>
-            <a:t>PowerBI</a:t>
+            <a:t>Airbyte</a:t>
           </a:r>
           <a:endParaRPr lang="fr-FR" dirty="0"/>
         </a:p>
@@ -2193,7 +2199,7 @@
         <a:p>
           <a:r>
             <a:rPr lang="fr-FR" dirty="0"/>
-            <a:t>6- Intégration données de Lyon</a:t>
+            <a:t>6- Mise en place DBT</a:t>
           </a:r>
         </a:p>
       </dgm:t>
@@ -2229,7 +2235,7 @@
         <a:p>
           <a:r>
             <a:rPr lang="fr-FR" dirty="0"/>
-            <a:t>7- Réplication des données</a:t>
+            <a:t>7- Temps accessibilité aux données</a:t>
           </a:r>
         </a:p>
       </dgm:t>
@@ -2264,10 +2270,9 @@
         <a:lstStyle/>
         <a:p>
           <a:r>
-            <a:rPr lang="fr-FR"/>
-            <a:t>8- Duplication des données</a:t>
+            <a:rPr lang="fr-FR" dirty="0"/>
+            <a:t>8- Qualité des données</a:t>
           </a:r>
-          <a:endParaRPr lang="fr-FR" dirty="0"/>
         </a:p>
       </dgm:t>
     </dgm:pt>
@@ -2293,6 +2298,28 @@
         </a:p>
       </dgm:t>
     </dgm:pt>
+    <dgm:pt modelId="{3CD23260-9728-4408-BFD6-CE02FEDB8461}">
+      <dgm:prSet phldrT="[Texte]" phldr="0"/>
+      <dgm:spPr/>
+      <dgm:t>
+        <a:bodyPr/>
+        <a:lstStyle/>
+        <a:p>
+          <a:r>
+            <a:rPr lang="fr-FR" dirty="0"/>
+            <a:t>9- Mise en place AWS</a:t>
+          </a:r>
+        </a:p>
+      </dgm:t>
+    </dgm:pt>
+    <dgm:pt modelId="{B46BBC53-87DA-461B-A8AE-AC308B5637EE}" type="parTrans" cxnId="{DCFE94A2-0395-4927-9F3F-AF2253C34E08}">
+      <dgm:prSet/>
+      <dgm:spPr/>
+    </dgm:pt>
+    <dgm:pt modelId="{6DD7A032-6B21-43D6-BF72-FE2756121EE7}" type="sibTrans" cxnId="{DCFE94A2-0395-4927-9F3F-AF2253C34E08}">
+      <dgm:prSet/>
+      <dgm:spPr/>
+    </dgm:pt>
     <dgm:pt modelId="{BB89F849-78B2-43DF-933A-2353D297DD5D}" type="pres">
       <dgm:prSet presAssocID="{2A0612ED-5876-4919-BCC8-600F5B229E71}" presName="linear" presStyleCnt="0">
         <dgm:presLayoutVars>
@@ -2303,7 +2330,7 @@
       <dgm:spPr/>
     </dgm:pt>
     <dgm:pt modelId="{BB92269C-473B-4581-93AF-AD006B94C36C}" type="pres">
-      <dgm:prSet presAssocID="{ACF00B4C-E6D7-4CF7-AFA6-22ECB4A54A6A}" presName="parentText" presStyleLbl="node1" presStyleIdx="0" presStyleCnt="8">
+      <dgm:prSet presAssocID="{ACF00B4C-E6D7-4CF7-AFA6-22ECB4A54A6A}" presName="parentText" presStyleLbl="node1" presStyleIdx="0" presStyleCnt="9">
         <dgm:presLayoutVars>
           <dgm:chMax val="0"/>
           <dgm:bulletEnabled val="1"/>
@@ -2316,7 +2343,7 @@
       <dgm:spPr/>
     </dgm:pt>
     <dgm:pt modelId="{90650EEF-1F9D-463E-A867-D4AB9F2E38B6}" type="pres">
-      <dgm:prSet presAssocID="{137669DF-45F8-40AE-925B-B1ADA604DE22}" presName="parentText" presStyleLbl="node1" presStyleIdx="1" presStyleCnt="8">
+      <dgm:prSet presAssocID="{137669DF-45F8-40AE-925B-B1ADA604DE22}" presName="parentText" presStyleLbl="node1" presStyleIdx="1" presStyleCnt="9">
         <dgm:presLayoutVars>
           <dgm:chMax val="0"/>
           <dgm:bulletEnabled val="1"/>
@@ -2329,7 +2356,7 @@
       <dgm:spPr/>
     </dgm:pt>
     <dgm:pt modelId="{C0F2F60F-49A7-486C-BA84-7742A146D8C7}" type="pres">
-      <dgm:prSet presAssocID="{91C5EE06-7918-4F4E-ABC8-78B22D3546A2}" presName="parentText" presStyleLbl="node1" presStyleIdx="2" presStyleCnt="8">
+      <dgm:prSet presAssocID="{91C5EE06-7918-4F4E-ABC8-78B22D3546A2}" presName="parentText" presStyleLbl="node1" presStyleIdx="2" presStyleCnt="9">
         <dgm:presLayoutVars>
           <dgm:chMax val="0"/>
           <dgm:bulletEnabled val="1"/>
@@ -2342,7 +2369,7 @@
       <dgm:spPr/>
     </dgm:pt>
     <dgm:pt modelId="{188E501D-B60D-4714-8E70-1CD5D6D0CD0B}" type="pres">
-      <dgm:prSet presAssocID="{09562225-7FCE-4E93-8C05-403975C5475D}" presName="parentText" presStyleLbl="node1" presStyleIdx="3" presStyleCnt="8">
+      <dgm:prSet presAssocID="{09562225-7FCE-4E93-8C05-403975C5475D}" presName="parentText" presStyleLbl="node1" presStyleIdx="3" presStyleCnt="9">
         <dgm:presLayoutVars>
           <dgm:chMax val="0"/>
           <dgm:bulletEnabled val="1"/>
@@ -2355,7 +2382,7 @@
       <dgm:spPr/>
     </dgm:pt>
     <dgm:pt modelId="{DF10A574-F3D9-4FC2-A6EE-E7E8311CF638}" type="pres">
-      <dgm:prSet presAssocID="{10F4FD06-E452-44ED-A921-58727BCB960A}" presName="parentText" presStyleLbl="node1" presStyleIdx="4" presStyleCnt="8">
+      <dgm:prSet presAssocID="{10F4FD06-E452-44ED-A921-58727BCB960A}" presName="parentText" presStyleLbl="node1" presStyleIdx="4" presStyleCnt="9">
         <dgm:presLayoutVars>
           <dgm:chMax val="0"/>
           <dgm:bulletEnabled val="1"/>
@@ -2368,7 +2395,7 @@
       <dgm:spPr/>
     </dgm:pt>
     <dgm:pt modelId="{9F5EF941-1609-4E21-A343-705F89535533}" type="pres">
-      <dgm:prSet presAssocID="{C5B30B90-4036-464E-A28E-383F3D5B746F}" presName="parentText" presStyleLbl="node1" presStyleIdx="5" presStyleCnt="8">
+      <dgm:prSet presAssocID="{C5B30B90-4036-464E-A28E-383F3D5B746F}" presName="parentText" presStyleLbl="node1" presStyleIdx="5" presStyleCnt="9">
         <dgm:presLayoutVars>
           <dgm:chMax val="0"/>
           <dgm:bulletEnabled val="1"/>
@@ -2381,7 +2408,7 @@
       <dgm:spPr/>
     </dgm:pt>
     <dgm:pt modelId="{F241338E-DAFB-437E-BAC6-556E992CF66B}" type="pres">
-      <dgm:prSet presAssocID="{7B991E51-EA9F-4EA3-999C-494E52148DFB}" presName="parentText" presStyleLbl="node1" presStyleIdx="6" presStyleCnt="8">
+      <dgm:prSet presAssocID="{7B991E51-EA9F-4EA3-999C-494E52148DFB}" presName="parentText" presStyleLbl="node1" presStyleIdx="6" presStyleCnt="9">
         <dgm:presLayoutVars>
           <dgm:chMax val="0"/>
           <dgm:bulletEnabled val="1"/>
@@ -2394,7 +2421,20 @@
       <dgm:spPr/>
     </dgm:pt>
     <dgm:pt modelId="{1FDD8F32-99D9-4BBE-AF0A-DA191E5D1B76}" type="pres">
-      <dgm:prSet presAssocID="{BB40B4F6-4EB6-4EBF-9E1B-B9D404846270}" presName="parentText" presStyleLbl="node1" presStyleIdx="7" presStyleCnt="8">
+      <dgm:prSet presAssocID="{BB40B4F6-4EB6-4EBF-9E1B-B9D404846270}" presName="parentText" presStyleLbl="node1" presStyleIdx="7" presStyleCnt="9">
+        <dgm:presLayoutVars>
+          <dgm:chMax val="0"/>
+          <dgm:bulletEnabled val="1"/>
+        </dgm:presLayoutVars>
+      </dgm:prSet>
+      <dgm:spPr/>
+    </dgm:pt>
+    <dgm:pt modelId="{22C40D4C-2771-429E-B890-4635503557F1}" type="pres">
+      <dgm:prSet presAssocID="{FAB9DC6E-0691-4B3E-84B9-DFFF68013930}" presName="spacer" presStyleCnt="0"/>
+      <dgm:spPr/>
+    </dgm:pt>
+    <dgm:pt modelId="{B65EB578-92C6-4AE5-8CB8-023DE47A0834}" type="pres">
+      <dgm:prSet presAssocID="{3CD23260-9728-4408-BFD6-CE02FEDB8461}" presName="parentText" presStyleLbl="node1" presStyleIdx="8" presStyleCnt="9">
         <dgm:presLayoutVars>
           <dgm:chMax val="0"/>
           <dgm:bulletEnabled val="1"/>
@@ -2412,7 +2452,9 @@
     <dgm:cxn modelId="{22157357-0815-4091-B96F-71DED9F79FC1}" type="presOf" srcId="{7B991E51-EA9F-4EA3-999C-494E52148DFB}" destId="{F241338E-DAFB-437E-BAC6-556E992CF66B}" srcOrd="0" destOrd="0" presId="urn:microsoft.com/office/officeart/2005/8/layout/vList2"/>
     <dgm:cxn modelId="{BB8CFB59-ECE7-4CBC-9556-8A3CF9727DDA}" type="presOf" srcId="{ACF00B4C-E6D7-4CF7-AFA6-22ECB4A54A6A}" destId="{BB92269C-473B-4581-93AF-AD006B94C36C}" srcOrd="0" destOrd="0" presId="urn:microsoft.com/office/officeart/2005/8/layout/vList2"/>
     <dgm:cxn modelId="{ACBF787A-C137-4F23-B827-1003E2B82B44}" srcId="{2A0612ED-5876-4919-BCC8-600F5B229E71}" destId="{7B991E51-EA9F-4EA3-999C-494E52148DFB}" srcOrd="6" destOrd="0" parTransId="{89EBD24B-A965-4033-A3A8-D26BBD8F9C55}" sibTransId="{51CD5044-32D5-4267-9452-9F02006ACD1D}"/>
+    <dgm:cxn modelId="{DB10A97E-ED05-4997-B914-A888129BEA2A}" type="presOf" srcId="{3CD23260-9728-4408-BFD6-CE02FEDB8461}" destId="{B65EB578-92C6-4AE5-8CB8-023DE47A0834}" srcOrd="0" destOrd="0" presId="urn:microsoft.com/office/officeart/2005/8/layout/vList2"/>
     <dgm:cxn modelId="{8A736A9F-65F0-4A55-9A3F-CCF416234F97}" srcId="{2A0612ED-5876-4919-BCC8-600F5B229E71}" destId="{BB40B4F6-4EB6-4EBF-9E1B-B9D404846270}" srcOrd="7" destOrd="0" parTransId="{907C754D-DDD4-4E71-AFE2-02BB244F0F38}" sibTransId="{FAB9DC6E-0691-4B3E-84B9-DFFF68013930}"/>
+    <dgm:cxn modelId="{DCFE94A2-0395-4927-9F3F-AF2253C34E08}" srcId="{2A0612ED-5876-4919-BCC8-600F5B229E71}" destId="{3CD23260-9728-4408-BFD6-CE02FEDB8461}" srcOrd="8" destOrd="0" parTransId="{B46BBC53-87DA-461B-A8AE-AC308B5637EE}" sibTransId="{6DD7A032-6B21-43D6-BF72-FE2756121EE7}"/>
     <dgm:cxn modelId="{9D92CEA4-472E-4B56-8712-594017CD6C24}" type="presOf" srcId="{10F4FD06-E452-44ED-A921-58727BCB960A}" destId="{DF10A574-F3D9-4FC2-A6EE-E7E8311CF638}" srcOrd="0" destOrd="0" presId="urn:microsoft.com/office/officeart/2005/8/layout/vList2"/>
     <dgm:cxn modelId="{1FA19BB3-7E11-45B8-93CE-4B2E16B76669}" type="presOf" srcId="{2A0612ED-5876-4919-BCC8-600F5B229E71}" destId="{BB89F849-78B2-43DF-933A-2353D297DD5D}" srcOrd="0" destOrd="0" presId="urn:microsoft.com/office/officeart/2005/8/layout/vList2"/>
     <dgm:cxn modelId="{60AB59C1-93C6-4A83-820B-AF25EED12C2A}" srcId="{2A0612ED-5876-4919-BCC8-600F5B229E71}" destId="{C5B30B90-4036-464E-A28E-383F3D5B746F}" srcOrd="5" destOrd="0" parTransId="{1F871E0C-41C6-460A-8D72-F79549FEE94E}" sibTransId="{B8E65884-E0EE-41D7-9E11-32E3A03763CD}"/>
@@ -2436,6 +2478,8 @@
     <dgm:cxn modelId="{83F96F77-1304-406F-B044-FDA6F253D8EA}" type="presParOf" srcId="{BB89F849-78B2-43DF-933A-2353D297DD5D}" destId="{F241338E-DAFB-437E-BAC6-556E992CF66B}" srcOrd="12" destOrd="0" presId="urn:microsoft.com/office/officeart/2005/8/layout/vList2"/>
     <dgm:cxn modelId="{89070E65-CB06-46BC-8828-A6A194CFD53B}" type="presParOf" srcId="{BB89F849-78B2-43DF-933A-2353D297DD5D}" destId="{99D02E02-2418-40A3-B359-C1BC5D14D341}" srcOrd="13" destOrd="0" presId="urn:microsoft.com/office/officeart/2005/8/layout/vList2"/>
     <dgm:cxn modelId="{0EA99179-2EB5-4B06-AD79-2011946C006C}" type="presParOf" srcId="{BB89F849-78B2-43DF-933A-2353D297DD5D}" destId="{1FDD8F32-99D9-4BBE-AF0A-DA191E5D1B76}" srcOrd="14" destOrd="0" presId="urn:microsoft.com/office/officeart/2005/8/layout/vList2"/>
+    <dgm:cxn modelId="{B71ADAED-8DAB-404E-877A-8A1551EA11C8}" type="presParOf" srcId="{BB89F849-78B2-43DF-933A-2353D297DD5D}" destId="{22C40D4C-2771-429E-B890-4635503557F1}" srcOrd="15" destOrd="0" presId="urn:microsoft.com/office/officeart/2005/8/layout/vList2"/>
+    <dgm:cxn modelId="{AB1E2936-FCDF-48A0-B231-6C06B89AF1E1}" type="presParOf" srcId="{BB89F849-78B2-43DF-933A-2353D297DD5D}" destId="{B65EB578-92C6-4AE5-8CB8-023DE47A0834}" srcOrd="16" destOrd="0" presId="urn:microsoft.com/office/officeart/2005/8/layout/vList2"/>
   </dgm:cxnLst>
   <dgm:bg/>
   <dgm:whole/>
@@ -2817,8 +2861,8 @@
       </dsp:nvSpPr>
       <dsp:spPr>
         <a:xfrm>
-          <a:off x="0" y="70793"/>
-          <a:ext cx="11348215" cy="524745"/>
+          <a:off x="0" y="3676"/>
+          <a:ext cx="11348215" cy="479114"/>
         </a:xfrm>
         <a:prstGeom prst="roundRect">
           <a:avLst/>
@@ -2859,12 +2903,12 @@
         </a:fontRef>
       </dsp:style>
       <dsp:txBody>
-        <a:bodyPr spcFirstLastPara="0" vert="horz" wrap="square" lIns="87630" tIns="87630" rIns="87630" bIns="87630" numCol="1" spcCol="1270" anchor="ctr" anchorCtr="0">
+        <a:bodyPr spcFirstLastPara="0" vert="horz" wrap="square" lIns="80010" tIns="80010" rIns="80010" bIns="80010" numCol="1" spcCol="1270" anchor="ctr" anchorCtr="0">
           <a:noAutofit/>
         </a:bodyPr>
         <a:lstStyle/>
         <a:p>
-          <a:pPr marL="0" lvl="0" indent="0" algn="l" defTabSz="1022350">
+          <a:pPr marL="0" lvl="0" indent="0" algn="l" defTabSz="933450">
             <a:lnSpc>
               <a:spcPct val="90000"/>
             </a:lnSpc>
@@ -2877,14 +2921,14 @@
             <a:buNone/>
           </a:pPr>
           <a:r>
-            <a:rPr lang="fr-FR" sz="2300" kern="1200" dirty="0"/>
+            <a:rPr lang="fr-FR" sz="2100" kern="1200" dirty="0"/>
             <a:t>1- Contexte &amp; Objectif</a:t>
           </a:r>
         </a:p>
       </dsp:txBody>
       <dsp:txXfrm>
-        <a:off x="25616" y="96409"/>
-        <a:ext cx="11296983" cy="473513"/>
+        <a:off x="23388" y="27064"/>
+        <a:ext cx="11301439" cy="432338"/>
       </dsp:txXfrm>
     </dsp:sp>
     <dsp:sp modelId="{90650EEF-1F9D-463E-A867-D4AB9F2E38B6}">
@@ -2894,8 +2938,8 @@
       </dsp:nvSpPr>
       <dsp:spPr>
         <a:xfrm>
-          <a:off x="0" y="661778"/>
-          <a:ext cx="11348215" cy="524745"/>
+          <a:off x="0" y="543271"/>
+          <a:ext cx="11348215" cy="479114"/>
         </a:xfrm>
         <a:prstGeom prst="roundRect">
           <a:avLst/>
@@ -2936,12 +2980,12 @@
         </a:fontRef>
       </dsp:style>
       <dsp:txBody>
-        <a:bodyPr spcFirstLastPara="0" vert="horz" wrap="square" lIns="87630" tIns="87630" rIns="87630" bIns="87630" numCol="1" spcCol="1270" anchor="ctr" anchorCtr="0">
+        <a:bodyPr spcFirstLastPara="0" vert="horz" wrap="square" lIns="80010" tIns="80010" rIns="80010" bIns="80010" numCol="1" spcCol="1270" anchor="ctr" anchorCtr="0">
           <a:noAutofit/>
         </a:bodyPr>
         <a:lstStyle/>
         <a:p>
-          <a:pPr marL="0" lvl="0" indent="0" algn="l" defTabSz="1022350">
+          <a:pPr marL="0" lvl="0" indent="0" algn="l" defTabSz="933450">
             <a:lnSpc>
               <a:spcPct val="90000"/>
             </a:lnSpc>
@@ -2954,14 +2998,14 @@
             <a:buNone/>
           </a:pPr>
           <a:r>
-            <a:rPr lang="fr-FR" sz="2300" b="0" kern="1200" dirty="0"/>
-            <a:t>2- Importation des données</a:t>
+            <a:rPr lang="fr-FR" sz="2100" b="0" kern="1200" dirty="0"/>
+            <a:t>2- Schéma de la base de données</a:t>
           </a:r>
         </a:p>
       </dsp:txBody>
       <dsp:txXfrm>
-        <a:off x="25616" y="687394"/>
-        <a:ext cx="11296983" cy="473513"/>
+        <a:off x="23388" y="566659"/>
+        <a:ext cx="11301439" cy="432338"/>
       </dsp:txXfrm>
     </dsp:sp>
     <dsp:sp modelId="{C0F2F60F-49A7-486C-BA84-7742A146D8C7}">
@@ -2971,8 +3015,8 @@
       </dsp:nvSpPr>
       <dsp:spPr>
         <a:xfrm>
-          <a:off x="0" y="1252764"/>
-          <a:ext cx="11348215" cy="524745"/>
+          <a:off x="0" y="1082866"/>
+          <a:ext cx="11348215" cy="479114"/>
         </a:xfrm>
         <a:prstGeom prst="roundRect">
           <a:avLst/>
@@ -3013,12 +3057,12 @@
         </a:fontRef>
       </dsp:style>
       <dsp:txBody>
-        <a:bodyPr spcFirstLastPara="0" vert="horz" wrap="square" lIns="87630" tIns="87630" rIns="87630" bIns="87630" numCol="1" spcCol="1270" anchor="ctr" anchorCtr="0">
+        <a:bodyPr spcFirstLastPara="0" vert="horz" wrap="square" lIns="80010" tIns="80010" rIns="80010" bIns="80010" numCol="1" spcCol="1270" anchor="ctr" anchorCtr="0">
           <a:noAutofit/>
         </a:bodyPr>
         <a:lstStyle/>
         <a:p>
-          <a:pPr marL="0" lvl="0" indent="0" algn="l" defTabSz="1022350">
+          <a:pPr marL="0" lvl="0" indent="0" algn="l" defTabSz="933450">
             <a:lnSpc>
               <a:spcPct val="90000"/>
             </a:lnSpc>
@@ -3031,14 +3075,14 @@
             <a:buNone/>
           </a:pPr>
           <a:r>
-            <a:rPr lang="fr-FR" sz="2300" kern="1200" dirty="0"/>
-            <a:t>3- Compréhension des données</a:t>
+            <a:rPr lang="fr-FR" sz="2100" kern="1200" dirty="0"/>
+            <a:t>3- Processus collecter, transformer, stocker et tester les données</a:t>
           </a:r>
         </a:p>
       </dsp:txBody>
       <dsp:txXfrm>
-        <a:off x="25616" y="1278380"/>
-        <a:ext cx="11296983" cy="473513"/>
+        <a:off x="23388" y="1106254"/>
+        <a:ext cx="11301439" cy="432338"/>
       </dsp:txXfrm>
     </dsp:sp>
     <dsp:sp modelId="{188E501D-B60D-4714-8E70-1CD5D6D0CD0B}">
@@ -3048,8 +3092,8 @@
       </dsp:nvSpPr>
       <dsp:spPr>
         <a:xfrm>
-          <a:off x="0" y="1843749"/>
-          <a:ext cx="11348215" cy="524745"/>
+          <a:off x="0" y="1622461"/>
+          <a:ext cx="11348215" cy="479114"/>
         </a:xfrm>
         <a:prstGeom prst="roundRect">
           <a:avLst/>
@@ -3090,12 +3134,12 @@
         </a:fontRef>
       </dsp:style>
       <dsp:txBody>
-        <a:bodyPr spcFirstLastPara="0" vert="horz" wrap="square" lIns="87630" tIns="87630" rIns="87630" bIns="87630" numCol="1" spcCol="1270" anchor="ctr" anchorCtr="0">
+        <a:bodyPr spcFirstLastPara="0" vert="horz" wrap="square" lIns="80010" tIns="80010" rIns="80010" bIns="80010" numCol="1" spcCol="1270" anchor="ctr" anchorCtr="0">
           <a:noAutofit/>
         </a:bodyPr>
         <a:lstStyle/>
         <a:p>
-          <a:pPr marL="0" lvl="0" indent="0" algn="l" defTabSz="1022350">
+          <a:pPr marL="0" lvl="0" indent="0" algn="l" defTabSz="933450">
             <a:lnSpc>
               <a:spcPct val="90000"/>
             </a:lnSpc>
@@ -3108,14 +3152,14 @@
             <a:buNone/>
           </a:pPr>
           <a:r>
-            <a:rPr lang="fr-FR" sz="2300" kern="1200" dirty="0"/>
-            <a:t>4- Les requêtes et leurs résultats</a:t>
+            <a:rPr lang="fr-FR" sz="2100" kern="1200" dirty="0"/>
+            <a:t>4- Schéma d’architecture</a:t>
           </a:r>
         </a:p>
       </dsp:txBody>
       <dsp:txXfrm>
-        <a:off x="25616" y="1869365"/>
-        <a:ext cx="11296983" cy="473513"/>
+        <a:off x="23388" y="1645849"/>
+        <a:ext cx="11301439" cy="432338"/>
       </dsp:txXfrm>
     </dsp:sp>
     <dsp:sp modelId="{DF10A574-F3D9-4FC2-A6EE-E7E8311CF638}">
@@ -3125,8 +3169,8 @@
       </dsp:nvSpPr>
       <dsp:spPr>
         <a:xfrm>
-          <a:off x="0" y="2434734"/>
-          <a:ext cx="11348215" cy="524745"/>
+          <a:off x="0" y="2162056"/>
+          <a:ext cx="11348215" cy="479114"/>
         </a:xfrm>
         <a:prstGeom prst="roundRect">
           <a:avLst/>
@@ -3167,12 +3211,12 @@
         </a:fontRef>
       </dsp:style>
       <dsp:txBody>
-        <a:bodyPr spcFirstLastPara="0" vert="horz" wrap="square" lIns="87630" tIns="87630" rIns="87630" bIns="87630" numCol="1" spcCol="1270" anchor="ctr" anchorCtr="0">
+        <a:bodyPr spcFirstLastPara="0" vert="horz" wrap="square" lIns="80010" tIns="80010" rIns="80010" bIns="80010" numCol="1" spcCol="1270" anchor="ctr" anchorCtr="0">
           <a:noAutofit/>
         </a:bodyPr>
         <a:lstStyle/>
         <a:p>
-          <a:pPr marL="0" lvl="0" indent="0" algn="l" defTabSz="1022350">
+          <a:pPr marL="0" lvl="0" indent="0" algn="l" defTabSz="933450">
             <a:lnSpc>
               <a:spcPct val="90000"/>
             </a:lnSpc>
@@ -3185,19 +3229,19 @@
             <a:buNone/>
           </a:pPr>
           <a:r>
-            <a:rPr lang="fr-FR" sz="2300" kern="1200" dirty="0"/>
-            <a:t>5- Connexion MongoDB à </a:t>
+            <a:rPr lang="fr-FR" sz="2100" kern="1200" dirty="0"/>
+            <a:t>5- Mise en place </a:t>
           </a:r>
           <a:r>
-            <a:rPr lang="fr-FR" sz="2300" kern="1200" dirty="0" err="1"/>
-            <a:t>PowerBI</a:t>
+            <a:rPr lang="fr-FR" sz="2100" kern="1200" dirty="0" err="1"/>
+            <a:t>Airbyte</a:t>
           </a:r>
-          <a:endParaRPr lang="fr-FR" sz="2300" kern="1200" dirty="0"/>
+          <a:endParaRPr lang="fr-FR" sz="2100" kern="1200" dirty="0"/>
         </a:p>
       </dsp:txBody>
       <dsp:txXfrm>
-        <a:off x="25616" y="2460350"/>
-        <a:ext cx="11296983" cy="473513"/>
+        <a:off x="23388" y="2185444"/>
+        <a:ext cx="11301439" cy="432338"/>
       </dsp:txXfrm>
     </dsp:sp>
     <dsp:sp modelId="{9F5EF941-1609-4E21-A343-705F89535533}">
@@ -3207,8 +3251,8 @@
       </dsp:nvSpPr>
       <dsp:spPr>
         <a:xfrm>
-          <a:off x="0" y="3025719"/>
-          <a:ext cx="11348215" cy="524745"/>
+          <a:off x="0" y="2701651"/>
+          <a:ext cx="11348215" cy="479114"/>
         </a:xfrm>
         <a:prstGeom prst="roundRect">
           <a:avLst/>
@@ -3249,12 +3293,12 @@
         </a:fontRef>
       </dsp:style>
       <dsp:txBody>
-        <a:bodyPr spcFirstLastPara="0" vert="horz" wrap="square" lIns="87630" tIns="87630" rIns="87630" bIns="87630" numCol="1" spcCol="1270" anchor="ctr" anchorCtr="0">
+        <a:bodyPr spcFirstLastPara="0" vert="horz" wrap="square" lIns="80010" tIns="80010" rIns="80010" bIns="80010" numCol="1" spcCol="1270" anchor="ctr" anchorCtr="0">
           <a:noAutofit/>
         </a:bodyPr>
         <a:lstStyle/>
         <a:p>
-          <a:pPr marL="0" lvl="0" indent="0" algn="l" defTabSz="1022350">
+          <a:pPr marL="0" lvl="0" indent="0" algn="l" defTabSz="933450">
             <a:lnSpc>
               <a:spcPct val="90000"/>
             </a:lnSpc>
@@ -3267,14 +3311,14 @@
             <a:buNone/>
           </a:pPr>
           <a:r>
-            <a:rPr lang="fr-FR" sz="2300" kern="1200" dirty="0"/>
-            <a:t>6- Intégration données de Lyon</a:t>
+            <a:rPr lang="fr-FR" sz="2100" kern="1200" dirty="0"/>
+            <a:t>6- Mise en place DBT</a:t>
           </a:r>
         </a:p>
       </dsp:txBody>
       <dsp:txXfrm>
-        <a:off x="25616" y="3051335"/>
-        <a:ext cx="11296983" cy="473513"/>
+        <a:off x="23388" y="2725039"/>
+        <a:ext cx="11301439" cy="432338"/>
       </dsp:txXfrm>
     </dsp:sp>
     <dsp:sp modelId="{F241338E-DAFB-437E-BAC6-556E992CF66B}">
@@ -3284,8 +3328,8 @@
       </dsp:nvSpPr>
       <dsp:spPr>
         <a:xfrm>
-          <a:off x="0" y="3616704"/>
-          <a:ext cx="11348215" cy="524745"/>
+          <a:off x="0" y="3241246"/>
+          <a:ext cx="11348215" cy="479114"/>
         </a:xfrm>
         <a:prstGeom prst="roundRect">
           <a:avLst/>
@@ -3326,12 +3370,12 @@
         </a:fontRef>
       </dsp:style>
       <dsp:txBody>
-        <a:bodyPr spcFirstLastPara="0" vert="horz" wrap="square" lIns="87630" tIns="87630" rIns="87630" bIns="87630" numCol="1" spcCol="1270" anchor="ctr" anchorCtr="0">
+        <a:bodyPr spcFirstLastPara="0" vert="horz" wrap="square" lIns="80010" tIns="80010" rIns="80010" bIns="80010" numCol="1" spcCol="1270" anchor="ctr" anchorCtr="0">
           <a:noAutofit/>
         </a:bodyPr>
         <a:lstStyle/>
         <a:p>
-          <a:pPr marL="0" lvl="0" indent="0" algn="l" defTabSz="1022350">
+          <a:pPr marL="0" lvl="0" indent="0" algn="l" defTabSz="933450">
             <a:lnSpc>
               <a:spcPct val="90000"/>
             </a:lnSpc>
@@ -3344,14 +3388,14 @@
             <a:buNone/>
           </a:pPr>
           <a:r>
-            <a:rPr lang="fr-FR" sz="2300" kern="1200" dirty="0"/>
-            <a:t>7- Réplication des données</a:t>
+            <a:rPr lang="fr-FR" sz="2100" kern="1200" dirty="0"/>
+            <a:t>7- Temps accessibilité aux données</a:t>
           </a:r>
         </a:p>
       </dsp:txBody>
       <dsp:txXfrm>
-        <a:off x="25616" y="3642320"/>
-        <a:ext cx="11296983" cy="473513"/>
+        <a:off x="23388" y="3264634"/>
+        <a:ext cx="11301439" cy="432338"/>
       </dsp:txXfrm>
     </dsp:sp>
     <dsp:sp modelId="{1FDD8F32-99D9-4BBE-AF0A-DA191E5D1B76}">
@@ -3361,8 +3405,8 @@
       </dsp:nvSpPr>
       <dsp:spPr>
         <a:xfrm>
-          <a:off x="0" y="4207689"/>
-          <a:ext cx="11348215" cy="524745"/>
+          <a:off x="0" y="3780841"/>
+          <a:ext cx="11348215" cy="479114"/>
         </a:xfrm>
         <a:prstGeom prst="roundRect">
           <a:avLst/>
@@ -3403,12 +3447,12 @@
         </a:fontRef>
       </dsp:style>
       <dsp:txBody>
-        <a:bodyPr spcFirstLastPara="0" vert="horz" wrap="square" lIns="87630" tIns="87630" rIns="87630" bIns="87630" numCol="1" spcCol="1270" anchor="ctr" anchorCtr="0">
+        <a:bodyPr spcFirstLastPara="0" vert="horz" wrap="square" lIns="80010" tIns="80010" rIns="80010" bIns="80010" numCol="1" spcCol="1270" anchor="ctr" anchorCtr="0">
           <a:noAutofit/>
         </a:bodyPr>
         <a:lstStyle/>
         <a:p>
-          <a:pPr marL="0" lvl="0" indent="0" algn="l" defTabSz="1022350">
+          <a:pPr marL="0" lvl="0" indent="0" algn="l" defTabSz="933450">
             <a:lnSpc>
               <a:spcPct val="90000"/>
             </a:lnSpc>
@@ -3421,15 +3465,91 @@
             <a:buNone/>
           </a:pPr>
           <a:r>
-            <a:rPr lang="fr-FR" sz="2300" kern="1200"/>
-            <a:t>8- Duplication des données</a:t>
+            <a:rPr lang="fr-FR" sz="2100" kern="1200" dirty="0"/>
+            <a:t>8- Qualité des données</a:t>
           </a:r>
-          <a:endParaRPr lang="fr-FR" sz="2300" kern="1200" dirty="0"/>
         </a:p>
       </dsp:txBody>
       <dsp:txXfrm>
-        <a:off x="25616" y="4233305"/>
-        <a:ext cx="11296983" cy="473513"/>
+        <a:off x="23388" y="3804229"/>
+        <a:ext cx="11301439" cy="432338"/>
+      </dsp:txXfrm>
+    </dsp:sp>
+    <dsp:sp modelId="{B65EB578-92C6-4AE5-8CB8-023DE47A0834}">
+      <dsp:nvSpPr>
+        <dsp:cNvPr id="0" name=""/>
+        <dsp:cNvSpPr/>
+      </dsp:nvSpPr>
+      <dsp:spPr>
+        <a:xfrm>
+          <a:off x="0" y="4320436"/>
+          <a:ext cx="11348215" cy="479114"/>
+        </a:xfrm>
+        <a:prstGeom prst="roundRect">
+          <a:avLst/>
+        </a:prstGeom>
+        <a:solidFill>
+          <a:schemeClr val="accent5">
+            <a:hueOff val="0"/>
+            <a:satOff val="0"/>
+            <a:lumOff val="0"/>
+            <a:alphaOff val="0"/>
+          </a:schemeClr>
+        </a:solidFill>
+        <a:ln w="22225" cap="rnd" cmpd="sng" algn="ctr">
+          <a:solidFill>
+            <a:schemeClr val="lt1">
+              <a:hueOff val="0"/>
+              <a:satOff val="0"/>
+              <a:lumOff val="0"/>
+              <a:alphaOff val="0"/>
+            </a:schemeClr>
+          </a:solidFill>
+          <a:prstDash val="solid"/>
+        </a:ln>
+        <a:effectLst/>
+      </dsp:spPr>
+      <dsp:style>
+        <a:lnRef idx="2">
+          <a:scrgbClr r="0" g="0" b="0"/>
+        </a:lnRef>
+        <a:fillRef idx="1">
+          <a:scrgbClr r="0" g="0" b="0"/>
+        </a:fillRef>
+        <a:effectRef idx="0">
+          <a:scrgbClr r="0" g="0" b="0"/>
+        </a:effectRef>
+        <a:fontRef idx="minor">
+          <a:schemeClr val="lt1"/>
+        </a:fontRef>
+      </dsp:style>
+      <dsp:txBody>
+        <a:bodyPr spcFirstLastPara="0" vert="horz" wrap="square" lIns="80010" tIns="80010" rIns="80010" bIns="80010" numCol="1" spcCol="1270" anchor="ctr" anchorCtr="0">
+          <a:noAutofit/>
+        </a:bodyPr>
+        <a:lstStyle/>
+        <a:p>
+          <a:pPr marL="0" lvl="0" indent="0" algn="l" defTabSz="933450">
+            <a:lnSpc>
+              <a:spcPct val="90000"/>
+            </a:lnSpc>
+            <a:spcBef>
+              <a:spcPct val="0"/>
+            </a:spcBef>
+            <a:spcAft>
+              <a:spcPct val="35000"/>
+            </a:spcAft>
+            <a:buNone/>
+          </a:pPr>
+          <a:r>
+            <a:rPr lang="fr-FR" sz="2100" kern="1200" dirty="0"/>
+            <a:t>9- Mise en place AWS</a:t>
+          </a:r>
+        </a:p>
+      </dsp:txBody>
+      <dsp:txXfrm>
+        <a:off x="23388" y="4343824"/>
+        <a:ext cx="11301439" cy="432338"/>
       </dsp:txXfrm>
     </dsp:sp>
   </dsp:spTree>
@@ -6648,7 +6768,7 @@
             <a:pPr rtl="0"/>
             <a:fld id="{2FC74BDE-6627-49B6-90F1-0334E723F64C}" type="datetime1">
               <a:rPr lang="fr-FR" smtClean="0"/>
-              <a:t>16/08/2026</a:t>
+              <a:t>18/08/2026</a:t>
             </a:fld>
             <a:endParaRPr lang="en-US" dirty="0"/>
           </a:p>
@@ -6818,7 +6938,7 @@
             <a:pPr rtl="0"/>
             <a:fld id="{F28DAF60-E56A-4648-8936-22D801672B6C}" type="datetime1">
               <a:rPr lang="fr-FR" smtClean="0"/>
-              <a:t>16/08/2026</a:t>
+              <a:t>18/08/2026</a:t>
             </a:fld>
             <a:endParaRPr lang="en-US"/>
           </a:p>
@@ -7339,7 +7459,7 @@
             <a:pPr rtl="0"/>
             <a:fld id="{E641DF6C-ECED-4BD8-8025-73323DD5D35C}" type="datetime1">
               <a:rPr lang="fr-FR" smtClean="0"/>
-              <a:t>16/08/2026</a:t>
+              <a:t>18/08/2026</a:t>
             </a:fld>
             <a:endParaRPr lang="en-US" dirty="0"/>
           </a:p>
@@ -7546,7 +7666,7 @@
             <a:pPr rtl="0"/>
             <a:fld id="{1E5B03D9-FC89-4784-BD60-336471BA7724}" type="datetime1">
               <a:rPr lang="fr-FR" smtClean="0"/>
-              <a:t>16/08/2026</a:t>
+              <a:t>18/08/2026</a:t>
             </a:fld>
             <a:endParaRPr lang="en-US" dirty="0"/>
           </a:p>
@@ -7940,7 +8060,7 @@
             <a:pPr rtl="0"/>
             <a:fld id="{D0216CB3-B929-446C-876F-83C9B86D9FDE}" type="datetime1">
               <a:rPr lang="fr-FR" smtClean="0"/>
-              <a:t>16/08/2026</a:t>
+              <a:t>18/08/2026</a:t>
             </a:fld>
             <a:endParaRPr lang="en-US" dirty="0"/>
           </a:p>
@@ -8142,7 +8262,7 @@
             <a:pPr rtl="0"/>
             <a:fld id="{22897033-9A55-4DAC-991D-1FF1921C78B7}" type="datetime1">
               <a:rPr lang="fr-FR" smtClean="0"/>
-              <a:t>16/08/2026</a:t>
+              <a:t>18/08/2026</a:t>
             </a:fld>
             <a:endParaRPr lang="en-US" dirty="0"/>
           </a:p>
@@ -8465,7 +8585,7 @@
             <a:pPr rtl="0"/>
             <a:fld id="{A1255F31-5DB3-4925-BA87-822F5B17A2F1}" type="datetime1">
               <a:rPr lang="fr-FR" smtClean="0"/>
-              <a:t>16/08/2026</a:t>
+              <a:t>18/08/2026</a:t>
             </a:fld>
             <a:endParaRPr lang="en-US" dirty="0"/>
           </a:p>
@@ -8722,7 +8842,7 @@
             <a:pPr rtl="0"/>
             <a:fld id="{7E4EF44C-5F50-4A80-A957-57B3338337C0}" type="datetime1">
               <a:rPr lang="fr-FR" smtClean="0"/>
-              <a:t>16/08/2026</a:t>
+              <a:t>18/08/2026</a:t>
             </a:fld>
             <a:endParaRPr lang="en-US" dirty="0"/>
           </a:p>
@@ -9148,7 +9268,7 @@
             <a:pPr rtl="0"/>
             <a:fld id="{B2D0F46D-59FD-4484-924E-E79DD516B5ED}" type="datetime1">
               <a:rPr lang="fr-FR" smtClean="0"/>
-              <a:t>16/08/2026</a:t>
+              <a:t>18/08/2026</a:t>
             </a:fld>
             <a:endParaRPr lang="en-US" dirty="0"/>
           </a:p>
@@ -9275,7 +9395,7 @@
             <a:pPr rtl="0"/>
             <a:fld id="{0FAEC910-4AAA-42A1-A49C-7DDC64BC53C6}" type="datetime1">
               <a:rPr lang="fr-FR" smtClean="0"/>
-              <a:t>16/08/2026</a:t>
+              <a:t>18/08/2026</a:t>
             </a:fld>
             <a:endParaRPr lang="en-US" dirty="0"/>
           </a:p>
@@ -9373,7 +9493,7 @@
             <a:pPr rtl="0"/>
             <a:fld id="{ACEC98BE-FCE2-445F-8146-3A7F8CC3881D}" type="datetime1">
               <a:rPr lang="fr-FR" smtClean="0"/>
-              <a:t>16/08/2026</a:t>
+              <a:t>18/08/2026</a:t>
             </a:fld>
             <a:endParaRPr lang="en-US" dirty="0"/>
           </a:p>
@@ -9761,7 +9881,7 @@
             <a:pPr rtl="0"/>
             <a:fld id="{6D0953DD-A6BD-427D-B7A8-BDE378B2E678}" type="datetime1">
               <a:rPr lang="fr-FR" smtClean="0"/>
-              <a:t>16/08/2026</a:t>
+              <a:t>18/08/2026</a:t>
             </a:fld>
             <a:endParaRPr lang="en-US" dirty="0"/>
           </a:p>
@@ -10059,7 +10179,7 @@
             <a:pPr rtl="0"/>
             <a:fld id="{47E77B56-6788-4F40-A65E-12AFEB3AC095}" type="datetime1">
               <a:rPr lang="fr-FR" smtClean="0"/>
-              <a:t>16/08/2026</a:t>
+              <a:t>18/08/2026</a:t>
             </a:fld>
             <a:endParaRPr lang="en-US" dirty="0"/>
           </a:p>
@@ -10277,7 +10397,7 @@
             <a:pPr rtl="0"/>
             <a:fld id="{E69A0D1A-B1A6-4A33-B3AE-513EF3B4A7E7}" type="datetime1">
               <a:rPr lang="fr-FR" smtClean="0"/>
-              <a:t>16/08/2026</a:t>
+              <a:t>18/08/2026</a:t>
             </a:fld>
             <a:endParaRPr lang="en-US" dirty="0"/>
           </a:p>
@@ -11593,6 +11713,4407 @@
   <p:cSld>
     <p:spTree>
       <p:nvGrpSpPr>
+        <p:cNvPr id="1" name="">
+          <a:extLst>
+            <a:ext uri="{FF2B5EF4-FFF2-40B4-BE49-F238E27FC236}">
+              <a16:creationId xmlns:a16="http://schemas.microsoft.com/office/drawing/2014/main" id="{BF7B439B-64D2-DB8B-220F-110E9A93F7FB}"/>
+            </a:ext>
+          </a:extLst>
+        </p:cNvPr>
+        <p:cNvGrpSpPr/>
+        <p:nvPr/>
+      </p:nvGrpSpPr>
+      <p:grpSpPr>
+        <a:xfrm>
+          <a:off x="0" y="0"/>
+          <a:ext cx="0" cy="0"/>
+          <a:chOff x="0" y="0"/>
+          <a:chExt cx="0" cy="0"/>
+        </a:xfrm>
+      </p:grpSpPr>
+      <p:pic>
+        <p:nvPicPr>
+          <p:cNvPr id="6" name="Image 5">
+            <a:extLst>
+              <a:ext uri="{FF2B5EF4-FFF2-40B4-BE49-F238E27FC236}">
+                <a16:creationId xmlns:a16="http://schemas.microsoft.com/office/drawing/2014/main" id="{3CF9C67D-1777-B642-2EE9-F7133771DABC}"/>
+              </a:ext>
+            </a:extLst>
+          </p:cNvPr>
+          <p:cNvPicPr>
+            <a:picLocks noChangeAspect="1"/>
+          </p:cNvPicPr>
+          <p:nvPr/>
+        </p:nvPicPr>
+        <p:blipFill>
+          <a:blip r:embed="rId2"/>
+          <a:stretch>
+            <a:fillRect/>
+          </a:stretch>
+        </p:blipFill>
+        <p:spPr>
+          <a:xfrm>
+            <a:off x="91440" y="1992342"/>
+            <a:ext cx="7181060" cy="2579658"/>
+          </a:xfrm>
+          <a:prstGeom prst="rect">
+            <a:avLst/>
+          </a:prstGeom>
+        </p:spPr>
+      </p:pic>
+      <p:sp>
+        <p:nvSpPr>
+          <p:cNvPr id="2" name="Titre 1">
+            <a:extLst>
+              <a:ext uri="{FF2B5EF4-FFF2-40B4-BE49-F238E27FC236}">
+                <a16:creationId xmlns:a16="http://schemas.microsoft.com/office/drawing/2014/main" id="{B5D0A2DE-1E6F-AF44-B700-8084C94AF9AC}"/>
+              </a:ext>
+            </a:extLst>
+          </p:cNvPr>
+          <p:cNvSpPr>
+            <a:spLocks noGrp="1"/>
+          </p:cNvSpPr>
+          <p:nvPr>
+            <p:ph type="title"/>
+          </p:nvPr>
+        </p:nvSpPr>
+        <p:spPr/>
+        <p:txBody>
+          <a:bodyPr/>
+          <a:lstStyle/>
+          <a:p>
+            <a:r>
+              <a:rPr lang="fr-FR" dirty="0"/>
+              <a:t>5. Mise en place </a:t>
+            </a:r>
+            <a:r>
+              <a:rPr lang="fr-FR" dirty="0" err="1"/>
+              <a:t>Airbyte</a:t>
+            </a:r>
+            <a:br>
+              <a:rPr lang="fr-FR" dirty="0"/>
+            </a:br>
+            <a:endParaRPr lang="fr-FR" dirty="0"/>
+          </a:p>
+        </p:txBody>
+      </p:sp>
+      <p:sp>
+        <p:nvSpPr>
+          <p:cNvPr id="4" name="Espace réservé de la date 3">
+            <a:extLst>
+              <a:ext uri="{FF2B5EF4-FFF2-40B4-BE49-F238E27FC236}">
+                <a16:creationId xmlns:a16="http://schemas.microsoft.com/office/drawing/2014/main" id="{CC7178DA-011E-3E29-FA78-2A9D56AAF227}"/>
+              </a:ext>
+            </a:extLst>
+          </p:cNvPr>
+          <p:cNvSpPr>
+            <a:spLocks noGrp="1"/>
+          </p:cNvSpPr>
+          <p:nvPr>
+            <p:ph type="dt" sz="half" idx="10"/>
+          </p:nvPr>
+        </p:nvSpPr>
+        <p:spPr/>
+        <p:txBody>
+          <a:bodyPr/>
+          <a:lstStyle/>
+          <a:p>
+            <a:pPr rtl="0"/>
+            <a:fld id="{22897033-9A55-4DAC-991D-1FF1921C78B7}" type="datetime1">
+              <a:rPr lang="fr-FR" smtClean="0"/>
+              <a:t>18/08/2026</a:t>
+            </a:fld>
+            <a:endParaRPr lang="en-US" dirty="0"/>
+          </a:p>
+        </p:txBody>
+      </p:sp>
+      <p:sp>
+        <p:nvSpPr>
+          <p:cNvPr id="5" name="Espace réservé du contenu 2">
+            <a:extLst>
+              <a:ext uri="{FF2B5EF4-FFF2-40B4-BE49-F238E27FC236}">
+                <a16:creationId xmlns:a16="http://schemas.microsoft.com/office/drawing/2014/main" id="{6C882531-7525-619D-ECE2-E89E4D2280F8}"/>
+              </a:ext>
+            </a:extLst>
+          </p:cNvPr>
+          <p:cNvSpPr>
+            <a:spLocks noGrp="1"/>
+          </p:cNvSpPr>
+          <p:nvPr>
+            <p:ph idx="1"/>
+          </p:nvPr>
+        </p:nvSpPr>
+        <p:spPr>
+          <a:xfrm>
+            <a:off x="581192" y="2020366"/>
+            <a:ext cx="11029615" cy="3634486"/>
+          </a:xfrm>
+        </p:spPr>
+        <p:txBody>
+          <a:bodyPr/>
+          <a:lstStyle/>
+          <a:p>
+            <a:endParaRPr lang="fr-FR" dirty="0"/>
+          </a:p>
+          <a:p>
+            <a:endParaRPr lang="fr-FR" dirty="0"/>
+          </a:p>
+          <a:p>
+            <a:endParaRPr lang="fr-FR" dirty="0"/>
+          </a:p>
+          <a:p>
+            <a:endParaRPr lang="fr-FR" dirty="0"/>
+          </a:p>
+          <a:p>
+            <a:endParaRPr lang="fr-FR" dirty="0"/>
+          </a:p>
+        </p:txBody>
+      </p:sp>
+      <p:sp>
+        <p:nvSpPr>
+          <p:cNvPr id="35" name="Heptagone 34">
+            <a:extLst>
+              <a:ext uri="{FF2B5EF4-FFF2-40B4-BE49-F238E27FC236}">
+                <a16:creationId xmlns:a16="http://schemas.microsoft.com/office/drawing/2014/main" id="{0BD9BD7E-FFDB-59C2-DE6C-5344FD8CF3A8}"/>
+              </a:ext>
+            </a:extLst>
+          </p:cNvPr>
+          <p:cNvSpPr/>
+          <p:nvPr/>
+        </p:nvSpPr>
+        <p:spPr>
+          <a:xfrm>
+            <a:off x="4131929" y="2624610"/>
+            <a:ext cx="457199" cy="457292"/>
+          </a:xfrm>
+          <a:prstGeom prst="heptagon">
+            <a:avLst/>
+          </a:prstGeom>
+          <a:solidFill>
+            <a:srgbClr val="FF0000"/>
+          </a:solidFill>
+          <a:ln>
+            <a:noFill/>
+          </a:ln>
+        </p:spPr>
+        <p:style>
+          <a:lnRef idx="2">
+            <a:schemeClr val="accent1">
+              <a:shade val="15000"/>
+            </a:schemeClr>
+          </a:lnRef>
+          <a:fillRef idx="1">
+            <a:schemeClr val="accent1"/>
+          </a:fillRef>
+          <a:effectRef idx="0">
+            <a:schemeClr val="accent1"/>
+          </a:effectRef>
+          <a:fontRef idx="minor">
+            <a:schemeClr val="lt1"/>
+          </a:fontRef>
+        </p:style>
+        <p:txBody>
+          <a:bodyPr rtlCol="0" anchor="ctr"/>
+          <a:lstStyle/>
+          <a:p>
+            <a:pPr algn="ctr"/>
+            <a:r>
+              <a:rPr lang="fr-FR" dirty="0"/>
+              <a:t>7</a:t>
+            </a:r>
+          </a:p>
+        </p:txBody>
+      </p:sp>
+      <p:pic>
+        <p:nvPicPr>
+          <p:cNvPr id="9" name="Image 8">
+            <a:extLst>
+              <a:ext uri="{FF2B5EF4-FFF2-40B4-BE49-F238E27FC236}">
+                <a16:creationId xmlns:a16="http://schemas.microsoft.com/office/drawing/2014/main" id="{8CF702EA-8774-7E92-0936-1AF4E93025C5}"/>
+              </a:ext>
+            </a:extLst>
+          </p:cNvPr>
+          <p:cNvPicPr>
+            <a:picLocks noChangeAspect="1"/>
+          </p:cNvPicPr>
+          <p:nvPr/>
+        </p:nvPicPr>
+        <p:blipFill>
+          <a:blip r:embed="rId3"/>
+          <a:stretch>
+            <a:fillRect/>
+          </a:stretch>
+        </p:blipFill>
+        <p:spPr>
+          <a:xfrm>
+            <a:off x="128889" y="4289320"/>
+            <a:ext cx="8006080" cy="1987759"/>
+          </a:xfrm>
+          <a:prstGeom prst="rect">
+            <a:avLst/>
+          </a:prstGeom>
+        </p:spPr>
+      </p:pic>
+      <p:sp>
+        <p:nvSpPr>
+          <p:cNvPr id="15" name="Heptagone 14">
+            <a:extLst>
+              <a:ext uri="{FF2B5EF4-FFF2-40B4-BE49-F238E27FC236}">
+                <a16:creationId xmlns:a16="http://schemas.microsoft.com/office/drawing/2014/main" id="{4DFD3E5E-711A-6D5B-BF14-94A651F875C4}"/>
+              </a:ext>
+            </a:extLst>
+          </p:cNvPr>
+          <p:cNvSpPr/>
+          <p:nvPr/>
+        </p:nvSpPr>
+        <p:spPr>
+          <a:xfrm>
+            <a:off x="2889019" y="4673466"/>
+            <a:ext cx="457199" cy="457292"/>
+          </a:xfrm>
+          <a:prstGeom prst="heptagon">
+            <a:avLst/>
+          </a:prstGeom>
+          <a:solidFill>
+            <a:srgbClr val="FF0000"/>
+          </a:solidFill>
+          <a:ln>
+            <a:noFill/>
+          </a:ln>
+        </p:spPr>
+        <p:style>
+          <a:lnRef idx="2">
+            <a:schemeClr val="accent1">
+              <a:shade val="15000"/>
+            </a:schemeClr>
+          </a:lnRef>
+          <a:fillRef idx="1">
+            <a:schemeClr val="accent1"/>
+          </a:fillRef>
+          <a:effectRef idx="0">
+            <a:schemeClr val="accent1"/>
+          </a:effectRef>
+          <a:fontRef idx="minor">
+            <a:schemeClr val="lt1"/>
+          </a:fontRef>
+        </p:style>
+        <p:txBody>
+          <a:bodyPr rtlCol="0" anchor="ctr"/>
+          <a:lstStyle/>
+          <a:p>
+            <a:pPr algn="ctr"/>
+            <a:r>
+              <a:rPr lang="fr-FR" dirty="0"/>
+              <a:t>8</a:t>
+            </a:r>
+          </a:p>
+        </p:txBody>
+      </p:sp>
+      <p:sp>
+        <p:nvSpPr>
+          <p:cNvPr id="12" name="ZoneTexte 11">
+            <a:extLst>
+              <a:ext uri="{FF2B5EF4-FFF2-40B4-BE49-F238E27FC236}">
+                <a16:creationId xmlns:a16="http://schemas.microsoft.com/office/drawing/2014/main" id="{8DC2F3DA-F3F1-B0E4-DD0F-80C3DCBB4C1F}"/>
+              </a:ext>
+            </a:extLst>
+          </p:cNvPr>
+          <p:cNvSpPr txBox="1"/>
+          <p:nvPr/>
+        </p:nvSpPr>
+        <p:spPr>
+          <a:xfrm>
+            <a:off x="5378971" y="2441441"/>
+            <a:ext cx="1893529" cy="738664"/>
+          </a:xfrm>
+          <a:prstGeom prst="rect">
+            <a:avLst/>
+          </a:prstGeom>
+          <a:solidFill>
+            <a:schemeClr val="bg1"/>
+          </a:solidFill>
+          <a:ln w="19050">
+            <a:solidFill>
+              <a:srgbClr val="FF0000"/>
+            </a:solidFill>
+          </a:ln>
+        </p:spPr>
+        <p:txBody>
+          <a:bodyPr wrap="square" rtlCol="0">
+            <a:spAutoFit/>
+          </a:bodyPr>
+          <a:lstStyle/>
+          <a:p>
+            <a:r>
+              <a:rPr lang="fr-FR" sz="1400" dirty="0"/>
+              <a:t>Sélectionner la destination </a:t>
+            </a:r>
+            <a:r>
+              <a:rPr lang="fr-FR" sz="1400" dirty="0" err="1"/>
+              <a:t>PosgreSQL</a:t>
+            </a:r>
+            <a:r>
+              <a:rPr lang="fr-FR" sz="1400" dirty="0"/>
+              <a:t> créée</a:t>
+            </a:r>
+          </a:p>
+        </p:txBody>
+      </p:sp>
+      <p:cxnSp>
+        <p:nvCxnSpPr>
+          <p:cNvPr id="11" name="Connecteur droit avec flèche 10">
+            <a:extLst>
+              <a:ext uri="{FF2B5EF4-FFF2-40B4-BE49-F238E27FC236}">
+                <a16:creationId xmlns:a16="http://schemas.microsoft.com/office/drawing/2014/main" id="{6DF1BF22-1784-BF21-BC2C-BFFF019096C0}"/>
+              </a:ext>
+            </a:extLst>
+          </p:cNvPr>
+          <p:cNvCxnSpPr>
+            <a:cxnSpLocks/>
+            <a:stCxn id="12" idx="2"/>
+          </p:cNvCxnSpPr>
+          <p:nvPr/>
+        </p:nvCxnSpPr>
+        <p:spPr>
+          <a:xfrm flipH="1">
+            <a:off x="4866640" y="3180105"/>
+            <a:ext cx="1459096" cy="713520"/>
+          </a:xfrm>
+          <a:prstGeom prst="straightConnector1">
+            <a:avLst/>
+          </a:prstGeom>
+          <a:ln w="19050">
+            <a:solidFill>
+              <a:srgbClr val="FF0000"/>
+            </a:solidFill>
+            <a:tailEnd type="triangle"/>
+          </a:ln>
+        </p:spPr>
+        <p:style>
+          <a:lnRef idx="1">
+            <a:schemeClr val="accent1"/>
+          </a:lnRef>
+          <a:fillRef idx="0">
+            <a:schemeClr val="accent1"/>
+          </a:fillRef>
+          <a:effectRef idx="0">
+            <a:schemeClr val="accent1"/>
+          </a:effectRef>
+          <a:fontRef idx="minor">
+            <a:schemeClr val="tx1"/>
+          </a:fontRef>
+        </p:style>
+      </p:cxnSp>
+      <p:pic>
+        <p:nvPicPr>
+          <p:cNvPr id="18" name="Image 17">
+            <a:extLst>
+              <a:ext uri="{FF2B5EF4-FFF2-40B4-BE49-F238E27FC236}">
+                <a16:creationId xmlns:a16="http://schemas.microsoft.com/office/drawing/2014/main" id="{9DE99DE8-9B5D-7186-3C4C-8D0916D6CA4F}"/>
+              </a:ext>
+            </a:extLst>
+          </p:cNvPr>
+          <p:cNvPicPr>
+            <a:picLocks noChangeAspect="1"/>
+          </p:cNvPicPr>
+          <p:nvPr/>
+        </p:nvPicPr>
+        <p:blipFill>
+          <a:blip r:embed="rId4"/>
+          <a:srcRect l="8391" t="11478" r="19726"/>
+          <a:stretch>
+            <a:fillRect/>
+          </a:stretch>
+        </p:blipFill>
+        <p:spPr>
+          <a:xfrm>
+            <a:off x="6593839" y="3326940"/>
+            <a:ext cx="5506720" cy="2388179"/>
+          </a:xfrm>
+          <a:prstGeom prst="rect">
+            <a:avLst/>
+          </a:prstGeom>
+          <a:ln>
+            <a:solidFill>
+              <a:srgbClr val="FF0000"/>
+            </a:solidFill>
+          </a:ln>
+        </p:spPr>
+      </p:pic>
+      <p:sp>
+        <p:nvSpPr>
+          <p:cNvPr id="19" name="Heptagone 18">
+            <a:extLst>
+              <a:ext uri="{FF2B5EF4-FFF2-40B4-BE49-F238E27FC236}">
+                <a16:creationId xmlns:a16="http://schemas.microsoft.com/office/drawing/2014/main" id="{41EB7AA0-214B-5A1E-1AB9-EC8159D4D1D8}"/>
+              </a:ext>
+            </a:extLst>
+          </p:cNvPr>
+          <p:cNvSpPr/>
+          <p:nvPr/>
+        </p:nvSpPr>
+        <p:spPr>
+          <a:xfrm>
+            <a:off x="11006859" y="4673466"/>
+            <a:ext cx="457199" cy="457292"/>
+          </a:xfrm>
+          <a:prstGeom prst="heptagon">
+            <a:avLst/>
+          </a:prstGeom>
+          <a:solidFill>
+            <a:srgbClr val="FF0000"/>
+          </a:solidFill>
+          <a:ln>
+            <a:noFill/>
+          </a:ln>
+        </p:spPr>
+        <p:style>
+          <a:lnRef idx="2">
+            <a:schemeClr val="accent1">
+              <a:shade val="15000"/>
+            </a:schemeClr>
+          </a:lnRef>
+          <a:fillRef idx="1">
+            <a:schemeClr val="accent1"/>
+          </a:fillRef>
+          <a:effectRef idx="0">
+            <a:schemeClr val="accent1"/>
+          </a:effectRef>
+          <a:fontRef idx="minor">
+            <a:schemeClr val="lt1"/>
+          </a:fontRef>
+        </p:style>
+        <p:txBody>
+          <a:bodyPr rtlCol="0" anchor="ctr"/>
+          <a:lstStyle/>
+          <a:p>
+            <a:pPr algn="ctr"/>
+            <a:r>
+              <a:rPr lang="fr-FR" dirty="0"/>
+              <a:t>9</a:t>
+            </a:r>
+          </a:p>
+        </p:txBody>
+      </p:sp>
+      <p:sp>
+        <p:nvSpPr>
+          <p:cNvPr id="20" name="ZoneTexte 19">
+            <a:extLst>
+              <a:ext uri="{FF2B5EF4-FFF2-40B4-BE49-F238E27FC236}">
+                <a16:creationId xmlns:a16="http://schemas.microsoft.com/office/drawing/2014/main" id="{8BAF8F4F-0981-78E4-24DA-C7E6754159F6}"/>
+              </a:ext>
+            </a:extLst>
+          </p:cNvPr>
+          <p:cNvSpPr txBox="1"/>
+          <p:nvPr/>
+        </p:nvSpPr>
+        <p:spPr>
+          <a:xfrm>
+            <a:off x="8172418" y="5902737"/>
+            <a:ext cx="1896142" cy="523220"/>
+          </a:xfrm>
+          <a:prstGeom prst="rect">
+            <a:avLst/>
+          </a:prstGeom>
+          <a:solidFill>
+            <a:schemeClr val="bg1"/>
+          </a:solidFill>
+          <a:ln w="19050">
+            <a:solidFill>
+              <a:srgbClr val="FF0000"/>
+            </a:solidFill>
+          </a:ln>
+        </p:spPr>
+        <p:txBody>
+          <a:bodyPr wrap="square" rtlCol="0">
+            <a:spAutoFit/>
+          </a:bodyPr>
+          <a:lstStyle/>
+          <a:p>
+            <a:r>
+              <a:rPr lang="fr-FR" sz="1400" dirty="0"/>
+              <a:t>Sélectionner Full </a:t>
+            </a:r>
+            <a:r>
+              <a:rPr lang="fr-FR" sz="1400" dirty="0" err="1"/>
+              <a:t>refresh</a:t>
+            </a:r>
+            <a:r>
+              <a:rPr lang="fr-FR" sz="1400" dirty="0"/>
+              <a:t> | </a:t>
+            </a:r>
+            <a:r>
+              <a:rPr lang="fr-FR" sz="1400" dirty="0" err="1"/>
+              <a:t>Overwrite</a:t>
+            </a:r>
+            <a:endParaRPr lang="fr-FR" sz="1400" dirty="0"/>
+          </a:p>
+        </p:txBody>
+      </p:sp>
+      <p:cxnSp>
+        <p:nvCxnSpPr>
+          <p:cNvPr id="21" name="Connecteur droit avec flèche 20">
+            <a:extLst>
+              <a:ext uri="{FF2B5EF4-FFF2-40B4-BE49-F238E27FC236}">
+                <a16:creationId xmlns:a16="http://schemas.microsoft.com/office/drawing/2014/main" id="{EBF56DFA-09B2-8838-4566-25AFFA3EA9A6}"/>
+              </a:ext>
+            </a:extLst>
+          </p:cNvPr>
+          <p:cNvCxnSpPr>
+            <a:cxnSpLocks/>
+            <a:stCxn id="20" idx="3"/>
+          </p:cNvCxnSpPr>
+          <p:nvPr/>
+        </p:nvCxnSpPr>
+        <p:spPr>
+          <a:xfrm flipV="1">
+            <a:off x="10068560" y="5473012"/>
+            <a:ext cx="834493" cy="691335"/>
+          </a:xfrm>
+          <a:prstGeom prst="straightConnector1">
+            <a:avLst/>
+          </a:prstGeom>
+          <a:ln w="19050">
+            <a:solidFill>
+              <a:srgbClr val="FF0000"/>
+            </a:solidFill>
+            <a:tailEnd type="triangle"/>
+          </a:ln>
+        </p:spPr>
+        <p:style>
+          <a:lnRef idx="1">
+            <a:schemeClr val="accent1"/>
+          </a:lnRef>
+          <a:fillRef idx="0">
+            <a:schemeClr val="accent1"/>
+          </a:fillRef>
+          <a:effectRef idx="0">
+            <a:schemeClr val="accent1"/>
+          </a:effectRef>
+          <a:fontRef idx="minor">
+            <a:schemeClr val="tx1"/>
+          </a:fontRef>
+        </p:style>
+      </p:cxnSp>
+    </p:spTree>
+    <p:extLst>
+      <p:ext uri="{BB962C8B-B14F-4D97-AF65-F5344CB8AC3E}">
+        <p14:creationId xmlns:p14="http://schemas.microsoft.com/office/powerpoint/2010/main" val="385905755"/>
+      </p:ext>
+    </p:extLst>
+  </p:cSld>
+  <p:clrMapOvr>
+    <a:masterClrMapping/>
+  </p:clrMapOvr>
+</p:sld>
+</file>
+
+<file path=ppt/slides/slide11.xml><?xml version="1.0" encoding="utf-8"?>
+<p:sld xmlns:a="http://schemas.openxmlformats.org/drawingml/2006/main" xmlns:r="http://schemas.openxmlformats.org/officeDocument/2006/relationships" xmlns:p="http://schemas.openxmlformats.org/presentationml/2006/main">
+  <p:cSld>
+    <p:spTree>
+      <p:nvGrpSpPr>
+        <p:cNvPr id="1" name="">
+          <a:extLst>
+            <a:ext uri="{FF2B5EF4-FFF2-40B4-BE49-F238E27FC236}">
+              <a16:creationId xmlns:a16="http://schemas.microsoft.com/office/drawing/2014/main" id="{6A82E35C-1988-23E7-5DC9-7E6CD6069232}"/>
+            </a:ext>
+          </a:extLst>
+        </p:cNvPr>
+        <p:cNvGrpSpPr/>
+        <p:nvPr/>
+      </p:nvGrpSpPr>
+      <p:grpSpPr>
+        <a:xfrm>
+          <a:off x="0" y="0"/>
+          <a:ext cx="0" cy="0"/>
+          <a:chOff x="0" y="0"/>
+          <a:chExt cx="0" cy="0"/>
+        </a:xfrm>
+      </p:grpSpPr>
+      <p:pic>
+        <p:nvPicPr>
+          <p:cNvPr id="7" name="Image 6">
+            <a:extLst>
+              <a:ext uri="{FF2B5EF4-FFF2-40B4-BE49-F238E27FC236}">
+                <a16:creationId xmlns:a16="http://schemas.microsoft.com/office/drawing/2014/main" id="{62B4199C-E1F3-593F-910E-4E2F55D0B937}"/>
+              </a:ext>
+            </a:extLst>
+          </p:cNvPr>
+          <p:cNvPicPr>
+            <a:picLocks noChangeAspect="1"/>
+          </p:cNvPicPr>
+          <p:nvPr/>
+        </p:nvPicPr>
+        <p:blipFill>
+          <a:blip r:embed="rId2"/>
+          <a:stretch>
+            <a:fillRect/>
+          </a:stretch>
+        </p:blipFill>
+        <p:spPr>
+          <a:xfrm>
+            <a:off x="208486" y="2150443"/>
+            <a:ext cx="8097520" cy="4286559"/>
+          </a:xfrm>
+          <a:prstGeom prst="rect">
+            <a:avLst/>
+          </a:prstGeom>
+        </p:spPr>
+      </p:pic>
+      <p:sp>
+        <p:nvSpPr>
+          <p:cNvPr id="2" name="Titre 1">
+            <a:extLst>
+              <a:ext uri="{FF2B5EF4-FFF2-40B4-BE49-F238E27FC236}">
+                <a16:creationId xmlns:a16="http://schemas.microsoft.com/office/drawing/2014/main" id="{124B6EF2-AD40-AB8F-6B94-AEE24756D331}"/>
+              </a:ext>
+            </a:extLst>
+          </p:cNvPr>
+          <p:cNvSpPr>
+            <a:spLocks noGrp="1"/>
+          </p:cNvSpPr>
+          <p:nvPr>
+            <p:ph type="title"/>
+          </p:nvPr>
+        </p:nvSpPr>
+        <p:spPr/>
+        <p:txBody>
+          <a:bodyPr/>
+          <a:lstStyle/>
+          <a:p>
+            <a:r>
+              <a:rPr lang="fr-FR" dirty="0"/>
+              <a:t>5. Mise en place </a:t>
+            </a:r>
+            <a:r>
+              <a:rPr lang="fr-FR" dirty="0" err="1"/>
+              <a:t>Airbyte</a:t>
+            </a:r>
+            <a:br>
+              <a:rPr lang="fr-FR" dirty="0"/>
+            </a:br>
+            <a:endParaRPr lang="fr-FR" dirty="0"/>
+          </a:p>
+        </p:txBody>
+      </p:sp>
+      <p:sp>
+        <p:nvSpPr>
+          <p:cNvPr id="4" name="Espace réservé de la date 3">
+            <a:extLst>
+              <a:ext uri="{FF2B5EF4-FFF2-40B4-BE49-F238E27FC236}">
+                <a16:creationId xmlns:a16="http://schemas.microsoft.com/office/drawing/2014/main" id="{1A105AA2-062B-6E25-CB39-48F67CB3D4D1}"/>
+              </a:ext>
+            </a:extLst>
+          </p:cNvPr>
+          <p:cNvSpPr>
+            <a:spLocks noGrp="1"/>
+          </p:cNvSpPr>
+          <p:nvPr>
+            <p:ph type="dt" sz="half" idx="10"/>
+          </p:nvPr>
+        </p:nvSpPr>
+        <p:spPr/>
+        <p:txBody>
+          <a:bodyPr/>
+          <a:lstStyle/>
+          <a:p>
+            <a:pPr rtl="0"/>
+            <a:fld id="{22897033-9A55-4DAC-991D-1FF1921C78B7}" type="datetime1">
+              <a:rPr lang="fr-FR" smtClean="0"/>
+              <a:t>18/08/2026</a:t>
+            </a:fld>
+            <a:endParaRPr lang="en-US" dirty="0"/>
+          </a:p>
+        </p:txBody>
+      </p:sp>
+      <p:sp>
+        <p:nvSpPr>
+          <p:cNvPr id="5" name="Espace réservé du contenu 2">
+            <a:extLst>
+              <a:ext uri="{FF2B5EF4-FFF2-40B4-BE49-F238E27FC236}">
+                <a16:creationId xmlns:a16="http://schemas.microsoft.com/office/drawing/2014/main" id="{DE739681-3DB5-8470-BA5D-1D766E4AEAE5}"/>
+              </a:ext>
+            </a:extLst>
+          </p:cNvPr>
+          <p:cNvSpPr>
+            <a:spLocks noGrp="1"/>
+          </p:cNvSpPr>
+          <p:nvPr>
+            <p:ph idx="1"/>
+          </p:nvPr>
+        </p:nvSpPr>
+        <p:spPr>
+          <a:xfrm>
+            <a:off x="581192" y="2020366"/>
+            <a:ext cx="11029615" cy="3634486"/>
+          </a:xfrm>
+        </p:spPr>
+        <p:txBody>
+          <a:bodyPr/>
+          <a:lstStyle/>
+          <a:p>
+            <a:endParaRPr lang="fr-FR" dirty="0"/>
+          </a:p>
+          <a:p>
+            <a:endParaRPr lang="fr-FR" dirty="0"/>
+          </a:p>
+          <a:p>
+            <a:endParaRPr lang="fr-FR" dirty="0"/>
+          </a:p>
+          <a:p>
+            <a:endParaRPr lang="fr-FR" dirty="0"/>
+          </a:p>
+          <a:p>
+            <a:endParaRPr lang="fr-FR" dirty="0"/>
+          </a:p>
+        </p:txBody>
+      </p:sp>
+      <p:sp>
+        <p:nvSpPr>
+          <p:cNvPr id="35" name="Heptagone 34">
+            <a:extLst>
+              <a:ext uri="{FF2B5EF4-FFF2-40B4-BE49-F238E27FC236}">
+                <a16:creationId xmlns:a16="http://schemas.microsoft.com/office/drawing/2014/main" id="{1D8AEB41-F6A9-0F02-72EE-07A7D2622D8F}"/>
+              </a:ext>
+            </a:extLst>
+          </p:cNvPr>
+          <p:cNvSpPr/>
+          <p:nvPr/>
+        </p:nvSpPr>
+        <p:spPr>
+          <a:xfrm>
+            <a:off x="4424680" y="3084584"/>
+            <a:ext cx="457199" cy="457292"/>
+          </a:xfrm>
+          <a:prstGeom prst="heptagon">
+            <a:avLst/>
+          </a:prstGeom>
+          <a:solidFill>
+            <a:srgbClr val="FF0000"/>
+          </a:solidFill>
+          <a:ln>
+            <a:noFill/>
+          </a:ln>
+        </p:spPr>
+        <p:style>
+          <a:lnRef idx="2">
+            <a:schemeClr val="accent1">
+              <a:shade val="15000"/>
+            </a:schemeClr>
+          </a:lnRef>
+          <a:fillRef idx="1">
+            <a:schemeClr val="accent1"/>
+          </a:fillRef>
+          <a:effectRef idx="0">
+            <a:schemeClr val="accent1"/>
+          </a:effectRef>
+          <a:fontRef idx="minor">
+            <a:schemeClr val="lt1"/>
+          </a:fontRef>
+        </p:style>
+        <p:txBody>
+          <a:bodyPr rtlCol="0" anchor="ctr"/>
+          <a:lstStyle/>
+          <a:p>
+            <a:pPr algn="ctr"/>
+            <a:r>
+              <a:rPr lang="fr-FR" sz="1200" dirty="0"/>
+              <a:t>10</a:t>
+            </a:r>
+          </a:p>
+        </p:txBody>
+      </p:sp>
+      <p:sp>
+        <p:nvSpPr>
+          <p:cNvPr id="12" name="ZoneTexte 11">
+            <a:extLst>
+              <a:ext uri="{FF2B5EF4-FFF2-40B4-BE49-F238E27FC236}">
+                <a16:creationId xmlns:a16="http://schemas.microsoft.com/office/drawing/2014/main" id="{75A77A21-6BEC-6257-9DC0-B77317690F9B}"/>
+              </a:ext>
+            </a:extLst>
+          </p:cNvPr>
+          <p:cNvSpPr txBox="1"/>
+          <p:nvPr/>
+        </p:nvSpPr>
+        <p:spPr>
+          <a:xfrm>
+            <a:off x="5378971" y="2441441"/>
+            <a:ext cx="1893529" cy="523220"/>
+          </a:xfrm>
+          <a:prstGeom prst="rect">
+            <a:avLst/>
+          </a:prstGeom>
+          <a:solidFill>
+            <a:schemeClr val="bg1"/>
+          </a:solidFill>
+          <a:ln w="19050">
+            <a:solidFill>
+              <a:srgbClr val="FF0000"/>
+            </a:solidFill>
+          </a:ln>
+        </p:spPr>
+        <p:txBody>
+          <a:bodyPr wrap="square" rtlCol="0">
+            <a:spAutoFit/>
+          </a:bodyPr>
+          <a:lstStyle/>
+          <a:p>
+            <a:r>
+              <a:rPr lang="fr-FR" sz="1400" dirty="0"/>
+              <a:t>Choisir le </a:t>
+            </a:r>
+            <a:r>
+              <a:rPr lang="fr-FR" sz="1400" dirty="0" err="1"/>
+              <a:t>schedule</a:t>
+            </a:r>
+            <a:r>
+              <a:rPr lang="fr-FR" sz="1400" dirty="0"/>
+              <a:t> type à configurer</a:t>
+            </a:r>
+          </a:p>
+        </p:txBody>
+      </p:sp>
+      <p:cxnSp>
+        <p:nvCxnSpPr>
+          <p:cNvPr id="11" name="Connecteur droit avec flèche 10">
+            <a:extLst>
+              <a:ext uri="{FF2B5EF4-FFF2-40B4-BE49-F238E27FC236}">
+                <a16:creationId xmlns:a16="http://schemas.microsoft.com/office/drawing/2014/main" id="{3CBF5A7B-1460-75AF-CD2E-0498C5214C01}"/>
+              </a:ext>
+            </a:extLst>
+          </p:cNvPr>
+          <p:cNvCxnSpPr>
+            <a:cxnSpLocks/>
+            <a:stCxn id="12" idx="2"/>
+          </p:cNvCxnSpPr>
+          <p:nvPr/>
+        </p:nvCxnSpPr>
+        <p:spPr>
+          <a:xfrm flipH="1">
+            <a:off x="4653280" y="2964661"/>
+            <a:ext cx="1672456" cy="872948"/>
+          </a:xfrm>
+          <a:prstGeom prst="straightConnector1">
+            <a:avLst/>
+          </a:prstGeom>
+          <a:ln w="19050">
+            <a:solidFill>
+              <a:srgbClr val="FF0000"/>
+            </a:solidFill>
+            <a:tailEnd type="triangle"/>
+          </a:ln>
+        </p:spPr>
+        <p:style>
+          <a:lnRef idx="1">
+            <a:schemeClr val="accent1"/>
+          </a:lnRef>
+          <a:fillRef idx="0">
+            <a:schemeClr val="accent1"/>
+          </a:fillRef>
+          <a:effectRef idx="0">
+            <a:schemeClr val="accent1"/>
+          </a:effectRef>
+          <a:fontRef idx="minor">
+            <a:schemeClr val="tx1"/>
+          </a:fontRef>
+        </p:style>
+      </p:cxnSp>
+      <p:sp>
+        <p:nvSpPr>
+          <p:cNvPr id="20" name="ZoneTexte 19">
+            <a:extLst>
+              <a:ext uri="{FF2B5EF4-FFF2-40B4-BE49-F238E27FC236}">
+                <a16:creationId xmlns:a16="http://schemas.microsoft.com/office/drawing/2014/main" id="{12E7F6D9-BCB0-4872-C318-C0D4C50CFA84}"/>
+              </a:ext>
+            </a:extLst>
+          </p:cNvPr>
+          <p:cNvSpPr txBox="1"/>
+          <p:nvPr/>
+        </p:nvSpPr>
+        <p:spPr>
+          <a:xfrm>
+            <a:off x="4875316" y="5684240"/>
+            <a:ext cx="1896142" cy="523220"/>
+          </a:xfrm>
+          <a:prstGeom prst="rect">
+            <a:avLst/>
+          </a:prstGeom>
+          <a:solidFill>
+            <a:schemeClr val="bg1"/>
+          </a:solidFill>
+          <a:ln w="19050">
+            <a:solidFill>
+              <a:srgbClr val="FF0000"/>
+            </a:solidFill>
+          </a:ln>
+        </p:spPr>
+        <p:txBody>
+          <a:bodyPr wrap="square" rtlCol="0">
+            <a:spAutoFit/>
+          </a:bodyPr>
+          <a:lstStyle/>
+          <a:p>
+            <a:r>
+              <a:rPr lang="fr-FR" sz="1400" dirty="0"/>
+              <a:t>Mettre en place la connexion</a:t>
+            </a:r>
+          </a:p>
+        </p:txBody>
+      </p:sp>
+      <p:cxnSp>
+        <p:nvCxnSpPr>
+          <p:cNvPr id="21" name="Connecteur droit avec flèche 20">
+            <a:extLst>
+              <a:ext uri="{FF2B5EF4-FFF2-40B4-BE49-F238E27FC236}">
+                <a16:creationId xmlns:a16="http://schemas.microsoft.com/office/drawing/2014/main" id="{EAD772C8-35C2-C23C-A4EE-B9AD548D9D2B}"/>
+              </a:ext>
+            </a:extLst>
+          </p:cNvPr>
+          <p:cNvCxnSpPr>
+            <a:cxnSpLocks/>
+            <a:stCxn id="20" idx="3"/>
+          </p:cNvCxnSpPr>
+          <p:nvPr/>
+        </p:nvCxnSpPr>
+        <p:spPr>
+          <a:xfrm>
+            <a:off x="6771458" y="5945850"/>
+            <a:ext cx="1041582" cy="260256"/>
+          </a:xfrm>
+          <a:prstGeom prst="straightConnector1">
+            <a:avLst/>
+          </a:prstGeom>
+          <a:ln w="19050">
+            <a:solidFill>
+              <a:srgbClr val="FF0000"/>
+            </a:solidFill>
+            <a:tailEnd type="triangle"/>
+          </a:ln>
+        </p:spPr>
+        <p:style>
+          <a:lnRef idx="1">
+            <a:schemeClr val="accent1"/>
+          </a:lnRef>
+          <a:fillRef idx="0">
+            <a:schemeClr val="accent1"/>
+          </a:fillRef>
+          <a:effectRef idx="0">
+            <a:schemeClr val="accent1"/>
+          </a:effectRef>
+          <a:fontRef idx="minor">
+            <a:schemeClr val="tx1"/>
+          </a:fontRef>
+        </p:style>
+      </p:cxnSp>
+      <p:sp>
+        <p:nvSpPr>
+          <p:cNvPr id="13" name="Heptagone 12">
+            <a:extLst>
+              <a:ext uri="{FF2B5EF4-FFF2-40B4-BE49-F238E27FC236}">
+                <a16:creationId xmlns:a16="http://schemas.microsoft.com/office/drawing/2014/main" id="{03E798C0-4F41-F0DC-17F3-C4F0B8388717}"/>
+              </a:ext>
+            </a:extLst>
+          </p:cNvPr>
+          <p:cNvSpPr/>
+          <p:nvPr/>
+        </p:nvSpPr>
+        <p:spPr>
+          <a:xfrm>
+            <a:off x="5867399" y="5114413"/>
+            <a:ext cx="457199" cy="457292"/>
+          </a:xfrm>
+          <a:prstGeom prst="heptagon">
+            <a:avLst/>
+          </a:prstGeom>
+          <a:solidFill>
+            <a:srgbClr val="FF0000"/>
+          </a:solidFill>
+          <a:ln>
+            <a:noFill/>
+          </a:ln>
+        </p:spPr>
+        <p:style>
+          <a:lnRef idx="2">
+            <a:schemeClr val="accent1">
+              <a:shade val="15000"/>
+            </a:schemeClr>
+          </a:lnRef>
+          <a:fillRef idx="1">
+            <a:schemeClr val="accent1"/>
+          </a:fillRef>
+          <a:effectRef idx="0">
+            <a:schemeClr val="accent1"/>
+          </a:effectRef>
+          <a:fontRef idx="minor">
+            <a:schemeClr val="lt1"/>
+          </a:fontRef>
+        </p:style>
+        <p:txBody>
+          <a:bodyPr rtlCol="0" anchor="ctr"/>
+          <a:lstStyle/>
+          <a:p>
+            <a:pPr algn="ctr"/>
+            <a:r>
+              <a:rPr lang="fr-FR" sz="1200" dirty="0"/>
+              <a:t>11</a:t>
+            </a:r>
+          </a:p>
+        </p:txBody>
+      </p:sp>
+    </p:spTree>
+    <p:extLst>
+      <p:ext uri="{BB962C8B-B14F-4D97-AF65-F5344CB8AC3E}">
+        <p14:creationId xmlns:p14="http://schemas.microsoft.com/office/powerpoint/2010/main" val="3925319079"/>
+      </p:ext>
+    </p:extLst>
+  </p:cSld>
+  <p:clrMapOvr>
+    <a:masterClrMapping/>
+  </p:clrMapOvr>
+</p:sld>
+</file>
+
+<file path=ppt/slides/slide12.xml><?xml version="1.0" encoding="utf-8"?>
+<p:sld xmlns:a="http://schemas.openxmlformats.org/drawingml/2006/main" xmlns:r="http://schemas.openxmlformats.org/officeDocument/2006/relationships" xmlns:p="http://schemas.openxmlformats.org/presentationml/2006/main">
+  <p:cSld>
+    <p:spTree>
+      <p:nvGrpSpPr>
+        <p:cNvPr id="1" name="">
+          <a:extLst>
+            <a:ext uri="{FF2B5EF4-FFF2-40B4-BE49-F238E27FC236}">
+              <a16:creationId xmlns:a16="http://schemas.microsoft.com/office/drawing/2014/main" id="{DF648699-BE5A-3255-1F6A-6838AB97DEAA}"/>
+            </a:ext>
+          </a:extLst>
+        </p:cNvPr>
+        <p:cNvGrpSpPr/>
+        <p:nvPr/>
+      </p:nvGrpSpPr>
+      <p:grpSpPr>
+        <a:xfrm>
+          <a:off x="0" y="0"/>
+          <a:ext cx="0" cy="0"/>
+          <a:chOff x="0" y="0"/>
+          <a:chExt cx="0" cy="0"/>
+        </a:xfrm>
+      </p:grpSpPr>
+      <p:pic>
+        <p:nvPicPr>
+          <p:cNvPr id="14" name="Image 13">
+            <a:extLst>
+              <a:ext uri="{FF2B5EF4-FFF2-40B4-BE49-F238E27FC236}">
+                <a16:creationId xmlns:a16="http://schemas.microsoft.com/office/drawing/2014/main" id="{71136054-5556-91AA-8AC8-C6452DC10C29}"/>
+              </a:ext>
+            </a:extLst>
+          </p:cNvPr>
+          <p:cNvPicPr>
+            <a:picLocks noChangeAspect="1"/>
+          </p:cNvPicPr>
+          <p:nvPr/>
+        </p:nvPicPr>
+        <p:blipFill>
+          <a:blip r:embed="rId2"/>
+          <a:stretch>
+            <a:fillRect/>
+          </a:stretch>
+        </p:blipFill>
+        <p:spPr>
+          <a:xfrm>
+            <a:off x="258318" y="4312984"/>
+            <a:ext cx="9458960" cy="2060149"/>
+          </a:xfrm>
+          <a:prstGeom prst="rect">
+            <a:avLst/>
+          </a:prstGeom>
+        </p:spPr>
+      </p:pic>
+      <p:pic>
+        <p:nvPicPr>
+          <p:cNvPr id="6" name="Image 5">
+            <a:extLst>
+              <a:ext uri="{FF2B5EF4-FFF2-40B4-BE49-F238E27FC236}">
+                <a16:creationId xmlns:a16="http://schemas.microsoft.com/office/drawing/2014/main" id="{42417B1F-41D8-7DAE-FA74-EE10198F3E0E}"/>
+              </a:ext>
+            </a:extLst>
+          </p:cNvPr>
+          <p:cNvPicPr>
+            <a:picLocks noChangeAspect="1"/>
+          </p:cNvPicPr>
+          <p:nvPr/>
+        </p:nvPicPr>
+        <p:blipFill>
+          <a:blip r:embed="rId3"/>
+          <a:stretch>
+            <a:fillRect/>
+          </a:stretch>
+        </p:blipFill>
+        <p:spPr>
+          <a:xfrm>
+            <a:off x="203200" y="1941820"/>
+            <a:ext cx="10546080" cy="2285528"/>
+          </a:xfrm>
+          <a:prstGeom prst="rect">
+            <a:avLst/>
+          </a:prstGeom>
+        </p:spPr>
+      </p:pic>
+      <p:sp>
+        <p:nvSpPr>
+          <p:cNvPr id="2" name="Titre 1">
+            <a:extLst>
+              <a:ext uri="{FF2B5EF4-FFF2-40B4-BE49-F238E27FC236}">
+                <a16:creationId xmlns:a16="http://schemas.microsoft.com/office/drawing/2014/main" id="{9C48757C-DFA7-86B0-71F1-08D7F2AB8BCD}"/>
+              </a:ext>
+            </a:extLst>
+          </p:cNvPr>
+          <p:cNvSpPr>
+            <a:spLocks noGrp="1"/>
+          </p:cNvSpPr>
+          <p:nvPr>
+            <p:ph type="title"/>
+          </p:nvPr>
+        </p:nvSpPr>
+        <p:spPr/>
+        <p:txBody>
+          <a:bodyPr/>
+          <a:lstStyle/>
+          <a:p>
+            <a:r>
+              <a:rPr lang="fr-FR" dirty="0"/>
+              <a:t>5. Mise en place </a:t>
+            </a:r>
+            <a:r>
+              <a:rPr lang="fr-FR" dirty="0" err="1"/>
+              <a:t>Airbyte</a:t>
+            </a:r>
+            <a:br>
+              <a:rPr lang="fr-FR" dirty="0"/>
+            </a:br>
+            <a:endParaRPr lang="fr-FR" dirty="0"/>
+          </a:p>
+        </p:txBody>
+      </p:sp>
+      <p:sp>
+        <p:nvSpPr>
+          <p:cNvPr id="4" name="Espace réservé de la date 3">
+            <a:extLst>
+              <a:ext uri="{FF2B5EF4-FFF2-40B4-BE49-F238E27FC236}">
+                <a16:creationId xmlns:a16="http://schemas.microsoft.com/office/drawing/2014/main" id="{46B37FF4-2081-CBFF-0353-490EB5BFBC6C}"/>
+              </a:ext>
+            </a:extLst>
+          </p:cNvPr>
+          <p:cNvSpPr>
+            <a:spLocks noGrp="1"/>
+          </p:cNvSpPr>
+          <p:nvPr>
+            <p:ph type="dt" sz="half" idx="10"/>
+          </p:nvPr>
+        </p:nvSpPr>
+        <p:spPr/>
+        <p:txBody>
+          <a:bodyPr/>
+          <a:lstStyle/>
+          <a:p>
+            <a:pPr rtl="0"/>
+            <a:fld id="{22897033-9A55-4DAC-991D-1FF1921C78B7}" type="datetime1">
+              <a:rPr lang="fr-FR" smtClean="0"/>
+              <a:t>18/08/2026</a:t>
+            </a:fld>
+            <a:endParaRPr lang="en-US" dirty="0"/>
+          </a:p>
+        </p:txBody>
+      </p:sp>
+      <p:sp>
+        <p:nvSpPr>
+          <p:cNvPr id="5" name="Espace réservé du contenu 2">
+            <a:extLst>
+              <a:ext uri="{FF2B5EF4-FFF2-40B4-BE49-F238E27FC236}">
+                <a16:creationId xmlns:a16="http://schemas.microsoft.com/office/drawing/2014/main" id="{F71619B6-FEEF-F77C-0DE8-FB87A5502D1A}"/>
+              </a:ext>
+            </a:extLst>
+          </p:cNvPr>
+          <p:cNvSpPr>
+            <a:spLocks noGrp="1"/>
+          </p:cNvSpPr>
+          <p:nvPr>
+            <p:ph idx="1"/>
+          </p:nvPr>
+        </p:nvSpPr>
+        <p:spPr>
+          <a:xfrm>
+            <a:off x="581192" y="2020366"/>
+            <a:ext cx="11029615" cy="3634486"/>
+          </a:xfrm>
+        </p:spPr>
+        <p:txBody>
+          <a:bodyPr/>
+          <a:lstStyle/>
+          <a:p>
+            <a:endParaRPr lang="fr-FR" dirty="0"/>
+          </a:p>
+          <a:p>
+            <a:endParaRPr lang="fr-FR" dirty="0"/>
+          </a:p>
+          <a:p>
+            <a:endParaRPr lang="fr-FR" dirty="0"/>
+          </a:p>
+          <a:p>
+            <a:endParaRPr lang="fr-FR" dirty="0"/>
+          </a:p>
+          <a:p>
+            <a:endParaRPr lang="fr-FR" dirty="0"/>
+          </a:p>
+        </p:txBody>
+      </p:sp>
+      <p:sp>
+        <p:nvSpPr>
+          <p:cNvPr id="35" name="Heptagone 34">
+            <a:extLst>
+              <a:ext uri="{FF2B5EF4-FFF2-40B4-BE49-F238E27FC236}">
+                <a16:creationId xmlns:a16="http://schemas.microsoft.com/office/drawing/2014/main" id="{707D04E6-5A38-9D62-E93E-A704FABB20B9}"/>
+              </a:ext>
+            </a:extLst>
+          </p:cNvPr>
+          <p:cNvSpPr/>
+          <p:nvPr/>
+        </p:nvSpPr>
+        <p:spPr>
+          <a:xfrm>
+            <a:off x="10670073" y="2353826"/>
+            <a:ext cx="457199" cy="457292"/>
+          </a:xfrm>
+          <a:prstGeom prst="heptagon">
+            <a:avLst/>
+          </a:prstGeom>
+          <a:solidFill>
+            <a:srgbClr val="FF0000"/>
+          </a:solidFill>
+          <a:ln>
+            <a:noFill/>
+          </a:ln>
+        </p:spPr>
+        <p:style>
+          <a:lnRef idx="2">
+            <a:schemeClr val="accent1">
+              <a:shade val="15000"/>
+            </a:schemeClr>
+          </a:lnRef>
+          <a:fillRef idx="1">
+            <a:schemeClr val="accent1"/>
+          </a:fillRef>
+          <a:effectRef idx="0">
+            <a:schemeClr val="accent1"/>
+          </a:effectRef>
+          <a:fontRef idx="minor">
+            <a:schemeClr val="lt1"/>
+          </a:fontRef>
+        </p:style>
+        <p:txBody>
+          <a:bodyPr rtlCol="0" anchor="ctr"/>
+          <a:lstStyle/>
+          <a:p>
+            <a:pPr algn="ctr"/>
+            <a:r>
+              <a:rPr lang="fr-FR" sz="1200" dirty="0"/>
+              <a:t>12</a:t>
+            </a:r>
+          </a:p>
+        </p:txBody>
+      </p:sp>
+      <p:sp>
+        <p:nvSpPr>
+          <p:cNvPr id="12" name="ZoneTexte 11">
+            <a:extLst>
+              <a:ext uri="{FF2B5EF4-FFF2-40B4-BE49-F238E27FC236}">
+                <a16:creationId xmlns:a16="http://schemas.microsoft.com/office/drawing/2014/main" id="{99C273F5-8725-CED2-CC42-9D4C732AA23E}"/>
+              </a:ext>
+            </a:extLst>
+          </p:cNvPr>
+          <p:cNvSpPr txBox="1"/>
+          <p:nvPr/>
+        </p:nvSpPr>
+        <p:spPr>
+          <a:xfrm>
+            <a:off x="9717278" y="1213378"/>
+            <a:ext cx="1893529" cy="954107"/>
+          </a:xfrm>
+          <a:prstGeom prst="rect">
+            <a:avLst/>
+          </a:prstGeom>
+          <a:solidFill>
+            <a:schemeClr val="bg1"/>
+          </a:solidFill>
+          <a:ln w="19050">
+            <a:solidFill>
+              <a:srgbClr val="FF0000"/>
+            </a:solidFill>
+          </a:ln>
+        </p:spPr>
+        <p:txBody>
+          <a:bodyPr wrap="square" rtlCol="0">
+            <a:spAutoFit/>
+          </a:bodyPr>
+          <a:lstStyle/>
+          <a:p>
+            <a:r>
+              <a:rPr lang="fr-FR" sz="1400" dirty="0"/>
+              <a:t>Lancer la synchronisation pour </a:t>
+            </a:r>
+            <a:r>
+              <a:rPr lang="fr-FR" sz="1400" dirty="0" err="1"/>
+              <a:t>transferer</a:t>
+            </a:r>
+            <a:r>
+              <a:rPr lang="fr-FR" sz="1400" dirty="0"/>
+              <a:t> les données dans la </a:t>
+            </a:r>
+            <a:r>
+              <a:rPr lang="fr-FR" sz="1400" dirty="0" err="1"/>
+              <a:t>Database</a:t>
+            </a:r>
+            <a:endParaRPr lang="fr-FR" sz="1400" dirty="0"/>
+          </a:p>
+        </p:txBody>
+      </p:sp>
+      <p:cxnSp>
+        <p:nvCxnSpPr>
+          <p:cNvPr id="11" name="Connecteur droit avec flèche 10">
+            <a:extLst>
+              <a:ext uri="{FF2B5EF4-FFF2-40B4-BE49-F238E27FC236}">
+                <a16:creationId xmlns:a16="http://schemas.microsoft.com/office/drawing/2014/main" id="{B56F32C2-D77B-00E2-3079-EE6C98635967}"/>
+              </a:ext>
+            </a:extLst>
+          </p:cNvPr>
+          <p:cNvCxnSpPr>
+            <a:cxnSpLocks/>
+            <a:stCxn id="12" idx="2"/>
+          </p:cNvCxnSpPr>
+          <p:nvPr/>
+        </p:nvCxnSpPr>
+        <p:spPr>
+          <a:xfrm flipH="1">
+            <a:off x="9865360" y="2167485"/>
+            <a:ext cx="798683" cy="492453"/>
+          </a:xfrm>
+          <a:prstGeom prst="straightConnector1">
+            <a:avLst/>
+          </a:prstGeom>
+          <a:ln w="19050">
+            <a:solidFill>
+              <a:srgbClr val="FF0000"/>
+            </a:solidFill>
+            <a:tailEnd type="triangle"/>
+          </a:ln>
+        </p:spPr>
+        <p:style>
+          <a:lnRef idx="1">
+            <a:schemeClr val="accent1"/>
+          </a:lnRef>
+          <a:fillRef idx="0">
+            <a:schemeClr val="accent1"/>
+          </a:fillRef>
+          <a:effectRef idx="0">
+            <a:schemeClr val="accent1"/>
+          </a:effectRef>
+          <a:fontRef idx="minor">
+            <a:schemeClr val="tx1"/>
+          </a:fontRef>
+        </p:style>
+      </p:cxnSp>
+      <p:sp>
+        <p:nvSpPr>
+          <p:cNvPr id="20" name="ZoneTexte 19">
+            <a:extLst>
+              <a:ext uri="{FF2B5EF4-FFF2-40B4-BE49-F238E27FC236}">
+                <a16:creationId xmlns:a16="http://schemas.microsoft.com/office/drawing/2014/main" id="{7DE3F633-EC9E-2ADE-068C-D7E2CBDAB820}"/>
+              </a:ext>
+            </a:extLst>
+          </p:cNvPr>
+          <p:cNvSpPr txBox="1"/>
+          <p:nvPr/>
+        </p:nvSpPr>
+        <p:spPr>
+          <a:xfrm>
+            <a:off x="3363070" y="5048485"/>
+            <a:ext cx="1625490" cy="523220"/>
+          </a:xfrm>
+          <a:prstGeom prst="rect">
+            <a:avLst/>
+          </a:prstGeom>
+          <a:solidFill>
+            <a:schemeClr val="bg1"/>
+          </a:solidFill>
+          <a:ln w="19050">
+            <a:solidFill>
+              <a:srgbClr val="FF0000"/>
+            </a:solidFill>
+          </a:ln>
+        </p:spPr>
+        <p:txBody>
+          <a:bodyPr wrap="square" rtlCol="0">
+            <a:spAutoFit/>
+          </a:bodyPr>
+          <a:lstStyle/>
+          <a:p>
+            <a:r>
+              <a:rPr lang="fr-FR" sz="1400" dirty="0"/>
+              <a:t>Prend quelques minutes</a:t>
+            </a:r>
+          </a:p>
+        </p:txBody>
+      </p:sp>
+      <p:cxnSp>
+        <p:nvCxnSpPr>
+          <p:cNvPr id="21" name="Connecteur droit avec flèche 20">
+            <a:extLst>
+              <a:ext uri="{FF2B5EF4-FFF2-40B4-BE49-F238E27FC236}">
+                <a16:creationId xmlns:a16="http://schemas.microsoft.com/office/drawing/2014/main" id="{41F17FB7-5672-9FC5-4484-BE9F06E10D6E}"/>
+              </a:ext>
+            </a:extLst>
+          </p:cNvPr>
+          <p:cNvCxnSpPr>
+            <a:cxnSpLocks/>
+            <a:stCxn id="20" idx="1"/>
+          </p:cNvCxnSpPr>
+          <p:nvPr/>
+        </p:nvCxnSpPr>
+        <p:spPr>
+          <a:xfrm flipH="1">
+            <a:off x="1617623" y="5310095"/>
+            <a:ext cx="1745447" cy="755425"/>
+          </a:xfrm>
+          <a:prstGeom prst="straightConnector1">
+            <a:avLst/>
+          </a:prstGeom>
+          <a:ln w="19050">
+            <a:solidFill>
+              <a:srgbClr val="FF0000"/>
+            </a:solidFill>
+            <a:tailEnd type="triangle"/>
+          </a:ln>
+        </p:spPr>
+        <p:style>
+          <a:lnRef idx="1">
+            <a:schemeClr val="accent1"/>
+          </a:lnRef>
+          <a:fillRef idx="0">
+            <a:schemeClr val="accent1"/>
+          </a:fillRef>
+          <a:effectRef idx="0">
+            <a:schemeClr val="accent1"/>
+          </a:effectRef>
+          <a:fontRef idx="minor">
+            <a:schemeClr val="tx1"/>
+          </a:fontRef>
+        </p:style>
+      </p:cxnSp>
+      <p:sp>
+        <p:nvSpPr>
+          <p:cNvPr id="13" name="Heptagone 12">
+            <a:extLst>
+              <a:ext uri="{FF2B5EF4-FFF2-40B4-BE49-F238E27FC236}">
+                <a16:creationId xmlns:a16="http://schemas.microsoft.com/office/drawing/2014/main" id="{EAFAD523-B47A-652B-AA03-32D6D09BB538}"/>
+              </a:ext>
+            </a:extLst>
+          </p:cNvPr>
+          <p:cNvSpPr/>
+          <p:nvPr/>
+        </p:nvSpPr>
+        <p:spPr>
+          <a:xfrm>
+            <a:off x="3134470" y="5706451"/>
+            <a:ext cx="457199" cy="457292"/>
+          </a:xfrm>
+          <a:prstGeom prst="heptagon">
+            <a:avLst/>
+          </a:prstGeom>
+          <a:solidFill>
+            <a:srgbClr val="FF0000"/>
+          </a:solidFill>
+          <a:ln>
+            <a:noFill/>
+          </a:ln>
+        </p:spPr>
+        <p:style>
+          <a:lnRef idx="2">
+            <a:schemeClr val="accent1">
+              <a:shade val="15000"/>
+            </a:schemeClr>
+          </a:lnRef>
+          <a:fillRef idx="1">
+            <a:schemeClr val="accent1"/>
+          </a:fillRef>
+          <a:effectRef idx="0">
+            <a:schemeClr val="accent1"/>
+          </a:effectRef>
+          <a:fontRef idx="minor">
+            <a:schemeClr val="lt1"/>
+          </a:fontRef>
+        </p:style>
+        <p:txBody>
+          <a:bodyPr rtlCol="0" anchor="ctr"/>
+          <a:lstStyle/>
+          <a:p>
+            <a:pPr algn="ctr"/>
+            <a:r>
+              <a:rPr lang="fr-FR" sz="1200" dirty="0"/>
+              <a:t>13</a:t>
+            </a:r>
+          </a:p>
+        </p:txBody>
+      </p:sp>
+      <p:pic>
+        <p:nvPicPr>
+          <p:cNvPr id="19" name="Image 18">
+            <a:extLst>
+              <a:ext uri="{FF2B5EF4-FFF2-40B4-BE49-F238E27FC236}">
+                <a16:creationId xmlns:a16="http://schemas.microsoft.com/office/drawing/2014/main" id="{D6BFA8F4-377F-764C-7ADC-0470E2A59EC1}"/>
+              </a:ext>
+            </a:extLst>
+          </p:cNvPr>
+          <p:cNvPicPr>
+            <a:picLocks noChangeAspect="1"/>
+          </p:cNvPicPr>
+          <p:nvPr/>
+        </p:nvPicPr>
+        <p:blipFill>
+          <a:blip r:embed="rId4"/>
+          <a:srcRect l="10969"/>
+          <a:stretch>
+            <a:fillRect/>
+          </a:stretch>
+        </p:blipFill>
+        <p:spPr>
+          <a:xfrm>
+            <a:off x="5257599" y="3419590"/>
+            <a:ext cx="6731200" cy="1874495"/>
+          </a:xfrm>
+          <a:prstGeom prst="rect">
+            <a:avLst/>
+          </a:prstGeom>
+          <a:ln>
+            <a:solidFill>
+              <a:srgbClr val="FF0000"/>
+            </a:solidFill>
+          </a:ln>
+        </p:spPr>
+      </p:pic>
+      <p:sp>
+        <p:nvSpPr>
+          <p:cNvPr id="22" name="ZoneTexte 21">
+            <a:extLst>
+              <a:ext uri="{FF2B5EF4-FFF2-40B4-BE49-F238E27FC236}">
+                <a16:creationId xmlns:a16="http://schemas.microsoft.com/office/drawing/2014/main" id="{671B2A34-95E4-3DF4-D269-19D830851F9F}"/>
+              </a:ext>
+            </a:extLst>
+          </p:cNvPr>
+          <p:cNvSpPr txBox="1"/>
+          <p:nvPr/>
+        </p:nvSpPr>
+        <p:spPr>
+          <a:xfrm>
+            <a:off x="7178149" y="3037900"/>
+            <a:ext cx="1625490" cy="1169551"/>
+          </a:xfrm>
+          <a:prstGeom prst="rect">
+            <a:avLst/>
+          </a:prstGeom>
+          <a:solidFill>
+            <a:schemeClr val="bg1"/>
+          </a:solidFill>
+          <a:ln w="19050">
+            <a:solidFill>
+              <a:srgbClr val="FF0000"/>
+            </a:solidFill>
+          </a:ln>
+        </p:spPr>
+        <p:txBody>
+          <a:bodyPr wrap="square" rtlCol="0">
+            <a:spAutoFit/>
+          </a:bodyPr>
+          <a:lstStyle/>
+          <a:p>
+            <a:r>
+              <a:rPr lang="fr-FR" sz="1400" dirty="0"/>
+              <a:t>Synchronisation réussie. </a:t>
+            </a:r>
+          </a:p>
+          <a:p>
+            <a:r>
+              <a:rPr lang="fr-FR" sz="1400" dirty="0"/>
+              <a:t>Nombre de lignes chargées dans PostgreSQL</a:t>
+            </a:r>
+          </a:p>
+        </p:txBody>
+      </p:sp>
+      <p:cxnSp>
+        <p:nvCxnSpPr>
+          <p:cNvPr id="23" name="Connecteur droit avec flèche 22">
+            <a:extLst>
+              <a:ext uri="{FF2B5EF4-FFF2-40B4-BE49-F238E27FC236}">
+                <a16:creationId xmlns:a16="http://schemas.microsoft.com/office/drawing/2014/main" id="{57CC711C-F1E3-A660-9A43-BB4070672120}"/>
+              </a:ext>
+            </a:extLst>
+          </p:cNvPr>
+          <p:cNvCxnSpPr>
+            <a:cxnSpLocks/>
+            <a:stCxn id="22" idx="1"/>
+          </p:cNvCxnSpPr>
+          <p:nvPr/>
+        </p:nvCxnSpPr>
+        <p:spPr>
+          <a:xfrm flipH="1">
+            <a:off x="5432702" y="3622676"/>
+            <a:ext cx="1745447" cy="432259"/>
+          </a:xfrm>
+          <a:prstGeom prst="straightConnector1">
+            <a:avLst/>
+          </a:prstGeom>
+          <a:ln w="19050">
+            <a:solidFill>
+              <a:srgbClr val="FF0000"/>
+            </a:solidFill>
+            <a:tailEnd type="triangle"/>
+          </a:ln>
+        </p:spPr>
+        <p:style>
+          <a:lnRef idx="1">
+            <a:schemeClr val="accent1"/>
+          </a:lnRef>
+          <a:fillRef idx="0">
+            <a:schemeClr val="accent1"/>
+          </a:fillRef>
+          <a:effectRef idx="0">
+            <a:schemeClr val="accent1"/>
+          </a:effectRef>
+          <a:fontRef idx="minor">
+            <a:schemeClr val="tx1"/>
+          </a:fontRef>
+        </p:style>
+      </p:cxnSp>
+      <p:cxnSp>
+        <p:nvCxnSpPr>
+          <p:cNvPr id="24" name="Connecteur droit avec flèche 23">
+            <a:extLst>
+              <a:ext uri="{FF2B5EF4-FFF2-40B4-BE49-F238E27FC236}">
+                <a16:creationId xmlns:a16="http://schemas.microsoft.com/office/drawing/2014/main" id="{D4BA0290-3B42-5101-B714-CCC5501DA260}"/>
+              </a:ext>
+            </a:extLst>
+          </p:cNvPr>
+          <p:cNvCxnSpPr>
+            <a:cxnSpLocks/>
+            <a:stCxn id="22" idx="3"/>
+          </p:cNvCxnSpPr>
+          <p:nvPr/>
+        </p:nvCxnSpPr>
+        <p:spPr>
+          <a:xfrm>
+            <a:off x="8803639" y="3622676"/>
+            <a:ext cx="543561" cy="1364324"/>
+          </a:xfrm>
+          <a:prstGeom prst="straightConnector1">
+            <a:avLst/>
+          </a:prstGeom>
+          <a:ln w="19050">
+            <a:solidFill>
+              <a:srgbClr val="FF0000"/>
+            </a:solidFill>
+            <a:tailEnd type="triangle"/>
+          </a:ln>
+        </p:spPr>
+        <p:style>
+          <a:lnRef idx="1">
+            <a:schemeClr val="accent1"/>
+          </a:lnRef>
+          <a:fillRef idx="0">
+            <a:schemeClr val="accent1"/>
+          </a:fillRef>
+          <a:effectRef idx="0">
+            <a:schemeClr val="accent1"/>
+          </a:effectRef>
+          <a:fontRef idx="minor">
+            <a:schemeClr val="tx1"/>
+          </a:fontRef>
+        </p:style>
+      </p:cxnSp>
+      <p:sp>
+        <p:nvSpPr>
+          <p:cNvPr id="27" name="Heptagone 26">
+            <a:extLst>
+              <a:ext uri="{FF2B5EF4-FFF2-40B4-BE49-F238E27FC236}">
+                <a16:creationId xmlns:a16="http://schemas.microsoft.com/office/drawing/2014/main" id="{084E0B28-8F49-0CAF-6675-BEA698A85E8D}"/>
+              </a:ext>
+            </a:extLst>
+          </p:cNvPr>
+          <p:cNvSpPr/>
+          <p:nvPr/>
+        </p:nvSpPr>
+        <p:spPr>
+          <a:xfrm>
+            <a:off x="7873074" y="4293087"/>
+            <a:ext cx="457199" cy="457292"/>
+          </a:xfrm>
+          <a:prstGeom prst="heptagon">
+            <a:avLst/>
+          </a:prstGeom>
+          <a:solidFill>
+            <a:srgbClr val="FF0000"/>
+          </a:solidFill>
+          <a:ln>
+            <a:noFill/>
+          </a:ln>
+        </p:spPr>
+        <p:style>
+          <a:lnRef idx="2">
+            <a:schemeClr val="accent1">
+              <a:shade val="15000"/>
+            </a:schemeClr>
+          </a:lnRef>
+          <a:fillRef idx="1">
+            <a:schemeClr val="accent1"/>
+          </a:fillRef>
+          <a:effectRef idx="0">
+            <a:schemeClr val="accent1"/>
+          </a:effectRef>
+          <a:fontRef idx="minor">
+            <a:schemeClr val="lt1"/>
+          </a:fontRef>
+        </p:style>
+        <p:txBody>
+          <a:bodyPr rtlCol="0" anchor="ctr"/>
+          <a:lstStyle/>
+          <a:p>
+            <a:pPr algn="ctr"/>
+            <a:r>
+              <a:rPr lang="fr-FR" sz="1200" dirty="0"/>
+              <a:t>14</a:t>
+            </a:r>
+          </a:p>
+        </p:txBody>
+      </p:sp>
+    </p:spTree>
+    <p:extLst>
+      <p:ext uri="{BB962C8B-B14F-4D97-AF65-F5344CB8AC3E}">
+        <p14:creationId xmlns:p14="http://schemas.microsoft.com/office/powerpoint/2010/main" val="1876429065"/>
+      </p:ext>
+    </p:extLst>
+  </p:cSld>
+  <p:clrMapOvr>
+    <a:masterClrMapping/>
+  </p:clrMapOvr>
+</p:sld>
+</file>
+
+<file path=ppt/slides/slide13.xml><?xml version="1.0" encoding="utf-8"?>
+<p:sld xmlns:a="http://schemas.openxmlformats.org/drawingml/2006/main" xmlns:r="http://schemas.openxmlformats.org/officeDocument/2006/relationships" xmlns:p="http://schemas.openxmlformats.org/presentationml/2006/main">
+  <p:cSld>
+    <p:spTree>
+      <p:nvGrpSpPr>
+        <p:cNvPr id="1" name=""/>
+        <p:cNvGrpSpPr/>
+        <p:nvPr/>
+      </p:nvGrpSpPr>
+      <p:grpSpPr>
+        <a:xfrm>
+          <a:off x="0" y="0"/>
+          <a:ext cx="0" cy="0"/>
+          <a:chOff x="0" y="0"/>
+          <a:chExt cx="0" cy="0"/>
+        </a:xfrm>
+      </p:grpSpPr>
+      <p:sp>
+        <p:nvSpPr>
+          <p:cNvPr id="2" name="Titre 1">
+            <a:extLst>
+              <a:ext uri="{FF2B5EF4-FFF2-40B4-BE49-F238E27FC236}">
+                <a16:creationId xmlns:a16="http://schemas.microsoft.com/office/drawing/2014/main" id="{CD4458A9-6CDC-6BF3-250C-B6E6F2946DB9}"/>
+              </a:ext>
+            </a:extLst>
+          </p:cNvPr>
+          <p:cNvSpPr>
+            <a:spLocks noGrp="1"/>
+          </p:cNvSpPr>
+          <p:nvPr>
+            <p:ph type="title"/>
+          </p:nvPr>
+        </p:nvSpPr>
+        <p:spPr/>
+        <p:txBody>
+          <a:bodyPr/>
+          <a:lstStyle/>
+          <a:p>
+            <a:r>
+              <a:rPr lang="fr-FR" dirty="0"/>
+              <a:t>6. Mise en place DBT</a:t>
+            </a:r>
+            <a:br>
+              <a:rPr lang="fr-FR" dirty="0"/>
+            </a:br>
+            <a:endParaRPr lang="fr-FR" dirty="0"/>
+          </a:p>
+        </p:txBody>
+      </p:sp>
+      <p:sp>
+        <p:nvSpPr>
+          <p:cNvPr id="3" name="Espace réservé du contenu 2">
+            <a:extLst>
+              <a:ext uri="{FF2B5EF4-FFF2-40B4-BE49-F238E27FC236}">
+                <a16:creationId xmlns:a16="http://schemas.microsoft.com/office/drawing/2014/main" id="{2CE1B120-2F32-09E5-8E07-86A7DCFCA271}"/>
+              </a:ext>
+            </a:extLst>
+          </p:cNvPr>
+          <p:cNvSpPr>
+            <a:spLocks noGrp="1"/>
+          </p:cNvSpPr>
+          <p:nvPr>
+            <p:ph idx="1"/>
+          </p:nvPr>
+        </p:nvSpPr>
+        <p:spPr/>
+        <p:txBody>
+          <a:bodyPr/>
+          <a:lstStyle/>
+          <a:p>
+            <a:r>
+              <a:rPr lang="fr-FR" dirty="0"/>
+              <a:t>Installation de DBT avec la commande </a:t>
+            </a:r>
+            <a:r>
+              <a:rPr lang="fr-FR" b="1" i="1" dirty="0" err="1"/>
+              <a:t>pip</a:t>
+            </a:r>
+            <a:r>
+              <a:rPr lang="fr-FR" b="1" i="1" dirty="0"/>
+              <a:t> </a:t>
+            </a:r>
+            <a:r>
+              <a:rPr lang="fr-FR" b="1" i="1" dirty="0" err="1"/>
+              <a:t>install</a:t>
+            </a:r>
+            <a:r>
+              <a:rPr lang="fr-FR" b="1" i="1" dirty="0"/>
+              <a:t> </a:t>
+            </a:r>
+            <a:r>
+              <a:rPr lang="fr-FR" b="1" i="1" dirty="0" err="1"/>
+              <a:t>dbt-core</a:t>
+            </a:r>
+            <a:endParaRPr lang="fr-FR" b="1" i="1" dirty="0"/>
+          </a:p>
+          <a:p>
+            <a:r>
+              <a:rPr lang="fr-FR" dirty="0"/>
+              <a:t>Installation du package pour utiliser PostgreSQL avec la commande </a:t>
+            </a:r>
+            <a:r>
+              <a:rPr lang="fr-FR" b="1" i="1" dirty="0" err="1"/>
+              <a:t>pip</a:t>
+            </a:r>
+            <a:r>
+              <a:rPr lang="fr-FR" b="1" i="1" dirty="0"/>
+              <a:t> </a:t>
+            </a:r>
+            <a:r>
+              <a:rPr lang="fr-FR" b="1" i="1" dirty="0" err="1"/>
+              <a:t>install</a:t>
+            </a:r>
+            <a:r>
+              <a:rPr lang="fr-FR" b="1" i="1" dirty="0"/>
+              <a:t> </a:t>
+            </a:r>
+            <a:r>
+              <a:rPr lang="fr-FR" b="1" i="1" dirty="0" err="1"/>
+              <a:t>dbt-postgres</a:t>
+            </a:r>
+            <a:endParaRPr lang="fr-FR" b="1" i="1" dirty="0"/>
+          </a:p>
+          <a:p>
+            <a:r>
+              <a:rPr lang="fr-FR" dirty="0"/>
+              <a:t>Initialisation du projet </a:t>
+            </a:r>
+            <a:r>
+              <a:rPr lang="fr-FR" dirty="0" err="1"/>
+              <a:t>dbt</a:t>
+            </a:r>
+            <a:r>
+              <a:rPr lang="fr-FR" dirty="0"/>
+              <a:t> avec la commande </a:t>
+            </a:r>
+            <a:r>
+              <a:rPr lang="fr-FR" b="1" i="1" dirty="0" err="1"/>
+              <a:t>dbt</a:t>
+            </a:r>
+            <a:r>
+              <a:rPr lang="fr-FR" b="1" i="1" dirty="0"/>
+              <a:t> init &lt;nom-du-projet&gt;</a:t>
+            </a:r>
+          </a:p>
+          <a:p>
+            <a:pPr lvl="1"/>
+            <a:r>
+              <a:rPr lang="fr-FR" dirty="0"/>
+              <a:t>Un dossier au nom du projet avec les éléments suivants est créé dans le répertoire où l’initialisation a été lancée:</a:t>
+            </a:r>
+          </a:p>
+          <a:p>
+            <a:pPr lvl="1"/>
+            <a:endParaRPr lang="fr-FR" dirty="0"/>
+          </a:p>
+          <a:p>
+            <a:pPr lvl="1"/>
+            <a:endParaRPr lang="fr-FR" dirty="0"/>
+          </a:p>
+          <a:p>
+            <a:pPr lvl="1"/>
+            <a:endParaRPr lang="fr-FR" dirty="0"/>
+          </a:p>
+          <a:p>
+            <a:pPr lvl="1"/>
+            <a:endParaRPr lang="fr-FR" dirty="0"/>
+          </a:p>
+          <a:p>
+            <a:pPr lvl="1"/>
+            <a:endParaRPr lang="fr-FR" dirty="0"/>
+          </a:p>
+          <a:p>
+            <a:pPr lvl="1"/>
+            <a:endParaRPr lang="fr-FR" dirty="0"/>
+          </a:p>
+          <a:p>
+            <a:pPr lvl="1"/>
+            <a:endParaRPr lang="fr-FR" dirty="0"/>
+          </a:p>
+          <a:p>
+            <a:pPr lvl="1"/>
+            <a:endParaRPr lang="fr-FR" dirty="0"/>
+          </a:p>
+          <a:p>
+            <a:pPr lvl="1"/>
+            <a:endParaRPr lang="fr-FR" dirty="0"/>
+          </a:p>
+        </p:txBody>
+      </p:sp>
+      <p:sp>
+        <p:nvSpPr>
+          <p:cNvPr id="4" name="Espace réservé de la date 3">
+            <a:extLst>
+              <a:ext uri="{FF2B5EF4-FFF2-40B4-BE49-F238E27FC236}">
+                <a16:creationId xmlns:a16="http://schemas.microsoft.com/office/drawing/2014/main" id="{24295062-DAC1-8A8F-28FC-FA10BE7B3705}"/>
+              </a:ext>
+            </a:extLst>
+          </p:cNvPr>
+          <p:cNvSpPr>
+            <a:spLocks noGrp="1"/>
+          </p:cNvSpPr>
+          <p:nvPr>
+            <p:ph type="dt" sz="half" idx="10"/>
+          </p:nvPr>
+        </p:nvSpPr>
+        <p:spPr/>
+        <p:txBody>
+          <a:bodyPr/>
+          <a:lstStyle/>
+          <a:p>
+            <a:pPr rtl="0"/>
+            <a:fld id="{22897033-9A55-4DAC-991D-1FF1921C78B7}" type="datetime1">
+              <a:rPr lang="fr-FR" smtClean="0"/>
+              <a:t>18/08/2026</a:t>
+            </a:fld>
+            <a:endParaRPr lang="en-US" dirty="0"/>
+          </a:p>
+        </p:txBody>
+      </p:sp>
+      <p:pic>
+        <p:nvPicPr>
+          <p:cNvPr id="6" name="Image 5">
+            <a:extLst>
+              <a:ext uri="{FF2B5EF4-FFF2-40B4-BE49-F238E27FC236}">
+                <a16:creationId xmlns:a16="http://schemas.microsoft.com/office/drawing/2014/main" id="{BB1E1E22-0992-2948-AD72-8B9013231058}"/>
+              </a:ext>
+            </a:extLst>
+          </p:cNvPr>
+          <p:cNvPicPr>
+            <a:picLocks noChangeAspect="1"/>
+          </p:cNvPicPr>
+          <p:nvPr/>
+        </p:nvPicPr>
+        <p:blipFill>
+          <a:blip r:embed="rId2"/>
+          <a:stretch>
+            <a:fillRect/>
+          </a:stretch>
+        </p:blipFill>
+        <p:spPr>
+          <a:xfrm>
+            <a:off x="1855908" y="3586480"/>
+            <a:ext cx="6004797" cy="3202559"/>
+          </a:xfrm>
+          <a:prstGeom prst="rect">
+            <a:avLst/>
+          </a:prstGeom>
+        </p:spPr>
+      </p:pic>
+    </p:spTree>
+    <p:extLst>
+      <p:ext uri="{BB962C8B-B14F-4D97-AF65-F5344CB8AC3E}">
+        <p14:creationId xmlns:p14="http://schemas.microsoft.com/office/powerpoint/2010/main" val="1468749072"/>
+      </p:ext>
+    </p:extLst>
+  </p:cSld>
+  <p:clrMapOvr>
+    <a:masterClrMapping/>
+  </p:clrMapOvr>
+</p:sld>
+</file>
+
+<file path=ppt/slides/slide14.xml><?xml version="1.0" encoding="utf-8"?>
+<p:sld xmlns:a="http://schemas.openxmlformats.org/drawingml/2006/main" xmlns:r="http://schemas.openxmlformats.org/officeDocument/2006/relationships" xmlns:p="http://schemas.openxmlformats.org/presentationml/2006/main">
+  <p:cSld>
+    <p:spTree>
+      <p:nvGrpSpPr>
+        <p:cNvPr id="1" name="">
+          <a:extLst>
+            <a:ext uri="{FF2B5EF4-FFF2-40B4-BE49-F238E27FC236}">
+              <a16:creationId xmlns:a16="http://schemas.microsoft.com/office/drawing/2014/main" id="{CB68F42E-A82A-9B50-24C8-E56A7D8D6E77}"/>
+            </a:ext>
+          </a:extLst>
+        </p:cNvPr>
+        <p:cNvGrpSpPr/>
+        <p:nvPr/>
+      </p:nvGrpSpPr>
+      <p:grpSpPr>
+        <a:xfrm>
+          <a:off x="0" y="0"/>
+          <a:ext cx="0" cy="0"/>
+          <a:chOff x="0" y="0"/>
+          <a:chExt cx="0" cy="0"/>
+        </a:xfrm>
+      </p:grpSpPr>
+      <p:sp>
+        <p:nvSpPr>
+          <p:cNvPr id="2" name="Titre 1">
+            <a:extLst>
+              <a:ext uri="{FF2B5EF4-FFF2-40B4-BE49-F238E27FC236}">
+                <a16:creationId xmlns:a16="http://schemas.microsoft.com/office/drawing/2014/main" id="{D30C7745-3B7B-461E-3EB8-4536C7707766}"/>
+              </a:ext>
+            </a:extLst>
+          </p:cNvPr>
+          <p:cNvSpPr>
+            <a:spLocks noGrp="1"/>
+          </p:cNvSpPr>
+          <p:nvPr>
+            <p:ph type="title"/>
+          </p:nvPr>
+        </p:nvSpPr>
+        <p:spPr/>
+        <p:txBody>
+          <a:bodyPr/>
+          <a:lstStyle/>
+          <a:p>
+            <a:r>
+              <a:rPr lang="fr-FR" dirty="0"/>
+              <a:t>6. Mise en place DBT</a:t>
+            </a:r>
+            <a:br>
+              <a:rPr lang="fr-FR" dirty="0"/>
+            </a:br>
+            <a:endParaRPr lang="fr-FR" dirty="0"/>
+          </a:p>
+        </p:txBody>
+      </p:sp>
+      <p:sp>
+        <p:nvSpPr>
+          <p:cNvPr id="3" name="Espace réservé du contenu 2">
+            <a:extLst>
+              <a:ext uri="{FF2B5EF4-FFF2-40B4-BE49-F238E27FC236}">
+                <a16:creationId xmlns:a16="http://schemas.microsoft.com/office/drawing/2014/main" id="{C6D9EE54-A442-545E-7221-CBD5A2FA82CC}"/>
+              </a:ext>
+            </a:extLst>
+          </p:cNvPr>
+          <p:cNvSpPr>
+            <a:spLocks noGrp="1"/>
+          </p:cNvSpPr>
+          <p:nvPr>
+            <p:ph idx="1"/>
+          </p:nvPr>
+        </p:nvSpPr>
+        <p:spPr/>
+        <p:txBody>
+          <a:bodyPr/>
+          <a:lstStyle/>
+          <a:p>
+            <a:r>
+              <a:rPr lang="fr-FR" dirty="0"/>
+              <a:t>La commande </a:t>
+            </a:r>
+            <a:r>
+              <a:rPr lang="fr-FR" b="1" i="1" dirty="0" err="1"/>
+              <a:t>dbt</a:t>
+            </a:r>
+            <a:r>
+              <a:rPr lang="fr-FR" b="1" i="1" dirty="0"/>
+              <a:t> </a:t>
+            </a:r>
+            <a:r>
+              <a:rPr lang="fr-FR" b="1" i="1" dirty="0" err="1"/>
+              <a:t>debug</a:t>
+            </a:r>
+            <a:r>
+              <a:rPr lang="fr-FR" b="1" i="1" dirty="0"/>
+              <a:t> </a:t>
+            </a:r>
+            <a:r>
+              <a:rPr lang="fr-FR" dirty="0"/>
+              <a:t>lancée dans le répertoire  du projet DBT permet de vérifier la connexion avec la base de données</a:t>
+            </a:r>
+          </a:p>
+          <a:p>
+            <a:pPr lvl="1"/>
+            <a:endParaRPr lang="fr-FR" dirty="0"/>
+          </a:p>
+          <a:p>
+            <a:pPr lvl="1"/>
+            <a:endParaRPr lang="fr-FR" dirty="0"/>
+          </a:p>
+          <a:p>
+            <a:pPr lvl="1"/>
+            <a:endParaRPr lang="fr-FR" dirty="0"/>
+          </a:p>
+          <a:p>
+            <a:pPr lvl="1"/>
+            <a:endParaRPr lang="fr-FR" dirty="0"/>
+          </a:p>
+          <a:p>
+            <a:pPr marL="324000" lvl="1" indent="0">
+              <a:buNone/>
+            </a:pPr>
+            <a:endParaRPr lang="fr-FR" dirty="0"/>
+          </a:p>
+          <a:p>
+            <a:pPr marL="324000" lvl="1" indent="0">
+              <a:buNone/>
+            </a:pPr>
+            <a:endParaRPr lang="fr-FR" dirty="0"/>
+          </a:p>
+          <a:p>
+            <a:pPr marL="324000" lvl="1" indent="0">
+              <a:buNone/>
+            </a:pPr>
+            <a:endParaRPr lang="fr-FR" dirty="0"/>
+          </a:p>
+          <a:p>
+            <a:pPr marL="324000" lvl="1" indent="0">
+              <a:buNone/>
+            </a:pPr>
+            <a:endParaRPr lang="fr-FR" dirty="0"/>
+          </a:p>
+          <a:p>
+            <a:pPr marL="324000" lvl="1" indent="0">
+              <a:buNone/>
+            </a:pPr>
+            <a:endParaRPr lang="fr-FR" dirty="0"/>
+          </a:p>
+          <a:p>
+            <a:pPr lvl="1"/>
+            <a:endParaRPr lang="fr-FR" dirty="0"/>
+          </a:p>
+          <a:p>
+            <a:pPr lvl="1"/>
+            <a:endParaRPr lang="fr-FR" dirty="0"/>
+          </a:p>
+          <a:p>
+            <a:pPr lvl="1"/>
+            <a:endParaRPr lang="fr-FR" dirty="0"/>
+          </a:p>
+        </p:txBody>
+      </p:sp>
+      <p:sp>
+        <p:nvSpPr>
+          <p:cNvPr id="4" name="Espace réservé de la date 3">
+            <a:extLst>
+              <a:ext uri="{FF2B5EF4-FFF2-40B4-BE49-F238E27FC236}">
+                <a16:creationId xmlns:a16="http://schemas.microsoft.com/office/drawing/2014/main" id="{B19929C9-A6D9-231F-541C-BEFDF814533E}"/>
+              </a:ext>
+            </a:extLst>
+          </p:cNvPr>
+          <p:cNvSpPr>
+            <a:spLocks noGrp="1"/>
+          </p:cNvSpPr>
+          <p:nvPr>
+            <p:ph type="dt" sz="half" idx="10"/>
+          </p:nvPr>
+        </p:nvSpPr>
+        <p:spPr/>
+        <p:txBody>
+          <a:bodyPr/>
+          <a:lstStyle/>
+          <a:p>
+            <a:pPr rtl="0"/>
+            <a:fld id="{22897033-9A55-4DAC-991D-1FF1921C78B7}" type="datetime1">
+              <a:rPr lang="fr-FR" smtClean="0"/>
+              <a:t>19/08/2026</a:t>
+            </a:fld>
+            <a:endParaRPr lang="en-US" dirty="0"/>
+          </a:p>
+        </p:txBody>
+      </p:sp>
+      <p:pic>
+        <p:nvPicPr>
+          <p:cNvPr id="7" name="Image 6">
+            <a:extLst>
+              <a:ext uri="{FF2B5EF4-FFF2-40B4-BE49-F238E27FC236}">
+                <a16:creationId xmlns:a16="http://schemas.microsoft.com/office/drawing/2014/main" id="{489F9684-C7A2-F52B-5C81-E730EAAE2AE8}"/>
+              </a:ext>
+            </a:extLst>
+          </p:cNvPr>
+          <p:cNvPicPr>
+            <a:picLocks noChangeAspect="1"/>
+          </p:cNvPicPr>
+          <p:nvPr/>
+        </p:nvPicPr>
+        <p:blipFill>
+          <a:blip r:embed="rId2"/>
+          <a:stretch>
+            <a:fillRect/>
+          </a:stretch>
+        </p:blipFill>
+        <p:spPr>
+          <a:xfrm>
+            <a:off x="1910080" y="2266285"/>
+            <a:ext cx="8168500" cy="4340191"/>
+          </a:xfrm>
+          <a:prstGeom prst="rect">
+            <a:avLst/>
+          </a:prstGeom>
+        </p:spPr>
+      </p:pic>
+    </p:spTree>
+    <p:extLst>
+      <p:ext uri="{BB962C8B-B14F-4D97-AF65-F5344CB8AC3E}">
+        <p14:creationId xmlns:p14="http://schemas.microsoft.com/office/powerpoint/2010/main" val="1053451827"/>
+      </p:ext>
+    </p:extLst>
+  </p:cSld>
+  <p:clrMapOvr>
+    <a:masterClrMapping/>
+  </p:clrMapOvr>
+</p:sld>
+</file>
+
+<file path=ppt/slides/slide15.xml><?xml version="1.0" encoding="utf-8"?>
+<p:sld xmlns:a="http://schemas.openxmlformats.org/drawingml/2006/main" xmlns:r="http://schemas.openxmlformats.org/officeDocument/2006/relationships" xmlns:p="http://schemas.openxmlformats.org/presentationml/2006/main">
+  <p:cSld>
+    <p:spTree>
+      <p:nvGrpSpPr>
+        <p:cNvPr id="1" name=""/>
+        <p:cNvGrpSpPr/>
+        <p:nvPr/>
+      </p:nvGrpSpPr>
+      <p:grpSpPr>
+        <a:xfrm>
+          <a:off x="0" y="0"/>
+          <a:ext cx="0" cy="0"/>
+          <a:chOff x="0" y="0"/>
+          <a:chExt cx="0" cy="0"/>
+        </a:xfrm>
+      </p:grpSpPr>
+      <p:sp>
+        <p:nvSpPr>
+          <p:cNvPr id="38" name="Rounded Rectangle 12">
+            <a:extLst>
+              <a:ext uri="{FF2B5EF4-FFF2-40B4-BE49-F238E27FC236}">
+                <a16:creationId xmlns:a16="http://schemas.microsoft.com/office/drawing/2014/main" id="{574AD6F7-C625-EF9D-1008-A9FFE21A8469}"/>
+              </a:ext>
+            </a:extLst>
+          </p:cNvPr>
+          <p:cNvSpPr/>
+          <p:nvPr/>
+        </p:nvSpPr>
+        <p:spPr>
+          <a:xfrm>
+            <a:off x="152400" y="1811119"/>
+            <a:ext cx="2837769" cy="2608403"/>
+          </a:xfrm>
+          <a:prstGeom prst="roundRect">
+            <a:avLst/>
+          </a:prstGeom>
+          <a:solidFill>
+            <a:srgbClr val="B3FFD5"/>
+          </a:solidFill>
+          <a:ln w="10160">
+            <a:solidFill>
+              <a:srgbClr val="B3FFD5"/>
+            </a:solidFill>
+          </a:ln>
+          <a:effectLst/>
+        </p:spPr>
+        <p:style>
+          <a:lnRef idx="1">
+            <a:schemeClr val="accent1"/>
+          </a:lnRef>
+          <a:fillRef idx="3">
+            <a:schemeClr val="accent1"/>
+          </a:fillRef>
+          <a:effectRef idx="2">
+            <a:schemeClr val="accent1"/>
+          </a:effectRef>
+          <a:fontRef idx="minor">
+            <a:schemeClr val="lt1"/>
+          </a:fontRef>
+        </p:style>
+        <p:txBody>
+          <a:bodyPr rtlCol="0" anchor="ctr"/>
+          <a:lstStyle/>
+          <a:p>
+            <a:pPr algn="ctr"/>
+            <a:endParaRPr/>
+          </a:p>
+        </p:txBody>
+      </p:sp>
+      <p:sp>
+        <p:nvSpPr>
+          <p:cNvPr id="37" name="Rounded Rectangle 12">
+            <a:extLst>
+              <a:ext uri="{FF2B5EF4-FFF2-40B4-BE49-F238E27FC236}">
+                <a16:creationId xmlns:a16="http://schemas.microsoft.com/office/drawing/2014/main" id="{A484983D-24FE-D9A7-EF44-C1617FAC4497}"/>
+              </a:ext>
+            </a:extLst>
+          </p:cNvPr>
+          <p:cNvSpPr/>
+          <p:nvPr/>
+        </p:nvSpPr>
+        <p:spPr>
+          <a:xfrm>
+            <a:off x="3220721" y="1808479"/>
+            <a:ext cx="8618686" cy="2608403"/>
+          </a:xfrm>
+          <a:prstGeom prst="roundRect">
+            <a:avLst/>
+          </a:prstGeom>
+          <a:solidFill>
+            <a:srgbClr val="B3E7FF"/>
+          </a:solidFill>
+          <a:ln w="10160">
+            <a:solidFill>
+              <a:srgbClr val="B3E7FF"/>
+            </a:solidFill>
+          </a:ln>
+          <a:effectLst/>
+        </p:spPr>
+        <p:style>
+          <a:lnRef idx="1">
+            <a:schemeClr val="accent1"/>
+          </a:lnRef>
+          <a:fillRef idx="3">
+            <a:schemeClr val="accent1"/>
+          </a:fillRef>
+          <a:effectRef idx="2">
+            <a:schemeClr val="accent1"/>
+          </a:effectRef>
+          <a:fontRef idx="minor">
+            <a:schemeClr val="lt1"/>
+          </a:fontRef>
+        </p:style>
+        <p:txBody>
+          <a:bodyPr rtlCol="0" anchor="ctr"/>
+          <a:lstStyle/>
+          <a:p>
+            <a:pPr algn="ctr"/>
+            <a:endParaRPr/>
+          </a:p>
+        </p:txBody>
+      </p:sp>
+      <p:sp>
+        <p:nvSpPr>
+          <p:cNvPr id="2" name="Titre 1">
+            <a:extLst>
+              <a:ext uri="{FF2B5EF4-FFF2-40B4-BE49-F238E27FC236}">
+                <a16:creationId xmlns:a16="http://schemas.microsoft.com/office/drawing/2014/main" id="{40E18D5B-0CFC-BAC9-70A7-01C7045F1E8B}"/>
+              </a:ext>
+            </a:extLst>
+          </p:cNvPr>
+          <p:cNvSpPr>
+            <a:spLocks noGrp="1"/>
+          </p:cNvSpPr>
+          <p:nvPr>
+            <p:ph type="title"/>
+          </p:nvPr>
+        </p:nvSpPr>
+        <p:spPr/>
+        <p:txBody>
+          <a:bodyPr/>
+          <a:lstStyle/>
+          <a:p>
+            <a:r>
+              <a:rPr lang="fr-FR" dirty="0"/>
+              <a:t>6. Mise en place DBT</a:t>
+            </a:r>
+            <a:br>
+              <a:rPr lang="fr-FR" dirty="0"/>
+            </a:br>
+            <a:endParaRPr lang="fr-FR" dirty="0"/>
+          </a:p>
+        </p:txBody>
+      </p:sp>
+      <p:sp>
+        <p:nvSpPr>
+          <p:cNvPr id="3" name="Espace réservé du contenu 2">
+            <a:extLst>
+              <a:ext uri="{FF2B5EF4-FFF2-40B4-BE49-F238E27FC236}">
+                <a16:creationId xmlns:a16="http://schemas.microsoft.com/office/drawing/2014/main" id="{5C9EBF34-39F0-3E83-002D-10290D326395}"/>
+              </a:ext>
+            </a:extLst>
+          </p:cNvPr>
+          <p:cNvSpPr>
+            <a:spLocks noGrp="1"/>
+          </p:cNvSpPr>
+          <p:nvPr>
+            <p:ph idx="1"/>
+          </p:nvPr>
+        </p:nvSpPr>
+        <p:spPr/>
+        <p:txBody>
+          <a:bodyPr>
+            <a:normAutofit fontScale="85000" lnSpcReduction="20000"/>
+          </a:bodyPr>
+          <a:lstStyle/>
+          <a:p>
+            <a:endParaRPr lang="fr-FR" dirty="0"/>
+          </a:p>
+          <a:p>
+            <a:endParaRPr lang="fr-FR" dirty="0"/>
+          </a:p>
+          <a:p>
+            <a:endParaRPr lang="fr-FR" dirty="0"/>
+          </a:p>
+          <a:p>
+            <a:endParaRPr lang="fr-FR" dirty="0"/>
+          </a:p>
+          <a:p>
+            <a:endParaRPr lang="fr-FR" dirty="0"/>
+          </a:p>
+          <a:p>
+            <a:endParaRPr lang="fr-FR" dirty="0"/>
+          </a:p>
+          <a:p>
+            <a:endParaRPr lang="fr-FR" dirty="0"/>
+          </a:p>
+          <a:p>
+            <a:endParaRPr lang="fr-FR" dirty="0"/>
+          </a:p>
+          <a:p>
+            <a:r>
+              <a:rPr lang="fr-FR" sz="1600" dirty="0"/>
+              <a:t>Chaque couche a une responsabilité et un niveau de stabilité</a:t>
+            </a:r>
+          </a:p>
+          <a:p>
+            <a:r>
+              <a:rPr lang="fr-FR" sz="1600" dirty="0"/>
+              <a:t>Lancement de la construction des vues, des tables, des tests:</a:t>
+            </a:r>
+          </a:p>
+          <a:p>
+            <a:pPr marL="0" indent="0">
+              <a:buNone/>
+            </a:pPr>
+            <a:r>
+              <a:rPr lang="fr-FR" sz="1600" dirty="0"/>
+              <a:t>Commande </a:t>
+            </a:r>
+            <a:r>
+              <a:rPr lang="fr-FR" sz="1600" b="1" i="1" dirty="0" err="1"/>
+              <a:t>dbt</a:t>
+            </a:r>
+            <a:r>
+              <a:rPr lang="fr-FR" sz="1600" b="1" i="1" dirty="0"/>
+              <a:t> </a:t>
+            </a:r>
+            <a:r>
+              <a:rPr lang="fr-FR" sz="1600" b="1" i="1" dirty="0" err="1"/>
+              <a:t>build</a:t>
+            </a:r>
+            <a:endParaRPr lang="fr-FR" sz="1600" b="1" i="1" dirty="0"/>
+          </a:p>
+          <a:p>
+            <a:endParaRPr lang="fr-FR" dirty="0"/>
+          </a:p>
+          <a:p>
+            <a:endParaRPr lang="fr-FR" dirty="0"/>
+          </a:p>
+          <a:p>
+            <a:endParaRPr lang="fr-FR" dirty="0"/>
+          </a:p>
+        </p:txBody>
+      </p:sp>
+      <p:sp>
+        <p:nvSpPr>
+          <p:cNvPr id="4" name="Espace réservé de la date 3">
+            <a:extLst>
+              <a:ext uri="{FF2B5EF4-FFF2-40B4-BE49-F238E27FC236}">
+                <a16:creationId xmlns:a16="http://schemas.microsoft.com/office/drawing/2014/main" id="{06F8D6F3-7708-CB2C-31C1-317A2C55C33C}"/>
+              </a:ext>
+            </a:extLst>
+          </p:cNvPr>
+          <p:cNvSpPr>
+            <a:spLocks noGrp="1"/>
+          </p:cNvSpPr>
+          <p:nvPr>
+            <p:ph type="dt" sz="half" idx="10"/>
+          </p:nvPr>
+        </p:nvSpPr>
+        <p:spPr/>
+        <p:txBody>
+          <a:bodyPr/>
+          <a:lstStyle/>
+          <a:p>
+            <a:pPr rtl="0"/>
+            <a:fld id="{22897033-9A55-4DAC-991D-1FF1921C78B7}" type="datetime1">
+              <a:rPr lang="fr-FR" smtClean="0"/>
+              <a:t>19/08/2026</a:t>
+            </a:fld>
+            <a:endParaRPr lang="en-US" dirty="0"/>
+          </a:p>
+        </p:txBody>
+      </p:sp>
+      <p:sp>
+        <p:nvSpPr>
+          <p:cNvPr id="5" name="Rounded Rectangle 4">
+            <a:extLst>
+              <a:ext uri="{FF2B5EF4-FFF2-40B4-BE49-F238E27FC236}">
+                <a16:creationId xmlns:a16="http://schemas.microsoft.com/office/drawing/2014/main" id="{549D6DCC-9CD4-4424-FCA7-27C94BBB9986}"/>
+              </a:ext>
+            </a:extLst>
+          </p:cNvPr>
+          <p:cNvSpPr/>
+          <p:nvPr/>
+        </p:nvSpPr>
+        <p:spPr>
+          <a:xfrm>
+            <a:off x="581192" y="1943200"/>
+            <a:ext cx="2240280" cy="2286000"/>
+          </a:xfrm>
+          <a:prstGeom prst="roundRect">
+            <a:avLst/>
+          </a:prstGeom>
+          <a:solidFill>
+            <a:srgbClr val="D9F0F0"/>
+          </a:solidFill>
+          <a:ln w="10160">
+            <a:solidFill>
+              <a:srgbClr val="D9F0F0"/>
+            </a:solidFill>
+          </a:ln>
+        </p:spPr>
+        <p:style>
+          <a:lnRef idx="1">
+            <a:schemeClr val="accent1"/>
+          </a:lnRef>
+          <a:fillRef idx="3">
+            <a:schemeClr val="accent1"/>
+          </a:fillRef>
+          <a:effectRef idx="2">
+            <a:schemeClr val="accent1"/>
+          </a:effectRef>
+          <a:fontRef idx="minor">
+            <a:schemeClr val="lt1"/>
+          </a:fontRef>
+        </p:style>
+        <p:txBody>
+          <a:bodyPr rtlCol="0" anchor="ctr"/>
+          <a:lstStyle/>
+          <a:p>
+            <a:pPr algn="ctr"/>
+            <a:endParaRPr/>
+          </a:p>
+        </p:txBody>
+      </p:sp>
+      <p:sp>
+        <p:nvSpPr>
+          <p:cNvPr id="6" name="TextBox 5">
+            <a:extLst>
+              <a:ext uri="{FF2B5EF4-FFF2-40B4-BE49-F238E27FC236}">
+                <a16:creationId xmlns:a16="http://schemas.microsoft.com/office/drawing/2014/main" id="{D1CD80EC-01AE-6A2F-4268-A4938580E11B}"/>
+              </a:ext>
+            </a:extLst>
+          </p:cNvPr>
+          <p:cNvSpPr txBox="1"/>
+          <p:nvPr/>
+        </p:nvSpPr>
+        <p:spPr>
+          <a:xfrm>
+            <a:off x="718352" y="2308960"/>
+            <a:ext cx="1965960" cy="320040"/>
+          </a:xfrm>
+          <a:prstGeom prst="rect">
+            <a:avLst/>
+          </a:prstGeom>
+          <a:noFill/>
+        </p:spPr>
+        <p:txBody>
+          <a:bodyPr wrap="square" lIns="45720" rIns="45720" anchor="t">
+            <a:spAutoFit/>
+          </a:bodyPr>
+          <a:lstStyle/>
+          <a:p>
+            <a:pPr algn="ctr">
+              <a:defRPr sz="2000" b="1">
+                <a:solidFill>
+                  <a:srgbClr val="FFFFFF"/>
+                </a:solidFill>
+                <a:latin typeface="Aptos"/>
+              </a:defRPr>
+            </a:pPr>
+            <a:r>
+              <a:rPr dirty="0"/>
+              <a:t>raw</a:t>
+            </a:r>
+          </a:p>
+        </p:txBody>
+      </p:sp>
+      <p:sp>
+        <p:nvSpPr>
+          <p:cNvPr id="7" name="TextBox 6">
+            <a:extLst>
+              <a:ext uri="{FF2B5EF4-FFF2-40B4-BE49-F238E27FC236}">
+                <a16:creationId xmlns:a16="http://schemas.microsoft.com/office/drawing/2014/main" id="{B0EFC396-2EE3-AC4D-429F-CC5768B16844}"/>
+              </a:ext>
+            </a:extLst>
+          </p:cNvPr>
+          <p:cNvSpPr txBox="1"/>
+          <p:nvPr/>
+        </p:nvSpPr>
+        <p:spPr>
+          <a:xfrm>
+            <a:off x="809792" y="2949040"/>
+            <a:ext cx="1783080" cy="731520"/>
+          </a:xfrm>
+          <a:prstGeom prst="rect">
+            <a:avLst/>
+          </a:prstGeom>
+          <a:noFill/>
+        </p:spPr>
+        <p:txBody>
+          <a:bodyPr wrap="square" lIns="45720" rIns="45720" anchor="t">
+            <a:spAutoFit/>
+          </a:bodyPr>
+          <a:lstStyle/>
+          <a:p>
+            <a:pPr algn="ctr">
+              <a:defRPr sz="1400" b="0">
+                <a:solidFill>
+                  <a:srgbClr val="FFFFFF"/>
+                </a:solidFill>
+                <a:latin typeface="Aptos"/>
+              </a:defRPr>
+            </a:pPr>
+            <a:r>
+              <a:rPr dirty="0"/>
+              <a:t>Données </a:t>
+            </a:r>
+            <a:r>
+              <a:rPr dirty="0" err="1"/>
+              <a:t>Airbyte</a:t>
+            </a:r>
+            <a:br>
+              <a:rPr dirty="0"/>
+            </a:br>
+            <a:r>
+              <a:rPr dirty="0"/>
+              <a:t>structure source</a:t>
+            </a:r>
+          </a:p>
+        </p:txBody>
+      </p:sp>
+      <p:cxnSp>
+        <p:nvCxnSpPr>
+          <p:cNvPr id="8" name="Connector 7">
+            <a:extLst>
+              <a:ext uri="{FF2B5EF4-FFF2-40B4-BE49-F238E27FC236}">
+                <a16:creationId xmlns:a16="http://schemas.microsoft.com/office/drawing/2014/main" id="{EDD86B34-0925-4B74-3420-0BE8259F8B2C}"/>
+              </a:ext>
+            </a:extLst>
+          </p:cNvPr>
+          <p:cNvCxnSpPr/>
+          <p:nvPr/>
+        </p:nvCxnSpPr>
+        <p:spPr>
+          <a:xfrm>
+            <a:off x="2848903" y="3086200"/>
+            <a:ext cx="502920" cy="0"/>
+          </a:xfrm>
+          <a:prstGeom prst="line">
+            <a:avLst/>
+          </a:prstGeom>
+          <a:ln w="25400">
+            <a:solidFill>
+              <a:srgbClr val="17BEBB"/>
+            </a:solidFill>
+          </a:ln>
+        </p:spPr>
+        <p:style>
+          <a:lnRef idx="2">
+            <a:schemeClr val="accent1"/>
+          </a:lnRef>
+          <a:fillRef idx="0">
+            <a:schemeClr val="accent1"/>
+          </a:fillRef>
+          <a:effectRef idx="1">
+            <a:schemeClr val="accent1"/>
+          </a:effectRef>
+          <a:fontRef idx="minor">
+            <a:schemeClr val="tx1"/>
+          </a:fontRef>
+        </p:style>
+      </p:cxnSp>
+      <p:sp>
+        <p:nvSpPr>
+          <p:cNvPr id="9" name="Rounded Rectangle 8">
+            <a:extLst>
+              <a:ext uri="{FF2B5EF4-FFF2-40B4-BE49-F238E27FC236}">
+                <a16:creationId xmlns:a16="http://schemas.microsoft.com/office/drawing/2014/main" id="{251CFB07-3A50-A5F7-94FD-20EB2B8C012E}"/>
+              </a:ext>
+            </a:extLst>
+          </p:cNvPr>
+          <p:cNvSpPr/>
+          <p:nvPr/>
+        </p:nvSpPr>
+        <p:spPr>
+          <a:xfrm>
+            <a:off x="3434120" y="1943200"/>
+            <a:ext cx="2240280" cy="2286000"/>
+          </a:xfrm>
+          <a:prstGeom prst="roundRect">
+            <a:avLst/>
+          </a:prstGeom>
+          <a:solidFill>
+            <a:srgbClr val="17BEBB"/>
+          </a:solidFill>
+          <a:ln w="10160">
+            <a:solidFill>
+              <a:srgbClr val="17BEBB"/>
+            </a:solidFill>
+          </a:ln>
+        </p:spPr>
+        <p:style>
+          <a:lnRef idx="1">
+            <a:schemeClr val="accent1"/>
+          </a:lnRef>
+          <a:fillRef idx="3">
+            <a:schemeClr val="accent1"/>
+          </a:fillRef>
+          <a:effectRef idx="2">
+            <a:schemeClr val="accent1"/>
+          </a:effectRef>
+          <a:fontRef idx="minor">
+            <a:schemeClr val="lt1"/>
+          </a:fontRef>
+        </p:style>
+        <p:txBody>
+          <a:bodyPr rtlCol="0" anchor="ctr"/>
+          <a:lstStyle/>
+          <a:p>
+            <a:pPr algn="ctr"/>
+            <a:endParaRPr/>
+          </a:p>
+        </p:txBody>
+      </p:sp>
+      <p:sp>
+        <p:nvSpPr>
+          <p:cNvPr id="10" name="TextBox 9">
+            <a:extLst>
+              <a:ext uri="{FF2B5EF4-FFF2-40B4-BE49-F238E27FC236}">
+                <a16:creationId xmlns:a16="http://schemas.microsoft.com/office/drawing/2014/main" id="{3EAF161F-AAE6-A448-F3EC-CCCC05C635BB}"/>
+              </a:ext>
+            </a:extLst>
+          </p:cNvPr>
+          <p:cNvSpPr txBox="1"/>
+          <p:nvPr/>
+        </p:nvSpPr>
+        <p:spPr>
+          <a:xfrm>
+            <a:off x="3571280" y="2308960"/>
+            <a:ext cx="1965960" cy="320040"/>
+          </a:xfrm>
+          <a:prstGeom prst="rect">
+            <a:avLst/>
+          </a:prstGeom>
+          <a:noFill/>
+        </p:spPr>
+        <p:txBody>
+          <a:bodyPr wrap="square" lIns="45720" rIns="45720" anchor="t">
+            <a:spAutoFit/>
+          </a:bodyPr>
+          <a:lstStyle/>
+          <a:p>
+            <a:pPr algn="ctr">
+              <a:defRPr sz="2000" b="1">
+                <a:solidFill>
+                  <a:srgbClr val="FFFFFF"/>
+                </a:solidFill>
+                <a:latin typeface="Aptos"/>
+              </a:defRPr>
+            </a:pPr>
+            <a:r>
+              <a:t>staging</a:t>
+            </a:r>
+          </a:p>
+        </p:txBody>
+      </p:sp>
+      <p:sp>
+        <p:nvSpPr>
+          <p:cNvPr id="11" name="TextBox 10">
+            <a:extLst>
+              <a:ext uri="{FF2B5EF4-FFF2-40B4-BE49-F238E27FC236}">
+                <a16:creationId xmlns:a16="http://schemas.microsoft.com/office/drawing/2014/main" id="{37E4F2E0-BE03-6CD1-3744-0B852AAB9F77}"/>
+              </a:ext>
+            </a:extLst>
+          </p:cNvPr>
+          <p:cNvSpPr txBox="1"/>
+          <p:nvPr/>
+        </p:nvSpPr>
+        <p:spPr>
+          <a:xfrm>
+            <a:off x="3662720" y="2949040"/>
+            <a:ext cx="1783080" cy="954107"/>
+          </a:xfrm>
+          <a:prstGeom prst="rect">
+            <a:avLst/>
+          </a:prstGeom>
+          <a:noFill/>
+        </p:spPr>
+        <p:txBody>
+          <a:bodyPr wrap="square" lIns="45720" rIns="45720" anchor="t">
+            <a:spAutoFit/>
+          </a:bodyPr>
+          <a:lstStyle/>
+          <a:p>
+            <a:pPr algn="ctr">
+              <a:defRPr sz="1400" b="0">
+                <a:solidFill>
+                  <a:srgbClr val="FFFFFF"/>
+                </a:solidFill>
+                <a:latin typeface="Aptos"/>
+              </a:defRPr>
+            </a:pPr>
+            <a:r>
+              <a:rPr dirty="0"/>
+              <a:t>Vues </a:t>
+            </a:r>
+            <a:r>
+              <a:rPr dirty="0" err="1"/>
+              <a:t>nettoyées</a:t>
+            </a:r>
+            <a:br>
+              <a:rPr dirty="0"/>
+            </a:br>
+            <a:r>
+              <a:rPr dirty="0" err="1"/>
+              <a:t>unités</a:t>
+            </a:r>
+            <a:r>
+              <a:rPr dirty="0"/>
+              <a:t> </a:t>
+            </a:r>
+            <a:r>
+              <a:rPr dirty="0" err="1"/>
+              <a:t>harmonisées</a:t>
+            </a:r>
+            <a:endParaRPr lang="fr-FR" dirty="0"/>
+          </a:p>
+          <a:p>
+            <a:pPr algn="ctr">
+              <a:defRPr sz="1400" b="0">
+                <a:solidFill>
+                  <a:srgbClr val="FFFFFF"/>
+                </a:solidFill>
+                <a:latin typeface="Aptos"/>
+              </a:defRPr>
+            </a:pPr>
+            <a:r>
+              <a:rPr lang="fr-FR" dirty="0"/>
+              <a:t>_</a:t>
+            </a:r>
+            <a:r>
+              <a:rPr lang="fr-FR" dirty="0" err="1"/>
+              <a:t>sources.yml</a:t>
+            </a:r>
+            <a:endParaRPr lang="fr-FR" dirty="0"/>
+          </a:p>
+          <a:p>
+            <a:pPr algn="ctr">
+              <a:defRPr sz="1400" b="0">
+                <a:solidFill>
+                  <a:srgbClr val="FFFFFF"/>
+                </a:solidFill>
+                <a:latin typeface="Aptos"/>
+              </a:defRPr>
+            </a:pPr>
+            <a:r>
+              <a:rPr lang="fr-FR" dirty="0" err="1"/>
+              <a:t>Schema.yml</a:t>
+            </a:r>
+            <a:endParaRPr dirty="0"/>
+          </a:p>
+        </p:txBody>
+      </p:sp>
+      <p:cxnSp>
+        <p:nvCxnSpPr>
+          <p:cNvPr id="12" name="Connector 11">
+            <a:extLst>
+              <a:ext uri="{FF2B5EF4-FFF2-40B4-BE49-F238E27FC236}">
+                <a16:creationId xmlns:a16="http://schemas.microsoft.com/office/drawing/2014/main" id="{345A27E2-68F2-6520-60B4-D146BF4DA25C}"/>
+              </a:ext>
+            </a:extLst>
+          </p:cNvPr>
+          <p:cNvCxnSpPr/>
+          <p:nvPr/>
+        </p:nvCxnSpPr>
+        <p:spPr>
+          <a:xfrm>
+            <a:off x="5701832" y="3086200"/>
+            <a:ext cx="502920" cy="0"/>
+          </a:xfrm>
+          <a:prstGeom prst="line">
+            <a:avLst/>
+          </a:prstGeom>
+          <a:ln w="25400">
+            <a:solidFill>
+              <a:srgbClr val="17BEBB"/>
+            </a:solidFill>
+          </a:ln>
+        </p:spPr>
+        <p:style>
+          <a:lnRef idx="2">
+            <a:schemeClr val="accent1"/>
+          </a:lnRef>
+          <a:fillRef idx="0">
+            <a:schemeClr val="accent1"/>
+          </a:fillRef>
+          <a:effectRef idx="1">
+            <a:schemeClr val="accent1"/>
+          </a:effectRef>
+          <a:fontRef idx="minor">
+            <a:schemeClr val="tx1"/>
+          </a:fontRef>
+        </p:style>
+      </p:cxnSp>
+      <p:sp>
+        <p:nvSpPr>
+          <p:cNvPr id="13" name="Rounded Rectangle 12">
+            <a:extLst>
+              <a:ext uri="{FF2B5EF4-FFF2-40B4-BE49-F238E27FC236}">
+                <a16:creationId xmlns:a16="http://schemas.microsoft.com/office/drawing/2014/main" id="{5222E88A-2D7D-164E-60D2-A7FEC5A6681B}"/>
+              </a:ext>
+            </a:extLst>
+          </p:cNvPr>
+          <p:cNvSpPr/>
+          <p:nvPr/>
+        </p:nvSpPr>
+        <p:spPr>
+          <a:xfrm>
+            <a:off x="6287048" y="1943200"/>
+            <a:ext cx="2240280" cy="2286000"/>
+          </a:xfrm>
+          <a:prstGeom prst="roundRect">
+            <a:avLst/>
+          </a:prstGeom>
+          <a:solidFill>
+            <a:srgbClr val="F2C14E"/>
+          </a:solidFill>
+          <a:ln w="10160">
+            <a:solidFill>
+              <a:srgbClr val="F2C14E"/>
+            </a:solidFill>
+          </a:ln>
+        </p:spPr>
+        <p:style>
+          <a:lnRef idx="1">
+            <a:schemeClr val="accent1"/>
+          </a:lnRef>
+          <a:fillRef idx="3">
+            <a:schemeClr val="accent1"/>
+          </a:fillRef>
+          <a:effectRef idx="2">
+            <a:schemeClr val="accent1"/>
+          </a:effectRef>
+          <a:fontRef idx="minor">
+            <a:schemeClr val="lt1"/>
+          </a:fontRef>
+        </p:style>
+        <p:txBody>
+          <a:bodyPr rtlCol="0" anchor="ctr"/>
+          <a:lstStyle/>
+          <a:p>
+            <a:pPr algn="ctr"/>
+            <a:endParaRPr/>
+          </a:p>
+        </p:txBody>
+      </p:sp>
+      <p:sp>
+        <p:nvSpPr>
+          <p:cNvPr id="14" name="TextBox 13">
+            <a:extLst>
+              <a:ext uri="{FF2B5EF4-FFF2-40B4-BE49-F238E27FC236}">
+                <a16:creationId xmlns:a16="http://schemas.microsoft.com/office/drawing/2014/main" id="{60F65322-F769-3E42-0CD0-3949E79EF930}"/>
+              </a:ext>
+            </a:extLst>
+          </p:cNvPr>
+          <p:cNvSpPr txBox="1"/>
+          <p:nvPr/>
+        </p:nvSpPr>
+        <p:spPr>
+          <a:xfrm>
+            <a:off x="6424208" y="2308960"/>
+            <a:ext cx="1965960" cy="320040"/>
+          </a:xfrm>
+          <a:prstGeom prst="rect">
+            <a:avLst/>
+          </a:prstGeom>
+          <a:noFill/>
+        </p:spPr>
+        <p:txBody>
+          <a:bodyPr wrap="square" lIns="45720" rIns="45720" anchor="t">
+            <a:spAutoFit/>
+          </a:bodyPr>
+          <a:lstStyle/>
+          <a:p>
+            <a:pPr algn="ctr">
+              <a:defRPr sz="2000" b="1">
+                <a:solidFill>
+                  <a:srgbClr val="FFFFFF"/>
+                </a:solidFill>
+                <a:latin typeface="Aptos"/>
+              </a:defRPr>
+            </a:pPr>
+            <a:r>
+              <a:t>intermediate</a:t>
+            </a:r>
+          </a:p>
+        </p:txBody>
+      </p:sp>
+      <p:sp>
+        <p:nvSpPr>
+          <p:cNvPr id="15" name="TextBox 14">
+            <a:extLst>
+              <a:ext uri="{FF2B5EF4-FFF2-40B4-BE49-F238E27FC236}">
+                <a16:creationId xmlns:a16="http://schemas.microsoft.com/office/drawing/2014/main" id="{2A6CD04B-98AD-DBBB-D293-35B99C03D4AF}"/>
+              </a:ext>
+            </a:extLst>
+          </p:cNvPr>
+          <p:cNvSpPr txBox="1"/>
+          <p:nvPr/>
+        </p:nvSpPr>
+        <p:spPr>
+          <a:xfrm>
+            <a:off x="6515648" y="2949040"/>
+            <a:ext cx="1783080" cy="731520"/>
+          </a:xfrm>
+          <a:prstGeom prst="rect">
+            <a:avLst/>
+          </a:prstGeom>
+          <a:noFill/>
+        </p:spPr>
+        <p:txBody>
+          <a:bodyPr wrap="square" lIns="45720" rIns="45720" anchor="t">
+            <a:spAutoFit/>
+          </a:bodyPr>
+          <a:lstStyle/>
+          <a:p>
+            <a:pPr algn="ctr">
+              <a:defRPr sz="1400" b="0">
+                <a:solidFill>
+                  <a:srgbClr val="FFFFFF"/>
+                </a:solidFill>
+                <a:latin typeface="Aptos"/>
+              </a:defRPr>
+            </a:pPr>
+            <a:r>
+              <a:t>Union des sources</a:t>
+            </a:r>
+            <a:br/>
+            <a:r>
+              <a:t>modèle unifié</a:t>
+            </a:r>
+          </a:p>
+        </p:txBody>
+      </p:sp>
+      <p:cxnSp>
+        <p:nvCxnSpPr>
+          <p:cNvPr id="16" name="Connector 15">
+            <a:extLst>
+              <a:ext uri="{FF2B5EF4-FFF2-40B4-BE49-F238E27FC236}">
+                <a16:creationId xmlns:a16="http://schemas.microsoft.com/office/drawing/2014/main" id="{05A85D3B-3EF2-0214-5A52-22ECF10E2E61}"/>
+              </a:ext>
+            </a:extLst>
+          </p:cNvPr>
+          <p:cNvCxnSpPr/>
+          <p:nvPr/>
+        </p:nvCxnSpPr>
+        <p:spPr>
+          <a:xfrm>
+            <a:off x="8554760" y="3086200"/>
+            <a:ext cx="502920" cy="0"/>
+          </a:xfrm>
+          <a:prstGeom prst="line">
+            <a:avLst/>
+          </a:prstGeom>
+          <a:ln w="25400">
+            <a:solidFill>
+              <a:srgbClr val="17BEBB"/>
+            </a:solidFill>
+          </a:ln>
+        </p:spPr>
+        <p:style>
+          <a:lnRef idx="2">
+            <a:schemeClr val="accent1"/>
+          </a:lnRef>
+          <a:fillRef idx="0">
+            <a:schemeClr val="accent1"/>
+          </a:fillRef>
+          <a:effectRef idx="1">
+            <a:schemeClr val="accent1"/>
+          </a:effectRef>
+          <a:fontRef idx="minor">
+            <a:schemeClr val="tx1"/>
+          </a:fontRef>
+        </p:style>
+      </p:cxnSp>
+      <p:sp>
+        <p:nvSpPr>
+          <p:cNvPr id="17" name="Rounded Rectangle 16">
+            <a:extLst>
+              <a:ext uri="{FF2B5EF4-FFF2-40B4-BE49-F238E27FC236}">
+                <a16:creationId xmlns:a16="http://schemas.microsoft.com/office/drawing/2014/main" id="{50C3BA36-4B83-22F3-3FCF-055A2CB304E2}"/>
+              </a:ext>
+            </a:extLst>
+          </p:cNvPr>
+          <p:cNvSpPr/>
+          <p:nvPr/>
+        </p:nvSpPr>
+        <p:spPr>
+          <a:xfrm>
+            <a:off x="9139975" y="1943200"/>
+            <a:ext cx="2240280" cy="2286000"/>
+          </a:xfrm>
+          <a:prstGeom prst="roundRect">
+            <a:avLst/>
+          </a:prstGeom>
+          <a:solidFill>
+            <a:srgbClr val="3AA76D"/>
+          </a:solidFill>
+          <a:ln w="10160">
+            <a:solidFill>
+              <a:srgbClr val="3AA76D"/>
+            </a:solidFill>
+          </a:ln>
+        </p:spPr>
+        <p:style>
+          <a:lnRef idx="1">
+            <a:schemeClr val="accent1"/>
+          </a:lnRef>
+          <a:fillRef idx="3">
+            <a:schemeClr val="accent1"/>
+          </a:fillRef>
+          <a:effectRef idx="2">
+            <a:schemeClr val="accent1"/>
+          </a:effectRef>
+          <a:fontRef idx="minor">
+            <a:schemeClr val="lt1"/>
+          </a:fontRef>
+        </p:style>
+        <p:txBody>
+          <a:bodyPr rtlCol="0" anchor="ctr"/>
+          <a:lstStyle/>
+          <a:p>
+            <a:pPr algn="ctr"/>
+            <a:endParaRPr/>
+          </a:p>
+        </p:txBody>
+      </p:sp>
+      <p:sp>
+        <p:nvSpPr>
+          <p:cNvPr id="18" name="TextBox 17">
+            <a:extLst>
+              <a:ext uri="{FF2B5EF4-FFF2-40B4-BE49-F238E27FC236}">
+                <a16:creationId xmlns:a16="http://schemas.microsoft.com/office/drawing/2014/main" id="{2F9147CA-C17A-9366-0CD6-12ADF1AAFB63}"/>
+              </a:ext>
+            </a:extLst>
+          </p:cNvPr>
+          <p:cNvSpPr txBox="1"/>
+          <p:nvPr/>
+        </p:nvSpPr>
+        <p:spPr>
+          <a:xfrm>
+            <a:off x="9277136" y="2308960"/>
+            <a:ext cx="1965960" cy="320040"/>
+          </a:xfrm>
+          <a:prstGeom prst="rect">
+            <a:avLst/>
+          </a:prstGeom>
+          <a:noFill/>
+        </p:spPr>
+        <p:txBody>
+          <a:bodyPr wrap="square" lIns="45720" rIns="45720" anchor="t">
+            <a:spAutoFit/>
+          </a:bodyPr>
+          <a:lstStyle/>
+          <a:p>
+            <a:pPr algn="ctr">
+              <a:defRPr sz="2000" b="1">
+                <a:solidFill>
+                  <a:srgbClr val="FFFFFF"/>
+                </a:solidFill>
+                <a:latin typeface="Aptos"/>
+              </a:defRPr>
+            </a:pPr>
+            <a:r>
+              <a:rPr dirty="0"/>
+              <a:t>marts</a:t>
+            </a:r>
+          </a:p>
+        </p:txBody>
+      </p:sp>
+      <p:sp>
+        <p:nvSpPr>
+          <p:cNvPr id="19" name="TextBox 18">
+            <a:extLst>
+              <a:ext uri="{FF2B5EF4-FFF2-40B4-BE49-F238E27FC236}">
+                <a16:creationId xmlns:a16="http://schemas.microsoft.com/office/drawing/2014/main" id="{82198C45-15C1-3AA2-1763-1D39760BBE64}"/>
+              </a:ext>
+            </a:extLst>
+          </p:cNvPr>
+          <p:cNvSpPr txBox="1"/>
+          <p:nvPr/>
+        </p:nvSpPr>
+        <p:spPr>
+          <a:xfrm>
+            <a:off x="9368575" y="2949040"/>
+            <a:ext cx="1783080" cy="731520"/>
+          </a:xfrm>
+          <a:prstGeom prst="rect">
+            <a:avLst/>
+          </a:prstGeom>
+          <a:noFill/>
+        </p:spPr>
+        <p:txBody>
+          <a:bodyPr wrap="square" lIns="45720" rIns="45720" anchor="t">
+            <a:spAutoFit/>
+          </a:bodyPr>
+          <a:lstStyle/>
+          <a:p>
+            <a:pPr algn="ctr">
+              <a:defRPr sz="1400" b="0">
+                <a:solidFill>
+                  <a:srgbClr val="FFFFFF"/>
+                </a:solidFill>
+                <a:latin typeface="Aptos"/>
+              </a:defRPr>
+            </a:pPr>
+            <a:r>
+              <a:rPr dirty="0"/>
+              <a:t>Tables métier</a:t>
+            </a:r>
+            <a:br>
+              <a:rPr dirty="0"/>
+            </a:br>
+            <a:r>
+              <a:rPr dirty="0"/>
+              <a:t>fact + dim</a:t>
+            </a:r>
+          </a:p>
+        </p:txBody>
+      </p:sp>
+      <p:sp>
+        <p:nvSpPr>
+          <p:cNvPr id="21" name="Rounded Rectangle 16">
+            <a:extLst>
+              <a:ext uri="{FF2B5EF4-FFF2-40B4-BE49-F238E27FC236}">
+                <a16:creationId xmlns:a16="http://schemas.microsoft.com/office/drawing/2014/main" id="{182F2DAF-C4DF-34ED-C6C7-A23BDDAD5916}"/>
+              </a:ext>
+            </a:extLst>
+          </p:cNvPr>
+          <p:cNvSpPr/>
+          <p:nvPr/>
+        </p:nvSpPr>
+        <p:spPr>
+          <a:xfrm>
+            <a:off x="9143571" y="4507230"/>
+            <a:ext cx="2240280" cy="2286000"/>
+          </a:xfrm>
+          <a:prstGeom prst="roundRect">
+            <a:avLst/>
+          </a:prstGeom>
+          <a:solidFill>
+            <a:srgbClr val="F15333"/>
+          </a:solidFill>
+          <a:ln w="10160">
+            <a:solidFill>
+              <a:srgbClr val="F15333"/>
+            </a:solidFill>
+          </a:ln>
+        </p:spPr>
+        <p:style>
+          <a:lnRef idx="1">
+            <a:schemeClr val="accent1"/>
+          </a:lnRef>
+          <a:fillRef idx="3">
+            <a:schemeClr val="accent1"/>
+          </a:fillRef>
+          <a:effectRef idx="2">
+            <a:schemeClr val="accent1"/>
+          </a:effectRef>
+          <a:fontRef idx="minor">
+            <a:schemeClr val="lt1"/>
+          </a:fontRef>
+        </p:style>
+        <p:txBody>
+          <a:bodyPr rtlCol="0" anchor="ctr"/>
+          <a:lstStyle/>
+          <a:p>
+            <a:pPr algn="ctr"/>
+            <a:endParaRPr/>
+          </a:p>
+        </p:txBody>
+      </p:sp>
+      <p:sp>
+        <p:nvSpPr>
+          <p:cNvPr id="22" name="TextBox 17">
+            <a:extLst>
+              <a:ext uri="{FF2B5EF4-FFF2-40B4-BE49-F238E27FC236}">
+                <a16:creationId xmlns:a16="http://schemas.microsoft.com/office/drawing/2014/main" id="{0474E1C8-B6C2-5891-AA93-49DDED442BA7}"/>
+              </a:ext>
+            </a:extLst>
+          </p:cNvPr>
+          <p:cNvSpPr txBox="1"/>
+          <p:nvPr/>
+        </p:nvSpPr>
+        <p:spPr>
+          <a:xfrm>
+            <a:off x="9277136" y="4959019"/>
+            <a:ext cx="1965960" cy="400110"/>
+          </a:xfrm>
+          <a:prstGeom prst="rect">
+            <a:avLst/>
+          </a:prstGeom>
+          <a:noFill/>
+        </p:spPr>
+        <p:txBody>
+          <a:bodyPr wrap="square" lIns="45720" rIns="45720" anchor="t">
+            <a:spAutoFit/>
+          </a:bodyPr>
+          <a:lstStyle/>
+          <a:p>
+            <a:pPr algn="ctr">
+              <a:defRPr sz="2000" b="1">
+                <a:solidFill>
+                  <a:srgbClr val="FFFFFF"/>
+                </a:solidFill>
+                <a:latin typeface="Aptos"/>
+              </a:defRPr>
+            </a:pPr>
+            <a:r>
+              <a:rPr lang="fr-FR" dirty="0" err="1"/>
+              <a:t>seed</a:t>
+            </a:r>
+            <a:endParaRPr dirty="0"/>
+          </a:p>
+        </p:txBody>
+      </p:sp>
+      <p:sp>
+        <p:nvSpPr>
+          <p:cNvPr id="23" name="TextBox 18">
+            <a:extLst>
+              <a:ext uri="{FF2B5EF4-FFF2-40B4-BE49-F238E27FC236}">
+                <a16:creationId xmlns:a16="http://schemas.microsoft.com/office/drawing/2014/main" id="{5DC7A689-2494-F8E1-2230-25B8260FF817}"/>
+              </a:ext>
+            </a:extLst>
+          </p:cNvPr>
+          <p:cNvSpPr txBox="1"/>
+          <p:nvPr/>
+        </p:nvSpPr>
+        <p:spPr>
+          <a:xfrm>
+            <a:off x="9368575" y="5599099"/>
+            <a:ext cx="1783080" cy="738664"/>
+          </a:xfrm>
+          <a:prstGeom prst="rect">
+            <a:avLst/>
+          </a:prstGeom>
+          <a:noFill/>
+        </p:spPr>
+        <p:txBody>
+          <a:bodyPr wrap="square" lIns="45720" rIns="45720" anchor="t">
+            <a:spAutoFit/>
+          </a:bodyPr>
+          <a:lstStyle/>
+          <a:p>
+            <a:pPr algn="ctr">
+              <a:defRPr sz="1400" b="0">
+                <a:solidFill>
+                  <a:srgbClr val="FFFFFF"/>
+                </a:solidFill>
+                <a:latin typeface="Aptos"/>
+              </a:defRPr>
+            </a:pPr>
+            <a:r>
+              <a:rPr lang="fr-FR" dirty="0"/>
+              <a:t>Métadonnées stations</a:t>
+            </a:r>
+          </a:p>
+          <a:p>
+            <a:pPr algn="ctr">
+              <a:defRPr sz="1400" b="0">
+                <a:solidFill>
+                  <a:srgbClr val="FFFFFF"/>
+                </a:solidFill>
+                <a:latin typeface="Aptos"/>
+              </a:defRPr>
+            </a:pPr>
+            <a:r>
+              <a:rPr lang="fr-FR" dirty="0"/>
+              <a:t>Heures</a:t>
+            </a:r>
+            <a:endParaRPr dirty="0"/>
+          </a:p>
+        </p:txBody>
+      </p:sp>
+      <p:cxnSp>
+        <p:nvCxnSpPr>
+          <p:cNvPr id="24" name="Connector 15">
+            <a:extLst>
+              <a:ext uri="{FF2B5EF4-FFF2-40B4-BE49-F238E27FC236}">
+                <a16:creationId xmlns:a16="http://schemas.microsoft.com/office/drawing/2014/main" id="{20D3E8B6-02D9-DAAA-C608-3078B9521A3C}"/>
+              </a:ext>
+            </a:extLst>
+          </p:cNvPr>
+          <p:cNvCxnSpPr>
+            <a:cxnSpLocks/>
+            <a:stCxn id="17" idx="2"/>
+            <a:endCxn id="21" idx="0"/>
+          </p:cNvCxnSpPr>
+          <p:nvPr/>
+        </p:nvCxnSpPr>
+        <p:spPr>
+          <a:xfrm>
+            <a:off x="10260115" y="4229200"/>
+            <a:ext cx="3596" cy="278030"/>
+          </a:xfrm>
+          <a:prstGeom prst="line">
+            <a:avLst/>
+          </a:prstGeom>
+          <a:ln w="25400">
+            <a:solidFill>
+              <a:srgbClr val="17BEBB"/>
+            </a:solidFill>
+          </a:ln>
+        </p:spPr>
+        <p:style>
+          <a:lnRef idx="2">
+            <a:schemeClr val="accent1"/>
+          </a:lnRef>
+          <a:fillRef idx="0">
+            <a:schemeClr val="accent1"/>
+          </a:fillRef>
+          <a:effectRef idx="1">
+            <a:schemeClr val="accent1"/>
+          </a:effectRef>
+          <a:fontRef idx="minor">
+            <a:schemeClr val="tx1"/>
+          </a:fontRef>
+        </p:style>
+      </p:cxnSp>
+      <p:sp>
+        <p:nvSpPr>
+          <p:cNvPr id="28" name="Rounded Rectangle 16">
+            <a:extLst>
+              <a:ext uri="{FF2B5EF4-FFF2-40B4-BE49-F238E27FC236}">
+                <a16:creationId xmlns:a16="http://schemas.microsoft.com/office/drawing/2014/main" id="{B38D0D20-8EBF-B571-C088-27ED944D6123}"/>
+              </a:ext>
+            </a:extLst>
+          </p:cNvPr>
+          <p:cNvSpPr/>
+          <p:nvPr/>
+        </p:nvSpPr>
+        <p:spPr>
+          <a:xfrm>
+            <a:off x="6323386" y="4503039"/>
+            <a:ext cx="2240280" cy="2286000"/>
+          </a:xfrm>
+          <a:prstGeom prst="roundRect">
+            <a:avLst/>
+          </a:prstGeom>
+          <a:solidFill>
+            <a:srgbClr val="F6A2F8"/>
+          </a:solidFill>
+          <a:ln w="10160">
+            <a:solidFill>
+              <a:srgbClr val="F6A2F8"/>
+            </a:solidFill>
+          </a:ln>
+        </p:spPr>
+        <p:style>
+          <a:lnRef idx="1">
+            <a:schemeClr val="accent1"/>
+          </a:lnRef>
+          <a:fillRef idx="3">
+            <a:schemeClr val="accent1"/>
+          </a:fillRef>
+          <a:effectRef idx="2">
+            <a:schemeClr val="accent1"/>
+          </a:effectRef>
+          <a:fontRef idx="minor">
+            <a:schemeClr val="lt1"/>
+          </a:fontRef>
+        </p:style>
+        <p:txBody>
+          <a:bodyPr rtlCol="0" anchor="ctr"/>
+          <a:lstStyle/>
+          <a:p>
+            <a:pPr algn="ctr"/>
+            <a:endParaRPr/>
+          </a:p>
+        </p:txBody>
+      </p:sp>
+      <p:sp>
+        <p:nvSpPr>
+          <p:cNvPr id="29" name="TextBox 17">
+            <a:extLst>
+              <a:ext uri="{FF2B5EF4-FFF2-40B4-BE49-F238E27FC236}">
+                <a16:creationId xmlns:a16="http://schemas.microsoft.com/office/drawing/2014/main" id="{102671C6-8BCD-7A94-517E-BB48363511A1}"/>
+              </a:ext>
+            </a:extLst>
+          </p:cNvPr>
+          <p:cNvSpPr txBox="1"/>
+          <p:nvPr/>
+        </p:nvSpPr>
+        <p:spPr>
+          <a:xfrm>
+            <a:off x="6456951" y="4954828"/>
+            <a:ext cx="1965960" cy="400110"/>
+          </a:xfrm>
+          <a:prstGeom prst="rect">
+            <a:avLst/>
+          </a:prstGeom>
+          <a:noFill/>
+        </p:spPr>
+        <p:txBody>
+          <a:bodyPr wrap="square" lIns="45720" rIns="45720" anchor="t">
+            <a:spAutoFit/>
+          </a:bodyPr>
+          <a:lstStyle/>
+          <a:p>
+            <a:pPr algn="ctr">
+              <a:defRPr sz="2000" b="1">
+                <a:solidFill>
+                  <a:srgbClr val="FFFFFF"/>
+                </a:solidFill>
+                <a:latin typeface="Aptos"/>
+              </a:defRPr>
+            </a:pPr>
+            <a:r>
+              <a:rPr lang="fr-FR" dirty="0"/>
+              <a:t>test</a:t>
+            </a:r>
+            <a:endParaRPr dirty="0"/>
+          </a:p>
+        </p:txBody>
+      </p:sp>
+      <p:sp>
+        <p:nvSpPr>
+          <p:cNvPr id="30" name="TextBox 18">
+            <a:extLst>
+              <a:ext uri="{FF2B5EF4-FFF2-40B4-BE49-F238E27FC236}">
+                <a16:creationId xmlns:a16="http://schemas.microsoft.com/office/drawing/2014/main" id="{0A0E9574-2131-20F8-6B7C-1D58CBDC9673}"/>
+              </a:ext>
+            </a:extLst>
+          </p:cNvPr>
+          <p:cNvSpPr txBox="1"/>
+          <p:nvPr/>
+        </p:nvSpPr>
+        <p:spPr>
+          <a:xfrm>
+            <a:off x="6548390" y="5594908"/>
+            <a:ext cx="1783080" cy="1169551"/>
+          </a:xfrm>
+          <a:prstGeom prst="rect">
+            <a:avLst/>
+          </a:prstGeom>
+          <a:noFill/>
+        </p:spPr>
+        <p:txBody>
+          <a:bodyPr wrap="square" lIns="45720" rIns="45720" anchor="t">
+            <a:spAutoFit/>
+          </a:bodyPr>
+          <a:lstStyle/>
+          <a:p>
+            <a:pPr algn="ctr">
+              <a:defRPr sz="1400" b="0">
+                <a:solidFill>
+                  <a:srgbClr val="FFFFFF"/>
+                </a:solidFill>
+                <a:latin typeface="Aptos"/>
+              </a:defRPr>
+            </a:pPr>
+            <a:r>
+              <a:rPr lang="fr-FR" dirty="0"/>
+              <a:t>Test spécifiques</a:t>
+            </a:r>
+          </a:p>
+          <a:p>
+            <a:pPr algn="ctr">
+              <a:defRPr sz="1400" b="0">
+                <a:solidFill>
+                  <a:srgbClr val="FFFFFF"/>
+                </a:solidFill>
+                <a:latin typeface="Aptos"/>
+              </a:defRPr>
+            </a:pPr>
+            <a:r>
+              <a:rPr lang="fr-FR" dirty="0"/>
+              <a:t>Température</a:t>
+            </a:r>
+          </a:p>
+          <a:p>
+            <a:pPr algn="ctr">
+              <a:defRPr sz="1400" b="0">
+                <a:solidFill>
+                  <a:srgbClr val="FFFFFF"/>
+                </a:solidFill>
+                <a:latin typeface="Aptos"/>
+              </a:defRPr>
+            </a:pPr>
+            <a:r>
+              <a:rPr lang="fr-FR" dirty="0" err="1"/>
+              <a:t>Wind_direction</a:t>
+            </a:r>
+            <a:endParaRPr lang="fr-FR" dirty="0"/>
+          </a:p>
+          <a:p>
+            <a:pPr algn="ctr">
+              <a:defRPr sz="1400" b="0">
+                <a:solidFill>
+                  <a:srgbClr val="FFFFFF"/>
+                </a:solidFill>
+                <a:latin typeface="Aptos"/>
+              </a:defRPr>
+            </a:pPr>
+            <a:r>
+              <a:rPr lang="fr-FR" dirty="0"/>
+              <a:t>speed </a:t>
+            </a:r>
+          </a:p>
+          <a:p>
+            <a:pPr algn="ctr">
+              <a:defRPr sz="1400" b="0">
+                <a:solidFill>
+                  <a:srgbClr val="FFFFFF"/>
+                </a:solidFill>
+                <a:latin typeface="Aptos"/>
+              </a:defRPr>
+            </a:pPr>
+            <a:r>
+              <a:rPr lang="fr-FR" dirty="0" err="1"/>
+              <a:t>humidity</a:t>
+            </a:r>
+            <a:endParaRPr dirty="0"/>
+          </a:p>
+        </p:txBody>
+      </p:sp>
+      <p:cxnSp>
+        <p:nvCxnSpPr>
+          <p:cNvPr id="31" name="Connector 15">
+            <a:extLst>
+              <a:ext uri="{FF2B5EF4-FFF2-40B4-BE49-F238E27FC236}">
+                <a16:creationId xmlns:a16="http://schemas.microsoft.com/office/drawing/2014/main" id="{5A7E3BE7-87B3-E40E-C575-EC9967702DCF}"/>
+              </a:ext>
+            </a:extLst>
+          </p:cNvPr>
+          <p:cNvCxnSpPr>
+            <a:cxnSpLocks/>
+          </p:cNvCxnSpPr>
+          <p:nvPr/>
+        </p:nvCxnSpPr>
+        <p:spPr>
+          <a:xfrm flipV="1">
+            <a:off x="8527328" y="4114800"/>
+            <a:ext cx="749808" cy="508000"/>
+          </a:xfrm>
+          <a:prstGeom prst="line">
+            <a:avLst/>
+          </a:prstGeom>
+          <a:ln w="25400">
+            <a:solidFill>
+              <a:srgbClr val="17BEBB"/>
+            </a:solidFill>
+          </a:ln>
+        </p:spPr>
+        <p:style>
+          <a:lnRef idx="2">
+            <a:schemeClr val="accent1"/>
+          </a:lnRef>
+          <a:fillRef idx="0">
+            <a:schemeClr val="accent1"/>
+          </a:fillRef>
+          <a:effectRef idx="1">
+            <a:schemeClr val="accent1"/>
+          </a:effectRef>
+          <a:fontRef idx="minor">
+            <a:schemeClr val="tx1"/>
+          </a:fontRef>
+        </p:style>
+      </p:cxnSp>
+      <p:sp>
+        <p:nvSpPr>
+          <p:cNvPr id="39" name="TextBox 5">
+            <a:extLst>
+              <a:ext uri="{FF2B5EF4-FFF2-40B4-BE49-F238E27FC236}">
+                <a16:creationId xmlns:a16="http://schemas.microsoft.com/office/drawing/2014/main" id="{61C7C67E-E175-0313-FD12-0B5BE1C58F04}"/>
+              </a:ext>
+            </a:extLst>
+          </p:cNvPr>
+          <p:cNvSpPr txBox="1"/>
+          <p:nvPr/>
+        </p:nvSpPr>
+        <p:spPr>
+          <a:xfrm rot="16200000">
+            <a:off x="-624256" y="2958792"/>
+            <a:ext cx="1965960" cy="307777"/>
+          </a:xfrm>
+          <a:prstGeom prst="rect">
+            <a:avLst/>
+          </a:prstGeom>
+          <a:noFill/>
+        </p:spPr>
+        <p:txBody>
+          <a:bodyPr wrap="square" lIns="45720" rIns="45720" anchor="t">
+            <a:spAutoFit/>
+          </a:bodyPr>
+          <a:lstStyle/>
+          <a:p>
+            <a:pPr algn="ctr">
+              <a:defRPr sz="2000" b="1">
+                <a:solidFill>
+                  <a:srgbClr val="FFFFFF"/>
+                </a:solidFill>
+                <a:latin typeface="Aptos"/>
+              </a:defRPr>
+            </a:pPr>
+            <a:r>
+              <a:rPr lang="fr-FR" sz="1400" dirty="0">
+                <a:solidFill>
+                  <a:schemeClr val="tx2"/>
+                </a:solidFill>
+              </a:rPr>
+              <a:t>Schéma </a:t>
+            </a:r>
+            <a:r>
+              <a:rPr sz="1400" dirty="0">
+                <a:solidFill>
+                  <a:schemeClr val="tx2"/>
+                </a:solidFill>
+              </a:rPr>
+              <a:t>raw</a:t>
+            </a:r>
+          </a:p>
+        </p:txBody>
+      </p:sp>
+      <p:sp>
+        <p:nvSpPr>
+          <p:cNvPr id="40" name="TextBox 5">
+            <a:extLst>
+              <a:ext uri="{FF2B5EF4-FFF2-40B4-BE49-F238E27FC236}">
+                <a16:creationId xmlns:a16="http://schemas.microsoft.com/office/drawing/2014/main" id="{B1BF2552-1547-288C-3353-FC0E5E05076F}"/>
+              </a:ext>
+            </a:extLst>
+          </p:cNvPr>
+          <p:cNvSpPr txBox="1"/>
+          <p:nvPr/>
+        </p:nvSpPr>
+        <p:spPr>
+          <a:xfrm rot="16200000">
+            <a:off x="10645098" y="2977931"/>
+            <a:ext cx="1965960" cy="307777"/>
+          </a:xfrm>
+          <a:prstGeom prst="rect">
+            <a:avLst/>
+          </a:prstGeom>
+          <a:noFill/>
+        </p:spPr>
+        <p:txBody>
+          <a:bodyPr wrap="square" lIns="45720" rIns="45720" anchor="t">
+            <a:spAutoFit/>
+          </a:bodyPr>
+          <a:lstStyle/>
+          <a:p>
+            <a:pPr algn="ctr">
+              <a:defRPr sz="2000" b="1">
+                <a:solidFill>
+                  <a:srgbClr val="FFFFFF"/>
+                </a:solidFill>
+                <a:latin typeface="Aptos"/>
+              </a:defRPr>
+            </a:pPr>
+            <a:r>
+              <a:rPr lang="fr-FR" sz="1400" dirty="0">
+                <a:solidFill>
+                  <a:schemeClr val="tx2"/>
+                </a:solidFill>
+              </a:rPr>
+              <a:t>Schéma </a:t>
+            </a:r>
+            <a:r>
+              <a:rPr lang="fr-FR" sz="1400" dirty="0" err="1">
+                <a:solidFill>
+                  <a:schemeClr val="tx2"/>
+                </a:solidFill>
+              </a:rPr>
+              <a:t>analytics</a:t>
+            </a:r>
+            <a:endParaRPr sz="1400" dirty="0">
+              <a:solidFill>
+                <a:schemeClr val="tx2"/>
+              </a:solidFill>
+            </a:endParaRPr>
+          </a:p>
+        </p:txBody>
+      </p:sp>
+    </p:spTree>
+    <p:extLst>
+      <p:ext uri="{BB962C8B-B14F-4D97-AF65-F5344CB8AC3E}">
+        <p14:creationId xmlns:p14="http://schemas.microsoft.com/office/powerpoint/2010/main" val="1023096126"/>
+      </p:ext>
+    </p:extLst>
+  </p:cSld>
+  <p:clrMapOvr>
+    <a:masterClrMapping/>
+  </p:clrMapOvr>
+</p:sld>
+</file>
+
+<file path=ppt/slides/slide16.xml><?xml version="1.0" encoding="utf-8"?>
+<p:sld xmlns:a="http://schemas.openxmlformats.org/drawingml/2006/main" xmlns:r="http://schemas.openxmlformats.org/officeDocument/2006/relationships" xmlns:p="http://schemas.openxmlformats.org/presentationml/2006/main">
+  <p:cSld>
+    <p:spTree>
+      <p:nvGrpSpPr>
+        <p:cNvPr id="1" name=""/>
+        <p:cNvGrpSpPr/>
+        <p:nvPr/>
+      </p:nvGrpSpPr>
+      <p:grpSpPr>
+        <a:xfrm>
+          <a:off x="0" y="0"/>
+          <a:ext cx="0" cy="0"/>
+          <a:chOff x="0" y="0"/>
+          <a:chExt cx="0" cy="0"/>
+        </a:xfrm>
+      </p:grpSpPr>
+      <p:sp>
+        <p:nvSpPr>
+          <p:cNvPr id="2" name="Titre 1">
+            <a:extLst>
+              <a:ext uri="{FF2B5EF4-FFF2-40B4-BE49-F238E27FC236}">
+                <a16:creationId xmlns:a16="http://schemas.microsoft.com/office/drawing/2014/main" id="{E11D0E35-BCDC-830F-709A-ED57F55712AF}"/>
+              </a:ext>
+            </a:extLst>
+          </p:cNvPr>
+          <p:cNvSpPr>
+            <a:spLocks noGrp="1"/>
+          </p:cNvSpPr>
+          <p:nvPr>
+            <p:ph type="title"/>
+          </p:nvPr>
+        </p:nvSpPr>
+        <p:spPr/>
+        <p:txBody>
+          <a:bodyPr/>
+          <a:lstStyle/>
+          <a:p>
+            <a:r>
+              <a:rPr lang="fr-FR" dirty="0"/>
+              <a:t>6. Mise en place DBT</a:t>
+            </a:r>
+            <a:br>
+              <a:rPr lang="fr-FR" dirty="0"/>
+            </a:br>
+            <a:endParaRPr lang="fr-FR" dirty="0"/>
+          </a:p>
+        </p:txBody>
+      </p:sp>
+      <p:sp>
+        <p:nvSpPr>
+          <p:cNvPr id="3" name="Espace réservé du contenu 2">
+            <a:extLst>
+              <a:ext uri="{FF2B5EF4-FFF2-40B4-BE49-F238E27FC236}">
+                <a16:creationId xmlns:a16="http://schemas.microsoft.com/office/drawing/2014/main" id="{1739F617-04B0-E842-D52E-D555EE905E65}"/>
+              </a:ext>
+            </a:extLst>
+          </p:cNvPr>
+          <p:cNvSpPr>
+            <a:spLocks noGrp="1"/>
+          </p:cNvSpPr>
+          <p:nvPr>
+            <p:ph idx="1"/>
+          </p:nvPr>
+        </p:nvSpPr>
+        <p:spPr/>
+        <p:txBody>
+          <a:bodyPr/>
+          <a:lstStyle/>
+          <a:p>
+            <a:r>
+              <a:rPr lang="fr-FR" dirty="0"/>
+              <a:t>Commande </a:t>
+            </a:r>
+            <a:r>
+              <a:rPr lang="fr-FR" b="1" i="1" dirty="0" err="1"/>
+              <a:t>dbt</a:t>
+            </a:r>
+            <a:r>
+              <a:rPr lang="fr-FR" b="1" i="1" dirty="0"/>
+              <a:t> docs serve</a:t>
+            </a:r>
+          </a:p>
+          <a:p>
+            <a:endParaRPr lang="fr-FR" dirty="0"/>
+          </a:p>
+          <a:p>
+            <a:endParaRPr lang="fr-FR" dirty="0"/>
+          </a:p>
+          <a:p>
+            <a:endParaRPr lang="fr-FR" dirty="0"/>
+          </a:p>
+          <a:p>
+            <a:endParaRPr lang="fr-FR" dirty="0"/>
+          </a:p>
+          <a:p>
+            <a:endParaRPr lang="fr-FR" dirty="0"/>
+          </a:p>
+          <a:p>
+            <a:endParaRPr lang="fr-FR" dirty="0"/>
+          </a:p>
+          <a:p>
+            <a:endParaRPr lang="fr-FR" dirty="0"/>
+          </a:p>
+          <a:p>
+            <a:endParaRPr lang="fr-FR" dirty="0"/>
+          </a:p>
+        </p:txBody>
+      </p:sp>
+      <p:sp>
+        <p:nvSpPr>
+          <p:cNvPr id="4" name="Espace réservé de la date 3">
+            <a:extLst>
+              <a:ext uri="{FF2B5EF4-FFF2-40B4-BE49-F238E27FC236}">
+                <a16:creationId xmlns:a16="http://schemas.microsoft.com/office/drawing/2014/main" id="{849DF038-2956-38BA-1941-E4BB571C463B}"/>
+              </a:ext>
+            </a:extLst>
+          </p:cNvPr>
+          <p:cNvSpPr>
+            <a:spLocks noGrp="1"/>
+          </p:cNvSpPr>
+          <p:nvPr>
+            <p:ph type="dt" sz="half" idx="10"/>
+          </p:nvPr>
+        </p:nvSpPr>
+        <p:spPr/>
+        <p:txBody>
+          <a:bodyPr/>
+          <a:lstStyle/>
+          <a:p>
+            <a:pPr rtl="0"/>
+            <a:fld id="{22897033-9A55-4DAC-991D-1FF1921C78B7}" type="datetime1">
+              <a:rPr lang="fr-FR" smtClean="0"/>
+              <a:t>19/08/2026</a:t>
+            </a:fld>
+            <a:endParaRPr lang="en-US" dirty="0"/>
+          </a:p>
+        </p:txBody>
+      </p:sp>
+      <p:pic>
+        <p:nvPicPr>
+          <p:cNvPr id="6" name="Image 5">
+            <a:extLst>
+              <a:ext uri="{FF2B5EF4-FFF2-40B4-BE49-F238E27FC236}">
+                <a16:creationId xmlns:a16="http://schemas.microsoft.com/office/drawing/2014/main" id="{E78C1690-CD47-612A-6BFD-45422F02F519}"/>
+              </a:ext>
+            </a:extLst>
+          </p:cNvPr>
+          <p:cNvPicPr>
+            <a:picLocks noChangeAspect="1"/>
+          </p:cNvPicPr>
+          <p:nvPr/>
+        </p:nvPicPr>
+        <p:blipFill>
+          <a:blip r:embed="rId2"/>
+          <a:stretch>
+            <a:fillRect/>
+          </a:stretch>
+        </p:blipFill>
+        <p:spPr>
+          <a:xfrm>
+            <a:off x="0" y="2926219"/>
+            <a:ext cx="12192000" cy="3229625"/>
+          </a:xfrm>
+          <a:prstGeom prst="rect">
+            <a:avLst/>
+          </a:prstGeom>
+        </p:spPr>
+      </p:pic>
+    </p:spTree>
+    <p:extLst>
+      <p:ext uri="{BB962C8B-B14F-4D97-AF65-F5344CB8AC3E}">
+        <p14:creationId xmlns:p14="http://schemas.microsoft.com/office/powerpoint/2010/main" val="318623322"/>
+      </p:ext>
+    </p:extLst>
+  </p:cSld>
+  <p:clrMapOvr>
+    <a:masterClrMapping/>
+  </p:clrMapOvr>
+</p:sld>
+</file>
+
+<file path=ppt/slides/slide17.xml><?xml version="1.0" encoding="utf-8"?>
+<p:sld xmlns:a="http://schemas.openxmlformats.org/drawingml/2006/main" xmlns:r="http://schemas.openxmlformats.org/officeDocument/2006/relationships" xmlns:p="http://schemas.openxmlformats.org/presentationml/2006/main">
+  <p:cSld>
+    <p:spTree>
+      <p:nvGrpSpPr>
+        <p:cNvPr id="1" name=""/>
+        <p:cNvGrpSpPr/>
+        <p:nvPr/>
+      </p:nvGrpSpPr>
+      <p:grpSpPr>
+        <a:xfrm>
+          <a:off x="0" y="0"/>
+          <a:ext cx="0" cy="0"/>
+          <a:chOff x="0" y="0"/>
+          <a:chExt cx="0" cy="0"/>
+        </a:xfrm>
+      </p:grpSpPr>
+      <p:sp>
+        <p:nvSpPr>
+          <p:cNvPr id="2" name="Titre 1">
+            <a:extLst>
+              <a:ext uri="{FF2B5EF4-FFF2-40B4-BE49-F238E27FC236}">
+                <a16:creationId xmlns:a16="http://schemas.microsoft.com/office/drawing/2014/main" id="{18437D7D-AB73-67B7-0D0B-2CECBD61D4B6}"/>
+              </a:ext>
+            </a:extLst>
+          </p:cNvPr>
+          <p:cNvSpPr>
+            <a:spLocks noGrp="1"/>
+          </p:cNvSpPr>
+          <p:nvPr>
+            <p:ph type="title"/>
+          </p:nvPr>
+        </p:nvSpPr>
+        <p:spPr/>
+        <p:txBody>
+          <a:bodyPr/>
+          <a:lstStyle/>
+          <a:p>
+            <a:r>
+              <a:rPr lang="fr-FR" dirty="0"/>
+              <a:t>7. temps accessibilité aux données</a:t>
+            </a:r>
+          </a:p>
+        </p:txBody>
+      </p:sp>
+      <p:sp>
+        <p:nvSpPr>
+          <p:cNvPr id="3" name="Espace réservé du contenu 2">
+            <a:extLst>
+              <a:ext uri="{FF2B5EF4-FFF2-40B4-BE49-F238E27FC236}">
+                <a16:creationId xmlns:a16="http://schemas.microsoft.com/office/drawing/2014/main" id="{89EDB518-4A15-F6F1-E72D-43D1DA23EC92}"/>
+              </a:ext>
+            </a:extLst>
+          </p:cNvPr>
+          <p:cNvSpPr>
+            <a:spLocks noGrp="1"/>
+          </p:cNvSpPr>
+          <p:nvPr>
+            <p:ph idx="1"/>
+          </p:nvPr>
+        </p:nvSpPr>
+        <p:spPr/>
+        <p:txBody>
+          <a:bodyPr/>
+          <a:lstStyle/>
+          <a:p>
+            <a:r>
+              <a:rPr lang="fr-FR" dirty="0"/>
+              <a:t>Log </a:t>
+            </a:r>
+            <a:r>
+              <a:rPr lang="fr-FR" dirty="0" err="1"/>
+              <a:t>Airbyte</a:t>
+            </a:r>
+            <a:r>
+              <a:rPr lang="fr-FR" dirty="0"/>
+              <a:t> à charger + </a:t>
+            </a:r>
+            <a:r>
+              <a:rPr lang="fr-FR" dirty="0" err="1"/>
+              <a:t>seed</a:t>
+            </a:r>
+            <a:endParaRPr lang="fr-FR" dirty="0"/>
+          </a:p>
+        </p:txBody>
+      </p:sp>
+      <p:sp>
+        <p:nvSpPr>
+          <p:cNvPr id="4" name="Espace réservé de la date 3">
+            <a:extLst>
+              <a:ext uri="{FF2B5EF4-FFF2-40B4-BE49-F238E27FC236}">
+                <a16:creationId xmlns:a16="http://schemas.microsoft.com/office/drawing/2014/main" id="{9FDB8A50-7536-F842-72A4-46515A7DE5D6}"/>
+              </a:ext>
+            </a:extLst>
+          </p:cNvPr>
+          <p:cNvSpPr>
+            <a:spLocks noGrp="1"/>
+          </p:cNvSpPr>
+          <p:nvPr>
+            <p:ph type="dt" sz="half" idx="10"/>
+          </p:nvPr>
+        </p:nvSpPr>
+        <p:spPr/>
+        <p:txBody>
+          <a:bodyPr/>
+          <a:lstStyle/>
+          <a:p>
+            <a:pPr rtl="0"/>
+            <a:fld id="{22897033-9A55-4DAC-991D-1FF1921C78B7}" type="datetime1">
+              <a:rPr lang="fr-FR" smtClean="0"/>
+              <a:t>19/08/2026</a:t>
+            </a:fld>
+            <a:endParaRPr lang="en-US" dirty="0"/>
+          </a:p>
+        </p:txBody>
+      </p:sp>
+    </p:spTree>
+    <p:extLst>
+      <p:ext uri="{BB962C8B-B14F-4D97-AF65-F5344CB8AC3E}">
+        <p14:creationId xmlns:p14="http://schemas.microsoft.com/office/powerpoint/2010/main" val="90262541"/>
+      </p:ext>
+    </p:extLst>
+  </p:cSld>
+  <p:clrMapOvr>
+    <a:masterClrMapping/>
+  </p:clrMapOvr>
+</p:sld>
+</file>
+
+<file path=ppt/slides/slide18.xml><?xml version="1.0" encoding="utf-8"?>
+<p:sld xmlns:a="http://schemas.openxmlformats.org/drawingml/2006/main" xmlns:r="http://schemas.openxmlformats.org/officeDocument/2006/relationships" xmlns:p="http://schemas.openxmlformats.org/presentationml/2006/main">
+  <p:cSld>
+    <p:spTree>
+      <p:nvGrpSpPr>
+        <p:cNvPr id="1" name=""/>
+        <p:cNvGrpSpPr/>
+        <p:nvPr/>
+      </p:nvGrpSpPr>
+      <p:grpSpPr>
+        <a:xfrm>
+          <a:off x="0" y="0"/>
+          <a:ext cx="0" cy="0"/>
+          <a:chOff x="0" y="0"/>
+          <a:chExt cx="0" cy="0"/>
+        </a:xfrm>
+      </p:grpSpPr>
+      <p:sp>
+        <p:nvSpPr>
+          <p:cNvPr id="2" name="Titre 1">
+            <a:extLst>
+              <a:ext uri="{FF2B5EF4-FFF2-40B4-BE49-F238E27FC236}">
+                <a16:creationId xmlns:a16="http://schemas.microsoft.com/office/drawing/2014/main" id="{1C4CC017-D4E6-EF3B-F567-8E1DF81BEE69}"/>
+              </a:ext>
+            </a:extLst>
+          </p:cNvPr>
+          <p:cNvSpPr>
+            <a:spLocks noGrp="1"/>
+          </p:cNvSpPr>
+          <p:nvPr>
+            <p:ph type="title"/>
+          </p:nvPr>
+        </p:nvSpPr>
+        <p:spPr/>
+        <p:txBody>
+          <a:bodyPr/>
+          <a:lstStyle/>
+          <a:p>
+            <a:r>
+              <a:rPr lang="fr-FR" dirty="0"/>
+              <a:t>7. temps accessibilité aux données</a:t>
+            </a:r>
+          </a:p>
+        </p:txBody>
+      </p:sp>
+      <p:sp>
+        <p:nvSpPr>
+          <p:cNvPr id="4" name="Espace réservé de la date 3">
+            <a:extLst>
+              <a:ext uri="{FF2B5EF4-FFF2-40B4-BE49-F238E27FC236}">
+                <a16:creationId xmlns:a16="http://schemas.microsoft.com/office/drawing/2014/main" id="{765A87D0-4BCC-68DF-11C9-3CB0062362F5}"/>
+              </a:ext>
+            </a:extLst>
+          </p:cNvPr>
+          <p:cNvSpPr>
+            <a:spLocks noGrp="1"/>
+          </p:cNvSpPr>
+          <p:nvPr>
+            <p:ph type="dt" sz="half" idx="10"/>
+          </p:nvPr>
+        </p:nvSpPr>
+        <p:spPr/>
+        <p:txBody>
+          <a:bodyPr/>
+          <a:lstStyle/>
+          <a:p>
+            <a:pPr rtl="0"/>
+            <a:fld id="{22897033-9A55-4DAC-991D-1FF1921C78B7}" type="datetime1">
+              <a:rPr lang="fr-FR" smtClean="0"/>
+              <a:t>18/08/2026</a:t>
+            </a:fld>
+            <a:endParaRPr lang="en-US" dirty="0"/>
+          </a:p>
+        </p:txBody>
+      </p:sp>
+      <p:pic>
+        <p:nvPicPr>
+          <p:cNvPr id="8" name="Image 7">
+            <a:extLst>
+              <a:ext uri="{FF2B5EF4-FFF2-40B4-BE49-F238E27FC236}">
+                <a16:creationId xmlns:a16="http://schemas.microsoft.com/office/drawing/2014/main" id="{8FF749CA-524B-7D97-2C0A-C88A32F6E552}"/>
+              </a:ext>
+            </a:extLst>
+          </p:cNvPr>
+          <p:cNvPicPr>
+            <a:picLocks noChangeAspect="1"/>
+          </p:cNvPicPr>
+          <p:nvPr/>
+        </p:nvPicPr>
+        <p:blipFill>
+          <a:blip r:embed="rId2"/>
+          <a:stretch>
+            <a:fillRect/>
+          </a:stretch>
+        </p:blipFill>
+        <p:spPr>
+          <a:xfrm>
+            <a:off x="581192" y="2339440"/>
+            <a:ext cx="8688012" cy="3886742"/>
+          </a:xfrm>
+          <a:prstGeom prst="rect">
+            <a:avLst/>
+          </a:prstGeom>
+        </p:spPr>
+      </p:pic>
+      <p:sp>
+        <p:nvSpPr>
+          <p:cNvPr id="9" name="Rectangle 8">
+            <a:extLst>
+              <a:ext uri="{FF2B5EF4-FFF2-40B4-BE49-F238E27FC236}">
+                <a16:creationId xmlns:a16="http://schemas.microsoft.com/office/drawing/2014/main" id="{9E591C28-444A-7AE1-DCB0-4646E1938817}"/>
+              </a:ext>
+            </a:extLst>
+          </p:cNvPr>
+          <p:cNvSpPr/>
+          <p:nvPr/>
+        </p:nvSpPr>
+        <p:spPr>
+          <a:xfrm>
+            <a:off x="5293360" y="2661920"/>
+            <a:ext cx="3312160" cy="3048000"/>
+          </a:xfrm>
+          <a:prstGeom prst="rect">
+            <a:avLst/>
+          </a:prstGeom>
+          <a:noFill/>
+          <a:ln>
+            <a:solidFill>
+              <a:srgbClr val="002060"/>
+            </a:solidFill>
+          </a:ln>
+        </p:spPr>
+        <p:style>
+          <a:lnRef idx="2">
+            <a:schemeClr val="accent1">
+              <a:shade val="15000"/>
+            </a:schemeClr>
+          </a:lnRef>
+          <a:fillRef idx="1">
+            <a:schemeClr val="accent1"/>
+          </a:fillRef>
+          <a:effectRef idx="0">
+            <a:schemeClr val="accent1"/>
+          </a:effectRef>
+          <a:fontRef idx="minor">
+            <a:schemeClr val="lt1"/>
+          </a:fontRef>
+        </p:style>
+        <p:txBody>
+          <a:bodyPr rtlCol="0" anchor="ctr"/>
+          <a:lstStyle/>
+          <a:p>
+            <a:pPr algn="ctr"/>
+            <a:endParaRPr lang="fr-FR"/>
+          </a:p>
+        </p:txBody>
+      </p:sp>
+      <p:sp>
+        <p:nvSpPr>
+          <p:cNvPr id="10" name="ZoneTexte 9">
+            <a:extLst>
+              <a:ext uri="{FF2B5EF4-FFF2-40B4-BE49-F238E27FC236}">
+                <a16:creationId xmlns:a16="http://schemas.microsoft.com/office/drawing/2014/main" id="{1DA6F2CB-B5DC-F08C-E7B6-36062C3C8FD0}"/>
+              </a:ext>
+            </a:extLst>
+          </p:cNvPr>
+          <p:cNvSpPr txBox="1"/>
+          <p:nvPr/>
+        </p:nvSpPr>
+        <p:spPr>
+          <a:xfrm>
+            <a:off x="7797800" y="2685812"/>
+            <a:ext cx="904240" cy="369332"/>
+          </a:xfrm>
+          <a:prstGeom prst="rect">
+            <a:avLst/>
+          </a:prstGeom>
+          <a:noFill/>
+        </p:spPr>
+        <p:txBody>
+          <a:bodyPr wrap="square" rtlCol="0">
+            <a:spAutoFit/>
+          </a:bodyPr>
+          <a:lstStyle/>
+          <a:p>
+            <a:r>
+              <a:rPr lang="fr-FR" dirty="0" err="1"/>
+              <a:t>marts</a:t>
+            </a:r>
+            <a:endParaRPr lang="fr-FR" dirty="0"/>
+          </a:p>
+        </p:txBody>
+      </p:sp>
+    </p:spTree>
+    <p:extLst>
+      <p:ext uri="{BB962C8B-B14F-4D97-AF65-F5344CB8AC3E}">
+        <p14:creationId xmlns:p14="http://schemas.microsoft.com/office/powerpoint/2010/main" val="2802061433"/>
+      </p:ext>
+    </p:extLst>
+  </p:cSld>
+  <p:clrMapOvr>
+    <a:masterClrMapping/>
+  </p:clrMapOvr>
+</p:sld>
+</file>
+
+<file path=ppt/slides/slide19.xml><?xml version="1.0" encoding="utf-8"?>
+<p:sld xmlns:a="http://schemas.openxmlformats.org/drawingml/2006/main" xmlns:r="http://schemas.openxmlformats.org/officeDocument/2006/relationships" xmlns:p="http://schemas.openxmlformats.org/presentationml/2006/main">
+  <p:cSld>
+    <p:spTree>
+      <p:nvGrpSpPr>
         <p:cNvPr id="1" name=""/>
         <p:cNvGrpSpPr/>
         <p:nvPr/>
@@ -11657,27 +16178,115 @@
             <a:pPr rtl="0"/>
             <a:fld id="{22897033-9A55-4DAC-991D-1FF1921C78B7}" type="datetime1">
               <a:rPr lang="fr-FR" smtClean="0"/>
-              <a:t>16/08/2026</a:t>
+              <a:t>18/08/2026</a:t>
             </a:fld>
             <a:endParaRPr lang="en-US" dirty="0"/>
+          </a:p>
+        </p:txBody>
+      </p:sp>
+      <p:sp>
+        <p:nvSpPr>
+          <p:cNvPr id="7" name="Espace réservé du contenu 6">
+            <a:extLst>
+              <a:ext uri="{FF2B5EF4-FFF2-40B4-BE49-F238E27FC236}">
+                <a16:creationId xmlns:a16="http://schemas.microsoft.com/office/drawing/2014/main" id="{5E074480-F0AE-1940-D5E5-68A0603A5316}"/>
+              </a:ext>
+            </a:extLst>
+          </p:cNvPr>
+          <p:cNvSpPr>
+            <a:spLocks noGrp="1"/>
+          </p:cNvSpPr>
+          <p:nvPr>
+            <p:ph idx="1"/>
+          </p:nvPr>
+        </p:nvSpPr>
+        <p:spPr>
+          <a:xfrm>
+            <a:off x="7721600" y="2478299"/>
+            <a:ext cx="4368800" cy="3255294"/>
+          </a:xfrm>
+        </p:spPr>
+        <p:txBody>
+          <a:bodyPr/>
+          <a:lstStyle/>
+          <a:p>
+            <a:r>
+              <a:rPr lang="fr-FR" dirty="0" err="1"/>
+              <a:t>not_null</a:t>
+            </a:r>
+            <a:r>
+              <a:rPr lang="fr-FR" dirty="0"/>
+              <a:t> : identifiants, coordonnées, date, heure </a:t>
+            </a:r>
+            <a:r>
+              <a:rPr lang="fr-FR" dirty="0" err="1"/>
+              <a:t>etc</a:t>
+            </a:r>
+            <a:endParaRPr lang="fr-FR" dirty="0"/>
+          </a:p>
+          <a:p>
+            <a:r>
+              <a:rPr lang="fr-FR" dirty="0"/>
+              <a:t>unique: </a:t>
+            </a:r>
+            <a:r>
+              <a:rPr lang="fr-FR" dirty="0" err="1"/>
+              <a:t>station_id</a:t>
+            </a:r>
+            <a:endParaRPr lang="fr-FR" dirty="0"/>
+          </a:p>
+          <a:p>
+            <a:r>
+              <a:rPr lang="fr-FR" dirty="0" err="1"/>
+              <a:t>relationships</a:t>
+            </a:r>
+            <a:r>
+              <a:rPr lang="fr-FR" dirty="0"/>
+              <a:t> : </a:t>
+            </a:r>
+            <a:r>
+              <a:rPr lang="fr-FR" dirty="0" err="1"/>
+              <a:t>station_id</a:t>
+            </a:r>
+            <a:r>
+              <a:rPr lang="fr-FR" dirty="0"/>
+              <a:t> et table dimension</a:t>
+            </a:r>
+          </a:p>
+          <a:p>
+            <a:r>
+              <a:rPr lang="fr-FR" dirty="0" err="1"/>
+              <a:t>accepted_values</a:t>
+            </a:r>
+            <a:r>
+              <a:rPr lang="fr-FR" dirty="0"/>
+              <a:t>: amateur / officielle</a:t>
+            </a:r>
+          </a:p>
+          <a:p>
+            <a:r>
+              <a:rPr lang="fr-FR" dirty="0"/>
+              <a:t>Tests spécifiques : pluie, température, humidité, vent</a:t>
+            </a:r>
+          </a:p>
+          <a:p>
+            <a:endParaRPr lang="fr-FR" dirty="0"/>
           </a:p>
         </p:txBody>
       </p:sp>
       <p:pic>
         <p:nvPicPr>
-          <p:cNvPr id="5" name="Picture 3" descr="quality_tests.png">
+          <p:cNvPr id="9" name="Image 8">
             <a:extLst>
               <a:ext uri="{FF2B5EF4-FFF2-40B4-BE49-F238E27FC236}">
-                <a16:creationId xmlns:a16="http://schemas.microsoft.com/office/drawing/2014/main" id="{7B819B51-3050-BE80-18B4-C6C43577731E}"/>
+                <a16:creationId xmlns:a16="http://schemas.microsoft.com/office/drawing/2014/main" id="{326A1C7F-44A5-26F2-476F-128B8DEC91AE}"/>
               </a:ext>
             </a:extLst>
           </p:cNvPr>
           <p:cNvPicPr>
-            <a:picLocks noGrp="1" noChangeAspect="1"/>
+            <a:picLocks noChangeAspect="1"/>
           </p:cNvPicPr>
-          <p:nvPr>
-            <p:ph idx="1"/>
-          </p:nvPr>
+          <p:nvPr/>
         </p:nvPicPr>
         <p:blipFill>
           <a:blip r:embed="rId2"/>
@@ -11687,169 +16296,14 @@
         </p:blipFill>
         <p:spPr>
           <a:xfrm>
-            <a:off x="794273" y="2437908"/>
-            <a:ext cx="5511500" cy="3438973"/>
+            <a:off x="23421" y="2303049"/>
+            <a:ext cx="7582530" cy="3533442"/>
           </a:xfrm>
           <a:prstGeom prst="rect">
             <a:avLst/>
           </a:prstGeom>
         </p:spPr>
       </p:pic>
-      <p:sp>
-        <p:nvSpPr>
-          <p:cNvPr id="6" name="TextBox 4">
-            <a:extLst>
-              <a:ext uri="{FF2B5EF4-FFF2-40B4-BE49-F238E27FC236}">
-                <a16:creationId xmlns:a16="http://schemas.microsoft.com/office/drawing/2014/main" id="{BE9B2966-6CBF-E60C-08A0-38FA33559832}"/>
-              </a:ext>
-            </a:extLst>
-          </p:cNvPr>
-          <p:cNvSpPr txBox="1"/>
-          <p:nvPr/>
-        </p:nvSpPr>
-        <p:spPr>
-          <a:xfrm>
-            <a:off x="7038808" y="1684468"/>
-            <a:ext cx="4572000" cy="3200400"/>
-          </a:xfrm>
-          <a:prstGeom prst="rect">
-            <a:avLst/>
-          </a:prstGeom>
-          <a:noFill/>
-        </p:spPr>
-        <p:txBody>
-          <a:bodyPr wrap="square" lIns="36576" tIns="18288" rIns="36576" bIns="18288">
-            <a:spAutoFit/>
-          </a:bodyPr>
-          <a:lstStyle/>
-          <a:p>
-            <a:pPr algn="l">
-              <a:defRPr sz="1600" b="0">
-                <a:solidFill>
-                  <a:srgbClr val="23313D"/>
-                </a:solidFill>
-                <a:latin typeface="Aptos"/>
-              </a:defRPr>
-            </a:pPr>
-            <a:r>
-              <a:rPr dirty="0"/>
-              <a:t>• </a:t>
-            </a:r>
-            <a:r>
-              <a:rPr dirty="0" err="1"/>
-              <a:t>not_null</a:t>
-            </a:r>
-            <a:r>
-              <a:rPr dirty="0"/>
-              <a:t> : </a:t>
-            </a:r>
-            <a:r>
-              <a:rPr dirty="0" err="1"/>
-              <a:t>identifiants</a:t>
-            </a:r>
-            <a:r>
-              <a:rPr dirty="0"/>
-              <a:t>, </a:t>
-            </a:r>
-            <a:r>
-              <a:rPr dirty="0" err="1"/>
-              <a:t>coordonnées</a:t>
-            </a:r>
-            <a:r>
-              <a:rPr dirty="0"/>
-              <a:t>, </a:t>
-            </a:r>
-            <a:r>
-              <a:rPr dirty="0" err="1"/>
-              <a:t>horodatage</a:t>
-            </a:r>
-            <a:br>
-              <a:rPr dirty="0"/>
-            </a:br>
-            <a:r>
-              <a:rPr dirty="0"/>
-              <a:t>• unique : </a:t>
-            </a:r>
-            <a:r>
-              <a:rPr dirty="0" err="1"/>
-              <a:t>station_id</a:t>
-            </a:r>
-            <a:br>
-              <a:rPr dirty="0"/>
-            </a:br>
-            <a:r>
-              <a:rPr dirty="0"/>
-              <a:t>• relationships : </a:t>
-            </a:r>
-            <a:r>
-              <a:rPr dirty="0" err="1"/>
-              <a:t>station_id</a:t>
-            </a:r>
-            <a:r>
-              <a:rPr dirty="0"/>
-              <a:t> → dimension</a:t>
-            </a:r>
-            <a:br>
-              <a:rPr dirty="0"/>
-            </a:br>
-            <a:r>
-              <a:rPr dirty="0"/>
-              <a:t>• </a:t>
-            </a:r>
-            <a:r>
-              <a:rPr dirty="0" err="1"/>
-              <a:t>accepted_values</a:t>
-            </a:r>
-            <a:r>
-              <a:rPr dirty="0"/>
-              <a:t> : amateur / </a:t>
-            </a:r>
-            <a:r>
-              <a:rPr dirty="0" err="1"/>
-              <a:t>officielle</a:t>
-            </a:r>
-            <a:br>
-              <a:rPr dirty="0"/>
-            </a:br>
-            <a:r>
-              <a:rPr dirty="0"/>
-              <a:t>• Tests </a:t>
-            </a:r>
-            <a:r>
-              <a:rPr dirty="0" err="1"/>
-              <a:t>spécifiques</a:t>
-            </a:r>
-            <a:r>
-              <a:rPr dirty="0"/>
-              <a:t> : </a:t>
-            </a:r>
-            <a:r>
-              <a:rPr dirty="0" err="1"/>
-              <a:t>pluie</a:t>
-            </a:r>
-            <a:r>
-              <a:rPr dirty="0"/>
-              <a:t>, </a:t>
-            </a:r>
-            <a:r>
-              <a:rPr dirty="0" err="1"/>
-              <a:t>température</a:t>
-            </a:r>
-            <a:r>
-              <a:rPr dirty="0"/>
-              <a:t>, </a:t>
-            </a:r>
-            <a:r>
-              <a:rPr dirty="0" err="1"/>
-              <a:t>humidité</a:t>
-            </a:r>
-            <a:r>
-              <a:rPr dirty="0"/>
-              <a:t>, vent</a:t>
-            </a:r>
-          </a:p>
-        </p:txBody>
-      </p:sp>
     </p:spTree>
     <p:extLst>
       <p:ext uri="{BB962C8B-B14F-4D97-AF65-F5344CB8AC3E}">
@@ -11863,7 +16317,131 @@
 </p:sld>
 </file>
 
-<file path=ppt/slides/slide11.xml><?xml version="1.0" encoding="utf-8"?>
+<file path=ppt/slides/slide2.xml><?xml version="1.0" encoding="utf-8"?>
+<p:sld xmlns:a="http://schemas.openxmlformats.org/drawingml/2006/main" xmlns:r="http://schemas.openxmlformats.org/officeDocument/2006/relationships" xmlns:p="http://schemas.openxmlformats.org/presentationml/2006/main">
+  <p:cSld>
+    <p:spTree>
+      <p:nvGrpSpPr>
+        <p:cNvPr id="1" name=""/>
+        <p:cNvGrpSpPr/>
+        <p:nvPr/>
+      </p:nvGrpSpPr>
+      <p:grpSpPr>
+        <a:xfrm>
+          <a:off x="0" y="0"/>
+          <a:ext cx="0" cy="0"/>
+          <a:chOff x="0" y="0"/>
+          <a:chExt cx="0" cy="0"/>
+        </a:xfrm>
+      </p:grpSpPr>
+      <p:sp>
+        <p:nvSpPr>
+          <p:cNvPr id="2" name="Titre 1">
+            <a:extLst>
+              <a:ext uri="{FF2B5EF4-FFF2-40B4-BE49-F238E27FC236}">
+                <a16:creationId xmlns:a16="http://schemas.microsoft.com/office/drawing/2014/main" id="{D90581BB-D273-2748-59E2-5B1D678D7EE0}"/>
+              </a:ext>
+            </a:extLst>
+          </p:cNvPr>
+          <p:cNvSpPr>
+            <a:spLocks noGrp="1"/>
+          </p:cNvSpPr>
+          <p:nvPr>
+            <p:ph type="title"/>
+          </p:nvPr>
+        </p:nvSpPr>
+        <p:spPr/>
+        <p:txBody>
+          <a:bodyPr/>
+          <a:lstStyle/>
+          <a:p>
+            <a:r>
+              <a:rPr lang="fr-FR" dirty="0"/>
+              <a:t>Sommaire</a:t>
+            </a:r>
+          </a:p>
+        </p:txBody>
+      </p:sp>
+      <p:graphicFrame>
+        <p:nvGraphicFramePr>
+          <p:cNvPr id="5" name="Espace réservé du contenu 4">
+            <a:extLst>
+              <a:ext uri="{FF2B5EF4-FFF2-40B4-BE49-F238E27FC236}">
+                <a16:creationId xmlns:a16="http://schemas.microsoft.com/office/drawing/2014/main" id="{C0FBDBC2-024B-60B6-BEE4-9D4312913FE4}"/>
+              </a:ext>
+            </a:extLst>
+          </p:cNvPr>
+          <p:cNvGraphicFramePr>
+            <a:graphicFrameLocks noGrp="1"/>
+          </p:cNvGraphicFramePr>
+          <p:nvPr>
+            <p:ph idx="1"/>
+            <p:extLst>
+              <p:ext uri="{D42A27DB-BD31-4B8C-83A1-F6EECF244321}">
+                <p14:modId xmlns:p14="http://schemas.microsoft.com/office/powerpoint/2010/main" val="497457093"/>
+              </p:ext>
+            </p:extLst>
+          </p:nvPr>
+        </p:nvGraphicFramePr>
+        <p:xfrm>
+          <a:off x="581192" y="1985811"/>
+          <a:ext cx="11348216" cy="4803228"/>
+        </p:xfrm>
+        <a:graphic>
+          <a:graphicData uri="http://schemas.openxmlformats.org/drawingml/2006/diagram">
+            <dgm:relIds xmlns:dgm="http://schemas.openxmlformats.org/drawingml/2006/diagram" xmlns:r="http://schemas.openxmlformats.org/officeDocument/2006/relationships" r:dm="rId2" r:lo="rId3" r:qs="rId4" r:cs="rId5"/>
+          </a:graphicData>
+        </a:graphic>
+      </p:graphicFrame>
+      <p:sp>
+        <p:nvSpPr>
+          <p:cNvPr id="4" name="Espace réservé de la date 3">
+            <a:extLst>
+              <a:ext uri="{FF2B5EF4-FFF2-40B4-BE49-F238E27FC236}">
+                <a16:creationId xmlns:a16="http://schemas.microsoft.com/office/drawing/2014/main" id="{AFB99B3D-02B8-72CA-5973-9E0DC630CA85}"/>
+              </a:ext>
+            </a:extLst>
+          </p:cNvPr>
+          <p:cNvSpPr>
+            <a:spLocks noGrp="1"/>
+          </p:cNvSpPr>
+          <p:nvPr>
+            <p:ph type="dt" sz="half" idx="10"/>
+          </p:nvPr>
+        </p:nvSpPr>
+        <p:spPr>
+          <a:xfrm>
+            <a:off x="7605951" y="6423914"/>
+            <a:ext cx="4004857" cy="365125"/>
+          </a:xfrm>
+        </p:spPr>
+        <p:txBody>
+          <a:bodyPr/>
+          <a:lstStyle/>
+          <a:p>
+            <a:pPr rtl="0"/>
+            <a:fld id="{22897033-9A55-4DAC-991D-1FF1921C78B7}" type="datetime1">
+              <a:rPr lang="fr-FR" smtClean="0"/>
+              <a:t>18/08/2026</a:t>
+            </a:fld>
+            <a:endParaRPr lang="en-US" dirty="0"/>
+          </a:p>
+        </p:txBody>
+      </p:sp>
+    </p:spTree>
+    <p:extLst>
+      <p:ext uri="{BB962C8B-B14F-4D97-AF65-F5344CB8AC3E}">
+        <p14:creationId xmlns:p14="http://schemas.microsoft.com/office/powerpoint/2010/main" val="2393101071"/>
+      </p:ext>
+    </p:extLst>
+  </p:cSld>
+  <p:clrMapOvr>
+    <a:masterClrMapping/>
+  </p:clrMapOvr>
+</p:sld>
+</file>
+
+<file path=ppt/slides/slide20.xml><?xml version="1.0" encoding="utf-8"?>
 <p:sld xmlns:a="http://schemas.openxmlformats.org/drawingml/2006/main" xmlns:r="http://schemas.openxmlformats.org/officeDocument/2006/relationships" xmlns:p="http://schemas.openxmlformats.org/presentationml/2006/main">
   <p:cSld>
     <p:spTree>
@@ -11903,7 +16481,15 @@
           <a:p>
             <a:r>
               <a:rPr lang="fr-FR" dirty="0"/>
-              <a:t>9. Installation Mise en place AWS</a:t>
+              <a:t>9</a:t>
+            </a:r>
+            <a:r>
+              <a:rPr lang="fr-FR"/>
+              <a:t>. Mise </a:t>
+            </a:r>
+            <a:r>
+              <a:rPr lang="fr-FR" dirty="0"/>
+              <a:t>en place AWS</a:t>
             </a:r>
           </a:p>
         </p:txBody>
@@ -11957,7 +16543,7 @@
             <a:pPr rtl="0"/>
             <a:fld id="{22897033-9A55-4DAC-991D-1FF1921C78B7}" type="datetime1">
               <a:rPr lang="fr-FR" smtClean="0"/>
-              <a:t>16/08/2026</a:t>
+              <a:t>18/08/2026</a:t>
             </a:fld>
             <a:endParaRPr lang="en-US" dirty="0"/>
           </a:p>
@@ -12006,2146 +16592,7 @@
 </p:sld>
 </file>
 
-<file path=ppt/slides/slide12.xml><?xml version="1.0" encoding="utf-8"?>
-<p:sld xmlns:a="http://schemas.openxmlformats.org/drawingml/2006/main" xmlns:r="http://schemas.openxmlformats.org/officeDocument/2006/relationships" xmlns:p="http://schemas.openxmlformats.org/presentationml/2006/main">
-  <p:cSld>
-    <p:spTree>
-      <p:nvGrpSpPr>
-        <p:cNvPr id="1" name="">
-          <a:extLst>
-            <a:ext uri="{FF2B5EF4-FFF2-40B4-BE49-F238E27FC236}">
-              <a16:creationId xmlns:a16="http://schemas.microsoft.com/office/drawing/2014/main" id="{E120B783-63D9-3C4F-1F97-BE5BE4016328}"/>
-            </a:ext>
-          </a:extLst>
-        </p:cNvPr>
-        <p:cNvGrpSpPr/>
-        <p:nvPr/>
-      </p:nvGrpSpPr>
-      <p:grpSpPr>
-        <a:xfrm>
-          <a:off x="0" y="0"/>
-          <a:ext cx="0" cy="0"/>
-          <a:chOff x="0" y="0"/>
-          <a:chExt cx="0" cy="0"/>
-        </a:xfrm>
-      </p:grpSpPr>
-      <p:sp>
-        <p:nvSpPr>
-          <p:cNvPr id="2" name="Titre 1">
-            <a:extLst>
-              <a:ext uri="{FF2B5EF4-FFF2-40B4-BE49-F238E27FC236}">
-                <a16:creationId xmlns:a16="http://schemas.microsoft.com/office/drawing/2014/main" id="{F6BF35D9-8257-67C7-C72D-30B59F7C2EF3}"/>
-              </a:ext>
-            </a:extLst>
-          </p:cNvPr>
-          <p:cNvSpPr>
-            <a:spLocks noGrp="1"/>
-          </p:cNvSpPr>
-          <p:nvPr>
-            <p:ph type="title"/>
-          </p:nvPr>
-        </p:nvSpPr>
-        <p:spPr/>
-        <p:txBody>
-          <a:bodyPr/>
-          <a:lstStyle/>
-          <a:p>
-            <a:r>
-              <a:rPr lang="fr-FR" dirty="0"/>
-              <a:t>7. Réplication des données</a:t>
-            </a:r>
-            <a:br>
-              <a:rPr lang="fr-FR" dirty="0"/>
-            </a:br>
-            <a:r>
-              <a:rPr lang="fr-FR" sz="1800" dirty="0"/>
-              <a:t>architecture de la base de données</a:t>
-            </a:r>
-            <a:endParaRPr lang="fr-FR" dirty="0"/>
-          </a:p>
-        </p:txBody>
-      </p:sp>
-      <p:sp>
-        <p:nvSpPr>
-          <p:cNvPr id="4" name="Espace réservé de la date 3">
-            <a:extLst>
-              <a:ext uri="{FF2B5EF4-FFF2-40B4-BE49-F238E27FC236}">
-                <a16:creationId xmlns:a16="http://schemas.microsoft.com/office/drawing/2014/main" id="{C177BC59-B90E-E8AE-2FDE-E908760E8D3F}"/>
-              </a:ext>
-            </a:extLst>
-          </p:cNvPr>
-          <p:cNvSpPr>
-            <a:spLocks noGrp="1"/>
-          </p:cNvSpPr>
-          <p:nvPr>
-            <p:ph type="dt" sz="half" idx="10"/>
-          </p:nvPr>
-        </p:nvSpPr>
-        <p:spPr/>
-        <p:txBody>
-          <a:bodyPr/>
-          <a:lstStyle/>
-          <a:p>
-            <a:pPr rtl="0"/>
-            <a:fld id="{22897033-9A55-4DAC-991D-1FF1921C78B7}" type="datetime1">
-              <a:rPr lang="fr-FR" smtClean="0"/>
-              <a:t>16/08/2026</a:t>
-            </a:fld>
-            <a:endParaRPr lang="en-US" dirty="0"/>
-          </a:p>
-        </p:txBody>
-      </p:sp>
-      <p:sp>
-        <p:nvSpPr>
-          <p:cNvPr id="5" name="Rectangle : coins arrondis 4">
-            <a:extLst>
-              <a:ext uri="{FF2B5EF4-FFF2-40B4-BE49-F238E27FC236}">
-                <a16:creationId xmlns:a16="http://schemas.microsoft.com/office/drawing/2014/main" id="{C289E735-92AC-B858-5782-A5468B24A706}"/>
-              </a:ext>
-            </a:extLst>
-          </p:cNvPr>
-          <p:cNvSpPr/>
-          <p:nvPr/>
-        </p:nvSpPr>
-        <p:spPr>
-          <a:xfrm>
-            <a:off x="3259666" y="2726528"/>
-            <a:ext cx="1845734" cy="1083734"/>
-          </a:xfrm>
-          <a:prstGeom prst="roundRect">
-            <a:avLst/>
-          </a:prstGeom>
-        </p:spPr>
-        <p:style>
-          <a:lnRef idx="2">
-            <a:schemeClr val="accent1">
-              <a:shade val="15000"/>
-            </a:schemeClr>
-          </a:lnRef>
-          <a:fillRef idx="1">
-            <a:schemeClr val="accent1"/>
-          </a:fillRef>
-          <a:effectRef idx="0">
-            <a:schemeClr val="accent1"/>
-          </a:effectRef>
-          <a:fontRef idx="minor">
-            <a:schemeClr val="lt1"/>
-          </a:fontRef>
-        </p:style>
-        <p:txBody>
-          <a:bodyPr rtlCol="0" anchor="ctr"/>
-          <a:lstStyle/>
-          <a:p>
-            <a:pPr algn="ctr"/>
-            <a:r>
-              <a:rPr lang="fr-FR" dirty="0"/>
-              <a:t>Serveur Primaire</a:t>
-            </a:r>
-          </a:p>
-          <a:p>
-            <a:pPr algn="ctr"/>
-            <a:r>
-              <a:rPr lang="fr-FR" dirty="0"/>
-              <a:t>(MongoDB)</a:t>
-            </a:r>
-          </a:p>
-        </p:txBody>
-      </p:sp>
-      <p:sp>
-        <p:nvSpPr>
-          <p:cNvPr id="6" name="Rectangle : coins arrondis 5">
-            <a:extLst>
-              <a:ext uri="{FF2B5EF4-FFF2-40B4-BE49-F238E27FC236}">
-                <a16:creationId xmlns:a16="http://schemas.microsoft.com/office/drawing/2014/main" id="{9CB8EC2A-0C81-870B-F4A0-D99424B878C1}"/>
-              </a:ext>
-            </a:extLst>
-          </p:cNvPr>
-          <p:cNvSpPr/>
-          <p:nvPr/>
-        </p:nvSpPr>
-        <p:spPr>
-          <a:xfrm>
-            <a:off x="7428254" y="2726528"/>
-            <a:ext cx="1845734" cy="1083734"/>
-          </a:xfrm>
-          <a:prstGeom prst="roundRect">
-            <a:avLst/>
-          </a:prstGeom>
-        </p:spPr>
-        <p:style>
-          <a:lnRef idx="2">
-            <a:schemeClr val="accent1">
-              <a:shade val="15000"/>
-            </a:schemeClr>
-          </a:lnRef>
-          <a:fillRef idx="1">
-            <a:schemeClr val="accent1"/>
-          </a:fillRef>
-          <a:effectRef idx="0">
-            <a:schemeClr val="accent1"/>
-          </a:effectRef>
-          <a:fontRef idx="minor">
-            <a:schemeClr val="lt1"/>
-          </a:fontRef>
-        </p:style>
-        <p:txBody>
-          <a:bodyPr rtlCol="0" anchor="ctr"/>
-          <a:lstStyle/>
-          <a:p>
-            <a:pPr algn="ctr"/>
-            <a:r>
-              <a:rPr lang="fr-FR" dirty="0"/>
-              <a:t>Outil BI</a:t>
-            </a:r>
-          </a:p>
-        </p:txBody>
-      </p:sp>
-      <p:sp>
-        <p:nvSpPr>
-          <p:cNvPr id="7" name="Rectangle : coins arrondis 6">
-            <a:extLst>
-              <a:ext uri="{FF2B5EF4-FFF2-40B4-BE49-F238E27FC236}">
-                <a16:creationId xmlns:a16="http://schemas.microsoft.com/office/drawing/2014/main" id="{92857602-5C8A-BD67-8E8C-B67AA51BD817}"/>
-              </a:ext>
-            </a:extLst>
-          </p:cNvPr>
-          <p:cNvSpPr/>
-          <p:nvPr/>
-        </p:nvSpPr>
-        <p:spPr>
-          <a:xfrm>
-            <a:off x="810806" y="4755802"/>
-            <a:ext cx="1845734" cy="1083734"/>
-          </a:xfrm>
-          <a:prstGeom prst="roundRect">
-            <a:avLst/>
-          </a:prstGeom>
-        </p:spPr>
-        <p:style>
-          <a:lnRef idx="2">
-            <a:schemeClr val="accent1">
-              <a:shade val="15000"/>
-            </a:schemeClr>
-          </a:lnRef>
-          <a:fillRef idx="1">
-            <a:schemeClr val="accent1"/>
-          </a:fillRef>
-          <a:effectRef idx="0">
-            <a:schemeClr val="accent1"/>
-          </a:effectRef>
-          <a:fontRef idx="minor">
-            <a:schemeClr val="lt1"/>
-          </a:fontRef>
-        </p:style>
-        <p:txBody>
-          <a:bodyPr rtlCol="0" anchor="ctr"/>
-          <a:lstStyle/>
-          <a:p>
-            <a:pPr algn="ctr"/>
-            <a:r>
-              <a:rPr lang="fr-FR" dirty="0"/>
-              <a:t>Serveur secondaire 1 (MongoDB)</a:t>
-            </a:r>
-          </a:p>
-        </p:txBody>
-      </p:sp>
-      <p:sp>
-        <p:nvSpPr>
-          <p:cNvPr id="8" name="Rectangle : coins arrondis 7">
-            <a:extLst>
-              <a:ext uri="{FF2B5EF4-FFF2-40B4-BE49-F238E27FC236}">
-                <a16:creationId xmlns:a16="http://schemas.microsoft.com/office/drawing/2014/main" id="{2BCA39A0-2C1D-E1C4-795E-0EFCBC17F2C8}"/>
-              </a:ext>
-            </a:extLst>
-          </p:cNvPr>
-          <p:cNvSpPr/>
-          <p:nvPr/>
-        </p:nvSpPr>
-        <p:spPr>
-          <a:xfrm>
-            <a:off x="3475565" y="4749792"/>
-            <a:ext cx="1845734" cy="1083734"/>
-          </a:xfrm>
-          <a:prstGeom prst="roundRect">
-            <a:avLst/>
-          </a:prstGeom>
-        </p:spPr>
-        <p:style>
-          <a:lnRef idx="2">
-            <a:schemeClr val="accent1">
-              <a:shade val="15000"/>
-            </a:schemeClr>
-          </a:lnRef>
-          <a:fillRef idx="1">
-            <a:schemeClr val="accent1"/>
-          </a:fillRef>
-          <a:effectRef idx="0">
-            <a:schemeClr val="accent1"/>
-          </a:effectRef>
-          <a:fontRef idx="minor">
-            <a:schemeClr val="lt1"/>
-          </a:fontRef>
-        </p:style>
-        <p:txBody>
-          <a:bodyPr rtlCol="0" anchor="ctr"/>
-          <a:lstStyle/>
-          <a:p>
-            <a:pPr algn="ctr"/>
-            <a:r>
-              <a:rPr lang="fr-FR" dirty="0"/>
-              <a:t>Serveur secondaire 2 (MongoDB)</a:t>
-            </a:r>
-          </a:p>
-        </p:txBody>
-      </p:sp>
-      <p:cxnSp>
-        <p:nvCxnSpPr>
-          <p:cNvPr id="10" name="Connecteur droit avec flèche 9">
-            <a:extLst>
-              <a:ext uri="{FF2B5EF4-FFF2-40B4-BE49-F238E27FC236}">
-                <a16:creationId xmlns:a16="http://schemas.microsoft.com/office/drawing/2014/main" id="{8C0B2301-AFA1-A3E5-0A47-3A3670F844D4}"/>
-              </a:ext>
-            </a:extLst>
-          </p:cNvPr>
-          <p:cNvCxnSpPr>
-            <a:stCxn id="5" idx="2"/>
-            <a:endCxn id="7" idx="0"/>
-          </p:cNvCxnSpPr>
-          <p:nvPr/>
-        </p:nvCxnSpPr>
-        <p:spPr>
-          <a:xfrm flipH="1">
-            <a:off x="1733673" y="3810262"/>
-            <a:ext cx="2448860" cy="945540"/>
-          </a:xfrm>
-          <a:prstGeom prst="straightConnector1">
-            <a:avLst/>
-          </a:prstGeom>
-          <a:ln>
-            <a:tailEnd type="triangle"/>
-          </a:ln>
-        </p:spPr>
-        <p:style>
-          <a:lnRef idx="1">
-            <a:schemeClr val="accent1"/>
-          </a:lnRef>
-          <a:fillRef idx="0">
-            <a:schemeClr val="accent1"/>
-          </a:fillRef>
-          <a:effectRef idx="0">
-            <a:schemeClr val="accent1"/>
-          </a:effectRef>
-          <a:fontRef idx="minor">
-            <a:schemeClr val="tx1"/>
-          </a:fontRef>
-        </p:style>
-      </p:cxnSp>
-      <p:cxnSp>
-        <p:nvCxnSpPr>
-          <p:cNvPr id="11" name="Connecteur droit avec flèche 10">
-            <a:extLst>
-              <a:ext uri="{FF2B5EF4-FFF2-40B4-BE49-F238E27FC236}">
-                <a16:creationId xmlns:a16="http://schemas.microsoft.com/office/drawing/2014/main" id="{4CC3D96B-2524-9F2C-2E35-FC39E2413B9A}"/>
-              </a:ext>
-            </a:extLst>
-          </p:cNvPr>
-          <p:cNvCxnSpPr>
-            <a:cxnSpLocks/>
-            <a:stCxn id="5" idx="2"/>
-            <a:endCxn id="8" idx="0"/>
-          </p:cNvCxnSpPr>
-          <p:nvPr/>
-        </p:nvCxnSpPr>
-        <p:spPr>
-          <a:xfrm>
-            <a:off x="4182533" y="3810262"/>
-            <a:ext cx="215899" cy="939530"/>
-          </a:xfrm>
-          <a:prstGeom prst="straightConnector1">
-            <a:avLst/>
-          </a:prstGeom>
-          <a:ln>
-            <a:tailEnd type="triangle"/>
-          </a:ln>
-        </p:spPr>
-        <p:style>
-          <a:lnRef idx="1">
-            <a:schemeClr val="accent1"/>
-          </a:lnRef>
-          <a:fillRef idx="0">
-            <a:schemeClr val="accent1"/>
-          </a:fillRef>
-          <a:effectRef idx="0">
-            <a:schemeClr val="accent1"/>
-          </a:effectRef>
-          <a:fontRef idx="minor">
-            <a:schemeClr val="tx1"/>
-          </a:fontRef>
-        </p:style>
-      </p:cxnSp>
-      <p:cxnSp>
-        <p:nvCxnSpPr>
-          <p:cNvPr id="14" name="Connecteur droit avec flèche 13">
-            <a:extLst>
-              <a:ext uri="{FF2B5EF4-FFF2-40B4-BE49-F238E27FC236}">
-                <a16:creationId xmlns:a16="http://schemas.microsoft.com/office/drawing/2014/main" id="{2BD6647D-C911-B216-49ED-41B5C13B9C83}"/>
-              </a:ext>
-            </a:extLst>
-          </p:cNvPr>
-          <p:cNvCxnSpPr>
-            <a:cxnSpLocks/>
-            <a:stCxn id="5" idx="3"/>
-            <a:endCxn id="6" idx="1"/>
-          </p:cNvCxnSpPr>
-          <p:nvPr/>
-        </p:nvCxnSpPr>
-        <p:spPr>
-          <a:xfrm>
-            <a:off x="5105400" y="3268395"/>
-            <a:ext cx="2322854" cy="0"/>
-          </a:xfrm>
-          <a:prstGeom prst="straightConnector1">
-            <a:avLst/>
-          </a:prstGeom>
-          <a:ln>
-            <a:tailEnd type="triangle"/>
-          </a:ln>
-        </p:spPr>
-        <p:style>
-          <a:lnRef idx="1">
-            <a:schemeClr val="accent1"/>
-          </a:lnRef>
-          <a:fillRef idx="0">
-            <a:schemeClr val="accent1"/>
-          </a:fillRef>
-          <a:effectRef idx="0">
-            <a:schemeClr val="accent1"/>
-          </a:effectRef>
-          <a:fontRef idx="minor">
-            <a:schemeClr val="tx1"/>
-          </a:fontRef>
-        </p:style>
-      </p:cxnSp>
-      <p:sp>
-        <p:nvSpPr>
-          <p:cNvPr id="17" name="ZoneTexte 16">
-            <a:extLst>
-              <a:ext uri="{FF2B5EF4-FFF2-40B4-BE49-F238E27FC236}">
-                <a16:creationId xmlns:a16="http://schemas.microsoft.com/office/drawing/2014/main" id="{2DDECD21-D841-E227-F633-0C5710EAC28D}"/>
-              </a:ext>
-            </a:extLst>
-          </p:cNvPr>
-          <p:cNvSpPr txBox="1"/>
-          <p:nvPr/>
-        </p:nvSpPr>
-        <p:spPr>
-          <a:xfrm>
-            <a:off x="2582333" y="4362794"/>
-            <a:ext cx="1354665" cy="307777"/>
-          </a:xfrm>
-          <a:prstGeom prst="rect">
-            <a:avLst/>
-          </a:prstGeom>
-          <a:noFill/>
-        </p:spPr>
-        <p:txBody>
-          <a:bodyPr wrap="square" rtlCol="0">
-            <a:spAutoFit/>
-          </a:bodyPr>
-          <a:lstStyle/>
-          <a:p>
-            <a:r>
-              <a:rPr lang="fr-FR" sz="1400" dirty="0"/>
-              <a:t>réplication</a:t>
-            </a:r>
-          </a:p>
-        </p:txBody>
-      </p:sp>
-      <p:sp>
-        <p:nvSpPr>
-          <p:cNvPr id="18" name="ZoneTexte 17">
-            <a:extLst>
-              <a:ext uri="{FF2B5EF4-FFF2-40B4-BE49-F238E27FC236}">
-                <a16:creationId xmlns:a16="http://schemas.microsoft.com/office/drawing/2014/main" id="{3CA9D9E9-649C-3BA2-71CB-333A761B1904}"/>
-              </a:ext>
-            </a:extLst>
-          </p:cNvPr>
-          <p:cNvSpPr txBox="1"/>
-          <p:nvPr/>
-        </p:nvSpPr>
-        <p:spPr>
-          <a:xfrm>
-            <a:off x="4330823" y="4307532"/>
-            <a:ext cx="1354665" cy="307777"/>
-          </a:xfrm>
-          <a:prstGeom prst="rect">
-            <a:avLst/>
-          </a:prstGeom>
-          <a:noFill/>
-        </p:spPr>
-        <p:txBody>
-          <a:bodyPr wrap="square" rtlCol="0">
-            <a:spAutoFit/>
-          </a:bodyPr>
-          <a:lstStyle/>
-          <a:p>
-            <a:r>
-              <a:rPr lang="fr-FR" sz="1400" dirty="0"/>
-              <a:t>réplication</a:t>
-            </a:r>
-          </a:p>
-        </p:txBody>
-      </p:sp>
-      <p:sp>
-        <p:nvSpPr>
-          <p:cNvPr id="19" name="ZoneTexte 18">
-            <a:extLst>
-              <a:ext uri="{FF2B5EF4-FFF2-40B4-BE49-F238E27FC236}">
-                <a16:creationId xmlns:a16="http://schemas.microsoft.com/office/drawing/2014/main" id="{EF0E01BC-F91E-FB79-8FFE-4C065074C25B}"/>
-              </a:ext>
-            </a:extLst>
-          </p:cNvPr>
-          <p:cNvSpPr txBox="1"/>
-          <p:nvPr/>
-        </p:nvSpPr>
-        <p:spPr>
-          <a:xfrm>
-            <a:off x="5418667" y="2962370"/>
-            <a:ext cx="1354665" cy="307777"/>
-          </a:xfrm>
-          <a:prstGeom prst="rect">
-            <a:avLst/>
-          </a:prstGeom>
-          <a:noFill/>
-        </p:spPr>
-        <p:txBody>
-          <a:bodyPr wrap="square" rtlCol="0">
-            <a:spAutoFit/>
-          </a:bodyPr>
-          <a:lstStyle/>
-          <a:p>
-            <a:r>
-              <a:rPr lang="fr-FR" sz="1400" dirty="0"/>
-              <a:t>lecture</a:t>
-            </a:r>
-          </a:p>
-        </p:txBody>
-      </p:sp>
-      <p:sp>
-        <p:nvSpPr>
-          <p:cNvPr id="20" name="Rectangle : coins arrondis 19">
-            <a:extLst>
-              <a:ext uri="{FF2B5EF4-FFF2-40B4-BE49-F238E27FC236}">
-                <a16:creationId xmlns:a16="http://schemas.microsoft.com/office/drawing/2014/main" id="{4EDC755B-B800-4C49-671D-F6457FEF35E6}"/>
-              </a:ext>
-            </a:extLst>
-          </p:cNvPr>
-          <p:cNvSpPr/>
-          <p:nvPr/>
-        </p:nvSpPr>
-        <p:spPr>
-          <a:xfrm>
-            <a:off x="491065" y="2726528"/>
-            <a:ext cx="1845734" cy="1083734"/>
-          </a:xfrm>
-          <a:prstGeom prst="roundRect">
-            <a:avLst/>
-          </a:prstGeom>
-        </p:spPr>
-        <p:style>
-          <a:lnRef idx="2">
-            <a:schemeClr val="accent1">
-              <a:shade val="15000"/>
-            </a:schemeClr>
-          </a:lnRef>
-          <a:fillRef idx="1">
-            <a:schemeClr val="accent1"/>
-          </a:fillRef>
-          <a:effectRef idx="0">
-            <a:schemeClr val="accent1"/>
-          </a:effectRef>
-          <a:fontRef idx="minor">
-            <a:schemeClr val="lt1"/>
-          </a:fontRef>
-        </p:style>
-        <p:txBody>
-          <a:bodyPr rtlCol="0" anchor="ctr"/>
-          <a:lstStyle/>
-          <a:p>
-            <a:pPr algn="ctr"/>
-            <a:r>
-              <a:rPr lang="fr-FR" dirty="0"/>
-              <a:t>Driver</a:t>
-            </a:r>
-          </a:p>
-        </p:txBody>
-      </p:sp>
-      <p:cxnSp>
-        <p:nvCxnSpPr>
-          <p:cNvPr id="21" name="Connecteur droit avec flèche 20">
-            <a:extLst>
-              <a:ext uri="{FF2B5EF4-FFF2-40B4-BE49-F238E27FC236}">
-                <a16:creationId xmlns:a16="http://schemas.microsoft.com/office/drawing/2014/main" id="{05A232EE-39AA-39BD-41FE-38178A8453EF}"/>
-              </a:ext>
-            </a:extLst>
-          </p:cNvPr>
-          <p:cNvCxnSpPr>
-            <a:cxnSpLocks/>
-            <a:endCxn id="5" idx="1"/>
-          </p:cNvCxnSpPr>
-          <p:nvPr/>
-        </p:nvCxnSpPr>
-        <p:spPr>
-          <a:xfrm>
-            <a:off x="2336799" y="3268395"/>
-            <a:ext cx="922867" cy="0"/>
-          </a:xfrm>
-          <a:prstGeom prst="straightConnector1">
-            <a:avLst/>
-          </a:prstGeom>
-          <a:ln>
-            <a:tailEnd type="triangle"/>
-          </a:ln>
-        </p:spPr>
-        <p:style>
-          <a:lnRef idx="1">
-            <a:schemeClr val="accent1"/>
-          </a:lnRef>
-          <a:fillRef idx="0">
-            <a:schemeClr val="accent1"/>
-          </a:fillRef>
-          <a:effectRef idx="0">
-            <a:schemeClr val="accent1"/>
-          </a:effectRef>
-          <a:fontRef idx="minor">
-            <a:schemeClr val="tx1"/>
-          </a:fontRef>
-        </p:style>
-      </p:cxnSp>
-      <p:sp>
-        <p:nvSpPr>
-          <p:cNvPr id="23" name="ZoneTexte 22">
-            <a:extLst>
-              <a:ext uri="{FF2B5EF4-FFF2-40B4-BE49-F238E27FC236}">
-                <a16:creationId xmlns:a16="http://schemas.microsoft.com/office/drawing/2014/main" id="{2C471F2C-E4A2-3BC9-5543-94E1156D08DF}"/>
-              </a:ext>
-            </a:extLst>
-          </p:cNvPr>
-          <p:cNvSpPr txBox="1"/>
-          <p:nvPr/>
-        </p:nvSpPr>
-        <p:spPr>
-          <a:xfrm>
-            <a:off x="2336800" y="2751185"/>
-            <a:ext cx="1354665" cy="523220"/>
-          </a:xfrm>
-          <a:prstGeom prst="rect">
-            <a:avLst/>
-          </a:prstGeom>
-          <a:noFill/>
-        </p:spPr>
-        <p:txBody>
-          <a:bodyPr wrap="square" rtlCol="0">
-            <a:spAutoFit/>
-          </a:bodyPr>
-          <a:lstStyle/>
-          <a:p>
-            <a:r>
-              <a:rPr lang="fr-FR" sz="1400" dirty="0"/>
-              <a:t>Lecture</a:t>
-            </a:r>
-          </a:p>
-          <a:p>
-            <a:r>
-              <a:rPr lang="fr-FR" sz="1400" dirty="0"/>
-              <a:t>écriture</a:t>
-            </a:r>
-          </a:p>
-        </p:txBody>
-      </p:sp>
-      <p:sp>
-        <p:nvSpPr>
-          <p:cNvPr id="12" name="Rectangle : coins arrondis 11">
-            <a:extLst>
-              <a:ext uri="{FF2B5EF4-FFF2-40B4-BE49-F238E27FC236}">
-                <a16:creationId xmlns:a16="http://schemas.microsoft.com/office/drawing/2014/main" id="{01391296-D77B-A72D-BEE4-1265EE123036}"/>
-              </a:ext>
-            </a:extLst>
-          </p:cNvPr>
-          <p:cNvSpPr/>
-          <p:nvPr/>
-        </p:nvSpPr>
-        <p:spPr>
-          <a:xfrm>
-            <a:off x="5947836" y="4749792"/>
-            <a:ext cx="1845734" cy="1083734"/>
-          </a:xfrm>
-          <a:prstGeom prst="roundRect">
-            <a:avLst/>
-          </a:prstGeom>
-        </p:spPr>
-        <p:style>
-          <a:lnRef idx="2">
-            <a:schemeClr val="accent1">
-              <a:shade val="15000"/>
-            </a:schemeClr>
-          </a:lnRef>
-          <a:fillRef idx="1">
-            <a:schemeClr val="accent1"/>
-          </a:fillRef>
-          <a:effectRef idx="0">
-            <a:schemeClr val="accent1"/>
-          </a:effectRef>
-          <a:fontRef idx="minor">
-            <a:schemeClr val="lt1"/>
-          </a:fontRef>
-        </p:style>
-        <p:txBody>
-          <a:bodyPr rtlCol="0" anchor="ctr"/>
-          <a:lstStyle/>
-          <a:p>
-            <a:pPr algn="ctr"/>
-            <a:r>
-              <a:rPr lang="fr-FR" dirty="0"/>
-              <a:t>Serveur arbitre</a:t>
-            </a:r>
-          </a:p>
-        </p:txBody>
-      </p:sp>
-      <p:cxnSp>
-        <p:nvCxnSpPr>
-          <p:cNvPr id="16" name="Connecteur : en angle 15">
-            <a:extLst>
-              <a:ext uri="{FF2B5EF4-FFF2-40B4-BE49-F238E27FC236}">
-                <a16:creationId xmlns:a16="http://schemas.microsoft.com/office/drawing/2014/main" id="{1691C446-C4AB-343C-584A-F93BF6CED243}"/>
-              </a:ext>
-            </a:extLst>
-          </p:cNvPr>
-          <p:cNvCxnSpPr>
-            <a:cxnSpLocks/>
-            <a:stCxn id="12" idx="0"/>
-          </p:cNvCxnSpPr>
-          <p:nvPr/>
-        </p:nvCxnSpPr>
-        <p:spPr>
-          <a:xfrm rot="16200000" flipV="1">
-            <a:off x="5400366" y="3279455"/>
-            <a:ext cx="1175371" cy="1765304"/>
-          </a:xfrm>
-          <a:prstGeom prst="bentConnector2">
-            <a:avLst/>
-          </a:prstGeom>
-          <a:ln>
-            <a:tailEnd type="triangle"/>
-          </a:ln>
-        </p:spPr>
-        <p:style>
-          <a:lnRef idx="1">
-            <a:schemeClr val="accent1"/>
-          </a:lnRef>
-          <a:fillRef idx="0">
-            <a:schemeClr val="accent1"/>
-          </a:fillRef>
-          <a:effectRef idx="0">
-            <a:schemeClr val="accent1"/>
-          </a:effectRef>
-          <a:fontRef idx="minor">
-            <a:schemeClr val="tx1"/>
-          </a:fontRef>
-        </p:style>
-      </p:cxnSp>
-      <p:cxnSp>
-        <p:nvCxnSpPr>
-          <p:cNvPr id="26" name="Connecteur : en angle 25">
-            <a:extLst>
-              <a:ext uri="{FF2B5EF4-FFF2-40B4-BE49-F238E27FC236}">
-                <a16:creationId xmlns:a16="http://schemas.microsoft.com/office/drawing/2014/main" id="{F5C68CF9-367B-AA54-F65F-965BA44FD4AC}"/>
-              </a:ext>
-            </a:extLst>
-          </p:cNvPr>
-          <p:cNvCxnSpPr>
-            <a:cxnSpLocks/>
-            <a:stCxn id="12" idx="2"/>
-            <a:endCxn id="7" idx="2"/>
-          </p:cNvCxnSpPr>
-          <p:nvPr/>
-        </p:nvCxnSpPr>
-        <p:spPr>
-          <a:xfrm rot="5400000">
-            <a:off x="4299183" y="3268016"/>
-            <a:ext cx="6010" cy="5137030"/>
-          </a:xfrm>
-          <a:prstGeom prst="bentConnector3">
-            <a:avLst>
-              <a:gd name="adj1" fmla="val 7185241"/>
-            </a:avLst>
-          </a:prstGeom>
-          <a:ln>
-            <a:tailEnd type="triangle"/>
-          </a:ln>
-        </p:spPr>
-        <p:style>
-          <a:lnRef idx="1">
-            <a:schemeClr val="accent1"/>
-          </a:lnRef>
-          <a:fillRef idx="0">
-            <a:schemeClr val="accent1"/>
-          </a:fillRef>
-          <a:effectRef idx="0">
-            <a:schemeClr val="accent1"/>
-          </a:effectRef>
-          <a:fontRef idx="minor">
-            <a:schemeClr val="tx1"/>
-          </a:fontRef>
-        </p:style>
-      </p:cxnSp>
-      <p:cxnSp>
-        <p:nvCxnSpPr>
-          <p:cNvPr id="28" name="Connecteur droit avec flèche 27">
-            <a:extLst>
-              <a:ext uri="{FF2B5EF4-FFF2-40B4-BE49-F238E27FC236}">
-                <a16:creationId xmlns:a16="http://schemas.microsoft.com/office/drawing/2014/main" id="{4CBA21BC-2EF8-F444-1022-62FB7A69736C}"/>
-              </a:ext>
-            </a:extLst>
-          </p:cNvPr>
-          <p:cNvCxnSpPr>
-            <a:cxnSpLocks/>
-            <a:stCxn id="12" idx="1"/>
-            <a:endCxn id="8" idx="3"/>
-          </p:cNvCxnSpPr>
-          <p:nvPr/>
-        </p:nvCxnSpPr>
-        <p:spPr>
-          <a:xfrm flipH="1">
-            <a:off x="5321299" y="5291659"/>
-            <a:ext cx="626537" cy="0"/>
-          </a:xfrm>
-          <a:prstGeom prst="straightConnector1">
-            <a:avLst/>
-          </a:prstGeom>
-          <a:ln>
-            <a:tailEnd type="triangle"/>
-          </a:ln>
-        </p:spPr>
-        <p:style>
-          <a:lnRef idx="1">
-            <a:schemeClr val="accent1"/>
-          </a:lnRef>
-          <a:fillRef idx="0">
-            <a:schemeClr val="accent1"/>
-          </a:fillRef>
-          <a:effectRef idx="0">
-            <a:schemeClr val="accent1"/>
-          </a:effectRef>
-          <a:fontRef idx="minor">
-            <a:schemeClr val="tx1"/>
-          </a:fontRef>
-        </p:style>
-      </p:cxnSp>
-    </p:spTree>
-    <p:extLst>
-      <p:ext uri="{BB962C8B-B14F-4D97-AF65-F5344CB8AC3E}">
-        <p14:creationId xmlns:p14="http://schemas.microsoft.com/office/powerpoint/2010/main" val="503039048"/>
-      </p:ext>
-    </p:extLst>
-  </p:cSld>
-  <p:clrMapOvr>
-    <a:masterClrMapping/>
-  </p:clrMapOvr>
-</p:sld>
-</file>
-
-<file path=ppt/slides/slide13.xml><?xml version="1.0" encoding="utf-8"?>
-<p:sld xmlns:a="http://schemas.openxmlformats.org/drawingml/2006/main" xmlns:r="http://schemas.openxmlformats.org/officeDocument/2006/relationships" xmlns:p="http://schemas.openxmlformats.org/presentationml/2006/main">
-  <p:cSld>
-    <p:spTree>
-      <p:nvGrpSpPr>
-        <p:cNvPr id="1" name="">
-          <a:extLst>
-            <a:ext uri="{FF2B5EF4-FFF2-40B4-BE49-F238E27FC236}">
-              <a16:creationId xmlns:a16="http://schemas.microsoft.com/office/drawing/2014/main" id="{848EA76E-7D6F-3FA0-767A-8C91F13BAC0D}"/>
-            </a:ext>
-          </a:extLst>
-        </p:cNvPr>
-        <p:cNvGrpSpPr/>
-        <p:nvPr/>
-      </p:nvGrpSpPr>
-      <p:grpSpPr>
-        <a:xfrm>
-          <a:off x="0" y="0"/>
-          <a:ext cx="0" cy="0"/>
-          <a:chOff x="0" y="0"/>
-          <a:chExt cx="0" cy="0"/>
-        </a:xfrm>
-      </p:grpSpPr>
-      <p:sp>
-        <p:nvSpPr>
-          <p:cNvPr id="2" name="Titre 1">
-            <a:extLst>
-              <a:ext uri="{FF2B5EF4-FFF2-40B4-BE49-F238E27FC236}">
-                <a16:creationId xmlns:a16="http://schemas.microsoft.com/office/drawing/2014/main" id="{A5E0D19F-0717-29FB-0AFD-6144C1F5324E}"/>
-              </a:ext>
-            </a:extLst>
-          </p:cNvPr>
-          <p:cNvSpPr>
-            <a:spLocks noGrp="1"/>
-          </p:cNvSpPr>
-          <p:nvPr>
-            <p:ph type="title"/>
-          </p:nvPr>
-        </p:nvSpPr>
-        <p:spPr/>
-        <p:txBody>
-          <a:bodyPr/>
-          <a:lstStyle/>
-          <a:p>
-            <a:r>
-              <a:rPr lang="fr-FR" dirty="0"/>
-              <a:t>7. Réplication des données</a:t>
-            </a:r>
-            <a:br>
-              <a:rPr lang="fr-FR" dirty="0"/>
-            </a:br>
-            <a:r>
-              <a:rPr lang="fr-FR" sz="1800" dirty="0"/>
-              <a:t>Processus pour répliquer</a:t>
-            </a:r>
-            <a:endParaRPr lang="fr-FR" dirty="0"/>
-          </a:p>
-        </p:txBody>
-      </p:sp>
-      <p:graphicFrame>
-        <p:nvGraphicFramePr>
-          <p:cNvPr id="5" name="Espace réservé du contenu 4">
-            <a:extLst>
-              <a:ext uri="{FF2B5EF4-FFF2-40B4-BE49-F238E27FC236}">
-                <a16:creationId xmlns:a16="http://schemas.microsoft.com/office/drawing/2014/main" id="{6BC3CFD3-3550-692F-424F-EA419A15366F}"/>
-              </a:ext>
-            </a:extLst>
-          </p:cNvPr>
-          <p:cNvGraphicFramePr>
-            <a:graphicFrameLocks noGrp="1"/>
-          </p:cNvGraphicFramePr>
-          <p:nvPr>
-            <p:ph idx="1"/>
-            <p:extLst>
-              <p:ext uri="{D42A27DB-BD31-4B8C-83A1-F6EECF244321}">
-                <p14:modId xmlns:p14="http://schemas.microsoft.com/office/powerpoint/2010/main" val="368168728"/>
-              </p:ext>
-            </p:extLst>
-          </p:nvPr>
-        </p:nvGraphicFramePr>
-        <p:xfrm>
-          <a:off x="580858" y="2039556"/>
-          <a:ext cx="11029950" cy="4272280"/>
-        </p:xfrm>
-        <a:graphic>
-          <a:graphicData uri="http://schemas.openxmlformats.org/drawingml/2006/table">
-            <a:tbl>
-              <a:tblPr firstRow="1" bandRow="1">
-                <a:tableStyleId>{5C22544A-7EE6-4342-B048-85BDC9FD1C3A}</a:tableStyleId>
-              </a:tblPr>
-              <a:tblGrid>
-                <a:gridCol w="3676650">
-                  <a:extLst>
-                    <a:ext uri="{9D8B030D-6E8A-4147-A177-3AD203B41FA5}">
-                      <a16:colId xmlns:a16="http://schemas.microsoft.com/office/drawing/2014/main" val="4223413128"/>
-                    </a:ext>
-                  </a:extLst>
-                </a:gridCol>
-                <a:gridCol w="5411425">
-                  <a:extLst>
-                    <a:ext uri="{9D8B030D-6E8A-4147-A177-3AD203B41FA5}">
-                      <a16:colId xmlns:a16="http://schemas.microsoft.com/office/drawing/2014/main" val="256063923"/>
-                    </a:ext>
-                  </a:extLst>
-                </a:gridCol>
-                <a:gridCol w="1941875">
-                  <a:extLst>
-                    <a:ext uri="{9D8B030D-6E8A-4147-A177-3AD203B41FA5}">
-                      <a16:colId xmlns:a16="http://schemas.microsoft.com/office/drawing/2014/main" val="3064672858"/>
-                    </a:ext>
-                  </a:extLst>
-                </a:gridCol>
-              </a:tblGrid>
-              <a:tr h="370840">
-                <a:tc>
-                  <a:txBody>
-                    <a:bodyPr/>
-                    <a:lstStyle/>
-                    <a:p>
-                      <a:r>
-                        <a:rPr lang="fr-FR" dirty="0"/>
-                        <a:t>Etapes</a:t>
-                      </a:r>
-                    </a:p>
-                  </a:txBody>
-                  <a:tcPr/>
-                </a:tc>
-                <a:tc>
-                  <a:txBody>
-                    <a:bodyPr/>
-                    <a:lstStyle/>
-                    <a:p>
-                      <a:endParaRPr lang="fr-FR"/>
-                    </a:p>
-                  </a:txBody>
-                  <a:tcPr/>
-                </a:tc>
-                <a:tc>
-                  <a:txBody>
-                    <a:bodyPr/>
-                    <a:lstStyle/>
-                    <a:p>
-                      <a:endParaRPr lang="fr-FR" dirty="0"/>
-                    </a:p>
-                  </a:txBody>
-                  <a:tcPr/>
-                </a:tc>
-                <a:extLst>
-                  <a:ext uri="{0D108BD9-81ED-4DB2-BD59-A6C34878D82A}">
-                    <a16:rowId xmlns:a16="http://schemas.microsoft.com/office/drawing/2014/main" val="78701484"/>
-                  </a:ext>
-                </a:extLst>
-              </a:tr>
-              <a:tr h="0">
-                <a:tc>
-                  <a:txBody>
-                    <a:bodyPr/>
-                    <a:lstStyle/>
-                    <a:p>
-                      <a:r>
-                        <a:rPr lang="fr-FR" dirty="0"/>
-                        <a:t>Création des répertoires</a:t>
-                      </a:r>
-                    </a:p>
-                  </a:txBody>
-                  <a:tcPr/>
-                </a:tc>
-                <a:tc>
-                  <a:txBody>
-                    <a:bodyPr/>
-                    <a:lstStyle/>
-                    <a:p>
-                      <a:r>
-                        <a:rPr lang="fr-FR" sz="1400" dirty="0" err="1"/>
-                        <a:t>mkdir</a:t>
-                      </a:r>
-                      <a:r>
-                        <a:rPr lang="fr-FR" sz="1400" dirty="0"/>
-                        <a:t> "C:\Users\sebas\Documents\cours </a:t>
-                      </a:r>
-                      <a:r>
-                        <a:rPr lang="fr-FR" sz="1400" dirty="0" err="1"/>
-                        <a:t>Openclassrooms</a:t>
-                      </a:r>
-                      <a:r>
-                        <a:rPr lang="fr-FR" sz="1400" dirty="0"/>
-                        <a:t>\Data </a:t>
-                      </a:r>
-                      <a:r>
-                        <a:rPr lang="fr-FR" sz="1400" dirty="0" err="1"/>
-                        <a:t>Engineer</a:t>
-                      </a:r>
-                      <a:r>
-                        <a:rPr lang="fr-FR" sz="1400" dirty="0"/>
-                        <a:t>\projet 7\_data\R0S1"  (</a:t>
-                      </a:r>
-                      <a:r>
-                        <a:rPr lang="fr-FR" sz="1400" dirty="0" err="1"/>
-                        <a:t>ReplicatSet</a:t>
-                      </a:r>
-                      <a:r>
-                        <a:rPr lang="fr-FR" sz="1400" dirty="0"/>
-                        <a:t> 0 / Serveur 1)</a:t>
-                      </a:r>
-                    </a:p>
-                    <a:p>
-                      <a:endParaRPr lang="fr-FR" sz="1400" dirty="0"/>
-                    </a:p>
-                    <a:p>
-                      <a:r>
-                        <a:rPr lang="fr-FR" sz="1400" dirty="0" err="1"/>
-                        <a:t>mkdir</a:t>
-                      </a:r>
-                      <a:r>
-                        <a:rPr lang="fr-FR" sz="1400" dirty="0"/>
-                        <a:t> "C:\Users\sebas\Documents\cours </a:t>
-                      </a:r>
-                      <a:r>
-                        <a:rPr lang="fr-FR" sz="1400" dirty="0" err="1"/>
-                        <a:t>Openclassrooms</a:t>
-                      </a:r>
-                      <a:r>
-                        <a:rPr lang="fr-FR" sz="1400" dirty="0"/>
-                        <a:t>\Data </a:t>
-                      </a:r>
-                      <a:r>
-                        <a:rPr lang="fr-FR" sz="1400" dirty="0" err="1"/>
-                        <a:t>Engineer</a:t>
-                      </a:r>
-                      <a:r>
-                        <a:rPr lang="fr-FR" sz="1400" dirty="0"/>
-                        <a:t>\projet 7\_data\R0S2" (</a:t>
-                      </a:r>
-                      <a:r>
-                        <a:rPr lang="fr-FR" sz="1400" dirty="0" err="1"/>
-                        <a:t>ReplicatSet</a:t>
-                      </a:r>
-                      <a:r>
-                        <a:rPr lang="fr-FR" sz="1400" dirty="0"/>
-                        <a:t> 0 / Serveur 2)</a:t>
-                      </a:r>
-                    </a:p>
-                    <a:p>
-                      <a:endParaRPr lang="fr-FR" sz="1400" dirty="0"/>
-                    </a:p>
-                    <a:p>
-                      <a:r>
-                        <a:rPr lang="fr-FR" sz="1400" dirty="0" err="1"/>
-                        <a:t>mkdir</a:t>
-                      </a:r>
-                      <a:r>
-                        <a:rPr lang="fr-FR" sz="1400" dirty="0"/>
-                        <a:t> "C:\Users\sebas\Documents\cours </a:t>
-                      </a:r>
-                      <a:r>
-                        <a:rPr lang="fr-FR" sz="1400" dirty="0" err="1"/>
-                        <a:t>Openclassrooms</a:t>
-                      </a:r>
-                      <a:r>
-                        <a:rPr lang="fr-FR" sz="1400" dirty="0"/>
-                        <a:t>\Data </a:t>
-                      </a:r>
-                      <a:r>
-                        <a:rPr lang="fr-FR" sz="1400" dirty="0" err="1"/>
-                        <a:t>Engineer</a:t>
-                      </a:r>
-                      <a:r>
-                        <a:rPr lang="fr-FR" sz="1400" dirty="0"/>
-                        <a:t>\projet 7\_data\R0S3" (</a:t>
-                      </a:r>
-                      <a:r>
-                        <a:rPr lang="fr-FR" sz="1400" dirty="0" err="1"/>
-                        <a:t>ReplicatSet</a:t>
-                      </a:r>
-                      <a:r>
-                        <a:rPr lang="fr-FR" sz="1400" dirty="0"/>
-                        <a:t> 0 / Serveur 3)</a:t>
-                      </a:r>
-                    </a:p>
-                    <a:p>
-                      <a:endParaRPr lang="fr-FR" sz="1400" dirty="0"/>
-                    </a:p>
-                    <a:p>
-                      <a:r>
-                        <a:rPr lang="fr-FR" sz="1400" dirty="0" err="1"/>
-                        <a:t>mkdir</a:t>
-                      </a:r>
-                      <a:r>
-                        <a:rPr lang="fr-FR" sz="1400" dirty="0"/>
-                        <a:t> "C:\Users\sebas\Documents\cours </a:t>
-                      </a:r>
-                      <a:r>
-                        <a:rPr lang="fr-FR" sz="1400" dirty="0" err="1"/>
-                        <a:t>Openclassrooms</a:t>
-                      </a:r>
-                      <a:r>
-                        <a:rPr lang="fr-FR" sz="1400" dirty="0"/>
-                        <a:t>\Data </a:t>
-                      </a:r>
-                      <a:r>
-                        <a:rPr lang="fr-FR" sz="1400" dirty="0" err="1"/>
-                        <a:t>Engineer</a:t>
-                      </a:r>
-                      <a:r>
-                        <a:rPr lang="fr-FR" sz="1400" dirty="0"/>
-                        <a:t>\projet 7\_data\arbiter_R0"</a:t>
-                      </a:r>
-                      <a:endParaRPr lang="fr-FR" dirty="0"/>
-                    </a:p>
-                  </a:txBody>
-                  <a:tcPr/>
-                </a:tc>
-                <a:tc>
-                  <a:txBody>
-                    <a:bodyPr/>
-                    <a:lstStyle/>
-                    <a:p>
-                      <a:r>
-                        <a:rPr lang="fr-FR" sz="1400" dirty="0"/>
-                        <a:t>Opérations à faire dans l’invite de commande</a:t>
-                      </a:r>
-                    </a:p>
-                  </a:txBody>
-                  <a:tcPr/>
-                </a:tc>
-                <a:extLst>
-                  <a:ext uri="{0D108BD9-81ED-4DB2-BD59-A6C34878D82A}">
-                    <a16:rowId xmlns:a16="http://schemas.microsoft.com/office/drawing/2014/main" val="3792532797"/>
-                  </a:ext>
-                </a:extLst>
-              </a:tr>
-              <a:tr h="370840">
-                <a:tc rowSpan="2">
-                  <a:txBody>
-                    <a:bodyPr/>
-                    <a:lstStyle/>
-                    <a:p>
-                      <a:r>
-                        <a:rPr lang="fr-FR" dirty="0"/>
-                        <a:t>Lancement serveur 1 primaire</a:t>
-                      </a:r>
-                    </a:p>
-                  </a:txBody>
-                  <a:tcPr/>
-                </a:tc>
-                <a:tc>
-                  <a:txBody>
-                    <a:bodyPr/>
-                    <a:lstStyle/>
-                    <a:p>
-                      <a:r>
-                        <a:rPr lang="en-US" sz="1400" kern="1200" dirty="0" err="1">
-                          <a:solidFill>
-                            <a:schemeClr val="dk1"/>
-                          </a:solidFill>
-                          <a:latin typeface="+mn-lt"/>
-                          <a:ea typeface="+mn-ea"/>
-                          <a:cs typeface="+mn-cs"/>
-                        </a:rPr>
-                        <a:t>mongod</a:t>
-                      </a:r>
-                      <a:r>
-                        <a:rPr lang="en-US" sz="1400" kern="1200" dirty="0">
-                          <a:solidFill>
-                            <a:schemeClr val="dk1"/>
-                          </a:solidFill>
-                          <a:latin typeface="+mn-lt"/>
-                          <a:ea typeface="+mn-ea"/>
-                          <a:cs typeface="+mn-cs"/>
-                        </a:rPr>
-                        <a:t> --</a:t>
-                      </a:r>
-                      <a:r>
-                        <a:rPr lang="en-US" sz="1400" kern="1200" dirty="0" err="1">
-                          <a:solidFill>
-                            <a:schemeClr val="dk1"/>
-                          </a:solidFill>
-                          <a:latin typeface="+mn-lt"/>
-                          <a:ea typeface="+mn-ea"/>
-                          <a:cs typeface="+mn-cs"/>
-                        </a:rPr>
-                        <a:t>replSet</a:t>
-                      </a:r>
-                      <a:r>
-                        <a:rPr lang="en-US" sz="1400" kern="1200" dirty="0">
-                          <a:solidFill>
-                            <a:schemeClr val="dk1"/>
-                          </a:solidFill>
-                          <a:latin typeface="+mn-lt"/>
-                          <a:ea typeface="+mn-ea"/>
-                          <a:cs typeface="+mn-cs"/>
-                        </a:rPr>
-                        <a:t> rs0 --port 27019 --</a:t>
-                      </a:r>
-                      <a:r>
-                        <a:rPr lang="en-US" sz="1400" kern="1200" dirty="0" err="1">
-                          <a:solidFill>
-                            <a:schemeClr val="dk1"/>
-                          </a:solidFill>
-                          <a:latin typeface="+mn-lt"/>
-                          <a:ea typeface="+mn-ea"/>
-                          <a:cs typeface="+mn-cs"/>
-                        </a:rPr>
-                        <a:t>dbpath</a:t>
-                      </a:r>
-                      <a:r>
-                        <a:rPr lang="en-US" sz="1400" kern="1200" dirty="0">
-                          <a:solidFill>
-                            <a:schemeClr val="dk1"/>
-                          </a:solidFill>
-                          <a:latin typeface="+mn-lt"/>
-                          <a:ea typeface="+mn-ea"/>
-                          <a:cs typeface="+mn-cs"/>
-                        </a:rPr>
-                        <a:t> "C:\Users\sebas\Documents\cours </a:t>
-                      </a:r>
-                      <a:r>
-                        <a:rPr lang="en-US" sz="1400" kern="1200" dirty="0" err="1">
-                          <a:solidFill>
-                            <a:schemeClr val="dk1"/>
-                          </a:solidFill>
-                          <a:latin typeface="+mn-lt"/>
-                          <a:ea typeface="+mn-ea"/>
-                          <a:cs typeface="+mn-cs"/>
-                        </a:rPr>
-                        <a:t>Openclassrooms</a:t>
-                      </a:r>
-                      <a:r>
-                        <a:rPr lang="en-US" sz="1400" kern="1200" dirty="0">
-                          <a:solidFill>
-                            <a:schemeClr val="dk1"/>
-                          </a:solidFill>
-                          <a:latin typeface="+mn-lt"/>
-                          <a:ea typeface="+mn-ea"/>
-                          <a:cs typeface="+mn-cs"/>
-                        </a:rPr>
-                        <a:t>\Data Engineer\</a:t>
-                      </a:r>
-                      <a:r>
-                        <a:rPr lang="en-US" sz="1400" kern="1200" dirty="0" err="1">
-                          <a:solidFill>
-                            <a:schemeClr val="dk1"/>
-                          </a:solidFill>
-                          <a:latin typeface="+mn-lt"/>
-                          <a:ea typeface="+mn-ea"/>
-                          <a:cs typeface="+mn-cs"/>
-                        </a:rPr>
-                        <a:t>projet</a:t>
-                      </a:r>
-                      <a:r>
-                        <a:rPr lang="en-US" sz="1400" kern="1200" dirty="0">
-                          <a:solidFill>
-                            <a:schemeClr val="dk1"/>
-                          </a:solidFill>
-                          <a:latin typeface="+mn-lt"/>
-                          <a:ea typeface="+mn-ea"/>
-                          <a:cs typeface="+mn-cs"/>
-                        </a:rPr>
-                        <a:t> 7\_data\R0S1"</a:t>
-                      </a:r>
-                    </a:p>
-                    <a:p>
-                      <a:endParaRPr lang="fr-FR" sz="1400" kern="1200" dirty="0">
-                        <a:solidFill>
-                          <a:schemeClr val="dk1"/>
-                        </a:solidFill>
-                        <a:latin typeface="+mn-lt"/>
-                        <a:ea typeface="+mn-ea"/>
-                        <a:cs typeface="+mn-cs"/>
-                      </a:endParaRPr>
-                    </a:p>
-                  </a:txBody>
-                  <a:tcPr/>
-                </a:tc>
-                <a:tc>
-                  <a:txBody>
-                    <a:bodyPr/>
-                    <a:lstStyle/>
-                    <a:p>
-                      <a:pPr marL="0" marR="0" lvl="0" indent="0" algn="l" defTabSz="457200" rtl="0" eaLnBrk="1" fontAlgn="auto" latinLnBrk="0" hangingPunct="1">
-                        <a:lnSpc>
-                          <a:spcPct val="100000"/>
-                        </a:lnSpc>
-                        <a:spcBef>
-                          <a:spcPts val="0"/>
-                        </a:spcBef>
-                        <a:spcAft>
-                          <a:spcPts val="0"/>
-                        </a:spcAft>
-                        <a:buClrTx/>
-                        <a:buSzTx/>
-                        <a:buFontTx/>
-                        <a:buNone/>
-                        <a:tabLst/>
-                        <a:defRPr/>
-                      </a:pPr>
-                      <a:r>
-                        <a:rPr lang="fr-FR" sz="1400" dirty="0"/>
-                        <a:t>Opération à faire dans l’invite de commande. Ne pas fermer la fenêtre</a:t>
-                      </a:r>
-                    </a:p>
-                  </a:txBody>
-                  <a:tcPr/>
-                </a:tc>
-                <a:extLst>
-                  <a:ext uri="{0D108BD9-81ED-4DB2-BD59-A6C34878D82A}">
-                    <a16:rowId xmlns:a16="http://schemas.microsoft.com/office/drawing/2014/main" val="74556585"/>
-                  </a:ext>
-                </a:extLst>
-              </a:tr>
-              <a:tr h="370840">
-                <a:tc vMerge="1">
-                  <a:txBody>
-                    <a:bodyPr/>
-                    <a:lstStyle/>
-                    <a:p>
-                      <a:endParaRPr lang="fr-FR" dirty="0"/>
-                    </a:p>
-                  </a:txBody>
-                  <a:tcPr/>
-                </a:tc>
-                <a:tc>
-                  <a:txBody>
-                    <a:bodyPr/>
-                    <a:lstStyle/>
-                    <a:p>
-                      <a:r>
-                        <a:rPr lang="fr-FR" sz="1400" dirty="0"/>
-                        <a:t>Lancement du </a:t>
-                      </a:r>
-                      <a:r>
-                        <a:rPr lang="fr-FR" sz="1400" dirty="0" err="1"/>
-                        <a:t>shell</a:t>
-                      </a:r>
-                      <a:r>
-                        <a:rPr lang="fr-FR" sz="1400" dirty="0"/>
-                        <a:t> MongoDB:</a:t>
-                      </a:r>
-                    </a:p>
-                    <a:p>
-                      <a:r>
-                        <a:rPr lang="fr-FR" sz="1400" dirty="0" err="1"/>
-                        <a:t>mongosh</a:t>
-                      </a:r>
-                      <a:r>
-                        <a:rPr lang="fr-FR" sz="1400" dirty="0"/>
-                        <a:t> --port 27019</a:t>
-                      </a:r>
-                    </a:p>
-                  </a:txBody>
-                  <a:tcPr/>
-                </a:tc>
-                <a:tc>
-                  <a:txBody>
-                    <a:bodyPr/>
-                    <a:lstStyle/>
-                    <a:p>
-                      <a:r>
-                        <a:rPr lang="fr-FR" sz="1400" dirty="0"/>
-                        <a:t>Dans une autre fenêtre invite de commande</a:t>
-                      </a:r>
-                    </a:p>
-                  </a:txBody>
-                  <a:tcPr/>
-                </a:tc>
-                <a:extLst>
-                  <a:ext uri="{0D108BD9-81ED-4DB2-BD59-A6C34878D82A}">
-                    <a16:rowId xmlns:a16="http://schemas.microsoft.com/office/drawing/2014/main" val="1020162979"/>
-                  </a:ext>
-                </a:extLst>
-              </a:tr>
-            </a:tbl>
-          </a:graphicData>
-        </a:graphic>
-      </p:graphicFrame>
-      <p:sp>
-        <p:nvSpPr>
-          <p:cNvPr id="4" name="Espace réservé de la date 3">
-            <a:extLst>
-              <a:ext uri="{FF2B5EF4-FFF2-40B4-BE49-F238E27FC236}">
-                <a16:creationId xmlns:a16="http://schemas.microsoft.com/office/drawing/2014/main" id="{9773433B-58AC-4918-B5EF-CF9A050253C4}"/>
-              </a:ext>
-            </a:extLst>
-          </p:cNvPr>
-          <p:cNvSpPr>
-            <a:spLocks noGrp="1"/>
-          </p:cNvSpPr>
-          <p:nvPr>
-            <p:ph type="dt" sz="half" idx="10"/>
-          </p:nvPr>
-        </p:nvSpPr>
-        <p:spPr/>
-        <p:txBody>
-          <a:bodyPr/>
-          <a:lstStyle/>
-          <a:p>
-            <a:pPr rtl="0"/>
-            <a:fld id="{22897033-9A55-4DAC-991D-1FF1921C78B7}" type="datetime1">
-              <a:rPr lang="fr-FR" smtClean="0"/>
-              <a:t>16/08/2026</a:t>
-            </a:fld>
-            <a:endParaRPr lang="en-US" dirty="0"/>
-          </a:p>
-        </p:txBody>
-      </p:sp>
-    </p:spTree>
-    <p:extLst>
-      <p:ext uri="{BB962C8B-B14F-4D97-AF65-F5344CB8AC3E}">
-        <p14:creationId xmlns:p14="http://schemas.microsoft.com/office/powerpoint/2010/main" val="4104142552"/>
-      </p:ext>
-    </p:extLst>
-  </p:cSld>
-  <p:clrMapOvr>
-    <a:masterClrMapping/>
-  </p:clrMapOvr>
-</p:sld>
-</file>
-
-<file path=ppt/slides/slide14.xml><?xml version="1.0" encoding="utf-8"?>
-<p:sld xmlns:a="http://schemas.openxmlformats.org/drawingml/2006/main" xmlns:r="http://schemas.openxmlformats.org/officeDocument/2006/relationships" xmlns:p="http://schemas.openxmlformats.org/presentationml/2006/main">
-  <p:cSld>
-    <p:spTree>
-      <p:nvGrpSpPr>
-        <p:cNvPr id="1" name=""/>
-        <p:cNvGrpSpPr/>
-        <p:nvPr/>
-      </p:nvGrpSpPr>
-      <p:grpSpPr>
-        <a:xfrm>
-          <a:off x="0" y="0"/>
-          <a:ext cx="0" cy="0"/>
-          <a:chOff x="0" y="0"/>
-          <a:chExt cx="0" cy="0"/>
-        </a:xfrm>
-      </p:grpSpPr>
-      <p:sp>
-        <p:nvSpPr>
-          <p:cNvPr id="2" name="Titre 1">
-            <a:extLst>
-              <a:ext uri="{FF2B5EF4-FFF2-40B4-BE49-F238E27FC236}">
-                <a16:creationId xmlns:a16="http://schemas.microsoft.com/office/drawing/2014/main" id="{1C5D781D-3EDC-7669-0868-1E6B38268B0E}"/>
-              </a:ext>
-            </a:extLst>
-          </p:cNvPr>
-          <p:cNvSpPr>
-            <a:spLocks noGrp="1"/>
-          </p:cNvSpPr>
-          <p:nvPr>
-            <p:ph type="title"/>
-          </p:nvPr>
-        </p:nvSpPr>
-        <p:spPr/>
-        <p:txBody>
-          <a:bodyPr/>
-          <a:lstStyle/>
-          <a:p>
-            <a:r>
-              <a:rPr lang="fr-FR" dirty="0"/>
-              <a:t>8. Duplication des données</a:t>
-            </a:r>
-            <a:br>
-              <a:rPr lang="fr-FR" dirty="0"/>
-            </a:br>
-            <a:r>
-              <a:rPr lang="fr-FR" sz="1800" dirty="0"/>
-              <a:t>architecture duplication</a:t>
-            </a:r>
-            <a:endParaRPr lang="fr-FR" dirty="0"/>
-          </a:p>
-        </p:txBody>
-      </p:sp>
-      <p:sp>
-        <p:nvSpPr>
-          <p:cNvPr id="4" name="Espace réservé de la date 3">
-            <a:extLst>
-              <a:ext uri="{FF2B5EF4-FFF2-40B4-BE49-F238E27FC236}">
-                <a16:creationId xmlns:a16="http://schemas.microsoft.com/office/drawing/2014/main" id="{42F905F2-2592-0342-F214-78149512A088}"/>
-              </a:ext>
-            </a:extLst>
-          </p:cNvPr>
-          <p:cNvSpPr>
-            <a:spLocks noGrp="1"/>
-          </p:cNvSpPr>
-          <p:nvPr>
-            <p:ph type="dt" sz="half" idx="10"/>
-          </p:nvPr>
-        </p:nvSpPr>
-        <p:spPr/>
-        <p:txBody>
-          <a:bodyPr/>
-          <a:lstStyle/>
-          <a:p>
-            <a:pPr rtl="0"/>
-            <a:fld id="{22897033-9A55-4DAC-991D-1FF1921C78B7}" type="datetime1">
-              <a:rPr lang="fr-FR" smtClean="0"/>
-              <a:t>16/08/2026</a:t>
-            </a:fld>
-            <a:endParaRPr lang="en-US" dirty="0"/>
-          </a:p>
-        </p:txBody>
-      </p:sp>
-      <p:sp>
-        <p:nvSpPr>
-          <p:cNvPr id="5" name="Rectangle : coins arrondis 4">
-            <a:extLst>
-              <a:ext uri="{FF2B5EF4-FFF2-40B4-BE49-F238E27FC236}">
-                <a16:creationId xmlns:a16="http://schemas.microsoft.com/office/drawing/2014/main" id="{54BF5C67-2C22-9BFB-CA48-D40EE3640B97}"/>
-              </a:ext>
-            </a:extLst>
-          </p:cNvPr>
-          <p:cNvSpPr/>
-          <p:nvPr/>
-        </p:nvSpPr>
-        <p:spPr>
-          <a:xfrm>
-            <a:off x="3259666" y="2726528"/>
-            <a:ext cx="1845734" cy="1083734"/>
-          </a:xfrm>
-          <a:prstGeom prst="roundRect">
-            <a:avLst/>
-          </a:prstGeom>
-        </p:spPr>
-        <p:style>
-          <a:lnRef idx="2">
-            <a:schemeClr val="accent1">
-              <a:shade val="15000"/>
-            </a:schemeClr>
-          </a:lnRef>
-          <a:fillRef idx="1">
-            <a:schemeClr val="accent1"/>
-          </a:fillRef>
-          <a:effectRef idx="0">
-            <a:schemeClr val="accent1"/>
-          </a:effectRef>
-          <a:fontRef idx="minor">
-            <a:schemeClr val="lt1"/>
-          </a:fontRef>
-        </p:style>
-        <p:txBody>
-          <a:bodyPr rtlCol="0" anchor="ctr"/>
-          <a:lstStyle/>
-          <a:p>
-            <a:pPr algn="ctr"/>
-            <a:r>
-              <a:rPr lang="fr-FR" dirty="0"/>
-              <a:t>Routeur mongos</a:t>
-            </a:r>
-          </a:p>
-        </p:txBody>
-      </p:sp>
-      <p:sp>
-        <p:nvSpPr>
-          <p:cNvPr id="6" name="Rectangle : coins arrondis 5">
-            <a:extLst>
-              <a:ext uri="{FF2B5EF4-FFF2-40B4-BE49-F238E27FC236}">
-                <a16:creationId xmlns:a16="http://schemas.microsoft.com/office/drawing/2014/main" id="{797309BD-1E41-A742-6CC1-B723BEABFC02}"/>
-              </a:ext>
-            </a:extLst>
-          </p:cNvPr>
-          <p:cNvSpPr/>
-          <p:nvPr/>
-        </p:nvSpPr>
-        <p:spPr>
-          <a:xfrm>
-            <a:off x="7428254" y="2726528"/>
-            <a:ext cx="1845734" cy="1083734"/>
-          </a:xfrm>
-          <a:prstGeom prst="roundRect">
-            <a:avLst/>
-          </a:prstGeom>
-        </p:spPr>
-        <p:style>
-          <a:lnRef idx="2">
-            <a:schemeClr val="accent1">
-              <a:shade val="15000"/>
-            </a:schemeClr>
-          </a:lnRef>
-          <a:fillRef idx="1">
-            <a:schemeClr val="accent1"/>
-          </a:fillRef>
-          <a:effectRef idx="0">
-            <a:schemeClr val="accent1"/>
-          </a:effectRef>
-          <a:fontRef idx="minor">
-            <a:schemeClr val="lt1"/>
-          </a:fontRef>
-        </p:style>
-        <p:txBody>
-          <a:bodyPr rtlCol="0" anchor="ctr"/>
-          <a:lstStyle/>
-          <a:p>
-            <a:pPr algn="ctr"/>
-            <a:r>
-              <a:rPr lang="fr-FR" dirty="0"/>
-              <a:t>Outil BI</a:t>
-            </a:r>
-          </a:p>
-        </p:txBody>
-      </p:sp>
-      <p:sp>
-        <p:nvSpPr>
-          <p:cNvPr id="7" name="Rectangle : coins arrondis 6">
-            <a:extLst>
-              <a:ext uri="{FF2B5EF4-FFF2-40B4-BE49-F238E27FC236}">
-                <a16:creationId xmlns:a16="http://schemas.microsoft.com/office/drawing/2014/main" id="{07ED84AB-CD40-9206-ED37-CD7A94F09DBD}"/>
-              </a:ext>
-            </a:extLst>
-          </p:cNvPr>
-          <p:cNvSpPr/>
-          <p:nvPr/>
-        </p:nvSpPr>
-        <p:spPr>
-          <a:xfrm>
-            <a:off x="810806" y="4755801"/>
-            <a:ext cx="2592794" cy="1668109"/>
-          </a:xfrm>
-          <a:prstGeom prst="roundRect">
-            <a:avLst/>
-          </a:prstGeom>
-        </p:spPr>
-        <p:style>
-          <a:lnRef idx="2">
-            <a:schemeClr val="accent1">
-              <a:shade val="15000"/>
-            </a:schemeClr>
-          </a:lnRef>
-          <a:fillRef idx="1">
-            <a:schemeClr val="accent1"/>
-          </a:fillRef>
-          <a:effectRef idx="0">
-            <a:schemeClr val="accent1"/>
-          </a:effectRef>
-          <a:fontRef idx="minor">
-            <a:schemeClr val="lt1"/>
-          </a:fontRef>
-        </p:style>
-        <p:txBody>
-          <a:bodyPr rtlCol="0" anchor="ctr"/>
-          <a:lstStyle/>
-          <a:p>
-            <a:pPr algn="ctr"/>
-            <a:r>
-              <a:rPr lang="fr-FR" dirty="0" err="1"/>
-              <a:t>Shard</a:t>
-            </a:r>
-            <a:r>
-              <a:rPr lang="fr-FR" dirty="0"/>
-              <a:t> Paris –rs0</a:t>
-            </a:r>
-          </a:p>
-          <a:p>
-            <a:pPr algn="ctr"/>
-            <a:r>
-              <a:rPr lang="fr-FR" dirty="0"/>
-              <a:t>(</a:t>
-            </a:r>
-            <a:r>
-              <a:rPr lang="fr-FR" dirty="0" err="1"/>
-              <a:t>ReplicaSet</a:t>
-            </a:r>
-            <a:r>
-              <a:rPr lang="fr-FR" dirty="0"/>
-              <a:t>)</a:t>
-            </a:r>
-          </a:p>
-          <a:p>
-            <a:pPr algn="ctr"/>
-            <a:endParaRPr lang="fr-FR" dirty="0"/>
-          </a:p>
-          <a:p>
-            <a:pPr algn="ctr"/>
-            <a:r>
-              <a:rPr lang="fr-FR" dirty="0" err="1"/>
-              <a:t>property_city</a:t>
-            </a:r>
-            <a:r>
-              <a:rPr lang="fr-FR" dirty="0"/>
-              <a:t> = "Paris"</a:t>
-            </a:r>
-          </a:p>
-        </p:txBody>
-      </p:sp>
-      <p:sp>
-        <p:nvSpPr>
-          <p:cNvPr id="8" name="Rectangle : coins arrondis 7">
-            <a:extLst>
-              <a:ext uri="{FF2B5EF4-FFF2-40B4-BE49-F238E27FC236}">
-                <a16:creationId xmlns:a16="http://schemas.microsoft.com/office/drawing/2014/main" id="{8D3A9836-5704-6F41-4A64-008BDD966AEB}"/>
-              </a:ext>
-            </a:extLst>
-          </p:cNvPr>
-          <p:cNvSpPr/>
-          <p:nvPr/>
-        </p:nvSpPr>
-        <p:spPr>
-          <a:xfrm>
-            <a:off x="4730748" y="4749789"/>
-            <a:ext cx="2730502" cy="1769541"/>
-          </a:xfrm>
-          <a:prstGeom prst="roundRect">
-            <a:avLst/>
-          </a:prstGeom>
-        </p:spPr>
-        <p:style>
-          <a:lnRef idx="2">
-            <a:schemeClr val="accent1">
-              <a:shade val="15000"/>
-            </a:schemeClr>
-          </a:lnRef>
-          <a:fillRef idx="1">
-            <a:schemeClr val="accent1"/>
-          </a:fillRef>
-          <a:effectRef idx="0">
-            <a:schemeClr val="accent1"/>
-          </a:effectRef>
-          <a:fontRef idx="minor">
-            <a:schemeClr val="lt1"/>
-          </a:fontRef>
-        </p:style>
-        <p:txBody>
-          <a:bodyPr rtlCol="0" anchor="ctr"/>
-          <a:lstStyle/>
-          <a:p>
-            <a:pPr algn="ctr"/>
-            <a:r>
-              <a:rPr lang="fr-FR" dirty="0" err="1"/>
-              <a:t>Shard</a:t>
-            </a:r>
-            <a:r>
-              <a:rPr lang="fr-FR" dirty="0"/>
-              <a:t> Lyon –</a:t>
-            </a:r>
-            <a:r>
-              <a:rPr lang="fr-FR" dirty="0" err="1"/>
-              <a:t>lyonRS</a:t>
-            </a:r>
-            <a:endParaRPr lang="fr-FR" dirty="0"/>
-          </a:p>
-          <a:p>
-            <a:pPr algn="ctr"/>
-            <a:r>
-              <a:rPr lang="fr-FR" dirty="0"/>
-              <a:t>(</a:t>
-            </a:r>
-            <a:r>
-              <a:rPr lang="fr-FR" dirty="0" err="1"/>
-              <a:t>ReplicaSet</a:t>
-            </a:r>
-            <a:r>
-              <a:rPr lang="fr-FR" dirty="0"/>
-              <a:t>)</a:t>
-            </a:r>
-          </a:p>
-          <a:p>
-            <a:pPr algn="ctr"/>
-            <a:endParaRPr lang="fr-FR" dirty="0"/>
-          </a:p>
-          <a:p>
-            <a:pPr algn="ctr"/>
-            <a:r>
-              <a:rPr lang="fr-FR" dirty="0" err="1"/>
-              <a:t>property_city</a:t>
-            </a:r>
-            <a:r>
-              <a:rPr lang="fr-FR" dirty="0"/>
-              <a:t> = "Lyon"</a:t>
-            </a:r>
-          </a:p>
-        </p:txBody>
-      </p:sp>
-      <p:cxnSp>
-        <p:nvCxnSpPr>
-          <p:cNvPr id="11" name="Connecteur droit avec flèche 10">
-            <a:extLst>
-              <a:ext uri="{FF2B5EF4-FFF2-40B4-BE49-F238E27FC236}">
-                <a16:creationId xmlns:a16="http://schemas.microsoft.com/office/drawing/2014/main" id="{2989735D-50A1-C11B-41EE-64B730D52BF3}"/>
-              </a:ext>
-            </a:extLst>
-          </p:cNvPr>
-          <p:cNvCxnSpPr>
-            <a:cxnSpLocks/>
-            <a:stCxn id="6" idx="1"/>
-            <a:endCxn id="5" idx="3"/>
-          </p:cNvCxnSpPr>
-          <p:nvPr/>
-        </p:nvCxnSpPr>
-        <p:spPr>
-          <a:xfrm flipH="1">
-            <a:off x="5105400" y="3268395"/>
-            <a:ext cx="2322854" cy="0"/>
-          </a:xfrm>
-          <a:prstGeom prst="straightConnector1">
-            <a:avLst/>
-          </a:prstGeom>
-          <a:ln>
-            <a:tailEnd type="triangle"/>
-          </a:ln>
-        </p:spPr>
-        <p:style>
-          <a:lnRef idx="1">
-            <a:schemeClr val="accent1"/>
-          </a:lnRef>
-          <a:fillRef idx="0">
-            <a:schemeClr val="accent1"/>
-          </a:fillRef>
-          <a:effectRef idx="0">
-            <a:schemeClr val="accent1"/>
-          </a:effectRef>
-          <a:fontRef idx="minor">
-            <a:schemeClr val="tx1"/>
-          </a:fontRef>
-        </p:style>
-      </p:cxnSp>
-      <p:sp>
-        <p:nvSpPr>
-          <p:cNvPr id="14" name="ZoneTexte 13">
-            <a:extLst>
-              <a:ext uri="{FF2B5EF4-FFF2-40B4-BE49-F238E27FC236}">
-                <a16:creationId xmlns:a16="http://schemas.microsoft.com/office/drawing/2014/main" id="{98143598-8AA4-E343-34C1-4A1BB820A2EA}"/>
-              </a:ext>
-            </a:extLst>
-          </p:cNvPr>
-          <p:cNvSpPr txBox="1"/>
-          <p:nvPr/>
-        </p:nvSpPr>
-        <p:spPr>
-          <a:xfrm>
-            <a:off x="5418667" y="2962370"/>
-            <a:ext cx="1354665" cy="307777"/>
-          </a:xfrm>
-          <a:prstGeom prst="rect">
-            <a:avLst/>
-          </a:prstGeom>
-          <a:noFill/>
-        </p:spPr>
-        <p:txBody>
-          <a:bodyPr wrap="square" rtlCol="0">
-            <a:spAutoFit/>
-          </a:bodyPr>
-          <a:lstStyle/>
-          <a:p>
-            <a:r>
-              <a:rPr lang="fr-FR" sz="1400" dirty="0"/>
-              <a:t>lecture</a:t>
-            </a:r>
-          </a:p>
-        </p:txBody>
-      </p:sp>
-      <p:sp>
-        <p:nvSpPr>
-          <p:cNvPr id="15" name="Rectangle : coins arrondis 14">
-            <a:extLst>
-              <a:ext uri="{FF2B5EF4-FFF2-40B4-BE49-F238E27FC236}">
-                <a16:creationId xmlns:a16="http://schemas.microsoft.com/office/drawing/2014/main" id="{3473B3AB-7AED-904D-BECE-45968E59159D}"/>
-              </a:ext>
-            </a:extLst>
-          </p:cNvPr>
-          <p:cNvSpPr/>
-          <p:nvPr/>
-        </p:nvSpPr>
-        <p:spPr>
-          <a:xfrm>
-            <a:off x="491065" y="2726528"/>
-            <a:ext cx="1845734" cy="1083734"/>
-          </a:xfrm>
-          <a:prstGeom prst="roundRect">
-            <a:avLst/>
-          </a:prstGeom>
-        </p:spPr>
-        <p:style>
-          <a:lnRef idx="2">
-            <a:schemeClr val="accent1">
-              <a:shade val="15000"/>
-            </a:schemeClr>
-          </a:lnRef>
-          <a:fillRef idx="1">
-            <a:schemeClr val="accent1"/>
-          </a:fillRef>
-          <a:effectRef idx="0">
-            <a:schemeClr val="accent1"/>
-          </a:effectRef>
-          <a:fontRef idx="minor">
-            <a:schemeClr val="lt1"/>
-          </a:fontRef>
-        </p:style>
-        <p:txBody>
-          <a:bodyPr rtlCol="0" anchor="ctr"/>
-          <a:lstStyle/>
-          <a:p>
-            <a:pPr algn="ctr"/>
-            <a:r>
-              <a:rPr lang="fr-FR" dirty="0"/>
-              <a:t>Config server</a:t>
-            </a:r>
-          </a:p>
-          <a:p>
-            <a:pPr algn="ctr"/>
-            <a:r>
-              <a:rPr lang="fr-FR" dirty="0"/>
-              <a:t>(cluster)</a:t>
-            </a:r>
-          </a:p>
-        </p:txBody>
-      </p:sp>
-      <p:cxnSp>
-        <p:nvCxnSpPr>
-          <p:cNvPr id="16" name="Connecteur droit avec flèche 15">
-            <a:extLst>
-              <a:ext uri="{FF2B5EF4-FFF2-40B4-BE49-F238E27FC236}">
-                <a16:creationId xmlns:a16="http://schemas.microsoft.com/office/drawing/2014/main" id="{72DD81CB-DF2C-A924-4CE0-996A342B447A}"/>
-              </a:ext>
-            </a:extLst>
-          </p:cNvPr>
-          <p:cNvCxnSpPr>
-            <a:cxnSpLocks/>
-            <a:endCxn id="5" idx="1"/>
-          </p:cNvCxnSpPr>
-          <p:nvPr/>
-        </p:nvCxnSpPr>
-        <p:spPr>
-          <a:xfrm>
-            <a:off x="2336799" y="3268395"/>
-            <a:ext cx="922867" cy="0"/>
-          </a:xfrm>
-          <a:prstGeom prst="straightConnector1">
-            <a:avLst/>
-          </a:prstGeom>
-          <a:ln>
-            <a:tailEnd type="triangle"/>
-          </a:ln>
-        </p:spPr>
-        <p:style>
-          <a:lnRef idx="1">
-            <a:schemeClr val="accent1"/>
-          </a:lnRef>
-          <a:fillRef idx="0">
-            <a:schemeClr val="accent1"/>
-          </a:fillRef>
-          <a:effectRef idx="0">
-            <a:schemeClr val="accent1"/>
-          </a:effectRef>
-          <a:fontRef idx="minor">
-            <a:schemeClr val="tx1"/>
-          </a:fontRef>
-        </p:style>
-      </p:cxnSp>
-      <p:sp>
-        <p:nvSpPr>
-          <p:cNvPr id="17" name="ZoneTexte 16">
-            <a:extLst>
-              <a:ext uri="{FF2B5EF4-FFF2-40B4-BE49-F238E27FC236}">
-                <a16:creationId xmlns:a16="http://schemas.microsoft.com/office/drawing/2014/main" id="{CC73E5F6-CE9D-E55B-B2F7-A546936A27AC}"/>
-              </a:ext>
-            </a:extLst>
-          </p:cNvPr>
-          <p:cNvSpPr txBox="1"/>
-          <p:nvPr/>
-        </p:nvSpPr>
-        <p:spPr>
-          <a:xfrm>
-            <a:off x="2336800" y="2751185"/>
-            <a:ext cx="1354665" cy="523220"/>
-          </a:xfrm>
-          <a:prstGeom prst="rect">
-            <a:avLst/>
-          </a:prstGeom>
-          <a:noFill/>
-        </p:spPr>
-        <p:txBody>
-          <a:bodyPr wrap="square" rtlCol="0">
-            <a:spAutoFit/>
-          </a:bodyPr>
-          <a:lstStyle/>
-          <a:p>
-            <a:r>
-              <a:rPr lang="fr-FR" sz="1400" dirty="0"/>
-              <a:t>Lecture</a:t>
-            </a:r>
-          </a:p>
-          <a:p>
-            <a:r>
-              <a:rPr lang="fr-FR" sz="1400" dirty="0"/>
-              <a:t>écriture</a:t>
-            </a:r>
-          </a:p>
-        </p:txBody>
-      </p:sp>
-      <p:cxnSp>
-        <p:nvCxnSpPr>
-          <p:cNvPr id="19" name="Connecteur : en angle 18">
-            <a:extLst>
-              <a:ext uri="{FF2B5EF4-FFF2-40B4-BE49-F238E27FC236}">
-                <a16:creationId xmlns:a16="http://schemas.microsoft.com/office/drawing/2014/main" id="{0186AC74-2298-75A9-8D5A-9C2197D88C42}"/>
-              </a:ext>
-            </a:extLst>
-          </p:cNvPr>
-          <p:cNvCxnSpPr>
-            <a:cxnSpLocks/>
-            <a:stCxn id="5" idx="2"/>
-            <a:endCxn id="8" idx="0"/>
-          </p:cNvCxnSpPr>
-          <p:nvPr/>
-        </p:nvCxnSpPr>
-        <p:spPr>
-          <a:xfrm rot="16200000" flipH="1">
-            <a:off x="4669503" y="3323292"/>
-            <a:ext cx="939527" cy="1913466"/>
-          </a:xfrm>
-          <a:prstGeom prst="bentConnector3">
-            <a:avLst>
-              <a:gd name="adj1" fmla="val 50000"/>
-            </a:avLst>
-          </a:prstGeom>
-          <a:ln>
-            <a:tailEnd type="triangle"/>
-          </a:ln>
-        </p:spPr>
-        <p:style>
-          <a:lnRef idx="1">
-            <a:schemeClr val="accent1"/>
-          </a:lnRef>
-          <a:fillRef idx="0">
-            <a:schemeClr val="accent1"/>
-          </a:fillRef>
-          <a:effectRef idx="0">
-            <a:schemeClr val="accent1"/>
-          </a:effectRef>
-          <a:fontRef idx="minor">
-            <a:schemeClr val="tx1"/>
-          </a:fontRef>
-        </p:style>
-      </p:cxnSp>
-      <p:cxnSp>
-        <p:nvCxnSpPr>
-          <p:cNvPr id="20" name="Connecteur : en angle 19">
-            <a:extLst>
-              <a:ext uri="{FF2B5EF4-FFF2-40B4-BE49-F238E27FC236}">
-                <a16:creationId xmlns:a16="http://schemas.microsoft.com/office/drawing/2014/main" id="{E4539072-F0F5-5C24-7EAD-0C663E8DD6B3}"/>
-              </a:ext>
-            </a:extLst>
-          </p:cNvPr>
-          <p:cNvCxnSpPr>
-            <a:cxnSpLocks/>
-            <a:stCxn id="5" idx="2"/>
-            <a:endCxn id="7" idx="0"/>
-          </p:cNvCxnSpPr>
-          <p:nvPr/>
-        </p:nvCxnSpPr>
-        <p:spPr>
-          <a:xfrm rot="5400000">
-            <a:off x="2672099" y="3245366"/>
-            <a:ext cx="945539" cy="2075330"/>
-          </a:xfrm>
-          <a:prstGeom prst="bentConnector3">
-            <a:avLst>
-              <a:gd name="adj1" fmla="val 50000"/>
-            </a:avLst>
-          </a:prstGeom>
-          <a:ln>
-            <a:tailEnd type="triangle"/>
-          </a:ln>
-        </p:spPr>
-        <p:style>
-          <a:lnRef idx="1">
-            <a:schemeClr val="accent1"/>
-          </a:lnRef>
-          <a:fillRef idx="0">
-            <a:schemeClr val="accent1"/>
-          </a:fillRef>
-          <a:effectRef idx="0">
-            <a:schemeClr val="accent1"/>
-          </a:effectRef>
-          <a:fontRef idx="minor">
-            <a:schemeClr val="tx1"/>
-          </a:fontRef>
-        </p:style>
-      </p:cxnSp>
-    </p:spTree>
-    <p:extLst>
-      <p:ext uri="{BB962C8B-B14F-4D97-AF65-F5344CB8AC3E}">
-        <p14:creationId xmlns:p14="http://schemas.microsoft.com/office/powerpoint/2010/main" val="1816661746"/>
-      </p:ext>
-    </p:extLst>
-  </p:cSld>
-  <p:clrMapOvr>
-    <a:masterClrMapping/>
-  </p:clrMapOvr>
-</p:sld>
-</file>
-
-<file path=ppt/slides/slide15.xml><?xml version="1.0" encoding="utf-8"?>
+<file path=ppt/slides/slide21.xml><?xml version="1.0" encoding="utf-8"?>
 <p:sld xmlns:a="http://schemas.openxmlformats.org/drawingml/2006/main" xmlns:r="http://schemas.openxmlformats.org/officeDocument/2006/relationships" xmlns:p="http://schemas.openxmlformats.org/presentationml/2006/main">
   <p:cSld>
     <p:bg>
@@ -14196,7 +16643,7 @@
             <a:pPr rtl="0"/>
             <a:fld id="{ACEC98BE-FCE2-445F-8146-3A7F8CC3881D}" type="datetime1">
               <a:rPr lang="fr-FR" smtClean="0"/>
-              <a:t>16/08/2026</a:t>
+              <a:t>18/08/2026</a:t>
             </a:fld>
             <a:endParaRPr lang="en-US" dirty="0"/>
           </a:p>
@@ -14245,130 +16692,6 @@
     <p:extLst>
       <p:ext uri="{BB962C8B-B14F-4D97-AF65-F5344CB8AC3E}">
         <p14:creationId xmlns:p14="http://schemas.microsoft.com/office/powerpoint/2010/main" val="2464726542"/>
-      </p:ext>
-    </p:extLst>
-  </p:cSld>
-  <p:clrMapOvr>
-    <a:masterClrMapping/>
-  </p:clrMapOvr>
-</p:sld>
-</file>
-
-<file path=ppt/slides/slide2.xml><?xml version="1.0" encoding="utf-8"?>
-<p:sld xmlns:a="http://schemas.openxmlformats.org/drawingml/2006/main" xmlns:r="http://schemas.openxmlformats.org/officeDocument/2006/relationships" xmlns:p="http://schemas.openxmlformats.org/presentationml/2006/main">
-  <p:cSld>
-    <p:spTree>
-      <p:nvGrpSpPr>
-        <p:cNvPr id="1" name=""/>
-        <p:cNvGrpSpPr/>
-        <p:nvPr/>
-      </p:nvGrpSpPr>
-      <p:grpSpPr>
-        <a:xfrm>
-          <a:off x="0" y="0"/>
-          <a:ext cx="0" cy="0"/>
-          <a:chOff x="0" y="0"/>
-          <a:chExt cx="0" cy="0"/>
-        </a:xfrm>
-      </p:grpSpPr>
-      <p:sp>
-        <p:nvSpPr>
-          <p:cNvPr id="2" name="Titre 1">
-            <a:extLst>
-              <a:ext uri="{FF2B5EF4-FFF2-40B4-BE49-F238E27FC236}">
-                <a16:creationId xmlns:a16="http://schemas.microsoft.com/office/drawing/2014/main" id="{D90581BB-D273-2748-59E2-5B1D678D7EE0}"/>
-              </a:ext>
-            </a:extLst>
-          </p:cNvPr>
-          <p:cNvSpPr>
-            <a:spLocks noGrp="1"/>
-          </p:cNvSpPr>
-          <p:nvPr>
-            <p:ph type="title"/>
-          </p:nvPr>
-        </p:nvSpPr>
-        <p:spPr/>
-        <p:txBody>
-          <a:bodyPr/>
-          <a:lstStyle/>
-          <a:p>
-            <a:r>
-              <a:rPr lang="fr-FR" dirty="0"/>
-              <a:t>Sommaire</a:t>
-            </a:r>
-          </a:p>
-        </p:txBody>
-      </p:sp>
-      <p:graphicFrame>
-        <p:nvGraphicFramePr>
-          <p:cNvPr id="5" name="Espace réservé du contenu 4">
-            <a:extLst>
-              <a:ext uri="{FF2B5EF4-FFF2-40B4-BE49-F238E27FC236}">
-                <a16:creationId xmlns:a16="http://schemas.microsoft.com/office/drawing/2014/main" id="{C0FBDBC2-024B-60B6-BEE4-9D4312913FE4}"/>
-              </a:ext>
-            </a:extLst>
-          </p:cNvPr>
-          <p:cNvGraphicFramePr>
-            <a:graphicFrameLocks noGrp="1"/>
-          </p:cNvGraphicFramePr>
-          <p:nvPr>
-            <p:ph idx="1"/>
-            <p:extLst>
-              <p:ext uri="{D42A27DB-BD31-4B8C-83A1-F6EECF244321}">
-                <p14:modId xmlns:p14="http://schemas.microsoft.com/office/powerpoint/2010/main" val="468638535"/>
-              </p:ext>
-            </p:extLst>
-          </p:nvPr>
-        </p:nvGraphicFramePr>
-        <p:xfrm>
-          <a:off x="581192" y="1985811"/>
-          <a:ext cx="11348216" cy="4803228"/>
-        </p:xfrm>
-        <a:graphic>
-          <a:graphicData uri="http://schemas.openxmlformats.org/drawingml/2006/diagram">
-            <dgm:relIds xmlns:dgm="http://schemas.openxmlformats.org/drawingml/2006/diagram" xmlns:r="http://schemas.openxmlformats.org/officeDocument/2006/relationships" r:dm="rId2" r:lo="rId3" r:qs="rId4" r:cs="rId5"/>
-          </a:graphicData>
-        </a:graphic>
-      </p:graphicFrame>
-      <p:sp>
-        <p:nvSpPr>
-          <p:cNvPr id="4" name="Espace réservé de la date 3">
-            <a:extLst>
-              <a:ext uri="{FF2B5EF4-FFF2-40B4-BE49-F238E27FC236}">
-                <a16:creationId xmlns:a16="http://schemas.microsoft.com/office/drawing/2014/main" id="{AFB99B3D-02B8-72CA-5973-9E0DC630CA85}"/>
-              </a:ext>
-            </a:extLst>
-          </p:cNvPr>
-          <p:cNvSpPr>
-            <a:spLocks noGrp="1"/>
-          </p:cNvSpPr>
-          <p:nvPr>
-            <p:ph type="dt" sz="half" idx="10"/>
-          </p:nvPr>
-        </p:nvSpPr>
-        <p:spPr>
-          <a:xfrm>
-            <a:off x="7605951" y="6423914"/>
-            <a:ext cx="4004857" cy="365125"/>
-          </a:xfrm>
-        </p:spPr>
-        <p:txBody>
-          <a:bodyPr/>
-          <a:lstStyle/>
-          <a:p>
-            <a:pPr rtl="0"/>
-            <a:fld id="{22897033-9A55-4DAC-991D-1FF1921C78B7}" type="datetime1">
-              <a:rPr lang="fr-FR" smtClean="0"/>
-              <a:t>16/08/2026</a:t>
-            </a:fld>
-            <a:endParaRPr lang="en-US" dirty="0"/>
-          </a:p>
-        </p:txBody>
-      </p:sp>
-    </p:spTree>
-    <p:extLst>
-      <p:ext uri="{BB962C8B-B14F-4D97-AF65-F5344CB8AC3E}">
-        <p14:creationId xmlns:p14="http://schemas.microsoft.com/office/powerpoint/2010/main" val="2393101071"/>
       </p:ext>
     </p:extLst>
   </p:cSld>
@@ -14451,6 +16774,10 @@
               <a:rPr lang="fr-FR" dirty="0"/>
               <a:t>1 - Contexte et objectif</a:t>
             </a:r>
+            <a:br>
+              <a:rPr lang="fr-FR" dirty="0"/>
+            </a:br>
+            <a:endParaRPr lang="fr-FR" dirty="0"/>
           </a:p>
         </p:txBody>
       </p:sp>
@@ -14478,7 +16805,7 @@
             <a:pPr rtl="0"/>
             <a:fld id="{22897033-9A55-4DAC-991D-1FF1921C78B7}" type="datetime1">
               <a:rPr lang="fr-FR" smtClean="0"/>
-              <a:t>16/08/2026</a:t>
+              <a:t>18/08/2026</a:t>
             </a:fld>
             <a:endParaRPr lang="en-US" dirty="0"/>
           </a:p>
@@ -14542,8 +16869,12 @@
           <a:p>
             <a:r>
               <a:rPr lang="fr-FR" dirty="0"/>
-              <a:t>2 – Schéma DE LA base de données</a:t>
-            </a:r>
+              <a:t>2. Schéma DE LA base de données</a:t>
+            </a:r>
+            <a:br>
+              <a:rPr lang="fr-FR" dirty="0"/>
+            </a:br>
+            <a:endParaRPr lang="fr-FR" dirty="0"/>
           </a:p>
         </p:txBody>
       </p:sp>
@@ -14576,7 +16907,7 @@
             <a:fld id="{22897033-9A55-4DAC-991D-1FF1921C78B7}" type="datetime1">
               <a:rPr lang="fr-FR" smtClean="0"/>
               <a:pPr/>
-              <a:t>16/08/2026</a:t>
+              <a:t>18/08/2026</a:t>
             </a:fld>
             <a:endParaRPr lang="en-US" dirty="0"/>
           </a:p>
@@ -14660,13 +16991,19 @@
         </p:nvSpPr>
         <p:spPr/>
         <p:txBody>
-          <a:bodyPr/>
+          <a:bodyPr>
+            <a:normAutofit fontScale="90000"/>
+          </a:bodyPr>
           <a:lstStyle/>
           <a:p>
             <a:r>
               <a:rPr lang="fr-FR" dirty="0"/>
-              <a:t>3. PROCESSUS ELT</a:t>
-            </a:r>
+              <a:t>3. PROCESSUS collecter, transformer, stocker et tester les données</a:t>
+            </a:r>
+            <a:br>
+              <a:rPr lang="fr-FR" dirty="0"/>
+            </a:br>
+            <a:endParaRPr lang="fr-FR" dirty="0"/>
           </a:p>
         </p:txBody>
       </p:sp>
@@ -14694,7 +17031,7 @@
             <a:pPr rtl="0"/>
             <a:fld id="{22897033-9A55-4DAC-991D-1FF1921C78B7}" type="datetime1">
               <a:rPr lang="fr-FR" smtClean="0"/>
-              <a:t>16/08/2026</a:t>
+              <a:t>18/08/2026</a:t>
             </a:fld>
             <a:endParaRPr lang="en-US" dirty="0"/>
           </a:p>
@@ -16765,6 +19102,10 @@
               <a:rPr lang="fr-FR" dirty="0"/>
               <a:t>4. Schéma d’architecture</a:t>
             </a:r>
+            <a:br>
+              <a:rPr lang="fr-FR" dirty="0"/>
+            </a:br>
+            <a:endParaRPr lang="fr-FR" dirty="0"/>
           </a:p>
         </p:txBody>
       </p:sp>
@@ -16797,7 +19138,7 @@
             <a:pPr rtl="0"/>
             <a:fld id="{22897033-9A55-4DAC-991D-1FF1921C78B7}" type="datetime1">
               <a:rPr lang="fr-FR" smtClean="0"/>
-              <a:t>16/08/2026</a:t>
+              <a:t>18/08/2026</a:t>
             </a:fld>
             <a:endParaRPr lang="en-US" dirty="0"/>
           </a:p>
@@ -19358,7 +21699,7 @@
         </p:nvSpPr>
         <p:spPr>
           <a:xfrm>
-            <a:off x="6827491" y="5397811"/>
+            <a:off x="6827491" y="5433671"/>
             <a:ext cx="1790063" cy="998991"/>
           </a:xfrm>
           <a:prstGeom prst="roundRect">
@@ -19708,12 +22049,12 @@
         </p:nvCxnSpPr>
         <p:spPr>
           <a:xfrm rot="5400000">
-            <a:off x="8740805" y="4982566"/>
-            <a:ext cx="395955" cy="2432517"/>
+            <a:off x="8722875" y="5000496"/>
+            <a:ext cx="431815" cy="2432517"/>
           </a:xfrm>
           <a:prstGeom prst="bentConnector3">
             <a:avLst>
-              <a:gd name="adj1" fmla="val 157734"/>
+              <a:gd name="adj1" fmla="val 152939"/>
             </a:avLst>
           </a:prstGeom>
           <a:ln w="19050">
@@ -19949,12 +22290,14 @@
           <p:nvPr/>
         </p:nvCxnSpPr>
         <p:spPr>
-          <a:xfrm flipH="1" flipV="1">
-            <a:off x="6244085" y="5808670"/>
-            <a:ext cx="583406" cy="88637"/>
+          <a:xfrm rot="10800000">
+            <a:off x="6244085" y="5808671"/>
+            <a:ext cx="583406" cy="124497"/>
           </a:xfrm>
-          <a:prstGeom prst="straightConnector1">
-            <a:avLst/>
+          <a:prstGeom prst="bentConnector3">
+            <a:avLst>
+              <a:gd name="adj1" fmla="val 50000"/>
+            </a:avLst>
           </a:prstGeom>
           <a:ln w="19050">
             <a:solidFill>
@@ -20728,32 +23071,10 @@
               <a:rPr lang="fr-FR" dirty="0" err="1"/>
               <a:t>Airbyte</a:t>
             </a:r>
+            <a:br>
+              <a:rPr lang="fr-FR" dirty="0"/>
+            </a:br>
             <a:endParaRPr lang="fr-FR" dirty="0"/>
-          </a:p>
-        </p:txBody>
-      </p:sp>
-      <p:sp>
-        <p:nvSpPr>
-          <p:cNvPr id="3" name="Espace réservé du contenu 2">
-            <a:extLst>
-              <a:ext uri="{FF2B5EF4-FFF2-40B4-BE49-F238E27FC236}">
-                <a16:creationId xmlns:a16="http://schemas.microsoft.com/office/drawing/2014/main" id="{4F740C1A-6D00-D21C-6CB7-621BD1285DC1}"/>
-              </a:ext>
-            </a:extLst>
-          </p:cNvPr>
-          <p:cNvSpPr>
-            <a:spLocks noGrp="1"/>
-          </p:cNvSpPr>
-          <p:nvPr>
-            <p:ph idx="1"/>
-          </p:nvPr>
-        </p:nvSpPr>
-        <p:spPr/>
-        <p:txBody>
-          <a:bodyPr/>
-          <a:lstStyle/>
-          <a:p>
-            <a:endParaRPr lang="fr-FR"/>
           </a:p>
         </p:txBody>
       </p:sp>
@@ -20781,9 +23102,427 @@
             <a:pPr rtl="0"/>
             <a:fld id="{22897033-9A55-4DAC-991D-1FF1921C78B7}" type="datetime1">
               <a:rPr lang="fr-FR" smtClean="0"/>
-              <a:t>16/08/2026</a:t>
+              <a:t>18/08/2026</a:t>
             </a:fld>
             <a:endParaRPr lang="en-US" dirty="0"/>
+          </a:p>
+        </p:txBody>
+      </p:sp>
+      <p:sp>
+        <p:nvSpPr>
+          <p:cNvPr id="5" name="Espace réservé du contenu 2">
+            <a:extLst>
+              <a:ext uri="{FF2B5EF4-FFF2-40B4-BE49-F238E27FC236}">
+                <a16:creationId xmlns:a16="http://schemas.microsoft.com/office/drawing/2014/main" id="{10D49BB1-BF92-9232-87EF-B385267E7B2A}"/>
+              </a:ext>
+            </a:extLst>
+          </p:cNvPr>
+          <p:cNvSpPr>
+            <a:spLocks noGrp="1"/>
+          </p:cNvSpPr>
+          <p:nvPr>
+            <p:ph idx="1"/>
+          </p:nvPr>
+        </p:nvSpPr>
+        <p:spPr>
+          <a:xfrm>
+            <a:off x="581192" y="2020366"/>
+            <a:ext cx="11029615" cy="3634486"/>
+          </a:xfrm>
+        </p:spPr>
+        <p:txBody>
+          <a:bodyPr/>
+          <a:lstStyle/>
+          <a:p>
+            <a:r>
+              <a:rPr lang="fr-FR" dirty="0"/>
+              <a:t>Via la documentation </a:t>
+            </a:r>
+            <a:r>
+              <a:rPr lang="fr-FR" dirty="0" err="1"/>
+              <a:t>Airbyte</a:t>
+            </a:r>
+            <a:r>
+              <a:rPr lang="fr-FR" dirty="0"/>
+              <a:t> </a:t>
+            </a:r>
+            <a:r>
+              <a:rPr lang="fr-FR" dirty="0" err="1">
+                <a:hlinkClick r:id="rId2"/>
+              </a:rPr>
+              <a:t>Quickstart</a:t>
+            </a:r>
+            <a:r>
+              <a:rPr lang="fr-FR" dirty="0">
+                <a:hlinkClick r:id="rId2"/>
+              </a:rPr>
+              <a:t> | </a:t>
+            </a:r>
+            <a:r>
+              <a:rPr lang="fr-FR" dirty="0" err="1">
+                <a:hlinkClick r:id="rId2"/>
+              </a:rPr>
+              <a:t>Airbyte</a:t>
+            </a:r>
+            <a:r>
+              <a:rPr lang="fr-FR" dirty="0">
+                <a:hlinkClick r:id="rId2"/>
+              </a:rPr>
+              <a:t> Docs</a:t>
+            </a:r>
+            <a:r>
+              <a:rPr lang="fr-FR" dirty="0"/>
+              <a:t> télécharger la dernière version de </a:t>
+            </a:r>
+            <a:r>
+              <a:rPr lang="fr-FR" dirty="0" err="1"/>
+              <a:t>abctl</a:t>
+            </a:r>
+            <a:r>
+              <a:rPr lang="fr-FR" dirty="0"/>
+              <a:t> et suivre les étapes décrites dans la documentation</a:t>
+            </a:r>
+          </a:p>
+          <a:p>
+            <a:r>
+              <a:rPr lang="fr-FR" dirty="0"/>
+              <a:t>Démarrer Docker et dans l’invite de commande lancer l’installation en tapant </a:t>
+            </a:r>
+            <a:r>
+              <a:rPr lang="fr-FR" b="1" i="1" dirty="0" err="1"/>
+              <a:t>abctl</a:t>
+            </a:r>
+            <a:r>
+              <a:rPr lang="fr-FR" b="1" i="1" dirty="0"/>
+              <a:t> local </a:t>
+            </a:r>
+            <a:r>
+              <a:rPr lang="fr-FR" b="1" i="1" dirty="0" err="1"/>
+              <a:t>install</a:t>
+            </a:r>
+            <a:endParaRPr lang="fr-FR" b="1" i="1" dirty="0"/>
+          </a:p>
+          <a:p>
+            <a:endParaRPr lang="fr-FR" b="1" i="1" dirty="0"/>
+          </a:p>
+          <a:p>
+            <a:endParaRPr lang="fr-FR" b="1" i="1" dirty="0"/>
+          </a:p>
+          <a:p>
+            <a:endParaRPr lang="fr-FR" dirty="0"/>
+          </a:p>
+          <a:p>
+            <a:endParaRPr lang="fr-FR" dirty="0"/>
+          </a:p>
+          <a:p>
+            <a:endParaRPr lang="fr-FR" dirty="0"/>
+          </a:p>
+          <a:p>
+            <a:endParaRPr lang="fr-FR" dirty="0"/>
+          </a:p>
+          <a:p>
+            <a:endParaRPr lang="fr-FR" dirty="0"/>
+          </a:p>
+        </p:txBody>
+      </p:sp>
+      <p:pic>
+        <p:nvPicPr>
+          <p:cNvPr id="7" name="Image 6">
+            <a:extLst>
+              <a:ext uri="{FF2B5EF4-FFF2-40B4-BE49-F238E27FC236}">
+                <a16:creationId xmlns:a16="http://schemas.microsoft.com/office/drawing/2014/main" id="{FBC06C71-8A4E-DF39-D1ED-0AF1101227EC}"/>
+              </a:ext>
+            </a:extLst>
+          </p:cNvPr>
+          <p:cNvPicPr>
+            <a:picLocks noChangeAspect="1"/>
+          </p:cNvPicPr>
+          <p:nvPr/>
+        </p:nvPicPr>
+        <p:blipFill>
+          <a:blip r:embed="rId3"/>
+          <a:srcRect t="12336"/>
+          <a:stretch>
+            <a:fillRect/>
+          </a:stretch>
+        </p:blipFill>
+        <p:spPr>
+          <a:xfrm>
+            <a:off x="581192" y="3016550"/>
+            <a:ext cx="5778577" cy="3552236"/>
+          </a:xfrm>
+          <a:prstGeom prst="rect">
+            <a:avLst/>
+          </a:prstGeom>
+        </p:spPr>
+      </p:pic>
+      <p:cxnSp>
+        <p:nvCxnSpPr>
+          <p:cNvPr id="11" name="Connecteur droit avec flèche 10">
+            <a:extLst>
+              <a:ext uri="{FF2B5EF4-FFF2-40B4-BE49-F238E27FC236}">
+                <a16:creationId xmlns:a16="http://schemas.microsoft.com/office/drawing/2014/main" id="{3D5481D2-6FEF-53EA-D87B-4A04095ECA94}"/>
+              </a:ext>
+            </a:extLst>
+          </p:cNvPr>
+          <p:cNvCxnSpPr>
+            <a:cxnSpLocks/>
+            <a:stCxn id="12" idx="1"/>
+          </p:cNvCxnSpPr>
+          <p:nvPr/>
+        </p:nvCxnSpPr>
+        <p:spPr>
+          <a:xfrm flipH="1" flipV="1">
+            <a:off x="3384287" y="3194222"/>
+            <a:ext cx="3138201" cy="197710"/>
+          </a:xfrm>
+          <a:prstGeom prst="straightConnector1">
+            <a:avLst/>
+          </a:prstGeom>
+          <a:ln w="19050">
+            <a:solidFill>
+              <a:srgbClr val="FF0000"/>
+            </a:solidFill>
+            <a:tailEnd type="triangle"/>
+          </a:ln>
+        </p:spPr>
+        <p:style>
+          <a:lnRef idx="1">
+            <a:schemeClr val="accent1"/>
+          </a:lnRef>
+          <a:fillRef idx="0">
+            <a:schemeClr val="accent1"/>
+          </a:fillRef>
+          <a:effectRef idx="0">
+            <a:schemeClr val="accent1"/>
+          </a:effectRef>
+          <a:fontRef idx="minor">
+            <a:schemeClr val="tx1"/>
+          </a:fontRef>
+        </p:style>
+      </p:cxnSp>
+      <p:sp>
+        <p:nvSpPr>
+          <p:cNvPr id="12" name="ZoneTexte 11">
+            <a:extLst>
+              <a:ext uri="{FF2B5EF4-FFF2-40B4-BE49-F238E27FC236}">
+                <a16:creationId xmlns:a16="http://schemas.microsoft.com/office/drawing/2014/main" id="{70D9534D-CE91-CBA9-2A84-BBF75ADF9842}"/>
+              </a:ext>
+            </a:extLst>
+          </p:cNvPr>
+          <p:cNvSpPr txBox="1"/>
+          <p:nvPr/>
+        </p:nvSpPr>
+        <p:spPr>
+          <a:xfrm>
+            <a:off x="6522488" y="3022600"/>
+            <a:ext cx="1398494" cy="738664"/>
+          </a:xfrm>
+          <a:prstGeom prst="rect">
+            <a:avLst/>
+          </a:prstGeom>
+          <a:noFill/>
+          <a:ln w="19050">
+            <a:solidFill>
+              <a:srgbClr val="FF0000"/>
+            </a:solidFill>
+          </a:ln>
+        </p:spPr>
+        <p:txBody>
+          <a:bodyPr wrap="square" rtlCol="0">
+            <a:spAutoFit/>
+          </a:bodyPr>
+          <a:lstStyle/>
+          <a:p>
+            <a:r>
+              <a:rPr lang="fr-FR" sz="1400" dirty="0"/>
+              <a:t>Vérification de l’installation </a:t>
+            </a:r>
+            <a:r>
+              <a:rPr lang="fr-FR" sz="1400" dirty="0" err="1"/>
+              <a:t>abctl</a:t>
+            </a:r>
+            <a:endParaRPr lang="fr-FR" sz="1400" dirty="0"/>
+          </a:p>
+        </p:txBody>
+      </p:sp>
+      <p:cxnSp>
+        <p:nvCxnSpPr>
+          <p:cNvPr id="18" name="Connecteur droit avec flèche 17">
+            <a:extLst>
+              <a:ext uri="{FF2B5EF4-FFF2-40B4-BE49-F238E27FC236}">
+                <a16:creationId xmlns:a16="http://schemas.microsoft.com/office/drawing/2014/main" id="{99B46772-C1A2-575E-A433-80EA318FAEEE}"/>
+              </a:ext>
+            </a:extLst>
+          </p:cNvPr>
+          <p:cNvCxnSpPr>
+            <a:cxnSpLocks/>
+            <a:stCxn id="19" idx="1"/>
+          </p:cNvCxnSpPr>
+          <p:nvPr/>
+        </p:nvCxnSpPr>
+        <p:spPr>
+          <a:xfrm flipH="1" flipV="1">
+            <a:off x="3711388" y="3758888"/>
+            <a:ext cx="3426952" cy="645904"/>
+          </a:xfrm>
+          <a:prstGeom prst="straightConnector1">
+            <a:avLst/>
+          </a:prstGeom>
+          <a:ln w="19050">
+            <a:solidFill>
+              <a:srgbClr val="FF0000"/>
+            </a:solidFill>
+            <a:tailEnd type="triangle"/>
+          </a:ln>
+        </p:spPr>
+        <p:style>
+          <a:lnRef idx="1">
+            <a:schemeClr val="accent1"/>
+          </a:lnRef>
+          <a:fillRef idx="0">
+            <a:schemeClr val="accent1"/>
+          </a:fillRef>
+          <a:effectRef idx="0">
+            <a:schemeClr val="accent1"/>
+          </a:effectRef>
+          <a:fontRef idx="minor">
+            <a:schemeClr val="tx1"/>
+          </a:fontRef>
+        </p:style>
+      </p:cxnSp>
+      <p:sp>
+        <p:nvSpPr>
+          <p:cNvPr id="19" name="ZoneTexte 18">
+            <a:extLst>
+              <a:ext uri="{FF2B5EF4-FFF2-40B4-BE49-F238E27FC236}">
+                <a16:creationId xmlns:a16="http://schemas.microsoft.com/office/drawing/2014/main" id="{CCB9072D-7FCD-97C8-9D7F-9CC77E49A791}"/>
+              </a:ext>
+            </a:extLst>
+          </p:cNvPr>
+          <p:cNvSpPr txBox="1"/>
+          <p:nvPr/>
+        </p:nvSpPr>
+        <p:spPr>
+          <a:xfrm>
+            <a:off x="7138340" y="4143182"/>
+            <a:ext cx="1398494" cy="523220"/>
+          </a:xfrm>
+          <a:prstGeom prst="rect">
+            <a:avLst/>
+          </a:prstGeom>
+          <a:noFill/>
+          <a:ln w="19050">
+            <a:solidFill>
+              <a:srgbClr val="FF0000"/>
+            </a:solidFill>
+          </a:ln>
+        </p:spPr>
+        <p:txBody>
+          <a:bodyPr wrap="square" rtlCol="0">
+            <a:spAutoFit/>
+          </a:bodyPr>
+          <a:lstStyle/>
+          <a:p>
+            <a:r>
+              <a:rPr lang="fr-FR" sz="1400" dirty="0"/>
+              <a:t>Lancement du cluster </a:t>
+            </a:r>
+            <a:r>
+              <a:rPr lang="fr-FR" sz="1400" dirty="0" err="1"/>
+              <a:t>Airbyte</a:t>
+            </a:r>
+            <a:endParaRPr lang="fr-FR" sz="1400" dirty="0"/>
+          </a:p>
+        </p:txBody>
+      </p:sp>
+      <p:cxnSp>
+        <p:nvCxnSpPr>
+          <p:cNvPr id="21" name="Connecteur droit avec flèche 20">
+            <a:extLst>
+              <a:ext uri="{FF2B5EF4-FFF2-40B4-BE49-F238E27FC236}">
+                <a16:creationId xmlns:a16="http://schemas.microsoft.com/office/drawing/2014/main" id="{889B2803-6A15-87B6-FB5A-609F88D62BD8}"/>
+              </a:ext>
+            </a:extLst>
+          </p:cNvPr>
+          <p:cNvCxnSpPr>
+            <a:cxnSpLocks/>
+            <a:stCxn id="22" idx="1"/>
+          </p:cNvCxnSpPr>
+          <p:nvPr/>
+        </p:nvCxnSpPr>
+        <p:spPr>
+          <a:xfrm flipH="1">
+            <a:off x="5504329" y="5787872"/>
+            <a:ext cx="1756577" cy="195252"/>
+          </a:xfrm>
+          <a:prstGeom prst="straightConnector1">
+            <a:avLst/>
+          </a:prstGeom>
+          <a:ln w="19050">
+            <a:solidFill>
+              <a:srgbClr val="FF0000"/>
+            </a:solidFill>
+            <a:tailEnd type="triangle"/>
+          </a:ln>
+        </p:spPr>
+        <p:style>
+          <a:lnRef idx="1">
+            <a:schemeClr val="accent1"/>
+          </a:lnRef>
+          <a:fillRef idx="0">
+            <a:schemeClr val="accent1"/>
+          </a:fillRef>
+          <a:effectRef idx="0">
+            <a:schemeClr val="accent1"/>
+          </a:effectRef>
+          <a:fontRef idx="minor">
+            <a:schemeClr val="tx1"/>
+          </a:fontRef>
+        </p:style>
+      </p:cxnSp>
+      <p:sp>
+        <p:nvSpPr>
+          <p:cNvPr id="22" name="ZoneTexte 21">
+            <a:extLst>
+              <a:ext uri="{FF2B5EF4-FFF2-40B4-BE49-F238E27FC236}">
+                <a16:creationId xmlns:a16="http://schemas.microsoft.com/office/drawing/2014/main" id="{ABF8A8BC-CA71-5747-7CB7-EB8E618F5AF5}"/>
+              </a:ext>
+            </a:extLst>
+          </p:cNvPr>
+          <p:cNvSpPr txBox="1"/>
+          <p:nvPr/>
+        </p:nvSpPr>
+        <p:spPr>
+          <a:xfrm>
+            <a:off x="7260906" y="5418540"/>
+            <a:ext cx="1623118" cy="738664"/>
+          </a:xfrm>
+          <a:prstGeom prst="rect">
+            <a:avLst/>
+          </a:prstGeom>
+          <a:noFill/>
+          <a:ln w="19050">
+            <a:solidFill>
+              <a:srgbClr val="FF0000"/>
+            </a:solidFill>
+          </a:ln>
+        </p:spPr>
+        <p:txBody>
+          <a:bodyPr wrap="square" rtlCol="0">
+            <a:spAutoFit/>
+          </a:bodyPr>
+          <a:lstStyle/>
+          <a:p>
+            <a:r>
+              <a:rPr lang="fr-FR" sz="1400" dirty="0"/>
+              <a:t>Récupération de l’URL de connexion à </a:t>
+            </a:r>
+            <a:r>
+              <a:rPr lang="fr-FR" sz="1400" dirty="0" err="1"/>
+              <a:t>Airbyte</a:t>
+            </a:r>
+            <a:endParaRPr lang="fr-FR" sz="1400" dirty="0"/>
           </a:p>
         </p:txBody>
       </p:sp>
@@ -20805,7 +23544,13 @@
   <p:cSld>
     <p:spTree>
       <p:nvGrpSpPr>
-        <p:cNvPr id="1" name=""/>
+        <p:cNvPr id="1" name="">
+          <a:extLst>
+            <a:ext uri="{FF2B5EF4-FFF2-40B4-BE49-F238E27FC236}">
+              <a16:creationId xmlns:a16="http://schemas.microsoft.com/office/drawing/2014/main" id="{88D74983-0817-6D98-34A1-3F26DB0DD95E}"/>
+            </a:ext>
+          </a:extLst>
+        </p:cNvPr>
         <p:cNvGrpSpPr/>
         <p:nvPr/>
       </p:nvGrpSpPr>
@@ -20817,12 +23562,102 @@
           <a:chExt cx="0" cy="0"/>
         </a:xfrm>
       </p:grpSpPr>
+      <p:pic>
+        <p:nvPicPr>
+          <p:cNvPr id="30" name="Image 29">
+            <a:extLst>
+              <a:ext uri="{FF2B5EF4-FFF2-40B4-BE49-F238E27FC236}">
+                <a16:creationId xmlns:a16="http://schemas.microsoft.com/office/drawing/2014/main" id="{2267C55F-B917-1312-7F10-54642988F6BE}"/>
+              </a:ext>
+            </a:extLst>
+          </p:cNvPr>
+          <p:cNvPicPr>
+            <a:picLocks noChangeAspect="1"/>
+          </p:cNvPicPr>
+          <p:nvPr/>
+        </p:nvPicPr>
+        <p:blipFill>
+          <a:blip r:embed="rId2"/>
+          <a:stretch>
+            <a:fillRect/>
+          </a:stretch>
+        </p:blipFill>
+        <p:spPr>
+          <a:xfrm>
+            <a:off x="5819187" y="3889977"/>
+            <a:ext cx="2444226" cy="2783870"/>
+          </a:xfrm>
+          <a:prstGeom prst="rect">
+            <a:avLst/>
+          </a:prstGeom>
+        </p:spPr>
+      </p:pic>
+      <p:pic>
+        <p:nvPicPr>
+          <p:cNvPr id="23" name="Image 22">
+            <a:extLst>
+              <a:ext uri="{FF2B5EF4-FFF2-40B4-BE49-F238E27FC236}">
+                <a16:creationId xmlns:a16="http://schemas.microsoft.com/office/drawing/2014/main" id="{42254041-17CD-A75B-FC02-109492948AAB}"/>
+              </a:ext>
+            </a:extLst>
+          </p:cNvPr>
+          <p:cNvPicPr>
+            <a:picLocks noChangeAspect="1"/>
+          </p:cNvPicPr>
+          <p:nvPr/>
+        </p:nvPicPr>
+        <p:blipFill>
+          <a:blip r:embed="rId3"/>
+          <a:stretch>
+            <a:fillRect/>
+          </a:stretch>
+        </p:blipFill>
+        <p:spPr>
+          <a:xfrm>
+            <a:off x="8634525" y="1760193"/>
+            <a:ext cx="3068516" cy="3965467"/>
+          </a:xfrm>
+          <a:prstGeom prst="rect">
+            <a:avLst/>
+          </a:prstGeom>
+        </p:spPr>
+      </p:pic>
+      <p:pic>
+        <p:nvPicPr>
+          <p:cNvPr id="17" name="Image 16">
+            <a:extLst>
+              <a:ext uri="{FF2B5EF4-FFF2-40B4-BE49-F238E27FC236}">
+                <a16:creationId xmlns:a16="http://schemas.microsoft.com/office/drawing/2014/main" id="{3A32B1C6-CE19-2575-0D75-B6C84CC295E5}"/>
+              </a:ext>
+            </a:extLst>
+          </p:cNvPr>
+          <p:cNvPicPr>
+            <a:picLocks noChangeAspect="1"/>
+          </p:cNvPicPr>
+          <p:nvPr/>
+        </p:nvPicPr>
+        <p:blipFill>
+          <a:blip r:embed="rId4"/>
+          <a:stretch>
+            <a:fillRect/>
+          </a:stretch>
+        </p:blipFill>
+        <p:spPr>
+          <a:xfrm>
+            <a:off x="366742" y="1949558"/>
+            <a:ext cx="5137583" cy="1704796"/>
+          </a:xfrm>
+          <a:prstGeom prst="rect">
+            <a:avLst/>
+          </a:prstGeom>
+        </p:spPr>
+      </p:pic>
       <p:sp>
         <p:nvSpPr>
           <p:cNvPr id="2" name="Titre 1">
             <a:extLst>
               <a:ext uri="{FF2B5EF4-FFF2-40B4-BE49-F238E27FC236}">
-                <a16:creationId xmlns:a16="http://schemas.microsoft.com/office/drawing/2014/main" id="{CD4458A9-6CDC-6BF3-250C-B6E6F2946DB9}"/>
+                <a16:creationId xmlns:a16="http://schemas.microsoft.com/office/drawing/2014/main" id="{705925C9-1234-EBA4-C6CB-9CCF7796EC67}"/>
               </a:ext>
             </a:extLst>
           </p:cNvPr>
@@ -20840,33 +23675,16 @@
           <a:p>
             <a:r>
               <a:rPr lang="fr-FR" dirty="0"/>
-              <a:t>6. Mise en place DBT</a:t>
-            </a:r>
-          </a:p>
-        </p:txBody>
-      </p:sp>
-      <p:sp>
-        <p:nvSpPr>
-          <p:cNvPr id="3" name="Espace réservé du contenu 2">
-            <a:extLst>
-              <a:ext uri="{FF2B5EF4-FFF2-40B4-BE49-F238E27FC236}">
-                <a16:creationId xmlns:a16="http://schemas.microsoft.com/office/drawing/2014/main" id="{2CE1B120-2F32-09E5-8E07-86A7DCFCA271}"/>
-              </a:ext>
-            </a:extLst>
-          </p:cNvPr>
-          <p:cNvSpPr>
-            <a:spLocks noGrp="1"/>
-          </p:cNvSpPr>
-          <p:nvPr>
-            <p:ph idx="1"/>
-          </p:nvPr>
-        </p:nvSpPr>
-        <p:spPr/>
-        <p:txBody>
-          <a:bodyPr/>
-          <a:lstStyle/>
-          <a:p>
-            <a:endParaRPr lang="fr-FR"/>
+              <a:t>5. Mise en place </a:t>
+            </a:r>
+            <a:r>
+              <a:rPr lang="fr-FR" dirty="0" err="1"/>
+              <a:t>Airbyte</a:t>
+            </a:r>
+            <a:br>
+              <a:rPr lang="fr-FR" dirty="0"/>
+            </a:br>
+            <a:endParaRPr lang="fr-FR" dirty="0"/>
           </a:p>
         </p:txBody>
       </p:sp>
@@ -20875,7 +23693,7 @@
           <p:cNvPr id="4" name="Espace réservé de la date 3">
             <a:extLst>
               <a:ext uri="{FF2B5EF4-FFF2-40B4-BE49-F238E27FC236}">
-                <a16:creationId xmlns:a16="http://schemas.microsoft.com/office/drawing/2014/main" id="{24295062-DAC1-8A8F-28FC-FA10BE7B3705}"/>
+                <a16:creationId xmlns:a16="http://schemas.microsoft.com/office/drawing/2014/main" id="{76DE4246-318F-7BB4-8541-0D08F553A1D7}"/>
               </a:ext>
             </a:extLst>
           </p:cNvPr>
@@ -20894,16 +23712,487 @@
             <a:pPr rtl="0"/>
             <a:fld id="{22897033-9A55-4DAC-991D-1FF1921C78B7}" type="datetime1">
               <a:rPr lang="fr-FR" smtClean="0"/>
-              <a:t>16/08/2026</a:t>
+              <a:t>18/08/2026</a:t>
             </a:fld>
             <a:endParaRPr lang="en-US" dirty="0"/>
+          </a:p>
+        </p:txBody>
+      </p:sp>
+      <p:sp>
+        <p:nvSpPr>
+          <p:cNvPr id="5" name="Espace réservé du contenu 2">
+            <a:extLst>
+              <a:ext uri="{FF2B5EF4-FFF2-40B4-BE49-F238E27FC236}">
+                <a16:creationId xmlns:a16="http://schemas.microsoft.com/office/drawing/2014/main" id="{B55FA9FA-0C60-CA7B-89A9-9E8DF7DE443F}"/>
+              </a:ext>
+            </a:extLst>
+          </p:cNvPr>
+          <p:cNvSpPr>
+            <a:spLocks noGrp="1"/>
+          </p:cNvSpPr>
+          <p:nvPr>
+            <p:ph idx="1"/>
+          </p:nvPr>
+        </p:nvSpPr>
+        <p:spPr>
+          <a:xfrm>
+            <a:off x="581192" y="2020366"/>
+            <a:ext cx="11029615" cy="3634486"/>
+          </a:xfrm>
+        </p:spPr>
+        <p:txBody>
+          <a:bodyPr/>
+          <a:lstStyle/>
+          <a:p>
+            <a:endParaRPr lang="fr-FR" dirty="0"/>
+          </a:p>
+          <a:p>
+            <a:endParaRPr lang="fr-FR" dirty="0"/>
+          </a:p>
+          <a:p>
+            <a:endParaRPr lang="fr-FR" dirty="0"/>
+          </a:p>
+          <a:p>
+            <a:endParaRPr lang="fr-FR" dirty="0"/>
+          </a:p>
+          <a:p>
+            <a:endParaRPr lang="fr-FR" dirty="0"/>
+          </a:p>
+        </p:txBody>
+      </p:sp>
+      <p:cxnSp>
+        <p:nvCxnSpPr>
+          <p:cNvPr id="11" name="Connecteur droit avec flèche 10">
+            <a:extLst>
+              <a:ext uri="{FF2B5EF4-FFF2-40B4-BE49-F238E27FC236}">
+                <a16:creationId xmlns:a16="http://schemas.microsoft.com/office/drawing/2014/main" id="{E52297B9-826B-22AE-DE9A-56E6E72007DC}"/>
+              </a:ext>
+            </a:extLst>
+          </p:cNvPr>
+          <p:cNvCxnSpPr>
+            <a:cxnSpLocks/>
+          </p:cNvCxnSpPr>
+          <p:nvPr/>
+        </p:nvCxnSpPr>
+        <p:spPr>
+          <a:xfrm flipH="1">
+            <a:off x="3651773" y="2029502"/>
+            <a:ext cx="2444226" cy="0"/>
+          </a:xfrm>
+          <a:prstGeom prst="straightConnector1">
+            <a:avLst/>
+          </a:prstGeom>
+          <a:ln w="19050">
+            <a:solidFill>
+              <a:srgbClr val="FF0000"/>
+            </a:solidFill>
+            <a:tailEnd type="triangle"/>
+          </a:ln>
+        </p:spPr>
+        <p:style>
+          <a:lnRef idx="1">
+            <a:schemeClr val="accent1"/>
+          </a:lnRef>
+          <a:fillRef idx="0">
+            <a:schemeClr val="accent1"/>
+          </a:fillRef>
+          <a:effectRef idx="0">
+            <a:schemeClr val="accent1"/>
+          </a:effectRef>
+          <a:fontRef idx="minor">
+            <a:schemeClr val="tx1"/>
+          </a:fontRef>
+        </p:style>
+      </p:cxnSp>
+      <p:sp>
+        <p:nvSpPr>
+          <p:cNvPr id="12" name="ZoneTexte 11">
+            <a:extLst>
+              <a:ext uri="{FF2B5EF4-FFF2-40B4-BE49-F238E27FC236}">
+                <a16:creationId xmlns:a16="http://schemas.microsoft.com/office/drawing/2014/main" id="{EE53D73E-ACCA-C005-E114-5F39B29C3D15}"/>
+              </a:ext>
+            </a:extLst>
+          </p:cNvPr>
+          <p:cNvSpPr txBox="1"/>
+          <p:nvPr/>
+        </p:nvSpPr>
+        <p:spPr>
+          <a:xfrm>
+            <a:off x="6095999" y="1520652"/>
+            <a:ext cx="2229778" cy="954107"/>
+          </a:xfrm>
+          <a:prstGeom prst="rect">
+            <a:avLst/>
+          </a:prstGeom>
+          <a:noFill/>
+          <a:ln w="19050">
+            <a:solidFill>
+              <a:srgbClr val="FF0000"/>
+            </a:solidFill>
+          </a:ln>
+        </p:spPr>
+        <p:txBody>
+          <a:bodyPr wrap="square" rtlCol="0">
+            <a:spAutoFit/>
+          </a:bodyPr>
+          <a:lstStyle/>
+          <a:p>
+            <a:r>
+              <a:rPr lang="fr-FR" sz="1400" dirty="0"/>
+              <a:t>Récupération de l’identifiant et du mot de passe pour se connecter à </a:t>
+            </a:r>
+            <a:r>
+              <a:rPr lang="fr-FR" sz="1400" dirty="0" err="1"/>
+              <a:t>Airbyte</a:t>
+            </a:r>
+            <a:endParaRPr lang="fr-FR" sz="1400" dirty="0"/>
+          </a:p>
+        </p:txBody>
+      </p:sp>
+      <p:cxnSp>
+        <p:nvCxnSpPr>
+          <p:cNvPr id="18" name="Connecteur droit avec flèche 17">
+            <a:extLst>
+              <a:ext uri="{FF2B5EF4-FFF2-40B4-BE49-F238E27FC236}">
+                <a16:creationId xmlns:a16="http://schemas.microsoft.com/office/drawing/2014/main" id="{A33A57B6-B76A-8140-7629-DA6CA0A7787D}"/>
+              </a:ext>
+            </a:extLst>
+          </p:cNvPr>
+          <p:cNvCxnSpPr>
+            <a:cxnSpLocks/>
+            <a:stCxn id="19" idx="0"/>
+          </p:cNvCxnSpPr>
+          <p:nvPr/>
+        </p:nvCxnSpPr>
+        <p:spPr>
+          <a:xfrm flipV="1">
+            <a:off x="9384394" y="4348480"/>
+            <a:ext cx="247286" cy="970934"/>
+          </a:xfrm>
+          <a:prstGeom prst="straightConnector1">
+            <a:avLst/>
+          </a:prstGeom>
+          <a:ln w="19050">
+            <a:solidFill>
+              <a:srgbClr val="FF0000"/>
+            </a:solidFill>
+            <a:tailEnd type="triangle"/>
+          </a:ln>
+        </p:spPr>
+        <p:style>
+          <a:lnRef idx="1">
+            <a:schemeClr val="accent1"/>
+          </a:lnRef>
+          <a:fillRef idx="0">
+            <a:schemeClr val="accent1"/>
+          </a:fillRef>
+          <a:effectRef idx="0">
+            <a:schemeClr val="accent1"/>
+          </a:effectRef>
+          <a:fontRef idx="minor">
+            <a:schemeClr val="tx1"/>
+          </a:fontRef>
+        </p:style>
+      </p:cxnSp>
+      <p:sp>
+        <p:nvSpPr>
+          <p:cNvPr id="19" name="ZoneTexte 18">
+            <a:extLst>
+              <a:ext uri="{FF2B5EF4-FFF2-40B4-BE49-F238E27FC236}">
+                <a16:creationId xmlns:a16="http://schemas.microsoft.com/office/drawing/2014/main" id="{94332C56-FE79-56CF-2026-CDA20ACEB201}"/>
+              </a:ext>
+            </a:extLst>
+          </p:cNvPr>
+          <p:cNvSpPr txBox="1"/>
+          <p:nvPr/>
+        </p:nvSpPr>
+        <p:spPr>
+          <a:xfrm>
+            <a:off x="8685147" y="5319414"/>
+            <a:ext cx="1398494" cy="954107"/>
+          </a:xfrm>
+          <a:prstGeom prst="rect">
+            <a:avLst/>
+          </a:prstGeom>
+          <a:noFill/>
+          <a:ln w="19050">
+            <a:solidFill>
+              <a:srgbClr val="FF0000"/>
+            </a:solidFill>
+          </a:ln>
+        </p:spPr>
+        <p:txBody>
+          <a:bodyPr wrap="square" rtlCol="0">
+            <a:spAutoFit/>
+          </a:bodyPr>
+          <a:lstStyle/>
+          <a:p>
+            <a:r>
+              <a:rPr lang="fr-FR" sz="1400" dirty="0"/>
+              <a:t>Organisation à compléter exemple </a:t>
+            </a:r>
+            <a:r>
+              <a:rPr lang="fr-FR" sz="1400" dirty="0" err="1"/>
+              <a:t>Greencoop</a:t>
+            </a:r>
+            <a:endParaRPr lang="fr-FR" sz="1400" dirty="0"/>
+          </a:p>
+        </p:txBody>
+      </p:sp>
+      <p:pic>
+        <p:nvPicPr>
+          <p:cNvPr id="32" name="Image 31">
+            <a:extLst>
+              <a:ext uri="{FF2B5EF4-FFF2-40B4-BE49-F238E27FC236}">
+                <a16:creationId xmlns:a16="http://schemas.microsoft.com/office/drawing/2014/main" id="{D4C5A50F-A2B5-14EE-23F5-2E99C9A7753D}"/>
+              </a:ext>
+            </a:extLst>
+          </p:cNvPr>
+          <p:cNvPicPr>
+            <a:picLocks noChangeAspect="1"/>
+          </p:cNvPicPr>
+          <p:nvPr/>
+        </p:nvPicPr>
+        <p:blipFill>
+          <a:blip r:embed="rId5"/>
+          <a:stretch>
+            <a:fillRect/>
+          </a:stretch>
+        </p:blipFill>
+        <p:spPr>
+          <a:xfrm>
+            <a:off x="103344" y="3856530"/>
+            <a:ext cx="5623609" cy="2752459"/>
+          </a:xfrm>
+          <a:prstGeom prst="rect">
+            <a:avLst/>
+          </a:prstGeom>
+        </p:spPr>
+      </p:pic>
+      <p:sp>
+        <p:nvSpPr>
+          <p:cNvPr id="35" name="Heptagone 34">
+            <a:extLst>
+              <a:ext uri="{FF2B5EF4-FFF2-40B4-BE49-F238E27FC236}">
+                <a16:creationId xmlns:a16="http://schemas.microsoft.com/office/drawing/2014/main" id="{ABC48CAC-8A29-2897-5B13-8B367CE2A0D0}"/>
+              </a:ext>
+            </a:extLst>
+          </p:cNvPr>
+          <p:cNvSpPr/>
+          <p:nvPr/>
+        </p:nvSpPr>
+        <p:spPr>
+          <a:xfrm>
+            <a:off x="5453244" y="1421458"/>
+            <a:ext cx="457199" cy="457292"/>
+          </a:xfrm>
+          <a:prstGeom prst="heptagon">
+            <a:avLst/>
+          </a:prstGeom>
+          <a:solidFill>
+            <a:srgbClr val="FF0000"/>
+          </a:solidFill>
+          <a:ln>
+            <a:noFill/>
+          </a:ln>
+        </p:spPr>
+        <p:style>
+          <a:lnRef idx="2">
+            <a:schemeClr val="accent1">
+              <a:shade val="15000"/>
+            </a:schemeClr>
+          </a:lnRef>
+          <a:fillRef idx="1">
+            <a:schemeClr val="accent1"/>
+          </a:fillRef>
+          <a:effectRef idx="0">
+            <a:schemeClr val="accent1"/>
+          </a:effectRef>
+          <a:fontRef idx="minor">
+            <a:schemeClr val="lt1"/>
+          </a:fontRef>
+        </p:style>
+        <p:txBody>
+          <a:bodyPr rtlCol="0" anchor="ctr"/>
+          <a:lstStyle/>
+          <a:p>
+            <a:pPr algn="ctr"/>
+            <a:r>
+              <a:rPr lang="fr-FR" dirty="0"/>
+              <a:t>1</a:t>
+            </a:r>
+          </a:p>
+        </p:txBody>
+      </p:sp>
+      <p:sp>
+        <p:nvSpPr>
+          <p:cNvPr id="36" name="Heptagone 35">
+            <a:extLst>
+              <a:ext uri="{FF2B5EF4-FFF2-40B4-BE49-F238E27FC236}">
+                <a16:creationId xmlns:a16="http://schemas.microsoft.com/office/drawing/2014/main" id="{E454EFEF-58B5-0ABD-5FEF-02DB087EE133}"/>
+              </a:ext>
+            </a:extLst>
+          </p:cNvPr>
+          <p:cNvSpPr/>
+          <p:nvPr/>
+        </p:nvSpPr>
+        <p:spPr>
+          <a:xfrm>
+            <a:off x="8688851" y="1876252"/>
+            <a:ext cx="457199" cy="457292"/>
+          </a:xfrm>
+          <a:prstGeom prst="heptagon">
+            <a:avLst/>
+          </a:prstGeom>
+          <a:solidFill>
+            <a:srgbClr val="FF0000"/>
+          </a:solidFill>
+          <a:ln>
+            <a:noFill/>
+          </a:ln>
+        </p:spPr>
+        <p:style>
+          <a:lnRef idx="2">
+            <a:schemeClr val="accent1">
+              <a:shade val="15000"/>
+            </a:schemeClr>
+          </a:lnRef>
+          <a:fillRef idx="1">
+            <a:schemeClr val="accent1"/>
+          </a:fillRef>
+          <a:effectRef idx="0">
+            <a:schemeClr val="accent1"/>
+          </a:effectRef>
+          <a:fontRef idx="minor">
+            <a:schemeClr val="lt1"/>
+          </a:fontRef>
+        </p:style>
+        <p:txBody>
+          <a:bodyPr rtlCol="0" anchor="ctr"/>
+          <a:lstStyle/>
+          <a:p>
+            <a:pPr algn="ctr"/>
+            <a:r>
+              <a:rPr lang="fr-FR" dirty="0"/>
+              <a:t>2</a:t>
+            </a:r>
+          </a:p>
+        </p:txBody>
+      </p:sp>
+      <p:sp>
+        <p:nvSpPr>
+          <p:cNvPr id="37" name="Heptagone 36">
+            <a:extLst>
+              <a:ext uri="{FF2B5EF4-FFF2-40B4-BE49-F238E27FC236}">
+                <a16:creationId xmlns:a16="http://schemas.microsoft.com/office/drawing/2014/main" id="{4E09418D-BB7A-7310-96AA-51FF7BC126F8}"/>
+              </a:ext>
+            </a:extLst>
+          </p:cNvPr>
+          <p:cNvSpPr/>
+          <p:nvPr/>
+        </p:nvSpPr>
+        <p:spPr>
+          <a:xfrm>
+            <a:off x="7210888" y="3751350"/>
+            <a:ext cx="457199" cy="457292"/>
+          </a:xfrm>
+          <a:prstGeom prst="heptagon">
+            <a:avLst/>
+          </a:prstGeom>
+          <a:solidFill>
+            <a:srgbClr val="FF0000"/>
+          </a:solidFill>
+          <a:ln>
+            <a:noFill/>
+          </a:ln>
+        </p:spPr>
+        <p:style>
+          <a:lnRef idx="2">
+            <a:schemeClr val="accent1">
+              <a:shade val="15000"/>
+            </a:schemeClr>
+          </a:lnRef>
+          <a:fillRef idx="1">
+            <a:schemeClr val="accent1"/>
+          </a:fillRef>
+          <a:effectRef idx="0">
+            <a:schemeClr val="accent1"/>
+          </a:effectRef>
+          <a:fontRef idx="minor">
+            <a:schemeClr val="lt1"/>
+          </a:fontRef>
+        </p:style>
+        <p:txBody>
+          <a:bodyPr rtlCol="0" anchor="ctr"/>
+          <a:lstStyle/>
+          <a:p>
+            <a:pPr algn="ctr"/>
+            <a:r>
+              <a:rPr lang="fr-FR" dirty="0"/>
+              <a:t>3</a:t>
+            </a:r>
+          </a:p>
+        </p:txBody>
+      </p:sp>
+      <p:sp>
+        <p:nvSpPr>
+          <p:cNvPr id="38" name="Heptagone 37">
+            <a:extLst>
+              <a:ext uri="{FF2B5EF4-FFF2-40B4-BE49-F238E27FC236}">
+                <a16:creationId xmlns:a16="http://schemas.microsoft.com/office/drawing/2014/main" id="{FCE63BD3-363B-F7E5-7F37-697ABE9EA112}"/>
+              </a:ext>
+            </a:extLst>
+          </p:cNvPr>
+          <p:cNvSpPr/>
+          <p:nvPr/>
+        </p:nvSpPr>
+        <p:spPr>
+          <a:xfrm>
+            <a:off x="5224644" y="3810239"/>
+            <a:ext cx="457199" cy="457292"/>
+          </a:xfrm>
+          <a:prstGeom prst="heptagon">
+            <a:avLst/>
+          </a:prstGeom>
+          <a:solidFill>
+            <a:srgbClr val="FF0000"/>
+          </a:solidFill>
+          <a:ln>
+            <a:noFill/>
+          </a:ln>
+        </p:spPr>
+        <p:style>
+          <a:lnRef idx="2">
+            <a:schemeClr val="accent1">
+              <a:shade val="15000"/>
+            </a:schemeClr>
+          </a:lnRef>
+          <a:fillRef idx="1">
+            <a:schemeClr val="accent1"/>
+          </a:fillRef>
+          <a:effectRef idx="0">
+            <a:schemeClr val="accent1"/>
+          </a:effectRef>
+          <a:fontRef idx="minor">
+            <a:schemeClr val="lt1"/>
+          </a:fontRef>
+        </p:style>
+        <p:txBody>
+          <a:bodyPr rtlCol="0" anchor="ctr"/>
+          <a:lstStyle/>
+          <a:p>
+            <a:pPr algn="ctr"/>
+            <a:r>
+              <a:rPr lang="fr-FR" dirty="0"/>
+              <a:t>4</a:t>
+            </a:r>
           </a:p>
         </p:txBody>
       </p:sp>
     </p:spTree>
     <p:extLst>
       <p:ext uri="{BB962C8B-B14F-4D97-AF65-F5344CB8AC3E}">
-        <p14:creationId xmlns:p14="http://schemas.microsoft.com/office/powerpoint/2010/main" val="1468749072"/>
+        <p14:creationId xmlns:p14="http://schemas.microsoft.com/office/powerpoint/2010/main" val="158295832"/>
       </p:ext>
     </p:extLst>
   </p:cSld>
@@ -20918,7 +24207,13 @@
   <p:cSld>
     <p:spTree>
       <p:nvGrpSpPr>
-        <p:cNvPr id="1" name=""/>
+        <p:cNvPr id="1" name="">
+          <a:extLst>
+            <a:ext uri="{FF2B5EF4-FFF2-40B4-BE49-F238E27FC236}">
+              <a16:creationId xmlns:a16="http://schemas.microsoft.com/office/drawing/2014/main" id="{1011E6CB-E986-2838-317C-AD5DECF79C5D}"/>
+            </a:ext>
+          </a:extLst>
+        </p:cNvPr>
         <p:cNvGrpSpPr/>
         <p:nvPr/>
       </p:nvGrpSpPr>
@@ -20930,12 +24225,77 @@
           <a:chExt cx="0" cy="0"/>
         </a:xfrm>
       </p:grpSpPr>
+      <p:pic>
+        <p:nvPicPr>
+          <p:cNvPr id="8" name="Image 7">
+            <a:extLst>
+              <a:ext uri="{FF2B5EF4-FFF2-40B4-BE49-F238E27FC236}">
+                <a16:creationId xmlns:a16="http://schemas.microsoft.com/office/drawing/2014/main" id="{6D3DA2DF-A86A-2CC4-5E20-0DDB71458987}"/>
+              </a:ext>
+            </a:extLst>
+          </p:cNvPr>
+          <p:cNvPicPr>
+            <a:picLocks noChangeAspect="1"/>
+          </p:cNvPicPr>
+          <p:nvPr/>
+        </p:nvPicPr>
+        <p:blipFill>
+          <a:blip r:embed="rId2"/>
+          <a:stretch>
+            <a:fillRect/>
+          </a:stretch>
+        </p:blipFill>
+        <p:spPr>
+          <a:xfrm>
+            <a:off x="244944" y="1980929"/>
+            <a:ext cx="7423143" cy="4391155"/>
+          </a:xfrm>
+          <a:prstGeom prst="rect">
+            <a:avLst/>
+          </a:prstGeom>
+        </p:spPr>
+      </p:pic>
+      <p:pic>
+        <p:nvPicPr>
+          <p:cNvPr id="10" name="Image 9">
+            <a:extLst>
+              <a:ext uri="{FF2B5EF4-FFF2-40B4-BE49-F238E27FC236}">
+                <a16:creationId xmlns:a16="http://schemas.microsoft.com/office/drawing/2014/main" id="{08D5152E-E889-8CA5-C44F-A4A1FA017852}"/>
+              </a:ext>
+            </a:extLst>
+          </p:cNvPr>
+          <p:cNvPicPr>
+            <a:picLocks noChangeAspect="1"/>
+          </p:cNvPicPr>
+          <p:nvPr/>
+        </p:nvPicPr>
+        <p:blipFill>
+          <a:blip r:embed="rId3"/>
+          <a:stretch>
+            <a:fillRect/>
+          </a:stretch>
+        </p:blipFill>
+        <p:spPr>
+          <a:xfrm>
+            <a:off x="7507786" y="1942706"/>
+            <a:ext cx="4684214" cy="3885084"/>
+          </a:xfrm>
+          <a:prstGeom prst="rect">
+            <a:avLst/>
+          </a:prstGeom>
+          <a:ln>
+            <a:solidFill>
+              <a:srgbClr val="FF0000"/>
+            </a:solidFill>
+          </a:ln>
+        </p:spPr>
+      </p:pic>
       <p:sp>
         <p:nvSpPr>
           <p:cNvPr id="2" name="Titre 1">
             <a:extLst>
               <a:ext uri="{FF2B5EF4-FFF2-40B4-BE49-F238E27FC236}">
-                <a16:creationId xmlns:a16="http://schemas.microsoft.com/office/drawing/2014/main" id="{1C4CC017-D4E6-EF3B-F567-8E1DF81BEE69}"/>
+                <a16:creationId xmlns:a16="http://schemas.microsoft.com/office/drawing/2014/main" id="{19AC503D-3E67-A748-EEB9-A41504396FC6}"/>
               </a:ext>
             </a:extLst>
           </p:cNvPr>
@@ -20953,8 +24313,16 @@
           <a:p>
             <a:r>
               <a:rPr lang="fr-FR" dirty="0"/>
-              <a:t>7. temps accessibilité aux données</a:t>
-            </a:r>
+              <a:t>5. Mise en place </a:t>
+            </a:r>
+            <a:r>
+              <a:rPr lang="fr-FR" dirty="0" err="1"/>
+              <a:t>Airbyte</a:t>
+            </a:r>
+            <a:br>
+              <a:rPr lang="fr-FR" dirty="0"/>
+            </a:br>
+            <a:endParaRPr lang="fr-FR" dirty="0"/>
           </a:p>
         </p:txBody>
       </p:sp>
@@ -20963,7 +24331,7 @@
           <p:cNvPr id="4" name="Espace réservé de la date 3">
             <a:extLst>
               <a:ext uri="{FF2B5EF4-FFF2-40B4-BE49-F238E27FC236}">
-                <a16:creationId xmlns:a16="http://schemas.microsoft.com/office/drawing/2014/main" id="{765A87D0-4BCC-68DF-11C9-3CB0062362F5}"/>
+                <a16:creationId xmlns:a16="http://schemas.microsoft.com/office/drawing/2014/main" id="{9830ECEB-1D6F-6823-EEED-F77AECF32774}"/>
               </a:ext>
             </a:extLst>
           </p:cNvPr>
@@ -20982,48 +24350,393 @@
             <a:pPr rtl="0"/>
             <a:fld id="{22897033-9A55-4DAC-991D-1FF1921C78B7}" type="datetime1">
               <a:rPr lang="fr-FR" smtClean="0"/>
-              <a:t>16/08/2026</a:t>
+              <a:t>18/08/2026</a:t>
             </a:fld>
             <a:endParaRPr lang="en-US" dirty="0"/>
           </a:p>
         </p:txBody>
       </p:sp>
-      <p:pic>
-        <p:nvPicPr>
-          <p:cNvPr id="5" name="Picture 3" descr="dbt_runtime.png">
+      <p:sp>
+        <p:nvSpPr>
+          <p:cNvPr id="5" name="Espace réservé du contenu 2">
             <a:extLst>
               <a:ext uri="{FF2B5EF4-FFF2-40B4-BE49-F238E27FC236}">
-                <a16:creationId xmlns:a16="http://schemas.microsoft.com/office/drawing/2014/main" id="{EBDAF90F-5EA1-F0AB-66D7-BD8928719595}"/>
+                <a16:creationId xmlns:a16="http://schemas.microsoft.com/office/drawing/2014/main" id="{3EBB2094-32CC-6F96-6085-4ECF4A86E15F}"/>
               </a:ext>
             </a:extLst>
           </p:cNvPr>
-          <p:cNvPicPr>
-            <a:picLocks noGrp="1" noChangeAspect="1"/>
-          </p:cNvPicPr>
+          <p:cNvSpPr>
+            <a:spLocks noGrp="1"/>
+          </p:cNvSpPr>
           <p:nvPr>
             <p:ph idx="1"/>
           </p:nvPr>
-        </p:nvPicPr>
-        <p:blipFill>
-          <a:blip r:embed="rId2"/>
-          <a:stretch>
-            <a:fillRect/>
-          </a:stretch>
-        </p:blipFill>
+        </p:nvSpPr>
         <p:spPr>
           <a:xfrm>
-            <a:off x="1442873" y="2275065"/>
-            <a:ext cx="5648653" cy="3444053"/>
+            <a:off x="581192" y="2020366"/>
+            <a:ext cx="11029615" cy="3634486"/>
+          </a:xfrm>
+        </p:spPr>
+        <p:txBody>
+          <a:bodyPr/>
+          <a:lstStyle/>
+          <a:p>
+            <a:endParaRPr lang="fr-FR" dirty="0"/>
+          </a:p>
+          <a:p>
+            <a:endParaRPr lang="fr-FR" dirty="0"/>
+          </a:p>
+          <a:p>
+            <a:endParaRPr lang="fr-FR" dirty="0"/>
+          </a:p>
+          <a:p>
+            <a:endParaRPr lang="fr-FR" dirty="0"/>
+          </a:p>
+          <a:p>
+            <a:endParaRPr lang="fr-FR" dirty="0"/>
+          </a:p>
+        </p:txBody>
+      </p:sp>
+      <p:cxnSp>
+        <p:nvCxnSpPr>
+          <p:cNvPr id="11" name="Connecteur droit avec flèche 10">
+            <a:extLst>
+              <a:ext uri="{FF2B5EF4-FFF2-40B4-BE49-F238E27FC236}">
+                <a16:creationId xmlns:a16="http://schemas.microsoft.com/office/drawing/2014/main" id="{D076B123-21C4-A656-AB41-81BDAB1FFFAE}"/>
+              </a:ext>
+            </a:extLst>
+          </p:cNvPr>
+          <p:cNvCxnSpPr>
+            <a:cxnSpLocks/>
+            <a:stCxn id="12" idx="0"/>
+          </p:cNvCxnSpPr>
+          <p:nvPr/>
+        </p:nvCxnSpPr>
+        <p:spPr>
+          <a:xfrm flipH="1" flipV="1">
+            <a:off x="10450750" y="5283200"/>
+            <a:ext cx="426653" cy="719552"/>
+          </a:xfrm>
+          <a:prstGeom prst="straightConnector1">
+            <a:avLst/>
+          </a:prstGeom>
+          <a:ln w="19050">
+            <a:solidFill>
+              <a:srgbClr val="FF0000"/>
+            </a:solidFill>
+            <a:tailEnd type="triangle"/>
+          </a:ln>
+        </p:spPr>
+        <p:style>
+          <a:lnRef idx="1">
+            <a:schemeClr val="accent1"/>
+          </a:lnRef>
+          <a:fillRef idx="0">
+            <a:schemeClr val="accent1"/>
+          </a:fillRef>
+          <a:effectRef idx="0">
+            <a:schemeClr val="accent1"/>
+          </a:effectRef>
+          <a:fontRef idx="minor">
+            <a:schemeClr val="tx1"/>
+          </a:fontRef>
+        </p:style>
+      </p:cxnSp>
+      <p:sp>
+        <p:nvSpPr>
+          <p:cNvPr id="12" name="ZoneTexte 11">
+            <a:extLst>
+              <a:ext uri="{FF2B5EF4-FFF2-40B4-BE49-F238E27FC236}">
+                <a16:creationId xmlns:a16="http://schemas.microsoft.com/office/drawing/2014/main" id="{B299D3AA-A1B4-AF62-58CA-E00DCB85907D}"/>
+              </a:ext>
+            </a:extLst>
+          </p:cNvPr>
+          <p:cNvSpPr txBox="1"/>
+          <p:nvPr/>
+        </p:nvSpPr>
+        <p:spPr>
+          <a:xfrm>
+            <a:off x="9930638" y="6002752"/>
+            <a:ext cx="1893529" cy="738664"/>
           </a:xfrm>
           <a:prstGeom prst="rect">
             <a:avLst/>
           </a:prstGeom>
+          <a:solidFill>
+            <a:schemeClr val="bg1"/>
+          </a:solidFill>
+          <a:ln w="19050">
+            <a:solidFill>
+              <a:srgbClr val="FF0000"/>
+            </a:solidFill>
+          </a:ln>
         </p:spPr>
-      </p:pic>
+        <p:txBody>
+          <a:bodyPr wrap="square" rtlCol="0">
+            <a:spAutoFit/>
+          </a:bodyPr>
+          <a:lstStyle/>
+          <a:p>
+            <a:r>
+              <a:rPr lang="fr-FR" sz="1400" dirty="0"/>
+              <a:t>URL GitHub ou autre. Récupération fichier en local impossible</a:t>
+            </a:r>
+          </a:p>
+        </p:txBody>
+      </p:sp>
+      <p:sp>
+        <p:nvSpPr>
+          <p:cNvPr id="35" name="Heptagone 34">
+            <a:extLst>
+              <a:ext uri="{FF2B5EF4-FFF2-40B4-BE49-F238E27FC236}">
+                <a16:creationId xmlns:a16="http://schemas.microsoft.com/office/drawing/2014/main" id="{38A97BEA-D4F0-F5D0-1158-002A7D4ABB4C}"/>
+              </a:ext>
+            </a:extLst>
+          </p:cNvPr>
+          <p:cNvSpPr/>
+          <p:nvPr/>
+        </p:nvSpPr>
+        <p:spPr>
+          <a:xfrm>
+            <a:off x="2983873" y="2972824"/>
+            <a:ext cx="457199" cy="457292"/>
+          </a:xfrm>
+          <a:prstGeom prst="heptagon">
+            <a:avLst/>
+          </a:prstGeom>
+          <a:solidFill>
+            <a:srgbClr val="FF0000"/>
+          </a:solidFill>
+          <a:ln>
+            <a:noFill/>
+          </a:ln>
+        </p:spPr>
+        <p:style>
+          <a:lnRef idx="2">
+            <a:schemeClr val="accent1">
+              <a:shade val="15000"/>
+            </a:schemeClr>
+          </a:lnRef>
+          <a:fillRef idx="1">
+            <a:schemeClr val="accent1"/>
+          </a:fillRef>
+          <a:effectRef idx="0">
+            <a:schemeClr val="accent1"/>
+          </a:effectRef>
+          <a:fontRef idx="minor">
+            <a:schemeClr val="lt1"/>
+          </a:fontRef>
+        </p:style>
+        <p:txBody>
+          <a:bodyPr rtlCol="0" anchor="ctr"/>
+          <a:lstStyle/>
+          <a:p>
+            <a:pPr algn="ctr"/>
+            <a:r>
+              <a:rPr lang="fr-FR" dirty="0"/>
+              <a:t>5</a:t>
+            </a:r>
+          </a:p>
+        </p:txBody>
+      </p:sp>
+      <p:sp>
+        <p:nvSpPr>
+          <p:cNvPr id="15" name="Heptagone 14">
+            <a:extLst>
+              <a:ext uri="{FF2B5EF4-FFF2-40B4-BE49-F238E27FC236}">
+                <a16:creationId xmlns:a16="http://schemas.microsoft.com/office/drawing/2014/main" id="{5376BF6D-4CC8-D31B-C84B-2A7BBB128343}"/>
+              </a:ext>
+            </a:extLst>
+          </p:cNvPr>
+          <p:cNvSpPr/>
+          <p:nvPr/>
+        </p:nvSpPr>
+        <p:spPr>
+          <a:xfrm>
+            <a:off x="8110396" y="3200354"/>
+            <a:ext cx="457199" cy="457292"/>
+          </a:xfrm>
+          <a:prstGeom prst="heptagon">
+            <a:avLst/>
+          </a:prstGeom>
+          <a:solidFill>
+            <a:srgbClr val="FF0000"/>
+          </a:solidFill>
+          <a:ln>
+            <a:noFill/>
+          </a:ln>
+        </p:spPr>
+        <p:style>
+          <a:lnRef idx="2">
+            <a:schemeClr val="accent1">
+              <a:shade val="15000"/>
+            </a:schemeClr>
+          </a:lnRef>
+          <a:fillRef idx="1">
+            <a:schemeClr val="accent1"/>
+          </a:fillRef>
+          <a:effectRef idx="0">
+            <a:schemeClr val="accent1"/>
+          </a:effectRef>
+          <a:fontRef idx="minor">
+            <a:schemeClr val="lt1"/>
+          </a:fontRef>
+        </p:style>
+        <p:txBody>
+          <a:bodyPr rtlCol="0" anchor="ctr"/>
+          <a:lstStyle/>
+          <a:p>
+            <a:pPr algn="ctr"/>
+            <a:r>
+              <a:rPr lang="fr-FR" dirty="0"/>
+              <a:t>6</a:t>
+            </a:r>
+          </a:p>
+        </p:txBody>
+      </p:sp>
+      <p:cxnSp>
+        <p:nvCxnSpPr>
+          <p:cNvPr id="16" name="Connecteur droit avec flèche 15">
+            <a:extLst>
+              <a:ext uri="{FF2B5EF4-FFF2-40B4-BE49-F238E27FC236}">
+                <a16:creationId xmlns:a16="http://schemas.microsoft.com/office/drawing/2014/main" id="{3965F2B3-7DEA-1FC7-128A-C5FD0398B6EA}"/>
+              </a:ext>
+            </a:extLst>
+          </p:cNvPr>
+          <p:cNvCxnSpPr>
+            <a:cxnSpLocks/>
+            <a:stCxn id="20" idx="0"/>
+          </p:cNvCxnSpPr>
+          <p:nvPr/>
+        </p:nvCxnSpPr>
+        <p:spPr>
+          <a:xfrm flipV="1">
+            <a:off x="8808601" y="5283200"/>
+            <a:ext cx="695385" cy="340060"/>
+          </a:xfrm>
+          <a:prstGeom prst="straightConnector1">
+            <a:avLst/>
+          </a:prstGeom>
+          <a:ln w="19050">
+            <a:solidFill>
+              <a:srgbClr val="FF0000"/>
+            </a:solidFill>
+            <a:tailEnd type="triangle"/>
+          </a:ln>
+        </p:spPr>
+        <p:style>
+          <a:lnRef idx="1">
+            <a:schemeClr val="accent1"/>
+          </a:lnRef>
+          <a:fillRef idx="0">
+            <a:schemeClr val="accent1"/>
+          </a:fillRef>
+          <a:effectRef idx="0">
+            <a:schemeClr val="accent1"/>
+          </a:effectRef>
+          <a:fontRef idx="minor">
+            <a:schemeClr val="tx1"/>
+          </a:fontRef>
+        </p:style>
+      </p:cxnSp>
+      <p:sp>
+        <p:nvSpPr>
+          <p:cNvPr id="20" name="ZoneTexte 19">
+            <a:extLst>
+              <a:ext uri="{FF2B5EF4-FFF2-40B4-BE49-F238E27FC236}">
+                <a16:creationId xmlns:a16="http://schemas.microsoft.com/office/drawing/2014/main" id="{CA380CEC-C565-F558-CFA9-7D991655148E}"/>
+              </a:ext>
+            </a:extLst>
+          </p:cNvPr>
+          <p:cNvSpPr txBox="1"/>
+          <p:nvPr/>
+        </p:nvSpPr>
+        <p:spPr>
+          <a:xfrm>
+            <a:off x="8267756" y="5623260"/>
+            <a:ext cx="1081690" cy="307777"/>
+          </a:xfrm>
+          <a:prstGeom prst="rect">
+            <a:avLst/>
+          </a:prstGeom>
+          <a:solidFill>
+            <a:srgbClr val="FFFF00"/>
+          </a:solidFill>
+          <a:ln w="19050">
+            <a:solidFill>
+              <a:srgbClr val="FF0000"/>
+            </a:solidFill>
+          </a:ln>
+        </p:spPr>
+        <p:txBody>
+          <a:bodyPr wrap="square" rtlCol="0">
+            <a:spAutoFit/>
+          </a:bodyPr>
+          <a:lstStyle/>
+          <a:p>
+            <a:r>
+              <a:rPr lang="fr-FR" sz="1400" dirty="0">
+                <a:solidFill>
+                  <a:srgbClr val="FF0000"/>
+                </a:solidFill>
+              </a:rPr>
+              <a:t>URL RAW</a:t>
+            </a:r>
+          </a:p>
+        </p:txBody>
+      </p:sp>
+      <p:sp>
+        <p:nvSpPr>
+          <p:cNvPr id="24" name="ZoneTexte 23">
+            <a:extLst>
+              <a:ext uri="{FF2B5EF4-FFF2-40B4-BE49-F238E27FC236}">
+                <a16:creationId xmlns:a16="http://schemas.microsoft.com/office/drawing/2014/main" id="{305CFE7D-5AE1-26CF-31CF-37BA3930257D}"/>
+              </a:ext>
+            </a:extLst>
+          </p:cNvPr>
+          <p:cNvSpPr txBox="1"/>
+          <p:nvPr/>
+        </p:nvSpPr>
+        <p:spPr>
+          <a:xfrm>
+            <a:off x="664675" y="6218195"/>
+            <a:ext cx="1153965" cy="307777"/>
+          </a:xfrm>
+          <a:prstGeom prst="rect">
+            <a:avLst/>
+          </a:prstGeom>
+          <a:solidFill>
+            <a:schemeClr val="bg1"/>
+          </a:solidFill>
+          <a:ln w="19050">
+            <a:solidFill>
+              <a:srgbClr val="FF0000"/>
+            </a:solidFill>
+          </a:ln>
+        </p:spPr>
+        <p:txBody>
+          <a:bodyPr wrap="square" rtlCol="0">
+            <a:spAutoFit/>
+          </a:bodyPr>
+          <a:lstStyle/>
+          <a:p>
+            <a:r>
+              <a:rPr lang="fr-FR" sz="1400" dirty="0"/>
+              <a:t>Schéma </a:t>
+            </a:r>
+            <a:r>
+              <a:rPr lang="fr-FR" sz="1400" dirty="0" err="1"/>
+              <a:t>raw</a:t>
+            </a:r>
+            <a:endParaRPr lang="fr-FR" sz="1400" dirty="0"/>
+          </a:p>
+        </p:txBody>
+      </p:sp>
     </p:spTree>
     <p:extLst>
       <p:ext uri="{BB962C8B-B14F-4D97-AF65-F5344CB8AC3E}">
-        <p14:creationId xmlns:p14="http://schemas.microsoft.com/office/powerpoint/2010/main" val="2802061433"/>
+        <p14:creationId xmlns:p14="http://schemas.microsoft.com/office/powerpoint/2010/main" val="2312549476"/>
       </p:ext>
     </p:extLst>
   </p:cSld>

--- a/ulesie_sebastien_2_presentation_082026.pptx
+++ b/ulesie_sebastien_2_presentation_082026.pptx
@@ -5,10 +5,10 @@
     <p:sldMasterId id="2147483712" r:id="rId1"/>
   </p:sldMasterIdLst>
   <p:notesMasterIdLst>
-    <p:notesMasterId r:id="rId23"/>
+    <p:notesMasterId r:id="rId17"/>
   </p:notesMasterIdLst>
   <p:handoutMasterIdLst>
-    <p:handoutMasterId r:id="rId24"/>
+    <p:handoutMasterId r:id="rId18"/>
   </p:handoutMasterIdLst>
   <p:sldIdLst>
     <p:sldId id="257" r:id="rId2"/>
@@ -18,20 +18,14 @@
     <p:sldId id="344" r:id="rId6"/>
     <p:sldId id="345" r:id="rId7"/>
     <p:sldId id="346" r:id="rId8"/>
-    <p:sldId id="351" r:id="rId9"/>
-    <p:sldId id="352" r:id="rId10"/>
-    <p:sldId id="353" r:id="rId11"/>
-    <p:sldId id="354" r:id="rId12"/>
-    <p:sldId id="356" r:id="rId13"/>
-    <p:sldId id="347" r:id="rId14"/>
-    <p:sldId id="358" r:id="rId15"/>
-    <p:sldId id="357" r:id="rId16"/>
-    <p:sldId id="359" r:id="rId17"/>
-    <p:sldId id="360" r:id="rId18"/>
-    <p:sldId id="348" r:id="rId19"/>
-    <p:sldId id="349" r:id="rId20"/>
-    <p:sldId id="350" r:id="rId21"/>
-    <p:sldId id="299" r:id="rId22"/>
+    <p:sldId id="347" r:id="rId9"/>
+    <p:sldId id="348" r:id="rId10"/>
+    <p:sldId id="349" r:id="rId11"/>
+    <p:sldId id="350" r:id="rId12"/>
+    <p:sldId id="332" r:id="rId13"/>
+    <p:sldId id="338" r:id="rId14"/>
+    <p:sldId id="343" r:id="rId15"/>
+    <p:sldId id="299" r:id="rId16"/>
   </p:sldIdLst>
   <p:sldSz cx="12192000" cy="6858000"/>
   <p:notesSz cx="6858000" cy="9144000"/>
@@ -2050,7 +2044,7 @@
         <a:p>
           <a:r>
             <a:rPr lang="fr-FR" dirty="0"/>
-            <a:t>4- Schéma d’architecture</a:t>
+            <a:t>4- Les requêtes et leurs résultats</a:t>
           </a:r>
         </a:p>
       </dgm:t>
@@ -2086,7 +2080,7 @@
         <a:p>
           <a:r>
             <a:rPr lang="fr-FR" dirty="0"/>
-            <a:t>3- Processus collecter, transformer, stocker et tester les données</a:t>
+            <a:t>3- Compréhension des données</a:t>
           </a:r>
         </a:p>
       </dgm:t>
@@ -2122,7 +2116,7 @@
         <a:p>
           <a:r>
             <a:rPr lang="fr-FR" b="0" dirty="0"/>
-            <a:t>2- Schéma de la base de données</a:t>
+            <a:t>2- Importation des données</a:t>
           </a:r>
         </a:p>
       </dgm:t>
@@ -2158,11 +2152,11 @@
         <a:p>
           <a:r>
             <a:rPr lang="fr-FR" dirty="0"/>
-            <a:t>5- Mise en place </a:t>
+            <a:t>5- Connexion MongoDB à </a:t>
           </a:r>
           <a:r>
             <a:rPr lang="fr-FR" dirty="0" err="1"/>
-            <a:t>Airbyte</a:t>
+            <a:t>PowerBI</a:t>
           </a:r>
           <a:endParaRPr lang="fr-FR" dirty="0"/>
         </a:p>
@@ -2199,7 +2193,7 @@
         <a:p>
           <a:r>
             <a:rPr lang="fr-FR" dirty="0"/>
-            <a:t>6- Mise en place DBT</a:t>
+            <a:t>6- Intégration données de Lyon</a:t>
           </a:r>
         </a:p>
       </dgm:t>
@@ -2235,7 +2229,7 @@
         <a:p>
           <a:r>
             <a:rPr lang="fr-FR" dirty="0"/>
-            <a:t>7- Temps accessibilité aux données</a:t>
+            <a:t>7- Réplication des données</a:t>
           </a:r>
         </a:p>
       </dgm:t>
@@ -2270,9 +2264,10 @@
         <a:lstStyle/>
         <a:p>
           <a:r>
-            <a:rPr lang="fr-FR" dirty="0"/>
-            <a:t>8- Qualité des données</a:t>
+            <a:rPr lang="fr-FR"/>
+            <a:t>8- Duplication des données</a:t>
           </a:r>
+          <a:endParaRPr lang="fr-FR" dirty="0"/>
         </a:p>
       </dgm:t>
     </dgm:pt>
@@ -2298,28 +2293,6 @@
         </a:p>
       </dgm:t>
     </dgm:pt>
-    <dgm:pt modelId="{3CD23260-9728-4408-BFD6-CE02FEDB8461}">
-      <dgm:prSet phldrT="[Texte]" phldr="0"/>
-      <dgm:spPr/>
-      <dgm:t>
-        <a:bodyPr/>
-        <a:lstStyle/>
-        <a:p>
-          <a:r>
-            <a:rPr lang="fr-FR" dirty="0"/>
-            <a:t>9- Mise en place AWS</a:t>
-          </a:r>
-        </a:p>
-      </dgm:t>
-    </dgm:pt>
-    <dgm:pt modelId="{B46BBC53-87DA-461B-A8AE-AC308B5637EE}" type="parTrans" cxnId="{DCFE94A2-0395-4927-9F3F-AF2253C34E08}">
-      <dgm:prSet/>
-      <dgm:spPr/>
-    </dgm:pt>
-    <dgm:pt modelId="{6DD7A032-6B21-43D6-BF72-FE2756121EE7}" type="sibTrans" cxnId="{DCFE94A2-0395-4927-9F3F-AF2253C34E08}">
-      <dgm:prSet/>
-      <dgm:spPr/>
-    </dgm:pt>
     <dgm:pt modelId="{BB89F849-78B2-43DF-933A-2353D297DD5D}" type="pres">
       <dgm:prSet presAssocID="{2A0612ED-5876-4919-BCC8-600F5B229E71}" presName="linear" presStyleCnt="0">
         <dgm:presLayoutVars>
@@ -2330,7 +2303,7 @@
       <dgm:spPr/>
     </dgm:pt>
     <dgm:pt modelId="{BB92269C-473B-4581-93AF-AD006B94C36C}" type="pres">
-      <dgm:prSet presAssocID="{ACF00B4C-E6D7-4CF7-AFA6-22ECB4A54A6A}" presName="parentText" presStyleLbl="node1" presStyleIdx="0" presStyleCnt="9">
+      <dgm:prSet presAssocID="{ACF00B4C-E6D7-4CF7-AFA6-22ECB4A54A6A}" presName="parentText" presStyleLbl="node1" presStyleIdx="0" presStyleCnt="8">
         <dgm:presLayoutVars>
           <dgm:chMax val="0"/>
           <dgm:bulletEnabled val="1"/>
@@ -2343,7 +2316,7 @@
       <dgm:spPr/>
     </dgm:pt>
     <dgm:pt modelId="{90650EEF-1F9D-463E-A867-D4AB9F2E38B6}" type="pres">
-      <dgm:prSet presAssocID="{137669DF-45F8-40AE-925B-B1ADA604DE22}" presName="parentText" presStyleLbl="node1" presStyleIdx="1" presStyleCnt="9">
+      <dgm:prSet presAssocID="{137669DF-45F8-40AE-925B-B1ADA604DE22}" presName="parentText" presStyleLbl="node1" presStyleIdx="1" presStyleCnt="8">
         <dgm:presLayoutVars>
           <dgm:chMax val="0"/>
           <dgm:bulletEnabled val="1"/>
@@ -2356,7 +2329,7 @@
       <dgm:spPr/>
     </dgm:pt>
     <dgm:pt modelId="{C0F2F60F-49A7-486C-BA84-7742A146D8C7}" type="pres">
-      <dgm:prSet presAssocID="{91C5EE06-7918-4F4E-ABC8-78B22D3546A2}" presName="parentText" presStyleLbl="node1" presStyleIdx="2" presStyleCnt="9">
+      <dgm:prSet presAssocID="{91C5EE06-7918-4F4E-ABC8-78B22D3546A2}" presName="parentText" presStyleLbl="node1" presStyleIdx="2" presStyleCnt="8">
         <dgm:presLayoutVars>
           <dgm:chMax val="0"/>
           <dgm:bulletEnabled val="1"/>
@@ -2369,7 +2342,7 @@
       <dgm:spPr/>
     </dgm:pt>
     <dgm:pt modelId="{188E501D-B60D-4714-8E70-1CD5D6D0CD0B}" type="pres">
-      <dgm:prSet presAssocID="{09562225-7FCE-4E93-8C05-403975C5475D}" presName="parentText" presStyleLbl="node1" presStyleIdx="3" presStyleCnt="9">
+      <dgm:prSet presAssocID="{09562225-7FCE-4E93-8C05-403975C5475D}" presName="parentText" presStyleLbl="node1" presStyleIdx="3" presStyleCnt="8">
         <dgm:presLayoutVars>
           <dgm:chMax val="0"/>
           <dgm:bulletEnabled val="1"/>
@@ -2382,7 +2355,7 @@
       <dgm:spPr/>
     </dgm:pt>
     <dgm:pt modelId="{DF10A574-F3D9-4FC2-A6EE-E7E8311CF638}" type="pres">
-      <dgm:prSet presAssocID="{10F4FD06-E452-44ED-A921-58727BCB960A}" presName="parentText" presStyleLbl="node1" presStyleIdx="4" presStyleCnt="9">
+      <dgm:prSet presAssocID="{10F4FD06-E452-44ED-A921-58727BCB960A}" presName="parentText" presStyleLbl="node1" presStyleIdx="4" presStyleCnt="8">
         <dgm:presLayoutVars>
           <dgm:chMax val="0"/>
           <dgm:bulletEnabled val="1"/>
@@ -2395,7 +2368,7 @@
       <dgm:spPr/>
     </dgm:pt>
     <dgm:pt modelId="{9F5EF941-1609-4E21-A343-705F89535533}" type="pres">
-      <dgm:prSet presAssocID="{C5B30B90-4036-464E-A28E-383F3D5B746F}" presName="parentText" presStyleLbl="node1" presStyleIdx="5" presStyleCnt="9">
+      <dgm:prSet presAssocID="{C5B30B90-4036-464E-A28E-383F3D5B746F}" presName="parentText" presStyleLbl="node1" presStyleIdx="5" presStyleCnt="8">
         <dgm:presLayoutVars>
           <dgm:chMax val="0"/>
           <dgm:bulletEnabled val="1"/>
@@ -2408,7 +2381,7 @@
       <dgm:spPr/>
     </dgm:pt>
     <dgm:pt modelId="{F241338E-DAFB-437E-BAC6-556E992CF66B}" type="pres">
-      <dgm:prSet presAssocID="{7B991E51-EA9F-4EA3-999C-494E52148DFB}" presName="parentText" presStyleLbl="node1" presStyleIdx="6" presStyleCnt="9">
+      <dgm:prSet presAssocID="{7B991E51-EA9F-4EA3-999C-494E52148DFB}" presName="parentText" presStyleLbl="node1" presStyleIdx="6" presStyleCnt="8">
         <dgm:presLayoutVars>
           <dgm:chMax val="0"/>
           <dgm:bulletEnabled val="1"/>
@@ -2421,20 +2394,7 @@
       <dgm:spPr/>
     </dgm:pt>
     <dgm:pt modelId="{1FDD8F32-99D9-4BBE-AF0A-DA191E5D1B76}" type="pres">
-      <dgm:prSet presAssocID="{BB40B4F6-4EB6-4EBF-9E1B-B9D404846270}" presName="parentText" presStyleLbl="node1" presStyleIdx="7" presStyleCnt="9">
-        <dgm:presLayoutVars>
-          <dgm:chMax val="0"/>
-          <dgm:bulletEnabled val="1"/>
-        </dgm:presLayoutVars>
-      </dgm:prSet>
-      <dgm:spPr/>
-    </dgm:pt>
-    <dgm:pt modelId="{22C40D4C-2771-429E-B890-4635503557F1}" type="pres">
-      <dgm:prSet presAssocID="{FAB9DC6E-0691-4B3E-84B9-DFFF68013930}" presName="spacer" presStyleCnt="0"/>
-      <dgm:spPr/>
-    </dgm:pt>
-    <dgm:pt modelId="{B65EB578-92C6-4AE5-8CB8-023DE47A0834}" type="pres">
-      <dgm:prSet presAssocID="{3CD23260-9728-4408-BFD6-CE02FEDB8461}" presName="parentText" presStyleLbl="node1" presStyleIdx="8" presStyleCnt="9">
+      <dgm:prSet presAssocID="{BB40B4F6-4EB6-4EBF-9E1B-B9D404846270}" presName="parentText" presStyleLbl="node1" presStyleIdx="7" presStyleCnt="8">
         <dgm:presLayoutVars>
           <dgm:chMax val="0"/>
           <dgm:bulletEnabled val="1"/>
@@ -2452,9 +2412,7 @@
     <dgm:cxn modelId="{22157357-0815-4091-B96F-71DED9F79FC1}" type="presOf" srcId="{7B991E51-EA9F-4EA3-999C-494E52148DFB}" destId="{F241338E-DAFB-437E-BAC6-556E992CF66B}" srcOrd="0" destOrd="0" presId="urn:microsoft.com/office/officeart/2005/8/layout/vList2"/>
     <dgm:cxn modelId="{BB8CFB59-ECE7-4CBC-9556-8A3CF9727DDA}" type="presOf" srcId="{ACF00B4C-E6D7-4CF7-AFA6-22ECB4A54A6A}" destId="{BB92269C-473B-4581-93AF-AD006B94C36C}" srcOrd="0" destOrd="0" presId="urn:microsoft.com/office/officeart/2005/8/layout/vList2"/>
     <dgm:cxn modelId="{ACBF787A-C137-4F23-B827-1003E2B82B44}" srcId="{2A0612ED-5876-4919-BCC8-600F5B229E71}" destId="{7B991E51-EA9F-4EA3-999C-494E52148DFB}" srcOrd="6" destOrd="0" parTransId="{89EBD24B-A965-4033-A3A8-D26BBD8F9C55}" sibTransId="{51CD5044-32D5-4267-9452-9F02006ACD1D}"/>
-    <dgm:cxn modelId="{DB10A97E-ED05-4997-B914-A888129BEA2A}" type="presOf" srcId="{3CD23260-9728-4408-BFD6-CE02FEDB8461}" destId="{B65EB578-92C6-4AE5-8CB8-023DE47A0834}" srcOrd="0" destOrd="0" presId="urn:microsoft.com/office/officeart/2005/8/layout/vList2"/>
     <dgm:cxn modelId="{8A736A9F-65F0-4A55-9A3F-CCF416234F97}" srcId="{2A0612ED-5876-4919-BCC8-600F5B229E71}" destId="{BB40B4F6-4EB6-4EBF-9E1B-B9D404846270}" srcOrd="7" destOrd="0" parTransId="{907C754D-DDD4-4E71-AFE2-02BB244F0F38}" sibTransId="{FAB9DC6E-0691-4B3E-84B9-DFFF68013930}"/>
-    <dgm:cxn modelId="{DCFE94A2-0395-4927-9F3F-AF2253C34E08}" srcId="{2A0612ED-5876-4919-BCC8-600F5B229E71}" destId="{3CD23260-9728-4408-BFD6-CE02FEDB8461}" srcOrd="8" destOrd="0" parTransId="{B46BBC53-87DA-461B-A8AE-AC308B5637EE}" sibTransId="{6DD7A032-6B21-43D6-BF72-FE2756121EE7}"/>
     <dgm:cxn modelId="{9D92CEA4-472E-4B56-8712-594017CD6C24}" type="presOf" srcId="{10F4FD06-E452-44ED-A921-58727BCB960A}" destId="{DF10A574-F3D9-4FC2-A6EE-E7E8311CF638}" srcOrd="0" destOrd="0" presId="urn:microsoft.com/office/officeart/2005/8/layout/vList2"/>
     <dgm:cxn modelId="{1FA19BB3-7E11-45B8-93CE-4B2E16B76669}" type="presOf" srcId="{2A0612ED-5876-4919-BCC8-600F5B229E71}" destId="{BB89F849-78B2-43DF-933A-2353D297DD5D}" srcOrd="0" destOrd="0" presId="urn:microsoft.com/office/officeart/2005/8/layout/vList2"/>
     <dgm:cxn modelId="{60AB59C1-93C6-4A83-820B-AF25EED12C2A}" srcId="{2A0612ED-5876-4919-BCC8-600F5B229E71}" destId="{C5B30B90-4036-464E-A28E-383F3D5B746F}" srcOrd="5" destOrd="0" parTransId="{1F871E0C-41C6-460A-8D72-F79549FEE94E}" sibTransId="{B8E65884-E0EE-41D7-9E11-32E3A03763CD}"/>
@@ -2478,8 +2436,6 @@
     <dgm:cxn modelId="{83F96F77-1304-406F-B044-FDA6F253D8EA}" type="presParOf" srcId="{BB89F849-78B2-43DF-933A-2353D297DD5D}" destId="{F241338E-DAFB-437E-BAC6-556E992CF66B}" srcOrd="12" destOrd="0" presId="urn:microsoft.com/office/officeart/2005/8/layout/vList2"/>
     <dgm:cxn modelId="{89070E65-CB06-46BC-8828-A6A194CFD53B}" type="presParOf" srcId="{BB89F849-78B2-43DF-933A-2353D297DD5D}" destId="{99D02E02-2418-40A3-B359-C1BC5D14D341}" srcOrd="13" destOrd="0" presId="urn:microsoft.com/office/officeart/2005/8/layout/vList2"/>
     <dgm:cxn modelId="{0EA99179-2EB5-4B06-AD79-2011946C006C}" type="presParOf" srcId="{BB89F849-78B2-43DF-933A-2353D297DD5D}" destId="{1FDD8F32-99D9-4BBE-AF0A-DA191E5D1B76}" srcOrd="14" destOrd="0" presId="urn:microsoft.com/office/officeart/2005/8/layout/vList2"/>
-    <dgm:cxn modelId="{B71ADAED-8DAB-404E-877A-8A1551EA11C8}" type="presParOf" srcId="{BB89F849-78B2-43DF-933A-2353D297DD5D}" destId="{22C40D4C-2771-429E-B890-4635503557F1}" srcOrd="15" destOrd="0" presId="urn:microsoft.com/office/officeart/2005/8/layout/vList2"/>
-    <dgm:cxn modelId="{AB1E2936-FCDF-48A0-B231-6C06B89AF1E1}" type="presParOf" srcId="{BB89F849-78B2-43DF-933A-2353D297DD5D}" destId="{B65EB578-92C6-4AE5-8CB8-023DE47A0834}" srcOrd="16" destOrd="0" presId="urn:microsoft.com/office/officeart/2005/8/layout/vList2"/>
   </dgm:cxnLst>
   <dgm:bg/>
   <dgm:whole/>
@@ -2861,8 +2817,8 @@
       </dsp:nvSpPr>
       <dsp:spPr>
         <a:xfrm>
-          <a:off x="0" y="3676"/>
-          <a:ext cx="11348215" cy="479114"/>
+          <a:off x="0" y="70793"/>
+          <a:ext cx="11348215" cy="524745"/>
         </a:xfrm>
         <a:prstGeom prst="roundRect">
           <a:avLst/>
@@ -2903,12 +2859,12 @@
         </a:fontRef>
       </dsp:style>
       <dsp:txBody>
-        <a:bodyPr spcFirstLastPara="0" vert="horz" wrap="square" lIns="80010" tIns="80010" rIns="80010" bIns="80010" numCol="1" spcCol="1270" anchor="ctr" anchorCtr="0">
+        <a:bodyPr spcFirstLastPara="0" vert="horz" wrap="square" lIns="87630" tIns="87630" rIns="87630" bIns="87630" numCol="1" spcCol="1270" anchor="ctr" anchorCtr="0">
           <a:noAutofit/>
         </a:bodyPr>
         <a:lstStyle/>
         <a:p>
-          <a:pPr marL="0" lvl="0" indent="0" algn="l" defTabSz="933450">
+          <a:pPr marL="0" lvl="0" indent="0" algn="l" defTabSz="1022350">
             <a:lnSpc>
               <a:spcPct val="90000"/>
             </a:lnSpc>
@@ -2921,14 +2877,14 @@
             <a:buNone/>
           </a:pPr>
           <a:r>
-            <a:rPr lang="fr-FR" sz="2100" kern="1200" dirty="0"/>
+            <a:rPr lang="fr-FR" sz="2300" kern="1200" dirty="0"/>
             <a:t>1- Contexte &amp; Objectif</a:t>
           </a:r>
         </a:p>
       </dsp:txBody>
       <dsp:txXfrm>
-        <a:off x="23388" y="27064"/>
-        <a:ext cx="11301439" cy="432338"/>
+        <a:off x="25616" y="96409"/>
+        <a:ext cx="11296983" cy="473513"/>
       </dsp:txXfrm>
     </dsp:sp>
     <dsp:sp modelId="{90650EEF-1F9D-463E-A867-D4AB9F2E38B6}">
@@ -2938,8 +2894,8 @@
       </dsp:nvSpPr>
       <dsp:spPr>
         <a:xfrm>
-          <a:off x="0" y="543271"/>
-          <a:ext cx="11348215" cy="479114"/>
+          <a:off x="0" y="661778"/>
+          <a:ext cx="11348215" cy="524745"/>
         </a:xfrm>
         <a:prstGeom prst="roundRect">
           <a:avLst/>
@@ -2980,12 +2936,12 @@
         </a:fontRef>
       </dsp:style>
       <dsp:txBody>
-        <a:bodyPr spcFirstLastPara="0" vert="horz" wrap="square" lIns="80010" tIns="80010" rIns="80010" bIns="80010" numCol="1" spcCol="1270" anchor="ctr" anchorCtr="0">
+        <a:bodyPr spcFirstLastPara="0" vert="horz" wrap="square" lIns="87630" tIns="87630" rIns="87630" bIns="87630" numCol="1" spcCol="1270" anchor="ctr" anchorCtr="0">
           <a:noAutofit/>
         </a:bodyPr>
         <a:lstStyle/>
         <a:p>
-          <a:pPr marL="0" lvl="0" indent="0" algn="l" defTabSz="933450">
+          <a:pPr marL="0" lvl="0" indent="0" algn="l" defTabSz="1022350">
             <a:lnSpc>
               <a:spcPct val="90000"/>
             </a:lnSpc>
@@ -2998,14 +2954,14 @@
             <a:buNone/>
           </a:pPr>
           <a:r>
-            <a:rPr lang="fr-FR" sz="2100" b="0" kern="1200" dirty="0"/>
-            <a:t>2- Schéma de la base de données</a:t>
+            <a:rPr lang="fr-FR" sz="2300" b="0" kern="1200" dirty="0"/>
+            <a:t>2- Importation des données</a:t>
           </a:r>
         </a:p>
       </dsp:txBody>
       <dsp:txXfrm>
-        <a:off x="23388" y="566659"/>
-        <a:ext cx="11301439" cy="432338"/>
+        <a:off x="25616" y="687394"/>
+        <a:ext cx="11296983" cy="473513"/>
       </dsp:txXfrm>
     </dsp:sp>
     <dsp:sp modelId="{C0F2F60F-49A7-486C-BA84-7742A146D8C7}">
@@ -3015,8 +2971,8 @@
       </dsp:nvSpPr>
       <dsp:spPr>
         <a:xfrm>
-          <a:off x="0" y="1082866"/>
-          <a:ext cx="11348215" cy="479114"/>
+          <a:off x="0" y="1252764"/>
+          <a:ext cx="11348215" cy="524745"/>
         </a:xfrm>
         <a:prstGeom prst="roundRect">
           <a:avLst/>
@@ -3057,12 +3013,12 @@
         </a:fontRef>
       </dsp:style>
       <dsp:txBody>
-        <a:bodyPr spcFirstLastPara="0" vert="horz" wrap="square" lIns="80010" tIns="80010" rIns="80010" bIns="80010" numCol="1" spcCol="1270" anchor="ctr" anchorCtr="0">
+        <a:bodyPr spcFirstLastPara="0" vert="horz" wrap="square" lIns="87630" tIns="87630" rIns="87630" bIns="87630" numCol="1" spcCol="1270" anchor="ctr" anchorCtr="0">
           <a:noAutofit/>
         </a:bodyPr>
         <a:lstStyle/>
         <a:p>
-          <a:pPr marL="0" lvl="0" indent="0" algn="l" defTabSz="933450">
+          <a:pPr marL="0" lvl="0" indent="0" algn="l" defTabSz="1022350">
             <a:lnSpc>
               <a:spcPct val="90000"/>
             </a:lnSpc>
@@ -3075,14 +3031,14 @@
             <a:buNone/>
           </a:pPr>
           <a:r>
-            <a:rPr lang="fr-FR" sz="2100" kern="1200" dirty="0"/>
-            <a:t>3- Processus collecter, transformer, stocker et tester les données</a:t>
+            <a:rPr lang="fr-FR" sz="2300" kern="1200" dirty="0"/>
+            <a:t>3- Compréhension des données</a:t>
           </a:r>
         </a:p>
       </dsp:txBody>
       <dsp:txXfrm>
-        <a:off x="23388" y="1106254"/>
-        <a:ext cx="11301439" cy="432338"/>
+        <a:off x="25616" y="1278380"/>
+        <a:ext cx="11296983" cy="473513"/>
       </dsp:txXfrm>
     </dsp:sp>
     <dsp:sp modelId="{188E501D-B60D-4714-8E70-1CD5D6D0CD0B}">
@@ -3092,8 +3048,8 @@
       </dsp:nvSpPr>
       <dsp:spPr>
         <a:xfrm>
-          <a:off x="0" y="1622461"/>
-          <a:ext cx="11348215" cy="479114"/>
+          <a:off x="0" y="1843749"/>
+          <a:ext cx="11348215" cy="524745"/>
         </a:xfrm>
         <a:prstGeom prst="roundRect">
           <a:avLst/>
@@ -3134,12 +3090,12 @@
         </a:fontRef>
       </dsp:style>
       <dsp:txBody>
-        <a:bodyPr spcFirstLastPara="0" vert="horz" wrap="square" lIns="80010" tIns="80010" rIns="80010" bIns="80010" numCol="1" spcCol="1270" anchor="ctr" anchorCtr="0">
+        <a:bodyPr spcFirstLastPara="0" vert="horz" wrap="square" lIns="87630" tIns="87630" rIns="87630" bIns="87630" numCol="1" spcCol="1270" anchor="ctr" anchorCtr="0">
           <a:noAutofit/>
         </a:bodyPr>
         <a:lstStyle/>
         <a:p>
-          <a:pPr marL="0" lvl="0" indent="0" algn="l" defTabSz="933450">
+          <a:pPr marL="0" lvl="0" indent="0" algn="l" defTabSz="1022350">
             <a:lnSpc>
               <a:spcPct val="90000"/>
             </a:lnSpc>
@@ -3152,14 +3108,14 @@
             <a:buNone/>
           </a:pPr>
           <a:r>
-            <a:rPr lang="fr-FR" sz="2100" kern="1200" dirty="0"/>
-            <a:t>4- Schéma d’architecture</a:t>
+            <a:rPr lang="fr-FR" sz="2300" kern="1200" dirty="0"/>
+            <a:t>4- Les requêtes et leurs résultats</a:t>
           </a:r>
         </a:p>
       </dsp:txBody>
       <dsp:txXfrm>
-        <a:off x="23388" y="1645849"/>
-        <a:ext cx="11301439" cy="432338"/>
+        <a:off x="25616" y="1869365"/>
+        <a:ext cx="11296983" cy="473513"/>
       </dsp:txXfrm>
     </dsp:sp>
     <dsp:sp modelId="{DF10A574-F3D9-4FC2-A6EE-E7E8311CF638}">
@@ -3169,8 +3125,8 @@
       </dsp:nvSpPr>
       <dsp:spPr>
         <a:xfrm>
-          <a:off x="0" y="2162056"/>
-          <a:ext cx="11348215" cy="479114"/>
+          <a:off x="0" y="2434734"/>
+          <a:ext cx="11348215" cy="524745"/>
         </a:xfrm>
         <a:prstGeom prst="roundRect">
           <a:avLst/>
@@ -3211,12 +3167,12 @@
         </a:fontRef>
       </dsp:style>
       <dsp:txBody>
-        <a:bodyPr spcFirstLastPara="0" vert="horz" wrap="square" lIns="80010" tIns="80010" rIns="80010" bIns="80010" numCol="1" spcCol="1270" anchor="ctr" anchorCtr="0">
+        <a:bodyPr spcFirstLastPara="0" vert="horz" wrap="square" lIns="87630" tIns="87630" rIns="87630" bIns="87630" numCol="1" spcCol="1270" anchor="ctr" anchorCtr="0">
           <a:noAutofit/>
         </a:bodyPr>
         <a:lstStyle/>
         <a:p>
-          <a:pPr marL="0" lvl="0" indent="0" algn="l" defTabSz="933450">
+          <a:pPr marL="0" lvl="0" indent="0" algn="l" defTabSz="1022350">
             <a:lnSpc>
               <a:spcPct val="90000"/>
             </a:lnSpc>
@@ -3229,19 +3185,19 @@
             <a:buNone/>
           </a:pPr>
           <a:r>
-            <a:rPr lang="fr-FR" sz="2100" kern="1200" dirty="0"/>
-            <a:t>5- Mise en place </a:t>
+            <a:rPr lang="fr-FR" sz="2300" kern="1200" dirty="0"/>
+            <a:t>5- Connexion MongoDB à </a:t>
           </a:r>
           <a:r>
-            <a:rPr lang="fr-FR" sz="2100" kern="1200" dirty="0" err="1"/>
-            <a:t>Airbyte</a:t>
+            <a:rPr lang="fr-FR" sz="2300" kern="1200" dirty="0" err="1"/>
+            <a:t>PowerBI</a:t>
           </a:r>
-          <a:endParaRPr lang="fr-FR" sz="2100" kern="1200" dirty="0"/>
+          <a:endParaRPr lang="fr-FR" sz="2300" kern="1200" dirty="0"/>
         </a:p>
       </dsp:txBody>
       <dsp:txXfrm>
-        <a:off x="23388" y="2185444"/>
-        <a:ext cx="11301439" cy="432338"/>
+        <a:off x="25616" y="2460350"/>
+        <a:ext cx="11296983" cy="473513"/>
       </dsp:txXfrm>
     </dsp:sp>
     <dsp:sp modelId="{9F5EF941-1609-4E21-A343-705F89535533}">
@@ -3251,8 +3207,8 @@
       </dsp:nvSpPr>
       <dsp:spPr>
         <a:xfrm>
-          <a:off x="0" y="2701651"/>
-          <a:ext cx="11348215" cy="479114"/>
+          <a:off x="0" y="3025719"/>
+          <a:ext cx="11348215" cy="524745"/>
         </a:xfrm>
         <a:prstGeom prst="roundRect">
           <a:avLst/>
@@ -3293,12 +3249,12 @@
         </a:fontRef>
       </dsp:style>
       <dsp:txBody>
-        <a:bodyPr spcFirstLastPara="0" vert="horz" wrap="square" lIns="80010" tIns="80010" rIns="80010" bIns="80010" numCol="1" spcCol="1270" anchor="ctr" anchorCtr="0">
+        <a:bodyPr spcFirstLastPara="0" vert="horz" wrap="square" lIns="87630" tIns="87630" rIns="87630" bIns="87630" numCol="1" spcCol="1270" anchor="ctr" anchorCtr="0">
           <a:noAutofit/>
         </a:bodyPr>
         <a:lstStyle/>
         <a:p>
-          <a:pPr marL="0" lvl="0" indent="0" algn="l" defTabSz="933450">
+          <a:pPr marL="0" lvl="0" indent="0" algn="l" defTabSz="1022350">
             <a:lnSpc>
               <a:spcPct val="90000"/>
             </a:lnSpc>
@@ -3311,14 +3267,14 @@
             <a:buNone/>
           </a:pPr>
           <a:r>
-            <a:rPr lang="fr-FR" sz="2100" kern="1200" dirty="0"/>
-            <a:t>6- Mise en place DBT</a:t>
+            <a:rPr lang="fr-FR" sz="2300" kern="1200" dirty="0"/>
+            <a:t>6- Intégration données de Lyon</a:t>
           </a:r>
         </a:p>
       </dsp:txBody>
       <dsp:txXfrm>
-        <a:off x="23388" y="2725039"/>
-        <a:ext cx="11301439" cy="432338"/>
+        <a:off x="25616" y="3051335"/>
+        <a:ext cx="11296983" cy="473513"/>
       </dsp:txXfrm>
     </dsp:sp>
     <dsp:sp modelId="{F241338E-DAFB-437E-BAC6-556E992CF66B}">
@@ -3328,8 +3284,8 @@
       </dsp:nvSpPr>
       <dsp:spPr>
         <a:xfrm>
-          <a:off x="0" y="3241246"/>
-          <a:ext cx="11348215" cy="479114"/>
+          <a:off x="0" y="3616704"/>
+          <a:ext cx="11348215" cy="524745"/>
         </a:xfrm>
         <a:prstGeom prst="roundRect">
           <a:avLst/>
@@ -3370,12 +3326,12 @@
         </a:fontRef>
       </dsp:style>
       <dsp:txBody>
-        <a:bodyPr spcFirstLastPara="0" vert="horz" wrap="square" lIns="80010" tIns="80010" rIns="80010" bIns="80010" numCol="1" spcCol="1270" anchor="ctr" anchorCtr="0">
+        <a:bodyPr spcFirstLastPara="0" vert="horz" wrap="square" lIns="87630" tIns="87630" rIns="87630" bIns="87630" numCol="1" spcCol="1270" anchor="ctr" anchorCtr="0">
           <a:noAutofit/>
         </a:bodyPr>
         <a:lstStyle/>
         <a:p>
-          <a:pPr marL="0" lvl="0" indent="0" algn="l" defTabSz="933450">
+          <a:pPr marL="0" lvl="0" indent="0" algn="l" defTabSz="1022350">
             <a:lnSpc>
               <a:spcPct val="90000"/>
             </a:lnSpc>
@@ -3388,14 +3344,14 @@
             <a:buNone/>
           </a:pPr>
           <a:r>
-            <a:rPr lang="fr-FR" sz="2100" kern="1200" dirty="0"/>
-            <a:t>7- Temps accessibilité aux données</a:t>
+            <a:rPr lang="fr-FR" sz="2300" kern="1200" dirty="0"/>
+            <a:t>7- Réplication des données</a:t>
           </a:r>
         </a:p>
       </dsp:txBody>
       <dsp:txXfrm>
-        <a:off x="23388" y="3264634"/>
-        <a:ext cx="11301439" cy="432338"/>
+        <a:off x="25616" y="3642320"/>
+        <a:ext cx="11296983" cy="473513"/>
       </dsp:txXfrm>
     </dsp:sp>
     <dsp:sp modelId="{1FDD8F32-99D9-4BBE-AF0A-DA191E5D1B76}">
@@ -3405,8 +3361,8 @@
       </dsp:nvSpPr>
       <dsp:spPr>
         <a:xfrm>
-          <a:off x="0" y="3780841"/>
-          <a:ext cx="11348215" cy="479114"/>
+          <a:off x="0" y="4207689"/>
+          <a:ext cx="11348215" cy="524745"/>
         </a:xfrm>
         <a:prstGeom prst="roundRect">
           <a:avLst/>
@@ -3447,12 +3403,12 @@
         </a:fontRef>
       </dsp:style>
       <dsp:txBody>
-        <a:bodyPr spcFirstLastPara="0" vert="horz" wrap="square" lIns="80010" tIns="80010" rIns="80010" bIns="80010" numCol="1" spcCol="1270" anchor="ctr" anchorCtr="0">
+        <a:bodyPr spcFirstLastPara="0" vert="horz" wrap="square" lIns="87630" tIns="87630" rIns="87630" bIns="87630" numCol="1" spcCol="1270" anchor="ctr" anchorCtr="0">
           <a:noAutofit/>
         </a:bodyPr>
         <a:lstStyle/>
         <a:p>
-          <a:pPr marL="0" lvl="0" indent="0" algn="l" defTabSz="933450">
+          <a:pPr marL="0" lvl="0" indent="0" algn="l" defTabSz="1022350">
             <a:lnSpc>
               <a:spcPct val="90000"/>
             </a:lnSpc>
@@ -3465,91 +3421,15 @@
             <a:buNone/>
           </a:pPr>
           <a:r>
-            <a:rPr lang="fr-FR" sz="2100" kern="1200" dirty="0"/>
-            <a:t>8- Qualité des données</a:t>
+            <a:rPr lang="fr-FR" sz="2300" kern="1200"/>
+            <a:t>8- Duplication des données</a:t>
           </a:r>
+          <a:endParaRPr lang="fr-FR" sz="2300" kern="1200" dirty="0"/>
         </a:p>
       </dsp:txBody>
       <dsp:txXfrm>
-        <a:off x="23388" y="3804229"/>
-        <a:ext cx="11301439" cy="432338"/>
-      </dsp:txXfrm>
-    </dsp:sp>
-    <dsp:sp modelId="{B65EB578-92C6-4AE5-8CB8-023DE47A0834}">
-      <dsp:nvSpPr>
-        <dsp:cNvPr id="0" name=""/>
-        <dsp:cNvSpPr/>
-      </dsp:nvSpPr>
-      <dsp:spPr>
-        <a:xfrm>
-          <a:off x="0" y="4320436"/>
-          <a:ext cx="11348215" cy="479114"/>
-        </a:xfrm>
-        <a:prstGeom prst="roundRect">
-          <a:avLst/>
-        </a:prstGeom>
-        <a:solidFill>
-          <a:schemeClr val="accent5">
-            <a:hueOff val="0"/>
-            <a:satOff val="0"/>
-            <a:lumOff val="0"/>
-            <a:alphaOff val="0"/>
-          </a:schemeClr>
-        </a:solidFill>
-        <a:ln w="22225" cap="rnd" cmpd="sng" algn="ctr">
-          <a:solidFill>
-            <a:schemeClr val="lt1">
-              <a:hueOff val="0"/>
-              <a:satOff val="0"/>
-              <a:lumOff val="0"/>
-              <a:alphaOff val="0"/>
-            </a:schemeClr>
-          </a:solidFill>
-          <a:prstDash val="solid"/>
-        </a:ln>
-        <a:effectLst/>
-      </dsp:spPr>
-      <dsp:style>
-        <a:lnRef idx="2">
-          <a:scrgbClr r="0" g="0" b="0"/>
-        </a:lnRef>
-        <a:fillRef idx="1">
-          <a:scrgbClr r="0" g="0" b="0"/>
-        </a:fillRef>
-        <a:effectRef idx="0">
-          <a:scrgbClr r="0" g="0" b="0"/>
-        </a:effectRef>
-        <a:fontRef idx="minor">
-          <a:schemeClr val="lt1"/>
-        </a:fontRef>
-      </dsp:style>
-      <dsp:txBody>
-        <a:bodyPr spcFirstLastPara="0" vert="horz" wrap="square" lIns="80010" tIns="80010" rIns="80010" bIns="80010" numCol="1" spcCol="1270" anchor="ctr" anchorCtr="0">
-          <a:noAutofit/>
-        </a:bodyPr>
-        <a:lstStyle/>
-        <a:p>
-          <a:pPr marL="0" lvl="0" indent="0" algn="l" defTabSz="933450">
-            <a:lnSpc>
-              <a:spcPct val="90000"/>
-            </a:lnSpc>
-            <a:spcBef>
-              <a:spcPct val="0"/>
-            </a:spcBef>
-            <a:spcAft>
-              <a:spcPct val="35000"/>
-            </a:spcAft>
-            <a:buNone/>
-          </a:pPr>
-          <a:r>
-            <a:rPr lang="fr-FR" sz="2100" kern="1200" dirty="0"/>
-            <a:t>9- Mise en place AWS</a:t>
-          </a:r>
-        </a:p>
-      </dsp:txBody>
-      <dsp:txXfrm>
-        <a:off x="23388" y="4343824"/>
-        <a:ext cx="11301439" cy="432338"/>
+        <a:off x="25616" y="4233305"/>
+        <a:ext cx="11296983" cy="473513"/>
       </dsp:txXfrm>
     </dsp:sp>
   </dsp:spTree>
@@ -6768,7 +6648,7 @@
             <a:pPr rtl="0"/>
             <a:fld id="{2FC74BDE-6627-49B6-90F1-0334E723F64C}" type="datetime1">
               <a:rPr lang="fr-FR" smtClean="0"/>
-              <a:t>18/08/2026</a:t>
+              <a:t>16/08/2026</a:t>
             </a:fld>
             <a:endParaRPr lang="en-US" dirty="0"/>
           </a:p>
@@ -6938,7 +6818,7 @@
             <a:pPr rtl="0"/>
             <a:fld id="{F28DAF60-E56A-4648-8936-22D801672B6C}" type="datetime1">
               <a:rPr lang="fr-FR" smtClean="0"/>
-              <a:t>18/08/2026</a:t>
+              <a:t>16/08/2026</a:t>
             </a:fld>
             <a:endParaRPr lang="en-US"/>
           </a:p>
@@ -7459,7 +7339,7 @@
             <a:pPr rtl="0"/>
             <a:fld id="{E641DF6C-ECED-4BD8-8025-73323DD5D35C}" type="datetime1">
               <a:rPr lang="fr-FR" smtClean="0"/>
-              <a:t>18/08/2026</a:t>
+              <a:t>16/08/2026</a:t>
             </a:fld>
             <a:endParaRPr lang="en-US" dirty="0"/>
           </a:p>
@@ -7666,7 +7546,7 @@
             <a:pPr rtl="0"/>
             <a:fld id="{1E5B03D9-FC89-4784-BD60-336471BA7724}" type="datetime1">
               <a:rPr lang="fr-FR" smtClean="0"/>
-              <a:t>18/08/2026</a:t>
+              <a:t>16/08/2026</a:t>
             </a:fld>
             <a:endParaRPr lang="en-US" dirty="0"/>
           </a:p>
@@ -8060,7 +7940,7 @@
             <a:pPr rtl="0"/>
             <a:fld id="{D0216CB3-B929-446C-876F-83C9B86D9FDE}" type="datetime1">
               <a:rPr lang="fr-FR" smtClean="0"/>
-              <a:t>18/08/2026</a:t>
+              <a:t>16/08/2026</a:t>
             </a:fld>
             <a:endParaRPr lang="en-US" dirty="0"/>
           </a:p>
@@ -8262,7 +8142,7 @@
             <a:pPr rtl="0"/>
             <a:fld id="{22897033-9A55-4DAC-991D-1FF1921C78B7}" type="datetime1">
               <a:rPr lang="fr-FR" smtClean="0"/>
-              <a:t>18/08/2026</a:t>
+              <a:t>16/08/2026</a:t>
             </a:fld>
             <a:endParaRPr lang="en-US" dirty="0"/>
           </a:p>
@@ -8585,7 +8465,7 @@
             <a:pPr rtl="0"/>
             <a:fld id="{A1255F31-5DB3-4925-BA87-822F5B17A2F1}" type="datetime1">
               <a:rPr lang="fr-FR" smtClean="0"/>
-              <a:t>18/08/2026</a:t>
+              <a:t>16/08/2026</a:t>
             </a:fld>
             <a:endParaRPr lang="en-US" dirty="0"/>
           </a:p>
@@ -8842,7 +8722,7 @@
             <a:pPr rtl="0"/>
             <a:fld id="{7E4EF44C-5F50-4A80-A957-57B3338337C0}" type="datetime1">
               <a:rPr lang="fr-FR" smtClean="0"/>
-              <a:t>18/08/2026</a:t>
+              <a:t>16/08/2026</a:t>
             </a:fld>
             <a:endParaRPr lang="en-US" dirty="0"/>
           </a:p>
@@ -9268,7 +9148,7 @@
             <a:pPr rtl="0"/>
             <a:fld id="{B2D0F46D-59FD-4484-924E-E79DD516B5ED}" type="datetime1">
               <a:rPr lang="fr-FR" smtClean="0"/>
-              <a:t>18/08/2026</a:t>
+              <a:t>16/08/2026</a:t>
             </a:fld>
             <a:endParaRPr lang="en-US" dirty="0"/>
           </a:p>
@@ -9395,7 +9275,7 @@
             <a:pPr rtl="0"/>
             <a:fld id="{0FAEC910-4AAA-42A1-A49C-7DDC64BC53C6}" type="datetime1">
               <a:rPr lang="fr-FR" smtClean="0"/>
-              <a:t>18/08/2026</a:t>
+              <a:t>16/08/2026</a:t>
             </a:fld>
             <a:endParaRPr lang="en-US" dirty="0"/>
           </a:p>
@@ -9493,7 +9373,7 @@
             <a:pPr rtl="0"/>
             <a:fld id="{ACEC98BE-FCE2-445F-8146-3A7F8CC3881D}" type="datetime1">
               <a:rPr lang="fr-FR" smtClean="0"/>
-              <a:t>18/08/2026</a:t>
+              <a:t>16/08/2026</a:t>
             </a:fld>
             <a:endParaRPr lang="en-US" dirty="0"/>
           </a:p>
@@ -9881,7 +9761,7 @@
             <a:pPr rtl="0"/>
             <a:fld id="{6D0953DD-A6BD-427D-B7A8-BDE378B2E678}" type="datetime1">
               <a:rPr lang="fr-FR" smtClean="0"/>
-              <a:t>18/08/2026</a:t>
+              <a:t>16/08/2026</a:t>
             </a:fld>
             <a:endParaRPr lang="en-US" dirty="0"/>
           </a:p>
@@ -10179,7 +10059,7 @@
             <a:pPr rtl="0"/>
             <a:fld id="{47E77B56-6788-4F40-A65E-12AFEB3AC095}" type="datetime1">
               <a:rPr lang="fr-FR" smtClean="0"/>
-              <a:t>18/08/2026</a:t>
+              <a:t>16/08/2026</a:t>
             </a:fld>
             <a:endParaRPr lang="en-US" dirty="0"/>
           </a:p>
@@ -10397,7 +10277,7 @@
             <a:pPr rtl="0"/>
             <a:fld id="{E69A0D1A-B1A6-4A33-B3AE-513EF3B4A7E7}" type="datetime1">
               <a:rPr lang="fr-FR" smtClean="0"/>
-              <a:t>18/08/2026</a:t>
+              <a:t>16/08/2026</a:t>
             </a:fld>
             <a:endParaRPr lang="en-US" dirty="0"/>
           </a:p>
@@ -11713,4407 +11593,6 @@
   <p:cSld>
     <p:spTree>
       <p:nvGrpSpPr>
-        <p:cNvPr id="1" name="">
-          <a:extLst>
-            <a:ext uri="{FF2B5EF4-FFF2-40B4-BE49-F238E27FC236}">
-              <a16:creationId xmlns:a16="http://schemas.microsoft.com/office/drawing/2014/main" id="{BF7B439B-64D2-DB8B-220F-110E9A93F7FB}"/>
-            </a:ext>
-          </a:extLst>
-        </p:cNvPr>
-        <p:cNvGrpSpPr/>
-        <p:nvPr/>
-      </p:nvGrpSpPr>
-      <p:grpSpPr>
-        <a:xfrm>
-          <a:off x="0" y="0"/>
-          <a:ext cx="0" cy="0"/>
-          <a:chOff x="0" y="0"/>
-          <a:chExt cx="0" cy="0"/>
-        </a:xfrm>
-      </p:grpSpPr>
-      <p:pic>
-        <p:nvPicPr>
-          <p:cNvPr id="6" name="Image 5">
-            <a:extLst>
-              <a:ext uri="{FF2B5EF4-FFF2-40B4-BE49-F238E27FC236}">
-                <a16:creationId xmlns:a16="http://schemas.microsoft.com/office/drawing/2014/main" id="{3CF9C67D-1777-B642-2EE9-F7133771DABC}"/>
-              </a:ext>
-            </a:extLst>
-          </p:cNvPr>
-          <p:cNvPicPr>
-            <a:picLocks noChangeAspect="1"/>
-          </p:cNvPicPr>
-          <p:nvPr/>
-        </p:nvPicPr>
-        <p:blipFill>
-          <a:blip r:embed="rId2"/>
-          <a:stretch>
-            <a:fillRect/>
-          </a:stretch>
-        </p:blipFill>
-        <p:spPr>
-          <a:xfrm>
-            <a:off x="91440" y="1992342"/>
-            <a:ext cx="7181060" cy="2579658"/>
-          </a:xfrm>
-          <a:prstGeom prst="rect">
-            <a:avLst/>
-          </a:prstGeom>
-        </p:spPr>
-      </p:pic>
-      <p:sp>
-        <p:nvSpPr>
-          <p:cNvPr id="2" name="Titre 1">
-            <a:extLst>
-              <a:ext uri="{FF2B5EF4-FFF2-40B4-BE49-F238E27FC236}">
-                <a16:creationId xmlns:a16="http://schemas.microsoft.com/office/drawing/2014/main" id="{B5D0A2DE-1E6F-AF44-B700-8084C94AF9AC}"/>
-              </a:ext>
-            </a:extLst>
-          </p:cNvPr>
-          <p:cNvSpPr>
-            <a:spLocks noGrp="1"/>
-          </p:cNvSpPr>
-          <p:nvPr>
-            <p:ph type="title"/>
-          </p:nvPr>
-        </p:nvSpPr>
-        <p:spPr/>
-        <p:txBody>
-          <a:bodyPr/>
-          <a:lstStyle/>
-          <a:p>
-            <a:r>
-              <a:rPr lang="fr-FR" dirty="0"/>
-              <a:t>5. Mise en place </a:t>
-            </a:r>
-            <a:r>
-              <a:rPr lang="fr-FR" dirty="0" err="1"/>
-              <a:t>Airbyte</a:t>
-            </a:r>
-            <a:br>
-              <a:rPr lang="fr-FR" dirty="0"/>
-            </a:br>
-            <a:endParaRPr lang="fr-FR" dirty="0"/>
-          </a:p>
-        </p:txBody>
-      </p:sp>
-      <p:sp>
-        <p:nvSpPr>
-          <p:cNvPr id="4" name="Espace réservé de la date 3">
-            <a:extLst>
-              <a:ext uri="{FF2B5EF4-FFF2-40B4-BE49-F238E27FC236}">
-                <a16:creationId xmlns:a16="http://schemas.microsoft.com/office/drawing/2014/main" id="{CC7178DA-011E-3E29-FA78-2A9D56AAF227}"/>
-              </a:ext>
-            </a:extLst>
-          </p:cNvPr>
-          <p:cNvSpPr>
-            <a:spLocks noGrp="1"/>
-          </p:cNvSpPr>
-          <p:nvPr>
-            <p:ph type="dt" sz="half" idx="10"/>
-          </p:nvPr>
-        </p:nvSpPr>
-        <p:spPr/>
-        <p:txBody>
-          <a:bodyPr/>
-          <a:lstStyle/>
-          <a:p>
-            <a:pPr rtl="0"/>
-            <a:fld id="{22897033-9A55-4DAC-991D-1FF1921C78B7}" type="datetime1">
-              <a:rPr lang="fr-FR" smtClean="0"/>
-              <a:t>18/08/2026</a:t>
-            </a:fld>
-            <a:endParaRPr lang="en-US" dirty="0"/>
-          </a:p>
-        </p:txBody>
-      </p:sp>
-      <p:sp>
-        <p:nvSpPr>
-          <p:cNvPr id="5" name="Espace réservé du contenu 2">
-            <a:extLst>
-              <a:ext uri="{FF2B5EF4-FFF2-40B4-BE49-F238E27FC236}">
-                <a16:creationId xmlns:a16="http://schemas.microsoft.com/office/drawing/2014/main" id="{6C882531-7525-619D-ECE2-E89E4D2280F8}"/>
-              </a:ext>
-            </a:extLst>
-          </p:cNvPr>
-          <p:cNvSpPr>
-            <a:spLocks noGrp="1"/>
-          </p:cNvSpPr>
-          <p:nvPr>
-            <p:ph idx="1"/>
-          </p:nvPr>
-        </p:nvSpPr>
-        <p:spPr>
-          <a:xfrm>
-            <a:off x="581192" y="2020366"/>
-            <a:ext cx="11029615" cy="3634486"/>
-          </a:xfrm>
-        </p:spPr>
-        <p:txBody>
-          <a:bodyPr/>
-          <a:lstStyle/>
-          <a:p>
-            <a:endParaRPr lang="fr-FR" dirty="0"/>
-          </a:p>
-          <a:p>
-            <a:endParaRPr lang="fr-FR" dirty="0"/>
-          </a:p>
-          <a:p>
-            <a:endParaRPr lang="fr-FR" dirty="0"/>
-          </a:p>
-          <a:p>
-            <a:endParaRPr lang="fr-FR" dirty="0"/>
-          </a:p>
-          <a:p>
-            <a:endParaRPr lang="fr-FR" dirty="0"/>
-          </a:p>
-        </p:txBody>
-      </p:sp>
-      <p:sp>
-        <p:nvSpPr>
-          <p:cNvPr id="35" name="Heptagone 34">
-            <a:extLst>
-              <a:ext uri="{FF2B5EF4-FFF2-40B4-BE49-F238E27FC236}">
-                <a16:creationId xmlns:a16="http://schemas.microsoft.com/office/drawing/2014/main" id="{0BD9BD7E-FFDB-59C2-DE6C-5344FD8CF3A8}"/>
-              </a:ext>
-            </a:extLst>
-          </p:cNvPr>
-          <p:cNvSpPr/>
-          <p:nvPr/>
-        </p:nvSpPr>
-        <p:spPr>
-          <a:xfrm>
-            <a:off x="4131929" y="2624610"/>
-            <a:ext cx="457199" cy="457292"/>
-          </a:xfrm>
-          <a:prstGeom prst="heptagon">
-            <a:avLst/>
-          </a:prstGeom>
-          <a:solidFill>
-            <a:srgbClr val="FF0000"/>
-          </a:solidFill>
-          <a:ln>
-            <a:noFill/>
-          </a:ln>
-        </p:spPr>
-        <p:style>
-          <a:lnRef idx="2">
-            <a:schemeClr val="accent1">
-              <a:shade val="15000"/>
-            </a:schemeClr>
-          </a:lnRef>
-          <a:fillRef idx="1">
-            <a:schemeClr val="accent1"/>
-          </a:fillRef>
-          <a:effectRef idx="0">
-            <a:schemeClr val="accent1"/>
-          </a:effectRef>
-          <a:fontRef idx="minor">
-            <a:schemeClr val="lt1"/>
-          </a:fontRef>
-        </p:style>
-        <p:txBody>
-          <a:bodyPr rtlCol="0" anchor="ctr"/>
-          <a:lstStyle/>
-          <a:p>
-            <a:pPr algn="ctr"/>
-            <a:r>
-              <a:rPr lang="fr-FR" dirty="0"/>
-              <a:t>7</a:t>
-            </a:r>
-          </a:p>
-        </p:txBody>
-      </p:sp>
-      <p:pic>
-        <p:nvPicPr>
-          <p:cNvPr id="9" name="Image 8">
-            <a:extLst>
-              <a:ext uri="{FF2B5EF4-FFF2-40B4-BE49-F238E27FC236}">
-                <a16:creationId xmlns:a16="http://schemas.microsoft.com/office/drawing/2014/main" id="{8CF702EA-8774-7E92-0936-1AF4E93025C5}"/>
-              </a:ext>
-            </a:extLst>
-          </p:cNvPr>
-          <p:cNvPicPr>
-            <a:picLocks noChangeAspect="1"/>
-          </p:cNvPicPr>
-          <p:nvPr/>
-        </p:nvPicPr>
-        <p:blipFill>
-          <a:blip r:embed="rId3"/>
-          <a:stretch>
-            <a:fillRect/>
-          </a:stretch>
-        </p:blipFill>
-        <p:spPr>
-          <a:xfrm>
-            <a:off x="128889" y="4289320"/>
-            <a:ext cx="8006080" cy="1987759"/>
-          </a:xfrm>
-          <a:prstGeom prst="rect">
-            <a:avLst/>
-          </a:prstGeom>
-        </p:spPr>
-      </p:pic>
-      <p:sp>
-        <p:nvSpPr>
-          <p:cNvPr id="15" name="Heptagone 14">
-            <a:extLst>
-              <a:ext uri="{FF2B5EF4-FFF2-40B4-BE49-F238E27FC236}">
-                <a16:creationId xmlns:a16="http://schemas.microsoft.com/office/drawing/2014/main" id="{4DFD3E5E-711A-6D5B-BF14-94A651F875C4}"/>
-              </a:ext>
-            </a:extLst>
-          </p:cNvPr>
-          <p:cNvSpPr/>
-          <p:nvPr/>
-        </p:nvSpPr>
-        <p:spPr>
-          <a:xfrm>
-            <a:off x="2889019" y="4673466"/>
-            <a:ext cx="457199" cy="457292"/>
-          </a:xfrm>
-          <a:prstGeom prst="heptagon">
-            <a:avLst/>
-          </a:prstGeom>
-          <a:solidFill>
-            <a:srgbClr val="FF0000"/>
-          </a:solidFill>
-          <a:ln>
-            <a:noFill/>
-          </a:ln>
-        </p:spPr>
-        <p:style>
-          <a:lnRef idx="2">
-            <a:schemeClr val="accent1">
-              <a:shade val="15000"/>
-            </a:schemeClr>
-          </a:lnRef>
-          <a:fillRef idx="1">
-            <a:schemeClr val="accent1"/>
-          </a:fillRef>
-          <a:effectRef idx="0">
-            <a:schemeClr val="accent1"/>
-          </a:effectRef>
-          <a:fontRef idx="minor">
-            <a:schemeClr val="lt1"/>
-          </a:fontRef>
-        </p:style>
-        <p:txBody>
-          <a:bodyPr rtlCol="0" anchor="ctr"/>
-          <a:lstStyle/>
-          <a:p>
-            <a:pPr algn="ctr"/>
-            <a:r>
-              <a:rPr lang="fr-FR" dirty="0"/>
-              <a:t>8</a:t>
-            </a:r>
-          </a:p>
-        </p:txBody>
-      </p:sp>
-      <p:sp>
-        <p:nvSpPr>
-          <p:cNvPr id="12" name="ZoneTexte 11">
-            <a:extLst>
-              <a:ext uri="{FF2B5EF4-FFF2-40B4-BE49-F238E27FC236}">
-                <a16:creationId xmlns:a16="http://schemas.microsoft.com/office/drawing/2014/main" id="{8DC2F3DA-F3F1-B0E4-DD0F-80C3DCBB4C1F}"/>
-              </a:ext>
-            </a:extLst>
-          </p:cNvPr>
-          <p:cNvSpPr txBox="1"/>
-          <p:nvPr/>
-        </p:nvSpPr>
-        <p:spPr>
-          <a:xfrm>
-            <a:off x="5378971" y="2441441"/>
-            <a:ext cx="1893529" cy="738664"/>
-          </a:xfrm>
-          <a:prstGeom prst="rect">
-            <a:avLst/>
-          </a:prstGeom>
-          <a:solidFill>
-            <a:schemeClr val="bg1"/>
-          </a:solidFill>
-          <a:ln w="19050">
-            <a:solidFill>
-              <a:srgbClr val="FF0000"/>
-            </a:solidFill>
-          </a:ln>
-        </p:spPr>
-        <p:txBody>
-          <a:bodyPr wrap="square" rtlCol="0">
-            <a:spAutoFit/>
-          </a:bodyPr>
-          <a:lstStyle/>
-          <a:p>
-            <a:r>
-              <a:rPr lang="fr-FR" sz="1400" dirty="0"/>
-              <a:t>Sélectionner la destination </a:t>
-            </a:r>
-            <a:r>
-              <a:rPr lang="fr-FR" sz="1400" dirty="0" err="1"/>
-              <a:t>PosgreSQL</a:t>
-            </a:r>
-            <a:r>
-              <a:rPr lang="fr-FR" sz="1400" dirty="0"/>
-              <a:t> créée</a:t>
-            </a:r>
-          </a:p>
-        </p:txBody>
-      </p:sp>
-      <p:cxnSp>
-        <p:nvCxnSpPr>
-          <p:cNvPr id="11" name="Connecteur droit avec flèche 10">
-            <a:extLst>
-              <a:ext uri="{FF2B5EF4-FFF2-40B4-BE49-F238E27FC236}">
-                <a16:creationId xmlns:a16="http://schemas.microsoft.com/office/drawing/2014/main" id="{6DF1BF22-1784-BF21-BC2C-BFFF019096C0}"/>
-              </a:ext>
-            </a:extLst>
-          </p:cNvPr>
-          <p:cNvCxnSpPr>
-            <a:cxnSpLocks/>
-            <a:stCxn id="12" idx="2"/>
-          </p:cNvCxnSpPr>
-          <p:nvPr/>
-        </p:nvCxnSpPr>
-        <p:spPr>
-          <a:xfrm flipH="1">
-            <a:off x="4866640" y="3180105"/>
-            <a:ext cx="1459096" cy="713520"/>
-          </a:xfrm>
-          <a:prstGeom prst="straightConnector1">
-            <a:avLst/>
-          </a:prstGeom>
-          <a:ln w="19050">
-            <a:solidFill>
-              <a:srgbClr val="FF0000"/>
-            </a:solidFill>
-            <a:tailEnd type="triangle"/>
-          </a:ln>
-        </p:spPr>
-        <p:style>
-          <a:lnRef idx="1">
-            <a:schemeClr val="accent1"/>
-          </a:lnRef>
-          <a:fillRef idx="0">
-            <a:schemeClr val="accent1"/>
-          </a:fillRef>
-          <a:effectRef idx="0">
-            <a:schemeClr val="accent1"/>
-          </a:effectRef>
-          <a:fontRef idx="minor">
-            <a:schemeClr val="tx1"/>
-          </a:fontRef>
-        </p:style>
-      </p:cxnSp>
-      <p:pic>
-        <p:nvPicPr>
-          <p:cNvPr id="18" name="Image 17">
-            <a:extLst>
-              <a:ext uri="{FF2B5EF4-FFF2-40B4-BE49-F238E27FC236}">
-                <a16:creationId xmlns:a16="http://schemas.microsoft.com/office/drawing/2014/main" id="{9DE99DE8-9B5D-7186-3C4C-8D0916D6CA4F}"/>
-              </a:ext>
-            </a:extLst>
-          </p:cNvPr>
-          <p:cNvPicPr>
-            <a:picLocks noChangeAspect="1"/>
-          </p:cNvPicPr>
-          <p:nvPr/>
-        </p:nvPicPr>
-        <p:blipFill>
-          <a:blip r:embed="rId4"/>
-          <a:srcRect l="8391" t="11478" r="19726"/>
-          <a:stretch>
-            <a:fillRect/>
-          </a:stretch>
-        </p:blipFill>
-        <p:spPr>
-          <a:xfrm>
-            <a:off x="6593839" y="3326940"/>
-            <a:ext cx="5506720" cy="2388179"/>
-          </a:xfrm>
-          <a:prstGeom prst="rect">
-            <a:avLst/>
-          </a:prstGeom>
-          <a:ln>
-            <a:solidFill>
-              <a:srgbClr val="FF0000"/>
-            </a:solidFill>
-          </a:ln>
-        </p:spPr>
-      </p:pic>
-      <p:sp>
-        <p:nvSpPr>
-          <p:cNvPr id="19" name="Heptagone 18">
-            <a:extLst>
-              <a:ext uri="{FF2B5EF4-FFF2-40B4-BE49-F238E27FC236}">
-                <a16:creationId xmlns:a16="http://schemas.microsoft.com/office/drawing/2014/main" id="{41EB7AA0-214B-5A1E-1AB9-EC8159D4D1D8}"/>
-              </a:ext>
-            </a:extLst>
-          </p:cNvPr>
-          <p:cNvSpPr/>
-          <p:nvPr/>
-        </p:nvSpPr>
-        <p:spPr>
-          <a:xfrm>
-            <a:off x="11006859" y="4673466"/>
-            <a:ext cx="457199" cy="457292"/>
-          </a:xfrm>
-          <a:prstGeom prst="heptagon">
-            <a:avLst/>
-          </a:prstGeom>
-          <a:solidFill>
-            <a:srgbClr val="FF0000"/>
-          </a:solidFill>
-          <a:ln>
-            <a:noFill/>
-          </a:ln>
-        </p:spPr>
-        <p:style>
-          <a:lnRef idx="2">
-            <a:schemeClr val="accent1">
-              <a:shade val="15000"/>
-            </a:schemeClr>
-          </a:lnRef>
-          <a:fillRef idx="1">
-            <a:schemeClr val="accent1"/>
-          </a:fillRef>
-          <a:effectRef idx="0">
-            <a:schemeClr val="accent1"/>
-          </a:effectRef>
-          <a:fontRef idx="minor">
-            <a:schemeClr val="lt1"/>
-          </a:fontRef>
-        </p:style>
-        <p:txBody>
-          <a:bodyPr rtlCol="0" anchor="ctr"/>
-          <a:lstStyle/>
-          <a:p>
-            <a:pPr algn="ctr"/>
-            <a:r>
-              <a:rPr lang="fr-FR" dirty="0"/>
-              <a:t>9</a:t>
-            </a:r>
-          </a:p>
-        </p:txBody>
-      </p:sp>
-      <p:sp>
-        <p:nvSpPr>
-          <p:cNvPr id="20" name="ZoneTexte 19">
-            <a:extLst>
-              <a:ext uri="{FF2B5EF4-FFF2-40B4-BE49-F238E27FC236}">
-                <a16:creationId xmlns:a16="http://schemas.microsoft.com/office/drawing/2014/main" id="{8BAF8F4F-0981-78E4-24DA-C7E6754159F6}"/>
-              </a:ext>
-            </a:extLst>
-          </p:cNvPr>
-          <p:cNvSpPr txBox="1"/>
-          <p:nvPr/>
-        </p:nvSpPr>
-        <p:spPr>
-          <a:xfrm>
-            <a:off x="8172418" y="5902737"/>
-            <a:ext cx="1896142" cy="523220"/>
-          </a:xfrm>
-          <a:prstGeom prst="rect">
-            <a:avLst/>
-          </a:prstGeom>
-          <a:solidFill>
-            <a:schemeClr val="bg1"/>
-          </a:solidFill>
-          <a:ln w="19050">
-            <a:solidFill>
-              <a:srgbClr val="FF0000"/>
-            </a:solidFill>
-          </a:ln>
-        </p:spPr>
-        <p:txBody>
-          <a:bodyPr wrap="square" rtlCol="0">
-            <a:spAutoFit/>
-          </a:bodyPr>
-          <a:lstStyle/>
-          <a:p>
-            <a:r>
-              <a:rPr lang="fr-FR" sz="1400" dirty="0"/>
-              <a:t>Sélectionner Full </a:t>
-            </a:r>
-            <a:r>
-              <a:rPr lang="fr-FR" sz="1400" dirty="0" err="1"/>
-              <a:t>refresh</a:t>
-            </a:r>
-            <a:r>
-              <a:rPr lang="fr-FR" sz="1400" dirty="0"/>
-              <a:t> | </a:t>
-            </a:r>
-            <a:r>
-              <a:rPr lang="fr-FR" sz="1400" dirty="0" err="1"/>
-              <a:t>Overwrite</a:t>
-            </a:r>
-            <a:endParaRPr lang="fr-FR" sz="1400" dirty="0"/>
-          </a:p>
-        </p:txBody>
-      </p:sp>
-      <p:cxnSp>
-        <p:nvCxnSpPr>
-          <p:cNvPr id="21" name="Connecteur droit avec flèche 20">
-            <a:extLst>
-              <a:ext uri="{FF2B5EF4-FFF2-40B4-BE49-F238E27FC236}">
-                <a16:creationId xmlns:a16="http://schemas.microsoft.com/office/drawing/2014/main" id="{EBF56DFA-09B2-8838-4566-25AFFA3EA9A6}"/>
-              </a:ext>
-            </a:extLst>
-          </p:cNvPr>
-          <p:cNvCxnSpPr>
-            <a:cxnSpLocks/>
-            <a:stCxn id="20" idx="3"/>
-          </p:cNvCxnSpPr>
-          <p:nvPr/>
-        </p:nvCxnSpPr>
-        <p:spPr>
-          <a:xfrm flipV="1">
-            <a:off x="10068560" y="5473012"/>
-            <a:ext cx="834493" cy="691335"/>
-          </a:xfrm>
-          <a:prstGeom prst="straightConnector1">
-            <a:avLst/>
-          </a:prstGeom>
-          <a:ln w="19050">
-            <a:solidFill>
-              <a:srgbClr val="FF0000"/>
-            </a:solidFill>
-            <a:tailEnd type="triangle"/>
-          </a:ln>
-        </p:spPr>
-        <p:style>
-          <a:lnRef idx="1">
-            <a:schemeClr val="accent1"/>
-          </a:lnRef>
-          <a:fillRef idx="0">
-            <a:schemeClr val="accent1"/>
-          </a:fillRef>
-          <a:effectRef idx="0">
-            <a:schemeClr val="accent1"/>
-          </a:effectRef>
-          <a:fontRef idx="minor">
-            <a:schemeClr val="tx1"/>
-          </a:fontRef>
-        </p:style>
-      </p:cxnSp>
-    </p:spTree>
-    <p:extLst>
-      <p:ext uri="{BB962C8B-B14F-4D97-AF65-F5344CB8AC3E}">
-        <p14:creationId xmlns:p14="http://schemas.microsoft.com/office/powerpoint/2010/main" val="385905755"/>
-      </p:ext>
-    </p:extLst>
-  </p:cSld>
-  <p:clrMapOvr>
-    <a:masterClrMapping/>
-  </p:clrMapOvr>
-</p:sld>
-</file>
-
-<file path=ppt/slides/slide11.xml><?xml version="1.0" encoding="utf-8"?>
-<p:sld xmlns:a="http://schemas.openxmlformats.org/drawingml/2006/main" xmlns:r="http://schemas.openxmlformats.org/officeDocument/2006/relationships" xmlns:p="http://schemas.openxmlformats.org/presentationml/2006/main">
-  <p:cSld>
-    <p:spTree>
-      <p:nvGrpSpPr>
-        <p:cNvPr id="1" name="">
-          <a:extLst>
-            <a:ext uri="{FF2B5EF4-FFF2-40B4-BE49-F238E27FC236}">
-              <a16:creationId xmlns:a16="http://schemas.microsoft.com/office/drawing/2014/main" id="{6A82E35C-1988-23E7-5DC9-7E6CD6069232}"/>
-            </a:ext>
-          </a:extLst>
-        </p:cNvPr>
-        <p:cNvGrpSpPr/>
-        <p:nvPr/>
-      </p:nvGrpSpPr>
-      <p:grpSpPr>
-        <a:xfrm>
-          <a:off x="0" y="0"/>
-          <a:ext cx="0" cy="0"/>
-          <a:chOff x="0" y="0"/>
-          <a:chExt cx="0" cy="0"/>
-        </a:xfrm>
-      </p:grpSpPr>
-      <p:pic>
-        <p:nvPicPr>
-          <p:cNvPr id="7" name="Image 6">
-            <a:extLst>
-              <a:ext uri="{FF2B5EF4-FFF2-40B4-BE49-F238E27FC236}">
-                <a16:creationId xmlns:a16="http://schemas.microsoft.com/office/drawing/2014/main" id="{62B4199C-E1F3-593F-910E-4E2F55D0B937}"/>
-              </a:ext>
-            </a:extLst>
-          </p:cNvPr>
-          <p:cNvPicPr>
-            <a:picLocks noChangeAspect="1"/>
-          </p:cNvPicPr>
-          <p:nvPr/>
-        </p:nvPicPr>
-        <p:blipFill>
-          <a:blip r:embed="rId2"/>
-          <a:stretch>
-            <a:fillRect/>
-          </a:stretch>
-        </p:blipFill>
-        <p:spPr>
-          <a:xfrm>
-            <a:off x="208486" y="2150443"/>
-            <a:ext cx="8097520" cy="4286559"/>
-          </a:xfrm>
-          <a:prstGeom prst="rect">
-            <a:avLst/>
-          </a:prstGeom>
-        </p:spPr>
-      </p:pic>
-      <p:sp>
-        <p:nvSpPr>
-          <p:cNvPr id="2" name="Titre 1">
-            <a:extLst>
-              <a:ext uri="{FF2B5EF4-FFF2-40B4-BE49-F238E27FC236}">
-                <a16:creationId xmlns:a16="http://schemas.microsoft.com/office/drawing/2014/main" id="{124B6EF2-AD40-AB8F-6B94-AEE24756D331}"/>
-              </a:ext>
-            </a:extLst>
-          </p:cNvPr>
-          <p:cNvSpPr>
-            <a:spLocks noGrp="1"/>
-          </p:cNvSpPr>
-          <p:nvPr>
-            <p:ph type="title"/>
-          </p:nvPr>
-        </p:nvSpPr>
-        <p:spPr/>
-        <p:txBody>
-          <a:bodyPr/>
-          <a:lstStyle/>
-          <a:p>
-            <a:r>
-              <a:rPr lang="fr-FR" dirty="0"/>
-              <a:t>5. Mise en place </a:t>
-            </a:r>
-            <a:r>
-              <a:rPr lang="fr-FR" dirty="0" err="1"/>
-              <a:t>Airbyte</a:t>
-            </a:r>
-            <a:br>
-              <a:rPr lang="fr-FR" dirty="0"/>
-            </a:br>
-            <a:endParaRPr lang="fr-FR" dirty="0"/>
-          </a:p>
-        </p:txBody>
-      </p:sp>
-      <p:sp>
-        <p:nvSpPr>
-          <p:cNvPr id="4" name="Espace réservé de la date 3">
-            <a:extLst>
-              <a:ext uri="{FF2B5EF4-FFF2-40B4-BE49-F238E27FC236}">
-                <a16:creationId xmlns:a16="http://schemas.microsoft.com/office/drawing/2014/main" id="{1A105AA2-062B-6E25-CB39-48F67CB3D4D1}"/>
-              </a:ext>
-            </a:extLst>
-          </p:cNvPr>
-          <p:cNvSpPr>
-            <a:spLocks noGrp="1"/>
-          </p:cNvSpPr>
-          <p:nvPr>
-            <p:ph type="dt" sz="half" idx="10"/>
-          </p:nvPr>
-        </p:nvSpPr>
-        <p:spPr/>
-        <p:txBody>
-          <a:bodyPr/>
-          <a:lstStyle/>
-          <a:p>
-            <a:pPr rtl="0"/>
-            <a:fld id="{22897033-9A55-4DAC-991D-1FF1921C78B7}" type="datetime1">
-              <a:rPr lang="fr-FR" smtClean="0"/>
-              <a:t>18/08/2026</a:t>
-            </a:fld>
-            <a:endParaRPr lang="en-US" dirty="0"/>
-          </a:p>
-        </p:txBody>
-      </p:sp>
-      <p:sp>
-        <p:nvSpPr>
-          <p:cNvPr id="5" name="Espace réservé du contenu 2">
-            <a:extLst>
-              <a:ext uri="{FF2B5EF4-FFF2-40B4-BE49-F238E27FC236}">
-                <a16:creationId xmlns:a16="http://schemas.microsoft.com/office/drawing/2014/main" id="{DE739681-3DB5-8470-BA5D-1D766E4AEAE5}"/>
-              </a:ext>
-            </a:extLst>
-          </p:cNvPr>
-          <p:cNvSpPr>
-            <a:spLocks noGrp="1"/>
-          </p:cNvSpPr>
-          <p:nvPr>
-            <p:ph idx="1"/>
-          </p:nvPr>
-        </p:nvSpPr>
-        <p:spPr>
-          <a:xfrm>
-            <a:off x="581192" y="2020366"/>
-            <a:ext cx="11029615" cy="3634486"/>
-          </a:xfrm>
-        </p:spPr>
-        <p:txBody>
-          <a:bodyPr/>
-          <a:lstStyle/>
-          <a:p>
-            <a:endParaRPr lang="fr-FR" dirty="0"/>
-          </a:p>
-          <a:p>
-            <a:endParaRPr lang="fr-FR" dirty="0"/>
-          </a:p>
-          <a:p>
-            <a:endParaRPr lang="fr-FR" dirty="0"/>
-          </a:p>
-          <a:p>
-            <a:endParaRPr lang="fr-FR" dirty="0"/>
-          </a:p>
-          <a:p>
-            <a:endParaRPr lang="fr-FR" dirty="0"/>
-          </a:p>
-        </p:txBody>
-      </p:sp>
-      <p:sp>
-        <p:nvSpPr>
-          <p:cNvPr id="35" name="Heptagone 34">
-            <a:extLst>
-              <a:ext uri="{FF2B5EF4-FFF2-40B4-BE49-F238E27FC236}">
-                <a16:creationId xmlns:a16="http://schemas.microsoft.com/office/drawing/2014/main" id="{1D8AEB41-F6A9-0F02-72EE-07A7D2622D8F}"/>
-              </a:ext>
-            </a:extLst>
-          </p:cNvPr>
-          <p:cNvSpPr/>
-          <p:nvPr/>
-        </p:nvSpPr>
-        <p:spPr>
-          <a:xfrm>
-            <a:off x="4424680" y="3084584"/>
-            <a:ext cx="457199" cy="457292"/>
-          </a:xfrm>
-          <a:prstGeom prst="heptagon">
-            <a:avLst/>
-          </a:prstGeom>
-          <a:solidFill>
-            <a:srgbClr val="FF0000"/>
-          </a:solidFill>
-          <a:ln>
-            <a:noFill/>
-          </a:ln>
-        </p:spPr>
-        <p:style>
-          <a:lnRef idx="2">
-            <a:schemeClr val="accent1">
-              <a:shade val="15000"/>
-            </a:schemeClr>
-          </a:lnRef>
-          <a:fillRef idx="1">
-            <a:schemeClr val="accent1"/>
-          </a:fillRef>
-          <a:effectRef idx="0">
-            <a:schemeClr val="accent1"/>
-          </a:effectRef>
-          <a:fontRef idx="minor">
-            <a:schemeClr val="lt1"/>
-          </a:fontRef>
-        </p:style>
-        <p:txBody>
-          <a:bodyPr rtlCol="0" anchor="ctr"/>
-          <a:lstStyle/>
-          <a:p>
-            <a:pPr algn="ctr"/>
-            <a:r>
-              <a:rPr lang="fr-FR" sz="1200" dirty="0"/>
-              <a:t>10</a:t>
-            </a:r>
-          </a:p>
-        </p:txBody>
-      </p:sp>
-      <p:sp>
-        <p:nvSpPr>
-          <p:cNvPr id="12" name="ZoneTexte 11">
-            <a:extLst>
-              <a:ext uri="{FF2B5EF4-FFF2-40B4-BE49-F238E27FC236}">
-                <a16:creationId xmlns:a16="http://schemas.microsoft.com/office/drawing/2014/main" id="{75A77A21-6BEC-6257-9DC0-B77317690F9B}"/>
-              </a:ext>
-            </a:extLst>
-          </p:cNvPr>
-          <p:cNvSpPr txBox="1"/>
-          <p:nvPr/>
-        </p:nvSpPr>
-        <p:spPr>
-          <a:xfrm>
-            <a:off x="5378971" y="2441441"/>
-            <a:ext cx="1893529" cy="523220"/>
-          </a:xfrm>
-          <a:prstGeom prst="rect">
-            <a:avLst/>
-          </a:prstGeom>
-          <a:solidFill>
-            <a:schemeClr val="bg1"/>
-          </a:solidFill>
-          <a:ln w="19050">
-            <a:solidFill>
-              <a:srgbClr val="FF0000"/>
-            </a:solidFill>
-          </a:ln>
-        </p:spPr>
-        <p:txBody>
-          <a:bodyPr wrap="square" rtlCol="0">
-            <a:spAutoFit/>
-          </a:bodyPr>
-          <a:lstStyle/>
-          <a:p>
-            <a:r>
-              <a:rPr lang="fr-FR" sz="1400" dirty="0"/>
-              <a:t>Choisir le </a:t>
-            </a:r>
-            <a:r>
-              <a:rPr lang="fr-FR" sz="1400" dirty="0" err="1"/>
-              <a:t>schedule</a:t>
-            </a:r>
-            <a:r>
-              <a:rPr lang="fr-FR" sz="1400" dirty="0"/>
-              <a:t> type à configurer</a:t>
-            </a:r>
-          </a:p>
-        </p:txBody>
-      </p:sp>
-      <p:cxnSp>
-        <p:nvCxnSpPr>
-          <p:cNvPr id="11" name="Connecteur droit avec flèche 10">
-            <a:extLst>
-              <a:ext uri="{FF2B5EF4-FFF2-40B4-BE49-F238E27FC236}">
-                <a16:creationId xmlns:a16="http://schemas.microsoft.com/office/drawing/2014/main" id="{3CBF5A7B-1460-75AF-CD2E-0498C5214C01}"/>
-              </a:ext>
-            </a:extLst>
-          </p:cNvPr>
-          <p:cNvCxnSpPr>
-            <a:cxnSpLocks/>
-            <a:stCxn id="12" idx="2"/>
-          </p:cNvCxnSpPr>
-          <p:nvPr/>
-        </p:nvCxnSpPr>
-        <p:spPr>
-          <a:xfrm flipH="1">
-            <a:off x="4653280" y="2964661"/>
-            <a:ext cx="1672456" cy="872948"/>
-          </a:xfrm>
-          <a:prstGeom prst="straightConnector1">
-            <a:avLst/>
-          </a:prstGeom>
-          <a:ln w="19050">
-            <a:solidFill>
-              <a:srgbClr val="FF0000"/>
-            </a:solidFill>
-            <a:tailEnd type="triangle"/>
-          </a:ln>
-        </p:spPr>
-        <p:style>
-          <a:lnRef idx="1">
-            <a:schemeClr val="accent1"/>
-          </a:lnRef>
-          <a:fillRef idx="0">
-            <a:schemeClr val="accent1"/>
-          </a:fillRef>
-          <a:effectRef idx="0">
-            <a:schemeClr val="accent1"/>
-          </a:effectRef>
-          <a:fontRef idx="minor">
-            <a:schemeClr val="tx1"/>
-          </a:fontRef>
-        </p:style>
-      </p:cxnSp>
-      <p:sp>
-        <p:nvSpPr>
-          <p:cNvPr id="20" name="ZoneTexte 19">
-            <a:extLst>
-              <a:ext uri="{FF2B5EF4-FFF2-40B4-BE49-F238E27FC236}">
-                <a16:creationId xmlns:a16="http://schemas.microsoft.com/office/drawing/2014/main" id="{12E7F6D9-BCB0-4872-C318-C0D4C50CFA84}"/>
-              </a:ext>
-            </a:extLst>
-          </p:cNvPr>
-          <p:cNvSpPr txBox="1"/>
-          <p:nvPr/>
-        </p:nvSpPr>
-        <p:spPr>
-          <a:xfrm>
-            <a:off x="4875316" y="5684240"/>
-            <a:ext cx="1896142" cy="523220"/>
-          </a:xfrm>
-          <a:prstGeom prst="rect">
-            <a:avLst/>
-          </a:prstGeom>
-          <a:solidFill>
-            <a:schemeClr val="bg1"/>
-          </a:solidFill>
-          <a:ln w="19050">
-            <a:solidFill>
-              <a:srgbClr val="FF0000"/>
-            </a:solidFill>
-          </a:ln>
-        </p:spPr>
-        <p:txBody>
-          <a:bodyPr wrap="square" rtlCol="0">
-            <a:spAutoFit/>
-          </a:bodyPr>
-          <a:lstStyle/>
-          <a:p>
-            <a:r>
-              <a:rPr lang="fr-FR" sz="1400" dirty="0"/>
-              <a:t>Mettre en place la connexion</a:t>
-            </a:r>
-          </a:p>
-        </p:txBody>
-      </p:sp>
-      <p:cxnSp>
-        <p:nvCxnSpPr>
-          <p:cNvPr id="21" name="Connecteur droit avec flèche 20">
-            <a:extLst>
-              <a:ext uri="{FF2B5EF4-FFF2-40B4-BE49-F238E27FC236}">
-                <a16:creationId xmlns:a16="http://schemas.microsoft.com/office/drawing/2014/main" id="{EAD772C8-35C2-C23C-A4EE-B9AD548D9D2B}"/>
-              </a:ext>
-            </a:extLst>
-          </p:cNvPr>
-          <p:cNvCxnSpPr>
-            <a:cxnSpLocks/>
-            <a:stCxn id="20" idx="3"/>
-          </p:cNvCxnSpPr>
-          <p:nvPr/>
-        </p:nvCxnSpPr>
-        <p:spPr>
-          <a:xfrm>
-            <a:off x="6771458" y="5945850"/>
-            <a:ext cx="1041582" cy="260256"/>
-          </a:xfrm>
-          <a:prstGeom prst="straightConnector1">
-            <a:avLst/>
-          </a:prstGeom>
-          <a:ln w="19050">
-            <a:solidFill>
-              <a:srgbClr val="FF0000"/>
-            </a:solidFill>
-            <a:tailEnd type="triangle"/>
-          </a:ln>
-        </p:spPr>
-        <p:style>
-          <a:lnRef idx="1">
-            <a:schemeClr val="accent1"/>
-          </a:lnRef>
-          <a:fillRef idx="0">
-            <a:schemeClr val="accent1"/>
-          </a:fillRef>
-          <a:effectRef idx="0">
-            <a:schemeClr val="accent1"/>
-          </a:effectRef>
-          <a:fontRef idx="minor">
-            <a:schemeClr val="tx1"/>
-          </a:fontRef>
-        </p:style>
-      </p:cxnSp>
-      <p:sp>
-        <p:nvSpPr>
-          <p:cNvPr id="13" name="Heptagone 12">
-            <a:extLst>
-              <a:ext uri="{FF2B5EF4-FFF2-40B4-BE49-F238E27FC236}">
-                <a16:creationId xmlns:a16="http://schemas.microsoft.com/office/drawing/2014/main" id="{03E798C0-4F41-F0DC-17F3-C4F0B8388717}"/>
-              </a:ext>
-            </a:extLst>
-          </p:cNvPr>
-          <p:cNvSpPr/>
-          <p:nvPr/>
-        </p:nvSpPr>
-        <p:spPr>
-          <a:xfrm>
-            <a:off x="5867399" y="5114413"/>
-            <a:ext cx="457199" cy="457292"/>
-          </a:xfrm>
-          <a:prstGeom prst="heptagon">
-            <a:avLst/>
-          </a:prstGeom>
-          <a:solidFill>
-            <a:srgbClr val="FF0000"/>
-          </a:solidFill>
-          <a:ln>
-            <a:noFill/>
-          </a:ln>
-        </p:spPr>
-        <p:style>
-          <a:lnRef idx="2">
-            <a:schemeClr val="accent1">
-              <a:shade val="15000"/>
-            </a:schemeClr>
-          </a:lnRef>
-          <a:fillRef idx="1">
-            <a:schemeClr val="accent1"/>
-          </a:fillRef>
-          <a:effectRef idx="0">
-            <a:schemeClr val="accent1"/>
-          </a:effectRef>
-          <a:fontRef idx="minor">
-            <a:schemeClr val="lt1"/>
-          </a:fontRef>
-        </p:style>
-        <p:txBody>
-          <a:bodyPr rtlCol="0" anchor="ctr"/>
-          <a:lstStyle/>
-          <a:p>
-            <a:pPr algn="ctr"/>
-            <a:r>
-              <a:rPr lang="fr-FR" sz="1200" dirty="0"/>
-              <a:t>11</a:t>
-            </a:r>
-          </a:p>
-        </p:txBody>
-      </p:sp>
-    </p:spTree>
-    <p:extLst>
-      <p:ext uri="{BB962C8B-B14F-4D97-AF65-F5344CB8AC3E}">
-        <p14:creationId xmlns:p14="http://schemas.microsoft.com/office/powerpoint/2010/main" val="3925319079"/>
-      </p:ext>
-    </p:extLst>
-  </p:cSld>
-  <p:clrMapOvr>
-    <a:masterClrMapping/>
-  </p:clrMapOvr>
-</p:sld>
-</file>
-
-<file path=ppt/slides/slide12.xml><?xml version="1.0" encoding="utf-8"?>
-<p:sld xmlns:a="http://schemas.openxmlformats.org/drawingml/2006/main" xmlns:r="http://schemas.openxmlformats.org/officeDocument/2006/relationships" xmlns:p="http://schemas.openxmlformats.org/presentationml/2006/main">
-  <p:cSld>
-    <p:spTree>
-      <p:nvGrpSpPr>
-        <p:cNvPr id="1" name="">
-          <a:extLst>
-            <a:ext uri="{FF2B5EF4-FFF2-40B4-BE49-F238E27FC236}">
-              <a16:creationId xmlns:a16="http://schemas.microsoft.com/office/drawing/2014/main" id="{DF648699-BE5A-3255-1F6A-6838AB97DEAA}"/>
-            </a:ext>
-          </a:extLst>
-        </p:cNvPr>
-        <p:cNvGrpSpPr/>
-        <p:nvPr/>
-      </p:nvGrpSpPr>
-      <p:grpSpPr>
-        <a:xfrm>
-          <a:off x="0" y="0"/>
-          <a:ext cx="0" cy="0"/>
-          <a:chOff x="0" y="0"/>
-          <a:chExt cx="0" cy="0"/>
-        </a:xfrm>
-      </p:grpSpPr>
-      <p:pic>
-        <p:nvPicPr>
-          <p:cNvPr id="14" name="Image 13">
-            <a:extLst>
-              <a:ext uri="{FF2B5EF4-FFF2-40B4-BE49-F238E27FC236}">
-                <a16:creationId xmlns:a16="http://schemas.microsoft.com/office/drawing/2014/main" id="{71136054-5556-91AA-8AC8-C6452DC10C29}"/>
-              </a:ext>
-            </a:extLst>
-          </p:cNvPr>
-          <p:cNvPicPr>
-            <a:picLocks noChangeAspect="1"/>
-          </p:cNvPicPr>
-          <p:nvPr/>
-        </p:nvPicPr>
-        <p:blipFill>
-          <a:blip r:embed="rId2"/>
-          <a:stretch>
-            <a:fillRect/>
-          </a:stretch>
-        </p:blipFill>
-        <p:spPr>
-          <a:xfrm>
-            <a:off x="258318" y="4312984"/>
-            <a:ext cx="9458960" cy="2060149"/>
-          </a:xfrm>
-          <a:prstGeom prst="rect">
-            <a:avLst/>
-          </a:prstGeom>
-        </p:spPr>
-      </p:pic>
-      <p:pic>
-        <p:nvPicPr>
-          <p:cNvPr id="6" name="Image 5">
-            <a:extLst>
-              <a:ext uri="{FF2B5EF4-FFF2-40B4-BE49-F238E27FC236}">
-                <a16:creationId xmlns:a16="http://schemas.microsoft.com/office/drawing/2014/main" id="{42417B1F-41D8-7DAE-FA74-EE10198F3E0E}"/>
-              </a:ext>
-            </a:extLst>
-          </p:cNvPr>
-          <p:cNvPicPr>
-            <a:picLocks noChangeAspect="1"/>
-          </p:cNvPicPr>
-          <p:nvPr/>
-        </p:nvPicPr>
-        <p:blipFill>
-          <a:blip r:embed="rId3"/>
-          <a:stretch>
-            <a:fillRect/>
-          </a:stretch>
-        </p:blipFill>
-        <p:spPr>
-          <a:xfrm>
-            <a:off x="203200" y="1941820"/>
-            <a:ext cx="10546080" cy="2285528"/>
-          </a:xfrm>
-          <a:prstGeom prst="rect">
-            <a:avLst/>
-          </a:prstGeom>
-        </p:spPr>
-      </p:pic>
-      <p:sp>
-        <p:nvSpPr>
-          <p:cNvPr id="2" name="Titre 1">
-            <a:extLst>
-              <a:ext uri="{FF2B5EF4-FFF2-40B4-BE49-F238E27FC236}">
-                <a16:creationId xmlns:a16="http://schemas.microsoft.com/office/drawing/2014/main" id="{9C48757C-DFA7-86B0-71F1-08D7F2AB8BCD}"/>
-              </a:ext>
-            </a:extLst>
-          </p:cNvPr>
-          <p:cNvSpPr>
-            <a:spLocks noGrp="1"/>
-          </p:cNvSpPr>
-          <p:nvPr>
-            <p:ph type="title"/>
-          </p:nvPr>
-        </p:nvSpPr>
-        <p:spPr/>
-        <p:txBody>
-          <a:bodyPr/>
-          <a:lstStyle/>
-          <a:p>
-            <a:r>
-              <a:rPr lang="fr-FR" dirty="0"/>
-              <a:t>5. Mise en place </a:t>
-            </a:r>
-            <a:r>
-              <a:rPr lang="fr-FR" dirty="0" err="1"/>
-              <a:t>Airbyte</a:t>
-            </a:r>
-            <a:br>
-              <a:rPr lang="fr-FR" dirty="0"/>
-            </a:br>
-            <a:endParaRPr lang="fr-FR" dirty="0"/>
-          </a:p>
-        </p:txBody>
-      </p:sp>
-      <p:sp>
-        <p:nvSpPr>
-          <p:cNvPr id="4" name="Espace réservé de la date 3">
-            <a:extLst>
-              <a:ext uri="{FF2B5EF4-FFF2-40B4-BE49-F238E27FC236}">
-                <a16:creationId xmlns:a16="http://schemas.microsoft.com/office/drawing/2014/main" id="{46B37FF4-2081-CBFF-0353-490EB5BFBC6C}"/>
-              </a:ext>
-            </a:extLst>
-          </p:cNvPr>
-          <p:cNvSpPr>
-            <a:spLocks noGrp="1"/>
-          </p:cNvSpPr>
-          <p:nvPr>
-            <p:ph type="dt" sz="half" idx="10"/>
-          </p:nvPr>
-        </p:nvSpPr>
-        <p:spPr/>
-        <p:txBody>
-          <a:bodyPr/>
-          <a:lstStyle/>
-          <a:p>
-            <a:pPr rtl="0"/>
-            <a:fld id="{22897033-9A55-4DAC-991D-1FF1921C78B7}" type="datetime1">
-              <a:rPr lang="fr-FR" smtClean="0"/>
-              <a:t>18/08/2026</a:t>
-            </a:fld>
-            <a:endParaRPr lang="en-US" dirty="0"/>
-          </a:p>
-        </p:txBody>
-      </p:sp>
-      <p:sp>
-        <p:nvSpPr>
-          <p:cNvPr id="5" name="Espace réservé du contenu 2">
-            <a:extLst>
-              <a:ext uri="{FF2B5EF4-FFF2-40B4-BE49-F238E27FC236}">
-                <a16:creationId xmlns:a16="http://schemas.microsoft.com/office/drawing/2014/main" id="{F71619B6-FEEF-F77C-0DE8-FB87A5502D1A}"/>
-              </a:ext>
-            </a:extLst>
-          </p:cNvPr>
-          <p:cNvSpPr>
-            <a:spLocks noGrp="1"/>
-          </p:cNvSpPr>
-          <p:nvPr>
-            <p:ph idx="1"/>
-          </p:nvPr>
-        </p:nvSpPr>
-        <p:spPr>
-          <a:xfrm>
-            <a:off x="581192" y="2020366"/>
-            <a:ext cx="11029615" cy="3634486"/>
-          </a:xfrm>
-        </p:spPr>
-        <p:txBody>
-          <a:bodyPr/>
-          <a:lstStyle/>
-          <a:p>
-            <a:endParaRPr lang="fr-FR" dirty="0"/>
-          </a:p>
-          <a:p>
-            <a:endParaRPr lang="fr-FR" dirty="0"/>
-          </a:p>
-          <a:p>
-            <a:endParaRPr lang="fr-FR" dirty="0"/>
-          </a:p>
-          <a:p>
-            <a:endParaRPr lang="fr-FR" dirty="0"/>
-          </a:p>
-          <a:p>
-            <a:endParaRPr lang="fr-FR" dirty="0"/>
-          </a:p>
-        </p:txBody>
-      </p:sp>
-      <p:sp>
-        <p:nvSpPr>
-          <p:cNvPr id="35" name="Heptagone 34">
-            <a:extLst>
-              <a:ext uri="{FF2B5EF4-FFF2-40B4-BE49-F238E27FC236}">
-                <a16:creationId xmlns:a16="http://schemas.microsoft.com/office/drawing/2014/main" id="{707D04E6-5A38-9D62-E93E-A704FABB20B9}"/>
-              </a:ext>
-            </a:extLst>
-          </p:cNvPr>
-          <p:cNvSpPr/>
-          <p:nvPr/>
-        </p:nvSpPr>
-        <p:spPr>
-          <a:xfrm>
-            <a:off x="10670073" y="2353826"/>
-            <a:ext cx="457199" cy="457292"/>
-          </a:xfrm>
-          <a:prstGeom prst="heptagon">
-            <a:avLst/>
-          </a:prstGeom>
-          <a:solidFill>
-            <a:srgbClr val="FF0000"/>
-          </a:solidFill>
-          <a:ln>
-            <a:noFill/>
-          </a:ln>
-        </p:spPr>
-        <p:style>
-          <a:lnRef idx="2">
-            <a:schemeClr val="accent1">
-              <a:shade val="15000"/>
-            </a:schemeClr>
-          </a:lnRef>
-          <a:fillRef idx="1">
-            <a:schemeClr val="accent1"/>
-          </a:fillRef>
-          <a:effectRef idx="0">
-            <a:schemeClr val="accent1"/>
-          </a:effectRef>
-          <a:fontRef idx="minor">
-            <a:schemeClr val="lt1"/>
-          </a:fontRef>
-        </p:style>
-        <p:txBody>
-          <a:bodyPr rtlCol="0" anchor="ctr"/>
-          <a:lstStyle/>
-          <a:p>
-            <a:pPr algn="ctr"/>
-            <a:r>
-              <a:rPr lang="fr-FR" sz="1200" dirty="0"/>
-              <a:t>12</a:t>
-            </a:r>
-          </a:p>
-        </p:txBody>
-      </p:sp>
-      <p:sp>
-        <p:nvSpPr>
-          <p:cNvPr id="12" name="ZoneTexte 11">
-            <a:extLst>
-              <a:ext uri="{FF2B5EF4-FFF2-40B4-BE49-F238E27FC236}">
-                <a16:creationId xmlns:a16="http://schemas.microsoft.com/office/drawing/2014/main" id="{99C273F5-8725-CED2-CC42-9D4C732AA23E}"/>
-              </a:ext>
-            </a:extLst>
-          </p:cNvPr>
-          <p:cNvSpPr txBox="1"/>
-          <p:nvPr/>
-        </p:nvSpPr>
-        <p:spPr>
-          <a:xfrm>
-            <a:off x="9717278" y="1213378"/>
-            <a:ext cx="1893529" cy="954107"/>
-          </a:xfrm>
-          <a:prstGeom prst="rect">
-            <a:avLst/>
-          </a:prstGeom>
-          <a:solidFill>
-            <a:schemeClr val="bg1"/>
-          </a:solidFill>
-          <a:ln w="19050">
-            <a:solidFill>
-              <a:srgbClr val="FF0000"/>
-            </a:solidFill>
-          </a:ln>
-        </p:spPr>
-        <p:txBody>
-          <a:bodyPr wrap="square" rtlCol="0">
-            <a:spAutoFit/>
-          </a:bodyPr>
-          <a:lstStyle/>
-          <a:p>
-            <a:r>
-              <a:rPr lang="fr-FR" sz="1400" dirty="0"/>
-              <a:t>Lancer la synchronisation pour </a:t>
-            </a:r>
-            <a:r>
-              <a:rPr lang="fr-FR" sz="1400" dirty="0" err="1"/>
-              <a:t>transferer</a:t>
-            </a:r>
-            <a:r>
-              <a:rPr lang="fr-FR" sz="1400" dirty="0"/>
-              <a:t> les données dans la </a:t>
-            </a:r>
-            <a:r>
-              <a:rPr lang="fr-FR" sz="1400" dirty="0" err="1"/>
-              <a:t>Database</a:t>
-            </a:r>
-            <a:endParaRPr lang="fr-FR" sz="1400" dirty="0"/>
-          </a:p>
-        </p:txBody>
-      </p:sp>
-      <p:cxnSp>
-        <p:nvCxnSpPr>
-          <p:cNvPr id="11" name="Connecteur droit avec flèche 10">
-            <a:extLst>
-              <a:ext uri="{FF2B5EF4-FFF2-40B4-BE49-F238E27FC236}">
-                <a16:creationId xmlns:a16="http://schemas.microsoft.com/office/drawing/2014/main" id="{B56F32C2-D77B-00E2-3079-EE6C98635967}"/>
-              </a:ext>
-            </a:extLst>
-          </p:cNvPr>
-          <p:cNvCxnSpPr>
-            <a:cxnSpLocks/>
-            <a:stCxn id="12" idx="2"/>
-          </p:cNvCxnSpPr>
-          <p:nvPr/>
-        </p:nvCxnSpPr>
-        <p:spPr>
-          <a:xfrm flipH="1">
-            <a:off x="9865360" y="2167485"/>
-            <a:ext cx="798683" cy="492453"/>
-          </a:xfrm>
-          <a:prstGeom prst="straightConnector1">
-            <a:avLst/>
-          </a:prstGeom>
-          <a:ln w="19050">
-            <a:solidFill>
-              <a:srgbClr val="FF0000"/>
-            </a:solidFill>
-            <a:tailEnd type="triangle"/>
-          </a:ln>
-        </p:spPr>
-        <p:style>
-          <a:lnRef idx="1">
-            <a:schemeClr val="accent1"/>
-          </a:lnRef>
-          <a:fillRef idx="0">
-            <a:schemeClr val="accent1"/>
-          </a:fillRef>
-          <a:effectRef idx="0">
-            <a:schemeClr val="accent1"/>
-          </a:effectRef>
-          <a:fontRef idx="minor">
-            <a:schemeClr val="tx1"/>
-          </a:fontRef>
-        </p:style>
-      </p:cxnSp>
-      <p:sp>
-        <p:nvSpPr>
-          <p:cNvPr id="20" name="ZoneTexte 19">
-            <a:extLst>
-              <a:ext uri="{FF2B5EF4-FFF2-40B4-BE49-F238E27FC236}">
-                <a16:creationId xmlns:a16="http://schemas.microsoft.com/office/drawing/2014/main" id="{7DE3F633-EC9E-2ADE-068C-D7E2CBDAB820}"/>
-              </a:ext>
-            </a:extLst>
-          </p:cNvPr>
-          <p:cNvSpPr txBox="1"/>
-          <p:nvPr/>
-        </p:nvSpPr>
-        <p:spPr>
-          <a:xfrm>
-            <a:off x="3363070" y="5048485"/>
-            <a:ext cx="1625490" cy="523220"/>
-          </a:xfrm>
-          <a:prstGeom prst="rect">
-            <a:avLst/>
-          </a:prstGeom>
-          <a:solidFill>
-            <a:schemeClr val="bg1"/>
-          </a:solidFill>
-          <a:ln w="19050">
-            <a:solidFill>
-              <a:srgbClr val="FF0000"/>
-            </a:solidFill>
-          </a:ln>
-        </p:spPr>
-        <p:txBody>
-          <a:bodyPr wrap="square" rtlCol="0">
-            <a:spAutoFit/>
-          </a:bodyPr>
-          <a:lstStyle/>
-          <a:p>
-            <a:r>
-              <a:rPr lang="fr-FR" sz="1400" dirty="0"/>
-              <a:t>Prend quelques minutes</a:t>
-            </a:r>
-          </a:p>
-        </p:txBody>
-      </p:sp>
-      <p:cxnSp>
-        <p:nvCxnSpPr>
-          <p:cNvPr id="21" name="Connecteur droit avec flèche 20">
-            <a:extLst>
-              <a:ext uri="{FF2B5EF4-FFF2-40B4-BE49-F238E27FC236}">
-                <a16:creationId xmlns:a16="http://schemas.microsoft.com/office/drawing/2014/main" id="{41F17FB7-5672-9FC5-4484-BE9F06E10D6E}"/>
-              </a:ext>
-            </a:extLst>
-          </p:cNvPr>
-          <p:cNvCxnSpPr>
-            <a:cxnSpLocks/>
-            <a:stCxn id="20" idx="1"/>
-          </p:cNvCxnSpPr>
-          <p:nvPr/>
-        </p:nvCxnSpPr>
-        <p:spPr>
-          <a:xfrm flipH="1">
-            <a:off x="1617623" y="5310095"/>
-            <a:ext cx="1745447" cy="755425"/>
-          </a:xfrm>
-          <a:prstGeom prst="straightConnector1">
-            <a:avLst/>
-          </a:prstGeom>
-          <a:ln w="19050">
-            <a:solidFill>
-              <a:srgbClr val="FF0000"/>
-            </a:solidFill>
-            <a:tailEnd type="triangle"/>
-          </a:ln>
-        </p:spPr>
-        <p:style>
-          <a:lnRef idx="1">
-            <a:schemeClr val="accent1"/>
-          </a:lnRef>
-          <a:fillRef idx="0">
-            <a:schemeClr val="accent1"/>
-          </a:fillRef>
-          <a:effectRef idx="0">
-            <a:schemeClr val="accent1"/>
-          </a:effectRef>
-          <a:fontRef idx="minor">
-            <a:schemeClr val="tx1"/>
-          </a:fontRef>
-        </p:style>
-      </p:cxnSp>
-      <p:sp>
-        <p:nvSpPr>
-          <p:cNvPr id="13" name="Heptagone 12">
-            <a:extLst>
-              <a:ext uri="{FF2B5EF4-FFF2-40B4-BE49-F238E27FC236}">
-                <a16:creationId xmlns:a16="http://schemas.microsoft.com/office/drawing/2014/main" id="{EAFAD523-B47A-652B-AA03-32D6D09BB538}"/>
-              </a:ext>
-            </a:extLst>
-          </p:cNvPr>
-          <p:cNvSpPr/>
-          <p:nvPr/>
-        </p:nvSpPr>
-        <p:spPr>
-          <a:xfrm>
-            <a:off x="3134470" y="5706451"/>
-            <a:ext cx="457199" cy="457292"/>
-          </a:xfrm>
-          <a:prstGeom prst="heptagon">
-            <a:avLst/>
-          </a:prstGeom>
-          <a:solidFill>
-            <a:srgbClr val="FF0000"/>
-          </a:solidFill>
-          <a:ln>
-            <a:noFill/>
-          </a:ln>
-        </p:spPr>
-        <p:style>
-          <a:lnRef idx="2">
-            <a:schemeClr val="accent1">
-              <a:shade val="15000"/>
-            </a:schemeClr>
-          </a:lnRef>
-          <a:fillRef idx="1">
-            <a:schemeClr val="accent1"/>
-          </a:fillRef>
-          <a:effectRef idx="0">
-            <a:schemeClr val="accent1"/>
-          </a:effectRef>
-          <a:fontRef idx="minor">
-            <a:schemeClr val="lt1"/>
-          </a:fontRef>
-        </p:style>
-        <p:txBody>
-          <a:bodyPr rtlCol="0" anchor="ctr"/>
-          <a:lstStyle/>
-          <a:p>
-            <a:pPr algn="ctr"/>
-            <a:r>
-              <a:rPr lang="fr-FR" sz="1200" dirty="0"/>
-              <a:t>13</a:t>
-            </a:r>
-          </a:p>
-        </p:txBody>
-      </p:sp>
-      <p:pic>
-        <p:nvPicPr>
-          <p:cNvPr id="19" name="Image 18">
-            <a:extLst>
-              <a:ext uri="{FF2B5EF4-FFF2-40B4-BE49-F238E27FC236}">
-                <a16:creationId xmlns:a16="http://schemas.microsoft.com/office/drawing/2014/main" id="{D6BFA8F4-377F-764C-7ADC-0470E2A59EC1}"/>
-              </a:ext>
-            </a:extLst>
-          </p:cNvPr>
-          <p:cNvPicPr>
-            <a:picLocks noChangeAspect="1"/>
-          </p:cNvPicPr>
-          <p:nvPr/>
-        </p:nvPicPr>
-        <p:blipFill>
-          <a:blip r:embed="rId4"/>
-          <a:srcRect l="10969"/>
-          <a:stretch>
-            <a:fillRect/>
-          </a:stretch>
-        </p:blipFill>
-        <p:spPr>
-          <a:xfrm>
-            <a:off x="5257599" y="3419590"/>
-            <a:ext cx="6731200" cy="1874495"/>
-          </a:xfrm>
-          <a:prstGeom prst="rect">
-            <a:avLst/>
-          </a:prstGeom>
-          <a:ln>
-            <a:solidFill>
-              <a:srgbClr val="FF0000"/>
-            </a:solidFill>
-          </a:ln>
-        </p:spPr>
-      </p:pic>
-      <p:sp>
-        <p:nvSpPr>
-          <p:cNvPr id="22" name="ZoneTexte 21">
-            <a:extLst>
-              <a:ext uri="{FF2B5EF4-FFF2-40B4-BE49-F238E27FC236}">
-                <a16:creationId xmlns:a16="http://schemas.microsoft.com/office/drawing/2014/main" id="{671B2A34-95E4-3DF4-D269-19D830851F9F}"/>
-              </a:ext>
-            </a:extLst>
-          </p:cNvPr>
-          <p:cNvSpPr txBox="1"/>
-          <p:nvPr/>
-        </p:nvSpPr>
-        <p:spPr>
-          <a:xfrm>
-            <a:off x="7178149" y="3037900"/>
-            <a:ext cx="1625490" cy="1169551"/>
-          </a:xfrm>
-          <a:prstGeom prst="rect">
-            <a:avLst/>
-          </a:prstGeom>
-          <a:solidFill>
-            <a:schemeClr val="bg1"/>
-          </a:solidFill>
-          <a:ln w="19050">
-            <a:solidFill>
-              <a:srgbClr val="FF0000"/>
-            </a:solidFill>
-          </a:ln>
-        </p:spPr>
-        <p:txBody>
-          <a:bodyPr wrap="square" rtlCol="0">
-            <a:spAutoFit/>
-          </a:bodyPr>
-          <a:lstStyle/>
-          <a:p>
-            <a:r>
-              <a:rPr lang="fr-FR" sz="1400" dirty="0"/>
-              <a:t>Synchronisation réussie. </a:t>
-            </a:r>
-          </a:p>
-          <a:p>
-            <a:r>
-              <a:rPr lang="fr-FR" sz="1400" dirty="0"/>
-              <a:t>Nombre de lignes chargées dans PostgreSQL</a:t>
-            </a:r>
-          </a:p>
-        </p:txBody>
-      </p:sp>
-      <p:cxnSp>
-        <p:nvCxnSpPr>
-          <p:cNvPr id="23" name="Connecteur droit avec flèche 22">
-            <a:extLst>
-              <a:ext uri="{FF2B5EF4-FFF2-40B4-BE49-F238E27FC236}">
-                <a16:creationId xmlns:a16="http://schemas.microsoft.com/office/drawing/2014/main" id="{57CC711C-F1E3-A660-9A43-BB4070672120}"/>
-              </a:ext>
-            </a:extLst>
-          </p:cNvPr>
-          <p:cNvCxnSpPr>
-            <a:cxnSpLocks/>
-            <a:stCxn id="22" idx="1"/>
-          </p:cNvCxnSpPr>
-          <p:nvPr/>
-        </p:nvCxnSpPr>
-        <p:spPr>
-          <a:xfrm flipH="1">
-            <a:off x="5432702" y="3622676"/>
-            <a:ext cx="1745447" cy="432259"/>
-          </a:xfrm>
-          <a:prstGeom prst="straightConnector1">
-            <a:avLst/>
-          </a:prstGeom>
-          <a:ln w="19050">
-            <a:solidFill>
-              <a:srgbClr val="FF0000"/>
-            </a:solidFill>
-            <a:tailEnd type="triangle"/>
-          </a:ln>
-        </p:spPr>
-        <p:style>
-          <a:lnRef idx="1">
-            <a:schemeClr val="accent1"/>
-          </a:lnRef>
-          <a:fillRef idx="0">
-            <a:schemeClr val="accent1"/>
-          </a:fillRef>
-          <a:effectRef idx="0">
-            <a:schemeClr val="accent1"/>
-          </a:effectRef>
-          <a:fontRef idx="minor">
-            <a:schemeClr val="tx1"/>
-          </a:fontRef>
-        </p:style>
-      </p:cxnSp>
-      <p:cxnSp>
-        <p:nvCxnSpPr>
-          <p:cNvPr id="24" name="Connecteur droit avec flèche 23">
-            <a:extLst>
-              <a:ext uri="{FF2B5EF4-FFF2-40B4-BE49-F238E27FC236}">
-                <a16:creationId xmlns:a16="http://schemas.microsoft.com/office/drawing/2014/main" id="{D4BA0290-3B42-5101-B714-CCC5501DA260}"/>
-              </a:ext>
-            </a:extLst>
-          </p:cNvPr>
-          <p:cNvCxnSpPr>
-            <a:cxnSpLocks/>
-            <a:stCxn id="22" idx="3"/>
-          </p:cNvCxnSpPr>
-          <p:nvPr/>
-        </p:nvCxnSpPr>
-        <p:spPr>
-          <a:xfrm>
-            <a:off x="8803639" y="3622676"/>
-            <a:ext cx="543561" cy="1364324"/>
-          </a:xfrm>
-          <a:prstGeom prst="straightConnector1">
-            <a:avLst/>
-          </a:prstGeom>
-          <a:ln w="19050">
-            <a:solidFill>
-              <a:srgbClr val="FF0000"/>
-            </a:solidFill>
-            <a:tailEnd type="triangle"/>
-          </a:ln>
-        </p:spPr>
-        <p:style>
-          <a:lnRef idx="1">
-            <a:schemeClr val="accent1"/>
-          </a:lnRef>
-          <a:fillRef idx="0">
-            <a:schemeClr val="accent1"/>
-          </a:fillRef>
-          <a:effectRef idx="0">
-            <a:schemeClr val="accent1"/>
-          </a:effectRef>
-          <a:fontRef idx="minor">
-            <a:schemeClr val="tx1"/>
-          </a:fontRef>
-        </p:style>
-      </p:cxnSp>
-      <p:sp>
-        <p:nvSpPr>
-          <p:cNvPr id="27" name="Heptagone 26">
-            <a:extLst>
-              <a:ext uri="{FF2B5EF4-FFF2-40B4-BE49-F238E27FC236}">
-                <a16:creationId xmlns:a16="http://schemas.microsoft.com/office/drawing/2014/main" id="{084E0B28-8F49-0CAF-6675-BEA698A85E8D}"/>
-              </a:ext>
-            </a:extLst>
-          </p:cNvPr>
-          <p:cNvSpPr/>
-          <p:nvPr/>
-        </p:nvSpPr>
-        <p:spPr>
-          <a:xfrm>
-            <a:off x="7873074" y="4293087"/>
-            <a:ext cx="457199" cy="457292"/>
-          </a:xfrm>
-          <a:prstGeom prst="heptagon">
-            <a:avLst/>
-          </a:prstGeom>
-          <a:solidFill>
-            <a:srgbClr val="FF0000"/>
-          </a:solidFill>
-          <a:ln>
-            <a:noFill/>
-          </a:ln>
-        </p:spPr>
-        <p:style>
-          <a:lnRef idx="2">
-            <a:schemeClr val="accent1">
-              <a:shade val="15000"/>
-            </a:schemeClr>
-          </a:lnRef>
-          <a:fillRef idx="1">
-            <a:schemeClr val="accent1"/>
-          </a:fillRef>
-          <a:effectRef idx="0">
-            <a:schemeClr val="accent1"/>
-          </a:effectRef>
-          <a:fontRef idx="minor">
-            <a:schemeClr val="lt1"/>
-          </a:fontRef>
-        </p:style>
-        <p:txBody>
-          <a:bodyPr rtlCol="0" anchor="ctr"/>
-          <a:lstStyle/>
-          <a:p>
-            <a:pPr algn="ctr"/>
-            <a:r>
-              <a:rPr lang="fr-FR" sz="1200" dirty="0"/>
-              <a:t>14</a:t>
-            </a:r>
-          </a:p>
-        </p:txBody>
-      </p:sp>
-    </p:spTree>
-    <p:extLst>
-      <p:ext uri="{BB962C8B-B14F-4D97-AF65-F5344CB8AC3E}">
-        <p14:creationId xmlns:p14="http://schemas.microsoft.com/office/powerpoint/2010/main" val="1876429065"/>
-      </p:ext>
-    </p:extLst>
-  </p:cSld>
-  <p:clrMapOvr>
-    <a:masterClrMapping/>
-  </p:clrMapOvr>
-</p:sld>
-</file>
-
-<file path=ppt/slides/slide13.xml><?xml version="1.0" encoding="utf-8"?>
-<p:sld xmlns:a="http://schemas.openxmlformats.org/drawingml/2006/main" xmlns:r="http://schemas.openxmlformats.org/officeDocument/2006/relationships" xmlns:p="http://schemas.openxmlformats.org/presentationml/2006/main">
-  <p:cSld>
-    <p:spTree>
-      <p:nvGrpSpPr>
-        <p:cNvPr id="1" name=""/>
-        <p:cNvGrpSpPr/>
-        <p:nvPr/>
-      </p:nvGrpSpPr>
-      <p:grpSpPr>
-        <a:xfrm>
-          <a:off x="0" y="0"/>
-          <a:ext cx="0" cy="0"/>
-          <a:chOff x="0" y="0"/>
-          <a:chExt cx="0" cy="0"/>
-        </a:xfrm>
-      </p:grpSpPr>
-      <p:sp>
-        <p:nvSpPr>
-          <p:cNvPr id="2" name="Titre 1">
-            <a:extLst>
-              <a:ext uri="{FF2B5EF4-FFF2-40B4-BE49-F238E27FC236}">
-                <a16:creationId xmlns:a16="http://schemas.microsoft.com/office/drawing/2014/main" id="{CD4458A9-6CDC-6BF3-250C-B6E6F2946DB9}"/>
-              </a:ext>
-            </a:extLst>
-          </p:cNvPr>
-          <p:cNvSpPr>
-            <a:spLocks noGrp="1"/>
-          </p:cNvSpPr>
-          <p:nvPr>
-            <p:ph type="title"/>
-          </p:nvPr>
-        </p:nvSpPr>
-        <p:spPr/>
-        <p:txBody>
-          <a:bodyPr/>
-          <a:lstStyle/>
-          <a:p>
-            <a:r>
-              <a:rPr lang="fr-FR" dirty="0"/>
-              <a:t>6. Mise en place DBT</a:t>
-            </a:r>
-            <a:br>
-              <a:rPr lang="fr-FR" dirty="0"/>
-            </a:br>
-            <a:endParaRPr lang="fr-FR" dirty="0"/>
-          </a:p>
-        </p:txBody>
-      </p:sp>
-      <p:sp>
-        <p:nvSpPr>
-          <p:cNvPr id="3" name="Espace réservé du contenu 2">
-            <a:extLst>
-              <a:ext uri="{FF2B5EF4-FFF2-40B4-BE49-F238E27FC236}">
-                <a16:creationId xmlns:a16="http://schemas.microsoft.com/office/drawing/2014/main" id="{2CE1B120-2F32-09E5-8E07-86A7DCFCA271}"/>
-              </a:ext>
-            </a:extLst>
-          </p:cNvPr>
-          <p:cNvSpPr>
-            <a:spLocks noGrp="1"/>
-          </p:cNvSpPr>
-          <p:nvPr>
-            <p:ph idx="1"/>
-          </p:nvPr>
-        </p:nvSpPr>
-        <p:spPr/>
-        <p:txBody>
-          <a:bodyPr/>
-          <a:lstStyle/>
-          <a:p>
-            <a:r>
-              <a:rPr lang="fr-FR" dirty="0"/>
-              <a:t>Installation de DBT avec la commande </a:t>
-            </a:r>
-            <a:r>
-              <a:rPr lang="fr-FR" b="1" i="1" dirty="0" err="1"/>
-              <a:t>pip</a:t>
-            </a:r>
-            <a:r>
-              <a:rPr lang="fr-FR" b="1" i="1" dirty="0"/>
-              <a:t> </a:t>
-            </a:r>
-            <a:r>
-              <a:rPr lang="fr-FR" b="1" i="1" dirty="0" err="1"/>
-              <a:t>install</a:t>
-            </a:r>
-            <a:r>
-              <a:rPr lang="fr-FR" b="1" i="1" dirty="0"/>
-              <a:t> </a:t>
-            </a:r>
-            <a:r>
-              <a:rPr lang="fr-FR" b="1" i="1" dirty="0" err="1"/>
-              <a:t>dbt-core</a:t>
-            </a:r>
-            <a:endParaRPr lang="fr-FR" b="1" i="1" dirty="0"/>
-          </a:p>
-          <a:p>
-            <a:r>
-              <a:rPr lang="fr-FR" dirty="0"/>
-              <a:t>Installation du package pour utiliser PostgreSQL avec la commande </a:t>
-            </a:r>
-            <a:r>
-              <a:rPr lang="fr-FR" b="1" i="1" dirty="0" err="1"/>
-              <a:t>pip</a:t>
-            </a:r>
-            <a:r>
-              <a:rPr lang="fr-FR" b="1" i="1" dirty="0"/>
-              <a:t> </a:t>
-            </a:r>
-            <a:r>
-              <a:rPr lang="fr-FR" b="1" i="1" dirty="0" err="1"/>
-              <a:t>install</a:t>
-            </a:r>
-            <a:r>
-              <a:rPr lang="fr-FR" b="1" i="1" dirty="0"/>
-              <a:t> </a:t>
-            </a:r>
-            <a:r>
-              <a:rPr lang="fr-FR" b="1" i="1" dirty="0" err="1"/>
-              <a:t>dbt-postgres</a:t>
-            </a:r>
-            <a:endParaRPr lang="fr-FR" b="1" i="1" dirty="0"/>
-          </a:p>
-          <a:p>
-            <a:r>
-              <a:rPr lang="fr-FR" dirty="0"/>
-              <a:t>Initialisation du projet </a:t>
-            </a:r>
-            <a:r>
-              <a:rPr lang="fr-FR" dirty="0" err="1"/>
-              <a:t>dbt</a:t>
-            </a:r>
-            <a:r>
-              <a:rPr lang="fr-FR" dirty="0"/>
-              <a:t> avec la commande </a:t>
-            </a:r>
-            <a:r>
-              <a:rPr lang="fr-FR" b="1" i="1" dirty="0" err="1"/>
-              <a:t>dbt</a:t>
-            </a:r>
-            <a:r>
-              <a:rPr lang="fr-FR" b="1" i="1" dirty="0"/>
-              <a:t> init &lt;nom-du-projet&gt;</a:t>
-            </a:r>
-          </a:p>
-          <a:p>
-            <a:pPr lvl="1"/>
-            <a:r>
-              <a:rPr lang="fr-FR" dirty="0"/>
-              <a:t>Un dossier au nom du projet avec les éléments suivants est créé dans le répertoire où l’initialisation a été lancée:</a:t>
-            </a:r>
-          </a:p>
-          <a:p>
-            <a:pPr lvl="1"/>
-            <a:endParaRPr lang="fr-FR" dirty="0"/>
-          </a:p>
-          <a:p>
-            <a:pPr lvl="1"/>
-            <a:endParaRPr lang="fr-FR" dirty="0"/>
-          </a:p>
-          <a:p>
-            <a:pPr lvl="1"/>
-            <a:endParaRPr lang="fr-FR" dirty="0"/>
-          </a:p>
-          <a:p>
-            <a:pPr lvl="1"/>
-            <a:endParaRPr lang="fr-FR" dirty="0"/>
-          </a:p>
-          <a:p>
-            <a:pPr lvl="1"/>
-            <a:endParaRPr lang="fr-FR" dirty="0"/>
-          </a:p>
-          <a:p>
-            <a:pPr lvl="1"/>
-            <a:endParaRPr lang="fr-FR" dirty="0"/>
-          </a:p>
-          <a:p>
-            <a:pPr lvl="1"/>
-            <a:endParaRPr lang="fr-FR" dirty="0"/>
-          </a:p>
-          <a:p>
-            <a:pPr lvl="1"/>
-            <a:endParaRPr lang="fr-FR" dirty="0"/>
-          </a:p>
-          <a:p>
-            <a:pPr lvl="1"/>
-            <a:endParaRPr lang="fr-FR" dirty="0"/>
-          </a:p>
-        </p:txBody>
-      </p:sp>
-      <p:sp>
-        <p:nvSpPr>
-          <p:cNvPr id="4" name="Espace réservé de la date 3">
-            <a:extLst>
-              <a:ext uri="{FF2B5EF4-FFF2-40B4-BE49-F238E27FC236}">
-                <a16:creationId xmlns:a16="http://schemas.microsoft.com/office/drawing/2014/main" id="{24295062-DAC1-8A8F-28FC-FA10BE7B3705}"/>
-              </a:ext>
-            </a:extLst>
-          </p:cNvPr>
-          <p:cNvSpPr>
-            <a:spLocks noGrp="1"/>
-          </p:cNvSpPr>
-          <p:nvPr>
-            <p:ph type="dt" sz="half" idx="10"/>
-          </p:nvPr>
-        </p:nvSpPr>
-        <p:spPr/>
-        <p:txBody>
-          <a:bodyPr/>
-          <a:lstStyle/>
-          <a:p>
-            <a:pPr rtl="0"/>
-            <a:fld id="{22897033-9A55-4DAC-991D-1FF1921C78B7}" type="datetime1">
-              <a:rPr lang="fr-FR" smtClean="0"/>
-              <a:t>18/08/2026</a:t>
-            </a:fld>
-            <a:endParaRPr lang="en-US" dirty="0"/>
-          </a:p>
-        </p:txBody>
-      </p:sp>
-      <p:pic>
-        <p:nvPicPr>
-          <p:cNvPr id="6" name="Image 5">
-            <a:extLst>
-              <a:ext uri="{FF2B5EF4-FFF2-40B4-BE49-F238E27FC236}">
-                <a16:creationId xmlns:a16="http://schemas.microsoft.com/office/drawing/2014/main" id="{BB1E1E22-0992-2948-AD72-8B9013231058}"/>
-              </a:ext>
-            </a:extLst>
-          </p:cNvPr>
-          <p:cNvPicPr>
-            <a:picLocks noChangeAspect="1"/>
-          </p:cNvPicPr>
-          <p:nvPr/>
-        </p:nvPicPr>
-        <p:blipFill>
-          <a:blip r:embed="rId2"/>
-          <a:stretch>
-            <a:fillRect/>
-          </a:stretch>
-        </p:blipFill>
-        <p:spPr>
-          <a:xfrm>
-            <a:off x="1855908" y="3586480"/>
-            <a:ext cx="6004797" cy="3202559"/>
-          </a:xfrm>
-          <a:prstGeom prst="rect">
-            <a:avLst/>
-          </a:prstGeom>
-        </p:spPr>
-      </p:pic>
-    </p:spTree>
-    <p:extLst>
-      <p:ext uri="{BB962C8B-B14F-4D97-AF65-F5344CB8AC3E}">
-        <p14:creationId xmlns:p14="http://schemas.microsoft.com/office/powerpoint/2010/main" val="1468749072"/>
-      </p:ext>
-    </p:extLst>
-  </p:cSld>
-  <p:clrMapOvr>
-    <a:masterClrMapping/>
-  </p:clrMapOvr>
-</p:sld>
-</file>
-
-<file path=ppt/slides/slide14.xml><?xml version="1.0" encoding="utf-8"?>
-<p:sld xmlns:a="http://schemas.openxmlformats.org/drawingml/2006/main" xmlns:r="http://schemas.openxmlformats.org/officeDocument/2006/relationships" xmlns:p="http://schemas.openxmlformats.org/presentationml/2006/main">
-  <p:cSld>
-    <p:spTree>
-      <p:nvGrpSpPr>
-        <p:cNvPr id="1" name="">
-          <a:extLst>
-            <a:ext uri="{FF2B5EF4-FFF2-40B4-BE49-F238E27FC236}">
-              <a16:creationId xmlns:a16="http://schemas.microsoft.com/office/drawing/2014/main" id="{CB68F42E-A82A-9B50-24C8-E56A7D8D6E77}"/>
-            </a:ext>
-          </a:extLst>
-        </p:cNvPr>
-        <p:cNvGrpSpPr/>
-        <p:nvPr/>
-      </p:nvGrpSpPr>
-      <p:grpSpPr>
-        <a:xfrm>
-          <a:off x="0" y="0"/>
-          <a:ext cx="0" cy="0"/>
-          <a:chOff x="0" y="0"/>
-          <a:chExt cx="0" cy="0"/>
-        </a:xfrm>
-      </p:grpSpPr>
-      <p:sp>
-        <p:nvSpPr>
-          <p:cNvPr id="2" name="Titre 1">
-            <a:extLst>
-              <a:ext uri="{FF2B5EF4-FFF2-40B4-BE49-F238E27FC236}">
-                <a16:creationId xmlns:a16="http://schemas.microsoft.com/office/drawing/2014/main" id="{D30C7745-3B7B-461E-3EB8-4536C7707766}"/>
-              </a:ext>
-            </a:extLst>
-          </p:cNvPr>
-          <p:cNvSpPr>
-            <a:spLocks noGrp="1"/>
-          </p:cNvSpPr>
-          <p:nvPr>
-            <p:ph type="title"/>
-          </p:nvPr>
-        </p:nvSpPr>
-        <p:spPr/>
-        <p:txBody>
-          <a:bodyPr/>
-          <a:lstStyle/>
-          <a:p>
-            <a:r>
-              <a:rPr lang="fr-FR" dirty="0"/>
-              <a:t>6. Mise en place DBT</a:t>
-            </a:r>
-            <a:br>
-              <a:rPr lang="fr-FR" dirty="0"/>
-            </a:br>
-            <a:endParaRPr lang="fr-FR" dirty="0"/>
-          </a:p>
-        </p:txBody>
-      </p:sp>
-      <p:sp>
-        <p:nvSpPr>
-          <p:cNvPr id="3" name="Espace réservé du contenu 2">
-            <a:extLst>
-              <a:ext uri="{FF2B5EF4-FFF2-40B4-BE49-F238E27FC236}">
-                <a16:creationId xmlns:a16="http://schemas.microsoft.com/office/drawing/2014/main" id="{C6D9EE54-A442-545E-7221-CBD5A2FA82CC}"/>
-              </a:ext>
-            </a:extLst>
-          </p:cNvPr>
-          <p:cNvSpPr>
-            <a:spLocks noGrp="1"/>
-          </p:cNvSpPr>
-          <p:nvPr>
-            <p:ph idx="1"/>
-          </p:nvPr>
-        </p:nvSpPr>
-        <p:spPr/>
-        <p:txBody>
-          <a:bodyPr/>
-          <a:lstStyle/>
-          <a:p>
-            <a:r>
-              <a:rPr lang="fr-FR" dirty="0"/>
-              <a:t>La commande </a:t>
-            </a:r>
-            <a:r>
-              <a:rPr lang="fr-FR" b="1" i="1" dirty="0" err="1"/>
-              <a:t>dbt</a:t>
-            </a:r>
-            <a:r>
-              <a:rPr lang="fr-FR" b="1" i="1" dirty="0"/>
-              <a:t> </a:t>
-            </a:r>
-            <a:r>
-              <a:rPr lang="fr-FR" b="1" i="1" dirty="0" err="1"/>
-              <a:t>debug</a:t>
-            </a:r>
-            <a:r>
-              <a:rPr lang="fr-FR" b="1" i="1" dirty="0"/>
-              <a:t> </a:t>
-            </a:r>
-            <a:r>
-              <a:rPr lang="fr-FR" dirty="0"/>
-              <a:t>lancée dans le répertoire  du projet DBT permet de vérifier la connexion avec la base de données</a:t>
-            </a:r>
-          </a:p>
-          <a:p>
-            <a:pPr lvl="1"/>
-            <a:endParaRPr lang="fr-FR" dirty="0"/>
-          </a:p>
-          <a:p>
-            <a:pPr lvl="1"/>
-            <a:endParaRPr lang="fr-FR" dirty="0"/>
-          </a:p>
-          <a:p>
-            <a:pPr lvl="1"/>
-            <a:endParaRPr lang="fr-FR" dirty="0"/>
-          </a:p>
-          <a:p>
-            <a:pPr lvl="1"/>
-            <a:endParaRPr lang="fr-FR" dirty="0"/>
-          </a:p>
-          <a:p>
-            <a:pPr marL="324000" lvl="1" indent="0">
-              <a:buNone/>
-            </a:pPr>
-            <a:endParaRPr lang="fr-FR" dirty="0"/>
-          </a:p>
-          <a:p>
-            <a:pPr marL="324000" lvl="1" indent="0">
-              <a:buNone/>
-            </a:pPr>
-            <a:endParaRPr lang="fr-FR" dirty="0"/>
-          </a:p>
-          <a:p>
-            <a:pPr marL="324000" lvl="1" indent="0">
-              <a:buNone/>
-            </a:pPr>
-            <a:endParaRPr lang="fr-FR" dirty="0"/>
-          </a:p>
-          <a:p>
-            <a:pPr marL="324000" lvl="1" indent="0">
-              <a:buNone/>
-            </a:pPr>
-            <a:endParaRPr lang="fr-FR" dirty="0"/>
-          </a:p>
-          <a:p>
-            <a:pPr marL="324000" lvl="1" indent="0">
-              <a:buNone/>
-            </a:pPr>
-            <a:endParaRPr lang="fr-FR" dirty="0"/>
-          </a:p>
-          <a:p>
-            <a:pPr lvl="1"/>
-            <a:endParaRPr lang="fr-FR" dirty="0"/>
-          </a:p>
-          <a:p>
-            <a:pPr lvl="1"/>
-            <a:endParaRPr lang="fr-FR" dirty="0"/>
-          </a:p>
-          <a:p>
-            <a:pPr lvl="1"/>
-            <a:endParaRPr lang="fr-FR" dirty="0"/>
-          </a:p>
-        </p:txBody>
-      </p:sp>
-      <p:sp>
-        <p:nvSpPr>
-          <p:cNvPr id="4" name="Espace réservé de la date 3">
-            <a:extLst>
-              <a:ext uri="{FF2B5EF4-FFF2-40B4-BE49-F238E27FC236}">
-                <a16:creationId xmlns:a16="http://schemas.microsoft.com/office/drawing/2014/main" id="{B19929C9-A6D9-231F-541C-BEFDF814533E}"/>
-              </a:ext>
-            </a:extLst>
-          </p:cNvPr>
-          <p:cNvSpPr>
-            <a:spLocks noGrp="1"/>
-          </p:cNvSpPr>
-          <p:nvPr>
-            <p:ph type="dt" sz="half" idx="10"/>
-          </p:nvPr>
-        </p:nvSpPr>
-        <p:spPr/>
-        <p:txBody>
-          <a:bodyPr/>
-          <a:lstStyle/>
-          <a:p>
-            <a:pPr rtl="0"/>
-            <a:fld id="{22897033-9A55-4DAC-991D-1FF1921C78B7}" type="datetime1">
-              <a:rPr lang="fr-FR" smtClean="0"/>
-              <a:t>19/08/2026</a:t>
-            </a:fld>
-            <a:endParaRPr lang="en-US" dirty="0"/>
-          </a:p>
-        </p:txBody>
-      </p:sp>
-      <p:pic>
-        <p:nvPicPr>
-          <p:cNvPr id="7" name="Image 6">
-            <a:extLst>
-              <a:ext uri="{FF2B5EF4-FFF2-40B4-BE49-F238E27FC236}">
-                <a16:creationId xmlns:a16="http://schemas.microsoft.com/office/drawing/2014/main" id="{489F9684-C7A2-F52B-5C81-E730EAAE2AE8}"/>
-              </a:ext>
-            </a:extLst>
-          </p:cNvPr>
-          <p:cNvPicPr>
-            <a:picLocks noChangeAspect="1"/>
-          </p:cNvPicPr>
-          <p:nvPr/>
-        </p:nvPicPr>
-        <p:blipFill>
-          <a:blip r:embed="rId2"/>
-          <a:stretch>
-            <a:fillRect/>
-          </a:stretch>
-        </p:blipFill>
-        <p:spPr>
-          <a:xfrm>
-            <a:off x="1910080" y="2266285"/>
-            <a:ext cx="8168500" cy="4340191"/>
-          </a:xfrm>
-          <a:prstGeom prst="rect">
-            <a:avLst/>
-          </a:prstGeom>
-        </p:spPr>
-      </p:pic>
-    </p:spTree>
-    <p:extLst>
-      <p:ext uri="{BB962C8B-B14F-4D97-AF65-F5344CB8AC3E}">
-        <p14:creationId xmlns:p14="http://schemas.microsoft.com/office/powerpoint/2010/main" val="1053451827"/>
-      </p:ext>
-    </p:extLst>
-  </p:cSld>
-  <p:clrMapOvr>
-    <a:masterClrMapping/>
-  </p:clrMapOvr>
-</p:sld>
-</file>
-
-<file path=ppt/slides/slide15.xml><?xml version="1.0" encoding="utf-8"?>
-<p:sld xmlns:a="http://schemas.openxmlformats.org/drawingml/2006/main" xmlns:r="http://schemas.openxmlformats.org/officeDocument/2006/relationships" xmlns:p="http://schemas.openxmlformats.org/presentationml/2006/main">
-  <p:cSld>
-    <p:spTree>
-      <p:nvGrpSpPr>
-        <p:cNvPr id="1" name=""/>
-        <p:cNvGrpSpPr/>
-        <p:nvPr/>
-      </p:nvGrpSpPr>
-      <p:grpSpPr>
-        <a:xfrm>
-          <a:off x="0" y="0"/>
-          <a:ext cx="0" cy="0"/>
-          <a:chOff x="0" y="0"/>
-          <a:chExt cx="0" cy="0"/>
-        </a:xfrm>
-      </p:grpSpPr>
-      <p:sp>
-        <p:nvSpPr>
-          <p:cNvPr id="38" name="Rounded Rectangle 12">
-            <a:extLst>
-              <a:ext uri="{FF2B5EF4-FFF2-40B4-BE49-F238E27FC236}">
-                <a16:creationId xmlns:a16="http://schemas.microsoft.com/office/drawing/2014/main" id="{574AD6F7-C625-EF9D-1008-A9FFE21A8469}"/>
-              </a:ext>
-            </a:extLst>
-          </p:cNvPr>
-          <p:cNvSpPr/>
-          <p:nvPr/>
-        </p:nvSpPr>
-        <p:spPr>
-          <a:xfrm>
-            <a:off x="152400" y="1811119"/>
-            <a:ext cx="2837769" cy="2608403"/>
-          </a:xfrm>
-          <a:prstGeom prst="roundRect">
-            <a:avLst/>
-          </a:prstGeom>
-          <a:solidFill>
-            <a:srgbClr val="B3FFD5"/>
-          </a:solidFill>
-          <a:ln w="10160">
-            <a:solidFill>
-              <a:srgbClr val="B3FFD5"/>
-            </a:solidFill>
-          </a:ln>
-          <a:effectLst/>
-        </p:spPr>
-        <p:style>
-          <a:lnRef idx="1">
-            <a:schemeClr val="accent1"/>
-          </a:lnRef>
-          <a:fillRef idx="3">
-            <a:schemeClr val="accent1"/>
-          </a:fillRef>
-          <a:effectRef idx="2">
-            <a:schemeClr val="accent1"/>
-          </a:effectRef>
-          <a:fontRef idx="minor">
-            <a:schemeClr val="lt1"/>
-          </a:fontRef>
-        </p:style>
-        <p:txBody>
-          <a:bodyPr rtlCol="0" anchor="ctr"/>
-          <a:lstStyle/>
-          <a:p>
-            <a:pPr algn="ctr"/>
-            <a:endParaRPr/>
-          </a:p>
-        </p:txBody>
-      </p:sp>
-      <p:sp>
-        <p:nvSpPr>
-          <p:cNvPr id="37" name="Rounded Rectangle 12">
-            <a:extLst>
-              <a:ext uri="{FF2B5EF4-FFF2-40B4-BE49-F238E27FC236}">
-                <a16:creationId xmlns:a16="http://schemas.microsoft.com/office/drawing/2014/main" id="{A484983D-24FE-D9A7-EF44-C1617FAC4497}"/>
-              </a:ext>
-            </a:extLst>
-          </p:cNvPr>
-          <p:cNvSpPr/>
-          <p:nvPr/>
-        </p:nvSpPr>
-        <p:spPr>
-          <a:xfrm>
-            <a:off x="3220721" y="1808479"/>
-            <a:ext cx="8618686" cy="2608403"/>
-          </a:xfrm>
-          <a:prstGeom prst="roundRect">
-            <a:avLst/>
-          </a:prstGeom>
-          <a:solidFill>
-            <a:srgbClr val="B3E7FF"/>
-          </a:solidFill>
-          <a:ln w="10160">
-            <a:solidFill>
-              <a:srgbClr val="B3E7FF"/>
-            </a:solidFill>
-          </a:ln>
-          <a:effectLst/>
-        </p:spPr>
-        <p:style>
-          <a:lnRef idx="1">
-            <a:schemeClr val="accent1"/>
-          </a:lnRef>
-          <a:fillRef idx="3">
-            <a:schemeClr val="accent1"/>
-          </a:fillRef>
-          <a:effectRef idx="2">
-            <a:schemeClr val="accent1"/>
-          </a:effectRef>
-          <a:fontRef idx="minor">
-            <a:schemeClr val="lt1"/>
-          </a:fontRef>
-        </p:style>
-        <p:txBody>
-          <a:bodyPr rtlCol="0" anchor="ctr"/>
-          <a:lstStyle/>
-          <a:p>
-            <a:pPr algn="ctr"/>
-            <a:endParaRPr/>
-          </a:p>
-        </p:txBody>
-      </p:sp>
-      <p:sp>
-        <p:nvSpPr>
-          <p:cNvPr id="2" name="Titre 1">
-            <a:extLst>
-              <a:ext uri="{FF2B5EF4-FFF2-40B4-BE49-F238E27FC236}">
-                <a16:creationId xmlns:a16="http://schemas.microsoft.com/office/drawing/2014/main" id="{40E18D5B-0CFC-BAC9-70A7-01C7045F1E8B}"/>
-              </a:ext>
-            </a:extLst>
-          </p:cNvPr>
-          <p:cNvSpPr>
-            <a:spLocks noGrp="1"/>
-          </p:cNvSpPr>
-          <p:nvPr>
-            <p:ph type="title"/>
-          </p:nvPr>
-        </p:nvSpPr>
-        <p:spPr/>
-        <p:txBody>
-          <a:bodyPr/>
-          <a:lstStyle/>
-          <a:p>
-            <a:r>
-              <a:rPr lang="fr-FR" dirty="0"/>
-              <a:t>6. Mise en place DBT</a:t>
-            </a:r>
-            <a:br>
-              <a:rPr lang="fr-FR" dirty="0"/>
-            </a:br>
-            <a:endParaRPr lang="fr-FR" dirty="0"/>
-          </a:p>
-        </p:txBody>
-      </p:sp>
-      <p:sp>
-        <p:nvSpPr>
-          <p:cNvPr id="3" name="Espace réservé du contenu 2">
-            <a:extLst>
-              <a:ext uri="{FF2B5EF4-FFF2-40B4-BE49-F238E27FC236}">
-                <a16:creationId xmlns:a16="http://schemas.microsoft.com/office/drawing/2014/main" id="{5C9EBF34-39F0-3E83-002D-10290D326395}"/>
-              </a:ext>
-            </a:extLst>
-          </p:cNvPr>
-          <p:cNvSpPr>
-            <a:spLocks noGrp="1"/>
-          </p:cNvSpPr>
-          <p:nvPr>
-            <p:ph idx="1"/>
-          </p:nvPr>
-        </p:nvSpPr>
-        <p:spPr/>
-        <p:txBody>
-          <a:bodyPr>
-            <a:normAutofit fontScale="85000" lnSpcReduction="20000"/>
-          </a:bodyPr>
-          <a:lstStyle/>
-          <a:p>
-            <a:endParaRPr lang="fr-FR" dirty="0"/>
-          </a:p>
-          <a:p>
-            <a:endParaRPr lang="fr-FR" dirty="0"/>
-          </a:p>
-          <a:p>
-            <a:endParaRPr lang="fr-FR" dirty="0"/>
-          </a:p>
-          <a:p>
-            <a:endParaRPr lang="fr-FR" dirty="0"/>
-          </a:p>
-          <a:p>
-            <a:endParaRPr lang="fr-FR" dirty="0"/>
-          </a:p>
-          <a:p>
-            <a:endParaRPr lang="fr-FR" dirty="0"/>
-          </a:p>
-          <a:p>
-            <a:endParaRPr lang="fr-FR" dirty="0"/>
-          </a:p>
-          <a:p>
-            <a:endParaRPr lang="fr-FR" dirty="0"/>
-          </a:p>
-          <a:p>
-            <a:r>
-              <a:rPr lang="fr-FR" sz="1600" dirty="0"/>
-              <a:t>Chaque couche a une responsabilité et un niveau de stabilité</a:t>
-            </a:r>
-          </a:p>
-          <a:p>
-            <a:r>
-              <a:rPr lang="fr-FR" sz="1600" dirty="0"/>
-              <a:t>Lancement de la construction des vues, des tables, des tests:</a:t>
-            </a:r>
-          </a:p>
-          <a:p>
-            <a:pPr marL="0" indent="0">
-              <a:buNone/>
-            </a:pPr>
-            <a:r>
-              <a:rPr lang="fr-FR" sz="1600" dirty="0"/>
-              <a:t>Commande </a:t>
-            </a:r>
-            <a:r>
-              <a:rPr lang="fr-FR" sz="1600" b="1" i="1" dirty="0" err="1"/>
-              <a:t>dbt</a:t>
-            </a:r>
-            <a:r>
-              <a:rPr lang="fr-FR" sz="1600" b="1" i="1" dirty="0"/>
-              <a:t> </a:t>
-            </a:r>
-            <a:r>
-              <a:rPr lang="fr-FR" sz="1600" b="1" i="1" dirty="0" err="1"/>
-              <a:t>build</a:t>
-            </a:r>
-            <a:endParaRPr lang="fr-FR" sz="1600" b="1" i="1" dirty="0"/>
-          </a:p>
-          <a:p>
-            <a:endParaRPr lang="fr-FR" dirty="0"/>
-          </a:p>
-          <a:p>
-            <a:endParaRPr lang="fr-FR" dirty="0"/>
-          </a:p>
-          <a:p>
-            <a:endParaRPr lang="fr-FR" dirty="0"/>
-          </a:p>
-        </p:txBody>
-      </p:sp>
-      <p:sp>
-        <p:nvSpPr>
-          <p:cNvPr id="4" name="Espace réservé de la date 3">
-            <a:extLst>
-              <a:ext uri="{FF2B5EF4-FFF2-40B4-BE49-F238E27FC236}">
-                <a16:creationId xmlns:a16="http://schemas.microsoft.com/office/drawing/2014/main" id="{06F8D6F3-7708-CB2C-31C1-317A2C55C33C}"/>
-              </a:ext>
-            </a:extLst>
-          </p:cNvPr>
-          <p:cNvSpPr>
-            <a:spLocks noGrp="1"/>
-          </p:cNvSpPr>
-          <p:nvPr>
-            <p:ph type="dt" sz="half" idx="10"/>
-          </p:nvPr>
-        </p:nvSpPr>
-        <p:spPr/>
-        <p:txBody>
-          <a:bodyPr/>
-          <a:lstStyle/>
-          <a:p>
-            <a:pPr rtl="0"/>
-            <a:fld id="{22897033-9A55-4DAC-991D-1FF1921C78B7}" type="datetime1">
-              <a:rPr lang="fr-FR" smtClean="0"/>
-              <a:t>19/08/2026</a:t>
-            </a:fld>
-            <a:endParaRPr lang="en-US" dirty="0"/>
-          </a:p>
-        </p:txBody>
-      </p:sp>
-      <p:sp>
-        <p:nvSpPr>
-          <p:cNvPr id="5" name="Rounded Rectangle 4">
-            <a:extLst>
-              <a:ext uri="{FF2B5EF4-FFF2-40B4-BE49-F238E27FC236}">
-                <a16:creationId xmlns:a16="http://schemas.microsoft.com/office/drawing/2014/main" id="{549D6DCC-9CD4-4424-FCA7-27C94BBB9986}"/>
-              </a:ext>
-            </a:extLst>
-          </p:cNvPr>
-          <p:cNvSpPr/>
-          <p:nvPr/>
-        </p:nvSpPr>
-        <p:spPr>
-          <a:xfrm>
-            <a:off x="581192" y="1943200"/>
-            <a:ext cx="2240280" cy="2286000"/>
-          </a:xfrm>
-          <a:prstGeom prst="roundRect">
-            <a:avLst/>
-          </a:prstGeom>
-          <a:solidFill>
-            <a:srgbClr val="D9F0F0"/>
-          </a:solidFill>
-          <a:ln w="10160">
-            <a:solidFill>
-              <a:srgbClr val="D9F0F0"/>
-            </a:solidFill>
-          </a:ln>
-        </p:spPr>
-        <p:style>
-          <a:lnRef idx="1">
-            <a:schemeClr val="accent1"/>
-          </a:lnRef>
-          <a:fillRef idx="3">
-            <a:schemeClr val="accent1"/>
-          </a:fillRef>
-          <a:effectRef idx="2">
-            <a:schemeClr val="accent1"/>
-          </a:effectRef>
-          <a:fontRef idx="minor">
-            <a:schemeClr val="lt1"/>
-          </a:fontRef>
-        </p:style>
-        <p:txBody>
-          <a:bodyPr rtlCol="0" anchor="ctr"/>
-          <a:lstStyle/>
-          <a:p>
-            <a:pPr algn="ctr"/>
-            <a:endParaRPr/>
-          </a:p>
-        </p:txBody>
-      </p:sp>
-      <p:sp>
-        <p:nvSpPr>
-          <p:cNvPr id="6" name="TextBox 5">
-            <a:extLst>
-              <a:ext uri="{FF2B5EF4-FFF2-40B4-BE49-F238E27FC236}">
-                <a16:creationId xmlns:a16="http://schemas.microsoft.com/office/drawing/2014/main" id="{D1CD80EC-01AE-6A2F-4268-A4938580E11B}"/>
-              </a:ext>
-            </a:extLst>
-          </p:cNvPr>
-          <p:cNvSpPr txBox="1"/>
-          <p:nvPr/>
-        </p:nvSpPr>
-        <p:spPr>
-          <a:xfrm>
-            <a:off x="718352" y="2308960"/>
-            <a:ext cx="1965960" cy="320040"/>
-          </a:xfrm>
-          <a:prstGeom prst="rect">
-            <a:avLst/>
-          </a:prstGeom>
-          <a:noFill/>
-        </p:spPr>
-        <p:txBody>
-          <a:bodyPr wrap="square" lIns="45720" rIns="45720" anchor="t">
-            <a:spAutoFit/>
-          </a:bodyPr>
-          <a:lstStyle/>
-          <a:p>
-            <a:pPr algn="ctr">
-              <a:defRPr sz="2000" b="1">
-                <a:solidFill>
-                  <a:srgbClr val="FFFFFF"/>
-                </a:solidFill>
-                <a:latin typeface="Aptos"/>
-              </a:defRPr>
-            </a:pPr>
-            <a:r>
-              <a:rPr dirty="0"/>
-              <a:t>raw</a:t>
-            </a:r>
-          </a:p>
-        </p:txBody>
-      </p:sp>
-      <p:sp>
-        <p:nvSpPr>
-          <p:cNvPr id="7" name="TextBox 6">
-            <a:extLst>
-              <a:ext uri="{FF2B5EF4-FFF2-40B4-BE49-F238E27FC236}">
-                <a16:creationId xmlns:a16="http://schemas.microsoft.com/office/drawing/2014/main" id="{B0EFC396-2EE3-AC4D-429F-CC5768B16844}"/>
-              </a:ext>
-            </a:extLst>
-          </p:cNvPr>
-          <p:cNvSpPr txBox="1"/>
-          <p:nvPr/>
-        </p:nvSpPr>
-        <p:spPr>
-          <a:xfrm>
-            <a:off x="809792" y="2949040"/>
-            <a:ext cx="1783080" cy="731520"/>
-          </a:xfrm>
-          <a:prstGeom prst="rect">
-            <a:avLst/>
-          </a:prstGeom>
-          <a:noFill/>
-        </p:spPr>
-        <p:txBody>
-          <a:bodyPr wrap="square" lIns="45720" rIns="45720" anchor="t">
-            <a:spAutoFit/>
-          </a:bodyPr>
-          <a:lstStyle/>
-          <a:p>
-            <a:pPr algn="ctr">
-              <a:defRPr sz="1400" b="0">
-                <a:solidFill>
-                  <a:srgbClr val="FFFFFF"/>
-                </a:solidFill>
-                <a:latin typeface="Aptos"/>
-              </a:defRPr>
-            </a:pPr>
-            <a:r>
-              <a:rPr dirty="0"/>
-              <a:t>Données </a:t>
-            </a:r>
-            <a:r>
-              <a:rPr dirty="0" err="1"/>
-              <a:t>Airbyte</a:t>
-            </a:r>
-            <a:br>
-              <a:rPr dirty="0"/>
-            </a:br>
-            <a:r>
-              <a:rPr dirty="0"/>
-              <a:t>structure source</a:t>
-            </a:r>
-          </a:p>
-        </p:txBody>
-      </p:sp>
-      <p:cxnSp>
-        <p:nvCxnSpPr>
-          <p:cNvPr id="8" name="Connector 7">
-            <a:extLst>
-              <a:ext uri="{FF2B5EF4-FFF2-40B4-BE49-F238E27FC236}">
-                <a16:creationId xmlns:a16="http://schemas.microsoft.com/office/drawing/2014/main" id="{EDD86B34-0925-4B74-3420-0BE8259F8B2C}"/>
-              </a:ext>
-            </a:extLst>
-          </p:cNvPr>
-          <p:cNvCxnSpPr/>
-          <p:nvPr/>
-        </p:nvCxnSpPr>
-        <p:spPr>
-          <a:xfrm>
-            <a:off x="2848903" y="3086200"/>
-            <a:ext cx="502920" cy="0"/>
-          </a:xfrm>
-          <a:prstGeom prst="line">
-            <a:avLst/>
-          </a:prstGeom>
-          <a:ln w="25400">
-            <a:solidFill>
-              <a:srgbClr val="17BEBB"/>
-            </a:solidFill>
-          </a:ln>
-        </p:spPr>
-        <p:style>
-          <a:lnRef idx="2">
-            <a:schemeClr val="accent1"/>
-          </a:lnRef>
-          <a:fillRef idx="0">
-            <a:schemeClr val="accent1"/>
-          </a:fillRef>
-          <a:effectRef idx="1">
-            <a:schemeClr val="accent1"/>
-          </a:effectRef>
-          <a:fontRef idx="minor">
-            <a:schemeClr val="tx1"/>
-          </a:fontRef>
-        </p:style>
-      </p:cxnSp>
-      <p:sp>
-        <p:nvSpPr>
-          <p:cNvPr id="9" name="Rounded Rectangle 8">
-            <a:extLst>
-              <a:ext uri="{FF2B5EF4-FFF2-40B4-BE49-F238E27FC236}">
-                <a16:creationId xmlns:a16="http://schemas.microsoft.com/office/drawing/2014/main" id="{251CFB07-3A50-A5F7-94FD-20EB2B8C012E}"/>
-              </a:ext>
-            </a:extLst>
-          </p:cNvPr>
-          <p:cNvSpPr/>
-          <p:nvPr/>
-        </p:nvSpPr>
-        <p:spPr>
-          <a:xfrm>
-            <a:off x="3434120" y="1943200"/>
-            <a:ext cx="2240280" cy="2286000"/>
-          </a:xfrm>
-          <a:prstGeom prst="roundRect">
-            <a:avLst/>
-          </a:prstGeom>
-          <a:solidFill>
-            <a:srgbClr val="17BEBB"/>
-          </a:solidFill>
-          <a:ln w="10160">
-            <a:solidFill>
-              <a:srgbClr val="17BEBB"/>
-            </a:solidFill>
-          </a:ln>
-        </p:spPr>
-        <p:style>
-          <a:lnRef idx="1">
-            <a:schemeClr val="accent1"/>
-          </a:lnRef>
-          <a:fillRef idx="3">
-            <a:schemeClr val="accent1"/>
-          </a:fillRef>
-          <a:effectRef idx="2">
-            <a:schemeClr val="accent1"/>
-          </a:effectRef>
-          <a:fontRef idx="minor">
-            <a:schemeClr val="lt1"/>
-          </a:fontRef>
-        </p:style>
-        <p:txBody>
-          <a:bodyPr rtlCol="0" anchor="ctr"/>
-          <a:lstStyle/>
-          <a:p>
-            <a:pPr algn="ctr"/>
-            <a:endParaRPr/>
-          </a:p>
-        </p:txBody>
-      </p:sp>
-      <p:sp>
-        <p:nvSpPr>
-          <p:cNvPr id="10" name="TextBox 9">
-            <a:extLst>
-              <a:ext uri="{FF2B5EF4-FFF2-40B4-BE49-F238E27FC236}">
-                <a16:creationId xmlns:a16="http://schemas.microsoft.com/office/drawing/2014/main" id="{3EAF161F-AAE6-A448-F3EC-CCCC05C635BB}"/>
-              </a:ext>
-            </a:extLst>
-          </p:cNvPr>
-          <p:cNvSpPr txBox="1"/>
-          <p:nvPr/>
-        </p:nvSpPr>
-        <p:spPr>
-          <a:xfrm>
-            <a:off x="3571280" y="2308960"/>
-            <a:ext cx="1965960" cy="320040"/>
-          </a:xfrm>
-          <a:prstGeom prst="rect">
-            <a:avLst/>
-          </a:prstGeom>
-          <a:noFill/>
-        </p:spPr>
-        <p:txBody>
-          <a:bodyPr wrap="square" lIns="45720" rIns="45720" anchor="t">
-            <a:spAutoFit/>
-          </a:bodyPr>
-          <a:lstStyle/>
-          <a:p>
-            <a:pPr algn="ctr">
-              <a:defRPr sz="2000" b="1">
-                <a:solidFill>
-                  <a:srgbClr val="FFFFFF"/>
-                </a:solidFill>
-                <a:latin typeface="Aptos"/>
-              </a:defRPr>
-            </a:pPr>
-            <a:r>
-              <a:t>staging</a:t>
-            </a:r>
-          </a:p>
-        </p:txBody>
-      </p:sp>
-      <p:sp>
-        <p:nvSpPr>
-          <p:cNvPr id="11" name="TextBox 10">
-            <a:extLst>
-              <a:ext uri="{FF2B5EF4-FFF2-40B4-BE49-F238E27FC236}">
-                <a16:creationId xmlns:a16="http://schemas.microsoft.com/office/drawing/2014/main" id="{37E4F2E0-BE03-6CD1-3744-0B852AAB9F77}"/>
-              </a:ext>
-            </a:extLst>
-          </p:cNvPr>
-          <p:cNvSpPr txBox="1"/>
-          <p:nvPr/>
-        </p:nvSpPr>
-        <p:spPr>
-          <a:xfrm>
-            <a:off x="3662720" y="2949040"/>
-            <a:ext cx="1783080" cy="954107"/>
-          </a:xfrm>
-          <a:prstGeom prst="rect">
-            <a:avLst/>
-          </a:prstGeom>
-          <a:noFill/>
-        </p:spPr>
-        <p:txBody>
-          <a:bodyPr wrap="square" lIns="45720" rIns="45720" anchor="t">
-            <a:spAutoFit/>
-          </a:bodyPr>
-          <a:lstStyle/>
-          <a:p>
-            <a:pPr algn="ctr">
-              <a:defRPr sz="1400" b="0">
-                <a:solidFill>
-                  <a:srgbClr val="FFFFFF"/>
-                </a:solidFill>
-                <a:latin typeface="Aptos"/>
-              </a:defRPr>
-            </a:pPr>
-            <a:r>
-              <a:rPr dirty="0"/>
-              <a:t>Vues </a:t>
-            </a:r>
-            <a:r>
-              <a:rPr dirty="0" err="1"/>
-              <a:t>nettoyées</a:t>
-            </a:r>
-            <a:br>
-              <a:rPr dirty="0"/>
-            </a:br>
-            <a:r>
-              <a:rPr dirty="0" err="1"/>
-              <a:t>unités</a:t>
-            </a:r>
-            <a:r>
-              <a:rPr dirty="0"/>
-              <a:t> </a:t>
-            </a:r>
-            <a:r>
-              <a:rPr dirty="0" err="1"/>
-              <a:t>harmonisées</a:t>
-            </a:r>
-            <a:endParaRPr lang="fr-FR" dirty="0"/>
-          </a:p>
-          <a:p>
-            <a:pPr algn="ctr">
-              <a:defRPr sz="1400" b="0">
-                <a:solidFill>
-                  <a:srgbClr val="FFFFFF"/>
-                </a:solidFill>
-                <a:latin typeface="Aptos"/>
-              </a:defRPr>
-            </a:pPr>
-            <a:r>
-              <a:rPr lang="fr-FR" dirty="0"/>
-              <a:t>_</a:t>
-            </a:r>
-            <a:r>
-              <a:rPr lang="fr-FR" dirty="0" err="1"/>
-              <a:t>sources.yml</a:t>
-            </a:r>
-            <a:endParaRPr lang="fr-FR" dirty="0"/>
-          </a:p>
-          <a:p>
-            <a:pPr algn="ctr">
-              <a:defRPr sz="1400" b="0">
-                <a:solidFill>
-                  <a:srgbClr val="FFFFFF"/>
-                </a:solidFill>
-                <a:latin typeface="Aptos"/>
-              </a:defRPr>
-            </a:pPr>
-            <a:r>
-              <a:rPr lang="fr-FR" dirty="0" err="1"/>
-              <a:t>Schema.yml</a:t>
-            </a:r>
-            <a:endParaRPr dirty="0"/>
-          </a:p>
-        </p:txBody>
-      </p:sp>
-      <p:cxnSp>
-        <p:nvCxnSpPr>
-          <p:cNvPr id="12" name="Connector 11">
-            <a:extLst>
-              <a:ext uri="{FF2B5EF4-FFF2-40B4-BE49-F238E27FC236}">
-                <a16:creationId xmlns:a16="http://schemas.microsoft.com/office/drawing/2014/main" id="{345A27E2-68F2-6520-60B4-D146BF4DA25C}"/>
-              </a:ext>
-            </a:extLst>
-          </p:cNvPr>
-          <p:cNvCxnSpPr/>
-          <p:nvPr/>
-        </p:nvCxnSpPr>
-        <p:spPr>
-          <a:xfrm>
-            <a:off x="5701832" y="3086200"/>
-            <a:ext cx="502920" cy="0"/>
-          </a:xfrm>
-          <a:prstGeom prst="line">
-            <a:avLst/>
-          </a:prstGeom>
-          <a:ln w="25400">
-            <a:solidFill>
-              <a:srgbClr val="17BEBB"/>
-            </a:solidFill>
-          </a:ln>
-        </p:spPr>
-        <p:style>
-          <a:lnRef idx="2">
-            <a:schemeClr val="accent1"/>
-          </a:lnRef>
-          <a:fillRef idx="0">
-            <a:schemeClr val="accent1"/>
-          </a:fillRef>
-          <a:effectRef idx="1">
-            <a:schemeClr val="accent1"/>
-          </a:effectRef>
-          <a:fontRef idx="minor">
-            <a:schemeClr val="tx1"/>
-          </a:fontRef>
-        </p:style>
-      </p:cxnSp>
-      <p:sp>
-        <p:nvSpPr>
-          <p:cNvPr id="13" name="Rounded Rectangle 12">
-            <a:extLst>
-              <a:ext uri="{FF2B5EF4-FFF2-40B4-BE49-F238E27FC236}">
-                <a16:creationId xmlns:a16="http://schemas.microsoft.com/office/drawing/2014/main" id="{5222E88A-2D7D-164E-60D2-A7FEC5A6681B}"/>
-              </a:ext>
-            </a:extLst>
-          </p:cNvPr>
-          <p:cNvSpPr/>
-          <p:nvPr/>
-        </p:nvSpPr>
-        <p:spPr>
-          <a:xfrm>
-            <a:off x="6287048" y="1943200"/>
-            <a:ext cx="2240280" cy="2286000"/>
-          </a:xfrm>
-          <a:prstGeom prst="roundRect">
-            <a:avLst/>
-          </a:prstGeom>
-          <a:solidFill>
-            <a:srgbClr val="F2C14E"/>
-          </a:solidFill>
-          <a:ln w="10160">
-            <a:solidFill>
-              <a:srgbClr val="F2C14E"/>
-            </a:solidFill>
-          </a:ln>
-        </p:spPr>
-        <p:style>
-          <a:lnRef idx="1">
-            <a:schemeClr val="accent1"/>
-          </a:lnRef>
-          <a:fillRef idx="3">
-            <a:schemeClr val="accent1"/>
-          </a:fillRef>
-          <a:effectRef idx="2">
-            <a:schemeClr val="accent1"/>
-          </a:effectRef>
-          <a:fontRef idx="minor">
-            <a:schemeClr val="lt1"/>
-          </a:fontRef>
-        </p:style>
-        <p:txBody>
-          <a:bodyPr rtlCol="0" anchor="ctr"/>
-          <a:lstStyle/>
-          <a:p>
-            <a:pPr algn="ctr"/>
-            <a:endParaRPr/>
-          </a:p>
-        </p:txBody>
-      </p:sp>
-      <p:sp>
-        <p:nvSpPr>
-          <p:cNvPr id="14" name="TextBox 13">
-            <a:extLst>
-              <a:ext uri="{FF2B5EF4-FFF2-40B4-BE49-F238E27FC236}">
-                <a16:creationId xmlns:a16="http://schemas.microsoft.com/office/drawing/2014/main" id="{60F65322-F769-3E42-0CD0-3949E79EF930}"/>
-              </a:ext>
-            </a:extLst>
-          </p:cNvPr>
-          <p:cNvSpPr txBox="1"/>
-          <p:nvPr/>
-        </p:nvSpPr>
-        <p:spPr>
-          <a:xfrm>
-            <a:off x="6424208" y="2308960"/>
-            <a:ext cx="1965960" cy="320040"/>
-          </a:xfrm>
-          <a:prstGeom prst="rect">
-            <a:avLst/>
-          </a:prstGeom>
-          <a:noFill/>
-        </p:spPr>
-        <p:txBody>
-          <a:bodyPr wrap="square" lIns="45720" rIns="45720" anchor="t">
-            <a:spAutoFit/>
-          </a:bodyPr>
-          <a:lstStyle/>
-          <a:p>
-            <a:pPr algn="ctr">
-              <a:defRPr sz="2000" b="1">
-                <a:solidFill>
-                  <a:srgbClr val="FFFFFF"/>
-                </a:solidFill>
-                <a:latin typeface="Aptos"/>
-              </a:defRPr>
-            </a:pPr>
-            <a:r>
-              <a:t>intermediate</a:t>
-            </a:r>
-          </a:p>
-        </p:txBody>
-      </p:sp>
-      <p:sp>
-        <p:nvSpPr>
-          <p:cNvPr id="15" name="TextBox 14">
-            <a:extLst>
-              <a:ext uri="{FF2B5EF4-FFF2-40B4-BE49-F238E27FC236}">
-                <a16:creationId xmlns:a16="http://schemas.microsoft.com/office/drawing/2014/main" id="{2A6CD04B-98AD-DBBB-D293-35B99C03D4AF}"/>
-              </a:ext>
-            </a:extLst>
-          </p:cNvPr>
-          <p:cNvSpPr txBox="1"/>
-          <p:nvPr/>
-        </p:nvSpPr>
-        <p:spPr>
-          <a:xfrm>
-            <a:off x="6515648" y="2949040"/>
-            <a:ext cx="1783080" cy="731520"/>
-          </a:xfrm>
-          <a:prstGeom prst="rect">
-            <a:avLst/>
-          </a:prstGeom>
-          <a:noFill/>
-        </p:spPr>
-        <p:txBody>
-          <a:bodyPr wrap="square" lIns="45720" rIns="45720" anchor="t">
-            <a:spAutoFit/>
-          </a:bodyPr>
-          <a:lstStyle/>
-          <a:p>
-            <a:pPr algn="ctr">
-              <a:defRPr sz="1400" b="0">
-                <a:solidFill>
-                  <a:srgbClr val="FFFFFF"/>
-                </a:solidFill>
-                <a:latin typeface="Aptos"/>
-              </a:defRPr>
-            </a:pPr>
-            <a:r>
-              <a:t>Union des sources</a:t>
-            </a:r>
-            <a:br/>
-            <a:r>
-              <a:t>modèle unifié</a:t>
-            </a:r>
-          </a:p>
-        </p:txBody>
-      </p:sp>
-      <p:cxnSp>
-        <p:nvCxnSpPr>
-          <p:cNvPr id="16" name="Connector 15">
-            <a:extLst>
-              <a:ext uri="{FF2B5EF4-FFF2-40B4-BE49-F238E27FC236}">
-                <a16:creationId xmlns:a16="http://schemas.microsoft.com/office/drawing/2014/main" id="{05A85D3B-3EF2-0214-5A52-22ECF10E2E61}"/>
-              </a:ext>
-            </a:extLst>
-          </p:cNvPr>
-          <p:cNvCxnSpPr/>
-          <p:nvPr/>
-        </p:nvCxnSpPr>
-        <p:spPr>
-          <a:xfrm>
-            <a:off x="8554760" y="3086200"/>
-            <a:ext cx="502920" cy="0"/>
-          </a:xfrm>
-          <a:prstGeom prst="line">
-            <a:avLst/>
-          </a:prstGeom>
-          <a:ln w="25400">
-            <a:solidFill>
-              <a:srgbClr val="17BEBB"/>
-            </a:solidFill>
-          </a:ln>
-        </p:spPr>
-        <p:style>
-          <a:lnRef idx="2">
-            <a:schemeClr val="accent1"/>
-          </a:lnRef>
-          <a:fillRef idx="0">
-            <a:schemeClr val="accent1"/>
-          </a:fillRef>
-          <a:effectRef idx="1">
-            <a:schemeClr val="accent1"/>
-          </a:effectRef>
-          <a:fontRef idx="minor">
-            <a:schemeClr val="tx1"/>
-          </a:fontRef>
-        </p:style>
-      </p:cxnSp>
-      <p:sp>
-        <p:nvSpPr>
-          <p:cNvPr id="17" name="Rounded Rectangle 16">
-            <a:extLst>
-              <a:ext uri="{FF2B5EF4-FFF2-40B4-BE49-F238E27FC236}">
-                <a16:creationId xmlns:a16="http://schemas.microsoft.com/office/drawing/2014/main" id="{50C3BA36-4B83-22F3-3FCF-055A2CB304E2}"/>
-              </a:ext>
-            </a:extLst>
-          </p:cNvPr>
-          <p:cNvSpPr/>
-          <p:nvPr/>
-        </p:nvSpPr>
-        <p:spPr>
-          <a:xfrm>
-            <a:off x="9139975" y="1943200"/>
-            <a:ext cx="2240280" cy="2286000"/>
-          </a:xfrm>
-          <a:prstGeom prst="roundRect">
-            <a:avLst/>
-          </a:prstGeom>
-          <a:solidFill>
-            <a:srgbClr val="3AA76D"/>
-          </a:solidFill>
-          <a:ln w="10160">
-            <a:solidFill>
-              <a:srgbClr val="3AA76D"/>
-            </a:solidFill>
-          </a:ln>
-        </p:spPr>
-        <p:style>
-          <a:lnRef idx="1">
-            <a:schemeClr val="accent1"/>
-          </a:lnRef>
-          <a:fillRef idx="3">
-            <a:schemeClr val="accent1"/>
-          </a:fillRef>
-          <a:effectRef idx="2">
-            <a:schemeClr val="accent1"/>
-          </a:effectRef>
-          <a:fontRef idx="minor">
-            <a:schemeClr val="lt1"/>
-          </a:fontRef>
-        </p:style>
-        <p:txBody>
-          <a:bodyPr rtlCol="0" anchor="ctr"/>
-          <a:lstStyle/>
-          <a:p>
-            <a:pPr algn="ctr"/>
-            <a:endParaRPr/>
-          </a:p>
-        </p:txBody>
-      </p:sp>
-      <p:sp>
-        <p:nvSpPr>
-          <p:cNvPr id="18" name="TextBox 17">
-            <a:extLst>
-              <a:ext uri="{FF2B5EF4-FFF2-40B4-BE49-F238E27FC236}">
-                <a16:creationId xmlns:a16="http://schemas.microsoft.com/office/drawing/2014/main" id="{2F9147CA-C17A-9366-0CD6-12ADF1AAFB63}"/>
-              </a:ext>
-            </a:extLst>
-          </p:cNvPr>
-          <p:cNvSpPr txBox="1"/>
-          <p:nvPr/>
-        </p:nvSpPr>
-        <p:spPr>
-          <a:xfrm>
-            <a:off x="9277136" y="2308960"/>
-            <a:ext cx="1965960" cy="320040"/>
-          </a:xfrm>
-          <a:prstGeom prst="rect">
-            <a:avLst/>
-          </a:prstGeom>
-          <a:noFill/>
-        </p:spPr>
-        <p:txBody>
-          <a:bodyPr wrap="square" lIns="45720" rIns="45720" anchor="t">
-            <a:spAutoFit/>
-          </a:bodyPr>
-          <a:lstStyle/>
-          <a:p>
-            <a:pPr algn="ctr">
-              <a:defRPr sz="2000" b="1">
-                <a:solidFill>
-                  <a:srgbClr val="FFFFFF"/>
-                </a:solidFill>
-                <a:latin typeface="Aptos"/>
-              </a:defRPr>
-            </a:pPr>
-            <a:r>
-              <a:rPr dirty="0"/>
-              <a:t>marts</a:t>
-            </a:r>
-          </a:p>
-        </p:txBody>
-      </p:sp>
-      <p:sp>
-        <p:nvSpPr>
-          <p:cNvPr id="19" name="TextBox 18">
-            <a:extLst>
-              <a:ext uri="{FF2B5EF4-FFF2-40B4-BE49-F238E27FC236}">
-                <a16:creationId xmlns:a16="http://schemas.microsoft.com/office/drawing/2014/main" id="{82198C45-15C1-3AA2-1763-1D39760BBE64}"/>
-              </a:ext>
-            </a:extLst>
-          </p:cNvPr>
-          <p:cNvSpPr txBox="1"/>
-          <p:nvPr/>
-        </p:nvSpPr>
-        <p:spPr>
-          <a:xfrm>
-            <a:off x="9368575" y="2949040"/>
-            <a:ext cx="1783080" cy="731520"/>
-          </a:xfrm>
-          <a:prstGeom prst="rect">
-            <a:avLst/>
-          </a:prstGeom>
-          <a:noFill/>
-        </p:spPr>
-        <p:txBody>
-          <a:bodyPr wrap="square" lIns="45720" rIns="45720" anchor="t">
-            <a:spAutoFit/>
-          </a:bodyPr>
-          <a:lstStyle/>
-          <a:p>
-            <a:pPr algn="ctr">
-              <a:defRPr sz="1400" b="0">
-                <a:solidFill>
-                  <a:srgbClr val="FFFFFF"/>
-                </a:solidFill>
-                <a:latin typeface="Aptos"/>
-              </a:defRPr>
-            </a:pPr>
-            <a:r>
-              <a:rPr dirty="0"/>
-              <a:t>Tables métier</a:t>
-            </a:r>
-            <a:br>
-              <a:rPr dirty="0"/>
-            </a:br>
-            <a:r>
-              <a:rPr dirty="0"/>
-              <a:t>fact + dim</a:t>
-            </a:r>
-          </a:p>
-        </p:txBody>
-      </p:sp>
-      <p:sp>
-        <p:nvSpPr>
-          <p:cNvPr id="21" name="Rounded Rectangle 16">
-            <a:extLst>
-              <a:ext uri="{FF2B5EF4-FFF2-40B4-BE49-F238E27FC236}">
-                <a16:creationId xmlns:a16="http://schemas.microsoft.com/office/drawing/2014/main" id="{182F2DAF-C4DF-34ED-C6C7-A23BDDAD5916}"/>
-              </a:ext>
-            </a:extLst>
-          </p:cNvPr>
-          <p:cNvSpPr/>
-          <p:nvPr/>
-        </p:nvSpPr>
-        <p:spPr>
-          <a:xfrm>
-            <a:off x="9143571" y="4507230"/>
-            <a:ext cx="2240280" cy="2286000"/>
-          </a:xfrm>
-          <a:prstGeom prst="roundRect">
-            <a:avLst/>
-          </a:prstGeom>
-          <a:solidFill>
-            <a:srgbClr val="F15333"/>
-          </a:solidFill>
-          <a:ln w="10160">
-            <a:solidFill>
-              <a:srgbClr val="F15333"/>
-            </a:solidFill>
-          </a:ln>
-        </p:spPr>
-        <p:style>
-          <a:lnRef idx="1">
-            <a:schemeClr val="accent1"/>
-          </a:lnRef>
-          <a:fillRef idx="3">
-            <a:schemeClr val="accent1"/>
-          </a:fillRef>
-          <a:effectRef idx="2">
-            <a:schemeClr val="accent1"/>
-          </a:effectRef>
-          <a:fontRef idx="minor">
-            <a:schemeClr val="lt1"/>
-          </a:fontRef>
-        </p:style>
-        <p:txBody>
-          <a:bodyPr rtlCol="0" anchor="ctr"/>
-          <a:lstStyle/>
-          <a:p>
-            <a:pPr algn="ctr"/>
-            <a:endParaRPr/>
-          </a:p>
-        </p:txBody>
-      </p:sp>
-      <p:sp>
-        <p:nvSpPr>
-          <p:cNvPr id="22" name="TextBox 17">
-            <a:extLst>
-              <a:ext uri="{FF2B5EF4-FFF2-40B4-BE49-F238E27FC236}">
-                <a16:creationId xmlns:a16="http://schemas.microsoft.com/office/drawing/2014/main" id="{0474E1C8-B6C2-5891-AA93-49DDED442BA7}"/>
-              </a:ext>
-            </a:extLst>
-          </p:cNvPr>
-          <p:cNvSpPr txBox="1"/>
-          <p:nvPr/>
-        </p:nvSpPr>
-        <p:spPr>
-          <a:xfrm>
-            <a:off x="9277136" y="4959019"/>
-            <a:ext cx="1965960" cy="400110"/>
-          </a:xfrm>
-          <a:prstGeom prst="rect">
-            <a:avLst/>
-          </a:prstGeom>
-          <a:noFill/>
-        </p:spPr>
-        <p:txBody>
-          <a:bodyPr wrap="square" lIns="45720" rIns="45720" anchor="t">
-            <a:spAutoFit/>
-          </a:bodyPr>
-          <a:lstStyle/>
-          <a:p>
-            <a:pPr algn="ctr">
-              <a:defRPr sz="2000" b="1">
-                <a:solidFill>
-                  <a:srgbClr val="FFFFFF"/>
-                </a:solidFill>
-                <a:latin typeface="Aptos"/>
-              </a:defRPr>
-            </a:pPr>
-            <a:r>
-              <a:rPr lang="fr-FR" dirty="0" err="1"/>
-              <a:t>seed</a:t>
-            </a:r>
-            <a:endParaRPr dirty="0"/>
-          </a:p>
-        </p:txBody>
-      </p:sp>
-      <p:sp>
-        <p:nvSpPr>
-          <p:cNvPr id="23" name="TextBox 18">
-            <a:extLst>
-              <a:ext uri="{FF2B5EF4-FFF2-40B4-BE49-F238E27FC236}">
-                <a16:creationId xmlns:a16="http://schemas.microsoft.com/office/drawing/2014/main" id="{5DC7A689-2494-F8E1-2230-25B8260FF817}"/>
-              </a:ext>
-            </a:extLst>
-          </p:cNvPr>
-          <p:cNvSpPr txBox="1"/>
-          <p:nvPr/>
-        </p:nvSpPr>
-        <p:spPr>
-          <a:xfrm>
-            <a:off x="9368575" y="5599099"/>
-            <a:ext cx="1783080" cy="738664"/>
-          </a:xfrm>
-          <a:prstGeom prst="rect">
-            <a:avLst/>
-          </a:prstGeom>
-          <a:noFill/>
-        </p:spPr>
-        <p:txBody>
-          <a:bodyPr wrap="square" lIns="45720" rIns="45720" anchor="t">
-            <a:spAutoFit/>
-          </a:bodyPr>
-          <a:lstStyle/>
-          <a:p>
-            <a:pPr algn="ctr">
-              <a:defRPr sz="1400" b="0">
-                <a:solidFill>
-                  <a:srgbClr val="FFFFFF"/>
-                </a:solidFill>
-                <a:latin typeface="Aptos"/>
-              </a:defRPr>
-            </a:pPr>
-            <a:r>
-              <a:rPr lang="fr-FR" dirty="0"/>
-              <a:t>Métadonnées stations</a:t>
-            </a:r>
-          </a:p>
-          <a:p>
-            <a:pPr algn="ctr">
-              <a:defRPr sz="1400" b="0">
-                <a:solidFill>
-                  <a:srgbClr val="FFFFFF"/>
-                </a:solidFill>
-                <a:latin typeface="Aptos"/>
-              </a:defRPr>
-            </a:pPr>
-            <a:r>
-              <a:rPr lang="fr-FR" dirty="0"/>
-              <a:t>Heures</a:t>
-            </a:r>
-            <a:endParaRPr dirty="0"/>
-          </a:p>
-        </p:txBody>
-      </p:sp>
-      <p:cxnSp>
-        <p:nvCxnSpPr>
-          <p:cNvPr id="24" name="Connector 15">
-            <a:extLst>
-              <a:ext uri="{FF2B5EF4-FFF2-40B4-BE49-F238E27FC236}">
-                <a16:creationId xmlns:a16="http://schemas.microsoft.com/office/drawing/2014/main" id="{20D3E8B6-02D9-DAAA-C608-3078B9521A3C}"/>
-              </a:ext>
-            </a:extLst>
-          </p:cNvPr>
-          <p:cNvCxnSpPr>
-            <a:cxnSpLocks/>
-            <a:stCxn id="17" idx="2"/>
-            <a:endCxn id="21" idx="0"/>
-          </p:cNvCxnSpPr>
-          <p:nvPr/>
-        </p:nvCxnSpPr>
-        <p:spPr>
-          <a:xfrm>
-            <a:off x="10260115" y="4229200"/>
-            <a:ext cx="3596" cy="278030"/>
-          </a:xfrm>
-          <a:prstGeom prst="line">
-            <a:avLst/>
-          </a:prstGeom>
-          <a:ln w="25400">
-            <a:solidFill>
-              <a:srgbClr val="17BEBB"/>
-            </a:solidFill>
-          </a:ln>
-        </p:spPr>
-        <p:style>
-          <a:lnRef idx="2">
-            <a:schemeClr val="accent1"/>
-          </a:lnRef>
-          <a:fillRef idx="0">
-            <a:schemeClr val="accent1"/>
-          </a:fillRef>
-          <a:effectRef idx="1">
-            <a:schemeClr val="accent1"/>
-          </a:effectRef>
-          <a:fontRef idx="minor">
-            <a:schemeClr val="tx1"/>
-          </a:fontRef>
-        </p:style>
-      </p:cxnSp>
-      <p:sp>
-        <p:nvSpPr>
-          <p:cNvPr id="28" name="Rounded Rectangle 16">
-            <a:extLst>
-              <a:ext uri="{FF2B5EF4-FFF2-40B4-BE49-F238E27FC236}">
-                <a16:creationId xmlns:a16="http://schemas.microsoft.com/office/drawing/2014/main" id="{B38D0D20-8EBF-B571-C088-27ED944D6123}"/>
-              </a:ext>
-            </a:extLst>
-          </p:cNvPr>
-          <p:cNvSpPr/>
-          <p:nvPr/>
-        </p:nvSpPr>
-        <p:spPr>
-          <a:xfrm>
-            <a:off x="6323386" y="4503039"/>
-            <a:ext cx="2240280" cy="2286000"/>
-          </a:xfrm>
-          <a:prstGeom prst="roundRect">
-            <a:avLst/>
-          </a:prstGeom>
-          <a:solidFill>
-            <a:srgbClr val="F6A2F8"/>
-          </a:solidFill>
-          <a:ln w="10160">
-            <a:solidFill>
-              <a:srgbClr val="F6A2F8"/>
-            </a:solidFill>
-          </a:ln>
-        </p:spPr>
-        <p:style>
-          <a:lnRef idx="1">
-            <a:schemeClr val="accent1"/>
-          </a:lnRef>
-          <a:fillRef idx="3">
-            <a:schemeClr val="accent1"/>
-          </a:fillRef>
-          <a:effectRef idx="2">
-            <a:schemeClr val="accent1"/>
-          </a:effectRef>
-          <a:fontRef idx="minor">
-            <a:schemeClr val="lt1"/>
-          </a:fontRef>
-        </p:style>
-        <p:txBody>
-          <a:bodyPr rtlCol="0" anchor="ctr"/>
-          <a:lstStyle/>
-          <a:p>
-            <a:pPr algn="ctr"/>
-            <a:endParaRPr/>
-          </a:p>
-        </p:txBody>
-      </p:sp>
-      <p:sp>
-        <p:nvSpPr>
-          <p:cNvPr id="29" name="TextBox 17">
-            <a:extLst>
-              <a:ext uri="{FF2B5EF4-FFF2-40B4-BE49-F238E27FC236}">
-                <a16:creationId xmlns:a16="http://schemas.microsoft.com/office/drawing/2014/main" id="{102671C6-8BCD-7A94-517E-BB48363511A1}"/>
-              </a:ext>
-            </a:extLst>
-          </p:cNvPr>
-          <p:cNvSpPr txBox="1"/>
-          <p:nvPr/>
-        </p:nvSpPr>
-        <p:spPr>
-          <a:xfrm>
-            <a:off x="6456951" y="4954828"/>
-            <a:ext cx="1965960" cy="400110"/>
-          </a:xfrm>
-          <a:prstGeom prst="rect">
-            <a:avLst/>
-          </a:prstGeom>
-          <a:noFill/>
-        </p:spPr>
-        <p:txBody>
-          <a:bodyPr wrap="square" lIns="45720" rIns="45720" anchor="t">
-            <a:spAutoFit/>
-          </a:bodyPr>
-          <a:lstStyle/>
-          <a:p>
-            <a:pPr algn="ctr">
-              <a:defRPr sz="2000" b="1">
-                <a:solidFill>
-                  <a:srgbClr val="FFFFFF"/>
-                </a:solidFill>
-                <a:latin typeface="Aptos"/>
-              </a:defRPr>
-            </a:pPr>
-            <a:r>
-              <a:rPr lang="fr-FR" dirty="0"/>
-              <a:t>test</a:t>
-            </a:r>
-            <a:endParaRPr dirty="0"/>
-          </a:p>
-        </p:txBody>
-      </p:sp>
-      <p:sp>
-        <p:nvSpPr>
-          <p:cNvPr id="30" name="TextBox 18">
-            <a:extLst>
-              <a:ext uri="{FF2B5EF4-FFF2-40B4-BE49-F238E27FC236}">
-                <a16:creationId xmlns:a16="http://schemas.microsoft.com/office/drawing/2014/main" id="{0A0E9574-2131-20F8-6B7C-1D58CBDC9673}"/>
-              </a:ext>
-            </a:extLst>
-          </p:cNvPr>
-          <p:cNvSpPr txBox="1"/>
-          <p:nvPr/>
-        </p:nvSpPr>
-        <p:spPr>
-          <a:xfrm>
-            <a:off x="6548390" y="5594908"/>
-            <a:ext cx="1783080" cy="1169551"/>
-          </a:xfrm>
-          <a:prstGeom prst="rect">
-            <a:avLst/>
-          </a:prstGeom>
-          <a:noFill/>
-        </p:spPr>
-        <p:txBody>
-          <a:bodyPr wrap="square" lIns="45720" rIns="45720" anchor="t">
-            <a:spAutoFit/>
-          </a:bodyPr>
-          <a:lstStyle/>
-          <a:p>
-            <a:pPr algn="ctr">
-              <a:defRPr sz="1400" b="0">
-                <a:solidFill>
-                  <a:srgbClr val="FFFFFF"/>
-                </a:solidFill>
-                <a:latin typeface="Aptos"/>
-              </a:defRPr>
-            </a:pPr>
-            <a:r>
-              <a:rPr lang="fr-FR" dirty="0"/>
-              <a:t>Test spécifiques</a:t>
-            </a:r>
-          </a:p>
-          <a:p>
-            <a:pPr algn="ctr">
-              <a:defRPr sz="1400" b="0">
-                <a:solidFill>
-                  <a:srgbClr val="FFFFFF"/>
-                </a:solidFill>
-                <a:latin typeface="Aptos"/>
-              </a:defRPr>
-            </a:pPr>
-            <a:r>
-              <a:rPr lang="fr-FR" dirty="0"/>
-              <a:t>Température</a:t>
-            </a:r>
-          </a:p>
-          <a:p>
-            <a:pPr algn="ctr">
-              <a:defRPr sz="1400" b="0">
-                <a:solidFill>
-                  <a:srgbClr val="FFFFFF"/>
-                </a:solidFill>
-                <a:latin typeface="Aptos"/>
-              </a:defRPr>
-            </a:pPr>
-            <a:r>
-              <a:rPr lang="fr-FR" dirty="0" err="1"/>
-              <a:t>Wind_direction</a:t>
-            </a:r>
-            <a:endParaRPr lang="fr-FR" dirty="0"/>
-          </a:p>
-          <a:p>
-            <a:pPr algn="ctr">
-              <a:defRPr sz="1400" b="0">
-                <a:solidFill>
-                  <a:srgbClr val="FFFFFF"/>
-                </a:solidFill>
-                <a:latin typeface="Aptos"/>
-              </a:defRPr>
-            </a:pPr>
-            <a:r>
-              <a:rPr lang="fr-FR" dirty="0"/>
-              <a:t>speed </a:t>
-            </a:r>
-          </a:p>
-          <a:p>
-            <a:pPr algn="ctr">
-              <a:defRPr sz="1400" b="0">
-                <a:solidFill>
-                  <a:srgbClr val="FFFFFF"/>
-                </a:solidFill>
-                <a:latin typeface="Aptos"/>
-              </a:defRPr>
-            </a:pPr>
-            <a:r>
-              <a:rPr lang="fr-FR" dirty="0" err="1"/>
-              <a:t>humidity</a:t>
-            </a:r>
-            <a:endParaRPr dirty="0"/>
-          </a:p>
-        </p:txBody>
-      </p:sp>
-      <p:cxnSp>
-        <p:nvCxnSpPr>
-          <p:cNvPr id="31" name="Connector 15">
-            <a:extLst>
-              <a:ext uri="{FF2B5EF4-FFF2-40B4-BE49-F238E27FC236}">
-                <a16:creationId xmlns:a16="http://schemas.microsoft.com/office/drawing/2014/main" id="{5A7E3BE7-87B3-E40E-C575-EC9967702DCF}"/>
-              </a:ext>
-            </a:extLst>
-          </p:cNvPr>
-          <p:cNvCxnSpPr>
-            <a:cxnSpLocks/>
-          </p:cNvCxnSpPr>
-          <p:nvPr/>
-        </p:nvCxnSpPr>
-        <p:spPr>
-          <a:xfrm flipV="1">
-            <a:off x="8527328" y="4114800"/>
-            <a:ext cx="749808" cy="508000"/>
-          </a:xfrm>
-          <a:prstGeom prst="line">
-            <a:avLst/>
-          </a:prstGeom>
-          <a:ln w="25400">
-            <a:solidFill>
-              <a:srgbClr val="17BEBB"/>
-            </a:solidFill>
-          </a:ln>
-        </p:spPr>
-        <p:style>
-          <a:lnRef idx="2">
-            <a:schemeClr val="accent1"/>
-          </a:lnRef>
-          <a:fillRef idx="0">
-            <a:schemeClr val="accent1"/>
-          </a:fillRef>
-          <a:effectRef idx="1">
-            <a:schemeClr val="accent1"/>
-          </a:effectRef>
-          <a:fontRef idx="minor">
-            <a:schemeClr val="tx1"/>
-          </a:fontRef>
-        </p:style>
-      </p:cxnSp>
-      <p:sp>
-        <p:nvSpPr>
-          <p:cNvPr id="39" name="TextBox 5">
-            <a:extLst>
-              <a:ext uri="{FF2B5EF4-FFF2-40B4-BE49-F238E27FC236}">
-                <a16:creationId xmlns:a16="http://schemas.microsoft.com/office/drawing/2014/main" id="{61C7C67E-E175-0313-FD12-0B5BE1C58F04}"/>
-              </a:ext>
-            </a:extLst>
-          </p:cNvPr>
-          <p:cNvSpPr txBox="1"/>
-          <p:nvPr/>
-        </p:nvSpPr>
-        <p:spPr>
-          <a:xfrm rot="16200000">
-            <a:off x="-624256" y="2958792"/>
-            <a:ext cx="1965960" cy="307777"/>
-          </a:xfrm>
-          <a:prstGeom prst="rect">
-            <a:avLst/>
-          </a:prstGeom>
-          <a:noFill/>
-        </p:spPr>
-        <p:txBody>
-          <a:bodyPr wrap="square" lIns="45720" rIns="45720" anchor="t">
-            <a:spAutoFit/>
-          </a:bodyPr>
-          <a:lstStyle/>
-          <a:p>
-            <a:pPr algn="ctr">
-              <a:defRPr sz="2000" b="1">
-                <a:solidFill>
-                  <a:srgbClr val="FFFFFF"/>
-                </a:solidFill>
-                <a:latin typeface="Aptos"/>
-              </a:defRPr>
-            </a:pPr>
-            <a:r>
-              <a:rPr lang="fr-FR" sz="1400" dirty="0">
-                <a:solidFill>
-                  <a:schemeClr val="tx2"/>
-                </a:solidFill>
-              </a:rPr>
-              <a:t>Schéma </a:t>
-            </a:r>
-            <a:r>
-              <a:rPr sz="1400" dirty="0">
-                <a:solidFill>
-                  <a:schemeClr val="tx2"/>
-                </a:solidFill>
-              </a:rPr>
-              <a:t>raw</a:t>
-            </a:r>
-          </a:p>
-        </p:txBody>
-      </p:sp>
-      <p:sp>
-        <p:nvSpPr>
-          <p:cNvPr id="40" name="TextBox 5">
-            <a:extLst>
-              <a:ext uri="{FF2B5EF4-FFF2-40B4-BE49-F238E27FC236}">
-                <a16:creationId xmlns:a16="http://schemas.microsoft.com/office/drawing/2014/main" id="{B1BF2552-1547-288C-3353-FC0E5E05076F}"/>
-              </a:ext>
-            </a:extLst>
-          </p:cNvPr>
-          <p:cNvSpPr txBox="1"/>
-          <p:nvPr/>
-        </p:nvSpPr>
-        <p:spPr>
-          <a:xfrm rot="16200000">
-            <a:off x="10645098" y="2977931"/>
-            <a:ext cx="1965960" cy="307777"/>
-          </a:xfrm>
-          <a:prstGeom prst="rect">
-            <a:avLst/>
-          </a:prstGeom>
-          <a:noFill/>
-        </p:spPr>
-        <p:txBody>
-          <a:bodyPr wrap="square" lIns="45720" rIns="45720" anchor="t">
-            <a:spAutoFit/>
-          </a:bodyPr>
-          <a:lstStyle/>
-          <a:p>
-            <a:pPr algn="ctr">
-              <a:defRPr sz="2000" b="1">
-                <a:solidFill>
-                  <a:srgbClr val="FFFFFF"/>
-                </a:solidFill>
-                <a:latin typeface="Aptos"/>
-              </a:defRPr>
-            </a:pPr>
-            <a:r>
-              <a:rPr lang="fr-FR" sz="1400" dirty="0">
-                <a:solidFill>
-                  <a:schemeClr val="tx2"/>
-                </a:solidFill>
-              </a:rPr>
-              <a:t>Schéma </a:t>
-            </a:r>
-            <a:r>
-              <a:rPr lang="fr-FR" sz="1400" dirty="0" err="1">
-                <a:solidFill>
-                  <a:schemeClr val="tx2"/>
-                </a:solidFill>
-              </a:rPr>
-              <a:t>analytics</a:t>
-            </a:r>
-            <a:endParaRPr sz="1400" dirty="0">
-              <a:solidFill>
-                <a:schemeClr val="tx2"/>
-              </a:solidFill>
-            </a:endParaRPr>
-          </a:p>
-        </p:txBody>
-      </p:sp>
-    </p:spTree>
-    <p:extLst>
-      <p:ext uri="{BB962C8B-B14F-4D97-AF65-F5344CB8AC3E}">
-        <p14:creationId xmlns:p14="http://schemas.microsoft.com/office/powerpoint/2010/main" val="1023096126"/>
-      </p:ext>
-    </p:extLst>
-  </p:cSld>
-  <p:clrMapOvr>
-    <a:masterClrMapping/>
-  </p:clrMapOvr>
-</p:sld>
-</file>
-
-<file path=ppt/slides/slide16.xml><?xml version="1.0" encoding="utf-8"?>
-<p:sld xmlns:a="http://schemas.openxmlformats.org/drawingml/2006/main" xmlns:r="http://schemas.openxmlformats.org/officeDocument/2006/relationships" xmlns:p="http://schemas.openxmlformats.org/presentationml/2006/main">
-  <p:cSld>
-    <p:spTree>
-      <p:nvGrpSpPr>
-        <p:cNvPr id="1" name=""/>
-        <p:cNvGrpSpPr/>
-        <p:nvPr/>
-      </p:nvGrpSpPr>
-      <p:grpSpPr>
-        <a:xfrm>
-          <a:off x="0" y="0"/>
-          <a:ext cx="0" cy="0"/>
-          <a:chOff x="0" y="0"/>
-          <a:chExt cx="0" cy="0"/>
-        </a:xfrm>
-      </p:grpSpPr>
-      <p:sp>
-        <p:nvSpPr>
-          <p:cNvPr id="2" name="Titre 1">
-            <a:extLst>
-              <a:ext uri="{FF2B5EF4-FFF2-40B4-BE49-F238E27FC236}">
-                <a16:creationId xmlns:a16="http://schemas.microsoft.com/office/drawing/2014/main" id="{E11D0E35-BCDC-830F-709A-ED57F55712AF}"/>
-              </a:ext>
-            </a:extLst>
-          </p:cNvPr>
-          <p:cNvSpPr>
-            <a:spLocks noGrp="1"/>
-          </p:cNvSpPr>
-          <p:nvPr>
-            <p:ph type="title"/>
-          </p:nvPr>
-        </p:nvSpPr>
-        <p:spPr/>
-        <p:txBody>
-          <a:bodyPr/>
-          <a:lstStyle/>
-          <a:p>
-            <a:r>
-              <a:rPr lang="fr-FR" dirty="0"/>
-              <a:t>6. Mise en place DBT</a:t>
-            </a:r>
-            <a:br>
-              <a:rPr lang="fr-FR" dirty="0"/>
-            </a:br>
-            <a:endParaRPr lang="fr-FR" dirty="0"/>
-          </a:p>
-        </p:txBody>
-      </p:sp>
-      <p:sp>
-        <p:nvSpPr>
-          <p:cNvPr id="3" name="Espace réservé du contenu 2">
-            <a:extLst>
-              <a:ext uri="{FF2B5EF4-FFF2-40B4-BE49-F238E27FC236}">
-                <a16:creationId xmlns:a16="http://schemas.microsoft.com/office/drawing/2014/main" id="{1739F617-04B0-E842-D52E-D555EE905E65}"/>
-              </a:ext>
-            </a:extLst>
-          </p:cNvPr>
-          <p:cNvSpPr>
-            <a:spLocks noGrp="1"/>
-          </p:cNvSpPr>
-          <p:nvPr>
-            <p:ph idx="1"/>
-          </p:nvPr>
-        </p:nvSpPr>
-        <p:spPr/>
-        <p:txBody>
-          <a:bodyPr/>
-          <a:lstStyle/>
-          <a:p>
-            <a:r>
-              <a:rPr lang="fr-FR" dirty="0"/>
-              <a:t>Commande </a:t>
-            </a:r>
-            <a:r>
-              <a:rPr lang="fr-FR" b="1" i="1" dirty="0" err="1"/>
-              <a:t>dbt</a:t>
-            </a:r>
-            <a:r>
-              <a:rPr lang="fr-FR" b="1" i="1" dirty="0"/>
-              <a:t> docs serve</a:t>
-            </a:r>
-          </a:p>
-          <a:p>
-            <a:endParaRPr lang="fr-FR" dirty="0"/>
-          </a:p>
-          <a:p>
-            <a:endParaRPr lang="fr-FR" dirty="0"/>
-          </a:p>
-          <a:p>
-            <a:endParaRPr lang="fr-FR" dirty="0"/>
-          </a:p>
-          <a:p>
-            <a:endParaRPr lang="fr-FR" dirty="0"/>
-          </a:p>
-          <a:p>
-            <a:endParaRPr lang="fr-FR" dirty="0"/>
-          </a:p>
-          <a:p>
-            <a:endParaRPr lang="fr-FR" dirty="0"/>
-          </a:p>
-          <a:p>
-            <a:endParaRPr lang="fr-FR" dirty="0"/>
-          </a:p>
-          <a:p>
-            <a:endParaRPr lang="fr-FR" dirty="0"/>
-          </a:p>
-        </p:txBody>
-      </p:sp>
-      <p:sp>
-        <p:nvSpPr>
-          <p:cNvPr id="4" name="Espace réservé de la date 3">
-            <a:extLst>
-              <a:ext uri="{FF2B5EF4-FFF2-40B4-BE49-F238E27FC236}">
-                <a16:creationId xmlns:a16="http://schemas.microsoft.com/office/drawing/2014/main" id="{849DF038-2956-38BA-1941-E4BB571C463B}"/>
-              </a:ext>
-            </a:extLst>
-          </p:cNvPr>
-          <p:cNvSpPr>
-            <a:spLocks noGrp="1"/>
-          </p:cNvSpPr>
-          <p:nvPr>
-            <p:ph type="dt" sz="half" idx="10"/>
-          </p:nvPr>
-        </p:nvSpPr>
-        <p:spPr/>
-        <p:txBody>
-          <a:bodyPr/>
-          <a:lstStyle/>
-          <a:p>
-            <a:pPr rtl="0"/>
-            <a:fld id="{22897033-9A55-4DAC-991D-1FF1921C78B7}" type="datetime1">
-              <a:rPr lang="fr-FR" smtClean="0"/>
-              <a:t>19/08/2026</a:t>
-            </a:fld>
-            <a:endParaRPr lang="en-US" dirty="0"/>
-          </a:p>
-        </p:txBody>
-      </p:sp>
-      <p:pic>
-        <p:nvPicPr>
-          <p:cNvPr id="6" name="Image 5">
-            <a:extLst>
-              <a:ext uri="{FF2B5EF4-FFF2-40B4-BE49-F238E27FC236}">
-                <a16:creationId xmlns:a16="http://schemas.microsoft.com/office/drawing/2014/main" id="{E78C1690-CD47-612A-6BFD-45422F02F519}"/>
-              </a:ext>
-            </a:extLst>
-          </p:cNvPr>
-          <p:cNvPicPr>
-            <a:picLocks noChangeAspect="1"/>
-          </p:cNvPicPr>
-          <p:nvPr/>
-        </p:nvPicPr>
-        <p:blipFill>
-          <a:blip r:embed="rId2"/>
-          <a:stretch>
-            <a:fillRect/>
-          </a:stretch>
-        </p:blipFill>
-        <p:spPr>
-          <a:xfrm>
-            <a:off x="0" y="2926219"/>
-            <a:ext cx="12192000" cy="3229625"/>
-          </a:xfrm>
-          <a:prstGeom prst="rect">
-            <a:avLst/>
-          </a:prstGeom>
-        </p:spPr>
-      </p:pic>
-    </p:spTree>
-    <p:extLst>
-      <p:ext uri="{BB962C8B-B14F-4D97-AF65-F5344CB8AC3E}">
-        <p14:creationId xmlns:p14="http://schemas.microsoft.com/office/powerpoint/2010/main" val="318623322"/>
-      </p:ext>
-    </p:extLst>
-  </p:cSld>
-  <p:clrMapOvr>
-    <a:masterClrMapping/>
-  </p:clrMapOvr>
-</p:sld>
-</file>
-
-<file path=ppt/slides/slide17.xml><?xml version="1.0" encoding="utf-8"?>
-<p:sld xmlns:a="http://schemas.openxmlformats.org/drawingml/2006/main" xmlns:r="http://schemas.openxmlformats.org/officeDocument/2006/relationships" xmlns:p="http://schemas.openxmlformats.org/presentationml/2006/main">
-  <p:cSld>
-    <p:spTree>
-      <p:nvGrpSpPr>
-        <p:cNvPr id="1" name=""/>
-        <p:cNvGrpSpPr/>
-        <p:nvPr/>
-      </p:nvGrpSpPr>
-      <p:grpSpPr>
-        <a:xfrm>
-          <a:off x="0" y="0"/>
-          <a:ext cx="0" cy="0"/>
-          <a:chOff x="0" y="0"/>
-          <a:chExt cx="0" cy="0"/>
-        </a:xfrm>
-      </p:grpSpPr>
-      <p:sp>
-        <p:nvSpPr>
-          <p:cNvPr id="2" name="Titre 1">
-            <a:extLst>
-              <a:ext uri="{FF2B5EF4-FFF2-40B4-BE49-F238E27FC236}">
-                <a16:creationId xmlns:a16="http://schemas.microsoft.com/office/drawing/2014/main" id="{18437D7D-AB73-67B7-0D0B-2CECBD61D4B6}"/>
-              </a:ext>
-            </a:extLst>
-          </p:cNvPr>
-          <p:cNvSpPr>
-            <a:spLocks noGrp="1"/>
-          </p:cNvSpPr>
-          <p:nvPr>
-            <p:ph type="title"/>
-          </p:nvPr>
-        </p:nvSpPr>
-        <p:spPr/>
-        <p:txBody>
-          <a:bodyPr/>
-          <a:lstStyle/>
-          <a:p>
-            <a:r>
-              <a:rPr lang="fr-FR" dirty="0"/>
-              <a:t>7. temps accessibilité aux données</a:t>
-            </a:r>
-          </a:p>
-        </p:txBody>
-      </p:sp>
-      <p:sp>
-        <p:nvSpPr>
-          <p:cNvPr id="3" name="Espace réservé du contenu 2">
-            <a:extLst>
-              <a:ext uri="{FF2B5EF4-FFF2-40B4-BE49-F238E27FC236}">
-                <a16:creationId xmlns:a16="http://schemas.microsoft.com/office/drawing/2014/main" id="{89EDB518-4A15-F6F1-E72D-43D1DA23EC92}"/>
-              </a:ext>
-            </a:extLst>
-          </p:cNvPr>
-          <p:cNvSpPr>
-            <a:spLocks noGrp="1"/>
-          </p:cNvSpPr>
-          <p:nvPr>
-            <p:ph idx="1"/>
-          </p:nvPr>
-        </p:nvSpPr>
-        <p:spPr/>
-        <p:txBody>
-          <a:bodyPr/>
-          <a:lstStyle/>
-          <a:p>
-            <a:r>
-              <a:rPr lang="fr-FR" dirty="0"/>
-              <a:t>Log </a:t>
-            </a:r>
-            <a:r>
-              <a:rPr lang="fr-FR" dirty="0" err="1"/>
-              <a:t>Airbyte</a:t>
-            </a:r>
-            <a:r>
-              <a:rPr lang="fr-FR" dirty="0"/>
-              <a:t> à charger + </a:t>
-            </a:r>
-            <a:r>
-              <a:rPr lang="fr-FR" dirty="0" err="1"/>
-              <a:t>seed</a:t>
-            </a:r>
-            <a:endParaRPr lang="fr-FR" dirty="0"/>
-          </a:p>
-        </p:txBody>
-      </p:sp>
-      <p:sp>
-        <p:nvSpPr>
-          <p:cNvPr id="4" name="Espace réservé de la date 3">
-            <a:extLst>
-              <a:ext uri="{FF2B5EF4-FFF2-40B4-BE49-F238E27FC236}">
-                <a16:creationId xmlns:a16="http://schemas.microsoft.com/office/drawing/2014/main" id="{9FDB8A50-7536-F842-72A4-46515A7DE5D6}"/>
-              </a:ext>
-            </a:extLst>
-          </p:cNvPr>
-          <p:cNvSpPr>
-            <a:spLocks noGrp="1"/>
-          </p:cNvSpPr>
-          <p:nvPr>
-            <p:ph type="dt" sz="half" idx="10"/>
-          </p:nvPr>
-        </p:nvSpPr>
-        <p:spPr/>
-        <p:txBody>
-          <a:bodyPr/>
-          <a:lstStyle/>
-          <a:p>
-            <a:pPr rtl="0"/>
-            <a:fld id="{22897033-9A55-4DAC-991D-1FF1921C78B7}" type="datetime1">
-              <a:rPr lang="fr-FR" smtClean="0"/>
-              <a:t>19/08/2026</a:t>
-            </a:fld>
-            <a:endParaRPr lang="en-US" dirty="0"/>
-          </a:p>
-        </p:txBody>
-      </p:sp>
-    </p:spTree>
-    <p:extLst>
-      <p:ext uri="{BB962C8B-B14F-4D97-AF65-F5344CB8AC3E}">
-        <p14:creationId xmlns:p14="http://schemas.microsoft.com/office/powerpoint/2010/main" val="90262541"/>
-      </p:ext>
-    </p:extLst>
-  </p:cSld>
-  <p:clrMapOvr>
-    <a:masterClrMapping/>
-  </p:clrMapOvr>
-</p:sld>
-</file>
-
-<file path=ppt/slides/slide18.xml><?xml version="1.0" encoding="utf-8"?>
-<p:sld xmlns:a="http://schemas.openxmlformats.org/drawingml/2006/main" xmlns:r="http://schemas.openxmlformats.org/officeDocument/2006/relationships" xmlns:p="http://schemas.openxmlformats.org/presentationml/2006/main">
-  <p:cSld>
-    <p:spTree>
-      <p:nvGrpSpPr>
-        <p:cNvPr id="1" name=""/>
-        <p:cNvGrpSpPr/>
-        <p:nvPr/>
-      </p:nvGrpSpPr>
-      <p:grpSpPr>
-        <a:xfrm>
-          <a:off x="0" y="0"/>
-          <a:ext cx="0" cy="0"/>
-          <a:chOff x="0" y="0"/>
-          <a:chExt cx="0" cy="0"/>
-        </a:xfrm>
-      </p:grpSpPr>
-      <p:sp>
-        <p:nvSpPr>
-          <p:cNvPr id="2" name="Titre 1">
-            <a:extLst>
-              <a:ext uri="{FF2B5EF4-FFF2-40B4-BE49-F238E27FC236}">
-                <a16:creationId xmlns:a16="http://schemas.microsoft.com/office/drawing/2014/main" id="{1C4CC017-D4E6-EF3B-F567-8E1DF81BEE69}"/>
-              </a:ext>
-            </a:extLst>
-          </p:cNvPr>
-          <p:cNvSpPr>
-            <a:spLocks noGrp="1"/>
-          </p:cNvSpPr>
-          <p:nvPr>
-            <p:ph type="title"/>
-          </p:nvPr>
-        </p:nvSpPr>
-        <p:spPr/>
-        <p:txBody>
-          <a:bodyPr/>
-          <a:lstStyle/>
-          <a:p>
-            <a:r>
-              <a:rPr lang="fr-FR" dirty="0"/>
-              <a:t>7. temps accessibilité aux données</a:t>
-            </a:r>
-          </a:p>
-        </p:txBody>
-      </p:sp>
-      <p:sp>
-        <p:nvSpPr>
-          <p:cNvPr id="4" name="Espace réservé de la date 3">
-            <a:extLst>
-              <a:ext uri="{FF2B5EF4-FFF2-40B4-BE49-F238E27FC236}">
-                <a16:creationId xmlns:a16="http://schemas.microsoft.com/office/drawing/2014/main" id="{765A87D0-4BCC-68DF-11C9-3CB0062362F5}"/>
-              </a:ext>
-            </a:extLst>
-          </p:cNvPr>
-          <p:cNvSpPr>
-            <a:spLocks noGrp="1"/>
-          </p:cNvSpPr>
-          <p:nvPr>
-            <p:ph type="dt" sz="half" idx="10"/>
-          </p:nvPr>
-        </p:nvSpPr>
-        <p:spPr/>
-        <p:txBody>
-          <a:bodyPr/>
-          <a:lstStyle/>
-          <a:p>
-            <a:pPr rtl="0"/>
-            <a:fld id="{22897033-9A55-4DAC-991D-1FF1921C78B7}" type="datetime1">
-              <a:rPr lang="fr-FR" smtClean="0"/>
-              <a:t>18/08/2026</a:t>
-            </a:fld>
-            <a:endParaRPr lang="en-US" dirty="0"/>
-          </a:p>
-        </p:txBody>
-      </p:sp>
-      <p:pic>
-        <p:nvPicPr>
-          <p:cNvPr id="8" name="Image 7">
-            <a:extLst>
-              <a:ext uri="{FF2B5EF4-FFF2-40B4-BE49-F238E27FC236}">
-                <a16:creationId xmlns:a16="http://schemas.microsoft.com/office/drawing/2014/main" id="{8FF749CA-524B-7D97-2C0A-C88A32F6E552}"/>
-              </a:ext>
-            </a:extLst>
-          </p:cNvPr>
-          <p:cNvPicPr>
-            <a:picLocks noChangeAspect="1"/>
-          </p:cNvPicPr>
-          <p:nvPr/>
-        </p:nvPicPr>
-        <p:blipFill>
-          <a:blip r:embed="rId2"/>
-          <a:stretch>
-            <a:fillRect/>
-          </a:stretch>
-        </p:blipFill>
-        <p:spPr>
-          <a:xfrm>
-            <a:off x="581192" y="2339440"/>
-            <a:ext cx="8688012" cy="3886742"/>
-          </a:xfrm>
-          <a:prstGeom prst="rect">
-            <a:avLst/>
-          </a:prstGeom>
-        </p:spPr>
-      </p:pic>
-      <p:sp>
-        <p:nvSpPr>
-          <p:cNvPr id="9" name="Rectangle 8">
-            <a:extLst>
-              <a:ext uri="{FF2B5EF4-FFF2-40B4-BE49-F238E27FC236}">
-                <a16:creationId xmlns:a16="http://schemas.microsoft.com/office/drawing/2014/main" id="{9E591C28-444A-7AE1-DCB0-4646E1938817}"/>
-              </a:ext>
-            </a:extLst>
-          </p:cNvPr>
-          <p:cNvSpPr/>
-          <p:nvPr/>
-        </p:nvSpPr>
-        <p:spPr>
-          <a:xfrm>
-            <a:off x="5293360" y="2661920"/>
-            <a:ext cx="3312160" cy="3048000"/>
-          </a:xfrm>
-          <a:prstGeom prst="rect">
-            <a:avLst/>
-          </a:prstGeom>
-          <a:noFill/>
-          <a:ln>
-            <a:solidFill>
-              <a:srgbClr val="002060"/>
-            </a:solidFill>
-          </a:ln>
-        </p:spPr>
-        <p:style>
-          <a:lnRef idx="2">
-            <a:schemeClr val="accent1">
-              <a:shade val="15000"/>
-            </a:schemeClr>
-          </a:lnRef>
-          <a:fillRef idx="1">
-            <a:schemeClr val="accent1"/>
-          </a:fillRef>
-          <a:effectRef idx="0">
-            <a:schemeClr val="accent1"/>
-          </a:effectRef>
-          <a:fontRef idx="minor">
-            <a:schemeClr val="lt1"/>
-          </a:fontRef>
-        </p:style>
-        <p:txBody>
-          <a:bodyPr rtlCol="0" anchor="ctr"/>
-          <a:lstStyle/>
-          <a:p>
-            <a:pPr algn="ctr"/>
-            <a:endParaRPr lang="fr-FR"/>
-          </a:p>
-        </p:txBody>
-      </p:sp>
-      <p:sp>
-        <p:nvSpPr>
-          <p:cNvPr id="10" name="ZoneTexte 9">
-            <a:extLst>
-              <a:ext uri="{FF2B5EF4-FFF2-40B4-BE49-F238E27FC236}">
-                <a16:creationId xmlns:a16="http://schemas.microsoft.com/office/drawing/2014/main" id="{1DA6F2CB-B5DC-F08C-E7B6-36062C3C8FD0}"/>
-              </a:ext>
-            </a:extLst>
-          </p:cNvPr>
-          <p:cNvSpPr txBox="1"/>
-          <p:nvPr/>
-        </p:nvSpPr>
-        <p:spPr>
-          <a:xfrm>
-            <a:off x="7797800" y="2685812"/>
-            <a:ext cx="904240" cy="369332"/>
-          </a:xfrm>
-          <a:prstGeom prst="rect">
-            <a:avLst/>
-          </a:prstGeom>
-          <a:noFill/>
-        </p:spPr>
-        <p:txBody>
-          <a:bodyPr wrap="square" rtlCol="0">
-            <a:spAutoFit/>
-          </a:bodyPr>
-          <a:lstStyle/>
-          <a:p>
-            <a:r>
-              <a:rPr lang="fr-FR" dirty="0" err="1"/>
-              <a:t>marts</a:t>
-            </a:r>
-            <a:endParaRPr lang="fr-FR" dirty="0"/>
-          </a:p>
-        </p:txBody>
-      </p:sp>
-    </p:spTree>
-    <p:extLst>
-      <p:ext uri="{BB962C8B-B14F-4D97-AF65-F5344CB8AC3E}">
-        <p14:creationId xmlns:p14="http://schemas.microsoft.com/office/powerpoint/2010/main" val="2802061433"/>
-      </p:ext>
-    </p:extLst>
-  </p:cSld>
-  <p:clrMapOvr>
-    <a:masterClrMapping/>
-  </p:clrMapOvr>
-</p:sld>
-</file>
-
-<file path=ppt/slides/slide19.xml><?xml version="1.0" encoding="utf-8"?>
-<p:sld xmlns:a="http://schemas.openxmlformats.org/drawingml/2006/main" xmlns:r="http://schemas.openxmlformats.org/officeDocument/2006/relationships" xmlns:p="http://schemas.openxmlformats.org/presentationml/2006/main">
-  <p:cSld>
-    <p:spTree>
-      <p:nvGrpSpPr>
         <p:cNvPr id="1" name=""/>
         <p:cNvGrpSpPr/>
         <p:nvPr/>
@@ -16178,18 +11657,263 @@
             <a:pPr rtl="0"/>
             <a:fld id="{22897033-9A55-4DAC-991D-1FF1921C78B7}" type="datetime1">
               <a:rPr lang="fr-FR" smtClean="0"/>
-              <a:t>18/08/2026</a:t>
+              <a:t>16/08/2026</a:t>
             </a:fld>
             <a:endParaRPr lang="en-US" dirty="0"/>
+          </a:p>
+        </p:txBody>
+      </p:sp>
+      <p:pic>
+        <p:nvPicPr>
+          <p:cNvPr id="5" name="Picture 3" descr="quality_tests.png">
+            <a:extLst>
+              <a:ext uri="{FF2B5EF4-FFF2-40B4-BE49-F238E27FC236}">
+                <a16:creationId xmlns:a16="http://schemas.microsoft.com/office/drawing/2014/main" id="{7B819B51-3050-BE80-18B4-C6C43577731E}"/>
+              </a:ext>
+            </a:extLst>
+          </p:cNvPr>
+          <p:cNvPicPr>
+            <a:picLocks noGrp="1" noChangeAspect="1"/>
+          </p:cNvPicPr>
+          <p:nvPr>
+            <p:ph idx="1"/>
+          </p:nvPr>
+        </p:nvPicPr>
+        <p:blipFill>
+          <a:blip r:embed="rId2"/>
+          <a:stretch>
+            <a:fillRect/>
+          </a:stretch>
+        </p:blipFill>
+        <p:spPr>
+          <a:xfrm>
+            <a:off x="794273" y="2437908"/>
+            <a:ext cx="5511500" cy="3438973"/>
+          </a:xfrm>
+          <a:prstGeom prst="rect">
+            <a:avLst/>
+          </a:prstGeom>
+        </p:spPr>
+      </p:pic>
+      <p:sp>
+        <p:nvSpPr>
+          <p:cNvPr id="6" name="TextBox 4">
+            <a:extLst>
+              <a:ext uri="{FF2B5EF4-FFF2-40B4-BE49-F238E27FC236}">
+                <a16:creationId xmlns:a16="http://schemas.microsoft.com/office/drawing/2014/main" id="{BE9B2966-6CBF-E60C-08A0-38FA33559832}"/>
+              </a:ext>
+            </a:extLst>
+          </p:cNvPr>
+          <p:cNvSpPr txBox="1"/>
+          <p:nvPr/>
+        </p:nvSpPr>
+        <p:spPr>
+          <a:xfrm>
+            <a:off x="7038808" y="1684468"/>
+            <a:ext cx="4572000" cy="3200400"/>
+          </a:xfrm>
+          <a:prstGeom prst="rect">
+            <a:avLst/>
+          </a:prstGeom>
+          <a:noFill/>
+        </p:spPr>
+        <p:txBody>
+          <a:bodyPr wrap="square" lIns="36576" tIns="18288" rIns="36576" bIns="18288">
+            <a:spAutoFit/>
+          </a:bodyPr>
+          <a:lstStyle/>
+          <a:p>
+            <a:pPr algn="l">
+              <a:defRPr sz="1600" b="0">
+                <a:solidFill>
+                  <a:srgbClr val="23313D"/>
+                </a:solidFill>
+                <a:latin typeface="Aptos"/>
+              </a:defRPr>
+            </a:pPr>
+            <a:r>
+              <a:rPr dirty="0"/>
+              <a:t>• </a:t>
+            </a:r>
+            <a:r>
+              <a:rPr dirty="0" err="1"/>
+              <a:t>not_null</a:t>
+            </a:r>
+            <a:r>
+              <a:rPr dirty="0"/>
+              <a:t> : </a:t>
+            </a:r>
+            <a:r>
+              <a:rPr dirty="0" err="1"/>
+              <a:t>identifiants</a:t>
+            </a:r>
+            <a:r>
+              <a:rPr dirty="0"/>
+              <a:t>, </a:t>
+            </a:r>
+            <a:r>
+              <a:rPr dirty="0" err="1"/>
+              <a:t>coordonnées</a:t>
+            </a:r>
+            <a:r>
+              <a:rPr dirty="0"/>
+              <a:t>, </a:t>
+            </a:r>
+            <a:r>
+              <a:rPr dirty="0" err="1"/>
+              <a:t>horodatage</a:t>
+            </a:r>
+            <a:br>
+              <a:rPr dirty="0"/>
+            </a:br>
+            <a:r>
+              <a:rPr dirty="0"/>
+              <a:t>• unique : </a:t>
+            </a:r>
+            <a:r>
+              <a:rPr dirty="0" err="1"/>
+              <a:t>station_id</a:t>
+            </a:r>
+            <a:br>
+              <a:rPr dirty="0"/>
+            </a:br>
+            <a:r>
+              <a:rPr dirty="0"/>
+              <a:t>• relationships : </a:t>
+            </a:r>
+            <a:r>
+              <a:rPr dirty="0" err="1"/>
+              <a:t>station_id</a:t>
+            </a:r>
+            <a:r>
+              <a:rPr dirty="0"/>
+              <a:t> → dimension</a:t>
+            </a:r>
+            <a:br>
+              <a:rPr dirty="0"/>
+            </a:br>
+            <a:r>
+              <a:rPr dirty="0"/>
+              <a:t>• </a:t>
+            </a:r>
+            <a:r>
+              <a:rPr dirty="0" err="1"/>
+              <a:t>accepted_values</a:t>
+            </a:r>
+            <a:r>
+              <a:rPr dirty="0"/>
+              <a:t> : amateur / </a:t>
+            </a:r>
+            <a:r>
+              <a:rPr dirty="0" err="1"/>
+              <a:t>officielle</a:t>
+            </a:r>
+            <a:br>
+              <a:rPr dirty="0"/>
+            </a:br>
+            <a:r>
+              <a:rPr dirty="0"/>
+              <a:t>• Tests </a:t>
+            </a:r>
+            <a:r>
+              <a:rPr dirty="0" err="1"/>
+              <a:t>spécifiques</a:t>
+            </a:r>
+            <a:r>
+              <a:rPr dirty="0"/>
+              <a:t> : </a:t>
+            </a:r>
+            <a:r>
+              <a:rPr dirty="0" err="1"/>
+              <a:t>pluie</a:t>
+            </a:r>
+            <a:r>
+              <a:rPr dirty="0"/>
+              <a:t>, </a:t>
+            </a:r>
+            <a:r>
+              <a:rPr dirty="0" err="1"/>
+              <a:t>température</a:t>
+            </a:r>
+            <a:r>
+              <a:rPr dirty="0"/>
+              <a:t>, </a:t>
+            </a:r>
+            <a:r>
+              <a:rPr dirty="0" err="1"/>
+              <a:t>humidité</a:t>
+            </a:r>
+            <a:r>
+              <a:rPr dirty="0"/>
+              <a:t>, vent</a:t>
+            </a:r>
+          </a:p>
+        </p:txBody>
+      </p:sp>
+    </p:spTree>
+    <p:extLst>
+      <p:ext uri="{BB962C8B-B14F-4D97-AF65-F5344CB8AC3E}">
+        <p14:creationId xmlns:p14="http://schemas.microsoft.com/office/powerpoint/2010/main" val="1574833617"/>
+      </p:ext>
+    </p:extLst>
+  </p:cSld>
+  <p:clrMapOvr>
+    <a:masterClrMapping/>
+  </p:clrMapOvr>
+</p:sld>
+</file>
+
+<file path=ppt/slides/slide11.xml><?xml version="1.0" encoding="utf-8"?>
+<p:sld xmlns:a="http://schemas.openxmlformats.org/drawingml/2006/main" xmlns:r="http://schemas.openxmlformats.org/officeDocument/2006/relationships" xmlns:p="http://schemas.openxmlformats.org/presentationml/2006/main">
+  <p:cSld>
+    <p:spTree>
+      <p:nvGrpSpPr>
+        <p:cNvPr id="1" name=""/>
+        <p:cNvGrpSpPr/>
+        <p:nvPr/>
+      </p:nvGrpSpPr>
+      <p:grpSpPr>
+        <a:xfrm>
+          <a:off x="0" y="0"/>
+          <a:ext cx="0" cy="0"/>
+          <a:chOff x="0" y="0"/>
+          <a:chExt cx="0" cy="0"/>
+        </a:xfrm>
+      </p:grpSpPr>
+      <p:sp>
+        <p:nvSpPr>
+          <p:cNvPr id="2" name="Titre 1">
+            <a:extLst>
+              <a:ext uri="{FF2B5EF4-FFF2-40B4-BE49-F238E27FC236}">
+                <a16:creationId xmlns:a16="http://schemas.microsoft.com/office/drawing/2014/main" id="{2F240D08-8ABD-C30D-8619-3A8A24D19CB9}"/>
+              </a:ext>
+            </a:extLst>
+          </p:cNvPr>
+          <p:cNvSpPr>
+            <a:spLocks noGrp="1"/>
+          </p:cNvSpPr>
+          <p:nvPr>
+            <p:ph type="title"/>
+          </p:nvPr>
+        </p:nvSpPr>
+        <p:spPr/>
+        <p:txBody>
+          <a:bodyPr/>
+          <a:lstStyle/>
+          <a:p>
+            <a:r>
+              <a:rPr lang="fr-FR" dirty="0"/>
+              <a:t>9. Installation Mise en place AWS</a:t>
+            </a:r>
           </a:p>
         </p:txBody>
       </p:sp>
       <p:sp>
         <p:nvSpPr>
-          <p:cNvPr id="7" name="Espace réservé du contenu 6">
+          <p:cNvPr id="3" name="Espace réservé du contenu 2">
             <a:extLst>
               <a:ext uri="{FF2B5EF4-FFF2-40B4-BE49-F238E27FC236}">
-                <a16:creationId xmlns:a16="http://schemas.microsoft.com/office/drawing/2014/main" id="{5E074480-F0AE-1940-D5E5-68A0603A5316}"/>
+                <a16:creationId xmlns:a16="http://schemas.microsoft.com/office/drawing/2014/main" id="{1D591678-97DD-9E5B-55DC-6B9E91134863}"/>
               </a:ext>
             </a:extLst>
           </p:cNvPr>
@@ -16200,86 +11924,51 @@
             <p:ph idx="1"/>
           </p:nvPr>
         </p:nvSpPr>
-        <p:spPr>
-          <a:xfrm>
-            <a:off x="7721600" y="2478299"/>
-            <a:ext cx="4368800" cy="3255294"/>
-          </a:xfrm>
-        </p:spPr>
+        <p:spPr/>
         <p:txBody>
           <a:bodyPr/>
           <a:lstStyle/>
           <a:p>
-            <a:r>
-              <a:rPr lang="fr-FR" dirty="0" err="1"/>
-              <a:t>not_null</a:t>
-            </a:r>
-            <a:r>
-              <a:rPr lang="fr-FR" dirty="0"/>
-              <a:t> : identifiants, coordonnées, date, heure </a:t>
-            </a:r>
-            <a:r>
-              <a:rPr lang="fr-FR" dirty="0" err="1"/>
-              <a:t>etc</a:t>
-            </a:r>
-            <a:endParaRPr lang="fr-FR" dirty="0"/>
-          </a:p>
-          <a:p>
-            <a:r>
-              <a:rPr lang="fr-FR" dirty="0"/>
-              <a:t>unique: </a:t>
-            </a:r>
-            <a:r>
-              <a:rPr lang="fr-FR" dirty="0" err="1"/>
-              <a:t>station_id</a:t>
-            </a:r>
-            <a:endParaRPr lang="fr-FR" dirty="0"/>
-          </a:p>
-          <a:p>
-            <a:r>
-              <a:rPr lang="fr-FR" dirty="0" err="1"/>
-              <a:t>relationships</a:t>
-            </a:r>
-            <a:r>
-              <a:rPr lang="fr-FR" dirty="0"/>
-              <a:t> : </a:t>
-            </a:r>
-            <a:r>
-              <a:rPr lang="fr-FR" dirty="0" err="1"/>
-              <a:t>station_id</a:t>
-            </a:r>
-            <a:r>
-              <a:rPr lang="fr-FR" dirty="0"/>
-              <a:t> et table dimension</a:t>
-            </a:r>
-          </a:p>
-          <a:p>
-            <a:r>
-              <a:rPr lang="fr-FR" dirty="0" err="1"/>
-              <a:t>accepted_values</a:t>
-            </a:r>
-            <a:r>
-              <a:rPr lang="fr-FR" dirty="0"/>
-              <a:t>: amateur / officielle</a:t>
-            </a:r>
-          </a:p>
-          <a:p>
-            <a:r>
-              <a:rPr lang="fr-FR" dirty="0"/>
-              <a:t>Tests spécifiques : pluie, température, humidité, vent</a:t>
-            </a:r>
-          </a:p>
-          <a:p>
-            <a:endParaRPr lang="fr-FR" dirty="0"/>
+            <a:endParaRPr lang="fr-FR"/>
+          </a:p>
+        </p:txBody>
+      </p:sp>
+      <p:sp>
+        <p:nvSpPr>
+          <p:cNvPr id="4" name="Espace réservé de la date 3">
+            <a:extLst>
+              <a:ext uri="{FF2B5EF4-FFF2-40B4-BE49-F238E27FC236}">
+                <a16:creationId xmlns:a16="http://schemas.microsoft.com/office/drawing/2014/main" id="{76A525BD-E384-4889-C5DF-7D6D0E560132}"/>
+              </a:ext>
+            </a:extLst>
+          </p:cNvPr>
+          <p:cNvSpPr>
+            <a:spLocks noGrp="1"/>
+          </p:cNvSpPr>
+          <p:nvPr>
+            <p:ph type="dt" sz="half" idx="10"/>
+          </p:nvPr>
+        </p:nvSpPr>
+        <p:spPr/>
+        <p:txBody>
+          <a:bodyPr/>
+          <a:lstStyle/>
+          <a:p>
+            <a:pPr rtl="0"/>
+            <a:fld id="{22897033-9A55-4DAC-991D-1FF1921C78B7}" type="datetime1">
+              <a:rPr lang="fr-FR" smtClean="0"/>
+              <a:t>16/08/2026</a:t>
+            </a:fld>
+            <a:endParaRPr lang="en-US" dirty="0"/>
           </a:p>
         </p:txBody>
       </p:sp>
       <p:pic>
         <p:nvPicPr>
-          <p:cNvPr id="9" name="Image 8">
+          <p:cNvPr id="6" name="Image 5">
             <a:extLst>
               <a:ext uri="{FF2B5EF4-FFF2-40B4-BE49-F238E27FC236}">
-                <a16:creationId xmlns:a16="http://schemas.microsoft.com/office/drawing/2014/main" id="{326A1C7F-44A5-26F2-476F-128B8DEC91AE}"/>
+                <a16:creationId xmlns:a16="http://schemas.microsoft.com/office/drawing/2014/main" id="{8E02770F-21A4-2DBE-C359-6DA9D7356EC2}"/>
               </a:ext>
             </a:extLst>
           </p:cNvPr>
@@ -16296,8 +11985,8 @@
         </p:blipFill>
         <p:spPr>
           <a:xfrm>
-            <a:off x="23421" y="2303049"/>
-            <a:ext cx="7582530" cy="3533442"/>
+            <a:off x="5787321" y="2335473"/>
+            <a:ext cx="6220720" cy="4088441"/>
           </a:xfrm>
           <a:prstGeom prst="rect">
             <a:avLst/>
@@ -16307,7 +11996,2255 @@
     </p:spTree>
     <p:extLst>
       <p:ext uri="{BB962C8B-B14F-4D97-AF65-F5344CB8AC3E}">
-        <p14:creationId xmlns:p14="http://schemas.microsoft.com/office/powerpoint/2010/main" val="1574833617"/>
+        <p14:creationId xmlns:p14="http://schemas.microsoft.com/office/powerpoint/2010/main" val="1158311728"/>
+      </p:ext>
+    </p:extLst>
+  </p:cSld>
+  <p:clrMapOvr>
+    <a:masterClrMapping/>
+  </p:clrMapOvr>
+</p:sld>
+</file>
+
+<file path=ppt/slides/slide12.xml><?xml version="1.0" encoding="utf-8"?>
+<p:sld xmlns:a="http://schemas.openxmlformats.org/drawingml/2006/main" xmlns:r="http://schemas.openxmlformats.org/officeDocument/2006/relationships" xmlns:p="http://schemas.openxmlformats.org/presentationml/2006/main">
+  <p:cSld>
+    <p:spTree>
+      <p:nvGrpSpPr>
+        <p:cNvPr id="1" name="">
+          <a:extLst>
+            <a:ext uri="{FF2B5EF4-FFF2-40B4-BE49-F238E27FC236}">
+              <a16:creationId xmlns:a16="http://schemas.microsoft.com/office/drawing/2014/main" id="{E120B783-63D9-3C4F-1F97-BE5BE4016328}"/>
+            </a:ext>
+          </a:extLst>
+        </p:cNvPr>
+        <p:cNvGrpSpPr/>
+        <p:nvPr/>
+      </p:nvGrpSpPr>
+      <p:grpSpPr>
+        <a:xfrm>
+          <a:off x="0" y="0"/>
+          <a:ext cx="0" cy="0"/>
+          <a:chOff x="0" y="0"/>
+          <a:chExt cx="0" cy="0"/>
+        </a:xfrm>
+      </p:grpSpPr>
+      <p:sp>
+        <p:nvSpPr>
+          <p:cNvPr id="2" name="Titre 1">
+            <a:extLst>
+              <a:ext uri="{FF2B5EF4-FFF2-40B4-BE49-F238E27FC236}">
+                <a16:creationId xmlns:a16="http://schemas.microsoft.com/office/drawing/2014/main" id="{F6BF35D9-8257-67C7-C72D-30B59F7C2EF3}"/>
+              </a:ext>
+            </a:extLst>
+          </p:cNvPr>
+          <p:cNvSpPr>
+            <a:spLocks noGrp="1"/>
+          </p:cNvSpPr>
+          <p:nvPr>
+            <p:ph type="title"/>
+          </p:nvPr>
+        </p:nvSpPr>
+        <p:spPr/>
+        <p:txBody>
+          <a:bodyPr/>
+          <a:lstStyle/>
+          <a:p>
+            <a:r>
+              <a:rPr lang="fr-FR" dirty="0"/>
+              <a:t>7. Réplication des données</a:t>
+            </a:r>
+            <a:br>
+              <a:rPr lang="fr-FR" dirty="0"/>
+            </a:br>
+            <a:r>
+              <a:rPr lang="fr-FR" sz="1800" dirty="0"/>
+              <a:t>architecture de la base de données</a:t>
+            </a:r>
+            <a:endParaRPr lang="fr-FR" dirty="0"/>
+          </a:p>
+        </p:txBody>
+      </p:sp>
+      <p:sp>
+        <p:nvSpPr>
+          <p:cNvPr id="4" name="Espace réservé de la date 3">
+            <a:extLst>
+              <a:ext uri="{FF2B5EF4-FFF2-40B4-BE49-F238E27FC236}">
+                <a16:creationId xmlns:a16="http://schemas.microsoft.com/office/drawing/2014/main" id="{C177BC59-B90E-E8AE-2FDE-E908760E8D3F}"/>
+              </a:ext>
+            </a:extLst>
+          </p:cNvPr>
+          <p:cNvSpPr>
+            <a:spLocks noGrp="1"/>
+          </p:cNvSpPr>
+          <p:nvPr>
+            <p:ph type="dt" sz="half" idx="10"/>
+          </p:nvPr>
+        </p:nvSpPr>
+        <p:spPr/>
+        <p:txBody>
+          <a:bodyPr/>
+          <a:lstStyle/>
+          <a:p>
+            <a:pPr rtl="0"/>
+            <a:fld id="{22897033-9A55-4DAC-991D-1FF1921C78B7}" type="datetime1">
+              <a:rPr lang="fr-FR" smtClean="0"/>
+              <a:t>16/08/2026</a:t>
+            </a:fld>
+            <a:endParaRPr lang="en-US" dirty="0"/>
+          </a:p>
+        </p:txBody>
+      </p:sp>
+      <p:sp>
+        <p:nvSpPr>
+          <p:cNvPr id="5" name="Rectangle : coins arrondis 4">
+            <a:extLst>
+              <a:ext uri="{FF2B5EF4-FFF2-40B4-BE49-F238E27FC236}">
+                <a16:creationId xmlns:a16="http://schemas.microsoft.com/office/drawing/2014/main" id="{C289E735-92AC-B858-5782-A5468B24A706}"/>
+              </a:ext>
+            </a:extLst>
+          </p:cNvPr>
+          <p:cNvSpPr/>
+          <p:nvPr/>
+        </p:nvSpPr>
+        <p:spPr>
+          <a:xfrm>
+            <a:off x="3259666" y="2726528"/>
+            <a:ext cx="1845734" cy="1083734"/>
+          </a:xfrm>
+          <a:prstGeom prst="roundRect">
+            <a:avLst/>
+          </a:prstGeom>
+        </p:spPr>
+        <p:style>
+          <a:lnRef idx="2">
+            <a:schemeClr val="accent1">
+              <a:shade val="15000"/>
+            </a:schemeClr>
+          </a:lnRef>
+          <a:fillRef idx="1">
+            <a:schemeClr val="accent1"/>
+          </a:fillRef>
+          <a:effectRef idx="0">
+            <a:schemeClr val="accent1"/>
+          </a:effectRef>
+          <a:fontRef idx="minor">
+            <a:schemeClr val="lt1"/>
+          </a:fontRef>
+        </p:style>
+        <p:txBody>
+          <a:bodyPr rtlCol="0" anchor="ctr"/>
+          <a:lstStyle/>
+          <a:p>
+            <a:pPr algn="ctr"/>
+            <a:r>
+              <a:rPr lang="fr-FR" dirty="0"/>
+              <a:t>Serveur Primaire</a:t>
+            </a:r>
+          </a:p>
+          <a:p>
+            <a:pPr algn="ctr"/>
+            <a:r>
+              <a:rPr lang="fr-FR" dirty="0"/>
+              <a:t>(MongoDB)</a:t>
+            </a:r>
+          </a:p>
+        </p:txBody>
+      </p:sp>
+      <p:sp>
+        <p:nvSpPr>
+          <p:cNvPr id="6" name="Rectangle : coins arrondis 5">
+            <a:extLst>
+              <a:ext uri="{FF2B5EF4-FFF2-40B4-BE49-F238E27FC236}">
+                <a16:creationId xmlns:a16="http://schemas.microsoft.com/office/drawing/2014/main" id="{9CB8EC2A-0C81-870B-F4A0-D99424B878C1}"/>
+              </a:ext>
+            </a:extLst>
+          </p:cNvPr>
+          <p:cNvSpPr/>
+          <p:nvPr/>
+        </p:nvSpPr>
+        <p:spPr>
+          <a:xfrm>
+            <a:off x="7428254" y="2726528"/>
+            <a:ext cx="1845734" cy="1083734"/>
+          </a:xfrm>
+          <a:prstGeom prst="roundRect">
+            <a:avLst/>
+          </a:prstGeom>
+        </p:spPr>
+        <p:style>
+          <a:lnRef idx="2">
+            <a:schemeClr val="accent1">
+              <a:shade val="15000"/>
+            </a:schemeClr>
+          </a:lnRef>
+          <a:fillRef idx="1">
+            <a:schemeClr val="accent1"/>
+          </a:fillRef>
+          <a:effectRef idx="0">
+            <a:schemeClr val="accent1"/>
+          </a:effectRef>
+          <a:fontRef idx="minor">
+            <a:schemeClr val="lt1"/>
+          </a:fontRef>
+        </p:style>
+        <p:txBody>
+          <a:bodyPr rtlCol="0" anchor="ctr"/>
+          <a:lstStyle/>
+          <a:p>
+            <a:pPr algn="ctr"/>
+            <a:r>
+              <a:rPr lang="fr-FR" dirty="0"/>
+              <a:t>Outil BI</a:t>
+            </a:r>
+          </a:p>
+        </p:txBody>
+      </p:sp>
+      <p:sp>
+        <p:nvSpPr>
+          <p:cNvPr id="7" name="Rectangle : coins arrondis 6">
+            <a:extLst>
+              <a:ext uri="{FF2B5EF4-FFF2-40B4-BE49-F238E27FC236}">
+                <a16:creationId xmlns:a16="http://schemas.microsoft.com/office/drawing/2014/main" id="{92857602-5C8A-BD67-8E8C-B67AA51BD817}"/>
+              </a:ext>
+            </a:extLst>
+          </p:cNvPr>
+          <p:cNvSpPr/>
+          <p:nvPr/>
+        </p:nvSpPr>
+        <p:spPr>
+          <a:xfrm>
+            <a:off x="810806" y="4755802"/>
+            <a:ext cx="1845734" cy="1083734"/>
+          </a:xfrm>
+          <a:prstGeom prst="roundRect">
+            <a:avLst/>
+          </a:prstGeom>
+        </p:spPr>
+        <p:style>
+          <a:lnRef idx="2">
+            <a:schemeClr val="accent1">
+              <a:shade val="15000"/>
+            </a:schemeClr>
+          </a:lnRef>
+          <a:fillRef idx="1">
+            <a:schemeClr val="accent1"/>
+          </a:fillRef>
+          <a:effectRef idx="0">
+            <a:schemeClr val="accent1"/>
+          </a:effectRef>
+          <a:fontRef idx="minor">
+            <a:schemeClr val="lt1"/>
+          </a:fontRef>
+        </p:style>
+        <p:txBody>
+          <a:bodyPr rtlCol="0" anchor="ctr"/>
+          <a:lstStyle/>
+          <a:p>
+            <a:pPr algn="ctr"/>
+            <a:r>
+              <a:rPr lang="fr-FR" dirty="0"/>
+              <a:t>Serveur secondaire 1 (MongoDB)</a:t>
+            </a:r>
+          </a:p>
+        </p:txBody>
+      </p:sp>
+      <p:sp>
+        <p:nvSpPr>
+          <p:cNvPr id="8" name="Rectangle : coins arrondis 7">
+            <a:extLst>
+              <a:ext uri="{FF2B5EF4-FFF2-40B4-BE49-F238E27FC236}">
+                <a16:creationId xmlns:a16="http://schemas.microsoft.com/office/drawing/2014/main" id="{2BCA39A0-2C1D-E1C4-795E-0EFCBC17F2C8}"/>
+              </a:ext>
+            </a:extLst>
+          </p:cNvPr>
+          <p:cNvSpPr/>
+          <p:nvPr/>
+        </p:nvSpPr>
+        <p:spPr>
+          <a:xfrm>
+            <a:off x="3475565" y="4749792"/>
+            <a:ext cx="1845734" cy="1083734"/>
+          </a:xfrm>
+          <a:prstGeom prst="roundRect">
+            <a:avLst/>
+          </a:prstGeom>
+        </p:spPr>
+        <p:style>
+          <a:lnRef idx="2">
+            <a:schemeClr val="accent1">
+              <a:shade val="15000"/>
+            </a:schemeClr>
+          </a:lnRef>
+          <a:fillRef idx="1">
+            <a:schemeClr val="accent1"/>
+          </a:fillRef>
+          <a:effectRef idx="0">
+            <a:schemeClr val="accent1"/>
+          </a:effectRef>
+          <a:fontRef idx="minor">
+            <a:schemeClr val="lt1"/>
+          </a:fontRef>
+        </p:style>
+        <p:txBody>
+          <a:bodyPr rtlCol="0" anchor="ctr"/>
+          <a:lstStyle/>
+          <a:p>
+            <a:pPr algn="ctr"/>
+            <a:r>
+              <a:rPr lang="fr-FR" dirty="0"/>
+              <a:t>Serveur secondaire 2 (MongoDB)</a:t>
+            </a:r>
+          </a:p>
+        </p:txBody>
+      </p:sp>
+      <p:cxnSp>
+        <p:nvCxnSpPr>
+          <p:cNvPr id="10" name="Connecteur droit avec flèche 9">
+            <a:extLst>
+              <a:ext uri="{FF2B5EF4-FFF2-40B4-BE49-F238E27FC236}">
+                <a16:creationId xmlns:a16="http://schemas.microsoft.com/office/drawing/2014/main" id="{8C0B2301-AFA1-A3E5-0A47-3A3670F844D4}"/>
+              </a:ext>
+            </a:extLst>
+          </p:cNvPr>
+          <p:cNvCxnSpPr>
+            <a:stCxn id="5" idx="2"/>
+            <a:endCxn id="7" idx="0"/>
+          </p:cNvCxnSpPr>
+          <p:nvPr/>
+        </p:nvCxnSpPr>
+        <p:spPr>
+          <a:xfrm flipH="1">
+            <a:off x="1733673" y="3810262"/>
+            <a:ext cx="2448860" cy="945540"/>
+          </a:xfrm>
+          <a:prstGeom prst="straightConnector1">
+            <a:avLst/>
+          </a:prstGeom>
+          <a:ln>
+            <a:tailEnd type="triangle"/>
+          </a:ln>
+        </p:spPr>
+        <p:style>
+          <a:lnRef idx="1">
+            <a:schemeClr val="accent1"/>
+          </a:lnRef>
+          <a:fillRef idx="0">
+            <a:schemeClr val="accent1"/>
+          </a:fillRef>
+          <a:effectRef idx="0">
+            <a:schemeClr val="accent1"/>
+          </a:effectRef>
+          <a:fontRef idx="minor">
+            <a:schemeClr val="tx1"/>
+          </a:fontRef>
+        </p:style>
+      </p:cxnSp>
+      <p:cxnSp>
+        <p:nvCxnSpPr>
+          <p:cNvPr id="11" name="Connecteur droit avec flèche 10">
+            <a:extLst>
+              <a:ext uri="{FF2B5EF4-FFF2-40B4-BE49-F238E27FC236}">
+                <a16:creationId xmlns:a16="http://schemas.microsoft.com/office/drawing/2014/main" id="{4CC3D96B-2524-9F2C-2E35-FC39E2413B9A}"/>
+              </a:ext>
+            </a:extLst>
+          </p:cNvPr>
+          <p:cNvCxnSpPr>
+            <a:cxnSpLocks/>
+            <a:stCxn id="5" idx="2"/>
+            <a:endCxn id="8" idx="0"/>
+          </p:cNvCxnSpPr>
+          <p:nvPr/>
+        </p:nvCxnSpPr>
+        <p:spPr>
+          <a:xfrm>
+            <a:off x="4182533" y="3810262"/>
+            <a:ext cx="215899" cy="939530"/>
+          </a:xfrm>
+          <a:prstGeom prst="straightConnector1">
+            <a:avLst/>
+          </a:prstGeom>
+          <a:ln>
+            <a:tailEnd type="triangle"/>
+          </a:ln>
+        </p:spPr>
+        <p:style>
+          <a:lnRef idx="1">
+            <a:schemeClr val="accent1"/>
+          </a:lnRef>
+          <a:fillRef idx="0">
+            <a:schemeClr val="accent1"/>
+          </a:fillRef>
+          <a:effectRef idx="0">
+            <a:schemeClr val="accent1"/>
+          </a:effectRef>
+          <a:fontRef idx="minor">
+            <a:schemeClr val="tx1"/>
+          </a:fontRef>
+        </p:style>
+      </p:cxnSp>
+      <p:cxnSp>
+        <p:nvCxnSpPr>
+          <p:cNvPr id="14" name="Connecteur droit avec flèche 13">
+            <a:extLst>
+              <a:ext uri="{FF2B5EF4-FFF2-40B4-BE49-F238E27FC236}">
+                <a16:creationId xmlns:a16="http://schemas.microsoft.com/office/drawing/2014/main" id="{2BD6647D-C911-B216-49ED-41B5C13B9C83}"/>
+              </a:ext>
+            </a:extLst>
+          </p:cNvPr>
+          <p:cNvCxnSpPr>
+            <a:cxnSpLocks/>
+            <a:stCxn id="5" idx="3"/>
+            <a:endCxn id="6" idx="1"/>
+          </p:cNvCxnSpPr>
+          <p:nvPr/>
+        </p:nvCxnSpPr>
+        <p:spPr>
+          <a:xfrm>
+            <a:off x="5105400" y="3268395"/>
+            <a:ext cx="2322854" cy="0"/>
+          </a:xfrm>
+          <a:prstGeom prst="straightConnector1">
+            <a:avLst/>
+          </a:prstGeom>
+          <a:ln>
+            <a:tailEnd type="triangle"/>
+          </a:ln>
+        </p:spPr>
+        <p:style>
+          <a:lnRef idx="1">
+            <a:schemeClr val="accent1"/>
+          </a:lnRef>
+          <a:fillRef idx="0">
+            <a:schemeClr val="accent1"/>
+          </a:fillRef>
+          <a:effectRef idx="0">
+            <a:schemeClr val="accent1"/>
+          </a:effectRef>
+          <a:fontRef idx="minor">
+            <a:schemeClr val="tx1"/>
+          </a:fontRef>
+        </p:style>
+      </p:cxnSp>
+      <p:sp>
+        <p:nvSpPr>
+          <p:cNvPr id="17" name="ZoneTexte 16">
+            <a:extLst>
+              <a:ext uri="{FF2B5EF4-FFF2-40B4-BE49-F238E27FC236}">
+                <a16:creationId xmlns:a16="http://schemas.microsoft.com/office/drawing/2014/main" id="{2DDECD21-D841-E227-F633-0C5710EAC28D}"/>
+              </a:ext>
+            </a:extLst>
+          </p:cNvPr>
+          <p:cNvSpPr txBox="1"/>
+          <p:nvPr/>
+        </p:nvSpPr>
+        <p:spPr>
+          <a:xfrm>
+            <a:off x="2582333" y="4362794"/>
+            <a:ext cx="1354665" cy="307777"/>
+          </a:xfrm>
+          <a:prstGeom prst="rect">
+            <a:avLst/>
+          </a:prstGeom>
+          <a:noFill/>
+        </p:spPr>
+        <p:txBody>
+          <a:bodyPr wrap="square" rtlCol="0">
+            <a:spAutoFit/>
+          </a:bodyPr>
+          <a:lstStyle/>
+          <a:p>
+            <a:r>
+              <a:rPr lang="fr-FR" sz="1400" dirty="0"/>
+              <a:t>réplication</a:t>
+            </a:r>
+          </a:p>
+        </p:txBody>
+      </p:sp>
+      <p:sp>
+        <p:nvSpPr>
+          <p:cNvPr id="18" name="ZoneTexte 17">
+            <a:extLst>
+              <a:ext uri="{FF2B5EF4-FFF2-40B4-BE49-F238E27FC236}">
+                <a16:creationId xmlns:a16="http://schemas.microsoft.com/office/drawing/2014/main" id="{3CA9D9E9-649C-3BA2-71CB-333A761B1904}"/>
+              </a:ext>
+            </a:extLst>
+          </p:cNvPr>
+          <p:cNvSpPr txBox="1"/>
+          <p:nvPr/>
+        </p:nvSpPr>
+        <p:spPr>
+          <a:xfrm>
+            <a:off x="4330823" y="4307532"/>
+            <a:ext cx="1354665" cy="307777"/>
+          </a:xfrm>
+          <a:prstGeom prst="rect">
+            <a:avLst/>
+          </a:prstGeom>
+          <a:noFill/>
+        </p:spPr>
+        <p:txBody>
+          <a:bodyPr wrap="square" rtlCol="0">
+            <a:spAutoFit/>
+          </a:bodyPr>
+          <a:lstStyle/>
+          <a:p>
+            <a:r>
+              <a:rPr lang="fr-FR" sz="1400" dirty="0"/>
+              <a:t>réplication</a:t>
+            </a:r>
+          </a:p>
+        </p:txBody>
+      </p:sp>
+      <p:sp>
+        <p:nvSpPr>
+          <p:cNvPr id="19" name="ZoneTexte 18">
+            <a:extLst>
+              <a:ext uri="{FF2B5EF4-FFF2-40B4-BE49-F238E27FC236}">
+                <a16:creationId xmlns:a16="http://schemas.microsoft.com/office/drawing/2014/main" id="{EF0E01BC-F91E-FB79-8FFE-4C065074C25B}"/>
+              </a:ext>
+            </a:extLst>
+          </p:cNvPr>
+          <p:cNvSpPr txBox="1"/>
+          <p:nvPr/>
+        </p:nvSpPr>
+        <p:spPr>
+          <a:xfrm>
+            <a:off x="5418667" y="2962370"/>
+            <a:ext cx="1354665" cy="307777"/>
+          </a:xfrm>
+          <a:prstGeom prst="rect">
+            <a:avLst/>
+          </a:prstGeom>
+          <a:noFill/>
+        </p:spPr>
+        <p:txBody>
+          <a:bodyPr wrap="square" rtlCol="0">
+            <a:spAutoFit/>
+          </a:bodyPr>
+          <a:lstStyle/>
+          <a:p>
+            <a:r>
+              <a:rPr lang="fr-FR" sz="1400" dirty="0"/>
+              <a:t>lecture</a:t>
+            </a:r>
+          </a:p>
+        </p:txBody>
+      </p:sp>
+      <p:sp>
+        <p:nvSpPr>
+          <p:cNvPr id="20" name="Rectangle : coins arrondis 19">
+            <a:extLst>
+              <a:ext uri="{FF2B5EF4-FFF2-40B4-BE49-F238E27FC236}">
+                <a16:creationId xmlns:a16="http://schemas.microsoft.com/office/drawing/2014/main" id="{4EDC755B-B800-4C49-671D-F6457FEF35E6}"/>
+              </a:ext>
+            </a:extLst>
+          </p:cNvPr>
+          <p:cNvSpPr/>
+          <p:nvPr/>
+        </p:nvSpPr>
+        <p:spPr>
+          <a:xfrm>
+            <a:off x="491065" y="2726528"/>
+            <a:ext cx="1845734" cy="1083734"/>
+          </a:xfrm>
+          <a:prstGeom prst="roundRect">
+            <a:avLst/>
+          </a:prstGeom>
+        </p:spPr>
+        <p:style>
+          <a:lnRef idx="2">
+            <a:schemeClr val="accent1">
+              <a:shade val="15000"/>
+            </a:schemeClr>
+          </a:lnRef>
+          <a:fillRef idx="1">
+            <a:schemeClr val="accent1"/>
+          </a:fillRef>
+          <a:effectRef idx="0">
+            <a:schemeClr val="accent1"/>
+          </a:effectRef>
+          <a:fontRef idx="minor">
+            <a:schemeClr val="lt1"/>
+          </a:fontRef>
+        </p:style>
+        <p:txBody>
+          <a:bodyPr rtlCol="0" anchor="ctr"/>
+          <a:lstStyle/>
+          <a:p>
+            <a:pPr algn="ctr"/>
+            <a:r>
+              <a:rPr lang="fr-FR" dirty="0"/>
+              <a:t>Driver</a:t>
+            </a:r>
+          </a:p>
+        </p:txBody>
+      </p:sp>
+      <p:cxnSp>
+        <p:nvCxnSpPr>
+          <p:cNvPr id="21" name="Connecteur droit avec flèche 20">
+            <a:extLst>
+              <a:ext uri="{FF2B5EF4-FFF2-40B4-BE49-F238E27FC236}">
+                <a16:creationId xmlns:a16="http://schemas.microsoft.com/office/drawing/2014/main" id="{05A232EE-39AA-39BD-41FE-38178A8453EF}"/>
+              </a:ext>
+            </a:extLst>
+          </p:cNvPr>
+          <p:cNvCxnSpPr>
+            <a:cxnSpLocks/>
+            <a:endCxn id="5" idx="1"/>
+          </p:cNvCxnSpPr>
+          <p:nvPr/>
+        </p:nvCxnSpPr>
+        <p:spPr>
+          <a:xfrm>
+            <a:off x="2336799" y="3268395"/>
+            <a:ext cx="922867" cy="0"/>
+          </a:xfrm>
+          <a:prstGeom prst="straightConnector1">
+            <a:avLst/>
+          </a:prstGeom>
+          <a:ln>
+            <a:tailEnd type="triangle"/>
+          </a:ln>
+        </p:spPr>
+        <p:style>
+          <a:lnRef idx="1">
+            <a:schemeClr val="accent1"/>
+          </a:lnRef>
+          <a:fillRef idx="0">
+            <a:schemeClr val="accent1"/>
+          </a:fillRef>
+          <a:effectRef idx="0">
+            <a:schemeClr val="accent1"/>
+          </a:effectRef>
+          <a:fontRef idx="minor">
+            <a:schemeClr val="tx1"/>
+          </a:fontRef>
+        </p:style>
+      </p:cxnSp>
+      <p:sp>
+        <p:nvSpPr>
+          <p:cNvPr id="23" name="ZoneTexte 22">
+            <a:extLst>
+              <a:ext uri="{FF2B5EF4-FFF2-40B4-BE49-F238E27FC236}">
+                <a16:creationId xmlns:a16="http://schemas.microsoft.com/office/drawing/2014/main" id="{2C471F2C-E4A2-3BC9-5543-94E1156D08DF}"/>
+              </a:ext>
+            </a:extLst>
+          </p:cNvPr>
+          <p:cNvSpPr txBox="1"/>
+          <p:nvPr/>
+        </p:nvSpPr>
+        <p:spPr>
+          <a:xfrm>
+            <a:off x="2336800" y="2751185"/>
+            <a:ext cx="1354665" cy="523220"/>
+          </a:xfrm>
+          <a:prstGeom prst="rect">
+            <a:avLst/>
+          </a:prstGeom>
+          <a:noFill/>
+        </p:spPr>
+        <p:txBody>
+          <a:bodyPr wrap="square" rtlCol="0">
+            <a:spAutoFit/>
+          </a:bodyPr>
+          <a:lstStyle/>
+          <a:p>
+            <a:r>
+              <a:rPr lang="fr-FR" sz="1400" dirty="0"/>
+              <a:t>Lecture</a:t>
+            </a:r>
+          </a:p>
+          <a:p>
+            <a:r>
+              <a:rPr lang="fr-FR" sz="1400" dirty="0"/>
+              <a:t>écriture</a:t>
+            </a:r>
+          </a:p>
+        </p:txBody>
+      </p:sp>
+      <p:sp>
+        <p:nvSpPr>
+          <p:cNvPr id="12" name="Rectangle : coins arrondis 11">
+            <a:extLst>
+              <a:ext uri="{FF2B5EF4-FFF2-40B4-BE49-F238E27FC236}">
+                <a16:creationId xmlns:a16="http://schemas.microsoft.com/office/drawing/2014/main" id="{01391296-D77B-A72D-BEE4-1265EE123036}"/>
+              </a:ext>
+            </a:extLst>
+          </p:cNvPr>
+          <p:cNvSpPr/>
+          <p:nvPr/>
+        </p:nvSpPr>
+        <p:spPr>
+          <a:xfrm>
+            <a:off x="5947836" y="4749792"/>
+            <a:ext cx="1845734" cy="1083734"/>
+          </a:xfrm>
+          <a:prstGeom prst="roundRect">
+            <a:avLst/>
+          </a:prstGeom>
+        </p:spPr>
+        <p:style>
+          <a:lnRef idx="2">
+            <a:schemeClr val="accent1">
+              <a:shade val="15000"/>
+            </a:schemeClr>
+          </a:lnRef>
+          <a:fillRef idx="1">
+            <a:schemeClr val="accent1"/>
+          </a:fillRef>
+          <a:effectRef idx="0">
+            <a:schemeClr val="accent1"/>
+          </a:effectRef>
+          <a:fontRef idx="minor">
+            <a:schemeClr val="lt1"/>
+          </a:fontRef>
+        </p:style>
+        <p:txBody>
+          <a:bodyPr rtlCol="0" anchor="ctr"/>
+          <a:lstStyle/>
+          <a:p>
+            <a:pPr algn="ctr"/>
+            <a:r>
+              <a:rPr lang="fr-FR" dirty="0"/>
+              <a:t>Serveur arbitre</a:t>
+            </a:r>
+          </a:p>
+        </p:txBody>
+      </p:sp>
+      <p:cxnSp>
+        <p:nvCxnSpPr>
+          <p:cNvPr id="16" name="Connecteur : en angle 15">
+            <a:extLst>
+              <a:ext uri="{FF2B5EF4-FFF2-40B4-BE49-F238E27FC236}">
+                <a16:creationId xmlns:a16="http://schemas.microsoft.com/office/drawing/2014/main" id="{1691C446-C4AB-343C-584A-F93BF6CED243}"/>
+              </a:ext>
+            </a:extLst>
+          </p:cNvPr>
+          <p:cNvCxnSpPr>
+            <a:cxnSpLocks/>
+            <a:stCxn id="12" idx="0"/>
+          </p:cNvCxnSpPr>
+          <p:nvPr/>
+        </p:nvCxnSpPr>
+        <p:spPr>
+          <a:xfrm rot="16200000" flipV="1">
+            <a:off x="5400366" y="3279455"/>
+            <a:ext cx="1175371" cy="1765304"/>
+          </a:xfrm>
+          <a:prstGeom prst="bentConnector2">
+            <a:avLst/>
+          </a:prstGeom>
+          <a:ln>
+            <a:tailEnd type="triangle"/>
+          </a:ln>
+        </p:spPr>
+        <p:style>
+          <a:lnRef idx="1">
+            <a:schemeClr val="accent1"/>
+          </a:lnRef>
+          <a:fillRef idx="0">
+            <a:schemeClr val="accent1"/>
+          </a:fillRef>
+          <a:effectRef idx="0">
+            <a:schemeClr val="accent1"/>
+          </a:effectRef>
+          <a:fontRef idx="minor">
+            <a:schemeClr val="tx1"/>
+          </a:fontRef>
+        </p:style>
+      </p:cxnSp>
+      <p:cxnSp>
+        <p:nvCxnSpPr>
+          <p:cNvPr id="26" name="Connecteur : en angle 25">
+            <a:extLst>
+              <a:ext uri="{FF2B5EF4-FFF2-40B4-BE49-F238E27FC236}">
+                <a16:creationId xmlns:a16="http://schemas.microsoft.com/office/drawing/2014/main" id="{F5C68CF9-367B-AA54-F65F-965BA44FD4AC}"/>
+              </a:ext>
+            </a:extLst>
+          </p:cNvPr>
+          <p:cNvCxnSpPr>
+            <a:cxnSpLocks/>
+            <a:stCxn id="12" idx="2"/>
+            <a:endCxn id="7" idx="2"/>
+          </p:cNvCxnSpPr>
+          <p:nvPr/>
+        </p:nvCxnSpPr>
+        <p:spPr>
+          <a:xfrm rot="5400000">
+            <a:off x="4299183" y="3268016"/>
+            <a:ext cx="6010" cy="5137030"/>
+          </a:xfrm>
+          <a:prstGeom prst="bentConnector3">
+            <a:avLst>
+              <a:gd name="adj1" fmla="val 7185241"/>
+            </a:avLst>
+          </a:prstGeom>
+          <a:ln>
+            <a:tailEnd type="triangle"/>
+          </a:ln>
+        </p:spPr>
+        <p:style>
+          <a:lnRef idx="1">
+            <a:schemeClr val="accent1"/>
+          </a:lnRef>
+          <a:fillRef idx="0">
+            <a:schemeClr val="accent1"/>
+          </a:fillRef>
+          <a:effectRef idx="0">
+            <a:schemeClr val="accent1"/>
+          </a:effectRef>
+          <a:fontRef idx="minor">
+            <a:schemeClr val="tx1"/>
+          </a:fontRef>
+        </p:style>
+      </p:cxnSp>
+      <p:cxnSp>
+        <p:nvCxnSpPr>
+          <p:cNvPr id="28" name="Connecteur droit avec flèche 27">
+            <a:extLst>
+              <a:ext uri="{FF2B5EF4-FFF2-40B4-BE49-F238E27FC236}">
+                <a16:creationId xmlns:a16="http://schemas.microsoft.com/office/drawing/2014/main" id="{4CBA21BC-2EF8-F444-1022-62FB7A69736C}"/>
+              </a:ext>
+            </a:extLst>
+          </p:cNvPr>
+          <p:cNvCxnSpPr>
+            <a:cxnSpLocks/>
+            <a:stCxn id="12" idx="1"/>
+            <a:endCxn id="8" idx="3"/>
+          </p:cNvCxnSpPr>
+          <p:nvPr/>
+        </p:nvCxnSpPr>
+        <p:spPr>
+          <a:xfrm flipH="1">
+            <a:off x="5321299" y="5291659"/>
+            <a:ext cx="626537" cy="0"/>
+          </a:xfrm>
+          <a:prstGeom prst="straightConnector1">
+            <a:avLst/>
+          </a:prstGeom>
+          <a:ln>
+            <a:tailEnd type="triangle"/>
+          </a:ln>
+        </p:spPr>
+        <p:style>
+          <a:lnRef idx="1">
+            <a:schemeClr val="accent1"/>
+          </a:lnRef>
+          <a:fillRef idx="0">
+            <a:schemeClr val="accent1"/>
+          </a:fillRef>
+          <a:effectRef idx="0">
+            <a:schemeClr val="accent1"/>
+          </a:effectRef>
+          <a:fontRef idx="minor">
+            <a:schemeClr val="tx1"/>
+          </a:fontRef>
+        </p:style>
+      </p:cxnSp>
+    </p:spTree>
+    <p:extLst>
+      <p:ext uri="{BB962C8B-B14F-4D97-AF65-F5344CB8AC3E}">
+        <p14:creationId xmlns:p14="http://schemas.microsoft.com/office/powerpoint/2010/main" val="503039048"/>
+      </p:ext>
+    </p:extLst>
+  </p:cSld>
+  <p:clrMapOvr>
+    <a:masterClrMapping/>
+  </p:clrMapOvr>
+</p:sld>
+</file>
+
+<file path=ppt/slides/slide13.xml><?xml version="1.0" encoding="utf-8"?>
+<p:sld xmlns:a="http://schemas.openxmlformats.org/drawingml/2006/main" xmlns:r="http://schemas.openxmlformats.org/officeDocument/2006/relationships" xmlns:p="http://schemas.openxmlformats.org/presentationml/2006/main">
+  <p:cSld>
+    <p:spTree>
+      <p:nvGrpSpPr>
+        <p:cNvPr id="1" name="">
+          <a:extLst>
+            <a:ext uri="{FF2B5EF4-FFF2-40B4-BE49-F238E27FC236}">
+              <a16:creationId xmlns:a16="http://schemas.microsoft.com/office/drawing/2014/main" id="{848EA76E-7D6F-3FA0-767A-8C91F13BAC0D}"/>
+            </a:ext>
+          </a:extLst>
+        </p:cNvPr>
+        <p:cNvGrpSpPr/>
+        <p:nvPr/>
+      </p:nvGrpSpPr>
+      <p:grpSpPr>
+        <a:xfrm>
+          <a:off x="0" y="0"/>
+          <a:ext cx="0" cy="0"/>
+          <a:chOff x="0" y="0"/>
+          <a:chExt cx="0" cy="0"/>
+        </a:xfrm>
+      </p:grpSpPr>
+      <p:sp>
+        <p:nvSpPr>
+          <p:cNvPr id="2" name="Titre 1">
+            <a:extLst>
+              <a:ext uri="{FF2B5EF4-FFF2-40B4-BE49-F238E27FC236}">
+                <a16:creationId xmlns:a16="http://schemas.microsoft.com/office/drawing/2014/main" id="{A5E0D19F-0717-29FB-0AFD-6144C1F5324E}"/>
+              </a:ext>
+            </a:extLst>
+          </p:cNvPr>
+          <p:cNvSpPr>
+            <a:spLocks noGrp="1"/>
+          </p:cNvSpPr>
+          <p:nvPr>
+            <p:ph type="title"/>
+          </p:nvPr>
+        </p:nvSpPr>
+        <p:spPr/>
+        <p:txBody>
+          <a:bodyPr/>
+          <a:lstStyle/>
+          <a:p>
+            <a:r>
+              <a:rPr lang="fr-FR" dirty="0"/>
+              <a:t>7. Réplication des données</a:t>
+            </a:r>
+            <a:br>
+              <a:rPr lang="fr-FR" dirty="0"/>
+            </a:br>
+            <a:r>
+              <a:rPr lang="fr-FR" sz="1800" dirty="0"/>
+              <a:t>Processus pour répliquer</a:t>
+            </a:r>
+            <a:endParaRPr lang="fr-FR" dirty="0"/>
+          </a:p>
+        </p:txBody>
+      </p:sp>
+      <p:graphicFrame>
+        <p:nvGraphicFramePr>
+          <p:cNvPr id="5" name="Espace réservé du contenu 4">
+            <a:extLst>
+              <a:ext uri="{FF2B5EF4-FFF2-40B4-BE49-F238E27FC236}">
+                <a16:creationId xmlns:a16="http://schemas.microsoft.com/office/drawing/2014/main" id="{6BC3CFD3-3550-692F-424F-EA419A15366F}"/>
+              </a:ext>
+            </a:extLst>
+          </p:cNvPr>
+          <p:cNvGraphicFramePr>
+            <a:graphicFrameLocks noGrp="1"/>
+          </p:cNvGraphicFramePr>
+          <p:nvPr>
+            <p:ph idx="1"/>
+            <p:extLst>
+              <p:ext uri="{D42A27DB-BD31-4B8C-83A1-F6EECF244321}">
+                <p14:modId xmlns:p14="http://schemas.microsoft.com/office/powerpoint/2010/main" val="368168728"/>
+              </p:ext>
+            </p:extLst>
+          </p:nvPr>
+        </p:nvGraphicFramePr>
+        <p:xfrm>
+          <a:off x="580858" y="2039556"/>
+          <a:ext cx="11029950" cy="4272280"/>
+        </p:xfrm>
+        <a:graphic>
+          <a:graphicData uri="http://schemas.openxmlformats.org/drawingml/2006/table">
+            <a:tbl>
+              <a:tblPr firstRow="1" bandRow="1">
+                <a:tableStyleId>{5C22544A-7EE6-4342-B048-85BDC9FD1C3A}</a:tableStyleId>
+              </a:tblPr>
+              <a:tblGrid>
+                <a:gridCol w="3676650">
+                  <a:extLst>
+                    <a:ext uri="{9D8B030D-6E8A-4147-A177-3AD203B41FA5}">
+                      <a16:colId xmlns:a16="http://schemas.microsoft.com/office/drawing/2014/main" val="4223413128"/>
+                    </a:ext>
+                  </a:extLst>
+                </a:gridCol>
+                <a:gridCol w="5411425">
+                  <a:extLst>
+                    <a:ext uri="{9D8B030D-6E8A-4147-A177-3AD203B41FA5}">
+                      <a16:colId xmlns:a16="http://schemas.microsoft.com/office/drawing/2014/main" val="256063923"/>
+                    </a:ext>
+                  </a:extLst>
+                </a:gridCol>
+                <a:gridCol w="1941875">
+                  <a:extLst>
+                    <a:ext uri="{9D8B030D-6E8A-4147-A177-3AD203B41FA5}">
+                      <a16:colId xmlns:a16="http://schemas.microsoft.com/office/drawing/2014/main" val="3064672858"/>
+                    </a:ext>
+                  </a:extLst>
+                </a:gridCol>
+              </a:tblGrid>
+              <a:tr h="370840">
+                <a:tc>
+                  <a:txBody>
+                    <a:bodyPr/>
+                    <a:lstStyle/>
+                    <a:p>
+                      <a:r>
+                        <a:rPr lang="fr-FR" dirty="0"/>
+                        <a:t>Etapes</a:t>
+                      </a:r>
+                    </a:p>
+                  </a:txBody>
+                  <a:tcPr/>
+                </a:tc>
+                <a:tc>
+                  <a:txBody>
+                    <a:bodyPr/>
+                    <a:lstStyle/>
+                    <a:p>
+                      <a:endParaRPr lang="fr-FR"/>
+                    </a:p>
+                  </a:txBody>
+                  <a:tcPr/>
+                </a:tc>
+                <a:tc>
+                  <a:txBody>
+                    <a:bodyPr/>
+                    <a:lstStyle/>
+                    <a:p>
+                      <a:endParaRPr lang="fr-FR" dirty="0"/>
+                    </a:p>
+                  </a:txBody>
+                  <a:tcPr/>
+                </a:tc>
+                <a:extLst>
+                  <a:ext uri="{0D108BD9-81ED-4DB2-BD59-A6C34878D82A}">
+                    <a16:rowId xmlns:a16="http://schemas.microsoft.com/office/drawing/2014/main" val="78701484"/>
+                  </a:ext>
+                </a:extLst>
+              </a:tr>
+              <a:tr h="0">
+                <a:tc>
+                  <a:txBody>
+                    <a:bodyPr/>
+                    <a:lstStyle/>
+                    <a:p>
+                      <a:r>
+                        <a:rPr lang="fr-FR" dirty="0"/>
+                        <a:t>Création des répertoires</a:t>
+                      </a:r>
+                    </a:p>
+                  </a:txBody>
+                  <a:tcPr/>
+                </a:tc>
+                <a:tc>
+                  <a:txBody>
+                    <a:bodyPr/>
+                    <a:lstStyle/>
+                    <a:p>
+                      <a:r>
+                        <a:rPr lang="fr-FR" sz="1400" dirty="0" err="1"/>
+                        <a:t>mkdir</a:t>
+                      </a:r>
+                      <a:r>
+                        <a:rPr lang="fr-FR" sz="1400" dirty="0"/>
+                        <a:t> "C:\Users\sebas\Documents\cours </a:t>
+                      </a:r>
+                      <a:r>
+                        <a:rPr lang="fr-FR" sz="1400" dirty="0" err="1"/>
+                        <a:t>Openclassrooms</a:t>
+                      </a:r>
+                      <a:r>
+                        <a:rPr lang="fr-FR" sz="1400" dirty="0"/>
+                        <a:t>\Data </a:t>
+                      </a:r>
+                      <a:r>
+                        <a:rPr lang="fr-FR" sz="1400" dirty="0" err="1"/>
+                        <a:t>Engineer</a:t>
+                      </a:r>
+                      <a:r>
+                        <a:rPr lang="fr-FR" sz="1400" dirty="0"/>
+                        <a:t>\projet 7\_data\R0S1"  (</a:t>
+                      </a:r>
+                      <a:r>
+                        <a:rPr lang="fr-FR" sz="1400" dirty="0" err="1"/>
+                        <a:t>ReplicatSet</a:t>
+                      </a:r>
+                      <a:r>
+                        <a:rPr lang="fr-FR" sz="1400" dirty="0"/>
+                        <a:t> 0 / Serveur 1)</a:t>
+                      </a:r>
+                    </a:p>
+                    <a:p>
+                      <a:endParaRPr lang="fr-FR" sz="1400" dirty="0"/>
+                    </a:p>
+                    <a:p>
+                      <a:r>
+                        <a:rPr lang="fr-FR" sz="1400" dirty="0" err="1"/>
+                        <a:t>mkdir</a:t>
+                      </a:r>
+                      <a:r>
+                        <a:rPr lang="fr-FR" sz="1400" dirty="0"/>
+                        <a:t> "C:\Users\sebas\Documents\cours </a:t>
+                      </a:r>
+                      <a:r>
+                        <a:rPr lang="fr-FR" sz="1400" dirty="0" err="1"/>
+                        <a:t>Openclassrooms</a:t>
+                      </a:r>
+                      <a:r>
+                        <a:rPr lang="fr-FR" sz="1400" dirty="0"/>
+                        <a:t>\Data </a:t>
+                      </a:r>
+                      <a:r>
+                        <a:rPr lang="fr-FR" sz="1400" dirty="0" err="1"/>
+                        <a:t>Engineer</a:t>
+                      </a:r>
+                      <a:r>
+                        <a:rPr lang="fr-FR" sz="1400" dirty="0"/>
+                        <a:t>\projet 7\_data\R0S2" (</a:t>
+                      </a:r>
+                      <a:r>
+                        <a:rPr lang="fr-FR" sz="1400" dirty="0" err="1"/>
+                        <a:t>ReplicatSet</a:t>
+                      </a:r>
+                      <a:r>
+                        <a:rPr lang="fr-FR" sz="1400" dirty="0"/>
+                        <a:t> 0 / Serveur 2)</a:t>
+                      </a:r>
+                    </a:p>
+                    <a:p>
+                      <a:endParaRPr lang="fr-FR" sz="1400" dirty="0"/>
+                    </a:p>
+                    <a:p>
+                      <a:r>
+                        <a:rPr lang="fr-FR" sz="1400" dirty="0" err="1"/>
+                        <a:t>mkdir</a:t>
+                      </a:r>
+                      <a:r>
+                        <a:rPr lang="fr-FR" sz="1400" dirty="0"/>
+                        <a:t> "C:\Users\sebas\Documents\cours </a:t>
+                      </a:r>
+                      <a:r>
+                        <a:rPr lang="fr-FR" sz="1400" dirty="0" err="1"/>
+                        <a:t>Openclassrooms</a:t>
+                      </a:r>
+                      <a:r>
+                        <a:rPr lang="fr-FR" sz="1400" dirty="0"/>
+                        <a:t>\Data </a:t>
+                      </a:r>
+                      <a:r>
+                        <a:rPr lang="fr-FR" sz="1400" dirty="0" err="1"/>
+                        <a:t>Engineer</a:t>
+                      </a:r>
+                      <a:r>
+                        <a:rPr lang="fr-FR" sz="1400" dirty="0"/>
+                        <a:t>\projet 7\_data\R0S3" (</a:t>
+                      </a:r>
+                      <a:r>
+                        <a:rPr lang="fr-FR" sz="1400" dirty="0" err="1"/>
+                        <a:t>ReplicatSet</a:t>
+                      </a:r>
+                      <a:r>
+                        <a:rPr lang="fr-FR" sz="1400" dirty="0"/>
+                        <a:t> 0 / Serveur 3)</a:t>
+                      </a:r>
+                    </a:p>
+                    <a:p>
+                      <a:endParaRPr lang="fr-FR" sz="1400" dirty="0"/>
+                    </a:p>
+                    <a:p>
+                      <a:r>
+                        <a:rPr lang="fr-FR" sz="1400" dirty="0" err="1"/>
+                        <a:t>mkdir</a:t>
+                      </a:r>
+                      <a:r>
+                        <a:rPr lang="fr-FR" sz="1400" dirty="0"/>
+                        <a:t> "C:\Users\sebas\Documents\cours </a:t>
+                      </a:r>
+                      <a:r>
+                        <a:rPr lang="fr-FR" sz="1400" dirty="0" err="1"/>
+                        <a:t>Openclassrooms</a:t>
+                      </a:r>
+                      <a:r>
+                        <a:rPr lang="fr-FR" sz="1400" dirty="0"/>
+                        <a:t>\Data </a:t>
+                      </a:r>
+                      <a:r>
+                        <a:rPr lang="fr-FR" sz="1400" dirty="0" err="1"/>
+                        <a:t>Engineer</a:t>
+                      </a:r>
+                      <a:r>
+                        <a:rPr lang="fr-FR" sz="1400" dirty="0"/>
+                        <a:t>\projet 7\_data\arbiter_R0"</a:t>
+                      </a:r>
+                      <a:endParaRPr lang="fr-FR" dirty="0"/>
+                    </a:p>
+                  </a:txBody>
+                  <a:tcPr/>
+                </a:tc>
+                <a:tc>
+                  <a:txBody>
+                    <a:bodyPr/>
+                    <a:lstStyle/>
+                    <a:p>
+                      <a:r>
+                        <a:rPr lang="fr-FR" sz="1400" dirty="0"/>
+                        <a:t>Opérations à faire dans l’invite de commande</a:t>
+                      </a:r>
+                    </a:p>
+                  </a:txBody>
+                  <a:tcPr/>
+                </a:tc>
+                <a:extLst>
+                  <a:ext uri="{0D108BD9-81ED-4DB2-BD59-A6C34878D82A}">
+                    <a16:rowId xmlns:a16="http://schemas.microsoft.com/office/drawing/2014/main" val="3792532797"/>
+                  </a:ext>
+                </a:extLst>
+              </a:tr>
+              <a:tr h="370840">
+                <a:tc rowSpan="2">
+                  <a:txBody>
+                    <a:bodyPr/>
+                    <a:lstStyle/>
+                    <a:p>
+                      <a:r>
+                        <a:rPr lang="fr-FR" dirty="0"/>
+                        <a:t>Lancement serveur 1 primaire</a:t>
+                      </a:r>
+                    </a:p>
+                  </a:txBody>
+                  <a:tcPr/>
+                </a:tc>
+                <a:tc>
+                  <a:txBody>
+                    <a:bodyPr/>
+                    <a:lstStyle/>
+                    <a:p>
+                      <a:r>
+                        <a:rPr lang="en-US" sz="1400" kern="1200" dirty="0" err="1">
+                          <a:solidFill>
+                            <a:schemeClr val="dk1"/>
+                          </a:solidFill>
+                          <a:latin typeface="+mn-lt"/>
+                          <a:ea typeface="+mn-ea"/>
+                          <a:cs typeface="+mn-cs"/>
+                        </a:rPr>
+                        <a:t>mongod</a:t>
+                      </a:r>
+                      <a:r>
+                        <a:rPr lang="en-US" sz="1400" kern="1200" dirty="0">
+                          <a:solidFill>
+                            <a:schemeClr val="dk1"/>
+                          </a:solidFill>
+                          <a:latin typeface="+mn-lt"/>
+                          <a:ea typeface="+mn-ea"/>
+                          <a:cs typeface="+mn-cs"/>
+                        </a:rPr>
+                        <a:t> --</a:t>
+                      </a:r>
+                      <a:r>
+                        <a:rPr lang="en-US" sz="1400" kern="1200" dirty="0" err="1">
+                          <a:solidFill>
+                            <a:schemeClr val="dk1"/>
+                          </a:solidFill>
+                          <a:latin typeface="+mn-lt"/>
+                          <a:ea typeface="+mn-ea"/>
+                          <a:cs typeface="+mn-cs"/>
+                        </a:rPr>
+                        <a:t>replSet</a:t>
+                      </a:r>
+                      <a:r>
+                        <a:rPr lang="en-US" sz="1400" kern="1200" dirty="0">
+                          <a:solidFill>
+                            <a:schemeClr val="dk1"/>
+                          </a:solidFill>
+                          <a:latin typeface="+mn-lt"/>
+                          <a:ea typeface="+mn-ea"/>
+                          <a:cs typeface="+mn-cs"/>
+                        </a:rPr>
+                        <a:t> rs0 --port 27019 --</a:t>
+                      </a:r>
+                      <a:r>
+                        <a:rPr lang="en-US" sz="1400" kern="1200" dirty="0" err="1">
+                          <a:solidFill>
+                            <a:schemeClr val="dk1"/>
+                          </a:solidFill>
+                          <a:latin typeface="+mn-lt"/>
+                          <a:ea typeface="+mn-ea"/>
+                          <a:cs typeface="+mn-cs"/>
+                        </a:rPr>
+                        <a:t>dbpath</a:t>
+                      </a:r>
+                      <a:r>
+                        <a:rPr lang="en-US" sz="1400" kern="1200" dirty="0">
+                          <a:solidFill>
+                            <a:schemeClr val="dk1"/>
+                          </a:solidFill>
+                          <a:latin typeface="+mn-lt"/>
+                          <a:ea typeface="+mn-ea"/>
+                          <a:cs typeface="+mn-cs"/>
+                        </a:rPr>
+                        <a:t> "C:\Users\sebas\Documents\cours </a:t>
+                      </a:r>
+                      <a:r>
+                        <a:rPr lang="en-US" sz="1400" kern="1200" dirty="0" err="1">
+                          <a:solidFill>
+                            <a:schemeClr val="dk1"/>
+                          </a:solidFill>
+                          <a:latin typeface="+mn-lt"/>
+                          <a:ea typeface="+mn-ea"/>
+                          <a:cs typeface="+mn-cs"/>
+                        </a:rPr>
+                        <a:t>Openclassrooms</a:t>
+                      </a:r>
+                      <a:r>
+                        <a:rPr lang="en-US" sz="1400" kern="1200" dirty="0">
+                          <a:solidFill>
+                            <a:schemeClr val="dk1"/>
+                          </a:solidFill>
+                          <a:latin typeface="+mn-lt"/>
+                          <a:ea typeface="+mn-ea"/>
+                          <a:cs typeface="+mn-cs"/>
+                        </a:rPr>
+                        <a:t>\Data Engineer\</a:t>
+                      </a:r>
+                      <a:r>
+                        <a:rPr lang="en-US" sz="1400" kern="1200" dirty="0" err="1">
+                          <a:solidFill>
+                            <a:schemeClr val="dk1"/>
+                          </a:solidFill>
+                          <a:latin typeface="+mn-lt"/>
+                          <a:ea typeface="+mn-ea"/>
+                          <a:cs typeface="+mn-cs"/>
+                        </a:rPr>
+                        <a:t>projet</a:t>
+                      </a:r>
+                      <a:r>
+                        <a:rPr lang="en-US" sz="1400" kern="1200" dirty="0">
+                          <a:solidFill>
+                            <a:schemeClr val="dk1"/>
+                          </a:solidFill>
+                          <a:latin typeface="+mn-lt"/>
+                          <a:ea typeface="+mn-ea"/>
+                          <a:cs typeface="+mn-cs"/>
+                        </a:rPr>
+                        <a:t> 7\_data\R0S1"</a:t>
+                      </a:r>
+                    </a:p>
+                    <a:p>
+                      <a:endParaRPr lang="fr-FR" sz="1400" kern="1200" dirty="0">
+                        <a:solidFill>
+                          <a:schemeClr val="dk1"/>
+                        </a:solidFill>
+                        <a:latin typeface="+mn-lt"/>
+                        <a:ea typeface="+mn-ea"/>
+                        <a:cs typeface="+mn-cs"/>
+                      </a:endParaRPr>
+                    </a:p>
+                  </a:txBody>
+                  <a:tcPr/>
+                </a:tc>
+                <a:tc>
+                  <a:txBody>
+                    <a:bodyPr/>
+                    <a:lstStyle/>
+                    <a:p>
+                      <a:pPr marL="0" marR="0" lvl="0" indent="0" algn="l" defTabSz="457200" rtl="0" eaLnBrk="1" fontAlgn="auto" latinLnBrk="0" hangingPunct="1">
+                        <a:lnSpc>
+                          <a:spcPct val="100000"/>
+                        </a:lnSpc>
+                        <a:spcBef>
+                          <a:spcPts val="0"/>
+                        </a:spcBef>
+                        <a:spcAft>
+                          <a:spcPts val="0"/>
+                        </a:spcAft>
+                        <a:buClrTx/>
+                        <a:buSzTx/>
+                        <a:buFontTx/>
+                        <a:buNone/>
+                        <a:tabLst/>
+                        <a:defRPr/>
+                      </a:pPr>
+                      <a:r>
+                        <a:rPr lang="fr-FR" sz="1400" dirty="0"/>
+                        <a:t>Opération à faire dans l’invite de commande. Ne pas fermer la fenêtre</a:t>
+                      </a:r>
+                    </a:p>
+                  </a:txBody>
+                  <a:tcPr/>
+                </a:tc>
+                <a:extLst>
+                  <a:ext uri="{0D108BD9-81ED-4DB2-BD59-A6C34878D82A}">
+                    <a16:rowId xmlns:a16="http://schemas.microsoft.com/office/drawing/2014/main" val="74556585"/>
+                  </a:ext>
+                </a:extLst>
+              </a:tr>
+              <a:tr h="370840">
+                <a:tc vMerge="1">
+                  <a:txBody>
+                    <a:bodyPr/>
+                    <a:lstStyle/>
+                    <a:p>
+                      <a:endParaRPr lang="fr-FR" dirty="0"/>
+                    </a:p>
+                  </a:txBody>
+                  <a:tcPr/>
+                </a:tc>
+                <a:tc>
+                  <a:txBody>
+                    <a:bodyPr/>
+                    <a:lstStyle/>
+                    <a:p>
+                      <a:r>
+                        <a:rPr lang="fr-FR" sz="1400" dirty="0"/>
+                        <a:t>Lancement du </a:t>
+                      </a:r>
+                      <a:r>
+                        <a:rPr lang="fr-FR" sz="1400" dirty="0" err="1"/>
+                        <a:t>shell</a:t>
+                      </a:r>
+                      <a:r>
+                        <a:rPr lang="fr-FR" sz="1400" dirty="0"/>
+                        <a:t> MongoDB:</a:t>
+                      </a:r>
+                    </a:p>
+                    <a:p>
+                      <a:r>
+                        <a:rPr lang="fr-FR" sz="1400" dirty="0" err="1"/>
+                        <a:t>mongosh</a:t>
+                      </a:r>
+                      <a:r>
+                        <a:rPr lang="fr-FR" sz="1400" dirty="0"/>
+                        <a:t> --port 27019</a:t>
+                      </a:r>
+                    </a:p>
+                  </a:txBody>
+                  <a:tcPr/>
+                </a:tc>
+                <a:tc>
+                  <a:txBody>
+                    <a:bodyPr/>
+                    <a:lstStyle/>
+                    <a:p>
+                      <a:r>
+                        <a:rPr lang="fr-FR" sz="1400" dirty="0"/>
+                        <a:t>Dans une autre fenêtre invite de commande</a:t>
+                      </a:r>
+                    </a:p>
+                  </a:txBody>
+                  <a:tcPr/>
+                </a:tc>
+                <a:extLst>
+                  <a:ext uri="{0D108BD9-81ED-4DB2-BD59-A6C34878D82A}">
+                    <a16:rowId xmlns:a16="http://schemas.microsoft.com/office/drawing/2014/main" val="1020162979"/>
+                  </a:ext>
+                </a:extLst>
+              </a:tr>
+            </a:tbl>
+          </a:graphicData>
+        </a:graphic>
+      </p:graphicFrame>
+      <p:sp>
+        <p:nvSpPr>
+          <p:cNvPr id="4" name="Espace réservé de la date 3">
+            <a:extLst>
+              <a:ext uri="{FF2B5EF4-FFF2-40B4-BE49-F238E27FC236}">
+                <a16:creationId xmlns:a16="http://schemas.microsoft.com/office/drawing/2014/main" id="{9773433B-58AC-4918-B5EF-CF9A050253C4}"/>
+              </a:ext>
+            </a:extLst>
+          </p:cNvPr>
+          <p:cNvSpPr>
+            <a:spLocks noGrp="1"/>
+          </p:cNvSpPr>
+          <p:nvPr>
+            <p:ph type="dt" sz="half" idx="10"/>
+          </p:nvPr>
+        </p:nvSpPr>
+        <p:spPr/>
+        <p:txBody>
+          <a:bodyPr/>
+          <a:lstStyle/>
+          <a:p>
+            <a:pPr rtl="0"/>
+            <a:fld id="{22897033-9A55-4DAC-991D-1FF1921C78B7}" type="datetime1">
+              <a:rPr lang="fr-FR" smtClean="0"/>
+              <a:t>16/08/2026</a:t>
+            </a:fld>
+            <a:endParaRPr lang="en-US" dirty="0"/>
+          </a:p>
+        </p:txBody>
+      </p:sp>
+    </p:spTree>
+    <p:extLst>
+      <p:ext uri="{BB962C8B-B14F-4D97-AF65-F5344CB8AC3E}">
+        <p14:creationId xmlns:p14="http://schemas.microsoft.com/office/powerpoint/2010/main" val="4104142552"/>
+      </p:ext>
+    </p:extLst>
+  </p:cSld>
+  <p:clrMapOvr>
+    <a:masterClrMapping/>
+  </p:clrMapOvr>
+</p:sld>
+</file>
+
+<file path=ppt/slides/slide14.xml><?xml version="1.0" encoding="utf-8"?>
+<p:sld xmlns:a="http://schemas.openxmlformats.org/drawingml/2006/main" xmlns:r="http://schemas.openxmlformats.org/officeDocument/2006/relationships" xmlns:p="http://schemas.openxmlformats.org/presentationml/2006/main">
+  <p:cSld>
+    <p:spTree>
+      <p:nvGrpSpPr>
+        <p:cNvPr id="1" name=""/>
+        <p:cNvGrpSpPr/>
+        <p:nvPr/>
+      </p:nvGrpSpPr>
+      <p:grpSpPr>
+        <a:xfrm>
+          <a:off x="0" y="0"/>
+          <a:ext cx="0" cy="0"/>
+          <a:chOff x="0" y="0"/>
+          <a:chExt cx="0" cy="0"/>
+        </a:xfrm>
+      </p:grpSpPr>
+      <p:sp>
+        <p:nvSpPr>
+          <p:cNvPr id="2" name="Titre 1">
+            <a:extLst>
+              <a:ext uri="{FF2B5EF4-FFF2-40B4-BE49-F238E27FC236}">
+                <a16:creationId xmlns:a16="http://schemas.microsoft.com/office/drawing/2014/main" id="{1C5D781D-3EDC-7669-0868-1E6B38268B0E}"/>
+              </a:ext>
+            </a:extLst>
+          </p:cNvPr>
+          <p:cNvSpPr>
+            <a:spLocks noGrp="1"/>
+          </p:cNvSpPr>
+          <p:nvPr>
+            <p:ph type="title"/>
+          </p:nvPr>
+        </p:nvSpPr>
+        <p:spPr/>
+        <p:txBody>
+          <a:bodyPr/>
+          <a:lstStyle/>
+          <a:p>
+            <a:r>
+              <a:rPr lang="fr-FR" dirty="0"/>
+              <a:t>8. Duplication des données</a:t>
+            </a:r>
+            <a:br>
+              <a:rPr lang="fr-FR" dirty="0"/>
+            </a:br>
+            <a:r>
+              <a:rPr lang="fr-FR" sz="1800" dirty="0"/>
+              <a:t>architecture duplication</a:t>
+            </a:r>
+            <a:endParaRPr lang="fr-FR" dirty="0"/>
+          </a:p>
+        </p:txBody>
+      </p:sp>
+      <p:sp>
+        <p:nvSpPr>
+          <p:cNvPr id="4" name="Espace réservé de la date 3">
+            <a:extLst>
+              <a:ext uri="{FF2B5EF4-FFF2-40B4-BE49-F238E27FC236}">
+                <a16:creationId xmlns:a16="http://schemas.microsoft.com/office/drawing/2014/main" id="{42F905F2-2592-0342-F214-78149512A088}"/>
+              </a:ext>
+            </a:extLst>
+          </p:cNvPr>
+          <p:cNvSpPr>
+            <a:spLocks noGrp="1"/>
+          </p:cNvSpPr>
+          <p:nvPr>
+            <p:ph type="dt" sz="half" idx="10"/>
+          </p:nvPr>
+        </p:nvSpPr>
+        <p:spPr/>
+        <p:txBody>
+          <a:bodyPr/>
+          <a:lstStyle/>
+          <a:p>
+            <a:pPr rtl="0"/>
+            <a:fld id="{22897033-9A55-4DAC-991D-1FF1921C78B7}" type="datetime1">
+              <a:rPr lang="fr-FR" smtClean="0"/>
+              <a:t>16/08/2026</a:t>
+            </a:fld>
+            <a:endParaRPr lang="en-US" dirty="0"/>
+          </a:p>
+        </p:txBody>
+      </p:sp>
+      <p:sp>
+        <p:nvSpPr>
+          <p:cNvPr id="5" name="Rectangle : coins arrondis 4">
+            <a:extLst>
+              <a:ext uri="{FF2B5EF4-FFF2-40B4-BE49-F238E27FC236}">
+                <a16:creationId xmlns:a16="http://schemas.microsoft.com/office/drawing/2014/main" id="{54BF5C67-2C22-9BFB-CA48-D40EE3640B97}"/>
+              </a:ext>
+            </a:extLst>
+          </p:cNvPr>
+          <p:cNvSpPr/>
+          <p:nvPr/>
+        </p:nvSpPr>
+        <p:spPr>
+          <a:xfrm>
+            <a:off x="3259666" y="2726528"/>
+            <a:ext cx="1845734" cy="1083734"/>
+          </a:xfrm>
+          <a:prstGeom prst="roundRect">
+            <a:avLst/>
+          </a:prstGeom>
+        </p:spPr>
+        <p:style>
+          <a:lnRef idx="2">
+            <a:schemeClr val="accent1">
+              <a:shade val="15000"/>
+            </a:schemeClr>
+          </a:lnRef>
+          <a:fillRef idx="1">
+            <a:schemeClr val="accent1"/>
+          </a:fillRef>
+          <a:effectRef idx="0">
+            <a:schemeClr val="accent1"/>
+          </a:effectRef>
+          <a:fontRef idx="minor">
+            <a:schemeClr val="lt1"/>
+          </a:fontRef>
+        </p:style>
+        <p:txBody>
+          <a:bodyPr rtlCol="0" anchor="ctr"/>
+          <a:lstStyle/>
+          <a:p>
+            <a:pPr algn="ctr"/>
+            <a:r>
+              <a:rPr lang="fr-FR" dirty="0"/>
+              <a:t>Routeur mongos</a:t>
+            </a:r>
+          </a:p>
+        </p:txBody>
+      </p:sp>
+      <p:sp>
+        <p:nvSpPr>
+          <p:cNvPr id="6" name="Rectangle : coins arrondis 5">
+            <a:extLst>
+              <a:ext uri="{FF2B5EF4-FFF2-40B4-BE49-F238E27FC236}">
+                <a16:creationId xmlns:a16="http://schemas.microsoft.com/office/drawing/2014/main" id="{797309BD-1E41-A742-6CC1-B723BEABFC02}"/>
+              </a:ext>
+            </a:extLst>
+          </p:cNvPr>
+          <p:cNvSpPr/>
+          <p:nvPr/>
+        </p:nvSpPr>
+        <p:spPr>
+          <a:xfrm>
+            <a:off x="7428254" y="2726528"/>
+            <a:ext cx="1845734" cy="1083734"/>
+          </a:xfrm>
+          <a:prstGeom prst="roundRect">
+            <a:avLst/>
+          </a:prstGeom>
+        </p:spPr>
+        <p:style>
+          <a:lnRef idx="2">
+            <a:schemeClr val="accent1">
+              <a:shade val="15000"/>
+            </a:schemeClr>
+          </a:lnRef>
+          <a:fillRef idx="1">
+            <a:schemeClr val="accent1"/>
+          </a:fillRef>
+          <a:effectRef idx="0">
+            <a:schemeClr val="accent1"/>
+          </a:effectRef>
+          <a:fontRef idx="minor">
+            <a:schemeClr val="lt1"/>
+          </a:fontRef>
+        </p:style>
+        <p:txBody>
+          <a:bodyPr rtlCol="0" anchor="ctr"/>
+          <a:lstStyle/>
+          <a:p>
+            <a:pPr algn="ctr"/>
+            <a:r>
+              <a:rPr lang="fr-FR" dirty="0"/>
+              <a:t>Outil BI</a:t>
+            </a:r>
+          </a:p>
+        </p:txBody>
+      </p:sp>
+      <p:sp>
+        <p:nvSpPr>
+          <p:cNvPr id="7" name="Rectangle : coins arrondis 6">
+            <a:extLst>
+              <a:ext uri="{FF2B5EF4-FFF2-40B4-BE49-F238E27FC236}">
+                <a16:creationId xmlns:a16="http://schemas.microsoft.com/office/drawing/2014/main" id="{07ED84AB-CD40-9206-ED37-CD7A94F09DBD}"/>
+              </a:ext>
+            </a:extLst>
+          </p:cNvPr>
+          <p:cNvSpPr/>
+          <p:nvPr/>
+        </p:nvSpPr>
+        <p:spPr>
+          <a:xfrm>
+            <a:off x="810806" y="4755801"/>
+            <a:ext cx="2592794" cy="1668109"/>
+          </a:xfrm>
+          <a:prstGeom prst="roundRect">
+            <a:avLst/>
+          </a:prstGeom>
+        </p:spPr>
+        <p:style>
+          <a:lnRef idx="2">
+            <a:schemeClr val="accent1">
+              <a:shade val="15000"/>
+            </a:schemeClr>
+          </a:lnRef>
+          <a:fillRef idx="1">
+            <a:schemeClr val="accent1"/>
+          </a:fillRef>
+          <a:effectRef idx="0">
+            <a:schemeClr val="accent1"/>
+          </a:effectRef>
+          <a:fontRef idx="minor">
+            <a:schemeClr val="lt1"/>
+          </a:fontRef>
+        </p:style>
+        <p:txBody>
+          <a:bodyPr rtlCol="0" anchor="ctr"/>
+          <a:lstStyle/>
+          <a:p>
+            <a:pPr algn="ctr"/>
+            <a:r>
+              <a:rPr lang="fr-FR" dirty="0" err="1"/>
+              <a:t>Shard</a:t>
+            </a:r>
+            <a:r>
+              <a:rPr lang="fr-FR" dirty="0"/>
+              <a:t> Paris –rs0</a:t>
+            </a:r>
+          </a:p>
+          <a:p>
+            <a:pPr algn="ctr"/>
+            <a:r>
+              <a:rPr lang="fr-FR" dirty="0"/>
+              <a:t>(</a:t>
+            </a:r>
+            <a:r>
+              <a:rPr lang="fr-FR" dirty="0" err="1"/>
+              <a:t>ReplicaSet</a:t>
+            </a:r>
+            <a:r>
+              <a:rPr lang="fr-FR" dirty="0"/>
+              <a:t>)</a:t>
+            </a:r>
+          </a:p>
+          <a:p>
+            <a:pPr algn="ctr"/>
+            <a:endParaRPr lang="fr-FR" dirty="0"/>
+          </a:p>
+          <a:p>
+            <a:pPr algn="ctr"/>
+            <a:r>
+              <a:rPr lang="fr-FR" dirty="0" err="1"/>
+              <a:t>property_city</a:t>
+            </a:r>
+            <a:r>
+              <a:rPr lang="fr-FR" dirty="0"/>
+              <a:t> = "Paris"</a:t>
+            </a:r>
+          </a:p>
+        </p:txBody>
+      </p:sp>
+      <p:sp>
+        <p:nvSpPr>
+          <p:cNvPr id="8" name="Rectangle : coins arrondis 7">
+            <a:extLst>
+              <a:ext uri="{FF2B5EF4-FFF2-40B4-BE49-F238E27FC236}">
+                <a16:creationId xmlns:a16="http://schemas.microsoft.com/office/drawing/2014/main" id="{8D3A9836-5704-6F41-4A64-008BDD966AEB}"/>
+              </a:ext>
+            </a:extLst>
+          </p:cNvPr>
+          <p:cNvSpPr/>
+          <p:nvPr/>
+        </p:nvSpPr>
+        <p:spPr>
+          <a:xfrm>
+            <a:off x="4730748" y="4749789"/>
+            <a:ext cx="2730502" cy="1769541"/>
+          </a:xfrm>
+          <a:prstGeom prst="roundRect">
+            <a:avLst/>
+          </a:prstGeom>
+        </p:spPr>
+        <p:style>
+          <a:lnRef idx="2">
+            <a:schemeClr val="accent1">
+              <a:shade val="15000"/>
+            </a:schemeClr>
+          </a:lnRef>
+          <a:fillRef idx="1">
+            <a:schemeClr val="accent1"/>
+          </a:fillRef>
+          <a:effectRef idx="0">
+            <a:schemeClr val="accent1"/>
+          </a:effectRef>
+          <a:fontRef idx="minor">
+            <a:schemeClr val="lt1"/>
+          </a:fontRef>
+        </p:style>
+        <p:txBody>
+          <a:bodyPr rtlCol="0" anchor="ctr"/>
+          <a:lstStyle/>
+          <a:p>
+            <a:pPr algn="ctr"/>
+            <a:r>
+              <a:rPr lang="fr-FR" dirty="0" err="1"/>
+              <a:t>Shard</a:t>
+            </a:r>
+            <a:r>
+              <a:rPr lang="fr-FR" dirty="0"/>
+              <a:t> Lyon –</a:t>
+            </a:r>
+            <a:r>
+              <a:rPr lang="fr-FR" dirty="0" err="1"/>
+              <a:t>lyonRS</a:t>
+            </a:r>
+            <a:endParaRPr lang="fr-FR" dirty="0"/>
+          </a:p>
+          <a:p>
+            <a:pPr algn="ctr"/>
+            <a:r>
+              <a:rPr lang="fr-FR" dirty="0"/>
+              <a:t>(</a:t>
+            </a:r>
+            <a:r>
+              <a:rPr lang="fr-FR" dirty="0" err="1"/>
+              <a:t>ReplicaSet</a:t>
+            </a:r>
+            <a:r>
+              <a:rPr lang="fr-FR" dirty="0"/>
+              <a:t>)</a:t>
+            </a:r>
+          </a:p>
+          <a:p>
+            <a:pPr algn="ctr"/>
+            <a:endParaRPr lang="fr-FR" dirty="0"/>
+          </a:p>
+          <a:p>
+            <a:pPr algn="ctr"/>
+            <a:r>
+              <a:rPr lang="fr-FR" dirty="0" err="1"/>
+              <a:t>property_city</a:t>
+            </a:r>
+            <a:r>
+              <a:rPr lang="fr-FR" dirty="0"/>
+              <a:t> = "Lyon"</a:t>
+            </a:r>
+          </a:p>
+        </p:txBody>
+      </p:sp>
+      <p:cxnSp>
+        <p:nvCxnSpPr>
+          <p:cNvPr id="11" name="Connecteur droit avec flèche 10">
+            <a:extLst>
+              <a:ext uri="{FF2B5EF4-FFF2-40B4-BE49-F238E27FC236}">
+                <a16:creationId xmlns:a16="http://schemas.microsoft.com/office/drawing/2014/main" id="{2989735D-50A1-C11B-41EE-64B730D52BF3}"/>
+              </a:ext>
+            </a:extLst>
+          </p:cNvPr>
+          <p:cNvCxnSpPr>
+            <a:cxnSpLocks/>
+            <a:stCxn id="6" idx="1"/>
+            <a:endCxn id="5" idx="3"/>
+          </p:cNvCxnSpPr>
+          <p:nvPr/>
+        </p:nvCxnSpPr>
+        <p:spPr>
+          <a:xfrm flipH="1">
+            <a:off x="5105400" y="3268395"/>
+            <a:ext cx="2322854" cy="0"/>
+          </a:xfrm>
+          <a:prstGeom prst="straightConnector1">
+            <a:avLst/>
+          </a:prstGeom>
+          <a:ln>
+            <a:tailEnd type="triangle"/>
+          </a:ln>
+        </p:spPr>
+        <p:style>
+          <a:lnRef idx="1">
+            <a:schemeClr val="accent1"/>
+          </a:lnRef>
+          <a:fillRef idx="0">
+            <a:schemeClr val="accent1"/>
+          </a:fillRef>
+          <a:effectRef idx="0">
+            <a:schemeClr val="accent1"/>
+          </a:effectRef>
+          <a:fontRef idx="minor">
+            <a:schemeClr val="tx1"/>
+          </a:fontRef>
+        </p:style>
+      </p:cxnSp>
+      <p:sp>
+        <p:nvSpPr>
+          <p:cNvPr id="14" name="ZoneTexte 13">
+            <a:extLst>
+              <a:ext uri="{FF2B5EF4-FFF2-40B4-BE49-F238E27FC236}">
+                <a16:creationId xmlns:a16="http://schemas.microsoft.com/office/drawing/2014/main" id="{98143598-8AA4-E343-34C1-4A1BB820A2EA}"/>
+              </a:ext>
+            </a:extLst>
+          </p:cNvPr>
+          <p:cNvSpPr txBox="1"/>
+          <p:nvPr/>
+        </p:nvSpPr>
+        <p:spPr>
+          <a:xfrm>
+            <a:off x="5418667" y="2962370"/>
+            <a:ext cx="1354665" cy="307777"/>
+          </a:xfrm>
+          <a:prstGeom prst="rect">
+            <a:avLst/>
+          </a:prstGeom>
+          <a:noFill/>
+        </p:spPr>
+        <p:txBody>
+          <a:bodyPr wrap="square" rtlCol="0">
+            <a:spAutoFit/>
+          </a:bodyPr>
+          <a:lstStyle/>
+          <a:p>
+            <a:r>
+              <a:rPr lang="fr-FR" sz="1400" dirty="0"/>
+              <a:t>lecture</a:t>
+            </a:r>
+          </a:p>
+        </p:txBody>
+      </p:sp>
+      <p:sp>
+        <p:nvSpPr>
+          <p:cNvPr id="15" name="Rectangle : coins arrondis 14">
+            <a:extLst>
+              <a:ext uri="{FF2B5EF4-FFF2-40B4-BE49-F238E27FC236}">
+                <a16:creationId xmlns:a16="http://schemas.microsoft.com/office/drawing/2014/main" id="{3473B3AB-7AED-904D-BECE-45968E59159D}"/>
+              </a:ext>
+            </a:extLst>
+          </p:cNvPr>
+          <p:cNvSpPr/>
+          <p:nvPr/>
+        </p:nvSpPr>
+        <p:spPr>
+          <a:xfrm>
+            <a:off x="491065" y="2726528"/>
+            <a:ext cx="1845734" cy="1083734"/>
+          </a:xfrm>
+          <a:prstGeom prst="roundRect">
+            <a:avLst/>
+          </a:prstGeom>
+        </p:spPr>
+        <p:style>
+          <a:lnRef idx="2">
+            <a:schemeClr val="accent1">
+              <a:shade val="15000"/>
+            </a:schemeClr>
+          </a:lnRef>
+          <a:fillRef idx="1">
+            <a:schemeClr val="accent1"/>
+          </a:fillRef>
+          <a:effectRef idx="0">
+            <a:schemeClr val="accent1"/>
+          </a:effectRef>
+          <a:fontRef idx="minor">
+            <a:schemeClr val="lt1"/>
+          </a:fontRef>
+        </p:style>
+        <p:txBody>
+          <a:bodyPr rtlCol="0" anchor="ctr"/>
+          <a:lstStyle/>
+          <a:p>
+            <a:pPr algn="ctr"/>
+            <a:r>
+              <a:rPr lang="fr-FR" dirty="0"/>
+              <a:t>Config server</a:t>
+            </a:r>
+          </a:p>
+          <a:p>
+            <a:pPr algn="ctr"/>
+            <a:r>
+              <a:rPr lang="fr-FR" dirty="0"/>
+              <a:t>(cluster)</a:t>
+            </a:r>
+          </a:p>
+        </p:txBody>
+      </p:sp>
+      <p:cxnSp>
+        <p:nvCxnSpPr>
+          <p:cNvPr id="16" name="Connecteur droit avec flèche 15">
+            <a:extLst>
+              <a:ext uri="{FF2B5EF4-FFF2-40B4-BE49-F238E27FC236}">
+                <a16:creationId xmlns:a16="http://schemas.microsoft.com/office/drawing/2014/main" id="{72DD81CB-DF2C-A924-4CE0-996A342B447A}"/>
+              </a:ext>
+            </a:extLst>
+          </p:cNvPr>
+          <p:cNvCxnSpPr>
+            <a:cxnSpLocks/>
+            <a:endCxn id="5" idx="1"/>
+          </p:cNvCxnSpPr>
+          <p:nvPr/>
+        </p:nvCxnSpPr>
+        <p:spPr>
+          <a:xfrm>
+            <a:off x="2336799" y="3268395"/>
+            <a:ext cx="922867" cy="0"/>
+          </a:xfrm>
+          <a:prstGeom prst="straightConnector1">
+            <a:avLst/>
+          </a:prstGeom>
+          <a:ln>
+            <a:tailEnd type="triangle"/>
+          </a:ln>
+        </p:spPr>
+        <p:style>
+          <a:lnRef idx="1">
+            <a:schemeClr val="accent1"/>
+          </a:lnRef>
+          <a:fillRef idx="0">
+            <a:schemeClr val="accent1"/>
+          </a:fillRef>
+          <a:effectRef idx="0">
+            <a:schemeClr val="accent1"/>
+          </a:effectRef>
+          <a:fontRef idx="minor">
+            <a:schemeClr val="tx1"/>
+          </a:fontRef>
+        </p:style>
+      </p:cxnSp>
+      <p:sp>
+        <p:nvSpPr>
+          <p:cNvPr id="17" name="ZoneTexte 16">
+            <a:extLst>
+              <a:ext uri="{FF2B5EF4-FFF2-40B4-BE49-F238E27FC236}">
+                <a16:creationId xmlns:a16="http://schemas.microsoft.com/office/drawing/2014/main" id="{CC73E5F6-CE9D-E55B-B2F7-A546936A27AC}"/>
+              </a:ext>
+            </a:extLst>
+          </p:cNvPr>
+          <p:cNvSpPr txBox="1"/>
+          <p:nvPr/>
+        </p:nvSpPr>
+        <p:spPr>
+          <a:xfrm>
+            <a:off x="2336800" y="2751185"/>
+            <a:ext cx="1354665" cy="523220"/>
+          </a:xfrm>
+          <a:prstGeom prst="rect">
+            <a:avLst/>
+          </a:prstGeom>
+          <a:noFill/>
+        </p:spPr>
+        <p:txBody>
+          <a:bodyPr wrap="square" rtlCol="0">
+            <a:spAutoFit/>
+          </a:bodyPr>
+          <a:lstStyle/>
+          <a:p>
+            <a:r>
+              <a:rPr lang="fr-FR" sz="1400" dirty="0"/>
+              <a:t>Lecture</a:t>
+            </a:r>
+          </a:p>
+          <a:p>
+            <a:r>
+              <a:rPr lang="fr-FR" sz="1400" dirty="0"/>
+              <a:t>écriture</a:t>
+            </a:r>
+          </a:p>
+        </p:txBody>
+      </p:sp>
+      <p:cxnSp>
+        <p:nvCxnSpPr>
+          <p:cNvPr id="19" name="Connecteur : en angle 18">
+            <a:extLst>
+              <a:ext uri="{FF2B5EF4-FFF2-40B4-BE49-F238E27FC236}">
+                <a16:creationId xmlns:a16="http://schemas.microsoft.com/office/drawing/2014/main" id="{0186AC74-2298-75A9-8D5A-9C2197D88C42}"/>
+              </a:ext>
+            </a:extLst>
+          </p:cNvPr>
+          <p:cNvCxnSpPr>
+            <a:cxnSpLocks/>
+            <a:stCxn id="5" idx="2"/>
+            <a:endCxn id="8" idx="0"/>
+          </p:cNvCxnSpPr>
+          <p:nvPr/>
+        </p:nvCxnSpPr>
+        <p:spPr>
+          <a:xfrm rot="16200000" flipH="1">
+            <a:off x="4669503" y="3323292"/>
+            <a:ext cx="939527" cy="1913466"/>
+          </a:xfrm>
+          <a:prstGeom prst="bentConnector3">
+            <a:avLst>
+              <a:gd name="adj1" fmla="val 50000"/>
+            </a:avLst>
+          </a:prstGeom>
+          <a:ln>
+            <a:tailEnd type="triangle"/>
+          </a:ln>
+        </p:spPr>
+        <p:style>
+          <a:lnRef idx="1">
+            <a:schemeClr val="accent1"/>
+          </a:lnRef>
+          <a:fillRef idx="0">
+            <a:schemeClr val="accent1"/>
+          </a:fillRef>
+          <a:effectRef idx="0">
+            <a:schemeClr val="accent1"/>
+          </a:effectRef>
+          <a:fontRef idx="minor">
+            <a:schemeClr val="tx1"/>
+          </a:fontRef>
+        </p:style>
+      </p:cxnSp>
+      <p:cxnSp>
+        <p:nvCxnSpPr>
+          <p:cNvPr id="20" name="Connecteur : en angle 19">
+            <a:extLst>
+              <a:ext uri="{FF2B5EF4-FFF2-40B4-BE49-F238E27FC236}">
+                <a16:creationId xmlns:a16="http://schemas.microsoft.com/office/drawing/2014/main" id="{E4539072-F0F5-5C24-7EAD-0C663E8DD6B3}"/>
+              </a:ext>
+            </a:extLst>
+          </p:cNvPr>
+          <p:cNvCxnSpPr>
+            <a:cxnSpLocks/>
+            <a:stCxn id="5" idx="2"/>
+            <a:endCxn id="7" idx="0"/>
+          </p:cNvCxnSpPr>
+          <p:nvPr/>
+        </p:nvCxnSpPr>
+        <p:spPr>
+          <a:xfrm rot="5400000">
+            <a:off x="2672099" y="3245366"/>
+            <a:ext cx="945539" cy="2075330"/>
+          </a:xfrm>
+          <a:prstGeom prst="bentConnector3">
+            <a:avLst>
+              <a:gd name="adj1" fmla="val 50000"/>
+            </a:avLst>
+          </a:prstGeom>
+          <a:ln>
+            <a:tailEnd type="triangle"/>
+          </a:ln>
+        </p:spPr>
+        <p:style>
+          <a:lnRef idx="1">
+            <a:schemeClr val="accent1"/>
+          </a:lnRef>
+          <a:fillRef idx="0">
+            <a:schemeClr val="accent1"/>
+          </a:fillRef>
+          <a:effectRef idx="0">
+            <a:schemeClr val="accent1"/>
+          </a:effectRef>
+          <a:fontRef idx="minor">
+            <a:schemeClr val="tx1"/>
+          </a:fontRef>
+        </p:style>
+      </p:cxnSp>
+    </p:spTree>
+    <p:extLst>
+      <p:ext uri="{BB962C8B-B14F-4D97-AF65-F5344CB8AC3E}">
+        <p14:creationId xmlns:p14="http://schemas.microsoft.com/office/powerpoint/2010/main" val="1816661746"/>
+      </p:ext>
+    </p:extLst>
+  </p:cSld>
+  <p:clrMapOvr>
+    <a:masterClrMapping/>
+  </p:clrMapOvr>
+</p:sld>
+</file>
+
+<file path=ppt/slides/slide15.xml><?xml version="1.0" encoding="utf-8"?>
+<p:sld xmlns:a="http://schemas.openxmlformats.org/drawingml/2006/main" xmlns:r="http://schemas.openxmlformats.org/officeDocument/2006/relationships" xmlns:p="http://schemas.openxmlformats.org/presentationml/2006/main">
+  <p:cSld>
+    <p:bg>
+      <p:bgPr>
+        <a:solidFill>
+          <a:schemeClr val="accent1">
+            <a:lumMod val="75000"/>
+          </a:schemeClr>
+        </a:solidFill>
+        <a:effectLst/>
+      </p:bgPr>
+    </p:bg>
+    <p:spTree>
+      <p:nvGrpSpPr>
+        <p:cNvPr id="1" name=""/>
+        <p:cNvGrpSpPr/>
+        <p:nvPr/>
+      </p:nvGrpSpPr>
+      <p:grpSpPr>
+        <a:xfrm>
+          <a:off x="0" y="0"/>
+          <a:ext cx="0" cy="0"/>
+          <a:chOff x="0" y="0"/>
+          <a:chExt cx="0" cy="0"/>
+        </a:xfrm>
+      </p:grpSpPr>
+      <p:sp>
+        <p:nvSpPr>
+          <p:cNvPr id="2" name="Espace réservé de la date 1">
+            <a:extLst>
+              <a:ext uri="{FF2B5EF4-FFF2-40B4-BE49-F238E27FC236}">
+                <a16:creationId xmlns:a16="http://schemas.microsoft.com/office/drawing/2014/main" id="{ED7FC931-858E-2DB7-4048-52FB41ACEB79}"/>
+              </a:ext>
+            </a:extLst>
+          </p:cNvPr>
+          <p:cNvSpPr>
+            <a:spLocks noGrp="1"/>
+          </p:cNvSpPr>
+          <p:nvPr>
+            <p:ph type="dt" sz="half" idx="10"/>
+          </p:nvPr>
+        </p:nvSpPr>
+        <p:spPr/>
+        <p:txBody>
+          <a:bodyPr/>
+          <a:lstStyle/>
+          <a:p>
+            <a:pPr rtl="0"/>
+            <a:fld id="{ACEC98BE-FCE2-445F-8146-3A7F8CC3881D}" type="datetime1">
+              <a:rPr lang="fr-FR" smtClean="0"/>
+              <a:t>16/08/2026</a:t>
+            </a:fld>
+            <a:endParaRPr lang="en-US" dirty="0"/>
+          </a:p>
+        </p:txBody>
+      </p:sp>
+      <p:sp>
+        <p:nvSpPr>
+          <p:cNvPr id="3" name="ZoneTexte 2">
+            <a:extLst>
+              <a:ext uri="{FF2B5EF4-FFF2-40B4-BE49-F238E27FC236}">
+                <a16:creationId xmlns:a16="http://schemas.microsoft.com/office/drawing/2014/main" id="{53474F2F-61F5-F692-ADEB-B18AD9569016}"/>
+              </a:ext>
+            </a:extLst>
+          </p:cNvPr>
+          <p:cNvSpPr txBox="1"/>
+          <p:nvPr/>
+        </p:nvSpPr>
+        <p:spPr>
+          <a:xfrm>
+            <a:off x="4978400" y="3190240"/>
+            <a:ext cx="3291840" cy="769441"/>
+          </a:xfrm>
+          <a:prstGeom prst="rect">
+            <a:avLst/>
+          </a:prstGeom>
+          <a:noFill/>
+        </p:spPr>
+        <p:txBody>
+          <a:bodyPr wrap="square" rtlCol="0">
+            <a:spAutoFit/>
+          </a:bodyPr>
+          <a:lstStyle/>
+          <a:p>
+            <a:r>
+              <a:rPr lang="fr-FR" sz="4400" b="1" dirty="0">
+                <a:solidFill>
+                  <a:schemeClr val="bg1"/>
+                </a:solidFill>
+              </a:rPr>
+              <a:t>MERCI</a:t>
+            </a:r>
+          </a:p>
+        </p:txBody>
+      </p:sp>
+    </p:spTree>
+    <p:extLst>
+      <p:ext uri="{BB962C8B-B14F-4D97-AF65-F5344CB8AC3E}">
+        <p14:creationId xmlns:p14="http://schemas.microsoft.com/office/powerpoint/2010/main" val="2464726542"/>
       </p:ext>
     </p:extLst>
   </p:cSld>
@@ -16378,7 +14315,7 @@
             <p:ph idx="1"/>
             <p:extLst>
               <p:ext uri="{D42A27DB-BD31-4B8C-83A1-F6EECF244321}">
-                <p14:modId xmlns:p14="http://schemas.microsoft.com/office/powerpoint/2010/main" val="497457093"/>
+                <p14:modId xmlns:p14="http://schemas.microsoft.com/office/powerpoint/2010/main" val="468638535"/>
               </p:ext>
             </p:extLst>
           </p:nvPr>
@@ -16422,7 +14359,7 @@
             <a:pPr rtl="0"/>
             <a:fld id="{22897033-9A55-4DAC-991D-1FF1921C78B7}" type="datetime1">
               <a:rPr lang="fr-FR" smtClean="0"/>
-              <a:t>18/08/2026</a:t>
+              <a:t>16/08/2026</a:t>
             </a:fld>
             <a:endParaRPr lang="en-US" dirty="0"/>
           </a:p>
@@ -16432,266 +14369,6 @@
     <p:extLst>
       <p:ext uri="{BB962C8B-B14F-4D97-AF65-F5344CB8AC3E}">
         <p14:creationId xmlns:p14="http://schemas.microsoft.com/office/powerpoint/2010/main" val="2393101071"/>
-      </p:ext>
-    </p:extLst>
-  </p:cSld>
-  <p:clrMapOvr>
-    <a:masterClrMapping/>
-  </p:clrMapOvr>
-</p:sld>
-</file>
-
-<file path=ppt/slides/slide20.xml><?xml version="1.0" encoding="utf-8"?>
-<p:sld xmlns:a="http://schemas.openxmlformats.org/drawingml/2006/main" xmlns:r="http://schemas.openxmlformats.org/officeDocument/2006/relationships" xmlns:p="http://schemas.openxmlformats.org/presentationml/2006/main">
-  <p:cSld>
-    <p:spTree>
-      <p:nvGrpSpPr>
-        <p:cNvPr id="1" name=""/>
-        <p:cNvGrpSpPr/>
-        <p:nvPr/>
-      </p:nvGrpSpPr>
-      <p:grpSpPr>
-        <a:xfrm>
-          <a:off x="0" y="0"/>
-          <a:ext cx="0" cy="0"/>
-          <a:chOff x="0" y="0"/>
-          <a:chExt cx="0" cy="0"/>
-        </a:xfrm>
-      </p:grpSpPr>
-      <p:sp>
-        <p:nvSpPr>
-          <p:cNvPr id="2" name="Titre 1">
-            <a:extLst>
-              <a:ext uri="{FF2B5EF4-FFF2-40B4-BE49-F238E27FC236}">
-                <a16:creationId xmlns:a16="http://schemas.microsoft.com/office/drawing/2014/main" id="{2F240D08-8ABD-C30D-8619-3A8A24D19CB9}"/>
-              </a:ext>
-            </a:extLst>
-          </p:cNvPr>
-          <p:cNvSpPr>
-            <a:spLocks noGrp="1"/>
-          </p:cNvSpPr>
-          <p:nvPr>
-            <p:ph type="title"/>
-          </p:nvPr>
-        </p:nvSpPr>
-        <p:spPr/>
-        <p:txBody>
-          <a:bodyPr/>
-          <a:lstStyle/>
-          <a:p>
-            <a:r>
-              <a:rPr lang="fr-FR" dirty="0"/>
-              <a:t>9</a:t>
-            </a:r>
-            <a:r>
-              <a:rPr lang="fr-FR"/>
-              <a:t>. Mise </a:t>
-            </a:r>
-            <a:r>
-              <a:rPr lang="fr-FR" dirty="0"/>
-              <a:t>en place AWS</a:t>
-            </a:r>
-          </a:p>
-        </p:txBody>
-      </p:sp>
-      <p:sp>
-        <p:nvSpPr>
-          <p:cNvPr id="3" name="Espace réservé du contenu 2">
-            <a:extLst>
-              <a:ext uri="{FF2B5EF4-FFF2-40B4-BE49-F238E27FC236}">
-                <a16:creationId xmlns:a16="http://schemas.microsoft.com/office/drawing/2014/main" id="{1D591678-97DD-9E5B-55DC-6B9E91134863}"/>
-              </a:ext>
-            </a:extLst>
-          </p:cNvPr>
-          <p:cNvSpPr>
-            <a:spLocks noGrp="1"/>
-          </p:cNvSpPr>
-          <p:nvPr>
-            <p:ph idx="1"/>
-          </p:nvPr>
-        </p:nvSpPr>
-        <p:spPr/>
-        <p:txBody>
-          <a:bodyPr/>
-          <a:lstStyle/>
-          <a:p>
-            <a:endParaRPr lang="fr-FR"/>
-          </a:p>
-        </p:txBody>
-      </p:sp>
-      <p:sp>
-        <p:nvSpPr>
-          <p:cNvPr id="4" name="Espace réservé de la date 3">
-            <a:extLst>
-              <a:ext uri="{FF2B5EF4-FFF2-40B4-BE49-F238E27FC236}">
-                <a16:creationId xmlns:a16="http://schemas.microsoft.com/office/drawing/2014/main" id="{76A525BD-E384-4889-C5DF-7D6D0E560132}"/>
-              </a:ext>
-            </a:extLst>
-          </p:cNvPr>
-          <p:cNvSpPr>
-            <a:spLocks noGrp="1"/>
-          </p:cNvSpPr>
-          <p:nvPr>
-            <p:ph type="dt" sz="half" idx="10"/>
-          </p:nvPr>
-        </p:nvSpPr>
-        <p:spPr/>
-        <p:txBody>
-          <a:bodyPr/>
-          <a:lstStyle/>
-          <a:p>
-            <a:pPr rtl="0"/>
-            <a:fld id="{22897033-9A55-4DAC-991D-1FF1921C78B7}" type="datetime1">
-              <a:rPr lang="fr-FR" smtClean="0"/>
-              <a:t>18/08/2026</a:t>
-            </a:fld>
-            <a:endParaRPr lang="en-US" dirty="0"/>
-          </a:p>
-        </p:txBody>
-      </p:sp>
-      <p:pic>
-        <p:nvPicPr>
-          <p:cNvPr id="6" name="Image 5">
-            <a:extLst>
-              <a:ext uri="{FF2B5EF4-FFF2-40B4-BE49-F238E27FC236}">
-                <a16:creationId xmlns:a16="http://schemas.microsoft.com/office/drawing/2014/main" id="{8E02770F-21A4-2DBE-C359-6DA9D7356EC2}"/>
-              </a:ext>
-            </a:extLst>
-          </p:cNvPr>
-          <p:cNvPicPr>
-            <a:picLocks noChangeAspect="1"/>
-          </p:cNvPicPr>
-          <p:nvPr/>
-        </p:nvPicPr>
-        <p:blipFill>
-          <a:blip r:embed="rId2"/>
-          <a:stretch>
-            <a:fillRect/>
-          </a:stretch>
-        </p:blipFill>
-        <p:spPr>
-          <a:xfrm>
-            <a:off x="5787321" y="2335473"/>
-            <a:ext cx="6220720" cy="4088441"/>
-          </a:xfrm>
-          <a:prstGeom prst="rect">
-            <a:avLst/>
-          </a:prstGeom>
-        </p:spPr>
-      </p:pic>
-    </p:spTree>
-    <p:extLst>
-      <p:ext uri="{BB962C8B-B14F-4D97-AF65-F5344CB8AC3E}">
-        <p14:creationId xmlns:p14="http://schemas.microsoft.com/office/powerpoint/2010/main" val="1158311728"/>
-      </p:ext>
-    </p:extLst>
-  </p:cSld>
-  <p:clrMapOvr>
-    <a:masterClrMapping/>
-  </p:clrMapOvr>
-</p:sld>
-</file>
-
-<file path=ppt/slides/slide21.xml><?xml version="1.0" encoding="utf-8"?>
-<p:sld xmlns:a="http://schemas.openxmlformats.org/drawingml/2006/main" xmlns:r="http://schemas.openxmlformats.org/officeDocument/2006/relationships" xmlns:p="http://schemas.openxmlformats.org/presentationml/2006/main">
-  <p:cSld>
-    <p:bg>
-      <p:bgPr>
-        <a:solidFill>
-          <a:schemeClr val="accent1">
-            <a:lumMod val="75000"/>
-          </a:schemeClr>
-        </a:solidFill>
-        <a:effectLst/>
-      </p:bgPr>
-    </p:bg>
-    <p:spTree>
-      <p:nvGrpSpPr>
-        <p:cNvPr id="1" name=""/>
-        <p:cNvGrpSpPr/>
-        <p:nvPr/>
-      </p:nvGrpSpPr>
-      <p:grpSpPr>
-        <a:xfrm>
-          <a:off x="0" y="0"/>
-          <a:ext cx="0" cy="0"/>
-          <a:chOff x="0" y="0"/>
-          <a:chExt cx="0" cy="0"/>
-        </a:xfrm>
-      </p:grpSpPr>
-      <p:sp>
-        <p:nvSpPr>
-          <p:cNvPr id="2" name="Espace réservé de la date 1">
-            <a:extLst>
-              <a:ext uri="{FF2B5EF4-FFF2-40B4-BE49-F238E27FC236}">
-                <a16:creationId xmlns:a16="http://schemas.microsoft.com/office/drawing/2014/main" id="{ED7FC931-858E-2DB7-4048-52FB41ACEB79}"/>
-              </a:ext>
-            </a:extLst>
-          </p:cNvPr>
-          <p:cNvSpPr>
-            <a:spLocks noGrp="1"/>
-          </p:cNvSpPr>
-          <p:nvPr>
-            <p:ph type="dt" sz="half" idx="10"/>
-          </p:nvPr>
-        </p:nvSpPr>
-        <p:spPr/>
-        <p:txBody>
-          <a:bodyPr/>
-          <a:lstStyle/>
-          <a:p>
-            <a:pPr rtl="0"/>
-            <a:fld id="{ACEC98BE-FCE2-445F-8146-3A7F8CC3881D}" type="datetime1">
-              <a:rPr lang="fr-FR" smtClean="0"/>
-              <a:t>18/08/2026</a:t>
-            </a:fld>
-            <a:endParaRPr lang="en-US" dirty="0"/>
-          </a:p>
-        </p:txBody>
-      </p:sp>
-      <p:sp>
-        <p:nvSpPr>
-          <p:cNvPr id="3" name="ZoneTexte 2">
-            <a:extLst>
-              <a:ext uri="{FF2B5EF4-FFF2-40B4-BE49-F238E27FC236}">
-                <a16:creationId xmlns:a16="http://schemas.microsoft.com/office/drawing/2014/main" id="{53474F2F-61F5-F692-ADEB-B18AD9569016}"/>
-              </a:ext>
-            </a:extLst>
-          </p:cNvPr>
-          <p:cNvSpPr txBox="1"/>
-          <p:nvPr/>
-        </p:nvSpPr>
-        <p:spPr>
-          <a:xfrm>
-            <a:off x="4978400" y="3190240"/>
-            <a:ext cx="3291840" cy="769441"/>
-          </a:xfrm>
-          <a:prstGeom prst="rect">
-            <a:avLst/>
-          </a:prstGeom>
-          <a:noFill/>
-        </p:spPr>
-        <p:txBody>
-          <a:bodyPr wrap="square" rtlCol="0">
-            <a:spAutoFit/>
-          </a:bodyPr>
-          <a:lstStyle/>
-          <a:p>
-            <a:r>
-              <a:rPr lang="fr-FR" sz="4400" b="1" dirty="0">
-                <a:solidFill>
-                  <a:schemeClr val="bg1"/>
-                </a:solidFill>
-              </a:rPr>
-              <a:t>MERCI</a:t>
-            </a:r>
-          </a:p>
-        </p:txBody>
-      </p:sp>
-    </p:spTree>
-    <p:extLst>
-      <p:ext uri="{BB962C8B-B14F-4D97-AF65-F5344CB8AC3E}">
-        <p14:creationId xmlns:p14="http://schemas.microsoft.com/office/powerpoint/2010/main" val="2464726542"/>
       </p:ext>
     </p:extLst>
   </p:cSld>
@@ -16774,10 +14451,6 @@
               <a:rPr lang="fr-FR" dirty="0"/>
               <a:t>1 - Contexte et objectif</a:t>
             </a:r>
-            <a:br>
-              <a:rPr lang="fr-FR" dirty="0"/>
-            </a:br>
-            <a:endParaRPr lang="fr-FR" dirty="0"/>
           </a:p>
         </p:txBody>
       </p:sp>
@@ -16805,7 +14478,7 @@
             <a:pPr rtl="0"/>
             <a:fld id="{22897033-9A55-4DAC-991D-1FF1921C78B7}" type="datetime1">
               <a:rPr lang="fr-FR" smtClean="0"/>
-              <a:t>18/08/2026</a:t>
+              <a:t>16/08/2026</a:t>
             </a:fld>
             <a:endParaRPr lang="en-US" dirty="0"/>
           </a:p>
@@ -16869,12 +14542,8 @@
           <a:p>
             <a:r>
               <a:rPr lang="fr-FR" dirty="0"/>
-              <a:t>2. Schéma DE LA base de données</a:t>
+              <a:t>2 – Schéma DE LA base de données</a:t>
             </a:r>
-            <a:br>
-              <a:rPr lang="fr-FR" dirty="0"/>
-            </a:br>
-            <a:endParaRPr lang="fr-FR" dirty="0"/>
           </a:p>
         </p:txBody>
       </p:sp>
@@ -16907,7 +14576,7 @@
             <a:fld id="{22897033-9A55-4DAC-991D-1FF1921C78B7}" type="datetime1">
               <a:rPr lang="fr-FR" smtClean="0"/>
               <a:pPr/>
-              <a:t>18/08/2026</a:t>
+              <a:t>16/08/2026</a:t>
             </a:fld>
             <a:endParaRPr lang="en-US" dirty="0"/>
           </a:p>
@@ -16991,19 +14660,13 @@
         </p:nvSpPr>
         <p:spPr/>
         <p:txBody>
-          <a:bodyPr>
-            <a:normAutofit fontScale="90000"/>
-          </a:bodyPr>
+          <a:bodyPr/>
           <a:lstStyle/>
           <a:p>
             <a:r>
               <a:rPr lang="fr-FR" dirty="0"/>
-              <a:t>3. PROCESSUS collecter, transformer, stocker et tester les données</a:t>
+              <a:t>3. PROCESSUS ELT</a:t>
             </a:r>
-            <a:br>
-              <a:rPr lang="fr-FR" dirty="0"/>
-            </a:br>
-            <a:endParaRPr lang="fr-FR" dirty="0"/>
           </a:p>
         </p:txBody>
       </p:sp>
@@ -17031,7 +14694,7 @@
             <a:pPr rtl="0"/>
             <a:fld id="{22897033-9A55-4DAC-991D-1FF1921C78B7}" type="datetime1">
               <a:rPr lang="fr-FR" smtClean="0"/>
-              <a:t>18/08/2026</a:t>
+              <a:t>16/08/2026</a:t>
             </a:fld>
             <a:endParaRPr lang="en-US" dirty="0"/>
           </a:p>
@@ -19102,10 +16765,6 @@
               <a:rPr lang="fr-FR" dirty="0"/>
               <a:t>4. Schéma d’architecture</a:t>
             </a:r>
-            <a:br>
-              <a:rPr lang="fr-FR" dirty="0"/>
-            </a:br>
-            <a:endParaRPr lang="fr-FR" dirty="0"/>
           </a:p>
         </p:txBody>
       </p:sp>
@@ -19138,7 +16797,7 @@
             <a:pPr rtl="0"/>
             <a:fld id="{22897033-9A55-4DAC-991D-1FF1921C78B7}" type="datetime1">
               <a:rPr lang="fr-FR" smtClean="0"/>
-              <a:t>18/08/2026</a:t>
+              <a:t>16/08/2026</a:t>
             </a:fld>
             <a:endParaRPr lang="en-US" dirty="0"/>
           </a:p>
@@ -21699,7 +19358,7 @@
         </p:nvSpPr>
         <p:spPr>
           <a:xfrm>
-            <a:off x="6827491" y="5433671"/>
+            <a:off x="6827491" y="5397811"/>
             <a:ext cx="1790063" cy="998991"/>
           </a:xfrm>
           <a:prstGeom prst="roundRect">
@@ -22049,12 +19708,12 @@
         </p:nvCxnSpPr>
         <p:spPr>
           <a:xfrm rot="5400000">
-            <a:off x="8722875" y="5000496"/>
-            <a:ext cx="431815" cy="2432517"/>
+            <a:off x="8740805" y="4982566"/>
+            <a:ext cx="395955" cy="2432517"/>
           </a:xfrm>
           <a:prstGeom prst="bentConnector3">
             <a:avLst>
-              <a:gd name="adj1" fmla="val 152939"/>
+              <a:gd name="adj1" fmla="val 157734"/>
             </a:avLst>
           </a:prstGeom>
           <a:ln w="19050">
@@ -22290,14 +19949,12 @@
           <p:nvPr/>
         </p:nvCxnSpPr>
         <p:spPr>
-          <a:xfrm rot="10800000">
-            <a:off x="6244085" y="5808671"/>
-            <a:ext cx="583406" cy="124497"/>
+          <a:xfrm flipH="1" flipV="1">
+            <a:off x="6244085" y="5808670"/>
+            <a:ext cx="583406" cy="88637"/>
           </a:xfrm>
-          <a:prstGeom prst="bentConnector3">
-            <a:avLst>
-              <a:gd name="adj1" fmla="val 50000"/>
-            </a:avLst>
+          <a:prstGeom prst="straightConnector1">
+            <a:avLst/>
           </a:prstGeom>
           <a:ln w="19050">
             <a:solidFill>
@@ -23071,10 +20728,32 @@
               <a:rPr lang="fr-FR" dirty="0" err="1"/>
               <a:t>Airbyte</a:t>
             </a:r>
-            <a:br>
-              <a:rPr lang="fr-FR" dirty="0"/>
-            </a:br>
             <a:endParaRPr lang="fr-FR" dirty="0"/>
+          </a:p>
+        </p:txBody>
+      </p:sp>
+      <p:sp>
+        <p:nvSpPr>
+          <p:cNvPr id="3" name="Espace réservé du contenu 2">
+            <a:extLst>
+              <a:ext uri="{FF2B5EF4-FFF2-40B4-BE49-F238E27FC236}">
+                <a16:creationId xmlns:a16="http://schemas.microsoft.com/office/drawing/2014/main" id="{4F740C1A-6D00-D21C-6CB7-621BD1285DC1}"/>
+              </a:ext>
+            </a:extLst>
+          </p:cNvPr>
+          <p:cNvSpPr>
+            <a:spLocks noGrp="1"/>
+          </p:cNvSpPr>
+          <p:nvPr>
+            <p:ph idx="1"/>
+          </p:nvPr>
+        </p:nvSpPr>
+        <p:spPr/>
+        <p:txBody>
+          <a:bodyPr/>
+          <a:lstStyle/>
+          <a:p>
+            <a:endParaRPr lang="fr-FR"/>
           </a:p>
         </p:txBody>
       </p:sp>
@@ -23102,427 +20781,9 @@
             <a:pPr rtl="0"/>
             <a:fld id="{22897033-9A55-4DAC-991D-1FF1921C78B7}" type="datetime1">
               <a:rPr lang="fr-FR" smtClean="0"/>
-              <a:t>18/08/2026</a:t>
+              <a:t>16/08/2026</a:t>
             </a:fld>
             <a:endParaRPr lang="en-US" dirty="0"/>
-          </a:p>
-        </p:txBody>
-      </p:sp>
-      <p:sp>
-        <p:nvSpPr>
-          <p:cNvPr id="5" name="Espace réservé du contenu 2">
-            <a:extLst>
-              <a:ext uri="{FF2B5EF4-FFF2-40B4-BE49-F238E27FC236}">
-                <a16:creationId xmlns:a16="http://schemas.microsoft.com/office/drawing/2014/main" id="{10D49BB1-BF92-9232-87EF-B385267E7B2A}"/>
-              </a:ext>
-            </a:extLst>
-          </p:cNvPr>
-          <p:cNvSpPr>
-            <a:spLocks noGrp="1"/>
-          </p:cNvSpPr>
-          <p:nvPr>
-            <p:ph idx="1"/>
-          </p:nvPr>
-        </p:nvSpPr>
-        <p:spPr>
-          <a:xfrm>
-            <a:off x="581192" y="2020366"/>
-            <a:ext cx="11029615" cy="3634486"/>
-          </a:xfrm>
-        </p:spPr>
-        <p:txBody>
-          <a:bodyPr/>
-          <a:lstStyle/>
-          <a:p>
-            <a:r>
-              <a:rPr lang="fr-FR" dirty="0"/>
-              <a:t>Via la documentation </a:t>
-            </a:r>
-            <a:r>
-              <a:rPr lang="fr-FR" dirty="0" err="1"/>
-              <a:t>Airbyte</a:t>
-            </a:r>
-            <a:r>
-              <a:rPr lang="fr-FR" dirty="0"/>
-              <a:t> </a:t>
-            </a:r>
-            <a:r>
-              <a:rPr lang="fr-FR" dirty="0" err="1">
-                <a:hlinkClick r:id="rId2"/>
-              </a:rPr>
-              <a:t>Quickstart</a:t>
-            </a:r>
-            <a:r>
-              <a:rPr lang="fr-FR" dirty="0">
-                <a:hlinkClick r:id="rId2"/>
-              </a:rPr>
-              <a:t> | </a:t>
-            </a:r>
-            <a:r>
-              <a:rPr lang="fr-FR" dirty="0" err="1">
-                <a:hlinkClick r:id="rId2"/>
-              </a:rPr>
-              <a:t>Airbyte</a:t>
-            </a:r>
-            <a:r>
-              <a:rPr lang="fr-FR" dirty="0">
-                <a:hlinkClick r:id="rId2"/>
-              </a:rPr>
-              <a:t> Docs</a:t>
-            </a:r>
-            <a:r>
-              <a:rPr lang="fr-FR" dirty="0"/>
-              <a:t> télécharger la dernière version de </a:t>
-            </a:r>
-            <a:r>
-              <a:rPr lang="fr-FR" dirty="0" err="1"/>
-              <a:t>abctl</a:t>
-            </a:r>
-            <a:r>
-              <a:rPr lang="fr-FR" dirty="0"/>
-              <a:t> et suivre les étapes décrites dans la documentation</a:t>
-            </a:r>
-          </a:p>
-          <a:p>
-            <a:r>
-              <a:rPr lang="fr-FR" dirty="0"/>
-              <a:t>Démarrer Docker et dans l’invite de commande lancer l’installation en tapant </a:t>
-            </a:r>
-            <a:r>
-              <a:rPr lang="fr-FR" b="1" i="1" dirty="0" err="1"/>
-              <a:t>abctl</a:t>
-            </a:r>
-            <a:r>
-              <a:rPr lang="fr-FR" b="1" i="1" dirty="0"/>
-              <a:t> local </a:t>
-            </a:r>
-            <a:r>
-              <a:rPr lang="fr-FR" b="1" i="1" dirty="0" err="1"/>
-              <a:t>install</a:t>
-            </a:r>
-            <a:endParaRPr lang="fr-FR" b="1" i="1" dirty="0"/>
-          </a:p>
-          <a:p>
-            <a:endParaRPr lang="fr-FR" b="1" i="1" dirty="0"/>
-          </a:p>
-          <a:p>
-            <a:endParaRPr lang="fr-FR" b="1" i="1" dirty="0"/>
-          </a:p>
-          <a:p>
-            <a:endParaRPr lang="fr-FR" dirty="0"/>
-          </a:p>
-          <a:p>
-            <a:endParaRPr lang="fr-FR" dirty="0"/>
-          </a:p>
-          <a:p>
-            <a:endParaRPr lang="fr-FR" dirty="0"/>
-          </a:p>
-          <a:p>
-            <a:endParaRPr lang="fr-FR" dirty="0"/>
-          </a:p>
-          <a:p>
-            <a:endParaRPr lang="fr-FR" dirty="0"/>
-          </a:p>
-        </p:txBody>
-      </p:sp>
-      <p:pic>
-        <p:nvPicPr>
-          <p:cNvPr id="7" name="Image 6">
-            <a:extLst>
-              <a:ext uri="{FF2B5EF4-FFF2-40B4-BE49-F238E27FC236}">
-                <a16:creationId xmlns:a16="http://schemas.microsoft.com/office/drawing/2014/main" id="{FBC06C71-8A4E-DF39-D1ED-0AF1101227EC}"/>
-              </a:ext>
-            </a:extLst>
-          </p:cNvPr>
-          <p:cNvPicPr>
-            <a:picLocks noChangeAspect="1"/>
-          </p:cNvPicPr>
-          <p:nvPr/>
-        </p:nvPicPr>
-        <p:blipFill>
-          <a:blip r:embed="rId3"/>
-          <a:srcRect t="12336"/>
-          <a:stretch>
-            <a:fillRect/>
-          </a:stretch>
-        </p:blipFill>
-        <p:spPr>
-          <a:xfrm>
-            <a:off x="581192" y="3016550"/>
-            <a:ext cx="5778577" cy="3552236"/>
-          </a:xfrm>
-          <a:prstGeom prst="rect">
-            <a:avLst/>
-          </a:prstGeom>
-        </p:spPr>
-      </p:pic>
-      <p:cxnSp>
-        <p:nvCxnSpPr>
-          <p:cNvPr id="11" name="Connecteur droit avec flèche 10">
-            <a:extLst>
-              <a:ext uri="{FF2B5EF4-FFF2-40B4-BE49-F238E27FC236}">
-                <a16:creationId xmlns:a16="http://schemas.microsoft.com/office/drawing/2014/main" id="{3D5481D2-6FEF-53EA-D87B-4A04095ECA94}"/>
-              </a:ext>
-            </a:extLst>
-          </p:cNvPr>
-          <p:cNvCxnSpPr>
-            <a:cxnSpLocks/>
-            <a:stCxn id="12" idx="1"/>
-          </p:cNvCxnSpPr>
-          <p:nvPr/>
-        </p:nvCxnSpPr>
-        <p:spPr>
-          <a:xfrm flipH="1" flipV="1">
-            <a:off x="3384287" y="3194222"/>
-            <a:ext cx="3138201" cy="197710"/>
-          </a:xfrm>
-          <a:prstGeom prst="straightConnector1">
-            <a:avLst/>
-          </a:prstGeom>
-          <a:ln w="19050">
-            <a:solidFill>
-              <a:srgbClr val="FF0000"/>
-            </a:solidFill>
-            <a:tailEnd type="triangle"/>
-          </a:ln>
-        </p:spPr>
-        <p:style>
-          <a:lnRef idx="1">
-            <a:schemeClr val="accent1"/>
-          </a:lnRef>
-          <a:fillRef idx="0">
-            <a:schemeClr val="accent1"/>
-          </a:fillRef>
-          <a:effectRef idx="0">
-            <a:schemeClr val="accent1"/>
-          </a:effectRef>
-          <a:fontRef idx="minor">
-            <a:schemeClr val="tx1"/>
-          </a:fontRef>
-        </p:style>
-      </p:cxnSp>
-      <p:sp>
-        <p:nvSpPr>
-          <p:cNvPr id="12" name="ZoneTexte 11">
-            <a:extLst>
-              <a:ext uri="{FF2B5EF4-FFF2-40B4-BE49-F238E27FC236}">
-                <a16:creationId xmlns:a16="http://schemas.microsoft.com/office/drawing/2014/main" id="{70D9534D-CE91-CBA9-2A84-BBF75ADF9842}"/>
-              </a:ext>
-            </a:extLst>
-          </p:cNvPr>
-          <p:cNvSpPr txBox="1"/>
-          <p:nvPr/>
-        </p:nvSpPr>
-        <p:spPr>
-          <a:xfrm>
-            <a:off x="6522488" y="3022600"/>
-            <a:ext cx="1398494" cy="738664"/>
-          </a:xfrm>
-          <a:prstGeom prst="rect">
-            <a:avLst/>
-          </a:prstGeom>
-          <a:noFill/>
-          <a:ln w="19050">
-            <a:solidFill>
-              <a:srgbClr val="FF0000"/>
-            </a:solidFill>
-          </a:ln>
-        </p:spPr>
-        <p:txBody>
-          <a:bodyPr wrap="square" rtlCol="0">
-            <a:spAutoFit/>
-          </a:bodyPr>
-          <a:lstStyle/>
-          <a:p>
-            <a:r>
-              <a:rPr lang="fr-FR" sz="1400" dirty="0"/>
-              <a:t>Vérification de l’installation </a:t>
-            </a:r>
-            <a:r>
-              <a:rPr lang="fr-FR" sz="1400" dirty="0" err="1"/>
-              <a:t>abctl</a:t>
-            </a:r>
-            <a:endParaRPr lang="fr-FR" sz="1400" dirty="0"/>
-          </a:p>
-        </p:txBody>
-      </p:sp>
-      <p:cxnSp>
-        <p:nvCxnSpPr>
-          <p:cNvPr id="18" name="Connecteur droit avec flèche 17">
-            <a:extLst>
-              <a:ext uri="{FF2B5EF4-FFF2-40B4-BE49-F238E27FC236}">
-                <a16:creationId xmlns:a16="http://schemas.microsoft.com/office/drawing/2014/main" id="{99B46772-C1A2-575E-A433-80EA318FAEEE}"/>
-              </a:ext>
-            </a:extLst>
-          </p:cNvPr>
-          <p:cNvCxnSpPr>
-            <a:cxnSpLocks/>
-            <a:stCxn id="19" idx="1"/>
-          </p:cNvCxnSpPr>
-          <p:nvPr/>
-        </p:nvCxnSpPr>
-        <p:spPr>
-          <a:xfrm flipH="1" flipV="1">
-            <a:off x="3711388" y="3758888"/>
-            <a:ext cx="3426952" cy="645904"/>
-          </a:xfrm>
-          <a:prstGeom prst="straightConnector1">
-            <a:avLst/>
-          </a:prstGeom>
-          <a:ln w="19050">
-            <a:solidFill>
-              <a:srgbClr val="FF0000"/>
-            </a:solidFill>
-            <a:tailEnd type="triangle"/>
-          </a:ln>
-        </p:spPr>
-        <p:style>
-          <a:lnRef idx="1">
-            <a:schemeClr val="accent1"/>
-          </a:lnRef>
-          <a:fillRef idx="0">
-            <a:schemeClr val="accent1"/>
-          </a:fillRef>
-          <a:effectRef idx="0">
-            <a:schemeClr val="accent1"/>
-          </a:effectRef>
-          <a:fontRef idx="minor">
-            <a:schemeClr val="tx1"/>
-          </a:fontRef>
-        </p:style>
-      </p:cxnSp>
-      <p:sp>
-        <p:nvSpPr>
-          <p:cNvPr id="19" name="ZoneTexte 18">
-            <a:extLst>
-              <a:ext uri="{FF2B5EF4-FFF2-40B4-BE49-F238E27FC236}">
-                <a16:creationId xmlns:a16="http://schemas.microsoft.com/office/drawing/2014/main" id="{CCB9072D-7FCD-97C8-9D7F-9CC77E49A791}"/>
-              </a:ext>
-            </a:extLst>
-          </p:cNvPr>
-          <p:cNvSpPr txBox="1"/>
-          <p:nvPr/>
-        </p:nvSpPr>
-        <p:spPr>
-          <a:xfrm>
-            <a:off x="7138340" y="4143182"/>
-            <a:ext cx="1398494" cy="523220"/>
-          </a:xfrm>
-          <a:prstGeom prst="rect">
-            <a:avLst/>
-          </a:prstGeom>
-          <a:noFill/>
-          <a:ln w="19050">
-            <a:solidFill>
-              <a:srgbClr val="FF0000"/>
-            </a:solidFill>
-          </a:ln>
-        </p:spPr>
-        <p:txBody>
-          <a:bodyPr wrap="square" rtlCol="0">
-            <a:spAutoFit/>
-          </a:bodyPr>
-          <a:lstStyle/>
-          <a:p>
-            <a:r>
-              <a:rPr lang="fr-FR" sz="1400" dirty="0"/>
-              <a:t>Lancement du cluster </a:t>
-            </a:r>
-            <a:r>
-              <a:rPr lang="fr-FR" sz="1400" dirty="0" err="1"/>
-              <a:t>Airbyte</a:t>
-            </a:r>
-            <a:endParaRPr lang="fr-FR" sz="1400" dirty="0"/>
-          </a:p>
-        </p:txBody>
-      </p:sp>
-      <p:cxnSp>
-        <p:nvCxnSpPr>
-          <p:cNvPr id="21" name="Connecteur droit avec flèche 20">
-            <a:extLst>
-              <a:ext uri="{FF2B5EF4-FFF2-40B4-BE49-F238E27FC236}">
-                <a16:creationId xmlns:a16="http://schemas.microsoft.com/office/drawing/2014/main" id="{889B2803-6A15-87B6-FB5A-609F88D62BD8}"/>
-              </a:ext>
-            </a:extLst>
-          </p:cNvPr>
-          <p:cNvCxnSpPr>
-            <a:cxnSpLocks/>
-            <a:stCxn id="22" idx="1"/>
-          </p:cNvCxnSpPr>
-          <p:nvPr/>
-        </p:nvCxnSpPr>
-        <p:spPr>
-          <a:xfrm flipH="1">
-            <a:off x="5504329" y="5787872"/>
-            <a:ext cx="1756577" cy="195252"/>
-          </a:xfrm>
-          <a:prstGeom prst="straightConnector1">
-            <a:avLst/>
-          </a:prstGeom>
-          <a:ln w="19050">
-            <a:solidFill>
-              <a:srgbClr val="FF0000"/>
-            </a:solidFill>
-            <a:tailEnd type="triangle"/>
-          </a:ln>
-        </p:spPr>
-        <p:style>
-          <a:lnRef idx="1">
-            <a:schemeClr val="accent1"/>
-          </a:lnRef>
-          <a:fillRef idx="0">
-            <a:schemeClr val="accent1"/>
-          </a:fillRef>
-          <a:effectRef idx="0">
-            <a:schemeClr val="accent1"/>
-          </a:effectRef>
-          <a:fontRef idx="minor">
-            <a:schemeClr val="tx1"/>
-          </a:fontRef>
-        </p:style>
-      </p:cxnSp>
-      <p:sp>
-        <p:nvSpPr>
-          <p:cNvPr id="22" name="ZoneTexte 21">
-            <a:extLst>
-              <a:ext uri="{FF2B5EF4-FFF2-40B4-BE49-F238E27FC236}">
-                <a16:creationId xmlns:a16="http://schemas.microsoft.com/office/drawing/2014/main" id="{ABF8A8BC-CA71-5747-7CB7-EB8E618F5AF5}"/>
-              </a:ext>
-            </a:extLst>
-          </p:cNvPr>
-          <p:cNvSpPr txBox="1"/>
-          <p:nvPr/>
-        </p:nvSpPr>
-        <p:spPr>
-          <a:xfrm>
-            <a:off x="7260906" y="5418540"/>
-            <a:ext cx="1623118" cy="738664"/>
-          </a:xfrm>
-          <a:prstGeom prst="rect">
-            <a:avLst/>
-          </a:prstGeom>
-          <a:noFill/>
-          <a:ln w="19050">
-            <a:solidFill>
-              <a:srgbClr val="FF0000"/>
-            </a:solidFill>
-          </a:ln>
-        </p:spPr>
-        <p:txBody>
-          <a:bodyPr wrap="square" rtlCol="0">
-            <a:spAutoFit/>
-          </a:bodyPr>
-          <a:lstStyle/>
-          <a:p>
-            <a:r>
-              <a:rPr lang="fr-FR" sz="1400" dirty="0"/>
-              <a:t>Récupération de l’URL de connexion à </a:t>
-            </a:r>
-            <a:r>
-              <a:rPr lang="fr-FR" sz="1400" dirty="0" err="1"/>
-              <a:t>Airbyte</a:t>
-            </a:r>
-            <a:endParaRPr lang="fr-FR" sz="1400" dirty="0"/>
           </a:p>
         </p:txBody>
       </p:sp>
@@ -23544,13 +20805,7 @@
   <p:cSld>
     <p:spTree>
       <p:nvGrpSpPr>
-        <p:cNvPr id="1" name="">
-          <a:extLst>
-            <a:ext uri="{FF2B5EF4-FFF2-40B4-BE49-F238E27FC236}">
-              <a16:creationId xmlns:a16="http://schemas.microsoft.com/office/drawing/2014/main" id="{88D74983-0817-6D98-34A1-3F26DB0DD95E}"/>
-            </a:ext>
-          </a:extLst>
-        </p:cNvPr>
+        <p:cNvPr id="1" name=""/>
         <p:cNvGrpSpPr/>
         <p:nvPr/>
       </p:nvGrpSpPr>
@@ -23562,102 +20817,12 @@
           <a:chExt cx="0" cy="0"/>
         </a:xfrm>
       </p:grpSpPr>
-      <p:pic>
-        <p:nvPicPr>
-          <p:cNvPr id="30" name="Image 29">
-            <a:extLst>
-              <a:ext uri="{FF2B5EF4-FFF2-40B4-BE49-F238E27FC236}">
-                <a16:creationId xmlns:a16="http://schemas.microsoft.com/office/drawing/2014/main" id="{2267C55F-B917-1312-7F10-54642988F6BE}"/>
-              </a:ext>
-            </a:extLst>
-          </p:cNvPr>
-          <p:cNvPicPr>
-            <a:picLocks noChangeAspect="1"/>
-          </p:cNvPicPr>
-          <p:nvPr/>
-        </p:nvPicPr>
-        <p:blipFill>
-          <a:blip r:embed="rId2"/>
-          <a:stretch>
-            <a:fillRect/>
-          </a:stretch>
-        </p:blipFill>
-        <p:spPr>
-          <a:xfrm>
-            <a:off x="5819187" y="3889977"/>
-            <a:ext cx="2444226" cy="2783870"/>
-          </a:xfrm>
-          <a:prstGeom prst="rect">
-            <a:avLst/>
-          </a:prstGeom>
-        </p:spPr>
-      </p:pic>
-      <p:pic>
-        <p:nvPicPr>
-          <p:cNvPr id="23" name="Image 22">
-            <a:extLst>
-              <a:ext uri="{FF2B5EF4-FFF2-40B4-BE49-F238E27FC236}">
-                <a16:creationId xmlns:a16="http://schemas.microsoft.com/office/drawing/2014/main" id="{42254041-17CD-A75B-FC02-109492948AAB}"/>
-              </a:ext>
-            </a:extLst>
-          </p:cNvPr>
-          <p:cNvPicPr>
-            <a:picLocks noChangeAspect="1"/>
-          </p:cNvPicPr>
-          <p:nvPr/>
-        </p:nvPicPr>
-        <p:blipFill>
-          <a:blip r:embed="rId3"/>
-          <a:stretch>
-            <a:fillRect/>
-          </a:stretch>
-        </p:blipFill>
-        <p:spPr>
-          <a:xfrm>
-            <a:off x="8634525" y="1760193"/>
-            <a:ext cx="3068516" cy="3965467"/>
-          </a:xfrm>
-          <a:prstGeom prst="rect">
-            <a:avLst/>
-          </a:prstGeom>
-        </p:spPr>
-      </p:pic>
-      <p:pic>
-        <p:nvPicPr>
-          <p:cNvPr id="17" name="Image 16">
-            <a:extLst>
-              <a:ext uri="{FF2B5EF4-FFF2-40B4-BE49-F238E27FC236}">
-                <a16:creationId xmlns:a16="http://schemas.microsoft.com/office/drawing/2014/main" id="{3A32B1C6-CE19-2575-0D75-B6C84CC295E5}"/>
-              </a:ext>
-            </a:extLst>
-          </p:cNvPr>
-          <p:cNvPicPr>
-            <a:picLocks noChangeAspect="1"/>
-          </p:cNvPicPr>
-          <p:nvPr/>
-        </p:nvPicPr>
-        <p:blipFill>
-          <a:blip r:embed="rId4"/>
-          <a:stretch>
-            <a:fillRect/>
-          </a:stretch>
-        </p:blipFill>
-        <p:spPr>
-          <a:xfrm>
-            <a:off x="366742" y="1949558"/>
-            <a:ext cx="5137583" cy="1704796"/>
-          </a:xfrm>
-          <a:prstGeom prst="rect">
-            <a:avLst/>
-          </a:prstGeom>
-        </p:spPr>
-      </p:pic>
       <p:sp>
         <p:nvSpPr>
           <p:cNvPr id="2" name="Titre 1">
             <a:extLst>
               <a:ext uri="{FF2B5EF4-FFF2-40B4-BE49-F238E27FC236}">
-                <a16:creationId xmlns:a16="http://schemas.microsoft.com/office/drawing/2014/main" id="{705925C9-1234-EBA4-C6CB-9CCF7796EC67}"/>
+                <a16:creationId xmlns:a16="http://schemas.microsoft.com/office/drawing/2014/main" id="{CD4458A9-6CDC-6BF3-250C-B6E6F2946DB9}"/>
               </a:ext>
             </a:extLst>
           </p:cNvPr>
@@ -23675,16 +20840,33 @@
           <a:p>
             <a:r>
               <a:rPr lang="fr-FR" dirty="0"/>
-              <a:t>5. Mise en place </a:t>
+              <a:t>6. Mise en place DBT</a:t>
             </a:r>
-            <a:r>
-              <a:rPr lang="fr-FR" dirty="0" err="1"/>
-              <a:t>Airbyte</a:t>
-            </a:r>
-            <a:br>
-              <a:rPr lang="fr-FR" dirty="0"/>
-            </a:br>
-            <a:endParaRPr lang="fr-FR" dirty="0"/>
+          </a:p>
+        </p:txBody>
+      </p:sp>
+      <p:sp>
+        <p:nvSpPr>
+          <p:cNvPr id="3" name="Espace réservé du contenu 2">
+            <a:extLst>
+              <a:ext uri="{FF2B5EF4-FFF2-40B4-BE49-F238E27FC236}">
+                <a16:creationId xmlns:a16="http://schemas.microsoft.com/office/drawing/2014/main" id="{2CE1B120-2F32-09E5-8E07-86A7DCFCA271}"/>
+              </a:ext>
+            </a:extLst>
+          </p:cNvPr>
+          <p:cNvSpPr>
+            <a:spLocks noGrp="1"/>
+          </p:cNvSpPr>
+          <p:nvPr>
+            <p:ph idx="1"/>
+          </p:nvPr>
+        </p:nvSpPr>
+        <p:spPr/>
+        <p:txBody>
+          <a:bodyPr/>
+          <a:lstStyle/>
+          <a:p>
+            <a:endParaRPr lang="fr-FR"/>
           </a:p>
         </p:txBody>
       </p:sp>
@@ -23693,7 +20875,7 @@
           <p:cNvPr id="4" name="Espace réservé de la date 3">
             <a:extLst>
               <a:ext uri="{FF2B5EF4-FFF2-40B4-BE49-F238E27FC236}">
-                <a16:creationId xmlns:a16="http://schemas.microsoft.com/office/drawing/2014/main" id="{76DE4246-318F-7BB4-8541-0D08F553A1D7}"/>
+                <a16:creationId xmlns:a16="http://schemas.microsoft.com/office/drawing/2014/main" id="{24295062-DAC1-8A8F-28FC-FA10BE7B3705}"/>
               </a:ext>
             </a:extLst>
           </p:cNvPr>
@@ -23712,487 +20894,16 @@
             <a:pPr rtl="0"/>
             <a:fld id="{22897033-9A55-4DAC-991D-1FF1921C78B7}" type="datetime1">
               <a:rPr lang="fr-FR" smtClean="0"/>
-              <a:t>18/08/2026</a:t>
+              <a:t>16/08/2026</a:t>
             </a:fld>
             <a:endParaRPr lang="en-US" dirty="0"/>
-          </a:p>
-        </p:txBody>
-      </p:sp>
-      <p:sp>
-        <p:nvSpPr>
-          <p:cNvPr id="5" name="Espace réservé du contenu 2">
-            <a:extLst>
-              <a:ext uri="{FF2B5EF4-FFF2-40B4-BE49-F238E27FC236}">
-                <a16:creationId xmlns:a16="http://schemas.microsoft.com/office/drawing/2014/main" id="{B55FA9FA-0C60-CA7B-89A9-9E8DF7DE443F}"/>
-              </a:ext>
-            </a:extLst>
-          </p:cNvPr>
-          <p:cNvSpPr>
-            <a:spLocks noGrp="1"/>
-          </p:cNvSpPr>
-          <p:nvPr>
-            <p:ph idx="1"/>
-          </p:nvPr>
-        </p:nvSpPr>
-        <p:spPr>
-          <a:xfrm>
-            <a:off x="581192" y="2020366"/>
-            <a:ext cx="11029615" cy="3634486"/>
-          </a:xfrm>
-        </p:spPr>
-        <p:txBody>
-          <a:bodyPr/>
-          <a:lstStyle/>
-          <a:p>
-            <a:endParaRPr lang="fr-FR" dirty="0"/>
-          </a:p>
-          <a:p>
-            <a:endParaRPr lang="fr-FR" dirty="0"/>
-          </a:p>
-          <a:p>
-            <a:endParaRPr lang="fr-FR" dirty="0"/>
-          </a:p>
-          <a:p>
-            <a:endParaRPr lang="fr-FR" dirty="0"/>
-          </a:p>
-          <a:p>
-            <a:endParaRPr lang="fr-FR" dirty="0"/>
-          </a:p>
-        </p:txBody>
-      </p:sp>
-      <p:cxnSp>
-        <p:nvCxnSpPr>
-          <p:cNvPr id="11" name="Connecteur droit avec flèche 10">
-            <a:extLst>
-              <a:ext uri="{FF2B5EF4-FFF2-40B4-BE49-F238E27FC236}">
-                <a16:creationId xmlns:a16="http://schemas.microsoft.com/office/drawing/2014/main" id="{E52297B9-826B-22AE-DE9A-56E6E72007DC}"/>
-              </a:ext>
-            </a:extLst>
-          </p:cNvPr>
-          <p:cNvCxnSpPr>
-            <a:cxnSpLocks/>
-          </p:cNvCxnSpPr>
-          <p:nvPr/>
-        </p:nvCxnSpPr>
-        <p:spPr>
-          <a:xfrm flipH="1">
-            <a:off x="3651773" y="2029502"/>
-            <a:ext cx="2444226" cy="0"/>
-          </a:xfrm>
-          <a:prstGeom prst="straightConnector1">
-            <a:avLst/>
-          </a:prstGeom>
-          <a:ln w="19050">
-            <a:solidFill>
-              <a:srgbClr val="FF0000"/>
-            </a:solidFill>
-            <a:tailEnd type="triangle"/>
-          </a:ln>
-        </p:spPr>
-        <p:style>
-          <a:lnRef idx="1">
-            <a:schemeClr val="accent1"/>
-          </a:lnRef>
-          <a:fillRef idx="0">
-            <a:schemeClr val="accent1"/>
-          </a:fillRef>
-          <a:effectRef idx="0">
-            <a:schemeClr val="accent1"/>
-          </a:effectRef>
-          <a:fontRef idx="minor">
-            <a:schemeClr val="tx1"/>
-          </a:fontRef>
-        </p:style>
-      </p:cxnSp>
-      <p:sp>
-        <p:nvSpPr>
-          <p:cNvPr id="12" name="ZoneTexte 11">
-            <a:extLst>
-              <a:ext uri="{FF2B5EF4-FFF2-40B4-BE49-F238E27FC236}">
-                <a16:creationId xmlns:a16="http://schemas.microsoft.com/office/drawing/2014/main" id="{EE53D73E-ACCA-C005-E114-5F39B29C3D15}"/>
-              </a:ext>
-            </a:extLst>
-          </p:cNvPr>
-          <p:cNvSpPr txBox="1"/>
-          <p:nvPr/>
-        </p:nvSpPr>
-        <p:spPr>
-          <a:xfrm>
-            <a:off x="6095999" y="1520652"/>
-            <a:ext cx="2229778" cy="954107"/>
-          </a:xfrm>
-          <a:prstGeom prst="rect">
-            <a:avLst/>
-          </a:prstGeom>
-          <a:noFill/>
-          <a:ln w="19050">
-            <a:solidFill>
-              <a:srgbClr val="FF0000"/>
-            </a:solidFill>
-          </a:ln>
-        </p:spPr>
-        <p:txBody>
-          <a:bodyPr wrap="square" rtlCol="0">
-            <a:spAutoFit/>
-          </a:bodyPr>
-          <a:lstStyle/>
-          <a:p>
-            <a:r>
-              <a:rPr lang="fr-FR" sz="1400" dirty="0"/>
-              <a:t>Récupération de l’identifiant et du mot de passe pour se connecter à </a:t>
-            </a:r>
-            <a:r>
-              <a:rPr lang="fr-FR" sz="1400" dirty="0" err="1"/>
-              <a:t>Airbyte</a:t>
-            </a:r>
-            <a:endParaRPr lang="fr-FR" sz="1400" dirty="0"/>
-          </a:p>
-        </p:txBody>
-      </p:sp>
-      <p:cxnSp>
-        <p:nvCxnSpPr>
-          <p:cNvPr id="18" name="Connecteur droit avec flèche 17">
-            <a:extLst>
-              <a:ext uri="{FF2B5EF4-FFF2-40B4-BE49-F238E27FC236}">
-                <a16:creationId xmlns:a16="http://schemas.microsoft.com/office/drawing/2014/main" id="{A33A57B6-B76A-8140-7629-DA6CA0A7787D}"/>
-              </a:ext>
-            </a:extLst>
-          </p:cNvPr>
-          <p:cNvCxnSpPr>
-            <a:cxnSpLocks/>
-            <a:stCxn id="19" idx="0"/>
-          </p:cNvCxnSpPr>
-          <p:nvPr/>
-        </p:nvCxnSpPr>
-        <p:spPr>
-          <a:xfrm flipV="1">
-            <a:off x="9384394" y="4348480"/>
-            <a:ext cx="247286" cy="970934"/>
-          </a:xfrm>
-          <a:prstGeom prst="straightConnector1">
-            <a:avLst/>
-          </a:prstGeom>
-          <a:ln w="19050">
-            <a:solidFill>
-              <a:srgbClr val="FF0000"/>
-            </a:solidFill>
-            <a:tailEnd type="triangle"/>
-          </a:ln>
-        </p:spPr>
-        <p:style>
-          <a:lnRef idx="1">
-            <a:schemeClr val="accent1"/>
-          </a:lnRef>
-          <a:fillRef idx="0">
-            <a:schemeClr val="accent1"/>
-          </a:fillRef>
-          <a:effectRef idx="0">
-            <a:schemeClr val="accent1"/>
-          </a:effectRef>
-          <a:fontRef idx="minor">
-            <a:schemeClr val="tx1"/>
-          </a:fontRef>
-        </p:style>
-      </p:cxnSp>
-      <p:sp>
-        <p:nvSpPr>
-          <p:cNvPr id="19" name="ZoneTexte 18">
-            <a:extLst>
-              <a:ext uri="{FF2B5EF4-FFF2-40B4-BE49-F238E27FC236}">
-                <a16:creationId xmlns:a16="http://schemas.microsoft.com/office/drawing/2014/main" id="{94332C56-FE79-56CF-2026-CDA20ACEB201}"/>
-              </a:ext>
-            </a:extLst>
-          </p:cNvPr>
-          <p:cNvSpPr txBox="1"/>
-          <p:nvPr/>
-        </p:nvSpPr>
-        <p:spPr>
-          <a:xfrm>
-            <a:off x="8685147" y="5319414"/>
-            <a:ext cx="1398494" cy="954107"/>
-          </a:xfrm>
-          <a:prstGeom prst="rect">
-            <a:avLst/>
-          </a:prstGeom>
-          <a:noFill/>
-          <a:ln w="19050">
-            <a:solidFill>
-              <a:srgbClr val="FF0000"/>
-            </a:solidFill>
-          </a:ln>
-        </p:spPr>
-        <p:txBody>
-          <a:bodyPr wrap="square" rtlCol="0">
-            <a:spAutoFit/>
-          </a:bodyPr>
-          <a:lstStyle/>
-          <a:p>
-            <a:r>
-              <a:rPr lang="fr-FR" sz="1400" dirty="0"/>
-              <a:t>Organisation à compléter exemple </a:t>
-            </a:r>
-            <a:r>
-              <a:rPr lang="fr-FR" sz="1400" dirty="0" err="1"/>
-              <a:t>Greencoop</a:t>
-            </a:r>
-            <a:endParaRPr lang="fr-FR" sz="1400" dirty="0"/>
-          </a:p>
-        </p:txBody>
-      </p:sp>
-      <p:pic>
-        <p:nvPicPr>
-          <p:cNvPr id="32" name="Image 31">
-            <a:extLst>
-              <a:ext uri="{FF2B5EF4-FFF2-40B4-BE49-F238E27FC236}">
-                <a16:creationId xmlns:a16="http://schemas.microsoft.com/office/drawing/2014/main" id="{D4C5A50F-A2B5-14EE-23F5-2E99C9A7753D}"/>
-              </a:ext>
-            </a:extLst>
-          </p:cNvPr>
-          <p:cNvPicPr>
-            <a:picLocks noChangeAspect="1"/>
-          </p:cNvPicPr>
-          <p:nvPr/>
-        </p:nvPicPr>
-        <p:blipFill>
-          <a:blip r:embed="rId5"/>
-          <a:stretch>
-            <a:fillRect/>
-          </a:stretch>
-        </p:blipFill>
-        <p:spPr>
-          <a:xfrm>
-            <a:off x="103344" y="3856530"/>
-            <a:ext cx="5623609" cy="2752459"/>
-          </a:xfrm>
-          <a:prstGeom prst="rect">
-            <a:avLst/>
-          </a:prstGeom>
-        </p:spPr>
-      </p:pic>
-      <p:sp>
-        <p:nvSpPr>
-          <p:cNvPr id="35" name="Heptagone 34">
-            <a:extLst>
-              <a:ext uri="{FF2B5EF4-FFF2-40B4-BE49-F238E27FC236}">
-                <a16:creationId xmlns:a16="http://schemas.microsoft.com/office/drawing/2014/main" id="{ABC48CAC-8A29-2897-5B13-8B367CE2A0D0}"/>
-              </a:ext>
-            </a:extLst>
-          </p:cNvPr>
-          <p:cNvSpPr/>
-          <p:nvPr/>
-        </p:nvSpPr>
-        <p:spPr>
-          <a:xfrm>
-            <a:off x="5453244" y="1421458"/>
-            <a:ext cx="457199" cy="457292"/>
-          </a:xfrm>
-          <a:prstGeom prst="heptagon">
-            <a:avLst/>
-          </a:prstGeom>
-          <a:solidFill>
-            <a:srgbClr val="FF0000"/>
-          </a:solidFill>
-          <a:ln>
-            <a:noFill/>
-          </a:ln>
-        </p:spPr>
-        <p:style>
-          <a:lnRef idx="2">
-            <a:schemeClr val="accent1">
-              <a:shade val="15000"/>
-            </a:schemeClr>
-          </a:lnRef>
-          <a:fillRef idx="1">
-            <a:schemeClr val="accent1"/>
-          </a:fillRef>
-          <a:effectRef idx="0">
-            <a:schemeClr val="accent1"/>
-          </a:effectRef>
-          <a:fontRef idx="minor">
-            <a:schemeClr val="lt1"/>
-          </a:fontRef>
-        </p:style>
-        <p:txBody>
-          <a:bodyPr rtlCol="0" anchor="ctr"/>
-          <a:lstStyle/>
-          <a:p>
-            <a:pPr algn="ctr"/>
-            <a:r>
-              <a:rPr lang="fr-FR" dirty="0"/>
-              <a:t>1</a:t>
-            </a:r>
-          </a:p>
-        </p:txBody>
-      </p:sp>
-      <p:sp>
-        <p:nvSpPr>
-          <p:cNvPr id="36" name="Heptagone 35">
-            <a:extLst>
-              <a:ext uri="{FF2B5EF4-FFF2-40B4-BE49-F238E27FC236}">
-                <a16:creationId xmlns:a16="http://schemas.microsoft.com/office/drawing/2014/main" id="{E454EFEF-58B5-0ABD-5FEF-02DB087EE133}"/>
-              </a:ext>
-            </a:extLst>
-          </p:cNvPr>
-          <p:cNvSpPr/>
-          <p:nvPr/>
-        </p:nvSpPr>
-        <p:spPr>
-          <a:xfrm>
-            <a:off x="8688851" y="1876252"/>
-            <a:ext cx="457199" cy="457292"/>
-          </a:xfrm>
-          <a:prstGeom prst="heptagon">
-            <a:avLst/>
-          </a:prstGeom>
-          <a:solidFill>
-            <a:srgbClr val="FF0000"/>
-          </a:solidFill>
-          <a:ln>
-            <a:noFill/>
-          </a:ln>
-        </p:spPr>
-        <p:style>
-          <a:lnRef idx="2">
-            <a:schemeClr val="accent1">
-              <a:shade val="15000"/>
-            </a:schemeClr>
-          </a:lnRef>
-          <a:fillRef idx="1">
-            <a:schemeClr val="accent1"/>
-          </a:fillRef>
-          <a:effectRef idx="0">
-            <a:schemeClr val="accent1"/>
-          </a:effectRef>
-          <a:fontRef idx="minor">
-            <a:schemeClr val="lt1"/>
-          </a:fontRef>
-        </p:style>
-        <p:txBody>
-          <a:bodyPr rtlCol="0" anchor="ctr"/>
-          <a:lstStyle/>
-          <a:p>
-            <a:pPr algn="ctr"/>
-            <a:r>
-              <a:rPr lang="fr-FR" dirty="0"/>
-              <a:t>2</a:t>
-            </a:r>
-          </a:p>
-        </p:txBody>
-      </p:sp>
-      <p:sp>
-        <p:nvSpPr>
-          <p:cNvPr id="37" name="Heptagone 36">
-            <a:extLst>
-              <a:ext uri="{FF2B5EF4-FFF2-40B4-BE49-F238E27FC236}">
-                <a16:creationId xmlns:a16="http://schemas.microsoft.com/office/drawing/2014/main" id="{4E09418D-BB7A-7310-96AA-51FF7BC126F8}"/>
-              </a:ext>
-            </a:extLst>
-          </p:cNvPr>
-          <p:cNvSpPr/>
-          <p:nvPr/>
-        </p:nvSpPr>
-        <p:spPr>
-          <a:xfrm>
-            <a:off x="7210888" y="3751350"/>
-            <a:ext cx="457199" cy="457292"/>
-          </a:xfrm>
-          <a:prstGeom prst="heptagon">
-            <a:avLst/>
-          </a:prstGeom>
-          <a:solidFill>
-            <a:srgbClr val="FF0000"/>
-          </a:solidFill>
-          <a:ln>
-            <a:noFill/>
-          </a:ln>
-        </p:spPr>
-        <p:style>
-          <a:lnRef idx="2">
-            <a:schemeClr val="accent1">
-              <a:shade val="15000"/>
-            </a:schemeClr>
-          </a:lnRef>
-          <a:fillRef idx="1">
-            <a:schemeClr val="accent1"/>
-          </a:fillRef>
-          <a:effectRef idx="0">
-            <a:schemeClr val="accent1"/>
-          </a:effectRef>
-          <a:fontRef idx="minor">
-            <a:schemeClr val="lt1"/>
-          </a:fontRef>
-        </p:style>
-        <p:txBody>
-          <a:bodyPr rtlCol="0" anchor="ctr"/>
-          <a:lstStyle/>
-          <a:p>
-            <a:pPr algn="ctr"/>
-            <a:r>
-              <a:rPr lang="fr-FR" dirty="0"/>
-              <a:t>3</a:t>
-            </a:r>
-          </a:p>
-        </p:txBody>
-      </p:sp>
-      <p:sp>
-        <p:nvSpPr>
-          <p:cNvPr id="38" name="Heptagone 37">
-            <a:extLst>
-              <a:ext uri="{FF2B5EF4-FFF2-40B4-BE49-F238E27FC236}">
-                <a16:creationId xmlns:a16="http://schemas.microsoft.com/office/drawing/2014/main" id="{FCE63BD3-363B-F7E5-7F37-697ABE9EA112}"/>
-              </a:ext>
-            </a:extLst>
-          </p:cNvPr>
-          <p:cNvSpPr/>
-          <p:nvPr/>
-        </p:nvSpPr>
-        <p:spPr>
-          <a:xfrm>
-            <a:off x="5224644" y="3810239"/>
-            <a:ext cx="457199" cy="457292"/>
-          </a:xfrm>
-          <a:prstGeom prst="heptagon">
-            <a:avLst/>
-          </a:prstGeom>
-          <a:solidFill>
-            <a:srgbClr val="FF0000"/>
-          </a:solidFill>
-          <a:ln>
-            <a:noFill/>
-          </a:ln>
-        </p:spPr>
-        <p:style>
-          <a:lnRef idx="2">
-            <a:schemeClr val="accent1">
-              <a:shade val="15000"/>
-            </a:schemeClr>
-          </a:lnRef>
-          <a:fillRef idx="1">
-            <a:schemeClr val="accent1"/>
-          </a:fillRef>
-          <a:effectRef idx="0">
-            <a:schemeClr val="accent1"/>
-          </a:effectRef>
-          <a:fontRef idx="minor">
-            <a:schemeClr val="lt1"/>
-          </a:fontRef>
-        </p:style>
-        <p:txBody>
-          <a:bodyPr rtlCol="0" anchor="ctr"/>
-          <a:lstStyle/>
-          <a:p>
-            <a:pPr algn="ctr"/>
-            <a:r>
-              <a:rPr lang="fr-FR" dirty="0"/>
-              <a:t>4</a:t>
-            </a:r>
           </a:p>
         </p:txBody>
       </p:sp>
     </p:spTree>
     <p:extLst>
       <p:ext uri="{BB962C8B-B14F-4D97-AF65-F5344CB8AC3E}">
-        <p14:creationId xmlns:p14="http://schemas.microsoft.com/office/powerpoint/2010/main" val="158295832"/>
+        <p14:creationId xmlns:p14="http://schemas.microsoft.com/office/powerpoint/2010/main" val="1468749072"/>
       </p:ext>
     </p:extLst>
   </p:cSld>
@@ -24207,13 +20918,7 @@
   <p:cSld>
     <p:spTree>
       <p:nvGrpSpPr>
-        <p:cNvPr id="1" name="">
-          <a:extLst>
-            <a:ext uri="{FF2B5EF4-FFF2-40B4-BE49-F238E27FC236}">
-              <a16:creationId xmlns:a16="http://schemas.microsoft.com/office/drawing/2014/main" id="{1011E6CB-E986-2838-317C-AD5DECF79C5D}"/>
-            </a:ext>
-          </a:extLst>
-        </p:cNvPr>
+        <p:cNvPr id="1" name=""/>
         <p:cNvGrpSpPr/>
         <p:nvPr/>
       </p:nvGrpSpPr>
@@ -24225,77 +20930,12 @@
           <a:chExt cx="0" cy="0"/>
         </a:xfrm>
       </p:grpSpPr>
-      <p:pic>
-        <p:nvPicPr>
-          <p:cNvPr id="8" name="Image 7">
-            <a:extLst>
-              <a:ext uri="{FF2B5EF4-FFF2-40B4-BE49-F238E27FC236}">
-                <a16:creationId xmlns:a16="http://schemas.microsoft.com/office/drawing/2014/main" id="{6D3DA2DF-A86A-2CC4-5E20-0DDB71458987}"/>
-              </a:ext>
-            </a:extLst>
-          </p:cNvPr>
-          <p:cNvPicPr>
-            <a:picLocks noChangeAspect="1"/>
-          </p:cNvPicPr>
-          <p:nvPr/>
-        </p:nvPicPr>
-        <p:blipFill>
-          <a:blip r:embed="rId2"/>
-          <a:stretch>
-            <a:fillRect/>
-          </a:stretch>
-        </p:blipFill>
-        <p:spPr>
-          <a:xfrm>
-            <a:off x="244944" y="1980929"/>
-            <a:ext cx="7423143" cy="4391155"/>
-          </a:xfrm>
-          <a:prstGeom prst="rect">
-            <a:avLst/>
-          </a:prstGeom>
-        </p:spPr>
-      </p:pic>
-      <p:pic>
-        <p:nvPicPr>
-          <p:cNvPr id="10" name="Image 9">
-            <a:extLst>
-              <a:ext uri="{FF2B5EF4-FFF2-40B4-BE49-F238E27FC236}">
-                <a16:creationId xmlns:a16="http://schemas.microsoft.com/office/drawing/2014/main" id="{08D5152E-E889-8CA5-C44F-A4A1FA017852}"/>
-              </a:ext>
-            </a:extLst>
-          </p:cNvPr>
-          <p:cNvPicPr>
-            <a:picLocks noChangeAspect="1"/>
-          </p:cNvPicPr>
-          <p:nvPr/>
-        </p:nvPicPr>
-        <p:blipFill>
-          <a:blip r:embed="rId3"/>
-          <a:stretch>
-            <a:fillRect/>
-          </a:stretch>
-        </p:blipFill>
-        <p:spPr>
-          <a:xfrm>
-            <a:off x="7507786" y="1942706"/>
-            <a:ext cx="4684214" cy="3885084"/>
-          </a:xfrm>
-          <a:prstGeom prst="rect">
-            <a:avLst/>
-          </a:prstGeom>
-          <a:ln>
-            <a:solidFill>
-              <a:srgbClr val="FF0000"/>
-            </a:solidFill>
-          </a:ln>
-        </p:spPr>
-      </p:pic>
       <p:sp>
         <p:nvSpPr>
           <p:cNvPr id="2" name="Titre 1">
             <a:extLst>
               <a:ext uri="{FF2B5EF4-FFF2-40B4-BE49-F238E27FC236}">
-                <a16:creationId xmlns:a16="http://schemas.microsoft.com/office/drawing/2014/main" id="{19AC503D-3E67-A748-EEB9-A41504396FC6}"/>
+                <a16:creationId xmlns:a16="http://schemas.microsoft.com/office/drawing/2014/main" id="{1C4CC017-D4E6-EF3B-F567-8E1DF81BEE69}"/>
               </a:ext>
             </a:extLst>
           </p:cNvPr>
@@ -24313,16 +20953,8 @@
           <a:p>
             <a:r>
               <a:rPr lang="fr-FR" dirty="0"/>
-              <a:t>5. Mise en place </a:t>
+              <a:t>7. temps accessibilité aux données</a:t>
             </a:r>
-            <a:r>
-              <a:rPr lang="fr-FR" dirty="0" err="1"/>
-              <a:t>Airbyte</a:t>
-            </a:r>
-            <a:br>
-              <a:rPr lang="fr-FR" dirty="0"/>
-            </a:br>
-            <a:endParaRPr lang="fr-FR" dirty="0"/>
           </a:p>
         </p:txBody>
       </p:sp>
@@ -24331,7 +20963,7 @@
           <p:cNvPr id="4" name="Espace réservé de la date 3">
             <a:extLst>
               <a:ext uri="{FF2B5EF4-FFF2-40B4-BE49-F238E27FC236}">
-                <a16:creationId xmlns:a16="http://schemas.microsoft.com/office/drawing/2014/main" id="{9830ECEB-1D6F-6823-EEED-F77AECF32774}"/>
+                <a16:creationId xmlns:a16="http://schemas.microsoft.com/office/drawing/2014/main" id="{765A87D0-4BCC-68DF-11C9-3CB0062362F5}"/>
               </a:ext>
             </a:extLst>
           </p:cNvPr>
@@ -24350,393 +20982,48 @@
             <a:pPr rtl="0"/>
             <a:fld id="{22897033-9A55-4DAC-991D-1FF1921C78B7}" type="datetime1">
               <a:rPr lang="fr-FR" smtClean="0"/>
-              <a:t>18/08/2026</a:t>
+              <a:t>16/08/2026</a:t>
             </a:fld>
             <a:endParaRPr lang="en-US" dirty="0"/>
           </a:p>
         </p:txBody>
       </p:sp>
-      <p:sp>
-        <p:nvSpPr>
-          <p:cNvPr id="5" name="Espace réservé du contenu 2">
+      <p:pic>
+        <p:nvPicPr>
+          <p:cNvPr id="5" name="Picture 3" descr="dbt_runtime.png">
             <a:extLst>
               <a:ext uri="{FF2B5EF4-FFF2-40B4-BE49-F238E27FC236}">
-                <a16:creationId xmlns:a16="http://schemas.microsoft.com/office/drawing/2014/main" id="{3EBB2094-32CC-6F96-6085-4ECF4A86E15F}"/>
+                <a16:creationId xmlns:a16="http://schemas.microsoft.com/office/drawing/2014/main" id="{EBDAF90F-5EA1-F0AB-66D7-BD8928719595}"/>
               </a:ext>
             </a:extLst>
           </p:cNvPr>
-          <p:cNvSpPr>
-            <a:spLocks noGrp="1"/>
-          </p:cNvSpPr>
+          <p:cNvPicPr>
+            <a:picLocks noGrp="1" noChangeAspect="1"/>
+          </p:cNvPicPr>
           <p:nvPr>
             <p:ph idx="1"/>
           </p:nvPr>
-        </p:nvSpPr>
+        </p:nvPicPr>
+        <p:blipFill>
+          <a:blip r:embed="rId2"/>
+          <a:stretch>
+            <a:fillRect/>
+          </a:stretch>
+        </p:blipFill>
         <p:spPr>
           <a:xfrm>
-            <a:off x="581192" y="2020366"/>
-            <a:ext cx="11029615" cy="3634486"/>
-          </a:xfrm>
-        </p:spPr>
-        <p:txBody>
-          <a:bodyPr/>
-          <a:lstStyle/>
-          <a:p>
-            <a:endParaRPr lang="fr-FR" dirty="0"/>
-          </a:p>
-          <a:p>
-            <a:endParaRPr lang="fr-FR" dirty="0"/>
-          </a:p>
-          <a:p>
-            <a:endParaRPr lang="fr-FR" dirty="0"/>
-          </a:p>
-          <a:p>
-            <a:endParaRPr lang="fr-FR" dirty="0"/>
-          </a:p>
-          <a:p>
-            <a:endParaRPr lang="fr-FR" dirty="0"/>
-          </a:p>
-        </p:txBody>
-      </p:sp>
-      <p:cxnSp>
-        <p:nvCxnSpPr>
-          <p:cNvPr id="11" name="Connecteur droit avec flèche 10">
-            <a:extLst>
-              <a:ext uri="{FF2B5EF4-FFF2-40B4-BE49-F238E27FC236}">
-                <a16:creationId xmlns:a16="http://schemas.microsoft.com/office/drawing/2014/main" id="{D076B123-21C4-A656-AB41-81BDAB1FFFAE}"/>
-              </a:ext>
-            </a:extLst>
-          </p:cNvPr>
-          <p:cNvCxnSpPr>
-            <a:cxnSpLocks/>
-            <a:stCxn id="12" idx="0"/>
-          </p:cNvCxnSpPr>
-          <p:nvPr/>
-        </p:nvCxnSpPr>
-        <p:spPr>
-          <a:xfrm flipH="1" flipV="1">
-            <a:off x="10450750" y="5283200"/>
-            <a:ext cx="426653" cy="719552"/>
-          </a:xfrm>
-          <a:prstGeom prst="straightConnector1">
-            <a:avLst/>
-          </a:prstGeom>
-          <a:ln w="19050">
-            <a:solidFill>
-              <a:srgbClr val="FF0000"/>
-            </a:solidFill>
-            <a:tailEnd type="triangle"/>
-          </a:ln>
-        </p:spPr>
-        <p:style>
-          <a:lnRef idx="1">
-            <a:schemeClr val="accent1"/>
-          </a:lnRef>
-          <a:fillRef idx="0">
-            <a:schemeClr val="accent1"/>
-          </a:fillRef>
-          <a:effectRef idx="0">
-            <a:schemeClr val="accent1"/>
-          </a:effectRef>
-          <a:fontRef idx="minor">
-            <a:schemeClr val="tx1"/>
-          </a:fontRef>
-        </p:style>
-      </p:cxnSp>
-      <p:sp>
-        <p:nvSpPr>
-          <p:cNvPr id="12" name="ZoneTexte 11">
-            <a:extLst>
-              <a:ext uri="{FF2B5EF4-FFF2-40B4-BE49-F238E27FC236}">
-                <a16:creationId xmlns:a16="http://schemas.microsoft.com/office/drawing/2014/main" id="{B299D3AA-A1B4-AF62-58CA-E00DCB85907D}"/>
-              </a:ext>
-            </a:extLst>
-          </p:cNvPr>
-          <p:cNvSpPr txBox="1"/>
-          <p:nvPr/>
-        </p:nvSpPr>
-        <p:spPr>
-          <a:xfrm>
-            <a:off x="9930638" y="6002752"/>
-            <a:ext cx="1893529" cy="738664"/>
+            <a:off x="1442873" y="2275065"/>
+            <a:ext cx="5648653" cy="3444053"/>
           </a:xfrm>
           <a:prstGeom prst="rect">
             <a:avLst/>
           </a:prstGeom>
-          <a:solidFill>
-            <a:schemeClr val="bg1"/>
-          </a:solidFill>
-          <a:ln w="19050">
-            <a:solidFill>
-              <a:srgbClr val="FF0000"/>
-            </a:solidFill>
-          </a:ln>
         </p:spPr>
-        <p:txBody>
-          <a:bodyPr wrap="square" rtlCol="0">
-            <a:spAutoFit/>
-          </a:bodyPr>
-          <a:lstStyle/>
-          <a:p>
-            <a:r>
-              <a:rPr lang="fr-FR" sz="1400" dirty="0"/>
-              <a:t>URL GitHub ou autre. Récupération fichier en local impossible</a:t>
-            </a:r>
-          </a:p>
-        </p:txBody>
-      </p:sp>
-      <p:sp>
-        <p:nvSpPr>
-          <p:cNvPr id="35" name="Heptagone 34">
-            <a:extLst>
-              <a:ext uri="{FF2B5EF4-FFF2-40B4-BE49-F238E27FC236}">
-                <a16:creationId xmlns:a16="http://schemas.microsoft.com/office/drawing/2014/main" id="{38A97BEA-D4F0-F5D0-1158-002A7D4ABB4C}"/>
-              </a:ext>
-            </a:extLst>
-          </p:cNvPr>
-          <p:cNvSpPr/>
-          <p:nvPr/>
-        </p:nvSpPr>
-        <p:spPr>
-          <a:xfrm>
-            <a:off x="2983873" y="2972824"/>
-            <a:ext cx="457199" cy="457292"/>
-          </a:xfrm>
-          <a:prstGeom prst="heptagon">
-            <a:avLst/>
-          </a:prstGeom>
-          <a:solidFill>
-            <a:srgbClr val="FF0000"/>
-          </a:solidFill>
-          <a:ln>
-            <a:noFill/>
-          </a:ln>
-        </p:spPr>
-        <p:style>
-          <a:lnRef idx="2">
-            <a:schemeClr val="accent1">
-              <a:shade val="15000"/>
-            </a:schemeClr>
-          </a:lnRef>
-          <a:fillRef idx="1">
-            <a:schemeClr val="accent1"/>
-          </a:fillRef>
-          <a:effectRef idx="0">
-            <a:schemeClr val="accent1"/>
-          </a:effectRef>
-          <a:fontRef idx="minor">
-            <a:schemeClr val="lt1"/>
-          </a:fontRef>
-        </p:style>
-        <p:txBody>
-          <a:bodyPr rtlCol="0" anchor="ctr"/>
-          <a:lstStyle/>
-          <a:p>
-            <a:pPr algn="ctr"/>
-            <a:r>
-              <a:rPr lang="fr-FR" dirty="0"/>
-              <a:t>5</a:t>
-            </a:r>
-          </a:p>
-        </p:txBody>
-      </p:sp>
-      <p:sp>
-        <p:nvSpPr>
-          <p:cNvPr id="15" name="Heptagone 14">
-            <a:extLst>
-              <a:ext uri="{FF2B5EF4-FFF2-40B4-BE49-F238E27FC236}">
-                <a16:creationId xmlns:a16="http://schemas.microsoft.com/office/drawing/2014/main" id="{5376BF6D-4CC8-D31B-C84B-2A7BBB128343}"/>
-              </a:ext>
-            </a:extLst>
-          </p:cNvPr>
-          <p:cNvSpPr/>
-          <p:nvPr/>
-        </p:nvSpPr>
-        <p:spPr>
-          <a:xfrm>
-            <a:off x="8110396" y="3200354"/>
-            <a:ext cx="457199" cy="457292"/>
-          </a:xfrm>
-          <a:prstGeom prst="heptagon">
-            <a:avLst/>
-          </a:prstGeom>
-          <a:solidFill>
-            <a:srgbClr val="FF0000"/>
-          </a:solidFill>
-          <a:ln>
-            <a:noFill/>
-          </a:ln>
-        </p:spPr>
-        <p:style>
-          <a:lnRef idx="2">
-            <a:schemeClr val="accent1">
-              <a:shade val="15000"/>
-            </a:schemeClr>
-          </a:lnRef>
-          <a:fillRef idx="1">
-            <a:schemeClr val="accent1"/>
-          </a:fillRef>
-          <a:effectRef idx="0">
-            <a:schemeClr val="accent1"/>
-          </a:effectRef>
-          <a:fontRef idx="minor">
-            <a:schemeClr val="lt1"/>
-          </a:fontRef>
-        </p:style>
-        <p:txBody>
-          <a:bodyPr rtlCol="0" anchor="ctr"/>
-          <a:lstStyle/>
-          <a:p>
-            <a:pPr algn="ctr"/>
-            <a:r>
-              <a:rPr lang="fr-FR" dirty="0"/>
-              <a:t>6</a:t>
-            </a:r>
-          </a:p>
-        </p:txBody>
-      </p:sp>
-      <p:cxnSp>
-        <p:nvCxnSpPr>
-          <p:cNvPr id="16" name="Connecteur droit avec flèche 15">
-            <a:extLst>
-              <a:ext uri="{FF2B5EF4-FFF2-40B4-BE49-F238E27FC236}">
-                <a16:creationId xmlns:a16="http://schemas.microsoft.com/office/drawing/2014/main" id="{3965F2B3-7DEA-1FC7-128A-C5FD0398B6EA}"/>
-              </a:ext>
-            </a:extLst>
-          </p:cNvPr>
-          <p:cNvCxnSpPr>
-            <a:cxnSpLocks/>
-            <a:stCxn id="20" idx="0"/>
-          </p:cNvCxnSpPr>
-          <p:nvPr/>
-        </p:nvCxnSpPr>
-        <p:spPr>
-          <a:xfrm flipV="1">
-            <a:off x="8808601" y="5283200"/>
-            <a:ext cx="695385" cy="340060"/>
-          </a:xfrm>
-          <a:prstGeom prst="straightConnector1">
-            <a:avLst/>
-          </a:prstGeom>
-          <a:ln w="19050">
-            <a:solidFill>
-              <a:srgbClr val="FF0000"/>
-            </a:solidFill>
-            <a:tailEnd type="triangle"/>
-          </a:ln>
-        </p:spPr>
-        <p:style>
-          <a:lnRef idx="1">
-            <a:schemeClr val="accent1"/>
-          </a:lnRef>
-          <a:fillRef idx="0">
-            <a:schemeClr val="accent1"/>
-          </a:fillRef>
-          <a:effectRef idx="0">
-            <a:schemeClr val="accent1"/>
-          </a:effectRef>
-          <a:fontRef idx="minor">
-            <a:schemeClr val="tx1"/>
-          </a:fontRef>
-        </p:style>
-      </p:cxnSp>
-      <p:sp>
-        <p:nvSpPr>
-          <p:cNvPr id="20" name="ZoneTexte 19">
-            <a:extLst>
-              <a:ext uri="{FF2B5EF4-FFF2-40B4-BE49-F238E27FC236}">
-                <a16:creationId xmlns:a16="http://schemas.microsoft.com/office/drawing/2014/main" id="{CA380CEC-C565-F558-CFA9-7D991655148E}"/>
-              </a:ext>
-            </a:extLst>
-          </p:cNvPr>
-          <p:cNvSpPr txBox="1"/>
-          <p:nvPr/>
-        </p:nvSpPr>
-        <p:spPr>
-          <a:xfrm>
-            <a:off x="8267756" y="5623260"/>
-            <a:ext cx="1081690" cy="307777"/>
-          </a:xfrm>
-          <a:prstGeom prst="rect">
-            <a:avLst/>
-          </a:prstGeom>
-          <a:solidFill>
-            <a:srgbClr val="FFFF00"/>
-          </a:solidFill>
-          <a:ln w="19050">
-            <a:solidFill>
-              <a:srgbClr val="FF0000"/>
-            </a:solidFill>
-          </a:ln>
-        </p:spPr>
-        <p:txBody>
-          <a:bodyPr wrap="square" rtlCol="0">
-            <a:spAutoFit/>
-          </a:bodyPr>
-          <a:lstStyle/>
-          <a:p>
-            <a:r>
-              <a:rPr lang="fr-FR" sz="1400" dirty="0">
-                <a:solidFill>
-                  <a:srgbClr val="FF0000"/>
-                </a:solidFill>
-              </a:rPr>
-              <a:t>URL RAW</a:t>
-            </a:r>
-          </a:p>
-        </p:txBody>
-      </p:sp>
-      <p:sp>
-        <p:nvSpPr>
-          <p:cNvPr id="24" name="ZoneTexte 23">
-            <a:extLst>
-              <a:ext uri="{FF2B5EF4-FFF2-40B4-BE49-F238E27FC236}">
-                <a16:creationId xmlns:a16="http://schemas.microsoft.com/office/drawing/2014/main" id="{305CFE7D-5AE1-26CF-31CF-37BA3930257D}"/>
-              </a:ext>
-            </a:extLst>
-          </p:cNvPr>
-          <p:cNvSpPr txBox="1"/>
-          <p:nvPr/>
-        </p:nvSpPr>
-        <p:spPr>
-          <a:xfrm>
-            <a:off x="664675" y="6218195"/>
-            <a:ext cx="1153965" cy="307777"/>
-          </a:xfrm>
-          <a:prstGeom prst="rect">
-            <a:avLst/>
-          </a:prstGeom>
-          <a:solidFill>
-            <a:schemeClr val="bg1"/>
-          </a:solidFill>
-          <a:ln w="19050">
-            <a:solidFill>
-              <a:srgbClr val="FF0000"/>
-            </a:solidFill>
-          </a:ln>
-        </p:spPr>
-        <p:txBody>
-          <a:bodyPr wrap="square" rtlCol="0">
-            <a:spAutoFit/>
-          </a:bodyPr>
-          <a:lstStyle/>
-          <a:p>
-            <a:r>
-              <a:rPr lang="fr-FR" sz="1400" dirty="0"/>
-              <a:t>Schéma </a:t>
-            </a:r>
-            <a:r>
-              <a:rPr lang="fr-FR" sz="1400" dirty="0" err="1"/>
-              <a:t>raw</a:t>
-            </a:r>
-            <a:endParaRPr lang="fr-FR" sz="1400" dirty="0"/>
-          </a:p>
-        </p:txBody>
-      </p:sp>
+      </p:pic>
     </p:spTree>
     <p:extLst>
       <p:ext uri="{BB962C8B-B14F-4D97-AF65-F5344CB8AC3E}">
-        <p14:creationId xmlns:p14="http://schemas.microsoft.com/office/powerpoint/2010/main" val="2312549476"/>
+        <p14:creationId xmlns:p14="http://schemas.microsoft.com/office/powerpoint/2010/main" val="2802061433"/>
       </p:ext>
     </p:extLst>
   </p:cSld>
